--- a/Documentation/TUG_VECTO_Engine_Manual.pptx
+++ b/Documentation/TUG_VECTO_Engine_Manual.pptx
@@ -148,6 +148,22 @@
       </a:defRPr>
     </a:lvl9pPr>
   </p:defaultTextStyle>
+  <p:extLst>
+    <p:ext uri="{EFAFB233-063F-42B5-8137-9DF3F51BA10A}">
+      <p15:sldGuideLst xmlns:p15="http://schemas.microsoft.com/office/powerpoint/2012/main">
+        <p15:guide id="1" orient="horz" pos="2160">
+          <p15:clr>
+            <a:srgbClr val="A4A3A4"/>
+          </p15:clr>
+        </p15:guide>
+        <p15:guide id="2" pos="2880">
+          <p15:clr>
+            <a:srgbClr val="A4A3A4"/>
+          </p15:clr>
+        </p15:guide>
+      </p15:sldGuideLst>
+    </p:ext>
+  </p:extLst>
 </p:presentation>
 </file>
 
@@ -3598,238 +3614,6 @@
       </p:grpSpPr>
       <p:sp>
         <p:nvSpPr>
-          <p:cNvPr id="1026" name="Line 20"/>
-          <p:cNvSpPr>
-            <a:spLocks noChangeShapeType="1"/>
-          </p:cNvSpPr>
-          <p:nvPr/>
-        </p:nvSpPr>
-        <p:spPr bwMode="auto">
-          <a:xfrm>
-            <a:off x="0" y="415925"/>
-            <a:ext cx="9144000" cy="0"/>
-          </a:xfrm>
-          <a:prstGeom prst="line">
-            <a:avLst/>
-          </a:prstGeom>
-          <a:noFill/>
-          <a:ln w="9525">
-            <a:solidFill>
-              <a:schemeClr val="tx1"/>
-            </a:solidFill>
-            <a:round/>
-            <a:headEnd/>
-            <a:tailEnd/>
-          </a:ln>
-          <a:effectLst/>
-          <a:extLst>
-            <a:ext uri="{909E8E84-426E-40DD-AFC4-6F175D3DCCD1}">
-              <a14:hiddenFill xmlns:a14="http://schemas.microsoft.com/office/drawing/2010/main">
-                <a:noFill/>
-              </a14:hiddenFill>
-            </a:ext>
-            <a:ext uri="{AF507438-7753-43E0-B8FC-AC1667EBCBE1}">
-              <a14:hiddenEffects xmlns:a14="http://schemas.microsoft.com/office/drawing/2010/main">
-                <a:effectLst>
-                  <a:outerShdw dist="35921" dir="2700000" algn="ctr" rotWithShape="0">
-                    <a:schemeClr val="bg2"/>
-                  </a:outerShdw>
-                </a:effectLst>
-              </a14:hiddenEffects>
-            </a:ext>
-          </a:extLst>
-        </p:spPr>
-        <p:txBody>
-          <a:bodyPr/>
-          <a:lstStyle/>
-          <a:p>
-            <a:endParaRPr lang="de-AT"/>
-          </a:p>
-        </p:txBody>
-      </p:sp>
-      <p:sp>
-        <p:nvSpPr>
-          <p:cNvPr id="1027" name="Text Box 21"/>
-          <p:cNvSpPr txBox="1">
-            <a:spLocks noChangeArrowheads="1"/>
-          </p:cNvSpPr>
-          <p:nvPr/>
-        </p:nvSpPr>
-        <p:spPr bwMode="auto">
-          <a:xfrm>
-            <a:off x="781050" y="207963"/>
-            <a:ext cx="5529263" cy="215900"/>
-          </a:xfrm>
-          <a:prstGeom prst="rect">
-            <a:avLst/>
-          </a:prstGeom>
-          <a:noFill/>
-          <a:ln>
-            <a:noFill/>
-          </a:ln>
-          <a:effectLst/>
-          <a:extLst>
-            <a:ext uri="{909E8E84-426E-40DD-AFC4-6F175D3DCCD1}">
-              <a14:hiddenFill xmlns:a14="http://schemas.microsoft.com/office/drawing/2010/main">
-                <a:solidFill>
-                  <a:schemeClr val="accent1"/>
-                </a:solidFill>
-              </a14:hiddenFill>
-            </a:ext>
-            <a:ext uri="{91240B29-F687-4F45-9708-019B960494DF}">
-              <a14:hiddenLine xmlns:a14="http://schemas.microsoft.com/office/drawing/2010/main" w="9525">
-                <a:solidFill>
-                  <a:schemeClr val="tx1"/>
-                </a:solidFill>
-                <a:miter lim="800000"/>
-                <a:headEnd/>
-                <a:tailEnd/>
-              </a14:hiddenLine>
-            </a:ext>
-            <a:ext uri="{AF507438-7753-43E0-B8FC-AC1667EBCBE1}">
-              <a14:hiddenEffects xmlns:a14="http://schemas.microsoft.com/office/drawing/2010/main">
-                <a:effectLst>
-                  <a:outerShdw dist="35921" dir="2700000" algn="ctr" rotWithShape="0">
-                    <a:schemeClr val="bg2"/>
-                  </a:outerShdw>
-                </a:effectLst>
-              </a14:hiddenEffects>
-            </a:ext>
-          </a:extLst>
-        </p:spPr>
-        <p:txBody>
-          <a:bodyPr wrap="none" lIns="90000" anchor="ctr"/>
-          <a:lstStyle>
-            <a:lvl1pPr eaLnBrk="0" hangingPunct="0">
-              <a:spcBef>
-                <a:spcPct val="30000"/>
-              </a:spcBef>
-              <a:defRPr sz="2000" b="1">
-                <a:solidFill>
-                  <a:schemeClr val="tx1"/>
-                </a:solidFill>
-                <a:latin typeface="Arial" charset="0"/>
-              </a:defRPr>
-            </a:lvl1pPr>
-            <a:lvl2pPr marL="742950" indent="-285750" eaLnBrk="0" hangingPunct="0">
-              <a:spcBef>
-                <a:spcPct val="30000"/>
-              </a:spcBef>
-              <a:defRPr sz="2000" b="1">
-                <a:solidFill>
-                  <a:schemeClr val="tx1"/>
-                </a:solidFill>
-                <a:latin typeface="Arial" charset="0"/>
-              </a:defRPr>
-            </a:lvl2pPr>
-            <a:lvl3pPr marL="1143000" indent="-228600" eaLnBrk="0" hangingPunct="0">
-              <a:spcBef>
-                <a:spcPct val="30000"/>
-              </a:spcBef>
-              <a:defRPr sz="2000" b="1">
-                <a:solidFill>
-                  <a:schemeClr val="tx1"/>
-                </a:solidFill>
-                <a:latin typeface="Arial" charset="0"/>
-              </a:defRPr>
-            </a:lvl3pPr>
-            <a:lvl4pPr marL="1600200" indent="-228600" eaLnBrk="0" hangingPunct="0">
-              <a:spcBef>
-                <a:spcPct val="30000"/>
-              </a:spcBef>
-              <a:defRPr sz="2000" b="1">
-                <a:solidFill>
-                  <a:schemeClr val="tx1"/>
-                </a:solidFill>
-                <a:latin typeface="Arial" charset="0"/>
-              </a:defRPr>
-            </a:lvl4pPr>
-            <a:lvl5pPr marL="2057400" indent="-228600" eaLnBrk="0" hangingPunct="0">
-              <a:spcBef>
-                <a:spcPct val="30000"/>
-              </a:spcBef>
-              <a:defRPr sz="2000" b="1">
-                <a:solidFill>
-                  <a:schemeClr val="tx1"/>
-                </a:solidFill>
-                <a:latin typeface="Arial" charset="0"/>
-              </a:defRPr>
-            </a:lvl5pPr>
-            <a:lvl6pPr marL="2514600" indent="-228600" algn="ctr" eaLnBrk="0" fontAlgn="base" hangingPunct="0">
-              <a:spcBef>
-                <a:spcPct val="30000"/>
-              </a:spcBef>
-              <a:spcAft>
-                <a:spcPct val="0"/>
-              </a:spcAft>
-              <a:defRPr sz="2000" b="1">
-                <a:solidFill>
-                  <a:schemeClr val="tx1"/>
-                </a:solidFill>
-                <a:latin typeface="Arial" charset="0"/>
-              </a:defRPr>
-            </a:lvl6pPr>
-            <a:lvl7pPr marL="2971800" indent="-228600" algn="ctr" eaLnBrk="0" fontAlgn="base" hangingPunct="0">
-              <a:spcBef>
-                <a:spcPct val="30000"/>
-              </a:spcBef>
-              <a:spcAft>
-                <a:spcPct val="0"/>
-              </a:spcAft>
-              <a:defRPr sz="2000" b="1">
-                <a:solidFill>
-                  <a:schemeClr val="tx1"/>
-                </a:solidFill>
-                <a:latin typeface="Arial" charset="0"/>
-              </a:defRPr>
-            </a:lvl7pPr>
-            <a:lvl8pPr marL="3429000" indent="-228600" algn="ctr" eaLnBrk="0" fontAlgn="base" hangingPunct="0">
-              <a:spcBef>
-                <a:spcPct val="30000"/>
-              </a:spcBef>
-              <a:spcAft>
-                <a:spcPct val="0"/>
-              </a:spcAft>
-              <a:defRPr sz="2000" b="1">
-                <a:solidFill>
-                  <a:schemeClr val="tx1"/>
-                </a:solidFill>
-                <a:latin typeface="Arial" charset="0"/>
-              </a:defRPr>
-            </a:lvl8pPr>
-            <a:lvl9pPr marL="3886200" indent="-228600" algn="ctr" eaLnBrk="0" fontAlgn="base" hangingPunct="0">
-              <a:spcBef>
-                <a:spcPct val="30000"/>
-              </a:spcBef>
-              <a:spcAft>
-                <a:spcPct val="0"/>
-              </a:spcAft>
-              <a:defRPr sz="2000" b="1">
-                <a:solidFill>
-                  <a:schemeClr val="tx1"/>
-                </a:solidFill>
-                <a:latin typeface="Arial" charset="0"/>
-              </a:defRPr>
-            </a:lvl9pPr>
-          </a:lstStyle>
-          <a:p>
-            <a:pPr algn="l" eaLnBrk="1" hangingPunct="1">
-              <a:spcBef>
-                <a:spcPct val="50000"/>
-              </a:spcBef>
-              <a:defRPr/>
-            </a:pPr>
-            <a:r>
-              <a:rPr lang="en-US" sz="1000" smtClean="0">
-                <a:latin typeface="Verdana" pitchFamily="34" charset="0"/>
-              </a:rPr>
-              <a:t>Institute of Internal Combustion Engines and Thermodynamics</a:t>
-            </a:r>
-          </a:p>
-        </p:txBody>
-      </p:sp>
-      <p:sp>
-        <p:nvSpPr>
           <p:cNvPr id="1028" name="Rectangle 22"/>
           <p:cNvSpPr>
             <a:spLocks noGrp="1" noChangeArrowheads="1"/>
@@ -4207,9 +3991,7 @@
             <a:srgbClr val="DDDDDD"/>
           </a:solidFill>
           <a:ln w="6350">
-            <a:solidFill>
-              <a:schemeClr val="tx1"/>
-            </a:solidFill>
+            <a:noFill/>
             <a:miter lim="800000"/>
             <a:headEnd/>
             <a:tailEnd/>
@@ -4239,172 +4021,6 @@
             <a:endParaRPr lang="en-GB" sz="1200">
               <a:latin typeface="Verdana" pitchFamily="34" charset="0"/>
             </a:endParaRPr>
-          </a:p>
-        </p:txBody>
-      </p:sp>
-      <p:pic>
-        <p:nvPicPr>
-          <p:cNvPr id="1032" name="Picture 26" descr="logo"/>
-          <p:cNvPicPr>
-            <a:picLocks noChangeAspect="1" noChangeArrowheads="1"/>
-          </p:cNvPicPr>
-          <p:nvPr/>
-        </p:nvPicPr>
-        <p:blipFill>
-          <a:blip r:embed="rId15" cstate="print">
-            <a:extLst>
-              <a:ext uri="{28A0092B-C50C-407E-A947-70E740481C1C}">
-                <a14:useLocalDpi xmlns:a14="http://schemas.microsoft.com/office/drawing/2010/main" val="0"/>
-              </a:ext>
-            </a:extLst>
-          </a:blip>
-          <a:srcRect/>
-          <a:stretch>
-            <a:fillRect/>
-          </a:stretch>
-        </p:blipFill>
-        <p:spPr bwMode="auto">
-          <a:xfrm>
-            <a:off x="7947025" y="50800"/>
-            <a:ext cx="868363" cy="319088"/>
-          </a:xfrm>
-          <a:prstGeom prst="rect">
-            <a:avLst/>
-          </a:prstGeom>
-          <a:noFill/>
-          <a:ln>
-            <a:noFill/>
-          </a:ln>
-          <a:extLst>
-            <a:ext uri="{909E8E84-426E-40DD-AFC4-6F175D3DCCD1}">
-              <a14:hiddenFill xmlns:a14="http://schemas.microsoft.com/office/drawing/2010/main">
-                <a:solidFill>
-                  <a:srgbClr val="FFFFFF"/>
-                </a:solidFill>
-              </a14:hiddenFill>
-            </a:ext>
-            <a:ext uri="{91240B29-F687-4F45-9708-019B960494DF}">
-              <a14:hiddenLine xmlns:a14="http://schemas.microsoft.com/office/drawing/2010/main" w="9525">
-                <a:solidFill>
-                  <a:srgbClr val="000000"/>
-                </a:solidFill>
-                <a:miter lim="800000"/>
-                <a:headEnd/>
-                <a:tailEnd/>
-              </a14:hiddenLine>
-            </a:ext>
-          </a:extLst>
-        </p:spPr>
-      </p:pic>
-      <p:pic>
-        <p:nvPicPr>
-          <p:cNvPr id="1033" name="Picture 27" descr="IVT_Logo_klein"/>
-          <p:cNvPicPr>
-            <a:picLocks noChangeAspect="1" noChangeArrowheads="1"/>
-          </p:cNvPicPr>
-          <p:nvPr/>
-        </p:nvPicPr>
-        <p:blipFill>
-          <a:blip r:embed="rId16">
-            <a:extLst>
-              <a:ext uri="{28A0092B-C50C-407E-A947-70E740481C1C}">
-                <a14:useLocalDpi xmlns:a14="http://schemas.microsoft.com/office/drawing/2010/main" val="0"/>
-              </a:ext>
-            </a:extLst>
-          </a:blip>
-          <a:srcRect/>
-          <a:stretch>
-            <a:fillRect/>
-          </a:stretch>
-        </p:blipFill>
-        <p:spPr bwMode="auto">
-          <a:xfrm>
-            <a:off x="368300" y="149225"/>
-            <a:ext cx="449263" cy="215900"/>
-          </a:xfrm>
-          <a:prstGeom prst="rect">
-            <a:avLst/>
-          </a:prstGeom>
-          <a:noFill/>
-          <a:ln>
-            <a:noFill/>
-          </a:ln>
-          <a:extLst>
-            <a:ext uri="{909E8E84-426E-40DD-AFC4-6F175D3DCCD1}">
-              <a14:hiddenFill xmlns:a14="http://schemas.microsoft.com/office/drawing/2010/main">
-                <a:solidFill>
-                  <a:srgbClr val="FFFFFF"/>
-                </a:solidFill>
-              </a14:hiddenFill>
-            </a:ext>
-            <a:ext uri="{91240B29-F687-4F45-9708-019B960494DF}">
-              <a14:hiddenLine xmlns:a14="http://schemas.microsoft.com/office/drawing/2010/main" w="9525">
-                <a:solidFill>
-                  <a:srgbClr val="000000"/>
-                </a:solidFill>
-                <a:miter lim="800000"/>
-                <a:headEnd/>
-                <a:tailEnd/>
-              </a14:hiddenLine>
-            </a:ext>
-          </a:extLst>
-        </p:spPr>
-      </p:pic>
-      <p:sp>
-        <p:nvSpPr>
-          <p:cNvPr id="1035" name="Rectangle 29"/>
-          <p:cNvSpPr>
-            <a:spLocks noChangeAspect="1" noChangeArrowheads="1"/>
-          </p:cNvSpPr>
-          <p:nvPr/>
-        </p:nvSpPr>
-        <p:spPr bwMode="auto">
-          <a:xfrm>
-            <a:off x="0" y="6373813"/>
-            <a:ext cx="215900" cy="214312"/>
-          </a:xfrm>
-          <a:prstGeom prst="rect">
-            <a:avLst/>
-          </a:prstGeom>
-          <a:solidFill>
-            <a:srgbClr val="F70146"/>
-          </a:solidFill>
-          <a:ln>
-            <a:noFill/>
-          </a:ln>
-          <a:effectLst/>
-          <a:extLst>
-            <a:ext uri="{91240B29-F687-4F45-9708-019B960494DF}">
-              <a14:hiddenLine xmlns:a14="http://schemas.microsoft.com/office/drawing/2010/main" w="9525">
-                <a:solidFill>
-                  <a:schemeClr val="tx1"/>
-                </a:solidFill>
-                <a:miter lim="800000"/>
-                <a:headEnd/>
-                <a:tailEnd/>
-              </a14:hiddenLine>
-            </a:ext>
-            <a:ext uri="{AF507438-7753-43E0-B8FC-AC1667EBCBE1}">
-              <a14:hiddenEffects xmlns:a14="http://schemas.microsoft.com/office/drawing/2010/main">
-                <a:effectLst>
-                  <a:outerShdw dist="35921" dir="2700000" algn="ctr" rotWithShape="0">
-                    <a:schemeClr val="bg2"/>
-                  </a:outerShdw>
-                </a:effectLst>
-              </a14:hiddenEffects>
-            </a:ext>
-          </a:extLst>
-        </p:spPr>
-        <p:txBody>
-          <a:bodyPr wrap="none" anchor="ctr"/>
-          <a:lstStyle/>
-          <a:p>
-            <a:pPr>
-              <a:spcBef>
-                <a:spcPct val="30000"/>
-              </a:spcBef>
-            </a:pPr>
-            <a:endParaRPr lang="en-GB" sz="2000"/>
           </a:p>
         </p:txBody>
       </p:sp>
@@ -4601,187 +4217,36 @@
           </a:p>
         </p:txBody>
       </p:sp>
-      <p:sp>
-        <p:nvSpPr>
-          <p:cNvPr id="1038" name="Text Box 32"/>
-          <p:cNvSpPr txBox="1">
-            <a:spLocks noChangeArrowheads="1"/>
-          </p:cNvSpPr>
-          <p:nvPr/>
-        </p:nvSpPr>
-        <p:spPr bwMode="auto">
+      <p:pic>
+        <p:nvPicPr>
+          <p:cNvPr id="3" name="Grafik 2"/>
+          <p:cNvPicPr>
+            <a:picLocks noChangeAspect="1"/>
+          </p:cNvPicPr>
+          <p:nvPr userDrawn="1"/>
+        </p:nvPicPr>
+        <p:blipFill>
+          <a:blip r:embed="rId15">
+            <a:extLst>
+              <a:ext uri="{28A0092B-C50C-407E-A947-70E740481C1C}">
+                <a14:useLocalDpi xmlns:a14="http://schemas.microsoft.com/office/drawing/2010/main" val="0"/>
+              </a:ext>
+            </a:extLst>
+          </a:blip>
+          <a:stretch>
+            <a:fillRect/>
+          </a:stretch>
+        </p:blipFill>
+        <p:spPr>
           <a:xfrm>
-            <a:off x="266700" y="6383338"/>
-            <a:ext cx="2936875" cy="215900"/>
+            <a:off x="7164288" y="89807"/>
+            <a:ext cx="1979712" cy="491636"/>
           </a:xfrm>
           <a:prstGeom prst="rect">
             <a:avLst/>
           </a:prstGeom>
-          <a:noFill/>
-          <a:ln>
-            <a:noFill/>
-          </a:ln>
-          <a:effectLst/>
-          <a:extLst>
-            <a:ext uri="{909E8E84-426E-40DD-AFC4-6F175D3DCCD1}">
-              <a14:hiddenFill xmlns:a14="http://schemas.microsoft.com/office/drawing/2010/main">
-                <a:solidFill>
-                  <a:schemeClr val="accent1"/>
-                </a:solidFill>
-              </a14:hiddenFill>
-            </a:ext>
-            <a:ext uri="{91240B29-F687-4F45-9708-019B960494DF}">
-              <a14:hiddenLine xmlns:a14="http://schemas.microsoft.com/office/drawing/2010/main" w="9525">
-                <a:solidFill>
-                  <a:schemeClr val="tx1"/>
-                </a:solidFill>
-                <a:miter lim="800000"/>
-                <a:headEnd/>
-                <a:tailEnd/>
-              </a14:hiddenLine>
-            </a:ext>
-            <a:ext uri="{AF507438-7753-43E0-B8FC-AC1667EBCBE1}">
-              <a14:hiddenEffects xmlns:a14="http://schemas.microsoft.com/office/drawing/2010/main">
-                <a:effectLst>
-                  <a:outerShdw dist="35921" dir="2700000" algn="ctr" rotWithShape="0">
-                    <a:schemeClr val="bg2"/>
-                  </a:outerShdw>
-                </a:effectLst>
-              </a14:hiddenEffects>
-            </a:ext>
-          </a:extLst>
         </p:spPr>
-        <p:txBody>
-          <a:bodyPr wrap="none" tIns="39600" anchor="ctr"/>
-          <a:lstStyle>
-            <a:lvl1pPr eaLnBrk="0" hangingPunct="0">
-              <a:spcBef>
-                <a:spcPct val="30000"/>
-              </a:spcBef>
-              <a:defRPr sz="2000" b="1">
-                <a:solidFill>
-                  <a:schemeClr val="tx1"/>
-                </a:solidFill>
-                <a:latin typeface="Arial" charset="0"/>
-              </a:defRPr>
-            </a:lvl1pPr>
-            <a:lvl2pPr marL="742950" indent="-285750" eaLnBrk="0" hangingPunct="0">
-              <a:spcBef>
-                <a:spcPct val="30000"/>
-              </a:spcBef>
-              <a:defRPr sz="2000" b="1">
-                <a:solidFill>
-                  <a:schemeClr val="tx1"/>
-                </a:solidFill>
-                <a:latin typeface="Arial" charset="0"/>
-              </a:defRPr>
-            </a:lvl2pPr>
-            <a:lvl3pPr marL="1143000" indent="-228600" eaLnBrk="0" hangingPunct="0">
-              <a:spcBef>
-                <a:spcPct val="30000"/>
-              </a:spcBef>
-              <a:defRPr sz="2000" b="1">
-                <a:solidFill>
-                  <a:schemeClr val="tx1"/>
-                </a:solidFill>
-                <a:latin typeface="Arial" charset="0"/>
-              </a:defRPr>
-            </a:lvl3pPr>
-            <a:lvl4pPr marL="1600200" indent="-228600" eaLnBrk="0" hangingPunct="0">
-              <a:spcBef>
-                <a:spcPct val="30000"/>
-              </a:spcBef>
-              <a:defRPr sz="2000" b="1">
-                <a:solidFill>
-                  <a:schemeClr val="tx1"/>
-                </a:solidFill>
-                <a:latin typeface="Arial" charset="0"/>
-              </a:defRPr>
-            </a:lvl4pPr>
-            <a:lvl5pPr marL="2057400" indent="-228600" eaLnBrk="0" hangingPunct="0">
-              <a:spcBef>
-                <a:spcPct val="30000"/>
-              </a:spcBef>
-              <a:defRPr sz="2000" b="1">
-                <a:solidFill>
-                  <a:schemeClr val="tx1"/>
-                </a:solidFill>
-                <a:latin typeface="Arial" charset="0"/>
-              </a:defRPr>
-            </a:lvl5pPr>
-            <a:lvl6pPr marL="2514600" indent="-228600" algn="ctr" eaLnBrk="0" fontAlgn="base" hangingPunct="0">
-              <a:spcBef>
-                <a:spcPct val="30000"/>
-              </a:spcBef>
-              <a:spcAft>
-                <a:spcPct val="0"/>
-              </a:spcAft>
-              <a:defRPr sz="2000" b="1">
-                <a:solidFill>
-                  <a:schemeClr val="tx1"/>
-                </a:solidFill>
-                <a:latin typeface="Arial" charset="0"/>
-              </a:defRPr>
-            </a:lvl6pPr>
-            <a:lvl7pPr marL="2971800" indent="-228600" algn="ctr" eaLnBrk="0" fontAlgn="base" hangingPunct="0">
-              <a:spcBef>
-                <a:spcPct val="30000"/>
-              </a:spcBef>
-              <a:spcAft>
-                <a:spcPct val="0"/>
-              </a:spcAft>
-              <a:defRPr sz="2000" b="1">
-                <a:solidFill>
-                  <a:schemeClr val="tx1"/>
-                </a:solidFill>
-                <a:latin typeface="Arial" charset="0"/>
-              </a:defRPr>
-            </a:lvl7pPr>
-            <a:lvl8pPr marL="3429000" indent="-228600" algn="ctr" eaLnBrk="0" fontAlgn="base" hangingPunct="0">
-              <a:spcBef>
-                <a:spcPct val="30000"/>
-              </a:spcBef>
-              <a:spcAft>
-                <a:spcPct val="0"/>
-              </a:spcAft>
-              <a:defRPr sz="2000" b="1">
-                <a:solidFill>
-                  <a:schemeClr val="tx1"/>
-                </a:solidFill>
-                <a:latin typeface="Arial" charset="0"/>
-              </a:defRPr>
-            </a:lvl8pPr>
-            <a:lvl9pPr marL="3886200" indent="-228600" algn="ctr" eaLnBrk="0" fontAlgn="base" hangingPunct="0">
-              <a:spcBef>
-                <a:spcPct val="30000"/>
-              </a:spcBef>
-              <a:spcAft>
-                <a:spcPct val="0"/>
-              </a:spcAft>
-              <a:defRPr sz="2000" b="1">
-                <a:solidFill>
-                  <a:schemeClr val="tx1"/>
-                </a:solidFill>
-                <a:latin typeface="Arial" charset="0"/>
-              </a:defRPr>
-            </a:lvl9pPr>
-          </a:lstStyle>
-          <a:p>
-            <a:pPr algn="l" eaLnBrk="1" hangingPunct="1">
-              <a:spcBef>
-                <a:spcPct val="0"/>
-              </a:spcBef>
-              <a:defRPr/>
-            </a:pPr>
-            <a:r>
-              <a:rPr lang="en-GB" sz="1100" b="0" dirty="0" smtClean="0">
-                <a:latin typeface="Verdana" pitchFamily="34" charset="0"/>
-              </a:rPr>
-              <a:t>IVT-EM</a:t>
-            </a:r>
-          </a:p>
-        </p:txBody>
-      </p:sp>
+      </p:pic>
     </p:spTree>
   </p:cSld>
   <p:clrMap bg1="lt1" tx1="dk1" bg2="lt2" tx2="dk2" accent1="accent1" accent2="accent2" accent3="accent3" accent4="accent4" accent5="accent5" accent6="accent6" hlink="hlink" folHlink="folHlink"/>
@@ -5233,11 +4698,7 @@
             </a:r>
             <a:r>
               <a:rPr lang="en-US" sz="2800" smtClean="0"/>
-              <a:t>user </a:t>
-            </a:r>
-            <a:r>
-              <a:rPr lang="en-US" sz="2800" smtClean="0"/>
-              <a:t>manual</a:t>
+              <a:t>user manual</a:t>
             </a:r>
             <a:endParaRPr lang="en-US" sz="2800" dirty="0"/>
           </a:p>
@@ -5276,8 +4737,17 @@
               <a:rPr lang="en-US" sz="2400" dirty="0" smtClean="0">
                 <a:sym typeface="Wingdings" panose="05000000000000000000" pitchFamily="2" charset="2"/>
               </a:rPr>
-              <a:t>App Version 1.4</a:t>
-            </a:r>
+              <a:t>App Version </a:t>
+            </a:r>
+            <a:r>
+              <a:rPr lang="en-US" sz="2400" dirty="0" smtClean="0">
+                <a:sym typeface="Wingdings" panose="05000000000000000000" pitchFamily="2" charset="2"/>
+              </a:rPr>
+              <a:t>1.4.4</a:t>
+            </a:r>
+            <a:endParaRPr lang="en-US" sz="2400" dirty="0" smtClean="0">
+              <a:sym typeface="Wingdings" panose="05000000000000000000" pitchFamily="2" charset="2"/>
+            </a:endParaRPr>
           </a:p>
           <a:p>
             <a:pPr>
@@ -5289,10 +4759,10 @@
               </a:spcAft>
             </a:pPr>
             <a:r>
-              <a:rPr lang="en-US" sz="1800" smtClean="0">
-                <a:sym typeface="Wingdings" panose="05000000000000000000" pitchFamily="2" charset="2"/>
-              </a:rPr>
-              <a:t>10.08.2017</a:t>
+              <a:rPr lang="en-US" sz="1800" dirty="0" smtClean="0">
+                <a:sym typeface="Wingdings" panose="05000000000000000000" pitchFamily="2" charset="2"/>
+              </a:rPr>
+              <a:t>20.12.2018</a:t>
             </a:r>
             <a:endParaRPr lang="en-US" sz="1800" dirty="0" smtClean="0">
               <a:sym typeface="Wingdings" panose="05000000000000000000" pitchFamily="2" charset="2"/>

--- a/Documentation/TUG_VECTO_Engine_Manual.pptx
+++ b/Documentation/TUG_VECTO_Engine_Manual.pptx
@@ -5,21 +5,24 @@
     <p:sldMasterId id="2147483648" r:id="rId1"/>
   </p:sldMasterIdLst>
   <p:notesMasterIdLst>
-    <p:notesMasterId r:id="rId11"/>
+    <p:notesMasterId r:id="rId14"/>
   </p:notesMasterIdLst>
   <p:handoutMasterIdLst>
-    <p:handoutMasterId r:id="rId12"/>
+    <p:handoutMasterId r:id="rId15"/>
   </p:handoutMasterIdLst>
   <p:sldIdLst>
     <p:sldId id="497" r:id="rId2"/>
     <p:sldId id="546" r:id="rId3"/>
-    <p:sldId id="578" r:id="rId4"/>
-    <p:sldId id="579" r:id="rId5"/>
-    <p:sldId id="580" r:id="rId6"/>
-    <p:sldId id="581" r:id="rId7"/>
-    <p:sldId id="583" r:id="rId8"/>
-    <p:sldId id="584" r:id="rId9"/>
-    <p:sldId id="582" r:id="rId10"/>
+    <p:sldId id="585" r:id="rId4"/>
+    <p:sldId id="578" r:id="rId5"/>
+    <p:sldId id="579" r:id="rId6"/>
+    <p:sldId id="580" r:id="rId7"/>
+    <p:sldId id="586" r:id="rId8"/>
+    <p:sldId id="587" r:id="rId9"/>
+    <p:sldId id="588" r:id="rId10"/>
+    <p:sldId id="589" r:id="rId11"/>
+    <p:sldId id="590" r:id="rId12"/>
+    <p:sldId id="582" r:id="rId13"/>
   </p:sldIdLst>
   <p:sldSz cx="9144000" cy="6858000" type="screen4x3"/>
   <p:notesSz cx="7104063" cy="10234613"/>
@@ -1226,6 +1229,108 @@
 </p:notes>
 </file>
 
+<file path=ppt/notesSlides/notesSlide10.xml><?xml version="1.0" encoding="utf-8"?>
+<p:notes xmlns:a="http://schemas.openxmlformats.org/drawingml/2006/main" xmlns:r="http://schemas.openxmlformats.org/officeDocument/2006/relationships" xmlns:p="http://schemas.openxmlformats.org/presentationml/2006/main">
+  <p:cSld>
+    <p:spTree>
+      <p:nvGrpSpPr>
+        <p:cNvPr id="1" name=""/>
+        <p:cNvGrpSpPr/>
+        <p:nvPr/>
+      </p:nvGrpSpPr>
+      <p:grpSpPr>
+        <a:xfrm>
+          <a:off x="0" y="0"/>
+          <a:ext cx="0" cy="0"/>
+          <a:chOff x="0" y="0"/>
+          <a:chExt cx="0" cy="0"/>
+        </a:xfrm>
+      </p:grpSpPr>
+      <p:sp>
+        <p:nvSpPr>
+          <p:cNvPr id="2" name="Folienbildplatzhalter 1"/>
+          <p:cNvSpPr>
+            <a:spLocks noGrp="1" noRot="1" noChangeAspect="1"/>
+          </p:cNvSpPr>
+          <p:nvPr>
+            <p:ph type="sldImg"/>
+          </p:nvPr>
+        </p:nvSpPr>
+        <p:spPr/>
+      </p:sp>
+      <p:sp>
+        <p:nvSpPr>
+          <p:cNvPr id="3" name="Notizenplatzhalter 2"/>
+          <p:cNvSpPr>
+            <a:spLocks noGrp="1"/>
+          </p:cNvSpPr>
+          <p:nvPr>
+            <p:ph type="body" idx="1"/>
+          </p:nvPr>
+        </p:nvSpPr>
+        <p:spPr/>
+        <p:txBody>
+          <a:bodyPr/>
+          <a:lstStyle/>
+          <a:p>
+            <a:r>
+              <a:rPr lang="en-US" smtClean="0"/>
+              <a:t>Example for warnings:</a:t>
+            </a:r>
+          </a:p>
+          <a:p>
+            <a:r>
+              <a:rPr lang="en-US" smtClean="0"/>
+              <a:t>Significant drop</a:t>
+            </a:r>
+            <a:r>
+              <a:rPr lang="en-US" baseline="0" smtClean="0"/>
+              <a:t> of torque in fld recording (might be not reasonable at low speeds, might be reasonable at n&gt;hi) </a:t>
+            </a:r>
+            <a:endParaRPr lang="en-US" dirty="0" smtClean="0"/>
+          </a:p>
+          <a:p>
+            <a:endParaRPr lang="en-US" dirty="0" smtClean="0"/>
+          </a:p>
+        </p:txBody>
+      </p:sp>
+      <p:sp>
+        <p:nvSpPr>
+          <p:cNvPr id="4" name="Foliennummernplatzhalter 3"/>
+          <p:cNvSpPr>
+            <a:spLocks noGrp="1"/>
+          </p:cNvSpPr>
+          <p:nvPr>
+            <p:ph type="sldNum" sz="quarter" idx="10"/>
+          </p:nvPr>
+        </p:nvSpPr>
+        <p:spPr/>
+        <p:txBody>
+          <a:bodyPr/>
+          <a:lstStyle/>
+          <a:p>
+            <a:fld id="{220961ED-B8B5-4C64-9727-6F12A830C91B}" type="slidenum">
+              <a:rPr lang="en-GB" altLang="en-US" smtClean="0"/>
+              <a:pPr/>
+              <a:t>11</a:t>
+            </a:fld>
+            <a:endParaRPr lang="en-GB" altLang="en-US"/>
+          </a:p>
+        </p:txBody>
+      </p:sp>
+    </p:spTree>
+    <p:extLst>
+      <p:ext uri="{BB962C8B-B14F-4D97-AF65-F5344CB8AC3E}">
+        <p14:creationId xmlns:p14="http://schemas.microsoft.com/office/powerpoint/2010/main" val="2705255660"/>
+      </p:ext>
+    </p:extLst>
+  </p:cSld>
+  <p:clrMapOvr>
+    <a:masterClrMapping/>
+  </p:clrMapOvr>
+</p:notes>
+</file>
+
 <file path=ppt/notesSlides/notesSlide2.xml><?xml version="1.0" encoding="utf-8"?>
 <p:notes xmlns:a="http://schemas.openxmlformats.org/drawingml/2006/main" xmlns:r="http://schemas.openxmlformats.org/officeDocument/2006/relationships" xmlns:p="http://schemas.openxmlformats.org/presentationml/2006/main">
   <p:cSld>
@@ -1270,7 +1375,10 @@
           <a:bodyPr/>
           <a:lstStyle/>
           <a:p>
-            <a:endParaRPr lang="de-AT"/>
+            <a:endParaRPr lang="en-US" dirty="0" smtClean="0"/>
+          </a:p>
+          <a:p>
+            <a:endParaRPr lang="en-US" dirty="0" smtClean="0"/>
           </a:p>
         </p:txBody>
       </p:sp>
@@ -1289,24 +1397,19 @@
           <a:bodyPr/>
           <a:lstStyle/>
           <a:p>
-            <a:pPr>
-              <a:defRPr/>
-            </a:pPr>
-            <a:fld id="{8335CF79-0E4B-49EE-B3D5-651E591A0B85}" type="slidenum">
-              <a:rPr lang="de-AT" smtClean="0"/>
-              <a:pPr>
-                <a:defRPr/>
-              </a:pPr>
+            <a:fld id="{220961ED-B8B5-4C64-9727-6F12A830C91B}" type="slidenum">
+              <a:rPr lang="en-GB" altLang="en-US" smtClean="0"/>
+              <a:pPr/>
               <a:t>3</a:t>
             </a:fld>
-            <a:endParaRPr lang="de-AT"/>
+            <a:endParaRPr lang="en-GB" altLang="en-US"/>
           </a:p>
         </p:txBody>
       </p:sp>
     </p:spTree>
     <p:extLst>
       <p:ext uri="{BB962C8B-B14F-4D97-AF65-F5344CB8AC3E}">
-        <p14:creationId xmlns:p14="http://schemas.microsoft.com/office/powerpoint/2010/main" val="2688864577"/>
+        <p14:creationId xmlns:p14="http://schemas.microsoft.com/office/powerpoint/2010/main" val="4196098432"/>
       </p:ext>
     </p:extLst>
   </p:cSld>
@@ -1666,7 +1769,7 @@
     </p:spTree>
     <p:extLst>
       <p:ext uri="{BB962C8B-B14F-4D97-AF65-F5344CB8AC3E}">
-        <p14:creationId xmlns:p14="http://schemas.microsoft.com/office/powerpoint/2010/main" val="2688864577"/>
+        <p14:creationId xmlns:p14="http://schemas.microsoft.com/office/powerpoint/2010/main" val="3092310421"/>
       </p:ext>
     </p:extLst>
   </p:cSld>
@@ -1756,7 +1859,187 @@
     </p:spTree>
     <p:extLst>
       <p:ext uri="{BB962C8B-B14F-4D97-AF65-F5344CB8AC3E}">
-        <p14:creationId xmlns:p14="http://schemas.microsoft.com/office/powerpoint/2010/main" val="2688864577"/>
+        <p14:creationId xmlns:p14="http://schemas.microsoft.com/office/powerpoint/2010/main" val="442249886"/>
+      </p:ext>
+    </p:extLst>
+  </p:cSld>
+  <p:clrMapOvr>
+    <a:masterClrMapping/>
+  </p:clrMapOvr>
+</p:notes>
+</file>
+
+<file path=ppt/notesSlides/notesSlide8.xml><?xml version="1.0" encoding="utf-8"?>
+<p:notes xmlns:a="http://schemas.openxmlformats.org/drawingml/2006/main" xmlns:r="http://schemas.openxmlformats.org/officeDocument/2006/relationships" xmlns:p="http://schemas.openxmlformats.org/presentationml/2006/main">
+  <p:cSld>
+    <p:spTree>
+      <p:nvGrpSpPr>
+        <p:cNvPr id="1" name=""/>
+        <p:cNvGrpSpPr/>
+        <p:nvPr/>
+      </p:nvGrpSpPr>
+      <p:grpSpPr>
+        <a:xfrm>
+          <a:off x="0" y="0"/>
+          <a:ext cx="0" cy="0"/>
+          <a:chOff x="0" y="0"/>
+          <a:chExt cx="0" cy="0"/>
+        </a:xfrm>
+      </p:grpSpPr>
+      <p:sp>
+        <p:nvSpPr>
+          <p:cNvPr id="2" name="Folienbildplatzhalter 1"/>
+          <p:cNvSpPr>
+            <a:spLocks noGrp="1" noRot="1" noChangeAspect="1"/>
+          </p:cNvSpPr>
+          <p:nvPr>
+            <p:ph type="sldImg"/>
+          </p:nvPr>
+        </p:nvSpPr>
+        <p:spPr/>
+      </p:sp>
+      <p:sp>
+        <p:nvSpPr>
+          <p:cNvPr id="3" name="Notizenplatzhalter 2"/>
+          <p:cNvSpPr>
+            <a:spLocks noGrp="1"/>
+          </p:cNvSpPr>
+          <p:nvPr>
+            <p:ph type="body" idx="1"/>
+          </p:nvPr>
+        </p:nvSpPr>
+        <p:spPr/>
+        <p:txBody>
+          <a:bodyPr/>
+          <a:lstStyle/>
+          <a:p>
+            <a:endParaRPr lang="de-AT"/>
+          </a:p>
+        </p:txBody>
+      </p:sp>
+      <p:sp>
+        <p:nvSpPr>
+          <p:cNvPr id="4" name="Foliennummernplatzhalter 3"/>
+          <p:cNvSpPr>
+            <a:spLocks noGrp="1"/>
+          </p:cNvSpPr>
+          <p:nvPr>
+            <p:ph type="sldNum" sz="quarter" idx="10"/>
+          </p:nvPr>
+        </p:nvSpPr>
+        <p:spPr/>
+        <p:txBody>
+          <a:bodyPr/>
+          <a:lstStyle/>
+          <a:p>
+            <a:pPr>
+              <a:defRPr/>
+            </a:pPr>
+            <a:fld id="{8335CF79-0E4B-49EE-B3D5-651E591A0B85}" type="slidenum">
+              <a:rPr lang="de-AT" smtClean="0"/>
+              <a:pPr>
+                <a:defRPr/>
+              </a:pPr>
+              <a:t>9</a:t>
+            </a:fld>
+            <a:endParaRPr lang="de-AT"/>
+          </a:p>
+        </p:txBody>
+      </p:sp>
+    </p:spTree>
+    <p:extLst>
+      <p:ext uri="{BB962C8B-B14F-4D97-AF65-F5344CB8AC3E}">
+        <p14:creationId xmlns:p14="http://schemas.microsoft.com/office/powerpoint/2010/main" val="3664620962"/>
+      </p:ext>
+    </p:extLst>
+  </p:cSld>
+  <p:clrMapOvr>
+    <a:masterClrMapping/>
+  </p:clrMapOvr>
+</p:notes>
+</file>
+
+<file path=ppt/notesSlides/notesSlide9.xml><?xml version="1.0" encoding="utf-8"?>
+<p:notes xmlns:a="http://schemas.openxmlformats.org/drawingml/2006/main" xmlns:r="http://schemas.openxmlformats.org/officeDocument/2006/relationships" xmlns:p="http://schemas.openxmlformats.org/presentationml/2006/main">
+  <p:cSld>
+    <p:spTree>
+      <p:nvGrpSpPr>
+        <p:cNvPr id="1" name=""/>
+        <p:cNvGrpSpPr/>
+        <p:nvPr/>
+      </p:nvGrpSpPr>
+      <p:grpSpPr>
+        <a:xfrm>
+          <a:off x="0" y="0"/>
+          <a:ext cx="0" cy="0"/>
+          <a:chOff x="0" y="0"/>
+          <a:chExt cx="0" cy="0"/>
+        </a:xfrm>
+      </p:grpSpPr>
+      <p:sp>
+        <p:nvSpPr>
+          <p:cNvPr id="2" name="Folienbildplatzhalter 1"/>
+          <p:cNvSpPr>
+            <a:spLocks noGrp="1" noRot="1" noChangeAspect="1"/>
+          </p:cNvSpPr>
+          <p:nvPr>
+            <p:ph type="sldImg"/>
+          </p:nvPr>
+        </p:nvSpPr>
+        <p:spPr/>
+      </p:sp>
+      <p:sp>
+        <p:nvSpPr>
+          <p:cNvPr id="3" name="Notizenplatzhalter 2"/>
+          <p:cNvSpPr>
+            <a:spLocks noGrp="1"/>
+          </p:cNvSpPr>
+          <p:nvPr>
+            <p:ph type="body" idx="1"/>
+          </p:nvPr>
+        </p:nvSpPr>
+        <p:spPr/>
+        <p:txBody>
+          <a:bodyPr/>
+          <a:lstStyle/>
+          <a:p>
+            <a:endParaRPr lang="de-AT"/>
+          </a:p>
+        </p:txBody>
+      </p:sp>
+      <p:sp>
+        <p:nvSpPr>
+          <p:cNvPr id="4" name="Foliennummernplatzhalter 3"/>
+          <p:cNvSpPr>
+            <a:spLocks noGrp="1"/>
+          </p:cNvSpPr>
+          <p:nvPr>
+            <p:ph type="sldNum" sz="quarter" idx="10"/>
+          </p:nvPr>
+        </p:nvSpPr>
+        <p:spPr/>
+        <p:txBody>
+          <a:bodyPr/>
+          <a:lstStyle/>
+          <a:p>
+            <a:pPr>
+              <a:defRPr/>
+            </a:pPr>
+            <a:fld id="{8335CF79-0E4B-49EE-B3D5-651E591A0B85}" type="slidenum">
+              <a:rPr lang="de-AT" smtClean="0"/>
+              <a:pPr>
+                <a:defRPr/>
+              </a:pPr>
+              <a:t>10</a:t>
+            </a:fld>
+            <a:endParaRPr lang="de-AT"/>
+          </a:p>
+        </p:txBody>
+      </p:sp>
+    </p:spTree>
+    <p:extLst>
+      <p:ext uri="{BB962C8B-B14F-4D97-AF65-F5344CB8AC3E}">
+        <p14:creationId xmlns:p14="http://schemas.microsoft.com/office/powerpoint/2010/main" val="2569165950"/>
       </p:ext>
     </p:extLst>
   </p:cSld>
@@ -2312,10 +2595,10 @@
           <a:lstStyle/>
           <a:p>
             <a:r>
-              <a:rPr lang="de-DE" smtClean="0"/>
+              <a:rPr lang="de-DE" dirty="0" smtClean="0"/>
               <a:t>Titelmasterformat durch Klicken bearbeiten</a:t>
             </a:r>
-            <a:endParaRPr lang="de-AT"/>
+            <a:endParaRPr lang="de-AT" dirty="0"/>
           </a:p>
         </p:txBody>
       </p:sp>
@@ -3624,7 +3907,7 @@
         </p:nvSpPr>
         <p:spPr bwMode="auto">
           <a:xfrm>
-            <a:off x="468313" y="714375"/>
+            <a:off x="468313" y="95423"/>
             <a:ext cx="8218487" cy="681038"/>
           </a:xfrm>
           <a:prstGeom prst="rect">
@@ -3673,7 +3956,7 @@
           <a:lstStyle/>
           <a:p>
             <a:pPr lvl="0"/>
-            <a:endParaRPr lang="de-DE" smtClean="0"/>
+            <a:endParaRPr lang="de-DE" dirty="0" smtClean="0"/>
           </a:p>
         </p:txBody>
       </p:sp>
@@ -4274,7 +4557,7 @@
   </p:timing>
   <p:txStyles>
     <p:titleStyle>
-      <a:lvl1pPr algn="ctr" rtl="0" eaLnBrk="0" fontAlgn="base" hangingPunct="0">
+      <a:lvl1pPr algn="l" rtl="0" eaLnBrk="0" fontAlgn="base" hangingPunct="0">
         <a:spcBef>
           <a:spcPct val="0"/>
         </a:spcBef>
@@ -4283,7 +4566,7 @@
         </a:spcAft>
         <a:defRPr sz="2400" b="1">
           <a:solidFill>
-            <a:srgbClr val="990000"/>
+            <a:schemeClr val="accent2"/>
           </a:solidFill>
           <a:latin typeface="+mj-lt"/>
           <a:ea typeface="+mj-ea"/>
@@ -4678,6 +4961,7 @@
           <a:bodyPr/>
           <a:lstStyle/>
           <a:p>
+            <a:pPr algn="ctr"/>
             <a:r>
               <a:rPr lang="en-US" sz="2800" dirty="0" smtClean="0"/>
               <a:t>VECTO Engine</a:t>
@@ -4694,11 +4978,7 @@
             </a:br>
             <a:r>
               <a:rPr lang="en-US" sz="2800" dirty="0" smtClean="0"/>
-              <a:t>Short documentation and </a:t>
-            </a:r>
-            <a:r>
-              <a:rPr lang="en-US" sz="2800" smtClean="0"/>
-              <a:t>user manual</a:t>
+              <a:t>Short documentation and user manual</a:t>
             </a:r>
             <a:endParaRPr lang="en-US" sz="2800" dirty="0"/>
           </a:p>
@@ -4737,13 +5017,13 @@
               <a:rPr lang="en-US" sz="2400" dirty="0" smtClean="0">
                 <a:sym typeface="Wingdings" panose="05000000000000000000" pitchFamily="2" charset="2"/>
               </a:rPr>
-              <a:t>App Version </a:t>
+              <a:t>App Version 1.4</a:t>
             </a:r>
             <a:r>
               <a:rPr lang="en-US" sz="2400" dirty="0" smtClean="0">
                 <a:sym typeface="Wingdings" panose="05000000000000000000" pitchFamily="2" charset="2"/>
               </a:rPr>
-              <a:t>1.4.4</a:t>
+              <a:t>.*</a:t>
             </a:r>
             <a:endParaRPr lang="en-US" sz="2400" dirty="0" smtClean="0">
               <a:sym typeface="Wingdings" panose="05000000000000000000" pitchFamily="2" charset="2"/>
@@ -4764,9 +5044,6 @@
               </a:rPr>
               <a:t>20.12.2018</a:t>
             </a:r>
-            <a:endParaRPr lang="en-US" sz="1800" dirty="0" smtClean="0">
-              <a:sym typeface="Wingdings" panose="05000000000000000000" pitchFamily="2" charset="2"/>
-            </a:endParaRPr>
           </a:p>
         </p:txBody>
       </p:sp>
@@ -4854,6 +5131,949 @@
 </p:sld>
 </file>
 
+<file path=ppt/slides/slide10.xml><?xml version="1.0" encoding="utf-8"?>
+<p:sld xmlns:a="http://schemas.openxmlformats.org/drawingml/2006/main" xmlns:r="http://schemas.openxmlformats.org/officeDocument/2006/relationships" xmlns:p="http://schemas.openxmlformats.org/presentationml/2006/main">
+  <p:cSld>
+    <p:spTree>
+      <p:nvGrpSpPr>
+        <p:cNvPr id="1" name=""/>
+        <p:cNvGrpSpPr/>
+        <p:nvPr/>
+      </p:nvGrpSpPr>
+      <p:grpSpPr>
+        <a:xfrm>
+          <a:off x="0" y="0"/>
+          <a:ext cx="0" cy="0"/>
+          <a:chOff x="0" y="0"/>
+          <a:chExt cx="0" cy="0"/>
+        </a:xfrm>
+      </p:grpSpPr>
+      <p:sp>
+        <p:nvSpPr>
+          <p:cNvPr id="2" name="Titel 1"/>
+          <p:cNvSpPr>
+            <a:spLocks noGrp="1"/>
+          </p:cNvSpPr>
+          <p:nvPr>
+            <p:ph type="title"/>
+          </p:nvPr>
+        </p:nvSpPr>
+        <p:spPr>
+          <a:xfrm>
+            <a:off x="468000" y="153844"/>
+            <a:ext cx="7632848" cy="756000"/>
+          </a:xfrm>
+        </p:spPr>
+        <p:txBody>
+          <a:bodyPr anchor="t" anchorCtr="0"/>
+          <a:lstStyle/>
+          <a:p>
+            <a:r>
+              <a:rPr lang="en-US" dirty="0" smtClean="0"/>
+              <a:t>VECTO Engine – </a:t>
+            </a:r>
+            <a:r>
+              <a:rPr lang="en-US" dirty="0" smtClean="0"/>
+              <a:t>E</a:t>
+            </a:r>
+            <a:r>
+              <a:rPr lang="en-US" dirty="0" smtClean="0"/>
+              <a:t>valuation algorithms</a:t>
+            </a:r>
+            <a:br>
+              <a:rPr lang="en-US" dirty="0" smtClean="0"/>
+            </a:br>
+            <a:r>
+              <a:rPr lang="en-US" dirty="0" smtClean="0"/>
+              <a:t>performed </a:t>
+            </a:r>
+            <a:r>
+              <a:rPr lang="en-US" dirty="0" smtClean="0"/>
+              <a:t>(</a:t>
+            </a:r>
+            <a:r>
+              <a:rPr lang="en-US" dirty="0" smtClean="0"/>
+              <a:t>p5/5)</a:t>
+            </a:r>
+            <a:endParaRPr lang="en-US" dirty="0"/>
+          </a:p>
+        </p:txBody>
+      </p:sp>
+      <p:sp>
+        <p:nvSpPr>
+          <p:cNvPr id="3" name="Rechteck 2"/>
+          <p:cNvSpPr/>
+          <p:nvPr/>
+        </p:nvSpPr>
+        <p:spPr>
+          <a:xfrm>
+            <a:off x="360000" y="1268760"/>
+            <a:ext cx="8388000" cy="338554"/>
+          </a:xfrm>
+          <a:prstGeom prst="rect">
+            <a:avLst/>
+          </a:prstGeom>
+        </p:spPr>
+        <p:txBody>
+          <a:bodyPr wrap="square">
+            <a:spAutoFit/>
+          </a:bodyPr>
+          <a:lstStyle/>
+          <a:p>
+            <a:pPr algn="l"/>
+            <a:r>
+              <a:rPr lang="en-US" b="0" dirty="0">
+                <a:latin typeface="Helvetica" panose="020B0604020202020204" pitchFamily="34" charset="0"/>
+                <a:cs typeface="Helvetica" panose="020B0604020202020204" pitchFamily="34" charset="0"/>
+              </a:rPr>
+              <a:t>Example of data processing through VECTO Engine for FC map</a:t>
+            </a:r>
+            <a:endParaRPr lang="de-AT" b="0" dirty="0">
+              <a:latin typeface="Helvetica" panose="020B0604020202020204" pitchFamily="34" charset="0"/>
+              <a:cs typeface="Helvetica" panose="020B0604020202020204" pitchFamily="34" charset="0"/>
+            </a:endParaRPr>
+          </a:p>
+        </p:txBody>
+      </p:sp>
+      <p:pic>
+        <p:nvPicPr>
+          <p:cNvPr id="4" name="Grafik 3"/>
+          <p:cNvPicPr>
+            <a:picLocks noChangeAspect="1"/>
+          </p:cNvPicPr>
+          <p:nvPr/>
+        </p:nvPicPr>
+        <p:blipFill>
+          <a:blip r:embed="rId3"/>
+          <a:stretch>
+            <a:fillRect/>
+          </a:stretch>
+        </p:blipFill>
+        <p:spPr>
+          <a:xfrm>
+            <a:off x="468000" y="1751330"/>
+            <a:ext cx="8554438" cy="3981926"/>
+          </a:xfrm>
+          <a:prstGeom prst="rect">
+            <a:avLst/>
+          </a:prstGeom>
+        </p:spPr>
+      </p:pic>
+    </p:spTree>
+    <p:extLst>
+      <p:ext uri="{BB962C8B-B14F-4D97-AF65-F5344CB8AC3E}">
+        <p14:creationId xmlns:p14="http://schemas.microsoft.com/office/powerpoint/2010/main" val="759407332"/>
+      </p:ext>
+    </p:extLst>
+  </p:cSld>
+  <p:clrMapOvr>
+    <a:masterClrMapping/>
+  </p:clrMapOvr>
+  <p:timing>
+    <p:tnLst>
+      <p:par>
+        <p:cTn id="1" dur="indefinite" restart="never" nodeType="tmRoot"/>
+      </p:par>
+    </p:tnLst>
+  </p:timing>
+</p:sld>
+</file>
+
+<file path=ppt/slides/slide11.xml><?xml version="1.0" encoding="utf-8"?>
+<p:sld xmlns:a="http://schemas.openxmlformats.org/drawingml/2006/main" xmlns:r="http://schemas.openxmlformats.org/officeDocument/2006/relationships" xmlns:p="http://schemas.openxmlformats.org/presentationml/2006/main">
+  <p:cSld>
+    <p:spTree>
+      <p:nvGrpSpPr>
+        <p:cNvPr id="1" name=""/>
+        <p:cNvGrpSpPr/>
+        <p:nvPr/>
+      </p:nvGrpSpPr>
+      <p:grpSpPr>
+        <a:xfrm>
+          <a:off x="0" y="0"/>
+          <a:ext cx="0" cy="0"/>
+          <a:chOff x="0" y="0"/>
+          <a:chExt cx="0" cy="0"/>
+        </a:xfrm>
+      </p:grpSpPr>
+      <p:sp>
+        <p:nvSpPr>
+          <p:cNvPr id="2" name="Titel 1"/>
+          <p:cNvSpPr>
+            <a:spLocks noGrp="1"/>
+          </p:cNvSpPr>
+          <p:nvPr>
+            <p:ph type="title"/>
+          </p:nvPr>
+        </p:nvSpPr>
+        <p:spPr>
+          <a:xfrm>
+            <a:off x="468000" y="97200"/>
+            <a:ext cx="7886700" cy="576000"/>
+          </a:xfrm>
+        </p:spPr>
+        <p:txBody>
+          <a:bodyPr anchor="ctr" anchorCtr="0">
+            <a:normAutofit/>
+          </a:bodyPr>
+          <a:lstStyle/>
+          <a:p>
+            <a:r>
+              <a:rPr lang="en-US" dirty="0"/>
+              <a:t>VECTO </a:t>
+            </a:r>
+            <a:r>
+              <a:rPr lang="en-US" dirty="0" smtClean="0"/>
+              <a:t>Engine </a:t>
+            </a:r>
+            <a:r>
+              <a:rPr lang="en-US" dirty="0"/>
+              <a:t>– Further important </a:t>
+            </a:r>
+            <a:r>
+              <a:rPr lang="en-US" dirty="0" smtClean="0"/>
+              <a:t>remarks</a:t>
+            </a:r>
+            <a:endParaRPr lang="en-US" dirty="0"/>
+          </a:p>
+        </p:txBody>
+      </p:sp>
+      <p:sp>
+        <p:nvSpPr>
+          <p:cNvPr id="3" name="Textfeld 2"/>
+          <p:cNvSpPr txBox="1"/>
+          <p:nvPr/>
+        </p:nvSpPr>
+        <p:spPr>
+          <a:xfrm>
+            <a:off x="467544" y="1267200"/>
+            <a:ext cx="8280920" cy="3754874"/>
+          </a:xfrm>
+          <a:prstGeom prst="rect">
+            <a:avLst/>
+          </a:prstGeom>
+          <a:noFill/>
+        </p:spPr>
+        <p:txBody>
+          <a:bodyPr wrap="square" rtlCol="0">
+            <a:spAutoFit/>
+          </a:bodyPr>
+          <a:lstStyle/>
+          <a:p>
+            <a:pPr marL="342900" indent="-342900" algn="l">
+              <a:lnSpc>
+                <a:spcPct val="115000"/>
+              </a:lnSpc>
+              <a:spcBef>
+                <a:spcPts val="600"/>
+              </a:spcBef>
+              <a:buFont typeface="Wingdings" panose="05000000000000000000" pitchFamily="2" charset="2"/>
+              <a:buChar char="§"/>
+            </a:pPr>
+            <a:r>
+              <a:rPr lang="en-US" b="0" dirty="0" smtClean="0">
+                <a:latin typeface="Helvetica" panose="020B0604020202020204" pitchFamily="34" charset="0"/>
+                <a:ea typeface="Times" panose="02020603060405020304" pitchFamily="18" charset="0"/>
+                <a:cs typeface="Helvetica" panose="020B0604020202020204" pitchFamily="34" charset="0"/>
+              </a:rPr>
+              <a:t>Messages </a:t>
+            </a:r>
+            <a:r>
+              <a:rPr lang="en-US" b="0" dirty="0">
+                <a:latin typeface="Helvetica" panose="020B0604020202020204" pitchFamily="34" charset="0"/>
+                <a:ea typeface="Times" panose="02020603060405020304" pitchFamily="18" charset="0"/>
+                <a:cs typeface="Helvetica" panose="020B0604020202020204" pitchFamily="34" charset="0"/>
+              </a:rPr>
+              <a:t>displayed</a:t>
+            </a:r>
+            <a:endParaRPr lang="en-US" b="0" dirty="0">
+              <a:latin typeface="Helvetica" panose="020B0604020202020204" pitchFamily="34" charset="0"/>
+              <a:ea typeface="Times" panose="02020603060405020304" pitchFamily="18" charset="0"/>
+              <a:cs typeface="Helvetica" panose="020B0604020202020204" pitchFamily="34" charset="0"/>
+            </a:endParaRPr>
+          </a:p>
+          <a:p>
+            <a:pPr marL="800100" lvl="1" indent="-342900" algn="l">
+              <a:lnSpc>
+                <a:spcPct val="115000"/>
+              </a:lnSpc>
+              <a:spcBef>
+                <a:spcPts val="600"/>
+              </a:spcBef>
+              <a:buFont typeface="Wingdings" panose="05000000000000000000" pitchFamily="2" charset="2"/>
+              <a:buChar char="§"/>
+            </a:pPr>
+            <a:r>
+              <a:rPr lang="en-US" sz="1400" b="0" dirty="0">
+                <a:latin typeface="Helvetica" panose="020B0604020202020204" pitchFamily="34" charset="0"/>
+                <a:ea typeface="Times" panose="02020603060405020304" pitchFamily="18" charset="0"/>
+                <a:cs typeface="Helvetica" panose="020B0604020202020204" pitchFamily="34" charset="0"/>
+              </a:rPr>
+              <a:t>Clear </a:t>
+            </a:r>
+            <a:r>
+              <a:rPr lang="en-US" sz="1400" b="0" dirty="0">
+                <a:latin typeface="Helvetica" panose="020B0604020202020204" pitchFamily="34" charset="0"/>
+                <a:ea typeface="Times" panose="02020603060405020304" pitchFamily="18" charset="0"/>
+                <a:cs typeface="Helvetica" panose="020B0604020202020204" pitchFamily="34" charset="0"/>
+              </a:rPr>
+              <a:t>explanations for all relevant </a:t>
+            </a:r>
+            <a:r>
+              <a:rPr lang="en-US" sz="1400" b="0" dirty="0">
+                <a:latin typeface="Helvetica" panose="020B0604020202020204" pitchFamily="34" charset="0"/>
+                <a:ea typeface="Times" panose="02020603060405020304" pitchFamily="18" charset="0"/>
+                <a:cs typeface="Helvetica" panose="020B0604020202020204" pitchFamily="34" charset="0"/>
+              </a:rPr>
+              <a:t>errors (ref. to regulation or indication of </a:t>
+            </a:r>
+            <a:r>
+              <a:rPr lang="en-US" sz="1400" b="0" dirty="0" err="1">
+                <a:latin typeface="Helvetica" panose="020B0604020202020204" pitchFamily="34" charset="0"/>
+                <a:ea typeface="Times" panose="02020603060405020304" pitchFamily="18" charset="0"/>
+                <a:cs typeface="Helvetica" panose="020B0604020202020204" pitchFamily="34" charset="0"/>
+              </a:rPr>
+              <a:t>datapoint</a:t>
+            </a:r>
+            <a:r>
+              <a:rPr lang="en-US" sz="1400" b="0" dirty="0">
+                <a:latin typeface="Helvetica" panose="020B0604020202020204" pitchFamily="34" charset="0"/>
+                <a:ea typeface="Times" panose="02020603060405020304" pitchFamily="18" charset="0"/>
+                <a:cs typeface="Helvetica" panose="020B0604020202020204" pitchFamily="34" charset="0"/>
+              </a:rPr>
+              <a:t>)</a:t>
+            </a:r>
+            <a:endParaRPr lang="en-US" sz="1400" b="0" dirty="0">
+              <a:latin typeface="Helvetica" panose="020B0604020202020204" pitchFamily="34" charset="0"/>
+              <a:ea typeface="Times" panose="02020603060405020304" pitchFamily="18" charset="0"/>
+              <a:cs typeface="Helvetica" panose="020B0604020202020204" pitchFamily="34" charset="0"/>
+            </a:endParaRPr>
+          </a:p>
+          <a:p>
+            <a:pPr marL="800100" lvl="1" indent="-342900" algn="l">
+              <a:lnSpc>
+                <a:spcPct val="115000"/>
+              </a:lnSpc>
+              <a:spcBef>
+                <a:spcPts val="600"/>
+              </a:spcBef>
+              <a:buFont typeface="Wingdings" panose="05000000000000000000" pitchFamily="2" charset="2"/>
+              <a:buChar char="§"/>
+            </a:pPr>
+            <a:r>
+              <a:rPr lang="en-US" sz="1400" b="0" dirty="0">
+                <a:latin typeface="Helvetica" panose="020B0604020202020204" pitchFamily="34" charset="0"/>
+                <a:ea typeface="Times" panose="02020603060405020304" pitchFamily="18" charset="0"/>
+                <a:cs typeface="Helvetica" panose="020B0604020202020204" pitchFamily="34" charset="0"/>
+              </a:rPr>
+              <a:t>Warnings </a:t>
+            </a:r>
+            <a:r>
+              <a:rPr lang="en-US" sz="1400" b="0" dirty="0">
+                <a:latin typeface="Helvetica" panose="020B0604020202020204" pitchFamily="34" charset="0"/>
+                <a:ea typeface="Times" panose="02020603060405020304" pitchFamily="18" charset="0"/>
+                <a:cs typeface="Helvetica" panose="020B0604020202020204" pitchFamily="34" charset="0"/>
+              </a:rPr>
+              <a:t>vs. </a:t>
+            </a:r>
+            <a:r>
+              <a:rPr lang="en-US" sz="1400" b="0" dirty="0">
+                <a:latin typeface="Helvetica" panose="020B0604020202020204" pitchFamily="34" charset="0"/>
+                <a:ea typeface="Times" panose="02020603060405020304" pitchFamily="18" charset="0"/>
+                <a:cs typeface="Helvetica" panose="020B0604020202020204" pitchFamily="34" charset="0"/>
+              </a:rPr>
+              <a:t>Errors:</a:t>
+            </a:r>
+          </a:p>
+          <a:p>
+            <a:pPr marL="1257300" lvl="2" indent="-342900" algn="l">
+              <a:lnSpc>
+                <a:spcPct val="115000"/>
+              </a:lnSpc>
+              <a:spcBef>
+                <a:spcPts val="600"/>
+              </a:spcBef>
+              <a:buFont typeface="Wingdings" panose="05000000000000000000" pitchFamily="2" charset="2"/>
+              <a:buChar char="§"/>
+            </a:pPr>
+            <a:r>
+              <a:rPr lang="en-US" sz="1400" b="0" dirty="0">
+                <a:latin typeface="Helvetica" panose="020B0604020202020204" pitchFamily="34" charset="0"/>
+                <a:ea typeface="Times" panose="02020603060405020304" pitchFamily="18" charset="0"/>
+                <a:cs typeface="Helvetica" panose="020B0604020202020204" pitchFamily="34" charset="0"/>
+              </a:rPr>
+              <a:t>A valid XML results file is only created if </a:t>
+            </a:r>
+            <a:r>
+              <a:rPr lang="en-US" sz="1400" b="0" dirty="0">
+                <a:latin typeface="Helvetica" panose="020B0604020202020204" pitchFamily="34" charset="0"/>
+                <a:ea typeface="Times" panose="02020603060405020304" pitchFamily="18" charset="0"/>
+                <a:cs typeface="Helvetica" panose="020B0604020202020204" pitchFamily="34" charset="0"/>
+              </a:rPr>
+              <a:t>no </a:t>
+            </a:r>
+            <a:r>
+              <a:rPr lang="en-US" sz="1400" b="0" dirty="0">
+                <a:latin typeface="Helvetica" panose="020B0604020202020204" pitchFamily="34" charset="0"/>
+                <a:ea typeface="Times" panose="02020603060405020304" pitchFamily="18" charset="0"/>
+                <a:cs typeface="Helvetica" panose="020B0604020202020204" pitchFamily="34" charset="0"/>
+              </a:rPr>
+              <a:t>errors occur (non-conformity with requirements in regulation)</a:t>
+            </a:r>
+            <a:endParaRPr lang="en-US" sz="1400" b="0" dirty="0">
+              <a:latin typeface="Helvetica" panose="020B0604020202020204" pitchFamily="34" charset="0"/>
+              <a:ea typeface="Times" panose="02020603060405020304" pitchFamily="18" charset="0"/>
+              <a:cs typeface="Helvetica" panose="020B0604020202020204" pitchFamily="34" charset="0"/>
+            </a:endParaRPr>
+          </a:p>
+          <a:p>
+            <a:pPr marL="1257300" lvl="2" indent="-342900" algn="l">
+              <a:lnSpc>
+                <a:spcPct val="115000"/>
+              </a:lnSpc>
+              <a:spcBef>
+                <a:spcPts val="600"/>
+              </a:spcBef>
+              <a:buFont typeface="Wingdings" panose="05000000000000000000" pitchFamily="2" charset="2"/>
+              <a:buChar char="§"/>
+            </a:pPr>
+            <a:r>
+              <a:rPr lang="en-US" sz="1400" b="0" dirty="0">
+                <a:latin typeface="Helvetica" panose="020B0604020202020204" pitchFamily="34" charset="0"/>
+                <a:ea typeface="Times" panose="02020603060405020304" pitchFamily="18" charset="0"/>
+                <a:cs typeface="Helvetica" panose="020B0604020202020204" pitchFamily="34" charset="0"/>
+              </a:rPr>
+              <a:t>Warnings give a hint that something might be wrong with the input data</a:t>
+            </a:r>
+            <a:br>
+              <a:rPr lang="en-US" sz="1400" b="0" dirty="0">
+                <a:latin typeface="Helvetica" panose="020B0604020202020204" pitchFamily="34" charset="0"/>
+                <a:ea typeface="Times" panose="02020603060405020304" pitchFamily="18" charset="0"/>
+                <a:cs typeface="Helvetica" panose="020B0604020202020204" pitchFamily="34" charset="0"/>
+              </a:rPr>
+            </a:br>
+            <a:r>
+              <a:rPr lang="en-US" sz="1400" b="0" dirty="0">
+                <a:latin typeface="Helvetica" panose="020B0604020202020204" pitchFamily="34" charset="0"/>
+                <a:ea typeface="Times" panose="02020603060405020304" pitchFamily="18" charset="0"/>
+                <a:cs typeface="Helvetica" panose="020B0604020202020204" pitchFamily="34" charset="0"/>
+                <a:sym typeface="Wingdings" panose="05000000000000000000" pitchFamily="2" charset="2"/>
+              </a:rPr>
+              <a:t> </a:t>
+            </a:r>
+            <a:r>
+              <a:rPr lang="en-US" sz="1400" b="0" dirty="0">
+                <a:latin typeface="Helvetica" panose="020B0604020202020204" pitchFamily="34" charset="0"/>
+                <a:ea typeface="Times" panose="02020603060405020304" pitchFamily="18" charset="0"/>
+                <a:cs typeface="Helvetica" panose="020B0604020202020204" pitchFamily="34" charset="0"/>
+              </a:rPr>
+              <a:t>XML result file is valid despite warnings</a:t>
+            </a:r>
+            <a:br>
+              <a:rPr lang="en-US" sz="1400" b="0" dirty="0">
+                <a:latin typeface="Helvetica" panose="020B0604020202020204" pitchFamily="34" charset="0"/>
+                <a:ea typeface="Times" panose="02020603060405020304" pitchFamily="18" charset="0"/>
+                <a:cs typeface="Helvetica" panose="020B0604020202020204" pitchFamily="34" charset="0"/>
+              </a:rPr>
+            </a:br>
+            <a:r>
+              <a:rPr lang="en-US" sz="1400" b="0" dirty="0">
+                <a:latin typeface="Helvetica" panose="020B0604020202020204" pitchFamily="34" charset="0"/>
+                <a:ea typeface="Times" panose="02020603060405020304" pitchFamily="18" charset="0"/>
+                <a:cs typeface="Helvetica" panose="020B0604020202020204" pitchFamily="34" charset="0"/>
+                <a:sym typeface="Wingdings" panose="05000000000000000000" pitchFamily="2" charset="2"/>
+              </a:rPr>
+              <a:t> </a:t>
+            </a:r>
+            <a:r>
+              <a:rPr lang="en-US" sz="1400" b="0" u="sng" dirty="0">
+                <a:latin typeface="Helvetica" panose="020B0604020202020204" pitchFamily="34" charset="0"/>
+                <a:ea typeface="Times" panose="02020603060405020304" pitchFamily="18" charset="0"/>
+                <a:cs typeface="Helvetica" panose="020B0604020202020204" pitchFamily="34" charset="0"/>
+                <a:sym typeface="Wingdings" panose="05000000000000000000" pitchFamily="2" charset="2"/>
+              </a:rPr>
+              <a:t>BUT:</a:t>
+            </a:r>
+            <a:r>
+              <a:rPr lang="en-US" sz="1400" b="0" dirty="0">
+                <a:latin typeface="Helvetica" panose="020B0604020202020204" pitchFamily="34" charset="0"/>
+                <a:ea typeface="Times" panose="02020603060405020304" pitchFamily="18" charset="0"/>
+                <a:cs typeface="Helvetica" panose="020B0604020202020204" pitchFamily="34" charset="0"/>
+              </a:rPr>
+              <a:t> warnings should be investigated together with TAA / technical service</a:t>
+            </a:r>
+          </a:p>
+          <a:p>
+            <a:pPr marL="342900" indent="-342900" algn="l">
+              <a:lnSpc>
+                <a:spcPct val="115000"/>
+              </a:lnSpc>
+              <a:spcBef>
+                <a:spcPts val="600"/>
+              </a:spcBef>
+              <a:buFont typeface="Wingdings" panose="05000000000000000000" pitchFamily="2" charset="2"/>
+              <a:buChar char="§"/>
+            </a:pPr>
+            <a:endParaRPr lang="en-US" b="0" dirty="0" smtClean="0">
+              <a:latin typeface="Helvetica" panose="020B0604020202020204" pitchFamily="34" charset="0"/>
+              <a:ea typeface="Times" panose="02020603060405020304" pitchFamily="18" charset="0"/>
+              <a:cs typeface="Helvetica" panose="020B0604020202020204" pitchFamily="34" charset="0"/>
+            </a:endParaRPr>
+          </a:p>
+          <a:p>
+            <a:pPr marL="342900" indent="-342900" algn="l">
+              <a:lnSpc>
+                <a:spcPct val="115000"/>
+              </a:lnSpc>
+              <a:spcBef>
+                <a:spcPts val="600"/>
+              </a:spcBef>
+              <a:buFont typeface="Wingdings" panose="05000000000000000000" pitchFamily="2" charset="2"/>
+              <a:buChar char="§"/>
+            </a:pPr>
+            <a:r>
+              <a:rPr lang="en-US" b="0" dirty="0" smtClean="0">
+                <a:latin typeface="Helvetica" panose="020B0604020202020204" pitchFamily="34" charset="0"/>
+                <a:ea typeface="Times" panose="02020603060405020304" pitchFamily="18" charset="0"/>
+                <a:cs typeface="Helvetica" panose="020B0604020202020204" pitchFamily="34" charset="0"/>
+              </a:rPr>
+              <a:t>Only </a:t>
+            </a:r>
+            <a:r>
+              <a:rPr lang="en-US" b="0" dirty="0">
+                <a:latin typeface="Helvetica" panose="020B0604020202020204" pitchFamily="34" charset="0"/>
+                <a:ea typeface="Times" panose="02020603060405020304" pitchFamily="18" charset="0"/>
+                <a:cs typeface="Helvetica" panose="020B0604020202020204" pitchFamily="34" charset="0"/>
+              </a:rPr>
+              <a:t>one </a:t>
+            </a:r>
+            <a:r>
+              <a:rPr lang="en-US" b="0" dirty="0">
+                <a:latin typeface="Helvetica" panose="020B0604020202020204" pitchFamily="34" charset="0"/>
+                <a:ea typeface="Times" panose="02020603060405020304" pitchFamily="18" charset="0"/>
+                <a:cs typeface="Helvetica" panose="020B0604020202020204" pitchFamily="34" charset="0"/>
+              </a:rPr>
+              <a:t>single XML </a:t>
+            </a:r>
+            <a:r>
+              <a:rPr lang="en-US" b="0" dirty="0">
+                <a:latin typeface="Helvetica" panose="020B0604020202020204" pitchFamily="34" charset="0"/>
+                <a:ea typeface="Times" panose="02020603060405020304" pitchFamily="18" charset="0"/>
+                <a:cs typeface="Helvetica" panose="020B0604020202020204" pitchFamily="34" charset="0"/>
+              </a:rPr>
+              <a:t>file is created as output</a:t>
+            </a:r>
+          </a:p>
+          <a:p>
+            <a:pPr marL="800100" lvl="1" indent="-342900" algn="l">
+              <a:spcBef>
+                <a:spcPts val="600"/>
+              </a:spcBef>
+              <a:buFont typeface="Wingdings" panose="05000000000000000000" pitchFamily="2" charset="2"/>
+              <a:buChar char="§"/>
+            </a:pPr>
+            <a:r>
+              <a:rPr lang="en-US" sz="1400" b="0" dirty="0">
+                <a:latin typeface="Helvetica" panose="020B0604020202020204" pitchFamily="34" charset="0"/>
+                <a:ea typeface="Times" panose="02020603060405020304" pitchFamily="18" charset="0"/>
+                <a:cs typeface="Helvetica" panose="020B0604020202020204" pitchFamily="34" charset="0"/>
+              </a:rPr>
+              <a:t>File </a:t>
+            </a:r>
+            <a:r>
+              <a:rPr lang="en-US" sz="1400" b="0" dirty="0">
+                <a:latin typeface="Helvetica" panose="020B0604020202020204" pitchFamily="34" charset="0"/>
+                <a:ea typeface="Times" panose="02020603060405020304" pitchFamily="18" charset="0"/>
+                <a:cs typeface="Helvetica" panose="020B0604020202020204" pitchFamily="34" charset="0"/>
+              </a:rPr>
+              <a:t>already </a:t>
+            </a:r>
+            <a:r>
+              <a:rPr lang="en-US" sz="1400" b="0" dirty="0">
+                <a:latin typeface="Helvetica" panose="020B0604020202020204" pitchFamily="34" charset="0"/>
+                <a:ea typeface="Times" panose="02020603060405020304" pitchFamily="18" charset="0"/>
+                <a:cs typeface="Helvetica" panose="020B0604020202020204" pitchFamily="34" charset="0"/>
+              </a:rPr>
+              <a:t>hashed</a:t>
+            </a:r>
+          </a:p>
+          <a:p>
+            <a:pPr marL="800100" lvl="1" indent="-342900" algn="l">
+              <a:lnSpc>
+                <a:spcPct val="115000"/>
+              </a:lnSpc>
+              <a:spcBef>
+                <a:spcPts val="600"/>
+              </a:spcBef>
+              <a:buFont typeface="Wingdings" panose="05000000000000000000" pitchFamily="2" charset="2"/>
+              <a:buChar char="§"/>
+            </a:pPr>
+            <a:r>
+              <a:rPr lang="en-US" sz="1400" b="0" dirty="0">
+                <a:latin typeface="Helvetica" panose="020B0604020202020204" pitchFamily="34" charset="0"/>
+                <a:ea typeface="Times" panose="02020603060405020304" pitchFamily="18" charset="0"/>
+                <a:cs typeface="Helvetica" panose="020B0604020202020204" pitchFamily="34" charset="0"/>
+              </a:rPr>
+              <a:t>Ready </a:t>
+            </a:r>
+            <a:r>
+              <a:rPr lang="en-US" sz="1400" b="0" dirty="0">
+                <a:latin typeface="Helvetica" panose="020B0604020202020204" pitchFamily="34" charset="0"/>
+                <a:ea typeface="Times" panose="02020603060405020304" pitchFamily="18" charset="0"/>
+                <a:cs typeface="Helvetica" panose="020B0604020202020204" pitchFamily="34" charset="0"/>
+              </a:rPr>
+              <a:t>for use in VECTO vehicle simulation for declaration</a:t>
+            </a:r>
+            <a:endParaRPr lang="en-US" sz="1400" b="0" dirty="0">
+              <a:latin typeface="Helvetica" panose="020B0604020202020204" pitchFamily="34" charset="0"/>
+              <a:ea typeface="Times" panose="02020603060405020304" pitchFamily="18" charset="0"/>
+              <a:cs typeface="Helvetica" panose="020B0604020202020204" pitchFamily="34" charset="0"/>
+            </a:endParaRPr>
+          </a:p>
+        </p:txBody>
+      </p:sp>
+    </p:spTree>
+    <p:extLst>
+      <p:ext uri="{BB962C8B-B14F-4D97-AF65-F5344CB8AC3E}">
+        <p14:creationId xmlns:p14="http://schemas.microsoft.com/office/powerpoint/2010/main" val="3655365783"/>
+      </p:ext>
+    </p:extLst>
+  </p:cSld>
+  <p:clrMapOvr>
+    <a:masterClrMapping/>
+  </p:clrMapOvr>
+  <p:timing>
+    <p:tnLst>
+      <p:par>
+        <p:cTn id="1" dur="indefinite" restart="never" nodeType="tmRoot"/>
+      </p:par>
+    </p:tnLst>
+  </p:timing>
+</p:sld>
+</file>
+
+<file path=ppt/slides/slide12.xml><?xml version="1.0" encoding="utf-8"?>
+<p:sld xmlns:a="http://schemas.openxmlformats.org/drawingml/2006/main" xmlns:r="http://schemas.openxmlformats.org/officeDocument/2006/relationships" xmlns:p="http://schemas.openxmlformats.org/presentationml/2006/main">
+  <p:cSld>
+    <p:spTree>
+      <p:nvGrpSpPr>
+        <p:cNvPr id="1" name=""/>
+        <p:cNvGrpSpPr/>
+        <p:nvPr/>
+      </p:nvGrpSpPr>
+      <p:grpSpPr>
+        <a:xfrm>
+          <a:off x="0" y="0"/>
+          <a:ext cx="0" cy="0"/>
+          <a:chOff x="0" y="0"/>
+          <a:chExt cx="0" cy="0"/>
+        </a:xfrm>
+      </p:grpSpPr>
+      <p:sp>
+        <p:nvSpPr>
+          <p:cNvPr id="2" name="Titel 1"/>
+          <p:cNvSpPr>
+            <a:spLocks noGrp="1"/>
+          </p:cNvSpPr>
+          <p:nvPr>
+            <p:ph type="title"/>
+          </p:nvPr>
+        </p:nvSpPr>
+        <p:spPr/>
+        <p:txBody>
+          <a:bodyPr/>
+          <a:lstStyle/>
+          <a:p>
+            <a:r>
+              <a:rPr lang="de-AT" dirty="0" err="1" smtClean="0"/>
+              <a:t>Contact</a:t>
+            </a:r>
+            <a:r>
+              <a:rPr lang="de-AT" dirty="0" smtClean="0"/>
+              <a:t> </a:t>
+            </a:r>
+            <a:r>
+              <a:rPr lang="de-AT" dirty="0" err="1" smtClean="0"/>
+              <a:t>data</a:t>
+            </a:r>
+            <a:endParaRPr lang="en-US" dirty="0"/>
+          </a:p>
+        </p:txBody>
+      </p:sp>
+      <p:sp>
+        <p:nvSpPr>
+          <p:cNvPr id="3" name="Inhaltsplatzhalter 2"/>
+          <p:cNvSpPr>
+            <a:spLocks noGrp="1"/>
+          </p:cNvSpPr>
+          <p:nvPr>
+            <p:ph idx="1"/>
+          </p:nvPr>
+        </p:nvSpPr>
+        <p:spPr/>
+        <p:txBody>
+          <a:bodyPr/>
+          <a:lstStyle/>
+          <a:p>
+            <a:pPr>
+              <a:buFont typeface="Wingdings" panose="05000000000000000000" pitchFamily="2" charset="2"/>
+              <a:buChar char="§"/>
+            </a:pPr>
+            <a:r>
+              <a:rPr lang="en-US" sz="1600" dirty="0" smtClean="0">
+                <a:latin typeface="Helvetica" panose="020B0604020202020204" pitchFamily="34" charset="0"/>
+                <a:cs typeface="Helvetica" panose="020B0604020202020204" pitchFamily="34" charset="0"/>
+              </a:rPr>
+              <a:t>All </a:t>
+            </a:r>
+            <a:r>
+              <a:rPr lang="en-US" sz="1600" dirty="0">
+                <a:latin typeface="Helvetica" panose="020B0604020202020204" pitchFamily="34" charset="0"/>
+                <a:cs typeface="Helvetica" panose="020B0604020202020204" pitchFamily="34" charset="0"/>
+              </a:rPr>
+              <a:t>questions, user support and bug reports need to be handled via the </a:t>
+            </a:r>
+            <a:r>
+              <a:rPr lang="en-US" sz="1600" dirty="0" smtClean="0">
+                <a:latin typeface="Helvetica" panose="020B0604020202020204" pitchFamily="34" charset="0"/>
+                <a:cs typeface="Helvetica" panose="020B0604020202020204" pitchFamily="34" charset="0"/>
+              </a:rPr>
+              <a:t>JIRA issue tracking in the </a:t>
+            </a:r>
+            <a:r>
+              <a:rPr lang="en-US" sz="1600" dirty="0" err="1" smtClean="0">
+                <a:latin typeface="Helvetica" panose="020B0604020202020204" pitchFamily="34" charset="0"/>
+                <a:cs typeface="Helvetica" panose="020B0604020202020204" pitchFamily="34" charset="0"/>
+              </a:rPr>
+              <a:t>CITnet</a:t>
+            </a:r>
+            <a:r>
+              <a:rPr lang="en-US" sz="1600" dirty="0" smtClean="0">
+                <a:latin typeface="Helvetica" panose="020B0604020202020204" pitchFamily="34" charset="0"/>
+                <a:cs typeface="Helvetica" panose="020B0604020202020204" pitchFamily="34" charset="0"/>
+              </a:rPr>
+              <a:t> </a:t>
+            </a:r>
+            <a:r>
+              <a:rPr lang="en-US" sz="1600" dirty="0">
+                <a:latin typeface="Helvetica" panose="020B0604020202020204" pitchFamily="34" charset="0"/>
+                <a:cs typeface="Helvetica" panose="020B0604020202020204" pitchFamily="34" charset="0"/>
+              </a:rPr>
+              <a:t>service of the </a:t>
+            </a:r>
+            <a:r>
+              <a:rPr lang="en-US" sz="1600" dirty="0" smtClean="0">
+                <a:latin typeface="Helvetica" panose="020B0604020202020204" pitchFamily="34" charset="0"/>
+                <a:cs typeface="Helvetica" panose="020B0604020202020204" pitchFamily="34" charset="0"/>
+              </a:rPr>
+              <a:t>EU-COM:</a:t>
+            </a:r>
+            <a:r>
+              <a:rPr lang="en-US" sz="1600" dirty="0">
+                <a:latin typeface="Helvetica" panose="020B0604020202020204" pitchFamily="34" charset="0"/>
+                <a:cs typeface="Helvetica" panose="020B0604020202020204" pitchFamily="34" charset="0"/>
+              </a:rPr>
+              <a:t/>
+            </a:r>
+            <a:br>
+              <a:rPr lang="en-US" sz="1600" dirty="0">
+                <a:latin typeface="Helvetica" panose="020B0604020202020204" pitchFamily="34" charset="0"/>
+                <a:cs typeface="Helvetica" panose="020B0604020202020204" pitchFamily="34" charset="0"/>
+              </a:rPr>
+            </a:br>
+            <a:r>
+              <a:rPr lang="en-US" sz="1600" u="sng" dirty="0">
+                <a:solidFill>
+                  <a:srgbClr val="00B0F0"/>
+                </a:solidFill>
+                <a:latin typeface="Helvetica" panose="020B0604020202020204" pitchFamily="34" charset="0"/>
+                <a:cs typeface="Helvetica" panose="020B0604020202020204" pitchFamily="34" charset="0"/>
+              </a:rPr>
+              <a:t>https://</a:t>
+            </a:r>
+            <a:r>
+              <a:rPr lang="en-US" sz="1600" u="sng" dirty="0" smtClean="0">
+                <a:solidFill>
+                  <a:srgbClr val="00B0F0"/>
+                </a:solidFill>
+                <a:latin typeface="Helvetica" panose="020B0604020202020204" pitchFamily="34" charset="0"/>
+                <a:cs typeface="Helvetica" panose="020B0604020202020204" pitchFamily="34" charset="0"/>
+              </a:rPr>
+              <a:t>webgate.ec.europa.eu/CITnet/jira/projects/VECTO/issues</a:t>
+            </a:r>
+            <a:endParaRPr lang="en-US" sz="1600" u="sng" dirty="0" smtClean="0">
+              <a:solidFill>
+                <a:srgbClr val="00B0F0"/>
+              </a:solidFill>
+              <a:latin typeface="Helvetica" panose="020B0604020202020204" pitchFamily="34" charset="0"/>
+              <a:cs typeface="Helvetica" panose="020B0604020202020204" pitchFamily="34" charset="0"/>
+            </a:endParaRPr>
+          </a:p>
+          <a:p>
+            <a:pPr>
+              <a:buFont typeface="Wingdings" panose="05000000000000000000" pitchFamily="2" charset="2"/>
+              <a:buChar char="§"/>
+            </a:pPr>
+            <a:endParaRPr lang="en-US" sz="1600" dirty="0">
+              <a:latin typeface="Helvetica" panose="020B0604020202020204" pitchFamily="34" charset="0"/>
+              <a:cs typeface="Helvetica" panose="020B0604020202020204" pitchFamily="34" charset="0"/>
+            </a:endParaRPr>
+          </a:p>
+          <a:p>
+            <a:pPr>
+              <a:buFont typeface="Wingdings" panose="05000000000000000000" pitchFamily="2" charset="2"/>
+              <a:buChar char="§"/>
+            </a:pPr>
+            <a:r>
+              <a:rPr lang="en-US" sz="1600" dirty="0">
+                <a:latin typeface="Helvetica" panose="020B0604020202020204" pitchFamily="34" charset="0"/>
+                <a:cs typeface="Helvetica" panose="020B0604020202020204" pitchFamily="34" charset="0"/>
+              </a:rPr>
+              <a:t>Also future updates of the tool will be released only via this </a:t>
+            </a:r>
+            <a:r>
+              <a:rPr lang="en-US" sz="1600" dirty="0" smtClean="0">
+                <a:latin typeface="Helvetica" panose="020B0604020202020204" pitchFamily="34" charset="0"/>
+                <a:cs typeface="Helvetica" panose="020B0604020202020204" pitchFamily="34" charset="0"/>
+              </a:rPr>
+              <a:t>platform:</a:t>
+            </a:r>
+            <a:br>
+              <a:rPr lang="en-US" sz="1600" dirty="0" smtClean="0">
+                <a:latin typeface="Helvetica" panose="020B0604020202020204" pitchFamily="34" charset="0"/>
+                <a:cs typeface="Helvetica" panose="020B0604020202020204" pitchFamily="34" charset="0"/>
+              </a:rPr>
+            </a:br>
+            <a:r>
+              <a:rPr lang="en-US" sz="1400" u="sng" dirty="0" smtClean="0">
+                <a:solidFill>
+                  <a:srgbClr val="00B0F0"/>
+                </a:solidFill>
+                <a:latin typeface="Helvetica" panose="020B0604020202020204" pitchFamily="34" charset="0"/>
+                <a:cs typeface="Helvetica" panose="020B0604020202020204" pitchFamily="34" charset="0"/>
+              </a:rPr>
+              <a:t>https</a:t>
+            </a:r>
+            <a:r>
+              <a:rPr lang="en-US" sz="1400" u="sng" dirty="0">
+                <a:solidFill>
+                  <a:srgbClr val="00B0F0"/>
+                </a:solidFill>
+                <a:latin typeface="Helvetica" panose="020B0604020202020204" pitchFamily="34" charset="0"/>
+                <a:cs typeface="Helvetica" panose="020B0604020202020204" pitchFamily="34" charset="0"/>
+              </a:rPr>
+              <a:t>://</a:t>
+            </a:r>
+            <a:r>
+              <a:rPr lang="en-US" sz="1400" u="sng" dirty="0" smtClean="0">
+                <a:solidFill>
+                  <a:srgbClr val="00B0F0"/>
+                </a:solidFill>
+                <a:latin typeface="Helvetica" panose="020B0604020202020204" pitchFamily="34" charset="0"/>
+                <a:cs typeface="Helvetica" panose="020B0604020202020204" pitchFamily="34" charset="0"/>
+              </a:rPr>
+              <a:t>webgate.ec.europa.eu/CITnet/confluence/display/VECTO/VECTO+Engine+Releases</a:t>
+            </a:r>
+            <a:endParaRPr lang="en-US" sz="1400" dirty="0" smtClean="0">
+              <a:solidFill>
+                <a:srgbClr val="00B0F0"/>
+              </a:solidFill>
+              <a:latin typeface="Helvetica" panose="020B0604020202020204" pitchFamily="34" charset="0"/>
+              <a:cs typeface="Helvetica" panose="020B0604020202020204" pitchFamily="34" charset="0"/>
+            </a:endParaRPr>
+          </a:p>
+          <a:p>
+            <a:pPr>
+              <a:buFont typeface="Wingdings" panose="05000000000000000000" pitchFamily="2" charset="2"/>
+              <a:buChar char="§"/>
+            </a:pPr>
+            <a:endParaRPr lang="en-US" sz="1600" dirty="0">
+              <a:latin typeface="Helvetica" panose="020B0604020202020204" pitchFamily="34" charset="0"/>
+              <a:cs typeface="Helvetica" panose="020B0604020202020204" pitchFamily="34" charset="0"/>
+            </a:endParaRPr>
+          </a:p>
+          <a:p>
+            <a:pPr>
+              <a:buFont typeface="Wingdings" panose="05000000000000000000" pitchFamily="2" charset="2"/>
+              <a:buChar char="§"/>
+            </a:pPr>
+            <a:r>
+              <a:rPr lang="en-US" sz="1600" dirty="0">
+                <a:latin typeface="Helvetica" panose="020B0604020202020204" pitchFamily="34" charset="0"/>
+                <a:cs typeface="Helvetica" panose="020B0604020202020204" pitchFamily="34" charset="0"/>
+              </a:rPr>
+              <a:t>If you do not already have an account for this service please </a:t>
+            </a:r>
+            <a:r>
+              <a:rPr lang="en-US" sz="1600" dirty="0" smtClean="0">
+                <a:latin typeface="Helvetica" panose="020B0604020202020204" pitchFamily="34" charset="0"/>
+                <a:cs typeface="Helvetica" panose="020B0604020202020204" pitchFamily="34" charset="0"/>
+              </a:rPr>
+              <a:t>contact:</a:t>
+            </a:r>
+            <a:r>
+              <a:rPr lang="en-US" sz="1600" dirty="0">
+                <a:latin typeface="Helvetica" panose="020B0604020202020204" pitchFamily="34" charset="0"/>
+                <a:cs typeface="Helvetica" panose="020B0604020202020204" pitchFamily="34" charset="0"/>
+              </a:rPr>
+              <a:t/>
+            </a:r>
+            <a:br>
+              <a:rPr lang="en-US" sz="1600" dirty="0">
+                <a:latin typeface="Helvetica" panose="020B0604020202020204" pitchFamily="34" charset="0"/>
+                <a:cs typeface="Helvetica" panose="020B0604020202020204" pitchFamily="34" charset="0"/>
+              </a:rPr>
+            </a:br>
+            <a:r>
+              <a:rPr lang="en-US" sz="1600" u="sng" dirty="0" smtClean="0">
+                <a:solidFill>
+                  <a:srgbClr val="00B0F0"/>
+                </a:solidFill>
+                <a:latin typeface="Helvetica" panose="020B0604020202020204" pitchFamily="34" charset="0"/>
+                <a:cs typeface="Helvetica" panose="020B0604020202020204" pitchFamily="34" charset="0"/>
+              </a:rPr>
+              <a:t>JRC-VECTO@ec.europa.eu</a:t>
+            </a:r>
+            <a:r>
+              <a:rPr lang="en-US" sz="1600" dirty="0" smtClean="0">
+                <a:latin typeface="Helvetica" panose="020B0604020202020204" pitchFamily="34" charset="0"/>
+                <a:cs typeface="Helvetica" panose="020B0604020202020204" pitchFamily="34" charset="0"/>
+              </a:rPr>
+              <a:t/>
+            </a:r>
+            <a:br>
+              <a:rPr lang="en-US" sz="1600" dirty="0" smtClean="0">
+                <a:latin typeface="Helvetica" panose="020B0604020202020204" pitchFamily="34" charset="0"/>
+                <a:cs typeface="Helvetica" panose="020B0604020202020204" pitchFamily="34" charset="0"/>
+              </a:rPr>
+            </a:br>
+            <a:endParaRPr lang="en-US" sz="1600" dirty="0" smtClean="0">
+              <a:latin typeface="Helvetica" panose="020B0604020202020204" pitchFamily="34" charset="0"/>
+              <a:cs typeface="Helvetica" panose="020B0604020202020204" pitchFamily="34" charset="0"/>
+            </a:endParaRPr>
+          </a:p>
+        </p:txBody>
+      </p:sp>
+    </p:spTree>
+    <p:extLst>
+      <p:ext uri="{BB962C8B-B14F-4D97-AF65-F5344CB8AC3E}">
+        <p14:creationId xmlns:p14="http://schemas.microsoft.com/office/powerpoint/2010/main" val="624056410"/>
+      </p:ext>
+    </p:extLst>
+  </p:cSld>
+  <p:clrMapOvr>
+    <a:masterClrMapping/>
+  </p:clrMapOvr>
+  <p:timing>
+    <p:tnLst>
+      <p:par>
+        <p:cTn id="1" dur="indefinite" restart="never" nodeType="tmRoot"/>
+      </p:par>
+    </p:tnLst>
+  </p:timing>
+</p:sld>
+</file>
+
 <file path=ppt/slides/slide2.xml><?xml version="1.0" encoding="utf-8"?>
 <p:sld xmlns:a="http://schemas.openxmlformats.org/drawingml/2006/main" xmlns:r="http://schemas.openxmlformats.org/officeDocument/2006/relationships" xmlns:p="http://schemas.openxmlformats.org/presentationml/2006/main">
   <p:cSld>
@@ -4873,45 +6093,472 @@
       </p:grpSpPr>
       <p:pic>
         <p:nvPicPr>
-          <p:cNvPr id="3" name="Picture 2" descr="J:\TE-Em\Projekte\I_2013_08_HDV_CO2_LOT_4_SR7\VECTO-Engine\VECTO_Engine ab v1.1\v1.4\GUI_input_v4.jpg"/>
+          <p:cNvPr id="6" name="Grafik 5"/>
           <p:cNvPicPr>
-            <a:picLocks noChangeAspect="1" noChangeArrowheads="1"/>
+            <a:picLocks noChangeAspect="1"/>
           </p:cNvPicPr>
           <p:nvPr/>
         </p:nvPicPr>
         <p:blipFill>
-          <a:blip r:embed="rId3">
-            <a:extLst>
-              <a:ext uri="{28A0092B-C50C-407E-A947-70E740481C1C}">
-                <a14:useLocalDpi xmlns:a14="http://schemas.microsoft.com/office/drawing/2010/main" val="0"/>
-              </a:ext>
-            </a:extLst>
-          </a:blip>
-          <a:srcRect/>
+          <a:blip r:embed="rId3"/>
           <a:stretch>
             <a:fillRect/>
           </a:stretch>
         </p:blipFill>
-        <p:spPr bwMode="auto">
+        <p:spPr>
           <a:xfrm>
-            <a:off x="179514" y="1150042"/>
-            <a:ext cx="5492236" cy="5184000"/>
+            <a:off x="179514" y="950535"/>
+            <a:ext cx="5488881" cy="5303294"/>
           </a:xfrm>
           <a:prstGeom prst="rect">
             <a:avLst/>
           </a:prstGeom>
-          <a:noFill/>
-          <a:extLst>
-            <a:ext uri="{909E8E84-426E-40DD-AFC4-6F175D3DCCD1}">
-              <a14:hiddenFill xmlns:a14="http://schemas.microsoft.com/office/drawing/2010/main">
-                <a:solidFill>
-                  <a:srgbClr val="FFFFFF"/>
-                </a:solidFill>
-              </a14:hiddenFill>
-            </a:ext>
-          </a:extLst>
         </p:spPr>
       </p:pic>
+      <p:sp>
+        <p:nvSpPr>
+          <p:cNvPr id="15" name="Legende mit Linie 1 (Markierungsleiste) 14"/>
+          <p:cNvSpPr/>
+          <p:nvPr/>
+        </p:nvSpPr>
+        <p:spPr bwMode="auto">
+          <a:xfrm>
+            <a:off x="6660232" y="4564017"/>
+            <a:ext cx="2376000" cy="683264"/>
+          </a:xfrm>
+          <a:prstGeom prst="accentCallout1">
+            <a:avLst>
+              <a:gd name="adj1" fmla="val 56216"/>
+              <a:gd name="adj2" fmla="val -2353"/>
+              <a:gd name="adj3" fmla="val -13902"/>
+              <a:gd name="adj4" fmla="val -152263"/>
+            </a:avLst>
+          </a:prstGeom>
+          <a:noFill/>
+          <a:ln w="19050" cap="flat" cmpd="sng" algn="ctr">
+            <a:solidFill>
+              <a:srgbClr val="FF33CC"/>
+            </a:solidFill>
+            <a:prstDash val="solid"/>
+            <a:round/>
+            <a:headEnd type="none" w="med" len="med"/>
+            <a:tailEnd type="oval" w="med" len="med"/>
+          </a:ln>
+          <a:effectLst/>
+          <a:extLst/>
+        </p:spPr>
+        <p:txBody>
+          <a:bodyPr vert="horz" wrap="square" lIns="324000" tIns="45720" rIns="91440" bIns="45720" numCol="1" rtlCol="0" anchor="ctr" anchorCtr="0" compatLnSpc="1">
+            <a:prstTxWarp prst="textNoShape">
+              <a:avLst/>
+            </a:prstTxWarp>
+            <a:spAutoFit/>
+          </a:bodyPr>
+          <a:lstStyle/>
+          <a:p>
+            <a:pPr marL="0" marR="0" indent="0" algn="l" defTabSz="914400" rtl="0" eaLnBrk="1" fontAlgn="base" latinLnBrk="0" hangingPunct="1">
+              <a:lnSpc>
+                <a:spcPct val="100000"/>
+              </a:lnSpc>
+              <a:spcBef>
+                <a:spcPct val="30000"/>
+              </a:spcBef>
+              <a:spcAft>
+                <a:spcPct val="0"/>
+              </a:spcAft>
+              <a:buClrTx/>
+              <a:buSzTx/>
+              <a:buFontTx/>
+              <a:buNone/>
+              <a:tabLst/>
+            </a:pPr>
+            <a:r>
+              <a:rPr lang="de-AT" sz="1000" b="0" dirty="0" smtClean="0">
+                <a:latin typeface="Arial" pitchFamily="34" charset="0"/>
+              </a:rPr>
+              <a:t>Press </a:t>
+            </a:r>
+            <a:r>
+              <a:rPr lang="de-AT" sz="1000" b="0" dirty="0" smtClean="0">
+                <a:latin typeface="Arial" pitchFamily="34" charset="0"/>
+              </a:rPr>
+              <a:t>„Start“ </a:t>
+            </a:r>
+            <a:r>
+              <a:rPr lang="de-AT" sz="1000" b="0" dirty="0" err="1" smtClean="0">
+                <a:latin typeface="Arial" pitchFamily="34" charset="0"/>
+              </a:rPr>
+              <a:t>button</a:t>
+            </a:r>
+            <a:r>
+              <a:rPr lang="de-AT" sz="1000" b="0" dirty="0" smtClean="0">
+                <a:latin typeface="Arial" pitchFamily="34" charset="0"/>
+              </a:rPr>
+              <a:t> </a:t>
+            </a:r>
+            <a:r>
+              <a:rPr lang="de-AT" sz="1000" b="0" dirty="0" err="1" smtClean="0">
+                <a:latin typeface="Arial" pitchFamily="34" charset="0"/>
+              </a:rPr>
+              <a:t>for</a:t>
+            </a:r>
+            <a:r>
+              <a:rPr lang="de-AT" sz="1000" b="0" dirty="0" smtClean="0">
+                <a:latin typeface="Arial" pitchFamily="34" charset="0"/>
+              </a:rPr>
+              <a:t> </a:t>
+            </a:r>
+            <a:r>
+              <a:rPr lang="de-AT" sz="1000" b="0" dirty="0" err="1" smtClean="0">
+                <a:latin typeface="Arial" pitchFamily="34" charset="0"/>
+              </a:rPr>
+              <a:t>full</a:t>
+            </a:r>
+            <a:r>
+              <a:rPr lang="de-AT" sz="1000" b="0" dirty="0" smtClean="0">
+                <a:latin typeface="Arial" pitchFamily="34" charset="0"/>
+              </a:rPr>
+              <a:t> </a:t>
+            </a:r>
+            <a:r>
+              <a:rPr lang="de-AT" sz="1000" b="0" dirty="0" err="1" smtClean="0">
+                <a:latin typeface="Arial" pitchFamily="34" charset="0"/>
+              </a:rPr>
+              <a:t>evaluation</a:t>
+            </a:r>
+            <a:endParaRPr lang="de-AT" sz="1000" b="0" dirty="0" smtClean="0">
+              <a:latin typeface="Arial" pitchFamily="34" charset="0"/>
+            </a:endParaRPr>
+          </a:p>
+          <a:p>
+            <a:pPr marL="0" marR="0" indent="0" algn="l" defTabSz="914400" rtl="0" eaLnBrk="1" fontAlgn="base" latinLnBrk="0" hangingPunct="1">
+              <a:lnSpc>
+                <a:spcPct val="100000"/>
+              </a:lnSpc>
+              <a:spcBef>
+                <a:spcPct val="30000"/>
+              </a:spcBef>
+              <a:spcAft>
+                <a:spcPct val="0"/>
+              </a:spcAft>
+              <a:buClrTx/>
+              <a:buSzTx/>
+              <a:buFontTx/>
+              <a:buNone/>
+              <a:tabLst/>
+            </a:pPr>
+            <a:r>
+              <a:rPr kumimoji="0" lang="de-AT" sz="800" b="0" i="1" u="none" strike="noStrike" cap="none" normalizeH="0" baseline="0" dirty="0" smtClean="0">
+                <a:ln>
+                  <a:noFill/>
+                </a:ln>
+                <a:solidFill>
+                  <a:schemeClr val="tx1"/>
+                </a:solidFill>
+                <a:effectLst/>
+                <a:latin typeface="Arial" pitchFamily="34" charset="0"/>
+              </a:rPr>
+              <a:t>(OR press </a:t>
+            </a:r>
+            <a:r>
+              <a:rPr kumimoji="0" lang="de-AT" sz="800" b="0" i="1" u="none" strike="noStrike" cap="none" normalizeH="0" baseline="0" dirty="0" err="1" smtClean="0">
+                <a:ln>
+                  <a:noFill/>
+                </a:ln>
+                <a:solidFill>
+                  <a:schemeClr val="tx1"/>
+                </a:solidFill>
+                <a:effectLst/>
+                <a:latin typeface="Arial" pitchFamily="34" charset="0"/>
+              </a:rPr>
+              <a:t>other</a:t>
+            </a:r>
+            <a:r>
+              <a:rPr kumimoji="0" lang="de-AT" sz="800" b="0" i="1" u="none" strike="noStrike" cap="none" normalizeH="0" baseline="0" dirty="0" smtClean="0">
+                <a:ln>
+                  <a:noFill/>
+                </a:ln>
+                <a:solidFill>
+                  <a:schemeClr val="tx1"/>
+                </a:solidFill>
+                <a:effectLst/>
+                <a:latin typeface="Arial" pitchFamily="34" charset="0"/>
+              </a:rPr>
+              <a:t> </a:t>
+            </a:r>
+            <a:r>
+              <a:rPr kumimoji="0" lang="de-AT" sz="800" b="0" i="1" u="none" strike="noStrike" cap="none" normalizeH="0" baseline="0" dirty="0" err="1" smtClean="0">
+                <a:ln>
+                  <a:noFill/>
+                </a:ln>
+                <a:solidFill>
+                  <a:schemeClr val="tx1"/>
+                </a:solidFill>
+                <a:effectLst/>
+                <a:latin typeface="Arial" pitchFamily="34" charset="0"/>
+              </a:rPr>
+              <a:t>button</a:t>
+            </a:r>
+            <a:r>
+              <a:rPr kumimoji="0" lang="de-AT" sz="800" b="0" i="1" u="none" strike="noStrike" cap="none" normalizeH="0" dirty="0" smtClean="0">
+                <a:ln>
+                  <a:noFill/>
+                </a:ln>
+                <a:solidFill>
+                  <a:schemeClr val="tx1"/>
+                </a:solidFill>
+                <a:effectLst/>
+                <a:latin typeface="Arial" pitchFamily="34" charset="0"/>
+              </a:rPr>
+              <a:t> </a:t>
+            </a:r>
+            <a:r>
+              <a:rPr kumimoji="0" lang="de-AT" sz="800" b="0" i="1" u="none" strike="noStrike" cap="none" normalizeH="0" dirty="0" err="1" smtClean="0">
+                <a:ln>
+                  <a:noFill/>
+                </a:ln>
+                <a:solidFill>
+                  <a:schemeClr val="tx1"/>
+                </a:solidFill>
+                <a:effectLst/>
+                <a:latin typeface="Arial" pitchFamily="34" charset="0"/>
+              </a:rPr>
+              <a:t>to</a:t>
+            </a:r>
+            <a:r>
+              <a:rPr kumimoji="0" lang="de-AT" sz="800" b="0" i="1" u="none" strike="noStrike" cap="none" normalizeH="0" dirty="0" smtClean="0">
+                <a:ln>
+                  <a:noFill/>
+                </a:ln>
+                <a:solidFill>
+                  <a:schemeClr val="tx1"/>
+                </a:solidFill>
+                <a:effectLst/>
+                <a:latin typeface="Arial" pitchFamily="34" charset="0"/>
+              </a:rPr>
+              <a:t> </a:t>
+            </a:r>
+            <a:r>
+              <a:rPr kumimoji="0" lang="de-AT" sz="800" b="0" i="1" u="none" strike="noStrike" cap="none" normalizeH="0" dirty="0" err="1" smtClean="0">
+                <a:ln>
+                  <a:noFill/>
+                </a:ln>
+                <a:solidFill>
+                  <a:schemeClr val="tx1"/>
+                </a:solidFill>
+                <a:effectLst/>
+                <a:latin typeface="Arial" pitchFamily="34" charset="0"/>
+              </a:rPr>
+              <a:t>precalculate</a:t>
+            </a:r>
+            <a:r>
+              <a:rPr kumimoji="0" lang="de-AT" sz="800" b="0" i="1" u="none" strike="noStrike" cap="none" normalizeH="0" dirty="0" smtClean="0">
+                <a:ln>
+                  <a:noFill/>
+                </a:ln>
+                <a:solidFill>
+                  <a:schemeClr val="tx1"/>
+                </a:solidFill>
+                <a:effectLst/>
+                <a:latin typeface="Arial" pitchFamily="34" charset="0"/>
+              </a:rPr>
+              <a:t> </a:t>
+            </a:r>
+            <a:r>
+              <a:rPr kumimoji="0" lang="de-AT" sz="800" b="0" i="1" u="none" strike="noStrike" cap="none" normalizeH="0" dirty="0" err="1" smtClean="0">
+                <a:ln>
+                  <a:noFill/>
+                </a:ln>
+                <a:solidFill>
+                  <a:schemeClr val="tx1"/>
+                </a:solidFill>
+                <a:effectLst/>
+                <a:latin typeface="Arial" pitchFamily="34" charset="0"/>
+              </a:rPr>
+              <a:t>grid</a:t>
+            </a:r>
+            <a:r>
+              <a:rPr kumimoji="0" lang="de-AT" sz="800" b="0" i="1" u="none" strike="noStrike" cap="none" normalizeH="0" dirty="0" smtClean="0">
+                <a:ln>
+                  <a:noFill/>
+                </a:ln>
+                <a:solidFill>
+                  <a:schemeClr val="tx1"/>
+                </a:solidFill>
+                <a:effectLst/>
+                <a:latin typeface="Arial" pitchFamily="34" charset="0"/>
+              </a:rPr>
+              <a:t> </a:t>
+            </a:r>
+            <a:r>
+              <a:rPr kumimoji="0" lang="de-AT" sz="800" b="0" i="1" u="none" strike="noStrike" cap="none" normalizeH="0" dirty="0" err="1" smtClean="0">
+                <a:ln>
+                  <a:noFill/>
+                </a:ln>
+                <a:solidFill>
+                  <a:schemeClr val="tx1"/>
+                </a:solidFill>
+                <a:effectLst/>
+                <a:latin typeface="Arial" pitchFamily="34" charset="0"/>
+              </a:rPr>
+              <a:t>for</a:t>
+            </a:r>
+            <a:r>
+              <a:rPr kumimoji="0" lang="de-AT" sz="800" b="0" i="1" u="none" strike="noStrike" cap="none" normalizeH="0" dirty="0" smtClean="0">
+                <a:ln>
+                  <a:noFill/>
+                </a:ln>
+                <a:solidFill>
+                  <a:schemeClr val="tx1"/>
+                </a:solidFill>
+                <a:effectLst/>
+                <a:latin typeface="Arial" pitchFamily="34" charset="0"/>
+              </a:rPr>
+              <a:t> </a:t>
+            </a:r>
+            <a:r>
+              <a:rPr kumimoji="0" lang="de-AT" sz="800" b="0" i="1" u="none" strike="noStrike" cap="none" normalizeH="0" dirty="0" err="1" smtClean="0">
+                <a:ln>
+                  <a:noFill/>
+                </a:ln>
+                <a:solidFill>
+                  <a:schemeClr val="tx1"/>
+                </a:solidFill>
+                <a:effectLst/>
+                <a:latin typeface="Arial" pitchFamily="34" charset="0"/>
+              </a:rPr>
+              <a:t>fuel</a:t>
+            </a:r>
+            <a:r>
+              <a:rPr kumimoji="0" lang="de-AT" sz="800" b="0" i="1" u="none" strike="noStrike" cap="none" normalizeH="0" dirty="0" smtClean="0">
+                <a:ln>
+                  <a:noFill/>
+                </a:ln>
+                <a:solidFill>
+                  <a:schemeClr val="tx1"/>
+                </a:solidFill>
+                <a:effectLst/>
+                <a:latin typeface="Arial" pitchFamily="34" charset="0"/>
+              </a:rPr>
+              <a:t> </a:t>
+            </a:r>
+            <a:r>
+              <a:rPr kumimoji="0" lang="de-AT" sz="800" b="0" i="1" u="none" strike="noStrike" cap="none" normalizeH="0" dirty="0" err="1" smtClean="0">
+                <a:ln>
+                  <a:noFill/>
+                </a:ln>
+                <a:solidFill>
+                  <a:schemeClr val="tx1"/>
+                </a:solidFill>
+                <a:effectLst/>
+                <a:latin typeface="Arial" pitchFamily="34" charset="0"/>
+              </a:rPr>
+              <a:t>map</a:t>
+            </a:r>
+            <a:r>
+              <a:rPr kumimoji="0" lang="de-AT" sz="800" b="0" i="1" u="none" strike="noStrike" cap="none" normalizeH="0" dirty="0" smtClean="0">
+                <a:ln>
+                  <a:noFill/>
+                </a:ln>
+                <a:solidFill>
+                  <a:schemeClr val="tx1"/>
+                </a:solidFill>
+                <a:effectLst/>
+                <a:latin typeface="Arial" pitchFamily="34" charset="0"/>
+              </a:rPr>
+              <a:t> </a:t>
+            </a:r>
+            <a:r>
+              <a:rPr kumimoji="0" lang="de-AT" sz="800" b="0" i="1" u="none" strike="noStrike" cap="none" normalizeH="0" dirty="0" err="1" smtClean="0">
+                <a:ln>
+                  <a:noFill/>
+                </a:ln>
+                <a:solidFill>
+                  <a:schemeClr val="tx1"/>
+                </a:solidFill>
+                <a:effectLst/>
+                <a:latin typeface="Arial" pitchFamily="34" charset="0"/>
+              </a:rPr>
+              <a:t>from</a:t>
+            </a:r>
+            <a:r>
+              <a:rPr kumimoji="0" lang="de-AT" sz="800" b="0" i="1" u="none" strike="noStrike" cap="none" normalizeH="0" dirty="0" smtClean="0">
+                <a:ln>
+                  <a:noFill/>
+                </a:ln>
+                <a:solidFill>
+                  <a:schemeClr val="tx1"/>
+                </a:solidFill>
+                <a:effectLst/>
+                <a:latin typeface="Arial" pitchFamily="34" charset="0"/>
+              </a:rPr>
+              <a:t> CO2-parent </a:t>
+            </a:r>
+            <a:r>
+              <a:rPr kumimoji="0" lang="de-AT" sz="800" b="0" i="1" u="none" strike="noStrike" cap="none" normalizeH="0" dirty="0" err="1" smtClean="0">
+                <a:ln>
+                  <a:noFill/>
+                </a:ln>
+                <a:solidFill>
+                  <a:schemeClr val="tx1"/>
+                </a:solidFill>
+                <a:effectLst/>
+                <a:latin typeface="Arial" pitchFamily="34" charset="0"/>
+              </a:rPr>
+              <a:t>full-load</a:t>
+            </a:r>
+            <a:r>
+              <a:rPr kumimoji="0" lang="de-AT" sz="800" b="0" i="1" u="none" strike="noStrike" cap="none" normalizeH="0" dirty="0" smtClean="0">
+                <a:ln>
+                  <a:noFill/>
+                </a:ln>
+                <a:solidFill>
+                  <a:schemeClr val="tx1"/>
+                </a:solidFill>
+                <a:effectLst/>
+                <a:latin typeface="Arial" pitchFamily="34" charset="0"/>
+              </a:rPr>
+              <a:t> </a:t>
+            </a:r>
+            <a:r>
+              <a:rPr kumimoji="0" lang="de-AT" sz="800" b="0" i="1" u="none" strike="noStrike" cap="none" normalizeH="0" dirty="0" err="1" smtClean="0">
+                <a:ln>
+                  <a:noFill/>
+                </a:ln>
+                <a:solidFill>
+                  <a:schemeClr val="tx1"/>
+                </a:solidFill>
+                <a:effectLst/>
+                <a:latin typeface="Arial" pitchFamily="34" charset="0"/>
+              </a:rPr>
+              <a:t>curve</a:t>
+            </a:r>
+            <a:r>
+              <a:rPr kumimoji="0" lang="de-AT" sz="800" b="0" i="1" u="none" strike="noStrike" cap="none" normalizeH="0" dirty="0" smtClean="0">
+                <a:ln>
+                  <a:noFill/>
+                </a:ln>
+                <a:solidFill>
+                  <a:schemeClr val="tx1"/>
+                </a:solidFill>
+                <a:effectLst/>
+                <a:latin typeface="Arial" pitchFamily="34" charset="0"/>
+              </a:rPr>
+              <a:t>)</a:t>
+            </a:r>
+            <a:endParaRPr kumimoji="0" lang="en-US" sz="800" b="0" i="1" u="none" strike="noStrike" cap="none" normalizeH="0" baseline="0" dirty="0" smtClean="0">
+              <a:ln>
+                <a:noFill/>
+              </a:ln>
+              <a:solidFill>
+                <a:schemeClr val="tx1"/>
+              </a:solidFill>
+              <a:effectLst/>
+              <a:latin typeface="Arial" pitchFamily="34" charset="0"/>
+            </a:endParaRPr>
+          </a:p>
+        </p:txBody>
+      </p:sp>
       <p:sp>
         <p:nvSpPr>
           <p:cNvPr id="2" name="Titel 1"/>
@@ -4924,7 +6571,7 @@
         </p:nvSpPr>
         <p:spPr>
           <a:xfrm>
-            <a:off x="755576" y="548680"/>
+            <a:off x="468000" y="97200"/>
             <a:ext cx="7632848" cy="576064"/>
           </a:xfrm>
         </p:spPr>
@@ -4948,7 +6595,7 @@
         </p:nvSpPr>
         <p:spPr bwMode="auto">
           <a:xfrm>
-            <a:off x="255788" y="1381958"/>
+            <a:off x="255788" y="1182450"/>
             <a:ext cx="5316466" cy="1584000"/>
           </a:xfrm>
           <a:prstGeom prst="rect">
@@ -4963,7 +6610,7 @@
             <a:solidFill>
               <a:srgbClr val="FF0000"/>
             </a:solidFill>
-            <a:prstDash val="solid"/>
+            <a:prstDash val="sysDash"/>
             <a:round/>
             <a:headEnd type="none" w="med" len="med"/>
             <a:tailEnd type="triangle" w="med" len="med"/>
@@ -5017,82 +6664,38 @@
         </p:nvSpPr>
         <p:spPr bwMode="auto">
           <a:xfrm>
-            <a:off x="6660232" y="1847505"/>
-            <a:ext cx="2483768" cy="820225"/>
+            <a:off x="6660232" y="1861556"/>
+            <a:ext cx="2376000" cy="707886"/>
           </a:xfrm>
           <a:prstGeom prst="accentCallout1">
             <a:avLst>
               <a:gd name="adj1" fmla="val 56216"/>
               <a:gd name="adj2" fmla="val -2353"/>
-              <a:gd name="adj3" fmla="val 155593"/>
-              <a:gd name="adj4" fmla="val -101402"/>
+              <a:gd name="adj3" fmla="val 191410"/>
+              <a:gd name="adj4" fmla="val -43128"/>
             </a:avLst>
           </a:prstGeom>
           <a:noFill/>
           <a:ln w="19050" cap="flat" cmpd="sng" algn="ctr">
             <a:solidFill>
-              <a:schemeClr val="tx1"/>
+              <a:srgbClr val="7030A0"/>
             </a:solidFill>
             <a:prstDash val="solid"/>
             <a:round/>
             <a:headEnd type="none" w="med" len="med"/>
-            <a:tailEnd type="triangle" w="med" len="med"/>
+            <a:tailEnd type="none" w="med" len="med"/>
           </a:ln>
           <a:effectLst/>
           <a:extLst/>
         </p:spPr>
         <p:txBody>
-          <a:bodyPr vert="horz" wrap="square" lIns="91440" tIns="45720" rIns="91440" bIns="45720" numCol="1" rtlCol="0" anchor="ctr" anchorCtr="0" compatLnSpc="1">
+          <a:bodyPr vert="horz" wrap="square" lIns="324000" tIns="45720" rIns="91440" bIns="45720" numCol="1" rtlCol="0" anchor="ctr" anchorCtr="0" compatLnSpc="1">
             <a:prstTxWarp prst="textNoShape">
               <a:avLst/>
             </a:prstTxWarp>
             <a:spAutoFit/>
           </a:bodyPr>
           <a:lstStyle/>
-          <a:p>
-            <a:pPr marL="0" marR="0" indent="0" algn="ctr" defTabSz="914400" rtl="0" eaLnBrk="1" fontAlgn="base" latinLnBrk="0" hangingPunct="1">
-              <a:lnSpc>
-                <a:spcPct val="100000"/>
-              </a:lnSpc>
-              <a:spcBef>
-                <a:spcPct val="30000"/>
-              </a:spcBef>
-              <a:spcAft>
-                <a:spcPct val="0"/>
-              </a:spcAft>
-              <a:buClrTx/>
-              <a:buSzTx/>
-              <a:buFontTx/>
-              <a:buNone/>
-              <a:tabLst/>
-            </a:pPr>
-            <a:r>
-              <a:rPr kumimoji="0" lang="de-AT" sz="1100" i="0" u="sng" strike="noStrike" cap="none" normalizeH="0" baseline="0" dirty="0" err="1" smtClean="0">
-                <a:ln>
-                  <a:noFill/>
-                </a:ln>
-                <a:solidFill>
-                  <a:schemeClr val="tx1"/>
-                </a:solidFill>
-                <a:effectLst/>
-                <a:latin typeface="Arial" pitchFamily="34" charset="0"/>
-              </a:rPr>
-              <a:t>Step</a:t>
-            </a:r>
-            <a:r>
-              <a:rPr kumimoji="0" lang="de-AT" sz="1100" i="0" u="sng" strike="noStrike" cap="none" normalizeH="0" baseline="0" dirty="0" smtClean="0">
-                <a:ln>
-                  <a:noFill/>
-                </a:ln>
-                <a:solidFill>
-                  <a:schemeClr val="tx1"/>
-                </a:solidFill>
-                <a:effectLst/>
-                <a:latin typeface="Arial" pitchFamily="34" charset="0"/>
-              </a:rPr>
-              <a:t> 2</a:t>
-            </a:r>
-          </a:p>
           <a:p>
             <a:pPr marL="0" marR="0" indent="0" algn="l" defTabSz="914400" rtl="0" eaLnBrk="1" fontAlgn="base" latinLnBrk="0" hangingPunct="1">
               <a:lnSpc>
@@ -5111,167 +6714,173 @@
               <a:tabLst/>
             </a:pPr>
             <a:r>
-              <a:rPr lang="de-AT" sz="1100" b="0" dirty="0" smtClean="0">
+              <a:rPr lang="de-AT" sz="1000" b="0" dirty="0" smtClean="0">
                 <a:latin typeface="Arial" pitchFamily="34" charset="0"/>
               </a:rPr>
-              <a:t>Load all </a:t>
-            </a:r>
-            <a:r>
-              <a:rPr lang="de-AT" sz="1100" b="0" dirty="0" err="1" smtClean="0">
+              <a:t>Load </a:t>
+            </a:r>
+            <a:r>
+              <a:rPr lang="de-AT" sz="1000" b="0" dirty="0" smtClean="0">
                 <a:latin typeface="Arial" pitchFamily="34" charset="0"/>
               </a:rPr>
+              <a:t>all </a:t>
+            </a:r>
+            <a:r>
+              <a:rPr lang="de-AT" sz="1000" b="0" dirty="0" err="1" smtClean="0">
+                <a:latin typeface="Arial" pitchFamily="34" charset="0"/>
+              </a:rPr>
               <a:t>required</a:t>
             </a:r>
             <a:r>
-              <a:rPr lang="de-AT" sz="1100" b="0" dirty="0" smtClean="0">
+              <a:rPr lang="de-AT" sz="1000" b="0" dirty="0" smtClean="0">
                 <a:latin typeface="Arial" pitchFamily="34" charset="0"/>
               </a:rPr>
               <a:t> </a:t>
             </a:r>
             <a:r>
-              <a:rPr lang="de-AT" sz="1100" b="0" dirty="0" err="1" smtClean="0">
+              <a:rPr lang="de-AT" sz="1000" b="0" dirty="0" err="1" smtClean="0">
                 <a:latin typeface="Arial" pitchFamily="34" charset="0"/>
               </a:rPr>
               <a:t>input</a:t>
             </a:r>
             <a:r>
-              <a:rPr lang="de-AT" sz="1100" b="0" dirty="0" smtClean="0">
+              <a:rPr lang="de-AT" sz="1000" b="0" dirty="0" smtClean="0">
                 <a:latin typeface="Arial" pitchFamily="34" charset="0"/>
               </a:rPr>
               <a:t> </a:t>
             </a:r>
             <a:r>
-              <a:rPr lang="de-AT" sz="1100" b="0" dirty="0" err="1" smtClean="0">
+              <a:rPr lang="de-AT" sz="1000" b="0" dirty="0" err="1" smtClean="0">
                 <a:latin typeface="Arial" pitchFamily="34" charset="0"/>
               </a:rPr>
               <a:t>files</a:t>
             </a:r>
             <a:r>
-              <a:rPr lang="de-AT" sz="1100" b="0" dirty="0" smtClean="0">
+              <a:rPr lang="de-AT" sz="1000" b="0" dirty="0" smtClean="0">
                 <a:latin typeface="Arial" pitchFamily="34" charset="0"/>
               </a:rPr>
               <a:t> via separate open </a:t>
             </a:r>
             <a:r>
-              <a:rPr lang="de-AT" sz="1100" b="0" dirty="0" err="1" smtClean="0">
+              <a:rPr lang="de-AT" sz="1000" b="0" dirty="0" err="1" smtClean="0">
                 <a:latin typeface="Arial" pitchFamily="34" charset="0"/>
               </a:rPr>
               <a:t>file</a:t>
             </a:r>
             <a:r>
-              <a:rPr lang="de-AT" sz="1100" b="0" dirty="0" smtClean="0">
+              <a:rPr lang="de-AT" sz="1000" b="0" dirty="0" smtClean="0">
                 <a:latin typeface="Arial" pitchFamily="34" charset="0"/>
               </a:rPr>
               <a:t> </a:t>
             </a:r>
             <a:r>
-              <a:rPr lang="de-AT" sz="1100" b="0" dirty="0" err="1" smtClean="0">
+              <a:rPr lang="de-AT" sz="1000" b="0" dirty="0" err="1" smtClean="0">
                 <a:latin typeface="Arial" pitchFamily="34" charset="0"/>
               </a:rPr>
               <a:t>buttons</a:t>
             </a:r>
             <a:r>
-              <a:rPr lang="de-AT" sz="1100" b="0" dirty="0">
+              <a:rPr lang="de-AT" sz="1000" b="0" dirty="0">
                 <a:latin typeface="Arial" pitchFamily="34" charset="0"/>
               </a:rPr>
               <a:t/>
             </a:r>
             <a:br>
-              <a:rPr lang="de-AT" sz="1100" b="0" dirty="0">
+              <a:rPr lang="de-AT" sz="1000" b="0" dirty="0">
                 <a:latin typeface="Arial" pitchFamily="34" charset="0"/>
               </a:rPr>
             </a:br>
             <a:r>
-              <a:rPr lang="de-AT" sz="1100" b="0" dirty="0" smtClean="0">
+              <a:rPr lang="de-AT" sz="1000" b="0" dirty="0" smtClean="0">
                 <a:latin typeface="Arial" pitchFamily="34" charset="0"/>
               </a:rPr>
               <a:t>(</a:t>
             </a:r>
             <a:r>
-              <a:rPr lang="de-AT" sz="1100" b="0" dirty="0" err="1" smtClean="0">
+              <a:rPr lang="de-AT" sz="1000" b="0" dirty="0" err="1" smtClean="0">
                 <a:latin typeface="Arial" pitchFamily="34" charset="0"/>
               </a:rPr>
               <a:t>for</a:t>
             </a:r>
             <a:r>
-              <a:rPr lang="de-AT" sz="1100" b="0" dirty="0" smtClean="0">
+              <a:rPr lang="de-AT" sz="1000" b="0" dirty="0" smtClean="0">
                 <a:latin typeface="Arial" pitchFamily="34" charset="0"/>
               </a:rPr>
               <a:t> </a:t>
             </a:r>
             <a:r>
-              <a:rPr lang="de-AT" sz="1100" b="0" dirty="0" err="1" smtClean="0">
+              <a:rPr lang="de-AT" sz="1000" b="0" dirty="0" err="1" smtClean="0">
                 <a:latin typeface="Arial" pitchFamily="34" charset="0"/>
               </a:rPr>
               <a:t>file</a:t>
             </a:r>
             <a:r>
-              <a:rPr lang="de-AT" sz="1100" b="0" dirty="0" smtClean="0">
+              <a:rPr lang="de-AT" sz="1000" b="0" dirty="0" smtClean="0">
                 <a:latin typeface="Arial" pitchFamily="34" charset="0"/>
               </a:rPr>
               <a:t> </a:t>
             </a:r>
             <a:r>
-              <a:rPr lang="de-AT" sz="1100" b="0" dirty="0" err="1" smtClean="0">
+              <a:rPr lang="de-AT" sz="1000" b="0" dirty="0" err="1" smtClean="0">
                 <a:latin typeface="Arial" pitchFamily="34" charset="0"/>
               </a:rPr>
               <a:t>format</a:t>
             </a:r>
             <a:r>
-              <a:rPr lang="de-AT" sz="1100" b="0" dirty="0" smtClean="0">
+              <a:rPr lang="de-AT" sz="1000" b="0" dirty="0" smtClean="0">
                 <a:latin typeface="Arial" pitchFamily="34" charset="0"/>
               </a:rPr>
               <a:t> </a:t>
             </a:r>
             <a:r>
-              <a:rPr lang="de-AT" sz="1100" b="0" dirty="0" err="1" smtClean="0">
+              <a:rPr lang="de-AT" sz="1000" b="0" dirty="0" err="1" smtClean="0">
                 <a:latin typeface="Arial" pitchFamily="34" charset="0"/>
               </a:rPr>
               <a:t>please</a:t>
             </a:r>
             <a:r>
-              <a:rPr lang="de-AT" sz="1100" b="0" dirty="0" smtClean="0">
+              <a:rPr lang="de-AT" sz="1000" b="0" dirty="0" smtClean="0">
                 <a:latin typeface="Arial" pitchFamily="34" charset="0"/>
               </a:rPr>
               <a:t> </a:t>
             </a:r>
             <a:r>
-              <a:rPr lang="de-AT" sz="1100" b="0" dirty="0" err="1" smtClean="0">
+              <a:rPr lang="de-AT" sz="1000" b="0" dirty="0" err="1" smtClean="0">
                 <a:latin typeface="Arial" pitchFamily="34" charset="0"/>
               </a:rPr>
               <a:t>see</a:t>
             </a:r>
             <a:r>
-              <a:rPr lang="de-AT" sz="1100" b="0" dirty="0" smtClean="0">
+              <a:rPr lang="de-AT" sz="1000" b="0" dirty="0" smtClean="0">
                 <a:latin typeface="Arial" pitchFamily="34" charset="0"/>
               </a:rPr>
               <a:t> </a:t>
             </a:r>
             <a:r>
-              <a:rPr lang="de-AT" sz="1100" b="0" dirty="0" err="1" smtClean="0">
+              <a:rPr lang="de-AT" sz="1000" b="0" dirty="0" err="1" smtClean="0">
                 <a:latin typeface="Arial" pitchFamily="34" charset="0"/>
               </a:rPr>
               <a:t>demo</a:t>
             </a:r>
             <a:r>
-              <a:rPr lang="de-AT" sz="1100" b="0" dirty="0" smtClean="0">
+              <a:rPr lang="de-AT" sz="1000" b="0" dirty="0" smtClean="0">
                 <a:latin typeface="Arial" pitchFamily="34" charset="0"/>
               </a:rPr>
               <a:t> </a:t>
             </a:r>
             <a:r>
-              <a:rPr lang="de-AT" sz="1100" b="0" dirty="0" err="1" smtClean="0">
+              <a:rPr lang="de-AT" sz="1000" b="0" dirty="0" err="1" smtClean="0">
                 <a:latin typeface="Arial" pitchFamily="34" charset="0"/>
               </a:rPr>
               <a:t>files</a:t>
             </a:r>
             <a:r>
-              <a:rPr lang="de-AT" sz="1100" b="0" dirty="0" smtClean="0">
+              <a:rPr lang="de-AT" sz="1000" b="0" dirty="0" smtClean="0">
                 <a:latin typeface="Arial" pitchFamily="34" charset="0"/>
               </a:rPr>
               <a:t>)</a:t>
             </a:r>
-            <a:endParaRPr kumimoji="0" lang="en-US" sz="1100" b="0" i="0" u="none" strike="noStrike" cap="none" normalizeH="0" baseline="0" dirty="0" smtClean="0">
+            <a:endParaRPr kumimoji="0" lang="en-US" sz="1000" b="0" i="0" u="none" strike="noStrike" cap="none" normalizeH="0" baseline="0" dirty="0" smtClean="0">
               <a:ln>
                 <a:noFill/>
               </a:ln>
@@ -5292,82 +6901,38 @@
         </p:nvSpPr>
         <p:spPr bwMode="auto">
           <a:xfrm>
-            <a:off x="6660232" y="3789040"/>
-            <a:ext cx="2483768" cy="650947"/>
+            <a:off x="6660232" y="3695506"/>
+            <a:ext cx="2376000" cy="648000"/>
           </a:xfrm>
           <a:prstGeom prst="accentCallout1">
             <a:avLst>
               <a:gd name="adj1" fmla="val 56216"/>
               <a:gd name="adj2" fmla="val -2353"/>
-              <a:gd name="adj3" fmla="val 192527"/>
-              <a:gd name="adj4" fmla="val -83159"/>
+              <a:gd name="adj3" fmla="val 172152"/>
+              <a:gd name="adj4" fmla="val -43145"/>
             </a:avLst>
           </a:prstGeom>
           <a:noFill/>
           <a:ln w="19050" cap="flat" cmpd="sng" algn="ctr">
             <a:solidFill>
-              <a:schemeClr val="tx1"/>
+              <a:srgbClr val="FFC000"/>
             </a:solidFill>
             <a:prstDash val="solid"/>
             <a:round/>
             <a:headEnd type="none" w="med" len="med"/>
-            <a:tailEnd type="triangle" w="med" len="med"/>
+            <a:tailEnd type="none" w="med" len="med"/>
           </a:ln>
           <a:effectLst/>
           <a:extLst/>
         </p:spPr>
         <p:txBody>
-          <a:bodyPr vert="horz" wrap="square" lIns="91440" tIns="45720" rIns="91440" bIns="45720" numCol="1" rtlCol="0" anchor="ctr" anchorCtr="0" compatLnSpc="1">
+          <a:bodyPr vert="horz" wrap="square" lIns="324000" tIns="45720" rIns="91440" bIns="45720" numCol="1" rtlCol="0" anchor="ctr" anchorCtr="0" compatLnSpc="1">
             <a:prstTxWarp prst="textNoShape">
               <a:avLst/>
             </a:prstTxWarp>
             <a:spAutoFit/>
           </a:bodyPr>
           <a:lstStyle/>
-          <a:p>
-            <a:pPr marL="0" marR="0" indent="0" algn="ctr" defTabSz="914400" rtl="0" eaLnBrk="1" fontAlgn="base" latinLnBrk="0" hangingPunct="1">
-              <a:lnSpc>
-                <a:spcPct val="100000"/>
-              </a:lnSpc>
-              <a:spcBef>
-                <a:spcPct val="30000"/>
-              </a:spcBef>
-              <a:spcAft>
-                <a:spcPct val="0"/>
-              </a:spcAft>
-              <a:buClrTx/>
-              <a:buSzTx/>
-              <a:buFontTx/>
-              <a:buNone/>
-              <a:tabLst/>
-            </a:pPr>
-            <a:r>
-              <a:rPr kumimoji="0" lang="de-AT" sz="1100" i="0" u="sng" strike="noStrike" cap="none" normalizeH="0" baseline="0" dirty="0" err="1" smtClean="0">
-                <a:ln>
-                  <a:noFill/>
-                </a:ln>
-                <a:solidFill>
-                  <a:schemeClr val="tx1"/>
-                </a:solidFill>
-                <a:effectLst/>
-                <a:latin typeface="Arial" pitchFamily="34" charset="0"/>
-              </a:rPr>
-              <a:t>Step</a:t>
-            </a:r>
-            <a:r>
-              <a:rPr kumimoji="0" lang="de-AT" sz="1100" i="0" u="sng" strike="noStrike" cap="none" normalizeH="0" baseline="0" dirty="0" smtClean="0">
-                <a:ln>
-                  <a:noFill/>
-                </a:ln>
-                <a:solidFill>
-                  <a:schemeClr val="tx1"/>
-                </a:solidFill>
-                <a:effectLst/>
-                <a:latin typeface="Arial" pitchFamily="34" charset="0"/>
-              </a:rPr>
-              <a:t> 4</a:t>
-            </a:r>
-          </a:p>
           <a:p>
             <a:pPr marL="0" marR="0" indent="0" algn="l" defTabSz="914400" rtl="0" eaLnBrk="1" fontAlgn="base" latinLnBrk="0" hangingPunct="1">
               <a:lnSpc>
@@ -5386,572 +6951,90 @@
               <a:tabLst/>
             </a:pPr>
             <a:r>
-              <a:rPr lang="de-AT" sz="1100" b="0" dirty="0" err="1" smtClean="0">
+              <a:rPr lang="de-AT" sz="1000" b="0" dirty="0" err="1" smtClean="0">
                 <a:latin typeface="Arial" pitchFamily="34" charset="0"/>
               </a:rPr>
               <a:t>Define</a:t>
             </a:r>
             <a:r>
-              <a:rPr lang="de-AT" sz="1100" b="0" dirty="0" smtClean="0">
+              <a:rPr lang="de-AT" sz="1000" b="0" dirty="0" smtClean="0">
                 <a:latin typeface="Arial" pitchFamily="34" charset="0"/>
               </a:rPr>
               <a:t> </a:t>
             </a:r>
             <a:r>
-              <a:rPr lang="de-AT" sz="1100" b="0" dirty="0" err="1" smtClean="0">
+              <a:rPr lang="de-AT" sz="1000" b="0" dirty="0" err="1" smtClean="0">
                 <a:latin typeface="Arial" pitchFamily="34" charset="0"/>
               </a:rPr>
               <a:t>directory</a:t>
             </a:r>
             <a:r>
-              <a:rPr lang="de-AT" sz="1100" b="0" dirty="0" smtClean="0">
+              <a:rPr lang="de-AT" sz="1000" b="0" dirty="0" smtClean="0">
                 <a:latin typeface="Arial" pitchFamily="34" charset="0"/>
               </a:rPr>
               <a:t> </a:t>
             </a:r>
             <a:r>
-              <a:rPr lang="de-AT" sz="1100" b="0" dirty="0" err="1" smtClean="0">
+              <a:rPr lang="de-AT" sz="1000" b="0" dirty="0" err="1" smtClean="0">
                 <a:latin typeface="Arial" pitchFamily="34" charset="0"/>
               </a:rPr>
               <a:t>where</a:t>
             </a:r>
             <a:r>
-              <a:rPr lang="de-AT" sz="1100" b="0" dirty="0" smtClean="0">
+              <a:rPr lang="de-AT" sz="1000" b="0" dirty="0" smtClean="0">
                 <a:latin typeface="Arial" pitchFamily="34" charset="0"/>
               </a:rPr>
               <a:t> </a:t>
             </a:r>
             <a:r>
-              <a:rPr lang="de-AT" sz="1100" b="0" dirty="0" err="1" smtClean="0">
+              <a:rPr lang="de-AT" sz="1000" b="0" dirty="0" err="1" smtClean="0">
                 <a:latin typeface="Arial" pitchFamily="34" charset="0"/>
               </a:rPr>
               <a:t>output</a:t>
             </a:r>
             <a:r>
-              <a:rPr lang="de-AT" sz="1100" b="0" dirty="0" smtClean="0">
+              <a:rPr lang="de-AT" sz="1000" b="0" dirty="0" smtClean="0">
                 <a:latin typeface="Arial" pitchFamily="34" charset="0"/>
               </a:rPr>
               <a:t> </a:t>
             </a:r>
             <a:r>
-              <a:rPr lang="de-AT" sz="1100" b="0" dirty="0" err="1" smtClean="0">
+              <a:rPr lang="de-AT" sz="1000" b="0" dirty="0" err="1" smtClean="0">
                 <a:latin typeface="Arial" pitchFamily="34" charset="0"/>
               </a:rPr>
               <a:t>files</a:t>
             </a:r>
             <a:r>
-              <a:rPr lang="de-AT" sz="1100" b="0" dirty="0" smtClean="0">
+              <a:rPr lang="de-AT" sz="1000" b="0" dirty="0" smtClean="0">
                 <a:latin typeface="Arial" pitchFamily="34" charset="0"/>
               </a:rPr>
               <a:t> </a:t>
             </a:r>
             <a:r>
-              <a:rPr lang="de-AT" sz="1100" b="0" dirty="0" err="1" smtClean="0">
+              <a:rPr lang="de-AT" sz="1000" b="0" dirty="0" err="1" smtClean="0">
                 <a:latin typeface="Arial" pitchFamily="34" charset="0"/>
               </a:rPr>
               <a:t>are</a:t>
             </a:r>
             <a:r>
-              <a:rPr lang="de-AT" sz="1100" b="0" dirty="0" smtClean="0">
+              <a:rPr lang="de-AT" sz="1000" b="0" dirty="0" smtClean="0">
                 <a:latin typeface="Arial" pitchFamily="34" charset="0"/>
               </a:rPr>
               <a:t> </a:t>
             </a:r>
             <a:r>
-              <a:rPr lang="de-AT" sz="1100" b="0" dirty="0" err="1" smtClean="0">
+              <a:rPr lang="de-AT" sz="1000" b="0" dirty="0" err="1" smtClean="0">
                 <a:latin typeface="Arial" pitchFamily="34" charset="0"/>
               </a:rPr>
               <a:t>stored</a:t>
             </a:r>
             <a:r>
-              <a:rPr lang="de-AT" sz="1100" b="0" dirty="0" smtClean="0">
+              <a:rPr lang="de-AT" sz="1000" b="0" dirty="0" smtClean="0">
                 <a:latin typeface="Arial" pitchFamily="34" charset="0"/>
               </a:rPr>
               <a:t> </a:t>
             </a:r>
-            <a:endParaRPr kumimoji="0" lang="en-US" sz="1100" b="0" i="0" u="none" strike="noStrike" cap="none" normalizeH="0" baseline="0" dirty="0" smtClean="0">
-              <a:ln>
-                <a:noFill/>
-              </a:ln>
-              <a:solidFill>
-                <a:schemeClr val="tx1"/>
-              </a:solidFill>
-              <a:effectLst/>
-              <a:latin typeface="Arial" pitchFamily="34" charset="0"/>
-            </a:endParaRPr>
-          </a:p>
-        </p:txBody>
-      </p:sp>
-      <p:sp>
-        <p:nvSpPr>
-          <p:cNvPr id="15" name="Legende mit Linie 1 (Markierungsleiste) 14"/>
-          <p:cNvSpPr/>
-          <p:nvPr/>
-        </p:nvSpPr>
-        <p:spPr bwMode="auto">
-          <a:xfrm>
-            <a:off x="6660232" y="4682847"/>
-            <a:ext cx="2483768" cy="764825"/>
-          </a:xfrm>
-          <a:prstGeom prst="accentCallout1">
-            <a:avLst>
-              <a:gd name="adj1" fmla="val 56216"/>
-              <a:gd name="adj2" fmla="val -2353"/>
-              <a:gd name="adj3" fmla="val 310"/>
-              <a:gd name="adj4" fmla="val -147835"/>
-            </a:avLst>
-          </a:prstGeom>
-          <a:noFill/>
-          <a:ln w="19050" cap="flat" cmpd="sng" algn="ctr">
-            <a:solidFill>
-              <a:schemeClr val="tx1"/>
-            </a:solidFill>
-            <a:prstDash val="solid"/>
-            <a:round/>
-            <a:headEnd type="none" w="med" len="med"/>
-            <a:tailEnd type="triangle" w="med" len="med"/>
-          </a:ln>
-          <a:effectLst/>
-          <a:extLst/>
-        </p:spPr>
-        <p:txBody>
-          <a:bodyPr vert="horz" wrap="square" lIns="91440" tIns="45720" rIns="91440" bIns="45720" numCol="1" rtlCol="0" anchor="ctr" anchorCtr="0" compatLnSpc="1">
-            <a:prstTxWarp prst="textNoShape">
-              <a:avLst/>
-            </a:prstTxWarp>
-            <a:spAutoFit/>
-          </a:bodyPr>
-          <a:lstStyle/>
-          <a:p>
-            <a:pPr marL="0" marR="0" indent="0" algn="ctr" defTabSz="914400" rtl="0" eaLnBrk="1" fontAlgn="base" latinLnBrk="0" hangingPunct="1">
-              <a:lnSpc>
-                <a:spcPct val="100000"/>
-              </a:lnSpc>
-              <a:spcBef>
-                <a:spcPct val="30000"/>
-              </a:spcBef>
-              <a:spcAft>
-                <a:spcPct val="0"/>
-              </a:spcAft>
-              <a:buClrTx/>
-              <a:buSzTx/>
-              <a:buFontTx/>
-              <a:buNone/>
-              <a:tabLst/>
-            </a:pPr>
-            <a:r>
-              <a:rPr kumimoji="0" lang="de-AT" sz="1100" i="0" u="sng" strike="noStrike" cap="none" normalizeH="0" baseline="0" dirty="0" err="1" smtClean="0">
-                <a:ln>
-                  <a:noFill/>
-                </a:ln>
-                <a:solidFill>
-                  <a:schemeClr val="tx1"/>
-                </a:solidFill>
-                <a:effectLst/>
-                <a:latin typeface="Arial" pitchFamily="34" charset="0"/>
-              </a:rPr>
-              <a:t>Step</a:t>
-            </a:r>
-            <a:r>
-              <a:rPr kumimoji="0" lang="de-AT" sz="1100" i="0" u="sng" strike="noStrike" cap="none" normalizeH="0" baseline="0" dirty="0" smtClean="0">
-                <a:ln>
-                  <a:noFill/>
-                </a:ln>
-                <a:solidFill>
-                  <a:schemeClr val="tx1"/>
-                </a:solidFill>
-                <a:effectLst/>
-                <a:latin typeface="Arial" pitchFamily="34" charset="0"/>
-              </a:rPr>
-              <a:t> 5</a:t>
-            </a:r>
-          </a:p>
-          <a:p>
-            <a:pPr marL="0" marR="0" indent="0" algn="l" defTabSz="914400" rtl="0" eaLnBrk="1" fontAlgn="base" latinLnBrk="0" hangingPunct="1">
-              <a:lnSpc>
-                <a:spcPct val="100000"/>
-              </a:lnSpc>
-              <a:spcBef>
-                <a:spcPct val="30000"/>
-              </a:spcBef>
-              <a:spcAft>
-                <a:spcPct val="0"/>
-              </a:spcAft>
-              <a:buClrTx/>
-              <a:buSzTx/>
-              <a:buFontTx/>
-              <a:buNone/>
-              <a:tabLst/>
-            </a:pPr>
-            <a:r>
-              <a:rPr lang="de-AT" sz="1100" b="0" dirty="0" smtClean="0">
-                <a:latin typeface="Arial" pitchFamily="34" charset="0"/>
-              </a:rPr>
-              <a:t>Press „Start“ </a:t>
-            </a:r>
-            <a:r>
-              <a:rPr lang="de-AT" sz="1100" b="0" dirty="0" err="1" smtClean="0">
-                <a:latin typeface="Arial" pitchFamily="34" charset="0"/>
-              </a:rPr>
-              <a:t>button</a:t>
-            </a:r>
-            <a:r>
-              <a:rPr lang="de-AT" sz="1100" b="0" dirty="0" smtClean="0">
-                <a:latin typeface="Arial" pitchFamily="34" charset="0"/>
-              </a:rPr>
-              <a:t> </a:t>
-            </a:r>
-            <a:r>
-              <a:rPr lang="de-AT" sz="1100" b="0" dirty="0" err="1" smtClean="0">
-                <a:latin typeface="Arial" pitchFamily="34" charset="0"/>
-              </a:rPr>
-              <a:t>for</a:t>
-            </a:r>
-            <a:r>
-              <a:rPr lang="de-AT" sz="1100" b="0" dirty="0" smtClean="0">
-                <a:latin typeface="Arial" pitchFamily="34" charset="0"/>
-              </a:rPr>
-              <a:t> </a:t>
-            </a:r>
-            <a:r>
-              <a:rPr lang="de-AT" sz="1100" b="0" dirty="0" err="1" smtClean="0">
-                <a:latin typeface="Arial" pitchFamily="34" charset="0"/>
-              </a:rPr>
-              <a:t>full</a:t>
-            </a:r>
-            <a:r>
-              <a:rPr lang="de-AT" sz="1100" b="0" dirty="0" smtClean="0">
-                <a:latin typeface="Arial" pitchFamily="34" charset="0"/>
-              </a:rPr>
-              <a:t> </a:t>
-            </a:r>
-            <a:r>
-              <a:rPr lang="de-AT" sz="1100" b="0" dirty="0" err="1" smtClean="0">
-                <a:latin typeface="Arial" pitchFamily="34" charset="0"/>
-              </a:rPr>
-              <a:t>evaluation</a:t>
-            </a:r>
-            <a:endParaRPr lang="de-AT" sz="1100" b="0" dirty="0" smtClean="0">
-              <a:latin typeface="Arial" pitchFamily="34" charset="0"/>
-            </a:endParaRPr>
-          </a:p>
-          <a:p>
-            <a:pPr marL="0" marR="0" indent="0" algn="l" defTabSz="914400" rtl="0" eaLnBrk="1" fontAlgn="base" latinLnBrk="0" hangingPunct="1">
-              <a:lnSpc>
-                <a:spcPct val="100000"/>
-              </a:lnSpc>
-              <a:spcBef>
-                <a:spcPct val="30000"/>
-              </a:spcBef>
-              <a:spcAft>
-                <a:spcPct val="0"/>
-              </a:spcAft>
-              <a:buClrTx/>
-              <a:buSzTx/>
-              <a:buFontTx/>
-              <a:buNone/>
-              <a:tabLst/>
-            </a:pPr>
-            <a:r>
-              <a:rPr kumimoji="0" lang="de-AT" sz="800" b="0" i="1" u="none" strike="noStrike" cap="none" normalizeH="0" baseline="0" dirty="0" smtClean="0">
-                <a:ln>
-                  <a:noFill/>
-                </a:ln>
-                <a:solidFill>
-                  <a:schemeClr val="tx1"/>
-                </a:solidFill>
-                <a:effectLst/>
-                <a:latin typeface="Arial" pitchFamily="34" charset="0"/>
-              </a:rPr>
-              <a:t>(OR press </a:t>
-            </a:r>
-            <a:r>
-              <a:rPr kumimoji="0" lang="de-AT" sz="800" b="0" i="1" u="none" strike="noStrike" cap="none" normalizeH="0" baseline="0" dirty="0" err="1" smtClean="0">
-                <a:ln>
-                  <a:noFill/>
-                </a:ln>
-                <a:solidFill>
-                  <a:schemeClr val="tx1"/>
-                </a:solidFill>
-                <a:effectLst/>
-                <a:latin typeface="Arial" pitchFamily="34" charset="0"/>
-              </a:rPr>
-              <a:t>other</a:t>
-            </a:r>
-            <a:r>
-              <a:rPr kumimoji="0" lang="de-AT" sz="800" b="0" i="1" u="none" strike="noStrike" cap="none" normalizeH="0" baseline="0" dirty="0" smtClean="0">
-                <a:ln>
-                  <a:noFill/>
-                </a:ln>
-                <a:solidFill>
-                  <a:schemeClr val="tx1"/>
-                </a:solidFill>
-                <a:effectLst/>
-                <a:latin typeface="Arial" pitchFamily="34" charset="0"/>
-              </a:rPr>
-              <a:t> </a:t>
-            </a:r>
-            <a:r>
-              <a:rPr kumimoji="0" lang="de-AT" sz="800" b="0" i="1" u="none" strike="noStrike" cap="none" normalizeH="0" baseline="0" dirty="0" err="1" smtClean="0">
-                <a:ln>
-                  <a:noFill/>
-                </a:ln>
-                <a:solidFill>
-                  <a:schemeClr val="tx1"/>
-                </a:solidFill>
-                <a:effectLst/>
-                <a:latin typeface="Arial" pitchFamily="34" charset="0"/>
-              </a:rPr>
-              <a:t>button</a:t>
-            </a:r>
-            <a:r>
-              <a:rPr kumimoji="0" lang="de-AT" sz="800" b="0" i="1" u="none" strike="noStrike" cap="none" normalizeH="0" dirty="0" smtClean="0">
-                <a:ln>
-                  <a:noFill/>
-                </a:ln>
-                <a:solidFill>
-                  <a:schemeClr val="tx1"/>
-                </a:solidFill>
-                <a:effectLst/>
-                <a:latin typeface="Arial" pitchFamily="34" charset="0"/>
-              </a:rPr>
-              <a:t> </a:t>
-            </a:r>
-            <a:r>
-              <a:rPr kumimoji="0" lang="de-AT" sz="800" b="0" i="1" u="none" strike="noStrike" cap="none" normalizeH="0" dirty="0" err="1" smtClean="0">
-                <a:ln>
-                  <a:noFill/>
-                </a:ln>
-                <a:solidFill>
-                  <a:schemeClr val="tx1"/>
-                </a:solidFill>
-                <a:effectLst/>
-                <a:latin typeface="Arial" pitchFamily="34" charset="0"/>
-              </a:rPr>
-              <a:t>to</a:t>
-            </a:r>
-            <a:r>
-              <a:rPr kumimoji="0" lang="de-AT" sz="800" b="0" i="1" u="none" strike="noStrike" cap="none" normalizeH="0" dirty="0" smtClean="0">
-                <a:ln>
-                  <a:noFill/>
-                </a:ln>
-                <a:solidFill>
-                  <a:schemeClr val="tx1"/>
-                </a:solidFill>
-                <a:effectLst/>
-                <a:latin typeface="Arial" pitchFamily="34" charset="0"/>
-              </a:rPr>
-              <a:t> </a:t>
-            </a:r>
-            <a:r>
-              <a:rPr kumimoji="0" lang="de-AT" sz="800" b="0" i="1" u="none" strike="noStrike" cap="none" normalizeH="0" dirty="0" err="1" smtClean="0">
-                <a:ln>
-                  <a:noFill/>
-                </a:ln>
-                <a:solidFill>
-                  <a:schemeClr val="tx1"/>
-                </a:solidFill>
-                <a:effectLst/>
-                <a:latin typeface="Arial" pitchFamily="34" charset="0"/>
-              </a:rPr>
-              <a:t>precalculate</a:t>
-            </a:r>
-            <a:r>
-              <a:rPr kumimoji="0" lang="de-AT" sz="800" b="0" i="1" u="none" strike="noStrike" cap="none" normalizeH="0" dirty="0" smtClean="0">
-                <a:ln>
-                  <a:noFill/>
-                </a:ln>
-                <a:solidFill>
-                  <a:schemeClr val="tx1"/>
-                </a:solidFill>
-                <a:effectLst/>
-                <a:latin typeface="Arial" pitchFamily="34" charset="0"/>
-              </a:rPr>
-              <a:t> </a:t>
-            </a:r>
-            <a:r>
-              <a:rPr kumimoji="0" lang="de-AT" sz="800" b="0" i="1" u="none" strike="noStrike" cap="none" normalizeH="0" dirty="0" err="1" smtClean="0">
-                <a:ln>
-                  <a:noFill/>
-                </a:ln>
-                <a:solidFill>
-                  <a:schemeClr val="tx1"/>
-                </a:solidFill>
-                <a:effectLst/>
-                <a:latin typeface="Arial" pitchFamily="34" charset="0"/>
-              </a:rPr>
-              <a:t>grid</a:t>
-            </a:r>
-            <a:r>
-              <a:rPr kumimoji="0" lang="de-AT" sz="800" b="0" i="1" u="none" strike="noStrike" cap="none" normalizeH="0" dirty="0" smtClean="0">
-                <a:ln>
-                  <a:noFill/>
-                </a:ln>
-                <a:solidFill>
-                  <a:schemeClr val="tx1"/>
-                </a:solidFill>
-                <a:effectLst/>
-                <a:latin typeface="Arial" pitchFamily="34" charset="0"/>
-              </a:rPr>
-              <a:t> </a:t>
-            </a:r>
-            <a:r>
-              <a:rPr kumimoji="0" lang="de-AT" sz="800" b="0" i="1" u="none" strike="noStrike" cap="none" normalizeH="0" dirty="0" err="1" smtClean="0">
-                <a:ln>
-                  <a:noFill/>
-                </a:ln>
-                <a:solidFill>
-                  <a:schemeClr val="tx1"/>
-                </a:solidFill>
-                <a:effectLst/>
-                <a:latin typeface="Arial" pitchFamily="34" charset="0"/>
-              </a:rPr>
-              <a:t>for</a:t>
-            </a:r>
-            <a:r>
-              <a:rPr kumimoji="0" lang="de-AT" sz="800" b="0" i="1" u="none" strike="noStrike" cap="none" normalizeH="0" dirty="0" smtClean="0">
-                <a:ln>
-                  <a:noFill/>
-                </a:ln>
-                <a:solidFill>
-                  <a:schemeClr val="tx1"/>
-                </a:solidFill>
-                <a:effectLst/>
-                <a:latin typeface="Arial" pitchFamily="34" charset="0"/>
-              </a:rPr>
-              <a:t> </a:t>
-            </a:r>
-            <a:r>
-              <a:rPr kumimoji="0" lang="de-AT" sz="800" b="0" i="1" u="none" strike="noStrike" cap="none" normalizeH="0" dirty="0" err="1" smtClean="0">
-                <a:ln>
-                  <a:noFill/>
-                </a:ln>
-                <a:solidFill>
-                  <a:schemeClr val="tx1"/>
-                </a:solidFill>
-                <a:effectLst/>
-                <a:latin typeface="Arial" pitchFamily="34" charset="0"/>
-              </a:rPr>
-              <a:t>fuel</a:t>
-            </a:r>
-            <a:r>
-              <a:rPr kumimoji="0" lang="de-AT" sz="800" b="0" i="1" u="none" strike="noStrike" cap="none" normalizeH="0" dirty="0" smtClean="0">
-                <a:ln>
-                  <a:noFill/>
-                </a:ln>
-                <a:solidFill>
-                  <a:schemeClr val="tx1"/>
-                </a:solidFill>
-                <a:effectLst/>
-                <a:latin typeface="Arial" pitchFamily="34" charset="0"/>
-              </a:rPr>
-              <a:t> </a:t>
-            </a:r>
-            <a:r>
-              <a:rPr kumimoji="0" lang="de-AT" sz="800" b="0" i="1" u="none" strike="noStrike" cap="none" normalizeH="0" dirty="0" err="1" smtClean="0">
-                <a:ln>
-                  <a:noFill/>
-                </a:ln>
-                <a:solidFill>
-                  <a:schemeClr val="tx1"/>
-                </a:solidFill>
-                <a:effectLst/>
-                <a:latin typeface="Arial" pitchFamily="34" charset="0"/>
-              </a:rPr>
-              <a:t>map</a:t>
-            </a:r>
-            <a:r>
-              <a:rPr kumimoji="0" lang="de-AT" sz="800" b="0" i="1" u="none" strike="noStrike" cap="none" normalizeH="0" dirty="0" smtClean="0">
-                <a:ln>
-                  <a:noFill/>
-                </a:ln>
-                <a:solidFill>
-                  <a:schemeClr val="tx1"/>
-                </a:solidFill>
-                <a:effectLst/>
-                <a:latin typeface="Arial" pitchFamily="34" charset="0"/>
-              </a:rPr>
-              <a:t> </a:t>
-            </a:r>
-            <a:r>
-              <a:rPr kumimoji="0" lang="de-AT" sz="800" b="0" i="1" u="none" strike="noStrike" cap="none" normalizeH="0" dirty="0" err="1" smtClean="0">
-                <a:ln>
-                  <a:noFill/>
-                </a:ln>
-                <a:solidFill>
-                  <a:schemeClr val="tx1"/>
-                </a:solidFill>
-                <a:effectLst/>
-                <a:latin typeface="Arial" pitchFamily="34" charset="0"/>
-              </a:rPr>
-              <a:t>from</a:t>
-            </a:r>
-            <a:r>
-              <a:rPr kumimoji="0" lang="de-AT" sz="800" b="0" i="1" u="none" strike="noStrike" cap="none" normalizeH="0" dirty="0" smtClean="0">
-                <a:ln>
-                  <a:noFill/>
-                </a:ln>
-                <a:solidFill>
-                  <a:schemeClr val="tx1"/>
-                </a:solidFill>
-                <a:effectLst/>
-                <a:latin typeface="Arial" pitchFamily="34" charset="0"/>
-              </a:rPr>
-              <a:t> CO2-parent </a:t>
-            </a:r>
-            <a:r>
-              <a:rPr kumimoji="0" lang="de-AT" sz="800" b="0" i="1" u="none" strike="noStrike" cap="none" normalizeH="0" dirty="0" err="1" smtClean="0">
-                <a:ln>
-                  <a:noFill/>
-                </a:ln>
-                <a:solidFill>
-                  <a:schemeClr val="tx1"/>
-                </a:solidFill>
-                <a:effectLst/>
-                <a:latin typeface="Arial" pitchFamily="34" charset="0"/>
-              </a:rPr>
-              <a:t>full-load</a:t>
-            </a:r>
-            <a:r>
-              <a:rPr kumimoji="0" lang="de-AT" sz="800" b="0" i="1" u="none" strike="noStrike" cap="none" normalizeH="0" dirty="0" smtClean="0">
-                <a:ln>
-                  <a:noFill/>
-                </a:ln>
-                <a:solidFill>
-                  <a:schemeClr val="tx1"/>
-                </a:solidFill>
-                <a:effectLst/>
-                <a:latin typeface="Arial" pitchFamily="34" charset="0"/>
-              </a:rPr>
-              <a:t> </a:t>
-            </a:r>
-            <a:r>
-              <a:rPr kumimoji="0" lang="de-AT" sz="800" b="0" i="1" u="none" strike="noStrike" cap="none" normalizeH="0" dirty="0" err="1" smtClean="0">
-                <a:ln>
-                  <a:noFill/>
-                </a:ln>
-                <a:solidFill>
-                  <a:schemeClr val="tx1"/>
-                </a:solidFill>
-                <a:effectLst/>
-                <a:latin typeface="Arial" pitchFamily="34" charset="0"/>
-              </a:rPr>
-              <a:t>curve</a:t>
-            </a:r>
-            <a:r>
-              <a:rPr kumimoji="0" lang="de-AT" sz="800" b="0" i="1" u="none" strike="noStrike" cap="none" normalizeH="0" dirty="0" smtClean="0">
-                <a:ln>
-                  <a:noFill/>
-                </a:ln>
-                <a:solidFill>
-                  <a:schemeClr val="tx1"/>
-                </a:solidFill>
-                <a:effectLst/>
-                <a:latin typeface="Arial" pitchFamily="34" charset="0"/>
-              </a:rPr>
-              <a:t>)</a:t>
-            </a:r>
-            <a:endParaRPr kumimoji="0" lang="en-US" sz="800" b="0" i="1" u="none" strike="noStrike" cap="none" normalizeH="0" baseline="0" dirty="0" smtClean="0">
+            <a:endParaRPr kumimoji="0" lang="en-US" sz="1000" b="0" i="0" u="none" strike="noStrike" cap="none" normalizeH="0" baseline="0" dirty="0" smtClean="0">
               <a:ln>
                 <a:noFill/>
               </a:ln>
@@ -5972,22 +7055,22 @@
         </p:nvSpPr>
         <p:spPr bwMode="auto">
           <a:xfrm>
-            <a:off x="255788" y="5157320"/>
-            <a:ext cx="5316466" cy="1116000"/>
+            <a:off x="255788" y="4982088"/>
+            <a:ext cx="5316466" cy="1008000"/>
           </a:xfrm>
           <a:prstGeom prst="rect">
             <a:avLst/>
           </a:prstGeom>
           <a:solidFill>
-            <a:srgbClr val="7030A0">
+            <a:srgbClr val="00B050">
               <a:alpha val="15000"/>
             </a:srgbClr>
           </a:solidFill>
           <a:ln w="25400" cap="flat" cmpd="sng" algn="ctr">
             <a:solidFill>
-              <a:srgbClr val="7030A0"/>
+              <a:srgbClr val="00B050"/>
             </a:solidFill>
-            <a:prstDash val="solid"/>
+            <a:prstDash val="sysDash"/>
             <a:round/>
             <a:headEnd type="none" w="med" len="med"/>
             <a:tailEnd type="triangle" w="med" len="med"/>
@@ -6041,32 +7124,32 @@
         </p:nvSpPr>
         <p:spPr bwMode="auto">
           <a:xfrm>
-            <a:off x="6660232" y="5652400"/>
-            <a:ext cx="2304256" cy="701731"/>
+            <a:off x="6660232" y="5542429"/>
+            <a:ext cx="2376000" cy="646331"/>
           </a:xfrm>
           <a:prstGeom prst="accentCallout1">
             <a:avLst>
               <a:gd name="adj1" fmla="val 56216"/>
               <a:gd name="adj2" fmla="val -2353"/>
-              <a:gd name="adj3" fmla="val 16833"/>
-              <a:gd name="adj4" fmla="val -106768"/>
+              <a:gd name="adj3" fmla="val -794"/>
+              <a:gd name="adj4" fmla="val -43620"/>
             </a:avLst>
           </a:prstGeom>
           <a:noFill/>
           <a:ln w="19050" cap="flat" cmpd="sng" algn="ctr">
             <a:solidFill>
-              <a:schemeClr val="tx1"/>
+              <a:srgbClr val="00B050"/>
             </a:solidFill>
             <a:prstDash val="solid"/>
             <a:round/>
             <a:headEnd type="none" w="med" len="med"/>
-            <a:tailEnd type="triangle" w="med" len="med"/>
+            <a:tailEnd type="none" w="med" len="med"/>
           </a:ln>
           <a:effectLst/>
           <a:extLst/>
         </p:spPr>
         <p:txBody>
-          <a:bodyPr vert="horz" wrap="square" lIns="91440" tIns="45720" rIns="91440" bIns="45720" numCol="1" rtlCol="0" anchor="ctr" anchorCtr="0" compatLnSpc="1">
+          <a:bodyPr vert="horz" wrap="square" lIns="108000" tIns="45720" rIns="91440" bIns="45720" numCol="1" rtlCol="0" anchor="ctr" anchorCtr="0" compatLnSpc="1">
             <a:prstTxWarp prst="textNoShape">
               <a:avLst/>
             </a:prstTxWarp>
@@ -6091,30 +7174,45 @@
               <a:tabLst/>
             </a:pPr>
             <a:r>
-              <a:rPr lang="de-AT" sz="1100" b="0" dirty="0" smtClean="0">
+              <a:rPr lang="de-AT" sz="1000" b="0" dirty="0" smtClean="0">
+                <a:solidFill>
+                  <a:srgbClr val="00B050"/>
+                </a:solidFill>
                 <a:latin typeface="Arial" pitchFamily="34" charset="0"/>
               </a:rPr>
               <a:t>„Message“ </a:t>
             </a:r>
             <a:r>
-              <a:rPr lang="de-AT" sz="1100" b="0" dirty="0" err="1" smtClean="0">
+              <a:rPr lang="de-AT" sz="1000" b="0" dirty="0" err="1" smtClean="0">
+                <a:solidFill>
+                  <a:srgbClr val="00B050"/>
+                </a:solidFill>
                 <a:latin typeface="Arial" pitchFamily="34" charset="0"/>
               </a:rPr>
               <a:t>window</a:t>
             </a:r>
             <a:r>
-              <a:rPr lang="de-AT" sz="1100" b="0" dirty="0" smtClean="0">
+              <a:rPr lang="de-AT" sz="1000" b="0" dirty="0" smtClean="0">
+                <a:solidFill>
+                  <a:srgbClr val="00B050"/>
+                </a:solidFill>
                 <a:latin typeface="Arial" pitchFamily="34" charset="0"/>
               </a:rPr>
               <a:t> will </a:t>
             </a:r>
             <a:r>
-              <a:rPr lang="de-AT" sz="1100" b="0" dirty="0" err="1" smtClean="0">
+              <a:rPr lang="de-AT" sz="1000" b="0" dirty="0" err="1" smtClean="0">
+                <a:solidFill>
+                  <a:srgbClr val="00B050"/>
+                </a:solidFill>
                 <a:latin typeface="Arial" pitchFamily="34" charset="0"/>
               </a:rPr>
               <a:t>display</a:t>
             </a:r>
-            <a:endParaRPr lang="de-AT" sz="1100" b="0" dirty="0">
+            <a:endParaRPr lang="de-AT" sz="1000" b="0" dirty="0">
+              <a:solidFill>
+                <a:srgbClr val="00B050"/>
+              </a:solidFill>
               <a:latin typeface="Arial" pitchFamily="34" charset="0"/>
             </a:endParaRPr>
           </a:p>
@@ -6136,37 +7234,55 @@
               <a:tabLst/>
             </a:pPr>
             <a:r>
-              <a:rPr lang="de-AT" sz="1100" b="0" dirty="0" err="1" smtClean="0">
+              <a:rPr lang="de-AT" sz="1000" b="0" dirty="0" err="1" smtClean="0">
+                <a:solidFill>
+                  <a:srgbClr val="00B050"/>
+                </a:solidFill>
                 <a:latin typeface="Arial" pitchFamily="34" charset="0"/>
               </a:rPr>
               <a:t>errors</a:t>
             </a:r>
             <a:r>
-              <a:rPr lang="de-AT" sz="1100" b="0" dirty="0" smtClean="0">
+              <a:rPr lang="de-AT" sz="1000" b="0" dirty="0" smtClean="0">
+                <a:solidFill>
+                  <a:srgbClr val="00B050"/>
+                </a:solidFill>
                 <a:latin typeface="Arial" pitchFamily="34" charset="0"/>
               </a:rPr>
               <a:t> (</a:t>
             </a:r>
             <a:r>
-              <a:rPr lang="de-AT" sz="1100" b="0" dirty="0" err="1" smtClean="0">
+              <a:rPr lang="de-AT" sz="1000" b="0" dirty="0" err="1" smtClean="0">
+                <a:solidFill>
+                  <a:srgbClr val="00B050"/>
+                </a:solidFill>
                 <a:latin typeface="Arial" pitchFamily="34" charset="0"/>
               </a:rPr>
               <a:t>red</a:t>
             </a:r>
             <a:r>
-              <a:rPr lang="de-AT" sz="1100" b="0" dirty="0" smtClean="0">
+              <a:rPr lang="de-AT" sz="1000" b="0" dirty="0" smtClean="0">
+                <a:solidFill>
+                  <a:srgbClr val="00B050"/>
+                </a:solidFill>
                 <a:latin typeface="Arial" pitchFamily="34" charset="0"/>
               </a:rPr>
               <a:t>), </a:t>
             </a:r>
             <a:r>
-              <a:rPr lang="de-AT" sz="1100" b="0" dirty="0" err="1" smtClean="0">
+              <a:rPr lang="de-AT" sz="1000" b="0" dirty="0" err="1" smtClean="0">
+                <a:solidFill>
+                  <a:srgbClr val="00B050"/>
+                </a:solidFill>
                 <a:latin typeface="Arial" pitchFamily="34" charset="0"/>
               </a:rPr>
               <a:t>warnings</a:t>
             </a:r>
             <a:r>
-              <a:rPr lang="de-AT" sz="1100" b="0" dirty="0" smtClean="0">
+              <a:rPr lang="de-AT" sz="1000" b="0" dirty="0" smtClean="0">
+                <a:solidFill>
+                  <a:srgbClr val="00B050"/>
+                </a:solidFill>
                 <a:latin typeface="Arial" pitchFamily="34" charset="0"/>
               </a:rPr>
               <a:t> (orange),</a:t>
@@ -6190,41 +7306,56 @@
               <a:tabLst/>
             </a:pPr>
             <a:r>
-              <a:rPr lang="de-AT" sz="1100" b="0" dirty="0" err="1" smtClean="0">
+              <a:rPr lang="de-AT" sz="1000" b="0" dirty="0" err="1" smtClean="0">
+                <a:solidFill>
+                  <a:srgbClr val="00B050"/>
+                </a:solidFill>
                 <a:latin typeface="Arial" pitchFamily="34" charset="0"/>
               </a:rPr>
               <a:t>informations</a:t>
             </a:r>
             <a:r>
-              <a:rPr lang="de-AT" sz="1100" b="0" dirty="0" smtClean="0">
+              <a:rPr lang="de-AT" sz="1000" b="0" dirty="0" smtClean="0">
+                <a:solidFill>
+                  <a:srgbClr val="00B050"/>
+                </a:solidFill>
                 <a:latin typeface="Arial" pitchFamily="34" charset="0"/>
               </a:rPr>
               <a:t> </a:t>
             </a:r>
             <a:r>
-              <a:rPr lang="de-AT" sz="1100" b="0" dirty="0" err="1" smtClean="0">
+              <a:rPr lang="de-AT" sz="1000" b="0" dirty="0" err="1" smtClean="0">
+                <a:solidFill>
+                  <a:srgbClr val="00B050"/>
+                </a:solidFill>
                 <a:latin typeface="Arial" pitchFamily="34" charset="0"/>
               </a:rPr>
               <a:t>and</a:t>
             </a:r>
             <a:r>
-              <a:rPr lang="de-AT" sz="1100" b="0" dirty="0" smtClean="0">
+              <a:rPr lang="de-AT" sz="1000" b="0" dirty="0" smtClean="0">
+                <a:solidFill>
+                  <a:srgbClr val="00B050"/>
+                </a:solidFill>
                 <a:latin typeface="Arial" pitchFamily="34" charset="0"/>
               </a:rPr>
               <a:t> </a:t>
             </a:r>
             <a:r>
-              <a:rPr lang="de-AT" sz="1100" b="0" dirty="0" err="1" smtClean="0">
+              <a:rPr lang="de-AT" sz="1000" b="0" dirty="0" err="1" smtClean="0">
+                <a:solidFill>
+                  <a:srgbClr val="00B050"/>
+                </a:solidFill>
                 <a:latin typeface="Arial" pitchFamily="34" charset="0"/>
               </a:rPr>
               <a:t>results</a:t>
             </a:r>
-            <a:endParaRPr kumimoji="0" lang="en-US" sz="1100" b="0" i="0" u="none" strike="noStrike" cap="none" normalizeH="0" baseline="0" dirty="0" smtClean="0">
+            <a:endParaRPr kumimoji="0" lang="en-US" sz="1000" b="0" i="0" u="none" strike="noStrike" cap="none" normalizeH="0" baseline="0" dirty="0" smtClean="0">
               <a:ln>
                 <a:noFill/>
               </a:ln>
               <a:solidFill>
-                <a:schemeClr val="tx1"/>
+                <a:srgbClr val="00B050"/>
               </a:solidFill>
               <a:effectLst/>
               <a:latin typeface="Arial" pitchFamily="34" charset="0"/>
@@ -6240,22 +7371,22 @@
         </p:nvSpPr>
         <p:spPr bwMode="auto">
           <a:xfrm>
-            <a:off x="255788" y="3027770"/>
-            <a:ext cx="5316466" cy="720000"/>
+            <a:off x="5220072" y="2925366"/>
+            <a:ext cx="352182" cy="612000"/>
           </a:xfrm>
           <a:prstGeom prst="rect">
             <a:avLst/>
           </a:prstGeom>
           <a:solidFill>
-            <a:srgbClr val="FF0000">
+            <a:srgbClr val="7030A0">
               <a:alpha val="15000"/>
             </a:srgbClr>
           </a:solidFill>
           <a:ln w="25400" cap="flat" cmpd="sng" algn="ctr">
             <a:solidFill>
-              <a:srgbClr val="FF0000"/>
+              <a:srgbClr val="7030A0"/>
             </a:solidFill>
-            <a:prstDash val="solid"/>
+            <a:prstDash val="sysDash"/>
             <a:round/>
             <a:headEnd type="none" w="med" len="med"/>
             <a:tailEnd type="triangle" w="med" len="med"/>
@@ -6309,22 +7440,22 @@
         </p:nvSpPr>
         <p:spPr bwMode="auto">
           <a:xfrm>
-            <a:off x="255788" y="3789120"/>
+            <a:off x="255788" y="3589612"/>
             <a:ext cx="5316466" cy="648000"/>
           </a:xfrm>
           <a:prstGeom prst="rect">
             <a:avLst/>
           </a:prstGeom>
           <a:solidFill>
-            <a:srgbClr val="FF0000">
+            <a:srgbClr val="00B0F0">
               <a:alpha val="15000"/>
             </a:srgbClr>
           </a:solidFill>
           <a:ln w="25400" cap="flat" cmpd="sng" algn="ctr">
             <a:solidFill>
-              <a:srgbClr val="FF0000"/>
+              <a:srgbClr val="00B0F0"/>
             </a:solidFill>
-            <a:prstDash val="solid"/>
+            <a:prstDash val="sysDash"/>
             <a:round/>
             <a:headEnd type="none" w="med" len="med"/>
             <a:tailEnd type="triangle" w="med" len="med"/>
@@ -6378,23 +7509,313 @@
         </p:nvSpPr>
         <p:spPr bwMode="auto">
           <a:xfrm>
-            <a:off x="6660232" y="2911697"/>
-            <a:ext cx="2483768" cy="650947"/>
+            <a:off x="6660232" y="2835861"/>
+            <a:ext cx="2376000" cy="648000"/>
           </a:xfrm>
           <a:prstGeom prst="accentCallout1">
             <a:avLst>
               <a:gd name="adj1" fmla="val 56216"/>
               <a:gd name="adj2" fmla="val -2353"/>
-              <a:gd name="adj3" fmla="val 166759"/>
-              <a:gd name="adj4" fmla="val -95763"/>
+              <a:gd name="adj3" fmla="val 165437"/>
+              <a:gd name="adj4" fmla="val -43029"/>
             </a:avLst>
           </a:prstGeom>
           <a:noFill/>
           <a:ln w="19050" cap="flat" cmpd="sng" algn="ctr">
             <a:solidFill>
-              <a:schemeClr val="tx1"/>
+              <a:srgbClr val="00B0F0"/>
             </a:solidFill>
             <a:prstDash val="solid"/>
+            <a:round/>
+            <a:headEnd type="none" w="med" len="med"/>
+            <a:tailEnd type="none" w="med" len="med"/>
+          </a:ln>
+          <a:effectLst/>
+          <a:extLst/>
+        </p:spPr>
+        <p:txBody>
+          <a:bodyPr vert="horz" wrap="square" lIns="324000" tIns="45720" rIns="91440" bIns="45720" numCol="1" rtlCol="0" anchor="ctr" anchorCtr="0" compatLnSpc="1">
+            <a:prstTxWarp prst="textNoShape">
+              <a:avLst/>
+            </a:prstTxWarp>
+            <a:spAutoFit/>
+          </a:bodyPr>
+          <a:lstStyle/>
+          <a:p>
+            <a:pPr marL="0" marR="0" indent="0" algn="l" defTabSz="914400" rtl="0" eaLnBrk="1" fontAlgn="base" latinLnBrk="0" hangingPunct="1">
+              <a:lnSpc>
+                <a:spcPct val="100000"/>
+              </a:lnSpc>
+              <a:spcBef>
+                <a:spcPct val="30000"/>
+              </a:spcBef>
+              <a:spcAft>
+                <a:spcPct val="0"/>
+              </a:spcAft>
+              <a:buClrTx/>
+              <a:buSzTx/>
+              <a:buFontTx/>
+              <a:buNone/>
+              <a:tabLst/>
+            </a:pPr>
+            <a:r>
+              <a:rPr lang="de-AT" sz="1000" b="0" dirty="0" smtClean="0">
+                <a:latin typeface="Arial" pitchFamily="34" charset="0"/>
+              </a:rPr>
+              <a:t>Input </a:t>
+            </a:r>
+            <a:r>
+              <a:rPr lang="de-AT" sz="1000" b="0" dirty="0" err="1" smtClean="0">
+                <a:latin typeface="Arial" pitchFamily="34" charset="0"/>
+              </a:rPr>
+              <a:t>measured</a:t>
+            </a:r>
+            <a:r>
+              <a:rPr lang="de-AT" sz="1000" b="0" dirty="0" smtClean="0">
+                <a:latin typeface="Arial" pitchFamily="34" charset="0"/>
+              </a:rPr>
+              <a:t> </a:t>
+            </a:r>
+            <a:r>
+              <a:rPr lang="de-AT" sz="1000" b="0" dirty="0" err="1" smtClean="0">
+                <a:latin typeface="Arial" pitchFamily="34" charset="0"/>
+              </a:rPr>
+              <a:t>specific</a:t>
+            </a:r>
+            <a:r>
+              <a:rPr lang="de-AT" sz="1000" b="0" dirty="0" smtClean="0">
+                <a:latin typeface="Arial" pitchFamily="34" charset="0"/>
+              </a:rPr>
+              <a:t> FC </a:t>
+            </a:r>
+            <a:r>
+              <a:rPr lang="de-AT" sz="1000" b="0" dirty="0" err="1" smtClean="0">
+                <a:latin typeface="Arial" pitchFamily="34" charset="0"/>
+              </a:rPr>
+              <a:t>values</a:t>
+            </a:r>
+            <a:r>
+              <a:rPr lang="de-AT" sz="1000" b="0" dirty="0" smtClean="0">
+                <a:latin typeface="Arial" pitchFamily="34" charset="0"/>
+              </a:rPr>
+              <a:t> </a:t>
+            </a:r>
+            <a:r>
+              <a:rPr lang="de-AT" sz="1000" b="0" dirty="0" err="1" smtClean="0">
+                <a:latin typeface="Arial" pitchFamily="34" charset="0"/>
+              </a:rPr>
+              <a:t>and</a:t>
+            </a:r>
+            <a:r>
+              <a:rPr lang="de-AT" sz="1000" b="0" dirty="0" smtClean="0">
+                <a:latin typeface="Arial" pitchFamily="34" charset="0"/>
+              </a:rPr>
+              <a:t> </a:t>
+            </a:r>
+            <a:r>
+              <a:rPr lang="de-AT" sz="1000" b="0" dirty="0" err="1" smtClean="0">
+                <a:latin typeface="Arial" pitchFamily="34" charset="0"/>
+              </a:rPr>
+              <a:t>correction</a:t>
+            </a:r>
+            <a:r>
+              <a:rPr lang="de-AT" sz="1000" b="0" dirty="0" smtClean="0">
+                <a:latin typeface="Arial" pitchFamily="34" charset="0"/>
+              </a:rPr>
+              <a:t> </a:t>
+            </a:r>
+            <a:r>
+              <a:rPr lang="de-AT" sz="1000" b="0" dirty="0" err="1" smtClean="0">
+                <a:latin typeface="Arial" pitchFamily="34" charset="0"/>
+              </a:rPr>
+              <a:t>factor</a:t>
+            </a:r>
+            <a:endParaRPr kumimoji="0" lang="en-US" sz="1000" b="0" i="0" u="none" strike="noStrike" cap="none" normalizeH="0" baseline="0" dirty="0" smtClean="0">
+              <a:ln>
+                <a:noFill/>
+              </a:ln>
+              <a:solidFill>
+                <a:schemeClr val="tx1"/>
+              </a:solidFill>
+              <a:effectLst/>
+              <a:latin typeface="Arial" pitchFamily="34" charset="0"/>
+            </a:endParaRPr>
+          </a:p>
+        </p:txBody>
+      </p:sp>
+      <p:sp>
+        <p:nvSpPr>
+          <p:cNvPr id="21" name="Legende mit Linie 1 (Markierungsleiste) 20"/>
+          <p:cNvSpPr/>
+          <p:nvPr/>
+        </p:nvSpPr>
+        <p:spPr bwMode="auto">
+          <a:xfrm>
+            <a:off x="6660232" y="953295"/>
+            <a:ext cx="2376000" cy="646331"/>
+          </a:xfrm>
+          <a:prstGeom prst="accentCallout1">
+            <a:avLst>
+              <a:gd name="adj1" fmla="val 56216"/>
+              <a:gd name="adj2" fmla="val -2353"/>
+              <a:gd name="adj3" fmla="val 157255"/>
+              <a:gd name="adj4" fmla="val -43117"/>
+            </a:avLst>
+          </a:prstGeom>
+          <a:noFill/>
+          <a:ln w="19050" cap="flat" cmpd="sng" algn="ctr">
+            <a:solidFill>
+              <a:srgbClr val="FF0000"/>
+            </a:solidFill>
+            <a:prstDash val="solid"/>
+            <a:round/>
+            <a:headEnd type="none" w="med" len="med"/>
+            <a:tailEnd type="none" w="med" len="med"/>
+          </a:ln>
+          <a:effectLst/>
+          <a:extLst/>
+        </p:spPr>
+        <p:txBody>
+          <a:bodyPr vert="horz" wrap="square" lIns="324000" tIns="45720" rIns="91440" bIns="45720" numCol="1" rtlCol="0" anchor="ctr" anchorCtr="0" compatLnSpc="1">
+            <a:prstTxWarp prst="textNoShape">
+              <a:avLst/>
+            </a:prstTxWarp>
+            <a:spAutoFit/>
+          </a:bodyPr>
+          <a:lstStyle/>
+          <a:p>
+            <a:pPr marL="0" marR="0" indent="0" algn="l" defTabSz="914400" rtl="0" eaLnBrk="1" fontAlgn="base" latinLnBrk="0" hangingPunct="1">
+              <a:lnSpc>
+                <a:spcPct val="100000"/>
+              </a:lnSpc>
+              <a:spcBef>
+                <a:spcPct val="30000"/>
+              </a:spcBef>
+              <a:spcAft>
+                <a:spcPct val="0"/>
+              </a:spcAft>
+              <a:buClrTx/>
+              <a:buSzTx/>
+              <a:buFontTx/>
+              <a:buNone/>
+              <a:tabLst/>
+            </a:pPr>
+            <a:r>
+              <a:rPr lang="de-AT" sz="1000" b="0" dirty="0" smtClean="0">
+                <a:latin typeface="Arial" pitchFamily="34" charset="0"/>
+              </a:rPr>
+              <a:t>Input </a:t>
+            </a:r>
+            <a:r>
+              <a:rPr lang="de-AT" sz="1000" b="0" dirty="0" smtClean="0">
+                <a:latin typeface="Arial" pitchFamily="34" charset="0"/>
+              </a:rPr>
+              <a:t>all </a:t>
+            </a:r>
+            <a:r>
+              <a:rPr lang="de-AT" sz="1000" b="0" dirty="0" err="1" smtClean="0">
+                <a:latin typeface="Arial" pitchFamily="34" charset="0"/>
+              </a:rPr>
+              <a:t>component</a:t>
+            </a:r>
+            <a:r>
+              <a:rPr lang="de-AT" sz="1000" b="0" dirty="0" smtClean="0">
+                <a:latin typeface="Arial" pitchFamily="34" charset="0"/>
+              </a:rPr>
+              <a:t> </a:t>
+            </a:r>
+            <a:r>
+              <a:rPr lang="de-AT" sz="1000" b="0" dirty="0" err="1" smtClean="0">
+                <a:latin typeface="Arial" pitchFamily="34" charset="0"/>
+              </a:rPr>
+              <a:t>data</a:t>
+            </a:r>
+            <a:endParaRPr lang="de-AT" sz="1000" b="0" dirty="0" smtClean="0">
+              <a:latin typeface="Arial" pitchFamily="34" charset="0"/>
+            </a:endParaRPr>
+          </a:p>
+          <a:p>
+            <a:pPr marL="0" marR="0" indent="0" algn="l" defTabSz="914400" rtl="0" eaLnBrk="1" fontAlgn="base" latinLnBrk="0" hangingPunct="1">
+              <a:lnSpc>
+                <a:spcPct val="100000"/>
+              </a:lnSpc>
+              <a:spcBef>
+                <a:spcPct val="30000"/>
+              </a:spcBef>
+              <a:spcAft>
+                <a:spcPct val="0"/>
+              </a:spcAft>
+              <a:buClrTx/>
+              <a:buSzTx/>
+              <a:buFontTx/>
+              <a:buNone/>
+              <a:tabLst/>
+            </a:pPr>
+            <a:endParaRPr kumimoji="0" lang="de-AT" sz="1000" b="0" i="0" u="none" strike="noStrike" cap="none" normalizeH="0" baseline="0" dirty="0">
+              <a:ln>
+                <a:noFill/>
+              </a:ln>
+              <a:solidFill>
+                <a:schemeClr val="tx1"/>
+              </a:solidFill>
+              <a:effectLst/>
+              <a:latin typeface="Arial" pitchFamily="34" charset="0"/>
+            </a:endParaRPr>
+          </a:p>
+          <a:p>
+            <a:pPr marL="0" marR="0" indent="0" algn="l" defTabSz="914400" rtl="0" eaLnBrk="1" fontAlgn="base" latinLnBrk="0" hangingPunct="1">
+              <a:lnSpc>
+                <a:spcPct val="100000"/>
+              </a:lnSpc>
+              <a:spcBef>
+                <a:spcPct val="30000"/>
+              </a:spcBef>
+              <a:spcAft>
+                <a:spcPct val="0"/>
+              </a:spcAft>
+              <a:buClrTx/>
+              <a:buSzTx/>
+              <a:buFontTx/>
+              <a:buNone/>
+              <a:tabLst/>
+            </a:pPr>
+            <a:endParaRPr kumimoji="0" lang="en-US" sz="1000" b="0" i="0" u="none" strike="noStrike" cap="none" normalizeH="0" baseline="0" dirty="0" smtClean="0">
+              <a:ln>
+                <a:noFill/>
+              </a:ln>
+              <a:solidFill>
+                <a:schemeClr val="tx1"/>
+              </a:solidFill>
+              <a:effectLst/>
+              <a:latin typeface="Arial" pitchFamily="34" charset="0"/>
+            </a:endParaRPr>
+          </a:p>
+        </p:txBody>
+      </p:sp>
+      <p:sp>
+        <p:nvSpPr>
+          <p:cNvPr id="22" name="Rechteck 21"/>
+          <p:cNvSpPr/>
+          <p:nvPr/>
+        </p:nvSpPr>
+        <p:spPr bwMode="auto">
+          <a:xfrm>
+            <a:off x="5227488" y="4680580"/>
+            <a:ext cx="352182" cy="252000"/>
+          </a:xfrm>
+          <a:prstGeom prst="rect">
+            <a:avLst/>
+          </a:prstGeom>
+          <a:solidFill>
+            <a:srgbClr val="FFC000">
+              <a:alpha val="15000"/>
+            </a:srgbClr>
+          </a:solidFill>
+          <a:ln w="25400" cap="flat" cmpd="sng" algn="ctr">
+            <a:solidFill>
+              <a:srgbClr val="FFC000"/>
+            </a:solidFill>
+            <a:prstDash val="sysDash"/>
             <a:round/>
             <a:headEnd type="none" w="med" len="med"/>
             <a:tailEnd type="triangle" w="med" len="med"/>
@@ -6427,33 +7848,292 @@
               <a:buNone/>
               <a:tabLst/>
             </a:pPr>
-            <a:r>
-              <a:rPr kumimoji="0" lang="de-AT" sz="1100" i="0" u="sng" strike="noStrike" cap="none" normalizeH="0" baseline="0" dirty="0" err="1" smtClean="0">
-                <a:ln>
-                  <a:noFill/>
-                </a:ln>
+            <a:endParaRPr kumimoji="0" lang="en-US" sz="2000" b="1" i="0" u="none" strike="noStrike" cap="none" normalizeH="0" baseline="0" smtClean="0">
+              <a:ln>
+                <a:noFill/>
+              </a:ln>
+              <a:solidFill>
+                <a:schemeClr val="tx1"/>
+              </a:solidFill>
+              <a:effectLst/>
+              <a:latin typeface="Arial" pitchFamily="34" charset="0"/>
+            </a:endParaRPr>
+          </a:p>
+        </p:txBody>
+      </p:sp>
+      <p:sp>
+        <p:nvSpPr>
+          <p:cNvPr id="7" name="Textfeld 6"/>
+          <p:cNvSpPr txBox="1"/>
+          <p:nvPr/>
+        </p:nvSpPr>
+        <p:spPr>
+          <a:xfrm>
+            <a:off x="6543685" y="803085"/>
+            <a:ext cx="430887" cy="936104"/>
+          </a:xfrm>
+          <a:prstGeom prst="rect">
+            <a:avLst/>
+          </a:prstGeom>
+          <a:noFill/>
+        </p:spPr>
+        <p:txBody>
+          <a:bodyPr vert="vert270" wrap="square" rtlCol="0">
+            <a:spAutoFit/>
+          </a:bodyPr>
+          <a:lstStyle/>
+          <a:p>
+            <a:r>
+              <a:rPr lang="de-AT" dirty="0" err="1" smtClean="0">
                 <a:solidFill>
-                  <a:schemeClr val="tx1"/>
+                  <a:srgbClr val="FF0000"/>
                 </a:solidFill>
-                <a:effectLst/>
-                <a:latin typeface="Arial" pitchFamily="34" charset="0"/>
               </a:rPr>
               <a:t>Step</a:t>
             </a:r>
             <a:r>
-              <a:rPr kumimoji="0" lang="de-AT" sz="1100" i="0" u="sng" strike="noStrike" cap="none" normalizeH="0" baseline="0" dirty="0" smtClean="0">
-                <a:ln>
-                  <a:noFill/>
-                </a:ln>
+              <a:rPr lang="de-AT" dirty="0" smtClean="0">
                 <a:solidFill>
-                  <a:schemeClr val="tx1"/>
+                  <a:srgbClr val="FF0000"/>
                 </a:solidFill>
-                <a:effectLst/>
-                <a:latin typeface="Arial" pitchFamily="34" charset="0"/>
+              </a:rPr>
+              <a:t> 1</a:t>
+            </a:r>
+            <a:endParaRPr lang="de-AT" dirty="0">
+              <a:solidFill>
+                <a:srgbClr val="FF0000"/>
+              </a:solidFill>
+            </a:endParaRPr>
+          </a:p>
+        </p:txBody>
+      </p:sp>
+      <p:sp>
+        <p:nvSpPr>
+          <p:cNvPr id="23" name="Textfeld 22"/>
+          <p:cNvSpPr txBox="1"/>
+          <p:nvPr/>
+        </p:nvSpPr>
+        <p:spPr>
+          <a:xfrm>
+            <a:off x="6543686" y="1747447"/>
+            <a:ext cx="430887" cy="936104"/>
+          </a:xfrm>
+          <a:prstGeom prst="rect">
+            <a:avLst/>
+          </a:prstGeom>
+          <a:noFill/>
+        </p:spPr>
+        <p:txBody>
+          <a:bodyPr vert="vert270" wrap="square" rtlCol="0">
+            <a:spAutoFit/>
+          </a:bodyPr>
+          <a:lstStyle/>
+          <a:p>
+            <a:r>
+              <a:rPr lang="de-AT" dirty="0" err="1" smtClean="0">
+                <a:solidFill>
+                  <a:srgbClr val="7030A0"/>
+                </a:solidFill>
+              </a:rPr>
+              <a:t>Step</a:t>
+            </a:r>
+            <a:r>
+              <a:rPr lang="de-AT" dirty="0" smtClean="0">
+                <a:solidFill>
+                  <a:srgbClr val="7030A0"/>
+                </a:solidFill>
+              </a:rPr>
+              <a:t> 2</a:t>
+            </a:r>
+            <a:endParaRPr lang="de-AT" dirty="0">
+              <a:solidFill>
+                <a:srgbClr val="7030A0"/>
+              </a:solidFill>
+            </a:endParaRPr>
+          </a:p>
+        </p:txBody>
+      </p:sp>
+      <p:sp>
+        <p:nvSpPr>
+          <p:cNvPr id="24" name="Textfeld 23"/>
+          <p:cNvSpPr txBox="1"/>
+          <p:nvPr/>
+        </p:nvSpPr>
+        <p:spPr>
+          <a:xfrm>
+            <a:off x="6548113" y="2691809"/>
+            <a:ext cx="430887" cy="936104"/>
+          </a:xfrm>
+          <a:prstGeom prst="rect">
+            <a:avLst/>
+          </a:prstGeom>
+          <a:noFill/>
+        </p:spPr>
+        <p:txBody>
+          <a:bodyPr vert="vert270" wrap="square" rtlCol="0">
+            <a:spAutoFit/>
+          </a:bodyPr>
+          <a:lstStyle/>
+          <a:p>
+            <a:r>
+              <a:rPr lang="de-AT" dirty="0" err="1" smtClean="0">
+                <a:solidFill>
+                  <a:srgbClr val="00B0F0"/>
+                </a:solidFill>
+              </a:rPr>
+              <a:t>Step</a:t>
+            </a:r>
+            <a:r>
+              <a:rPr lang="de-AT" dirty="0" smtClean="0">
+                <a:solidFill>
+                  <a:srgbClr val="00B0F0"/>
+                </a:solidFill>
               </a:rPr>
               <a:t> 3</a:t>
             </a:r>
-          </a:p>
+            <a:endParaRPr lang="de-AT" dirty="0">
+              <a:solidFill>
+                <a:srgbClr val="00B0F0"/>
+              </a:solidFill>
+            </a:endParaRPr>
+          </a:p>
+        </p:txBody>
+      </p:sp>
+      <p:sp>
+        <p:nvSpPr>
+          <p:cNvPr id="25" name="Textfeld 24"/>
+          <p:cNvSpPr txBox="1"/>
+          <p:nvPr/>
+        </p:nvSpPr>
+        <p:spPr>
+          <a:xfrm>
+            <a:off x="6549920" y="3555905"/>
+            <a:ext cx="430887" cy="936104"/>
+          </a:xfrm>
+          <a:prstGeom prst="rect">
+            <a:avLst/>
+          </a:prstGeom>
+          <a:noFill/>
+        </p:spPr>
+        <p:txBody>
+          <a:bodyPr vert="vert270" wrap="square" rtlCol="0">
+            <a:spAutoFit/>
+          </a:bodyPr>
+          <a:lstStyle/>
+          <a:p>
+            <a:r>
+              <a:rPr lang="de-AT" dirty="0" err="1" smtClean="0">
+                <a:solidFill>
+                  <a:srgbClr val="FFC000"/>
+                </a:solidFill>
+              </a:rPr>
+              <a:t>Step</a:t>
+            </a:r>
+            <a:r>
+              <a:rPr lang="de-AT" dirty="0" smtClean="0">
+                <a:solidFill>
+                  <a:srgbClr val="FFC000"/>
+                </a:solidFill>
+              </a:rPr>
+              <a:t> 4</a:t>
+            </a:r>
+            <a:endParaRPr lang="de-AT" dirty="0">
+              <a:solidFill>
+                <a:srgbClr val="FFC000"/>
+              </a:solidFill>
+            </a:endParaRPr>
+          </a:p>
+        </p:txBody>
+      </p:sp>
+      <p:sp>
+        <p:nvSpPr>
+          <p:cNvPr id="26" name="Textfeld 25"/>
+          <p:cNvSpPr txBox="1"/>
+          <p:nvPr/>
+        </p:nvSpPr>
+        <p:spPr>
+          <a:xfrm>
+            <a:off x="6543684" y="4437597"/>
+            <a:ext cx="430887" cy="936104"/>
+          </a:xfrm>
+          <a:prstGeom prst="rect">
+            <a:avLst/>
+          </a:prstGeom>
+          <a:noFill/>
+          <a:ln>
+            <a:noFill/>
+          </a:ln>
+        </p:spPr>
+        <p:txBody>
+          <a:bodyPr vert="vert270" wrap="square" rtlCol="0">
+            <a:spAutoFit/>
+          </a:bodyPr>
+          <a:lstStyle/>
+          <a:p>
+            <a:r>
+              <a:rPr lang="de-AT" dirty="0" err="1" smtClean="0">
+                <a:solidFill>
+                  <a:srgbClr val="FF33CC"/>
+                </a:solidFill>
+              </a:rPr>
+              <a:t>Step</a:t>
+            </a:r>
+            <a:r>
+              <a:rPr lang="de-AT" dirty="0" smtClean="0">
+                <a:solidFill>
+                  <a:srgbClr val="FF33CC"/>
+                </a:solidFill>
+              </a:rPr>
+              <a:t> 5</a:t>
+            </a:r>
+            <a:endParaRPr lang="de-AT" dirty="0">
+              <a:solidFill>
+                <a:srgbClr val="FF33CC"/>
+              </a:solidFill>
+            </a:endParaRPr>
+          </a:p>
+        </p:txBody>
+      </p:sp>
+      <p:sp>
+        <p:nvSpPr>
+          <p:cNvPr id="28" name="Legende mit Linie 1 (Markierungsleiste) 17"/>
+          <p:cNvSpPr/>
+          <p:nvPr/>
+        </p:nvSpPr>
+        <p:spPr bwMode="auto">
+          <a:xfrm>
+            <a:off x="2196000" y="6069840"/>
+            <a:ext cx="2376000" cy="246221"/>
+          </a:xfrm>
+          <a:prstGeom prst="accentCallout1">
+            <a:avLst>
+              <a:gd name="adj1" fmla="val 56216"/>
+              <a:gd name="adj2" fmla="val -2353"/>
+              <a:gd name="adj3" fmla="val 24558"/>
+              <a:gd name="adj4" fmla="val -34765"/>
+            </a:avLst>
+          </a:prstGeom>
+          <a:noFill/>
+          <a:ln w="19050" cap="flat" cmpd="sng" algn="ctr">
+            <a:solidFill>
+              <a:schemeClr val="accent2"/>
+            </a:solidFill>
+            <a:prstDash val="solid"/>
+            <a:round/>
+            <a:headEnd type="none" w="med" len="med"/>
+            <a:tailEnd type="oval" w="med" len="med"/>
+          </a:ln>
+          <a:effectLst/>
+          <a:extLst/>
+        </p:spPr>
+        <p:txBody>
+          <a:bodyPr vert="horz" wrap="square" lIns="108000" tIns="45720" rIns="91440" bIns="45720" numCol="1" rtlCol="0" anchor="ctr" anchorCtr="0" compatLnSpc="1">
+            <a:prstTxWarp prst="textNoShape">
+              <a:avLst/>
+            </a:prstTxWarp>
+            <a:spAutoFit/>
+          </a:bodyPr>
+          <a:lstStyle/>
           <a:p>
             <a:pPr marL="0" marR="0" indent="0" algn="l" defTabSz="914400" rtl="0" eaLnBrk="1" fontAlgn="base" latinLnBrk="0" hangingPunct="1">
               <a:lnSpc>
@@ -6472,237 +8152,65 @@
               <a:tabLst/>
             </a:pPr>
             <a:r>
-              <a:rPr lang="de-AT" sz="1100" b="0" dirty="0" smtClean="0">
+              <a:rPr lang="de-AT" sz="1000" b="0" dirty="0" smtClean="0">
+                <a:solidFill>
+                  <a:schemeClr val="accent2"/>
+                </a:solidFill>
                 <a:latin typeface="Arial" pitchFamily="34" charset="0"/>
               </a:rPr>
-              <a:t>Input </a:t>
-            </a:r>
-            <a:r>
-              <a:rPr lang="de-AT" sz="1100" b="0" dirty="0" err="1" smtClean="0">
+              <a:t>Export </a:t>
+            </a:r>
+            <a:r>
+              <a:rPr lang="de-AT" sz="1000" b="0" dirty="0" err="1" smtClean="0">
+                <a:solidFill>
+                  <a:schemeClr val="accent2"/>
+                </a:solidFill>
                 <a:latin typeface="Arial" pitchFamily="34" charset="0"/>
               </a:rPr>
-              <a:t>measured</a:t>
-            </a:r>
-            <a:r>
-              <a:rPr lang="de-AT" sz="1100" b="0" dirty="0" smtClean="0">
+              <a:t>messages</a:t>
+            </a:r>
+            <a:r>
+              <a:rPr lang="de-AT" sz="1000" b="0" dirty="0" smtClean="0">
+                <a:solidFill>
+                  <a:schemeClr val="accent2"/>
+                </a:solidFill>
                 <a:latin typeface="Arial" pitchFamily="34" charset="0"/>
               </a:rPr>
               <a:t> </a:t>
             </a:r>
             <a:r>
-              <a:rPr lang="de-AT" sz="1100" b="0" dirty="0" err="1" smtClean="0">
+              <a:rPr lang="de-AT" sz="1000" b="0" dirty="0" err="1" smtClean="0">
+                <a:solidFill>
+                  <a:schemeClr val="accent2"/>
+                </a:solidFill>
                 <a:latin typeface="Arial" pitchFamily="34" charset="0"/>
               </a:rPr>
-              <a:t>specific</a:t>
-            </a:r>
-            <a:r>
-              <a:rPr lang="de-AT" sz="1100" b="0" dirty="0" smtClean="0">
+              <a:t>to</a:t>
+            </a:r>
+            <a:r>
+              <a:rPr lang="de-AT" sz="1000" b="0" dirty="0" smtClean="0">
+                <a:solidFill>
+                  <a:schemeClr val="accent2"/>
+                </a:solidFill>
                 <a:latin typeface="Arial" pitchFamily="34" charset="0"/>
               </a:rPr>
-              <a:t> FC </a:t>
-            </a:r>
-            <a:r>
-              <a:rPr lang="de-AT" sz="1100" b="0" dirty="0" err="1" smtClean="0">
+              <a:t> </a:t>
+            </a:r>
+            <a:r>
+              <a:rPr lang="de-AT" sz="1000" b="0" dirty="0" err="1" smtClean="0">
+                <a:solidFill>
+                  <a:schemeClr val="accent2"/>
+                </a:solidFill>
                 <a:latin typeface="Arial" pitchFamily="34" charset="0"/>
               </a:rPr>
-              <a:t>values</a:t>
-            </a:r>
-            <a:r>
-              <a:rPr lang="de-AT" sz="1100" b="0" dirty="0" smtClean="0">
-                <a:latin typeface="Arial" pitchFamily="34" charset="0"/>
-              </a:rPr>
-              <a:t> </a:t>
-            </a:r>
-            <a:r>
-              <a:rPr lang="de-AT" sz="1100" b="0" dirty="0" err="1" smtClean="0">
-                <a:latin typeface="Arial" pitchFamily="34" charset="0"/>
-              </a:rPr>
-              <a:t>and</a:t>
-            </a:r>
-            <a:r>
-              <a:rPr lang="de-AT" sz="1100" b="0" dirty="0" smtClean="0">
-                <a:latin typeface="Arial" pitchFamily="34" charset="0"/>
-              </a:rPr>
-              <a:t> </a:t>
-            </a:r>
-            <a:r>
-              <a:rPr lang="de-AT" sz="1100" b="0" dirty="0" err="1" smtClean="0">
-                <a:latin typeface="Arial" pitchFamily="34" charset="0"/>
-              </a:rPr>
-              <a:t>correction</a:t>
-            </a:r>
-            <a:r>
-              <a:rPr lang="de-AT" sz="1100" b="0" dirty="0" smtClean="0">
-                <a:latin typeface="Arial" pitchFamily="34" charset="0"/>
-              </a:rPr>
-              <a:t> </a:t>
-            </a:r>
-            <a:r>
-              <a:rPr lang="de-AT" sz="1100" b="0" dirty="0" err="1" smtClean="0">
-                <a:latin typeface="Arial" pitchFamily="34" charset="0"/>
-              </a:rPr>
-              <a:t>factor</a:t>
-            </a:r>
-            <a:endParaRPr kumimoji="0" lang="en-US" sz="1100" b="0" i="0" u="none" strike="noStrike" cap="none" normalizeH="0" baseline="0" dirty="0" smtClean="0">
+              <a:t>clipboard</a:t>
+            </a:r>
+            <a:endParaRPr kumimoji="0" lang="en-US" sz="1000" b="0" i="0" u="none" strike="noStrike" cap="none" normalizeH="0" baseline="0" dirty="0" smtClean="0">
               <a:ln>
                 <a:noFill/>
               </a:ln>
               <a:solidFill>
-                <a:schemeClr val="tx1"/>
-              </a:solidFill>
-              <a:effectLst/>
-              <a:latin typeface="Arial" pitchFamily="34" charset="0"/>
-            </a:endParaRPr>
-          </a:p>
-        </p:txBody>
-      </p:sp>
-      <p:sp>
-        <p:nvSpPr>
-          <p:cNvPr id="21" name="Legende mit Linie 1 (Markierungsleiste) 20"/>
-          <p:cNvSpPr/>
-          <p:nvPr/>
-        </p:nvSpPr>
-        <p:spPr bwMode="auto">
-          <a:xfrm>
-            <a:off x="6660232" y="1124744"/>
-            <a:ext cx="2483768" cy="481670"/>
-          </a:xfrm>
-          <a:prstGeom prst="accentCallout1">
-            <a:avLst>
-              <a:gd name="adj1" fmla="val 56216"/>
-              <a:gd name="adj2" fmla="val -2353"/>
-              <a:gd name="adj3" fmla="val 99023"/>
-              <a:gd name="adj4" fmla="val -137554"/>
-            </a:avLst>
-          </a:prstGeom>
-          <a:noFill/>
-          <a:ln w="19050" cap="flat" cmpd="sng" algn="ctr">
-            <a:solidFill>
-              <a:schemeClr val="tx1"/>
-            </a:solidFill>
-            <a:prstDash val="solid"/>
-            <a:round/>
-            <a:headEnd type="none" w="med" len="med"/>
-            <a:tailEnd type="triangle" w="med" len="med"/>
-          </a:ln>
-          <a:effectLst/>
-          <a:extLst/>
-        </p:spPr>
-        <p:txBody>
-          <a:bodyPr vert="horz" wrap="square" lIns="91440" tIns="45720" rIns="91440" bIns="45720" numCol="1" rtlCol="0" anchor="ctr" anchorCtr="0" compatLnSpc="1">
-            <a:prstTxWarp prst="textNoShape">
-              <a:avLst/>
-            </a:prstTxWarp>
-            <a:spAutoFit/>
-          </a:bodyPr>
-          <a:lstStyle/>
-          <a:p>
-            <a:pPr marL="0" marR="0" indent="0" algn="ctr" defTabSz="914400" rtl="0" eaLnBrk="1" fontAlgn="base" latinLnBrk="0" hangingPunct="1">
-              <a:lnSpc>
-                <a:spcPct val="100000"/>
-              </a:lnSpc>
-              <a:spcBef>
-                <a:spcPct val="30000"/>
-              </a:spcBef>
-              <a:spcAft>
-                <a:spcPct val="0"/>
-              </a:spcAft>
-              <a:buClrTx/>
-              <a:buSzTx/>
-              <a:buFontTx/>
-              <a:buNone/>
-              <a:tabLst/>
-            </a:pPr>
-            <a:r>
-              <a:rPr kumimoji="0" lang="de-AT" sz="1100" i="0" u="sng" strike="noStrike" cap="none" normalizeH="0" baseline="0" dirty="0" err="1" smtClean="0">
-                <a:ln>
-                  <a:noFill/>
-                </a:ln>
-                <a:solidFill>
-                  <a:schemeClr val="tx1"/>
-                </a:solidFill>
-                <a:effectLst/>
-                <a:latin typeface="Arial" pitchFamily="34" charset="0"/>
-              </a:rPr>
-              <a:t>Step</a:t>
-            </a:r>
-            <a:r>
-              <a:rPr kumimoji="0" lang="de-AT" sz="1100" i="0" u="sng" strike="noStrike" cap="none" normalizeH="0" baseline="0" dirty="0" smtClean="0">
-                <a:ln>
-                  <a:noFill/>
-                </a:ln>
-                <a:solidFill>
-                  <a:schemeClr val="tx1"/>
-                </a:solidFill>
-                <a:effectLst/>
-                <a:latin typeface="Arial" pitchFamily="34" charset="0"/>
-              </a:rPr>
-              <a:t> </a:t>
-            </a:r>
-            <a:r>
-              <a:rPr lang="de-AT" sz="1100" u="sng" dirty="0">
-                <a:latin typeface="Arial" pitchFamily="34" charset="0"/>
-              </a:rPr>
-              <a:t>1</a:t>
-            </a:r>
-            <a:endParaRPr kumimoji="0" lang="de-AT" sz="1100" i="0" u="sng" strike="noStrike" cap="none" normalizeH="0" baseline="0" dirty="0" smtClean="0">
-              <a:ln>
-                <a:noFill/>
-              </a:ln>
-              <a:solidFill>
-                <a:schemeClr val="tx1"/>
-              </a:solidFill>
-              <a:effectLst/>
-              <a:latin typeface="Arial" pitchFamily="34" charset="0"/>
-            </a:endParaRPr>
-          </a:p>
-          <a:p>
-            <a:pPr marL="0" marR="0" indent="0" algn="l" defTabSz="914400" rtl="0" eaLnBrk="1" fontAlgn="base" latinLnBrk="0" hangingPunct="1">
-              <a:lnSpc>
-                <a:spcPct val="100000"/>
-              </a:lnSpc>
-              <a:spcBef>
-                <a:spcPct val="30000"/>
-              </a:spcBef>
-              <a:spcAft>
-                <a:spcPct val="0"/>
-              </a:spcAft>
-              <a:buClrTx/>
-              <a:buSzTx/>
-              <a:buFontTx/>
-              <a:buNone/>
-              <a:tabLst/>
-            </a:pPr>
-            <a:r>
-              <a:rPr lang="de-AT" sz="1100" b="0" dirty="0" smtClean="0">
-                <a:latin typeface="Arial" pitchFamily="34" charset="0"/>
-              </a:rPr>
-              <a:t>Input all </a:t>
-            </a:r>
-            <a:r>
-              <a:rPr lang="de-AT" sz="1100" b="0" dirty="0" err="1" smtClean="0">
-                <a:latin typeface="Arial" pitchFamily="34" charset="0"/>
-              </a:rPr>
-              <a:t>component</a:t>
-            </a:r>
-            <a:r>
-              <a:rPr lang="de-AT" sz="1100" b="0" dirty="0" smtClean="0">
-                <a:latin typeface="Arial" pitchFamily="34" charset="0"/>
-              </a:rPr>
-              <a:t> </a:t>
-            </a:r>
-            <a:r>
-              <a:rPr lang="de-AT" sz="1100" b="0" dirty="0" err="1" smtClean="0">
-                <a:latin typeface="Arial" pitchFamily="34" charset="0"/>
-              </a:rPr>
-              <a:t>data</a:t>
-            </a:r>
-            <a:endParaRPr kumimoji="0" lang="en-US" sz="1100" b="0" i="0" u="none" strike="noStrike" cap="none" normalizeH="0" baseline="0" dirty="0" smtClean="0">
-              <a:ln>
-                <a:noFill/>
-              </a:ln>
-              <a:solidFill>
-                <a:schemeClr val="tx1"/>
+                <a:schemeClr val="accent2"/>
               </a:solidFill>
               <a:effectLst/>
               <a:latin typeface="Arial" pitchFamily="34" charset="0"/>
@@ -6759,17 +8267,19 @@
         </p:nvSpPr>
         <p:spPr>
           <a:xfrm>
-            <a:off x="755576" y="548680"/>
-            <a:ext cx="7632848" cy="576064"/>
+            <a:off x="468000" y="97200"/>
+            <a:ext cx="7886700" cy="576000"/>
           </a:xfrm>
         </p:spPr>
         <p:txBody>
-          <a:bodyPr/>
+          <a:bodyPr>
+            <a:normAutofit/>
+          </a:bodyPr>
           <a:lstStyle/>
           <a:p>
             <a:r>
               <a:rPr lang="en-US" dirty="0" smtClean="0"/>
-              <a:t>VECTO Engine – Input files</a:t>
+              <a:t>VECTO Engine – Basic features</a:t>
             </a:r>
             <a:endParaRPr lang="en-US" dirty="0"/>
           </a:p>
@@ -6777,304 +8287,383 @@
       </p:sp>
       <p:sp>
         <p:nvSpPr>
-          <p:cNvPr id="3" name="Rechteck 2"/>
-          <p:cNvSpPr/>
-          <p:nvPr/>
+          <p:cNvPr id="7" name="Inhaltsplatzhalter 2"/>
+          <p:cNvSpPr>
+            <a:spLocks noGrp="1"/>
+          </p:cNvSpPr>
+          <p:nvPr>
+            <p:ph idx="1"/>
+          </p:nvPr>
         </p:nvSpPr>
         <p:spPr>
           <a:xfrm>
-            <a:off x="179512" y="1268760"/>
-            <a:ext cx="8928992" cy="4093428"/>
+            <a:off x="360000" y="1267200"/>
+            <a:ext cx="8100000" cy="3263504"/>
           </a:xfrm>
-          <a:prstGeom prst="rect">
-            <a:avLst/>
-          </a:prstGeom>
         </p:spPr>
         <p:txBody>
-          <a:bodyPr wrap="square">
-            <a:spAutoFit/>
+          <a:bodyPr>
+            <a:noAutofit/>
           </a:bodyPr>
           <a:lstStyle/>
           <a:p>
-            <a:pPr marL="285750" indent="-285750" algn="l">
+            <a:pPr>
               <a:spcBef>
-                <a:spcPts val="600"/>
+                <a:spcPts val="0"/>
               </a:spcBef>
               <a:spcAft>
-                <a:spcPts val="0"/>
+                <a:spcPts val="600"/>
               </a:spcAft>
               <a:buFont typeface="Wingdings" panose="05000000000000000000" pitchFamily="2" charset="2"/>
               <a:buChar char="§"/>
             </a:pPr>
             <a:r>
-              <a:rPr lang="en-US" b="0" dirty="0" smtClean="0">
-                <a:latin typeface="Helvetica"/>
-              </a:rPr>
-              <a:t>VECTO Engine needs 4 separate input files (determined according to the current version of the technical annex):</a:t>
-            </a:r>
-          </a:p>
-          <a:p>
-            <a:pPr marL="742950" lvl="1" indent="-285750" algn="l">
+              <a:rPr lang="en-US" sz="1600" dirty="0">
+                <a:latin typeface="Helvetica" panose="020B0604020202020204" pitchFamily="34" charset="0"/>
+                <a:cs typeface="Helvetica" panose="020B0604020202020204" pitchFamily="34" charset="0"/>
+              </a:rPr>
+              <a:t>Written in </a:t>
+            </a:r>
+            <a:r>
+              <a:rPr lang="en-US" sz="1600" dirty="0" smtClean="0">
+                <a:latin typeface="Helvetica" panose="020B0604020202020204" pitchFamily="34" charset="0"/>
+                <a:cs typeface="Helvetica" panose="020B0604020202020204" pitchFamily="34" charset="0"/>
+              </a:rPr>
+              <a:t>VB.net</a:t>
+            </a:r>
+            <a:br>
+              <a:rPr lang="en-US" sz="1600" dirty="0" smtClean="0">
+                <a:latin typeface="Helvetica" panose="020B0604020202020204" pitchFamily="34" charset="0"/>
+                <a:cs typeface="Helvetica" panose="020B0604020202020204" pitchFamily="34" charset="0"/>
+              </a:rPr>
+            </a:br>
+            <a:endParaRPr lang="en-US" sz="1600" dirty="0">
+              <a:latin typeface="Helvetica" panose="020B0604020202020204" pitchFamily="34" charset="0"/>
+              <a:cs typeface="Helvetica" panose="020B0604020202020204" pitchFamily="34" charset="0"/>
+            </a:endParaRPr>
+          </a:p>
+          <a:p>
+            <a:pPr>
               <a:spcBef>
-                <a:spcPts val="600"/>
+                <a:spcPts val="0"/>
               </a:spcBef>
               <a:spcAft>
-                <a:spcPts val="0"/>
+                <a:spcPts val="600"/>
               </a:spcAft>
               <a:buFont typeface="Wingdings" panose="05000000000000000000" pitchFamily="2" charset="2"/>
               <a:buChar char="§"/>
             </a:pPr>
             <a:r>
-              <a:rPr lang="en-US" sz="1400" b="0" dirty="0" smtClean="0">
-                <a:latin typeface="Helvetica"/>
-              </a:rPr>
-              <a:t>Fuel consumption map of CO2-parent engine</a:t>
-            </a:r>
-          </a:p>
-          <a:p>
-            <a:pPr marL="742950" lvl="1" indent="-285750" algn="l">
+              <a:rPr lang="en-US" sz="1600" dirty="0">
+                <a:latin typeface="Helvetica" panose="020B0604020202020204" pitchFamily="34" charset="0"/>
+                <a:cs typeface="Helvetica" panose="020B0604020202020204" pitchFamily="34" charset="0"/>
+              </a:rPr>
+              <a:t>Portable application (i.e. </a:t>
+            </a:r>
+            <a:r>
+              <a:rPr lang="en-US" sz="1600" dirty="0">
+                <a:latin typeface="Helvetica" panose="020B0604020202020204" pitchFamily="34" charset="0"/>
+                <a:cs typeface="Helvetica" panose="020B0604020202020204" pitchFamily="34" charset="0"/>
+              </a:rPr>
+              <a:t>no installation required</a:t>
+            </a:r>
+            <a:r>
+              <a:rPr lang="en-US" sz="1600" dirty="0" smtClean="0">
+                <a:latin typeface="Helvetica" panose="020B0604020202020204" pitchFamily="34" charset="0"/>
+                <a:cs typeface="Helvetica" panose="020B0604020202020204" pitchFamily="34" charset="0"/>
+              </a:rPr>
+              <a:t>)</a:t>
+            </a:r>
+            <a:br>
+              <a:rPr lang="en-US" sz="1600" dirty="0" smtClean="0">
+                <a:latin typeface="Helvetica" panose="020B0604020202020204" pitchFamily="34" charset="0"/>
+                <a:cs typeface="Helvetica" panose="020B0604020202020204" pitchFamily="34" charset="0"/>
+              </a:rPr>
+            </a:br>
+            <a:endParaRPr lang="en-US" sz="1600" dirty="0">
+              <a:latin typeface="Helvetica" panose="020B0604020202020204" pitchFamily="34" charset="0"/>
+              <a:cs typeface="Helvetica" panose="020B0604020202020204" pitchFamily="34" charset="0"/>
+            </a:endParaRPr>
+          </a:p>
+          <a:p>
+            <a:pPr>
               <a:spcBef>
-                <a:spcPts val="600"/>
+                <a:spcPts val="0"/>
               </a:spcBef>
               <a:spcAft>
-                <a:spcPts val="0"/>
+                <a:spcPts val="600"/>
               </a:spcAft>
               <a:buFont typeface="Wingdings" panose="05000000000000000000" pitchFamily="2" charset="2"/>
               <a:buChar char="§"/>
             </a:pPr>
             <a:r>
-              <a:rPr lang="en-US" sz="1400" b="0" dirty="0" smtClean="0">
-                <a:latin typeface="Helvetica"/>
-              </a:rPr>
-              <a:t>Full-load curve of </a:t>
-            </a:r>
-            <a:r>
-              <a:rPr lang="en-US" sz="1400" b="0" dirty="0">
-                <a:latin typeface="Helvetica"/>
-              </a:rPr>
-              <a:t>CO2-parent engine</a:t>
-            </a:r>
-            <a:endParaRPr lang="en-US" sz="1400" b="0" dirty="0" smtClean="0">
-              <a:latin typeface="Helvetica"/>
+              <a:rPr lang="en-US" sz="1600" dirty="0">
+                <a:latin typeface="Helvetica" panose="020B0604020202020204" pitchFamily="34" charset="0"/>
+                <a:cs typeface="Helvetica" panose="020B0604020202020204" pitchFamily="34" charset="0"/>
+              </a:rPr>
+              <a:t>File format conventions </a:t>
+            </a:r>
+            <a:r>
+              <a:rPr lang="en-US" sz="1600" i="1" dirty="0">
+                <a:solidFill>
+                  <a:srgbClr val="C00000"/>
+                </a:solidFill>
+                <a:latin typeface="Helvetica" panose="020B0604020202020204" pitchFamily="34" charset="0"/>
+                <a:cs typeface="Helvetica" panose="020B0604020202020204" pitchFamily="34" charset="0"/>
+              </a:rPr>
+              <a:t>[§6 </a:t>
+            </a:r>
+            <a:r>
+              <a:rPr lang="en-US" sz="1600" i="1" dirty="0" smtClean="0">
+                <a:solidFill>
+                  <a:srgbClr val="C00000"/>
+                </a:solidFill>
+                <a:latin typeface="Helvetica" panose="020B0604020202020204" pitchFamily="34" charset="0"/>
+                <a:cs typeface="Helvetica" panose="020B0604020202020204" pitchFamily="34" charset="0"/>
+              </a:rPr>
+              <a:t>of Annex V </a:t>
+            </a:r>
+            <a:r>
+              <a:rPr lang="en-US" sz="1600" i="1" dirty="0">
+                <a:solidFill>
+                  <a:srgbClr val="C00000"/>
+                </a:solidFill>
+                <a:latin typeface="Helvetica" panose="020B0604020202020204" pitchFamily="34" charset="0"/>
+                <a:cs typeface="Helvetica" panose="020B0604020202020204" pitchFamily="34" charset="0"/>
+              </a:rPr>
+              <a:t>of Regulation (EU) 2017/2400]</a:t>
+            </a:r>
+            <a:endParaRPr lang="en-US" sz="1600" dirty="0">
+              <a:latin typeface="Helvetica" panose="020B0604020202020204" pitchFamily="34" charset="0"/>
+              <a:cs typeface="Helvetica" panose="020B0604020202020204" pitchFamily="34" charset="0"/>
             </a:endParaRPr>
           </a:p>
           <a:p>
-            <a:pPr marL="742950" lvl="1" indent="-285750" algn="l">
+            <a:pPr lvl="1">
               <a:spcBef>
-                <a:spcPts val="600"/>
+                <a:spcPts val="0"/>
               </a:spcBef>
               <a:spcAft>
-                <a:spcPts val="0"/>
+                <a:spcPts val="600"/>
               </a:spcAft>
               <a:buFont typeface="Wingdings" panose="05000000000000000000" pitchFamily="2" charset="2"/>
               <a:buChar char="§"/>
             </a:pPr>
             <a:r>
-              <a:rPr lang="en-US" sz="1400" b="0" dirty="0">
-                <a:latin typeface="Helvetica"/>
-              </a:rPr>
-              <a:t>Full-load curve of </a:t>
-            </a:r>
-            <a:r>
-              <a:rPr lang="en-US" sz="1400" b="0" dirty="0" smtClean="0">
-                <a:latin typeface="Helvetica"/>
-              </a:rPr>
-              <a:t>engine to be certified</a:t>
-            </a:r>
-          </a:p>
-          <a:p>
-            <a:pPr marL="742950" lvl="1" indent="-285750" algn="l">
+              <a:rPr lang="en-US" sz="1400" dirty="0">
+                <a:latin typeface="Helvetica" panose="020B0604020202020204" pitchFamily="34" charset="0"/>
+                <a:cs typeface="Helvetica" panose="020B0604020202020204" pitchFamily="34" charset="0"/>
+              </a:rPr>
+              <a:t>CSV (Comma Separated Values) file type</a:t>
+            </a:r>
+          </a:p>
+          <a:p>
+            <a:pPr lvl="2">
               <a:spcBef>
-                <a:spcPts val="600"/>
+                <a:spcPts val="0"/>
               </a:spcBef>
               <a:spcAft>
-                <a:spcPts val="0"/>
+                <a:spcPts val="600"/>
               </a:spcAft>
               <a:buFont typeface="Wingdings" panose="05000000000000000000" pitchFamily="2" charset="2"/>
               <a:buChar char="§"/>
             </a:pPr>
             <a:r>
-              <a:rPr lang="en-US" sz="1400" b="0" dirty="0" smtClean="0">
-                <a:latin typeface="Helvetica"/>
-              </a:rPr>
-              <a:t>Motoring </a:t>
-            </a:r>
-            <a:r>
-              <a:rPr lang="en-US" sz="1400" b="0" dirty="0">
-                <a:latin typeface="Helvetica"/>
-              </a:rPr>
-              <a:t>curve of CO2-parent engine</a:t>
-            </a:r>
-          </a:p>
-          <a:p>
-            <a:pPr algn="l">
+              <a:rPr lang="en-US" dirty="0">
+                <a:latin typeface="Helvetica" panose="020B0604020202020204" pitchFamily="34" charset="0"/>
+                <a:cs typeface="Helvetica" panose="020B0604020202020204" pitchFamily="34" charset="0"/>
+              </a:rPr>
+              <a:t>List separator </a:t>
+            </a:r>
+            <a:r>
+              <a:rPr lang="en-US" dirty="0">
+                <a:latin typeface="Helvetica" panose="020B0604020202020204" pitchFamily="34" charset="0"/>
+                <a:cs typeface="Helvetica" panose="020B0604020202020204" pitchFamily="34" charset="0"/>
+              </a:rPr>
+              <a:t>is </a:t>
+            </a:r>
+            <a:r>
+              <a:rPr lang="fr-FR" dirty="0">
+                <a:latin typeface="Helvetica" panose="020B0604020202020204" pitchFamily="34" charset="0"/>
+                <a:cs typeface="Helvetica" panose="020B0604020202020204" pitchFamily="34" charset="0"/>
+              </a:rPr>
+              <a:t>Comma “,”</a:t>
+            </a:r>
+            <a:endParaRPr lang="en-US" dirty="0">
+              <a:latin typeface="Helvetica" panose="020B0604020202020204" pitchFamily="34" charset="0"/>
+              <a:cs typeface="Helvetica" panose="020B0604020202020204" pitchFamily="34" charset="0"/>
+            </a:endParaRPr>
+          </a:p>
+          <a:p>
+            <a:pPr lvl="2">
               <a:spcBef>
-                <a:spcPts val="600"/>
+                <a:spcPts val="0"/>
               </a:spcBef>
               <a:spcAft>
-                <a:spcPts val="0"/>
-              </a:spcAft>
-            </a:pPr>
-            <a:endParaRPr lang="en-US" sz="1400" b="0" dirty="0" smtClean="0">
-              <a:latin typeface="Helvetica"/>
-            </a:endParaRPr>
-          </a:p>
-          <a:p>
-            <a:pPr marL="285750" indent="-285750" algn="l">
-              <a:spcBef>
                 <a:spcPts val="600"/>
-              </a:spcBef>
-              <a:spcAft>
-                <a:spcPts val="0"/>
               </a:spcAft>
               <a:buFont typeface="Wingdings" panose="05000000000000000000" pitchFamily="2" charset="2"/>
               <a:buChar char="§"/>
             </a:pPr>
             <a:r>
-              <a:rPr lang="en-US" sz="1400" b="0" dirty="0" smtClean="0">
-                <a:latin typeface="Helvetica"/>
-              </a:rPr>
-              <a:t>Input file formats</a:t>
-            </a:r>
-          </a:p>
-          <a:p>
-            <a:pPr marL="742950" lvl="1" indent="-285750" algn="l">
+              <a:rPr lang="en-US" dirty="0">
+                <a:latin typeface="Helvetica" panose="020B0604020202020204" pitchFamily="34" charset="0"/>
+                <a:cs typeface="Helvetica" panose="020B0604020202020204" pitchFamily="34" charset="0"/>
+              </a:rPr>
+              <a:t>Decimal separator is </a:t>
+            </a:r>
+            <a:r>
+              <a:rPr lang="fr-FR" dirty="0">
+                <a:latin typeface="Helvetica" panose="020B0604020202020204" pitchFamily="34" charset="0"/>
+                <a:cs typeface="Helvetica" panose="020B0604020202020204" pitchFamily="34" charset="0"/>
+              </a:rPr>
+              <a:t>Dot </a:t>
+            </a:r>
+            <a:r>
+              <a:rPr lang="fr-FR" dirty="0" smtClean="0">
+                <a:latin typeface="Helvetica" panose="020B0604020202020204" pitchFamily="34" charset="0"/>
+                <a:cs typeface="Helvetica" panose="020B0604020202020204" pitchFamily="34" charset="0"/>
+              </a:rPr>
+              <a:t>“.”</a:t>
+            </a:r>
+            <a:br>
+              <a:rPr lang="fr-FR" dirty="0" smtClean="0">
+                <a:latin typeface="Helvetica" panose="020B0604020202020204" pitchFamily="34" charset="0"/>
+                <a:cs typeface="Helvetica" panose="020B0604020202020204" pitchFamily="34" charset="0"/>
+              </a:rPr>
+            </a:br>
+            <a:endParaRPr lang="fr-FR" dirty="0">
+              <a:latin typeface="Helvetica" panose="020B0604020202020204" pitchFamily="34" charset="0"/>
+              <a:cs typeface="Helvetica" panose="020B0604020202020204" pitchFamily="34" charset="0"/>
+            </a:endParaRPr>
+          </a:p>
+          <a:p>
+            <a:pPr>
               <a:spcBef>
-                <a:spcPts val="600"/>
+                <a:spcPts val="0"/>
               </a:spcBef>
               <a:spcAft>
-                <a:spcPts val="0"/>
+                <a:spcPts val="600"/>
               </a:spcAft>
               <a:buFont typeface="Wingdings" panose="05000000000000000000" pitchFamily="2" charset="2"/>
               <a:buChar char="§"/>
             </a:pPr>
             <a:r>
-              <a:rPr lang="en-US" sz="1400" b="0" dirty="0" smtClean="0">
-                <a:latin typeface="Helvetica"/>
-                <a:sym typeface="Wingdings" panose="05000000000000000000" pitchFamily="2" charset="2"/>
-              </a:rPr>
-              <a:t>For file formats please refer to the technical annex or supplied demo files!</a:t>
-            </a:r>
-            <a:endParaRPr lang="en-US" sz="800" b="0" dirty="0" smtClean="0">
-              <a:latin typeface="Helvetica"/>
-              <a:sym typeface="Wingdings" panose="05000000000000000000" pitchFamily="2" charset="2"/>
+              <a:rPr lang="en-US" sz="1600" dirty="0">
+                <a:latin typeface="Helvetica" panose="020B0604020202020204" pitchFamily="34" charset="0"/>
+                <a:cs typeface="Helvetica" panose="020B0604020202020204" pitchFamily="34" charset="0"/>
+              </a:rPr>
+              <a:t>According to Regulation (EU) 2017/2400 the use of VECTO </a:t>
+            </a:r>
+            <a:r>
+              <a:rPr lang="en-US" sz="1600" dirty="0">
+                <a:latin typeface="Helvetica" panose="020B0604020202020204" pitchFamily="34" charset="0"/>
+                <a:cs typeface="Helvetica" panose="020B0604020202020204" pitchFamily="34" charset="0"/>
+              </a:rPr>
+              <a:t>Engine </a:t>
+            </a:r>
+            <a:r>
+              <a:rPr lang="en-US" sz="1600" dirty="0">
+                <a:latin typeface="Helvetica" panose="020B0604020202020204" pitchFamily="34" charset="0"/>
+                <a:cs typeface="Helvetica" panose="020B0604020202020204" pitchFamily="34" charset="0"/>
+              </a:rPr>
+              <a:t>is </a:t>
+            </a:r>
+            <a:r>
+              <a:rPr lang="en-US" sz="1600" dirty="0" smtClean="0">
+                <a:latin typeface="Helvetica" panose="020B0604020202020204" pitchFamily="34" charset="0"/>
+                <a:cs typeface="Helvetica" panose="020B0604020202020204" pitchFamily="34" charset="0"/>
+              </a:rPr>
+              <a:t>mandatory</a:t>
+            </a:r>
+            <a:br>
+              <a:rPr lang="en-US" sz="1600" dirty="0" smtClean="0">
+                <a:latin typeface="Helvetica" panose="020B0604020202020204" pitchFamily="34" charset="0"/>
+                <a:cs typeface="Helvetica" panose="020B0604020202020204" pitchFamily="34" charset="0"/>
+              </a:rPr>
+            </a:br>
+            <a:endParaRPr lang="en-US" sz="1600" dirty="0">
+              <a:latin typeface="Helvetica" panose="020B0604020202020204" pitchFamily="34" charset="0"/>
+              <a:cs typeface="Helvetica" panose="020B0604020202020204" pitchFamily="34" charset="0"/>
             </a:endParaRPr>
           </a:p>
           <a:p>
-            <a:pPr marL="285750" indent="-285750" algn="l">
+            <a:pPr>
               <a:spcBef>
-                <a:spcPts val="600"/>
+                <a:spcPts val="0"/>
               </a:spcBef>
               <a:spcAft>
-                <a:spcPts val="0"/>
+                <a:spcPts val="600"/>
               </a:spcAft>
               <a:buFont typeface="Wingdings" panose="05000000000000000000" pitchFamily="2" charset="2"/>
               <a:buChar char="§"/>
             </a:pPr>
-            <a:endParaRPr lang="en-US" sz="1400" b="0" dirty="0" smtClean="0">
-              <a:latin typeface="Helvetica"/>
-              <a:sym typeface="Wingdings" panose="05000000000000000000" pitchFamily="2" charset="2"/>
-            </a:endParaRPr>
-          </a:p>
-          <a:p>
-            <a:pPr marL="285750" indent="-285750" algn="l">
+            <a:r>
+              <a:rPr lang="en-US" sz="1600" dirty="0">
+                <a:latin typeface="Helvetica" panose="020B0604020202020204" pitchFamily="34" charset="0"/>
+                <a:cs typeface="Helvetica" panose="020B0604020202020204" pitchFamily="34" charset="0"/>
+              </a:rPr>
+              <a:t>Output is one single XML file</a:t>
+            </a:r>
+          </a:p>
+          <a:p>
+            <a:pPr lvl="1">
               <a:spcBef>
-                <a:spcPts val="600"/>
+                <a:spcPts val="0"/>
               </a:spcBef>
               <a:spcAft>
-                <a:spcPts val="0"/>
+                <a:spcPts val="600"/>
               </a:spcAft>
               <a:buFont typeface="Wingdings" panose="05000000000000000000" pitchFamily="2" charset="2"/>
               <a:buChar char="§"/>
             </a:pPr>
             <a:r>
-              <a:rPr lang="en-US" sz="1400" b="0" dirty="0" smtClean="0">
-                <a:latin typeface="Helvetica"/>
-                <a:sym typeface="Wingdings" panose="05000000000000000000" pitchFamily="2" charset="2"/>
-              </a:rPr>
-              <a:t>Demo data supplied</a:t>
-            </a:r>
-          </a:p>
-          <a:p>
-            <a:pPr marL="742950" lvl="1" indent="-285750" algn="l">
+              <a:rPr lang="en-US" sz="1400" dirty="0">
+                <a:latin typeface="Helvetica" panose="020B0604020202020204" pitchFamily="34" charset="0"/>
+                <a:cs typeface="Helvetica" panose="020B0604020202020204" pitchFamily="34" charset="0"/>
+              </a:rPr>
+              <a:t>File </a:t>
+            </a:r>
+            <a:r>
+              <a:rPr lang="en-US" sz="1400" dirty="0">
+                <a:latin typeface="Helvetica" panose="020B0604020202020204" pitchFamily="34" charset="0"/>
+                <a:cs typeface="Helvetica" panose="020B0604020202020204" pitchFamily="34" charset="0"/>
+              </a:rPr>
+              <a:t>already </a:t>
+            </a:r>
+            <a:r>
+              <a:rPr lang="en-US" sz="1400" dirty="0">
+                <a:latin typeface="Helvetica" panose="020B0604020202020204" pitchFamily="34" charset="0"/>
+                <a:cs typeface="Helvetica" panose="020B0604020202020204" pitchFamily="34" charset="0"/>
+              </a:rPr>
+              <a:t>hashed</a:t>
+            </a:r>
+          </a:p>
+          <a:p>
+            <a:pPr lvl="1">
               <a:spcBef>
-                <a:spcPts val="600"/>
+                <a:spcPts val="0"/>
               </a:spcBef>
               <a:spcAft>
-                <a:spcPts val="0"/>
+                <a:spcPts val="600"/>
               </a:spcAft>
               <a:buFont typeface="Wingdings" panose="05000000000000000000" pitchFamily="2" charset="2"/>
               <a:buChar char="§"/>
             </a:pPr>
             <a:r>
-              <a:rPr lang="en-US" sz="1400" b="0" dirty="0" smtClean="0">
-                <a:latin typeface="Helvetica"/>
-                <a:sym typeface="Wingdings" panose="05000000000000000000" pitchFamily="2" charset="2"/>
-              </a:rPr>
-              <a:t>Two different full-load curves for two power ratings of one engine </a:t>
-            </a:r>
-            <a:r>
-              <a:rPr lang="en-US" sz="1400" b="0" dirty="0" smtClean="0">
-                <a:latin typeface="Helvetica"/>
-              </a:rPr>
-              <a:t>CO2-family</a:t>
-            </a:r>
-            <a:r>
-              <a:rPr lang="en-US" sz="1400" b="0" dirty="0" smtClean="0">
-                <a:latin typeface="Helvetica"/>
-                <a:sym typeface="Wingdings" panose="05000000000000000000" pitchFamily="2" charset="2"/>
-              </a:rPr>
-              <a:t> supplied</a:t>
-            </a:r>
-          </a:p>
-          <a:p>
-            <a:pPr marL="1200150" lvl="2" indent="-285750" algn="l">
-              <a:spcBef>
-                <a:spcPts val="600"/>
-              </a:spcBef>
-              <a:spcAft>
-                <a:spcPts val="0"/>
-              </a:spcAft>
-              <a:buFont typeface="Wingdings" panose="05000000000000000000" pitchFamily="2" charset="2"/>
-              <a:buChar char="§"/>
-            </a:pPr>
-            <a:r>
-              <a:rPr lang="en-US" sz="1400" b="0" dirty="0" smtClean="0">
-                <a:latin typeface="Helvetica"/>
-                <a:sym typeface="Wingdings" panose="05000000000000000000" pitchFamily="2" charset="2"/>
-              </a:rPr>
-              <a:t>Child: full-load of lower power rating</a:t>
-            </a:r>
-          </a:p>
-          <a:p>
-            <a:pPr marL="1200150" lvl="2" indent="-285750" algn="l">
-              <a:spcBef>
-                <a:spcPts val="600"/>
-              </a:spcBef>
-              <a:spcAft>
-                <a:spcPts val="0"/>
-              </a:spcAft>
-              <a:buFont typeface="Wingdings" panose="05000000000000000000" pitchFamily="2" charset="2"/>
-              <a:buChar char="§"/>
-            </a:pPr>
-            <a:r>
-              <a:rPr lang="en-US" sz="1400" b="0" dirty="0" smtClean="0">
-                <a:latin typeface="Helvetica"/>
-                <a:sym typeface="Wingdings" panose="05000000000000000000" pitchFamily="2" charset="2"/>
-              </a:rPr>
-              <a:t>Parent: full-load of highest power rating</a:t>
-            </a:r>
-            <a:endParaRPr lang="en-US" sz="1400" b="0" dirty="0">
-              <a:latin typeface="Helvetica"/>
-              <a:sym typeface="Wingdings" panose="05000000000000000000" pitchFamily="2" charset="2"/>
-            </a:endParaRPr>
+              <a:rPr lang="en-US" sz="1400" dirty="0">
+                <a:latin typeface="Helvetica" panose="020B0604020202020204" pitchFamily="34" charset="0"/>
+                <a:cs typeface="Helvetica" panose="020B0604020202020204" pitchFamily="34" charset="0"/>
+              </a:rPr>
+              <a:t>Ready for use in VECTO vehicle simulation for declaration</a:t>
+            </a:r>
           </a:p>
         </p:txBody>
       </p:sp>
     </p:spTree>
     <p:extLst>
       <p:ext uri="{BB962C8B-B14F-4D97-AF65-F5344CB8AC3E}">
-        <p14:creationId xmlns:p14="http://schemas.microsoft.com/office/powerpoint/2010/main" val="828712302"/>
+        <p14:creationId xmlns:p14="http://schemas.microsoft.com/office/powerpoint/2010/main" val="1622044522"/>
       </p:ext>
     </p:extLst>
   </p:cSld>
@@ -7120,7 +8709,7 @@
         </p:nvSpPr>
         <p:spPr>
           <a:xfrm>
-            <a:off x="755576" y="548680"/>
+            <a:off x="468000" y="97200"/>
             <a:ext cx="7632848" cy="576064"/>
           </a:xfrm>
         </p:spPr>
@@ -7130,7 +8719,7 @@
           <a:p>
             <a:r>
               <a:rPr lang="en-US" dirty="0" smtClean="0"/>
-              <a:t>VECTO Engine – Output files</a:t>
+              <a:t>VECTO Engine – Input files</a:t>
             </a:r>
             <a:endParaRPr lang="en-US" dirty="0"/>
           </a:p>
@@ -7144,8 +8733,8 @@
         </p:nvSpPr>
         <p:spPr>
           <a:xfrm>
-            <a:off x="179512" y="1268760"/>
-            <a:ext cx="8928992" cy="846386"/>
+            <a:off x="360000" y="1268760"/>
+            <a:ext cx="8388464" cy="4370427"/>
           </a:xfrm>
           <a:prstGeom prst="rect">
             <a:avLst/>
@@ -7171,7 +8760,7 @@
               <a:rPr lang="en-US" b="0" dirty="0" smtClean="0">
                 <a:latin typeface="Helvetica"/>
               </a:rPr>
-              <a:t>VECTO Engine produces one XML output file:</a:t>
+              <a:t>VECTO Engine needs 4 separate input files (determined according to the current version of the technical annex):</a:t>
             </a:r>
           </a:p>
           <a:p>
@@ -7189,116 +8778,277 @@
               <a:rPr lang="en-US" sz="1400" b="0" dirty="0" smtClean="0">
                 <a:latin typeface="Helvetica"/>
               </a:rPr>
-              <a:t>File </a:t>
+              <a:t>Fuel consumption map of CO2-parent engine</a:t>
+            </a:r>
+          </a:p>
+          <a:p>
+            <a:pPr marL="742950" lvl="1" indent="-285750" algn="l">
+              <a:spcBef>
+                <a:spcPts val="600"/>
+              </a:spcBef>
+              <a:spcAft>
+                <a:spcPts val="0"/>
+              </a:spcAft>
+              <a:buFont typeface="Wingdings" panose="05000000000000000000" pitchFamily="2" charset="2"/>
+              <a:buChar char="§"/>
+            </a:pPr>
+            <a:r>
+              <a:rPr lang="en-US" sz="1400" b="0" dirty="0" smtClean="0">
+                <a:latin typeface="Helvetica"/>
+              </a:rPr>
+              <a:t>Full-load curve of </a:t>
             </a:r>
             <a:r>
               <a:rPr lang="en-US" sz="1400" b="0" dirty="0">
                 <a:latin typeface="Helvetica"/>
               </a:rPr>
-              <a:t>name is </a:t>
+              <a:t>CO2-parent engine</a:t>
+            </a:r>
+            <a:endParaRPr lang="en-US" sz="1400" b="0" dirty="0" smtClean="0">
+              <a:latin typeface="Helvetica"/>
+            </a:endParaRPr>
+          </a:p>
+          <a:p>
+            <a:pPr marL="742950" lvl="1" indent="-285750" algn="l">
+              <a:spcBef>
+                <a:spcPts val="600"/>
+              </a:spcBef>
+              <a:spcAft>
+                <a:spcPts val="0"/>
+              </a:spcAft>
+              <a:buFont typeface="Wingdings" panose="05000000000000000000" pitchFamily="2" charset="2"/>
+              <a:buChar char="§"/>
+            </a:pPr>
+            <a:r>
+              <a:rPr lang="en-US" sz="1400" b="0" dirty="0">
+                <a:latin typeface="Helvetica"/>
+              </a:rPr>
+              <a:t>Full-load curve of </a:t>
             </a:r>
             <a:r>
               <a:rPr lang="en-US" sz="1400" b="0" dirty="0" smtClean="0">
                 <a:latin typeface="Helvetica"/>
               </a:rPr>
-              <a:t>created based on GUI input data </a:t>
-            </a:r>
-            <a:r>
-              <a:rPr lang="en-US" sz="1400" b="0" dirty="0" err="1" smtClean="0">
-                <a:latin typeface="Helvetica"/>
-              </a:rPr>
-              <a:t>accodring</a:t>
-            </a:r>
+              <a:t>engine to be certified</a:t>
+            </a:r>
+          </a:p>
+          <a:p>
+            <a:pPr marL="742950" lvl="1" indent="-285750" algn="l">
+              <a:spcBef>
+                <a:spcPts val="600"/>
+              </a:spcBef>
+              <a:spcAft>
+                <a:spcPts val="0"/>
+              </a:spcAft>
+              <a:buFont typeface="Wingdings" panose="05000000000000000000" pitchFamily="2" charset="2"/>
+              <a:buChar char="§"/>
+            </a:pPr>
             <a:r>
               <a:rPr lang="en-US" sz="1400" b="0" dirty="0" smtClean="0">
                 <a:latin typeface="Helvetica"/>
               </a:rPr>
-              <a:t> to the following scheme:</a:t>
+              <a:t>Motoring </a:t>
             </a:r>
             <a:r>
               <a:rPr lang="en-US" sz="1400" b="0" dirty="0">
                 <a:latin typeface="Helvetica"/>
               </a:rPr>
-              <a:t/>
-            </a:r>
-            <a:br>
-              <a:rPr lang="en-US" sz="1400" b="0" dirty="0">
-                <a:latin typeface="Helvetica"/>
-              </a:rPr>
-            </a:br>
+              <a:t>curve of CO2-parent engine</a:t>
+            </a:r>
+          </a:p>
+          <a:p>
+            <a:pPr algn="l">
+              <a:spcBef>
+                <a:spcPts val="600"/>
+              </a:spcBef>
+              <a:spcAft>
+                <a:spcPts val="0"/>
+              </a:spcAft>
+            </a:pPr>
+            <a:endParaRPr lang="en-US" sz="1400" b="0" dirty="0" smtClean="0">
+              <a:latin typeface="Helvetica"/>
+            </a:endParaRPr>
+          </a:p>
+          <a:p>
+            <a:pPr marL="285750" indent="-285750" algn="l">
+              <a:spcBef>
+                <a:spcPts val="600"/>
+              </a:spcBef>
+              <a:spcAft>
+                <a:spcPts val="0"/>
+              </a:spcAft>
+              <a:buFont typeface="Wingdings" panose="05000000000000000000" pitchFamily="2" charset="2"/>
+              <a:buChar char="§"/>
+            </a:pPr>
             <a:r>
               <a:rPr lang="en-US" sz="1400" b="0" dirty="0" smtClean="0">
                 <a:latin typeface="Helvetica"/>
               </a:rPr>
-              <a:t>“</a:t>
-            </a:r>
-            <a:r>
-              <a:rPr lang="en-US" sz="1400" b="0" dirty="0" err="1" smtClean="0">
-                <a:latin typeface="Helvetica"/>
-              </a:rPr>
-              <a:t>OutPath</a:t>
-            </a:r>
+              <a:t>Input file formats</a:t>
+            </a:r>
+          </a:p>
+          <a:p>
+            <a:pPr marL="742950" lvl="1" indent="-285750" algn="l">
+              <a:spcBef>
+                <a:spcPts val="600"/>
+              </a:spcBef>
+              <a:spcAft>
+                <a:spcPts val="0"/>
+              </a:spcAft>
+              <a:buFont typeface="Wingdings" panose="05000000000000000000" pitchFamily="2" charset="2"/>
+              <a:buChar char="§"/>
+            </a:pPr>
             <a:r>
               <a:rPr lang="en-US" sz="1400" b="0" dirty="0" smtClean="0">
                 <a:latin typeface="Helvetica"/>
-              </a:rPr>
-              <a:t>” + “Manufacturer” + </a:t>
-            </a:r>
-            <a:r>
-              <a:rPr lang="en-US" sz="1400" b="0" dirty="0">
-                <a:latin typeface="Helvetica"/>
-              </a:rPr>
-              <a:t>"_" </a:t>
+                <a:sym typeface="Wingdings" panose="05000000000000000000" pitchFamily="2" charset="2"/>
+              </a:rPr>
+              <a:t>For file formats please refer to the technical annex or supplied demo files</a:t>
             </a:r>
             <a:r>
               <a:rPr lang="en-US" sz="1400" b="0" dirty="0" smtClean="0">
                 <a:latin typeface="Helvetica"/>
-              </a:rPr>
-              <a:t>+ </a:t>
-            </a:r>
-            <a:r>
-              <a:rPr lang="en-US" sz="1400" b="0" dirty="0">
-                <a:latin typeface="Helvetica"/>
-              </a:rPr>
-              <a:t>Model </a:t>
-            </a:r>
-            <a:r>
+                <a:sym typeface="Wingdings" panose="05000000000000000000" pitchFamily="2" charset="2"/>
+              </a:rPr>
+              <a:t>!</a:t>
+            </a:r>
+            <a:br>
               <a:rPr lang="en-US" sz="1400" b="0" dirty="0" smtClean="0">
                 <a:latin typeface="Helvetica"/>
-              </a:rPr>
-              <a:t>+ </a:t>
-            </a:r>
-            <a:r>
-              <a:rPr lang="en-US" sz="1400" b="0" dirty="0">
-                <a:latin typeface="Helvetica"/>
-              </a:rPr>
-              <a:t>"_" </a:t>
-            </a:r>
+                <a:sym typeface="Wingdings" panose="05000000000000000000" pitchFamily="2" charset="2"/>
+              </a:rPr>
+            </a:br>
+            <a:r>
+              <a:rPr lang="en-US" sz="1400" i="1" dirty="0">
+                <a:solidFill>
+                  <a:srgbClr val="C00000"/>
+                </a:solidFill>
+                <a:latin typeface="Helvetica" panose="020B0604020202020204" pitchFamily="34" charset="0"/>
+                <a:cs typeface="Helvetica" panose="020B0604020202020204" pitchFamily="34" charset="0"/>
+              </a:rPr>
+              <a:t>[§6 of Annex V of Regulation (EU) 2017/2400]</a:t>
+            </a:r>
+            <a:endParaRPr lang="en-US" sz="1400" b="0" dirty="0" smtClean="0">
+              <a:latin typeface="Helvetica" panose="020B0604020202020204" pitchFamily="34" charset="0"/>
+              <a:cs typeface="Helvetica" panose="020B0604020202020204" pitchFamily="34" charset="0"/>
+              <a:sym typeface="Wingdings" panose="05000000000000000000" pitchFamily="2" charset="2"/>
+            </a:endParaRPr>
+          </a:p>
+          <a:p>
+            <a:pPr marL="285750" indent="-285750" algn="l">
+              <a:spcBef>
+                <a:spcPts val="600"/>
+              </a:spcBef>
+              <a:spcAft>
+                <a:spcPts val="0"/>
+              </a:spcAft>
+              <a:buFont typeface="Wingdings" panose="05000000000000000000" pitchFamily="2" charset="2"/>
+              <a:buChar char="§"/>
+            </a:pPr>
+            <a:endParaRPr lang="en-US" sz="1400" b="0" dirty="0" smtClean="0">
+              <a:latin typeface="Helvetica"/>
+              <a:sym typeface="Wingdings" panose="05000000000000000000" pitchFamily="2" charset="2"/>
+            </a:endParaRPr>
+          </a:p>
+          <a:p>
+            <a:pPr marL="285750" indent="-285750" algn="l">
+              <a:spcBef>
+                <a:spcPts val="600"/>
+              </a:spcBef>
+              <a:spcAft>
+                <a:spcPts val="0"/>
+              </a:spcAft>
+              <a:buFont typeface="Wingdings" panose="05000000000000000000" pitchFamily="2" charset="2"/>
+              <a:buChar char="§"/>
+            </a:pPr>
             <a:r>
               <a:rPr lang="en-US" sz="1400" b="0" dirty="0" smtClean="0">
                 <a:latin typeface="Helvetica"/>
-              </a:rPr>
-              <a:t>+ “Certification Number” + </a:t>
-            </a:r>
-            <a:r>
-              <a:rPr lang="en-US" sz="1400" b="0" dirty="0">
-                <a:latin typeface="Helvetica"/>
-              </a:rPr>
-              <a:t>".xml</a:t>
-            </a:r>
+                <a:sym typeface="Wingdings" panose="05000000000000000000" pitchFamily="2" charset="2"/>
+              </a:rPr>
+              <a:t>Demo data supplied</a:t>
+            </a:r>
+          </a:p>
+          <a:p>
+            <a:pPr marL="742950" lvl="1" indent="-285750" algn="l">
+              <a:spcBef>
+                <a:spcPts val="600"/>
+              </a:spcBef>
+              <a:spcAft>
+                <a:spcPts val="0"/>
+              </a:spcAft>
+              <a:buFont typeface="Wingdings" panose="05000000000000000000" pitchFamily="2" charset="2"/>
+              <a:buChar char="§"/>
+            </a:pPr>
             <a:r>
               <a:rPr lang="en-US" sz="1400" b="0" dirty="0" smtClean="0">
                 <a:latin typeface="Helvetica"/>
-              </a:rPr>
-              <a:t>"</a:t>
-            </a:r>
+                <a:sym typeface="Wingdings" panose="05000000000000000000" pitchFamily="2" charset="2"/>
+              </a:rPr>
+              <a:t>Two different full-load curves for two power ratings of one engine </a:t>
+            </a:r>
+            <a:r>
+              <a:rPr lang="en-US" sz="1400" b="0" dirty="0" smtClean="0">
+                <a:latin typeface="Helvetica"/>
+              </a:rPr>
+              <a:t>CO2-family</a:t>
+            </a:r>
+            <a:r>
+              <a:rPr lang="en-US" sz="1400" b="0" dirty="0" smtClean="0">
+                <a:latin typeface="Helvetica"/>
+                <a:sym typeface="Wingdings" panose="05000000000000000000" pitchFamily="2" charset="2"/>
+              </a:rPr>
+              <a:t> supplied</a:t>
+            </a:r>
+          </a:p>
+          <a:p>
+            <a:pPr marL="1200150" lvl="2" indent="-285750" algn="l">
+              <a:spcBef>
+                <a:spcPts val="600"/>
+              </a:spcBef>
+              <a:spcAft>
+                <a:spcPts val="0"/>
+              </a:spcAft>
+              <a:buFont typeface="Wingdings" panose="05000000000000000000" pitchFamily="2" charset="2"/>
+              <a:buChar char="§"/>
+            </a:pPr>
+            <a:r>
+              <a:rPr lang="en-US" sz="1400" b="0" dirty="0" smtClean="0">
+                <a:latin typeface="Helvetica"/>
+                <a:sym typeface="Wingdings" panose="05000000000000000000" pitchFamily="2" charset="2"/>
+              </a:rPr>
+              <a:t>Child: full-load of lower power rating</a:t>
+            </a:r>
+          </a:p>
+          <a:p>
+            <a:pPr marL="1200150" lvl="2" indent="-285750" algn="l">
+              <a:spcBef>
+                <a:spcPts val="600"/>
+              </a:spcBef>
+              <a:spcAft>
+                <a:spcPts val="0"/>
+              </a:spcAft>
+              <a:buFont typeface="Wingdings" panose="05000000000000000000" pitchFamily="2" charset="2"/>
+              <a:buChar char="§"/>
+            </a:pPr>
+            <a:r>
+              <a:rPr lang="en-US" sz="1400" b="0" dirty="0" smtClean="0">
+                <a:latin typeface="Helvetica"/>
+                <a:sym typeface="Wingdings" panose="05000000000000000000" pitchFamily="2" charset="2"/>
+              </a:rPr>
+              <a:t>Parent: full-load of highest power rating</a:t>
+            </a:r>
+            <a:endParaRPr lang="en-US" sz="1400" b="0" dirty="0">
+              <a:latin typeface="Helvetica"/>
+              <a:sym typeface="Wingdings" panose="05000000000000000000" pitchFamily="2" charset="2"/>
+            </a:endParaRPr>
           </a:p>
         </p:txBody>
       </p:sp>
     </p:spTree>
     <p:extLst>
       <p:ext uri="{BB962C8B-B14F-4D97-AF65-F5344CB8AC3E}">
-        <p14:creationId xmlns:p14="http://schemas.microsoft.com/office/powerpoint/2010/main" val="1838928384"/>
+        <p14:creationId xmlns:p14="http://schemas.microsoft.com/office/powerpoint/2010/main" val="828712302"/>
       </p:ext>
     </p:extLst>
   </p:cSld>
@@ -7344,7 +9094,7 @@
         </p:nvSpPr>
         <p:spPr>
           <a:xfrm>
-            <a:off x="755576" y="548680"/>
+            <a:off x="468000" y="97200"/>
             <a:ext cx="7632848" cy="576064"/>
           </a:xfrm>
         </p:spPr>
@@ -7354,7 +9104,7 @@
           <a:p>
             <a:r>
               <a:rPr lang="en-US" dirty="0" smtClean="0"/>
-              <a:t>VECTO Engine – Operations performed (p1/4)</a:t>
+              <a:t>VECTO Engine – Output files</a:t>
             </a:r>
             <a:endParaRPr lang="en-US" dirty="0"/>
           </a:p>
@@ -7368,8 +9118,8 @@
         </p:nvSpPr>
         <p:spPr>
           <a:xfrm>
-            <a:off x="179512" y="1268760"/>
-            <a:ext cx="8928992" cy="4247317"/>
+            <a:off x="360000" y="1268760"/>
+            <a:ext cx="8388000" cy="2323713"/>
           </a:xfrm>
           <a:prstGeom prst="rect">
             <a:avLst/>
@@ -7381,750 +9131,208 @@
           </a:bodyPr>
           <a:lstStyle/>
           <a:p>
-            <a:pPr indent="-936000" algn="l">
+            <a:pPr marL="285750" indent="-285750" algn="l">
               <a:spcBef>
-                <a:spcPts val="1200"/>
+                <a:spcPts val="600"/>
               </a:spcBef>
               <a:spcAft>
                 <a:spcPts val="0"/>
               </a:spcAft>
-              <a:tabLst>
-                <a:tab pos="534988" algn="l"/>
-              </a:tabLst>
+              <a:buFont typeface="Wingdings" panose="05000000000000000000" pitchFamily="2" charset="2"/>
+              <a:buChar char="§"/>
             </a:pPr>
             <a:r>
-              <a:rPr lang="en-US" sz="1200" b="0" dirty="0" smtClean="0">
+              <a:rPr lang="en-US" b="0" dirty="0" smtClean="0">
                 <a:latin typeface="Helvetica"/>
-                <a:sym typeface="Wingdings" panose="05000000000000000000" pitchFamily="2" charset="2"/>
-              </a:rPr>
-              <a:t>1. Reading </a:t>
-            </a:r>
-            <a:r>
-              <a:rPr lang="en-US" sz="1200" b="0" dirty="0">
+              </a:rPr>
+              <a:t>VECTO Engine produces one XML output file</a:t>
+            </a:r>
+            <a:r>
+              <a:rPr lang="en-US" b="0" dirty="0" smtClean="0">
                 <a:latin typeface="Helvetica"/>
-                <a:sym typeface="Wingdings" panose="05000000000000000000" pitchFamily="2" charset="2"/>
-              </a:rPr>
-              <a:t>of input files and automatic check of input data</a:t>
-            </a:r>
-          </a:p>
-          <a:p>
-            <a:pPr indent="-936000" algn="l">
+              </a:rPr>
+              <a:t>:</a:t>
+            </a:r>
+            <a:br>
+              <a:rPr lang="en-US" b="0" dirty="0" smtClean="0">
+                <a:latin typeface="Helvetica"/>
+              </a:rPr>
+            </a:br>
+            <a:endParaRPr lang="en-US" b="0" dirty="0" smtClean="0">
+              <a:latin typeface="Helvetica"/>
+            </a:endParaRPr>
+          </a:p>
+          <a:p>
+            <a:pPr marL="742950" lvl="1" indent="-285750" algn="l">
               <a:spcBef>
-                <a:spcPts val="1200"/>
+                <a:spcPts val="600"/>
               </a:spcBef>
               <a:spcAft>
                 <a:spcPts val="0"/>
               </a:spcAft>
-              <a:tabLst>
-                <a:tab pos="534988" algn="l"/>
-              </a:tabLst>
+              <a:buFont typeface="Wingdings" panose="05000000000000000000" pitchFamily="2" charset="2"/>
+              <a:buChar char="§"/>
             </a:pPr>
             <a:r>
-              <a:rPr lang="en-US" sz="1200" b="0" dirty="0" smtClean="0">
+              <a:rPr lang="en-US" sz="1400" b="0" dirty="0" smtClean="0">
                 <a:latin typeface="Helvetica"/>
-                <a:sym typeface="Wingdings" panose="05000000000000000000" pitchFamily="2" charset="2"/>
-              </a:rPr>
-              <a:t>	1.1 Check </a:t>
-            </a:r>
-            <a:r>
-              <a:rPr lang="en-US" sz="1200" b="0" dirty="0">
+              </a:rPr>
+              <a:t>File </a:t>
+            </a:r>
+            <a:r>
+              <a:rPr lang="en-US" sz="1400" b="0" dirty="0">
                 <a:latin typeface="Helvetica"/>
-                <a:sym typeface="Wingdings" panose="05000000000000000000" pitchFamily="2" charset="2"/>
-              </a:rPr>
-              <a:t>of requirements for input data according to the definitions in paragraph 6.1 of </a:t>
-            </a:r>
-            <a:r>
-              <a:rPr lang="en-US" sz="1200" b="0" dirty="0" smtClean="0">
+              </a:rPr>
+              <a:t>name is </a:t>
+            </a:r>
+            <a:r>
+              <a:rPr lang="en-US" sz="1400" b="0" dirty="0" smtClean="0">
                 <a:latin typeface="Helvetica"/>
-                <a:sym typeface="Wingdings" panose="05000000000000000000" pitchFamily="2" charset="2"/>
-              </a:rPr>
-              <a:t>the technical annex </a:t>
-            </a:r>
-            <a:endParaRPr lang="en-US" sz="1200" b="0" dirty="0">
+              </a:rPr>
+              <a:t>created based on GUI input data </a:t>
+            </a:r>
+            <a:r>
+              <a:rPr lang="en-US" sz="1400" b="0" dirty="0" smtClean="0">
+                <a:latin typeface="Helvetica"/>
+              </a:rPr>
+              <a:t>according </a:t>
+            </a:r>
+            <a:r>
+              <a:rPr lang="en-US" sz="1400" b="0" dirty="0" smtClean="0">
+                <a:latin typeface="Helvetica"/>
+              </a:rPr>
+              <a:t>to the following scheme</a:t>
+            </a:r>
+            <a:r>
+              <a:rPr lang="en-US" sz="1400" b="0" dirty="0" smtClean="0">
+                <a:latin typeface="Helvetica"/>
+              </a:rPr>
+              <a:t>:</a:t>
+            </a:r>
+            <a:br>
+              <a:rPr lang="en-US" sz="1400" b="0" dirty="0" smtClean="0">
+                <a:latin typeface="Helvetica"/>
+              </a:rPr>
+            </a:br>
+            <a:r>
+              <a:rPr lang="en-US" sz="1400" b="0" dirty="0">
+                <a:latin typeface="Helvetica"/>
+              </a:rPr>
+              <a:t/>
+            </a:r>
+            <a:br>
+              <a:rPr lang="en-US" sz="1400" b="0" dirty="0">
+                <a:latin typeface="Helvetica"/>
+              </a:rPr>
+            </a:br>
+            <a:r>
+              <a:rPr lang="en-US" sz="1400" b="0" dirty="0" smtClean="0">
+                <a:latin typeface="Helvetica"/>
+              </a:rPr>
+              <a:t>“</a:t>
+            </a:r>
+            <a:r>
+              <a:rPr lang="en-US" sz="1400" b="0" dirty="0" smtClean="0">
+                <a:latin typeface="Helvetica"/>
+              </a:rPr>
+              <a:t>Manufacturer” </a:t>
+            </a:r>
+            <a:r>
+              <a:rPr lang="en-US" sz="1400" b="0" dirty="0" smtClean="0">
+                <a:latin typeface="Helvetica"/>
+              </a:rPr>
+              <a:t>&amp; </a:t>
+            </a:r>
+            <a:r>
+              <a:rPr lang="en-US" sz="1400" b="0" dirty="0">
+                <a:latin typeface="Helvetica"/>
+              </a:rPr>
+              <a:t>"_" </a:t>
+            </a:r>
+            <a:r>
+              <a:rPr lang="en-US" sz="1400" b="0" dirty="0" smtClean="0">
+                <a:latin typeface="Helvetica"/>
+              </a:rPr>
+              <a:t>&amp; “Model” &amp; </a:t>
+            </a:r>
+            <a:r>
+              <a:rPr lang="en-US" sz="1400" b="0" dirty="0">
+                <a:latin typeface="Helvetica"/>
+              </a:rPr>
+              <a:t>".</a:t>
+            </a:r>
+            <a:r>
+              <a:rPr lang="en-US" sz="1400" b="0" dirty="0" smtClean="0">
+                <a:latin typeface="Helvetica"/>
+              </a:rPr>
+              <a:t>xml“</a:t>
+            </a:r>
+            <a:br>
+              <a:rPr lang="en-US" sz="1400" b="0" dirty="0" smtClean="0">
+                <a:latin typeface="Helvetica"/>
+              </a:rPr>
+            </a:br>
+            <a:endParaRPr lang="en-US" sz="1400" b="0" dirty="0" smtClean="0">
               <a:latin typeface="Helvetica"/>
-              <a:sym typeface="Wingdings" panose="05000000000000000000" pitchFamily="2" charset="2"/>
             </a:endParaRPr>
           </a:p>
           <a:p>
-            <a:pPr indent="-936000" algn="l">
+            <a:pPr marL="742950" lvl="1" indent="-285750" algn="l">
               <a:spcBef>
-                <a:spcPts val="1200"/>
+                <a:spcPts val="600"/>
               </a:spcBef>
               <a:spcAft>
                 <a:spcPts val="0"/>
               </a:spcAft>
-              <a:tabLst>
-                <a:tab pos="534988" algn="l"/>
-                <a:tab pos="808038" algn="l"/>
-              </a:tabLst>
+              <a:buFont typeface="Wingdings" panose="05000000000000000000" pitchFamily="2" charset="2"/>
+              <a:buChar char="§"/>
             </a:pPr>
             <a:r>
-              <a:rPr lang="en-US" sz="1200" b="0" dirty="0" smtClean="0">
+              <a:rPr lang="en-US" sz="1400" b="0" dirty="0">
                 <a:latin typeface="Helvetica"/>
-                <a:sym typeface="Wingdings" panose="05000000000000000000" pitchFamily="2" charset="2"/>
-              </a:rPr>
-              <a:t>	1.2 Check </a:t>
-            </a:r>
-            <a:r>
-              <a:rPr lang="en-US" sz="1200" b="0" dirty="0">
+              </a:rPr>
+              <a:t>File already </a:t>
+            </a:r>
+            <a:r>
+              <a:rPr lang="en-US" sz="1400" b="0" dirty="0" smtClean="0">
                 <a:latin typeface="Helvetica"/>
-                <a:sym typeface="Wingdings" panose="05000000000000000000" pitchFamily="2" charset="2"/>
-              </a:rPr>
-              <a:t>of requirements for recorded FCMC data according to the definitions in paragraph 4.3.5.2 and </a:t>
-            </a:r>
-            <a:r>
-              <a:rPr lang="en-US" sz="1200" b="0" dirty="0" err="1">
+              </a:rPr>
+              <a:t>hashed</a:t>
+            </a:r>
+            <a:br>
+              <a:rPr lang="en-US" sz="1400" b="0" dirty="0" smtClean="0">
                 <a:latin typeface="Helvetica"/>
-                <a:sym typeface="Wingdings" panose="05000000000000000000" pitchFamily="2" charset="2"/>
-              </a:rPr>
-              <a:t>subpoint</a:t>
-            </a:r>
-            <a:r>
-              <a:rPr lang="en-US" sz="1200" b="0" dirty="0">
-                <a:latin typeface="Helvetica"/>
-                <a:sym typeface="Wingdings" panose="05000000000000000000" pitchFamily="2" charset="2"/>
-              </a:rPr>
-              <a:t> (1) </a:t>
-            </a:r>
-            <a:r>
-              <a:rPr lang="en-US" sz="1200" b="0" dirty="0" smtClean="0">
-                <a:latin typeface="Helvetica"/>
-                <a:sym typeface="Wingdings" panose="05000000000000000000" pitchFamily="2" charset="2"/>
-              </a:rPr>
-              <a:t>of</a:t>
-            </a:r>
-            <a:br>
-              <a:rPr lang="en-US" sz="1200" b="0" dirty="0" smtClean="0">
-                <a:latin typeface="Helvetica"/>
-                <a:sym typeface="Wingdings" panose="05000000000000000000" pitchFamily="2" charset="2"/>
               </a:rPr>
             </a:br>
-            <a:r>
-              <a:rPr lang="en-US" sz="1200" b="0" dirty="0" smtClean="0">
-                <a:latin typeface="Helvetica"/>
-                <a:sym typeface="Wingdings" panose="05000000000000000000" pitchFamily="2" charset="2"/>
-              </a:rPr>
-              <a:t>		paragraph </a:t>
-            </a:r>
-            <a:r>
-              <a:rPr lang="en-US" sz="1200" b="0" dirty="0">
-                <a:latin typeface="Helvetica"/>
-                <a:sym typeface="Wingdings" panose="05000000000000000000" pitchFamily="2" charset="2"/>
-              </a:rPr>
-              <a:t>4.3.5.5 of </a:t>
-            </a:r>
-            <a:r>
-              <a:rPr lang="en-US" sz="1200" b="0" dirty="0" smtClean="0">
-                <a:latin typeface="Helvetica"/>
-                <a:sym typeface="Wingdings" panose="05000000000000000000" pitchFamily="2" charset="2"/>
-              </a:rPr>
-              <a:t>the technical annex </a:t>
-            </a:r>
-            <a:endParaRPr lang="en-US" sz="1200" b="0" dirty="0">
+            <a:endParaRPr lang="en-US" sz="1400" b="0" dirty="0">
               <a:latin typeface="Helvetica"/>
-              <a:sym typeface="Wingdings" panose="05000000000000000000" pitchFamily="2" charset="2"/>
             </a:endParaRPr>
           </a:p>
           <a:p>
-            <a:pPr indent="-936000" algn="l">
+            <a:pPr marL="742950" lvl="1" indent="-285750" algn="l">
               <a:spcBef>
-                <a:spcPts val="1200"/>
+                <a:spcPts val="600"/>
               </a:spcBef>
               <a:spcAft>
                 <a:spcPts val="0"/>
               </a:spcAft>
-              <a:tabLst>
-                <a:tab pos="180975" algn="l"/>
-                <a:tab pos="534988" algn="l"/>
-              </a:tabLst>
+              <a:buFont typeface="Wingdings" panose="05000000000000000000" pitchFamily="2" charset="2"/>
+              <a:buChar char="§"/>
             </a:pPr>
             <a:r>
-              <a:rPr lang="en-US" sz="1200" b="0" dirty="0" smtClean="0">
+              <a:rPr lang="en-US" sz="1400" b="0" dirty="0">
                 <a:latin typeface="Helvetica"/>
-                <a:sym typeface="Wingdings" panose="05000000000000000000" pitchFamily="2" charset="2"/>
-              </a:rPr>
-              <a:t>2. Calculation </a:t>
-            </a:r>
-            <a:r>
-              <a:rPr lang="en-US" sz="1200" b="0" dirty="0">
+              </a:rPr>
+              <a:t>Ready for use in VECTO vehicle simulation for </a:t>
+            </a:r>
+            <a:r>
+              <a:rPr lang="en-US" sz="1400" b="0" dirty="0" smtClean="0">
                 <a:latin typeface="Helvetica"/>
-                <a:sym typeface="Wingdings" panose="05000000000000000000" pitchFamily="2" charset="2"/>
-              </a:rPr>
-              <a:t>of characteristic engine speeds from full load curves of parent engine and actual engine for certification according </a:t>
-            </a:r>
-            <a:r>
-              <a:rPr lang="en-US" sz="1200" b="0" dirty="0" smtClean="0">
-                <a:latin typeface="Helvetica"/>
-                <a:sym typeface="Wingdings" panose="05000000000000000000" pitchFamily="2" charset="2"/>
-              </a:rPr>
-              <a:t>to</a:t>
-            </a:r>
-            <a:br>
-              <a:rPr lang="en-US" sz="1200" b="0" dirty="0" smtClean="0">
-                <a:latin typeface="Helvetica"/>
-                <a:sym typeface="Wingdings" panose="05000000000000000000" pitchFamily="2" charset="2"/>
-              </a:rPr>
-            </a:br>
-            <a:r>
-              <a:rPr lang="en-US" sz="1200" b="0" dirty="0" smtClean="0">
-                <a:latin typeface="Helvetica"/>
-                <a:sym typeface="Wingdings" panose="05000000000000000000" pitchFamily="2" charset="2"/>
-              </a:rPr>
-              <a:t>	the </a:t>
-            </a:r>
-            <a:r>
-              <a:rPr lang="en-US" sz="1200" b="0" dirty="0">
-                <a:latin typeface="Helvetica"/>
-                <a:sym typeface="Wingdings" panose="05000000000000000000" pitchFamily="2" charset="2"/>
-              </a:rPr>
-              <a:t>definitions in paragraph 4.3.5.2.1 of </a:t>
-            </a:r>
-            <a:r>
-              <a:rPr lang="en-US" sz="1200" b="0" dirty="0" smtClean="0">
-                <a:latin typeface="Helvetica"/>
-                <a:sym typeface="Wingdings" panose="05000000000000000000" pitchFamily="2" charset="2"/>
-              </a:rPr>
-              <a:t>the technical annex </a:t>
-            </a:r>
-            <a:endParaRPr lang="en-US" sz="1200" b="0" dirty="0">
+              </a:rPr>
+              <a:t>declaration</a:t>
+            </a:r>
+            <a:endParaRPr lang="en-US" sz="1400" b="0" dirty="0" smtClean="0">
               <a:latin typeface="Helvetica"/>
-              <a:sym typeface="Wingdings" panose="05000000000000000000" pitchFamily="2" charset="2"/>
-            </a:endParaRPr>
-          </a:p>
-          <a:p>
-            <a:pPr indent="-936000" algn="l">
-              <a:spcBef>
-                <a:spcPts val="1200"/>
-              </a:spcBef>
-              <a:spcAft>
-                <a:spcPts val="0"/>
-              </a:spcAft>
-              <a:tabLst>
-                <a:tab pos="534988" algn="l"/>
-              </a:tabLst>
-            </a:pPr>
-            <a:r>
-              <a:rPr lang="en-US" sz="1200" b="0" dirty="0">
-                <a:latin typeface="Helvetica"/>
-                <a:sym typeface="Wingdings" panose="05000000000000000000" pitchFamily="2" charset="2"/>
-              </a:rPr>
-              <a:t>3</a:t>
-            </a:r>
-            <a:r>
-              <a:rPr lang="en-US" sz="1200" b="0" dirty="0" smtClean="0">
-                <a:latin typeface="Helvetica"/>
-                <a:sym typeface="Wingdings" panose="05000000000000000000" pitchFamily="2" charset="2"/>
-              </a:rPr>
-              <a:t>. Processing </a:t>
-            </a:r>
-            <a:r>
-              <a:rPr lang="en-US" sz="1200" b="0" dirty="0">
-                <a:latin typeface="Helvetica"/>
-                <a:sym typeface="Wingdings" panose="05000000000000000000" pitchFamily="2" charset="2"/>
-              </a:rPr>
-              <a:t>of fuel consumption (FC) map</a:t>
-            </a:r>
-          </a:p>
-          <a:p>
-            <a:pPr indent="-936000" algn="l">
-              <a:spcBef>
-                <a:spcPts val="1200"/>
-              </a:spcBef>
-              <a:spcAft>
-                <a:spcPts val="0"/>
-              </a:spcAft>
-              <a:tabLst>
-                <a:tab pos="534988" algn="l"/>
-              </a:tabLst>
-            </a:pPr>
-            <a:r>
-              <a:rPr lang="en-US" sz="1200" b="0" dirty="0" smtClean="0">
-                <a:latin typeface="Helvetica"/>
-                <a:sym typeface="Wingdings" panose="05000000000000000000" pitchFamily="2" charset="2"/>
-              </a:rPr>
-              <a:t>	3.1 FC </a:t>
-            </a:r>
-            <a:r>
-              <a:rPr lang="en-US" sz="1200" b="0" dirty="0">
-                <a:latin typeface="Helvetica"/>
-                <a:sym typeface="Wingdings" panose="05000000000000000000" pitchFamily="2" charset="2"/>
-              </a:rPr>
-              <a:t>values at </a:t>
-            </a:r>
-            <a:r>
-              <a:rPr lang="en-US" sz="1200" b="0" dirty="0" err="1" smtClean="0">
-                <a:latin typeface="Helvetica"/>
-                <a:sym typeface="Wingdings" panose="05000000000000000000" pitchFamily="2" charset="2"/>
-              </a:rPr>
-              <a:t>n</a:t>
-            </a:r>
-            <a:r>
-              <a:rPr lang="en-US" sz="1200" b="0" baseline="-25000" dirty="0" err="1" smtClean="0">
-                <a:latin typeface="Helvetica"/>
-                <a:sym typeface="Wingdings" panose="05000000000000000000" pitchFamily="2" charset="2"/>
-              </a:rPr>
-              <a:t>idle</a:t>
-            </a:r>
-            <a:r>
-              <a:rPr lang="en-US" sz="1200" b="0" dirty="0" smtClean="0">
-                <a:latin typeface="Helvetica"/>
-                <a:sym typeface="Wingdings" panose="05000000000000000000" pitchFamily="2" charset="2"/>
-              </a:rPr>
-              <a:t> </a:t>
-            </a:r>
-            <a:r>
-              <a:rPr lang="en-US" sz="1200" b="0" dirty="0">
-                <a:latin typeface="Helvetica"/>
-                <a:sym typeface="Wingdings" panose="05000000000000000000" pitchFamily="2" charset="2"/>
-              </a:rPr>
-              <a:t>are copied to engine speed (</a:t>
-            </a:r>
-            <a:r>
-              <a:rPr lang="en-US" sz="1200" b="0" dirty="0" err="1" smtClean="0">
-                <a:latin typeface="Helvetica"/>
-                <a:sym typeface="Wingdings" panose="05000000000000000000" pitchFamily="2" charset="2"/>
-              </a:rPr>
-              <a:t>n</a:t>
-            </a:r>
-            <a:r>
-              <a:rPr lang="en-US" sz="1200" b="0" baseline="-25000" dirty="0" err="1" smtClean="0">
-                <a:latin typeface="Helvetica"/>
-                <a:sym typeface="Wingdings" panose="05000000000000000000" pitchFamily="2" charset="2"/>
-              </a:rPr>
-              <a:t>idle</a:t>
-            </a:r>
-            <a:r>
-              <a:rPr lang="en-US" sz="1200" b="0" dirty="0" smtClean="0">
-                <a:latin typeface="Helvetica"/>
-                <a:sym typeface="Wingdings" panose="05000000000000000000" pitchFamily="2" charset="2"/>
-              </a:rPr>
-              <a:t> </a:t>
-            </a:r>
-            <a:r>
-              <a:rPr lang="en-US" sz="1200" b="0" dirty="0">
-                <a:latin typeface="Helvetica"/>
-                <a:sym typeface="Wingdings" panose="05000000000000000000" pitchFamily="2" charset="2"/>
-              </a:rPr>
-              <a:t>– 100 </a:t>
-            </a:r>
-            <a:r>
-              <a:rPr lang="en-US" sz="1200" b="0" dirty="0" smtClean="0">
-                <a:latin typeface="Helvetica"/>
-                <a:sym typeface="Wingdings" panose="05000000000000000000" pitchFamily="2" charset="2"/>
-              </a:rPr>
-              <a:t>min</a:t>
-            </a:r>
-            <a:r>
-              <a:rPr lang="en-US" sz="1200" b="0" baseline="30000" dirty="0" smtClean="0">
-                <a:latin typeface="Helvetica"/>
-                <a:sym typeface="Wingdings" panose="05000000000000000000" pitchFamily="2" charset="2"/>
-              </a:rPr>
-              <a:t>-1</a:t>
-            </a:r>
-            <a:r>
-              <a:rPr lang="en-US" sz="1200" b="0" dirty="0" smtClean="0">
-                <a:latin typeface="Helvetica"/>
-                <a:sym typeface="Wingdings" panose="05000000000000000000" pitchFamily="2" charset="2"/>
-              </a:rPr>
-              <a:t>) </a:t>
-            </a:r>
-            <a:r>
-              <a:rPr lang="en-US" sz="1200" b="0" dirty="0">
-                <a:latin typeface="Helvetica"/>
-                <a:sym typeface="Wingdings" panose="05000000000000000000" pitchFamily="2" charset="2"/>
-              </a:rPr>
-              <a:t>in the map</a:t>
-            </a:r>
-          </a:p>
-          <a:p>
-            <a:pPr indent="-936000" algn="l">
-              <a:spcBef>
-                <a:spcPts val="1200"/>
-              </a:spcBef>
-              <a:spcAft>
-                <a:spcPts val="0"/>
-              </a:spcAft>
-              <a:tabLst>
-                <a:tab pos="534988" algn="l"/>
-              </a:tabLst>
-            </a:pPr>
-            <a:r>
-              <a:rPr lang="en-US" sz="1200" b="0" dirty="0" smtClean="0">
-                <a:latin typeface="Helvetica"/>
-                <a:sym typeface="Wingdings" panose="05000000000000000000" pitchFamily="2" charset="2"/>
-              </a:rPr>
-              <a:t>	3.2 FC </a:t>
-            </a:r>
-            <a:r>
-              <a:rPr lang="en-US" sz="1200" b="0" dirty="0">
-                <a:latin typeface="Helvetica"/>
-                <a:sym typeface="Wingdings" panose="05000000000000000000" pitchFamily="2" charset="2"/>
-              </a:rPr>
-              <a:t>values at n</a:t>
-            </a:r>
-            <a:r>
-              <a:rPr lang="en-US" sz="1200" b="0" baseline="-25000" dirty="0">
-                <a:latin typeface="Helvetica"/>
-                <a:sym typeface="Wingdings" panose="05000000000000000000" pitchFamily="2" charset="2"/>
-              </a:rPr>
-              <a:t>95h</a:t>
-            </a:r>
-            <a:r>
-              <a:rPr lang="en-US" sz="1200" b="0" dirty="0">
-                <a:latin typeface="Helvetica"/>
-                <a:sym typeface="Wingdings" panose="05000000000000000000" pitchFamily="2" charset="2"/>
-              </a:rPr>
-              <a:t> are copied to engine speed (</a:t>
-            </a:r>
-            <a:r>
-              <a:rPr lang="en-US" sz="1200" b="0" dirty="0" smtClean="0">
-                <a:latin typeface="Helvetica"/>
-                <a:sym typeface="Wingdings" panose="05000000000000000000" pitchFamily="2" charset="2"/>
-              </a:rPr>
-              <a:t>n</a:t>
-            </a:r>
-            <a:r>
-              <a:rPr lang="en-US" sz="1200" b="0" baseline="-25000" dirty="0" smtClean="0">
-                <a:latin typeface="Helvetica"/>
-                <a:sym typeface="Wingdings" panose="05000000000000000000" pitchFamily="2" charset="2"/>
-              </a:rPr>
-              <a:t>95h</a:t>
-            </a:r>
-            <a:r>
-              <a:rPr lang="en-US" sz="1200" b="0" dirty="0" smtClean="0">
-                <a:latin typeface="Helvetica"/>
-                <a:sym typeface="Wingdings" panose="05000000000000000000" pitchFamily="2" charset="2"/>
-              </a:rPr>
-              <a:t> </a:t>
-            </a:r>
-            <a:r>
-              <a:rPr lang="en-US" sz="1200" b="0" dirty="0">
-                <a:latin typeface="Helvetica"/>
-                <a:sym typeface="Wingdings" panose="05000000000000000000" pitchFamily="2" charset="2"/>
-              </a:rPr>
-              <a:t>+ 500 min</a:t>
-            </a:r>
-            <a:r>
-              <a:rPr lang="en-US" sz="1200" b="0" baseline="30000" dirty="0">
-                <a:latin typeface="Helvetica"/>
-                <a:sym typeface="Wingdings" panose="05000000000000000000" pitchFamily="2" charset="2"/>
-              </a:rPr>
-              <a:t>-1</a:t>
-            </a:r>
-            <a:r>
-              <a:rPr lang="en-US" sz="1200" b="0" dirty="0">
-                <a:latin typeface="Helvetica"/>
-                <a:sym typeface="Wingdings" panose="05000000000000000000" pitchFamily="2" charset="2"/>
-              </a:rPr>
-              <a:t>) in the map</a:t>
-            </a:r>
-          </a:p>
-          <a:p>
-            <a:pPr indent="-936000" algn="l">
-              <a:spcBef>
-                <a:spcPts val="1200"/>
-              </a:spcBef>
-              <a:spcAft>
-                <a:spcPts val="0"/>
-              </a:spcAft>
-              <a:tabLst>
-                <a:tab pos="534988" algn="l"/>
-                <a:tab pos="808038" algn="l"/>
-              </a:tabLst>
-            </a:pPr>
-            <a:r>
-              <a:rPr lang="en-US" sz="1200" b="0" dirty="0" smtClean="0">
-                <a:latin typeface="Helvetica"/>
-                <a:sym typeface="Wingdings" panose="05000000000000000000" pitchFamily="2" charset="2"/>
-              </a:rPr>
-              <a:t>	3.3 Extrapolation </a:t>
-            </a:r>
-            <a:r>
-              <a:rPr lang="en-US" sz="1200" b="0" dirty="0">
-                <a:latin typeface="Helvetica"/>
-                <a:sym typeface="Wingdings" panose="05000000000000000000" pitchFamily="2" charset="2"/>
-              </a:rPr>
-              <a:t>of FC values at all engine speed </a:t>
-            </a:r>
-            <a:r>
-              <a:rPr lang="en-US" sz="1200" b="0" dirty="0" err="1">
-                <a:latin typeface="Helvetica"/>
-                <a:sym typeface="Wingdings" panose="05000000000000000000" pitchFamily="2" charset="2"/>
-              </a:rPr>
-              <a:t>setpoints</a:t>
-            </a:r>
-            <a:r>
-              <a:rPr lang="en-US" sz="1200" b="0" dirty="0">
-                <a:latin typeface="Helvetica"/>
-                <a:sym typeface="Wingdings" panose="05000000000000000000" pitchFamily="2" charset="2"/>
-              </a:rPr>
-              <a:t> to a torque value of (</a:t>
-            </a:r>
-            <a:r>
-              <a:rPr lang="en-US" sz="1200" b="0" dirty="0" smtClean="0">
-                <a:latin typeface="Helvetica"/>
-                <a:sym typeface="Wingdings" panose="05000000000000000000" pitchFamily="2" charset="2"/>
-              </a:rPr>
-              <a:t>1.1 times </a:t>
-            </a:r>
-            <a:r>
-              <a:rPr lang="en-US" sz="1200" b="0" dirty="0" err="1">
-                <a:latin typeface="Helvetica"/>
-                <a:sym typeface="Wingdings" panose="05000000000000000000" pitchFamily="2" charset="2"/>
-              </a:rPr>
-              <a:t>T</a:t>
-            </a:r>
-            <a:r>
-              <a:rPr lang="en-US" sz="1200" b="0" baseline="-25000" dirty="0" err="1">
-                <a:latin typeface="Helvetica"/>
-                <a:sym typeface="Wingdings" panose="05000000000000000000" pitchFamily="2" charset="2"/>
-              </a:rPr>
-              <a:t>max_overall</a:t>
-            </a:r>
-            <a:r>
-              <a:rPr lang="en-US" sz="1200" b="0" dirty="0">
-                <a:latin typeface="Helvetica"/>
-                <a:sym typeface="Wingdings" panose="05000000000000000000" pitchFamily="2" charset="2"/>
-              </a:rPr>
-              <a:t>) by using </a:t>
-            </a:r>
-            <a:r>
-              <a:rPr lang="en-US" sz="1200" b="0" dirty="0" smtClean="0">
-                <a:latin typeface="Helvetica"/>
-                <a:sym typeface="Wingdings" panose="05000000000000000000" pitchFamily="2" charset="2"/>
-              </a:rPr>
-              <a:t>least</a:t>
-            </a:r>
-            <a:br>
-              <a:rPr lang="en-US" sz="1200" b="0" dirty="0" smtClean="0">
-                <a:latin typeface="Helvetica"/>
-                <a:sym typeface="Wingdings" panose="05000000000000000000" pitchFamily="2" charset="2"/>
-              </a:rPr>
-            </a:br>
-            <a:r>
-              <a:rPr lang="en-US" sz="1200" b="0" dirty="0" smtClean="0">
-                <a:latin typeface="Helvetica"/>
-                <a:sym typeface="Wingdings" panose="05000000000000000000" pitchFamily="2" charset="2"/>
-              </a:rPr>
-              <a:t>		squares </a:t>
-            </a:r>
-            <a:r>
-              <a:rPr lang="en-US" sz="1200" b="0" dirty="0">
-                <a:latin typeface="Helvetica"/>
-                <a:sym typeface="Wingdings" panose="05000000000000000000" pitchFamily="2" charset="2"/>
-              </a:rPr>
-              <a:t>linear regression based on the 3 measured FC points with the highest torque values at each engine </a:t>
-            </a:r>
-            <a:r>
-              <a:rPr lang="en-US" sz="1200" b="0" dirty="0" smtClean="0">
-                <a:latin typeface="Helvetica"/>
-                <a:sym typeface="Wingdings" panose="05000000000000000000" pitchFamily="2" charset="2"/>
-              </a:rPr>
-              <a:t>speed</a:t>
-            </a:r>
-            <a:br>
-              <a:rPr lang="en-US" sz="1200" b="0" dirty="0" smtClean="0">
-                <a:latin typeface="Helvetica"/>
-                <a:sym typeface="Wingdings" panose="05000000000000000000" pitchFamily="2" charset="2"/>
-              </a:rPr>
-            </a:br>
-            <a:r>
-              <a:rPr lang="en-US" sz="1200" b="0" dirty="0" smtClean="0">
-                <a:latin typeface="Helvetica"/>
-                <a:sym typeface="Wingdings" panose="05000000000000000000" pitchFamily="2" charset="2"/>
-              </a:rPr>
-              <a:t>		</a:t>
-            </a:r>
-            <a:r>
-              <a:rPr lang="en-US" sz="1200" b="0" dirty="0" err="1" smtClean="0">
-                <a:latin typeface="Helvetica"/>
-                <a:sym typeface="Wingdings" panose="05000000000000000000" pitchFamily="2" charset="2"/>
-              </a:rPr>
-              <a:t>setpoint</a:t>
-            </a:r>
-            <a:r>
-              <a:rPr lang="en-US" sz="1200" b="0" dirty="0" smtClean="0">
-                <a:latin typeface="Helvetica"/>
-                <a:sym typeface="Wingdings" panose="05000000000000000000" pitchFamily="2" charset="2"/>
-              </a:rPr>
-              <a:t> </a:t>
-            </a:r>
-            <a:r>
-              <a:rPr lang="en-US" sz="1200" b="0" dirty="0">
-                <a:latin typeface="Helvetica"/>
-                <a:sym typeface="Wingdings" panose="05000000000000000000" pitchFamily="2" charset="2"/>
-              </a:rPr>
-              <a:t>in the map</a:t>
-            </a:r>
-          </a:p>
-          <a:p>
-            <a:pPr indent="-936000" algn="l">
-              <a:spcBef>
-                <a:spcPts val="1200"/>
-              </a:spcBef>
-              <a:spcAft>
-                <a:spcPts val="0"/>
-              </a:spcAft>
-              <a:tabLst>
-                <a:tab pos="534988" algn="l"/>
-              </a:tabLst>
-            </a:pPr>
-            <a:r>
-              <a:rPr lang="en-US" sz="1200" b="0" dirty="0" smtClean="0">
-                <a:latin typeface="Helvetica"/>
-                <a:sym typeface="Wingdings" panose="05000000000000000000" pitchFamily="2" charset="2"/>
-              </a:rPr>
-              <a:t>	3.4 Adding </a:t>
-            </a:r>
-            <a:r>
-              <a:rPr lang="en-US" sz="1200" b="0" dirty="0">
-                <a:latin typeface="Helvetica"/>
-                <a:sym typeface="Wingdings" panose="05000000000000000000" pitchFamily="2" charset="2"/>
-              </a:rPr>
-              <a:t>of FC = 0 for </a:t>
-            </a:r>
-            <a:r>
-              <a:rPr lang="en-US" sz="1200" b="0" dirty="0" smtClean="0">
-                <a:latin typeface="Helvetica"/>
-                <a:sym typeface="Wingdings" panose="05000000000000000000" pitchFamily="2" charset="2"/>
-              </a:rPr>
-              <a:t>interpolated motoring </a:t>
-            </a:r>
-            <a:r>
-              <a:rPr lang="en-US" sz="1200" b="0" dirty="0">
-                <a:latin typeface="Helvetica"/>
-                <a:sym typeface="Wingdings" panose="05000000000000000000" pitchFamily="2" charset="2"/>
-              </a:rPr>
-              <a:t>torque values </a:t>
-            </a:r>
-            <a:r>
-              <a:rPr lang="en-US" sz="1200" b="0" dirty="0" smtClean="0">
-                <a:latin typeface="Helvetica"/>
-                <a:sym typeface="Wingdings" panose="05000000000000000000" pitchFamily="2" charset="2"/>
-              </a:rPr>
-              <a:t>at </a:t>
-            </a:r>
-            <a:r>
-              <a:rPr lang="en-US" sz="1200" b="0" dirty="0">
-                <a:latin typeface="Helvetica"/>
-                <a:sym typeface="Wingdings" panose="05000000000000000000" pitchFamily="2" charset="2"/>
-              </a:rPr>
-              <a:t>all engine speed </a:t>
-            </a:r>
-            <a:r>
-              <a:rPr lang="en-US" sz="1200" b="0" dirty="0" err="1">
-                <a:latin typeface="Helvetica"/>
-                <a:sym typeface="Wingdings" panose="05000000000000000000" pitchFamily="2" charset="2"/>
-              </a:rPr>
-              <a:t>setpoints</a:t>
-            </a:r>
-            <a:r>
-              <a:rPr lang="en-US" sz="1200" b="0" dirty="0">
-                <a:latin typeface="Helvetica"/>
-                <a:sym typeface="Wingdings" panose="05000000000000000000" pitchFamily="2" charset="2"/>
-              </a:rPr>
-              <a:t> in the map</a:t>
-            </a:r>
-          </a:p>
-          <a:p>
-            <a:pPr indent="-936000" algn="l">
-              <a:spcBef>
-                <a:spcPts val="1200"/>
-              </a:spcBef>
-              <a:spcAft>
-                <a:spcPts val="0"/>
-              </a:spcAft>
-              <a:tabLst>
-                <a:tab pos="534988" algn="l"/>
-                <a:tab pos="808038" algn="l"/>
-              </a:tabLst>
-            </a:pPr>
-            <a:r>
-              <a:rPr lang="en-US" sz="1200" b="0" dirty="0" smtClean="0">
-                <a:latin typeface="Helvetica"/>
-                <a:sym typeface="Wingdings" panose="05000000000000000000" pitchFamily="2" charset="2"/>
-              </a:rPr>
-              <a:t>	3.5 Adding </a:t>
-            </a:r>
-            <a:r>
-              <a:rPr lang="en-US" sz="1200" b="0" dirty="0">
-                <a:latin typeface="Helvetica"/>
-                <a:sym typeface="Wingdings" panose="05000000000000000000" pitchFamily="2" charset="2"/>
-              </a:rPr>
-              <a:t>of FC = 0 for minimum of interpolated motoring torque values from </a:t>
-            </a:r>
-            <a:r>
-              <a:rPr lang="en-US" sz="1200" b="0" dirty="0" err="1">
-                <a:latin typeface="Helvetica"/>
-                <a:sym typeface="Wingdings" panose="05000000000000000000" pitchFamily="2" charset="2"/>
-              </a:rPr>
-              <a:t>subpoint</a:t>
-            </a:r>
-            <a:r>
-              <a:rPr lang="en-US" sz="1200" b="0" dirty="0">
-                <a:latin typeface="Helvetica"/>
-                <a:sym typeface="Wingdings" panose="05000000000000000000" pitchFamily="2" charset="2"/>
-              </a:rPr>
-              <a:t> </a:t>
-            </a:r>
-            <a:r>
-              <a:rPr lang="en-US" sz="1200" b="0" dirty="0" smtClean="0">
-                <a:latin typeface="Helvetica"/>
-                <a:sym typeface="Wingdings" panose="05000000000000000000" pitchFamily="2" charset="2"/>
-              </a:rPr>
-              <a:t>(3.4) </a:t>
-            </a:r>
-            <a:r>
-              <a:rPr lang="en-US" sz="1200" b="0" dirty="0">
-                <a:latin typeface="Helvetica"/>
-                <a:sym typeface="Wingdings" panose="05000000000000000000" pitchFamily="2" charset="2"/>
-              </a:rPr>
-              <a:t>minus 100 Nm at all </a:t>
-            </a:r>
-            <a:r>
-              <a:rPr lang="en-US" sz="1200" b="0" dirty="0" smtClean="0">
-                <a:latin typeface="Helvetica"/>
-                <a:sym typeface="Wingdings" panose="05000000000000000000" pitchFamily="2" charset="2"/>
-              </a:rPr>
-              <a:t>engine</a:t>
-            </a:r>
-            <a:br>
-              <a:rPr lang="en-US" sz="1200" b="0" dirty="0" smtClean="0">
-                <a:latin typeface="Helvetica"/>
-                <a:sym typeface="Wingdings" panose="05000000000000000000" pitchFamily="2" charset="2"/>
-              </a:rPr>
-            </a:br>
-            <a:r>
-              <a:rPr lang="en-US" sz="1200" b="0" dirty="0" smtClean="0">
-                <a:latin typeface="Helvetica"/>
-                <a:sym typeface="Wingdings" panose="05000000000000000000" pitchFamily="2" charset="2"/>
-              </a:rPr>
-              <a:t>		speed </a:t>
-            </a:r>
-            <a:r>
-              <a:rPr lang="en-US" sz="1200" b="0" dirty="0" err="1">
-                <a:latin typeface="Helvetica"/>
-                <a:sym typeface="Wingdings" panose="05000000000000000000" pitchFamily="2" charset="2"/>
-              </a:rPr>
-              <a:t>setpoints</a:t>
-            </a:r>
-            <a:r>
-              <a:rPr lang="en-US" sz="1200" b="0" dirty="0">
-                <a:latin typeface="Helvetica"/>
-                <a:sym typeface="Wingdings" panose="05000000000000000000" pitchFamily="2" charset="2"/>
-              </a:rPr>
-              <a:t> in the </a:t>
-            </a:r>
-            <a:r>
-              <a:rPr lang="en-US" sz="1200" b="0" dirty="0" smtClean="0">
-                <a:latin typeface="Helvetica"/>
-                <a:sym typeface="Wingdings" panose="05000000000000000000" pitchFamily="2" charset="2"/>
-              </a:rPr>
-              <a:t>map</a:t>
-            </a:r>
-            <a:endParaRPr lang="en-US" sz="1200" b="0" dirty="0">
-              <a:latin typeface="Helvetica"/>
-              <a:sym typeface="Wingdings" panose="05000000000000000000" pitchFamily="2" charset="2"/>
             </a:endParaRPr>
           </a:p>
         </p:txBody>
@@ -8132,7 +9340,7 @@
     </p:spTree>
     <p:extLst>
       <p:ext uri="{BB962C8B-B14F-4D97-AF65-F5344CB8AC3E}">
-        <p14:creationId xmlns:p14="http://schemas.microsoft.com/office/powerpoint/2010/main" val="399374513"/>
+        <p14:creationId xmlns:p14="http://schemas.microsoft.com/office/powerpoint/2010/main" val="1838928384"/>
       </p:ext>
     </p:extLst>
   </p:cSld>
@@ -8178,17 +9386,40 @@
         </p:nvSpPr>
         <p:spPr>
           <a:xfrm>
-            <a:off x="755576" y="548680"/>
-            <a:ext cx="7632848" cy="576064"/>
+            <a:off x="468000" y="153844"/>
+            <a:ext cx="7632848" cy="756000"/>
           </a:xfrm>
         </p:spPr>
         <p:txBody>
-          <a:bodyPr/>
+          <a:bodyPr anchor="t" anchorCtr="0"/>
           <a:lstStyle/>
           <a:p>
             <a:r>
               <a:rPr lang="en-US" dirty="0" smtClean="0"/>
-              <a:t>VECTO Engine – Operations performed (p2/4)</a:t>
+              <a:t>VECTO Engine – </a:t>
+            </a:r>
+            <a:r>
+              <a:rPr lang="en-US" dirty="0" smtClean="0"/>
+              <a:t>E</a:t>
+            </a:r>
+            <a:r>
+              <a:rPr lang="en-US" dirty="0" smtClean="0"/>
+              <a:t>valuation algorithms</a:t>
+            </a:r>
+            <a:br>
+              <a:rPr lang="en-US" dirty="0" smtClean="0"/>
+            </a:br>
+            <a:r>
+              <a:rPr lang="en-US" dirty="0" smtClean="0"/>
+              <a:t>performed </a:t>
+            </a:r>
+            <a:r>
+              <a:rPr lang="en-US" dirty="0" smtClean="0"/>
+              <a:t>(</a:t>
+            </a:r>
+            <a:r>
+              <a:rPr lang="en-US" dirty="0" smtClean="0"/>
+              <a:t>p1/5)</a:t>
             </a:r>
             <a:endParaRPr lang="en-US" dirty="0"/>
           </a:p>
@@ -8203,7 +9434,7 @@
         <p:spPr>
           <a:xfrm>
             <a:off x="179512" y="1268760"/>
-            <a:ext cx="8928992" cy="3354765"/>
+            <a:ext cx="8784000" cy="4293483"/>
           </a:xfrm>
           <a:prstGeom prst="rect">
             <a:avLst/>
@@ -8215,388 +9446,274 @@
           </a:bodyPr>
           <a:lstStyle/>
           <a:p>
-            <a:pPr algn="l">
-              <a:spcBef>
-                <a:spcPts val="1200"/>
-              </a:spcBef>
-              <a:spcAft>
-                <a:spcPts val="0"/>
-              </a:spcAft>
-              <a:tabLst>
-                <a:tab pos="534988" algn="l"/>
-              </a:tabLst>
-            </a:pPr>
-            <a:r>
-              <a:rPr lang="en-US" sz="1200" b="0" dirty="0" smtClean="0">
-                <a:latin typeface="Helvetica"/>
-                <a:sym typeface="Wingdings" panose="05000000000000000000" pitchFamily="2" charset="2"/>
-              </a:rPr>
-              <a:t>4. Simulation </a:t>
-            </a:r>
-            <a:r>
-              <a:rPr lang="en-US" sz="1200" b="0" dirty="0">
-                <a:latin typeface="Helvetica"/>
-                <a:sym typeface="Wingdings" panose="05000000000000000000" pitchFamily="2" charset="2"/>
-              </a:rPr>
-              <a:t>of FC and cycle work over WHTC and respective subparts for actual engine for certification</a:t>
-            </a:r>
-          </a:p>
-          <a:p>
-            <a:pPr algn="l">
-              <a:spcBef>
-                <a:spcPts val="1200"/>
-              </a:spcBef>
-              <a:spcAft>
-                <a:spcPts val="0"/>
-              </a:spcAft>
-              <a:tabLst>
-                <a:tab pos="534988" algn="l"/>
-              </a:tabLst>
-            </a:pPr>
-            <a:r>
-              <a:rPr lang="en-US" sz="1200" b="0" dirty="0" smtClean="0">
-                <a:latin typeface="Helvetica"/>
-                <a:sym typeface="Wingdings" panose="05000000000000000000" pitchFamily="2" charset="2"/>
-              </a:rPr>
-              <a:t>	4.1.  WHTC </a:t>
-            </a:r>
-            <a:r>
-              <a:rPr lang="en-US" sz="1200" b="0" dirty="0">
-                <a:latin typeface="Helvetica"/>
-                <a:sym typeface="Wingdings" panose="05000000000000000000" pitchFamily="2" charset="2"/>
-              </a:rPr>
-              <a:t>reference points are </a:t>
-            </a:r>
-            <a:r>
-              <a:rPr lang="en-US" sz="1200" b="0" dirty="0" err="1">
-                <a:latin typeface="Helvetica"/>
-                <a:sym typeface="Wingdings" panose="05000000000000000000" pitchFamily="2" charset="2"/>
-              </a:rPr>
-              <a:t>denormalized</a:t>
-            </a:r>
-            <a:r>
-              <a:rPr lang="en-US" sz="1200" b="0" dirty="0">
-                <a:latin typeface="Helvetica"/>
-                <a:sym typeface="Wingdings" panose="05000000000000000000" pitchFamily="2" charset="2"/>
-              </a:rPr>
-              <a:t> using the full load curve input in originally recorded resolution</a:t>
-            </a:r>
-          </a:p>
-          <a:p>
-            <a:pPr algn="l">
-              <a:spcBef>
-                <a:spcPts val="1200"/>
-              </a:spcBef>
-              <a:spcAft>
-                <a:spcPts val="0"/>
-              </a:spcAft>
-              <a:tabLst>
-                <a:tab pos="534988" algn="l"/>
-              </a:tabLst>
-            </a:pPr>
-            <a:r>
-              <a:rPr lang="en-US" sz="1200" b="0" dirty="0" smtClean="0">
-                <a:latin typeface="Helvetica"/>
-                <a:sym typeface="Wingdings" panose="05000000000000000000" pitchFamily="2" charset="2"/>
-              </a:rPr>
-              <a:t>	4.2. FC </a:t>
-            </a:r>
-            <a:r>
-              <a:rPr lang="en-US" sz="1200" b="0" dirty="0">
-                <a:latin typeface="Helvetica"/>
-                <a:sym typeface="Wingdings" panose="05000000000000000000" pitchFamily="2" charset="2"/>
-              </a:rPr>
-              <a:t>is calculated for WHTC </a:t>
-            </a:r>
-            <a:r>
-              <a:rPr lang="en-US" sz="1200" b="0" dirty="0" err="1">
-                <a:latin typeface="Helvetica"/>
-                <a:sym typeface="Wingdings" panose="05000000000000000000" pitchFamily="2" charset="2"/>
-              </a:rPr>
-              <a:t>denormalized</a:t>
-            </a:r>
-            <a:r>
-              <a:rPr lang="en-US" sz="1200" b="0" dirty="0">
-                <a:latin typeface="Helvetica"/>
-                <a:sym typeface="Wingdings" panose="05000000000000000000" pitchFamily="2" charset="2"/>
-              </a:rPr>
-              <a:t> reference values for engine speed and torque from </a:t>
-            </a:r>
-            <a:r>
-              <a:rPr lang="en-US" sz="1200" b="0" dirty="0" err="1">
-                <a:latin typeface="Helvetica"/>
-                <a:sym typeface="Wingdings" panose="05000000000000000000" pitchFamily="2" charset="2"/>
-              </a:rPr>
+            <a:pPr indent="-936000" algn="l"/>
+            <a:r>
+              <a:rPr lang="en-GB" sz="1400" b="0" dirty="0"/>
+              <a:t>1.	Reading of input files and automatic check of input data</a:t>
+            </a:r>
+            <a:endParaRPr lang="de-AT" sz="1400" b="0" dirty="0"/>
+          </a:p>
+          <a:p>
+            <a:pPr indent="-936000" algn="l"/>
+            <a:r>
+              <a:rPr lang="en-GB" sz="1400" b="0" dirty="0"/>
+              <a:t>1.1	Check of requirements for input data according to the definitions in paragraph 6.1 of this Annex</a:t>
+            </a:r>
+            <a:endParaRPr lang="de-AT" sz="1400" b="0" dirty="0"/>
+          </a:p>
+          <a:p>
+            <a:pPr indent="-936000" algn="l"/>
+            <a:r>
+              <a:rPr lang="en-GB" sz="1400" b="0" dirty="0"/>
+              <a:t>1.2	Check of requirements for recorded FCMC data according to the definitions in paragraph </a:t>
+            </a:r>
+            <a:r>
+              <a:rPr lang="en-GB" sz="1400" b="0" dirty="0" smtClean="0"/>
+              <a:t>4.3.5.2</a:t>
+            </a:r>
+            <a:br>
+              <a:rPr lang="en-GB" sz="1400" b="0" dirty="0" smtClean="0"/>
+            </a:br>
+            <a:r>
+              <a:rPr lang="en-GB" sz="1400" b="0" dirty="0" smtClean="0"/>
+              <a:t>	and </a:t>
+            </a:r>
+            <a:r>
+              <a:rPr lang="en-GB" sz="1400" b="0" dirty="0" err="1"/>
               <a:t>subpoint</a:t>
             </a:r>
             <a:r>
-              <a:rPr lang="en-US" sz="1200" b="0" dirty="0">
-                <a:latin typeface="Helvetica"/>
-                <a:sym typeface="Wingdings" panose="05000000000000000000" pitchFamily="2" charset="2"/>
-              </a:rPr>
-              <a:t> 4.1</a:t>
-            </a:r>
-          </a:p>
-          <a:p>
-            <a:pPr algn="l">
-              <a:spcBef>
-                <a:spcPts val="1200"/>
-              </a:spcBef>
-              <a:spcAft>
-                <a:spcPts val="0"/>
-              </a:spcAft>
-              <a:tabLst>
-                <a:tab pos="534988" algn="l"/>
-              </a:tabLst>
-            </a:pPr>
-            <a:r>
-              <a:rPr lang="en-US" sz="1200" b="0" dirty="0" smtClean="0">
-                <a:latin typeface="Helvetica"/>
-                <a:sym typeface="Wingdings" panose="05000000000000000000" pitchFamily="2" charset="2"/>
-              </a:rPr>
-              <a:t>	4.3. FC </a:t>
-            </a:r>
-            <a:r>
-              <a:rPr lang="en-US" sz="1200" b="0" dirty="0">
-                <a:latin typeface="Helvetica"/>
-                <a:sym typeface="Wingdings" panose="05000000000000000000" pitchFamily="2" charset="2"/>
-              </a:rPr>
-              <a:t>is calculated with engine inertia set to 0</a:t>
-            </a:r>
-          </a:p>
-          <a:p>
-            <a:pPr algn="l">
-              <a:spcBef>
-                <a:spcPts val="1200"/>
-              </a:spcBef>
-              <a:spcAft>
-                <a:spcPts val="0"/>
-              </a:spcAft>
-              <a:tabLst>
-                <a:tab pos="534988" algn="l"/>
-              </a:tabLst>
-            </a:pPr>
-            <a:r>
-              <a:rPr lang="en-US" sz="1200" b="0" dirty="0" smtClean="0">
-                <a:latin typeface="Helvetica"/>
-                <a:sym typeface="Wingdings" panose="05000000000000000000" pitchFamily="2" charset="2"/>
-              </a:rPr>
-              <a:t>	4.4. FC </a:t>
-            </a:r>
-            <a:r>
-              <a:rPr lang="en-US" sz="1200" b="0" dirty="0">
-                <a:latin typeface="Helvetica"/>
-                <a:sym typeface="Wingdings" panose="05000000000000000000" pitchFamily="2" charset="2"/>
-              </a:rPr>
-              <a:t>is calculated with standard PT1-function (as in main vehicle simulation) for engine torque response active</a:t>
-            </a:r>
-          </a:p>
-          <a:p>
-            <a:pPr algn="l">
-              <a:spcBef>
-                <a:spcPts val="1200"/>
-              </a:spcBef>
-              <a:spcAft>
-                <a:spcPts val="0"/>
-              </a:spcAft>
-              <a:tabLst>
-                <a:tab pos="534988" algn="l"/>
-              </a:tabLst>
-            </a:pPr>
-            <a:r>
-              <a:rPr lang="en-US" sz="1200" b="0" dirty="0" smtClean="0">
-                <a:latin typeface="Helvetica"/>
-                <a:sym typeface="Wingdings" panose="05000000000000000000" pitchFamily="2" charset="2"/>
-              </a:rPr>
-              <a:t>	4.5. FC </a:t>
-            </a:r>
-            <a:r>
-              <a:rPr lang="en-US" sz="1200" b="0" dirty="0">
-                <a:latin typeface="Helvetica"/>
-                <a:sym typeface="Wingdings" panose="05000000000000000000" pitchFamily="2" charset="2"/>
-              </a:rPr>
-              <a:t>for all motoring points is set to 0</a:t>
-            </a:r>
-          </a:p>
-          <a:p>
-            <a:pPr algn="l">
-              <a:spcBef>
-                <a:spcPts val="1200"/>
-              </a:spcBef>
-              <a:spcAft>
-                <a:spcPts val="0"/>
-              </a:spcAft>
-              <a:tabLst>
-                <a:tab pos="534988" algn="l"/>
-                <a:tab pos="808038" algn="l"/>
-              </a:tabLst>
-            </a:pPr>
-            <a:r>
-              <a:rPr lang="en-US" sz="1200" b="0" dirty="0" smtClean="0">
-                <a:latin typeface="Helvetica"/>
-                <a:sym typeface="Wingdings" panose="05000000000000000000" pitchFamily="2" charset="2"/>
-              </a:rPr>
-              <a:t>	4.6. FC </a:t>
-            </a:r>
-            <a:r>
-              <a:rPr lang="en-US" sz="1200" b="0" dirty="0">
-                <a:latin typeface="Helvetica"/>
-                <a:sym typeface="Wingdings" panose="05000000000000000000" pitchFamily="2" charset="2"/>
-              </a:rPr>
-              <a:t>for all non-motoring engine operation points is calculated from FC map by Delaunay interpolation method (as </a:t>
-            </a:r>
-            <a:r>
-              <a:rPr lang="en-US" sz="1200" b="0" dirty="0" smtClean="0">
-                <a:latin typeface="Helvetica"/>
-                <a:sym typeface="Wingdings" panose="05000000000000000000" pitchFamily="2" charset="2"/>
-              </a:rPr>
-              <a:t>in</a:t>
+              <a:rPr lang="en-GB" sz="1400" b="0" dirty="0"/>
+              <a:t> (1) of paragraph 4.3.5.5 of this Annex</a:t>
+            </a:r>
+            <a:endParaRPr lang="de-AT" sz="1400" b="0" dirty="0"/>
+          </a:p>
+          <a:p>
+            <a:pPr indent="-936000" algn="l"/>
+            <a:r>
+              <a:rPr lang="en-GB" sz="1400" b="0" dirty="0"/>
+              <a:t>2.	Calculation of characteristic engine speeds from full load curves of parent engine and </a:t>
+            </a:r>
+            <a:r>
+              <a:rPr lang="en-GB" sz="1400" b="0" dirty="0" smtClean="0"/>
+              <a:t>actual</a:t>
             </a:r>
             <a:br>
-              <a:rPr lang="en-US" sz="1200" b="0" dirty="0" smtClean="0">
-                <a:latin typeface="Helvetica"/>
-                <a:sym typeface="Wingdings" panose="05000000000000000000" pitchFamily="2" charset="2"/>
-              </a:rPr>
+              <a:rPr lang="en-GB" sz="1400" b="0" dirty="0" smtClean="0"/>
             </a:br>
             <a:r>
-              <a:rPr lang="en-US" sz="1200" b="0" dirty="0" smtClean="0">
-                <a:latin typeface="Helvetica"/>
-                <a:sym typeface="Wingdings" panose="05000000000000000000" pitchFamily="2" charset="2"/>
-              </a:rPr>
-              <a:t>		main </a:t>
-            </a:r>
-            <a:r>
-              <a:rPr lang="en-US" sz="1200" b="0" dirty="0">
-                <a:latin typeface="Helvetica"/>
-                <a:sym typeface="Wingdings" panose="05000000000000000000" pitchFamily="2" charset="2"/>
-              </a:rPr>
-              <a:t>vehicle simulation)</a:t>
-            </a:r>
-          </a:p>
-          <a:p>
-            <a:pPr algn="l">
-              <a:spcBef>
-                <a:spcPts val="1200"/>
-              </a:spcBef>
-              <a:spcAft>
-                <a:spcPts val="0"/>
-              </a:spcAft>
-              <a:tabLst>
-                <a:tab pos="534988" algn="l"/>
-              </a:tabLst>
-            </a:pPr>
-            <a:r>
-              <a:rPr lang="en-US" sz="1200" b="0" dirty="0" smtClean="0">
-                <a:latin typeface="Helvetica"/>
-                <a:sym typeface="Wingdings" panose="05000000000000000000" pitchFamily="2" charset="2"/>
-              </a:rPr>
-              <a:t>	4.7. Cycle </a:t>
-            </a:r>
-            <a:r>
-              <a:rPr lang="en-US" sz="1200" b="0" dirty="0">
-                <a:latin typeface="Helvetica"/>
-                <a:sym typeface="Wingdings" panose="05000000000000000000" pitchFamily="2" charset="2"/>
-              </a:rPr>
-              <a:t>work and FC are calculated according to equations defined in paragraphs 5.1 and 5.2 of </a:t>
-            </a:r>
-            <a:r>
-              <a:rPr lang="en-US" sz="1200" b="0" dirty="0" smtClean="0">
-                <a:latin typeface="Helvetica"/>
-                <a:sym typeface="Wingdings" panose="05000000000000000000" pitchFamily="2" charset="2"/>
-              </a:rPr>
-              <a:t>the technical annex </a:t>
-            </a:r>
-            <a:endParaRPr lang="en-US" sz="1200" b="0" dirty="0">
-              <a:latin typeface="Helvetica"/>
-              <a:sym typeface="Wingdings" panose="05000000000000000000" pitchFamily="2" charset="2"/>
-            </a:endParaRPr>
-          </a:p>
-          <a:p>
-            <a:pPr algn="l">
-              <a:spcBef>
-                <a:spcPts val="1200"/>
-              </a:spcBef>
-              <a:spcAft>
-                <a:spcPts val="0"/>
-              </a:spcAft>
-              <a:tabLst>
-                <a:tab pos="534988" algn="l"/>
-                <a:tab pos="808038" algn="l"/>
-              </a:tabLst>
-            </a:pPr>
-            <a:r>
-              <a:rPr lang="en-US" sz="1200" b="0" dirty="0" smtClean="0">
-                <a:latin typeface="Helvetica"/>
-                <a:sym typeface="Wingdings" panose="05000000000000000000" pitchFamily="2" charset="2"/>
-              </a:rPr>
-              <a:t>	4.8. Simulated </a:t>
-            </a:r>
-            <a:r>
-              <a:rPr lang="en-US" sz="1200" b="0" dirty="0">
-                <a:latin typeface="Helvetica"/>
-                <a:sym typeface="Wingdings" panose="05000000000000000000" pitchFamily="2" charset="2"/>
-              </a:rPr>
-              <a:t>specific FC values are calculated analogous to equations defined in paragraphs 5.3.1 and 5.3.2 of </a:t>
-            </a:r>
-            <a:r>
-              <a:rPr lang="en-US" sz="1200" b="0" dirty="0" smtClean="0">
-                <a:latin typeface="Helvetica"/>
-                <a:sym typeface="Wingdings" panose="05000000000000000000" pitchFamily="2" charset="2"/>
-              </a:rPr>
-              <a:t>the</a:t>
+              <a:rPr lang="en-GB" sz="1400" b="0" dirty="0" smtClean="0"/>
+              <a:t>	engine for </a:t>
+            </a:r>
+            <a:r>
+              <a:rPr lang="en-GB" sz="1400" b="0" dirty="0"/>
+              <a:t>certification according to the definitions in paragraph 4.3.5.2.1 of this Annex</a:t>
+            </a:r>
+            <a:endParaRPr lang="de-AT" sz="1400" b="0" dirty="0"/>
+          </a:p>
+          <a:p>
+            <a:pPr indent="-936000" algn="l"/>
+            <a:r>
+              <a:rPr lang="en-GB" sz="1400" b="0" dirty="0"/>
+              <a:t>3.	Processing of fuel consumption (FC) map</a:t>
+            </a:r>
+            <a:endParaRPr lang="de-AT" sz="1400" b="0" dirty="0"/>
+          </a:p>
+          <a:p>
+            <a:pPr indent="-936000" algn="l"/>
+            <a:r>
+              <a:rPr lang="en-GB" sz="1400" b="0" dirty="0"/>
+              <a:t>3.1	FC values at </a:t>
+            </a:r>
+            <a:r>
+              <a:rPr lang="en-GB" sz="1400" b="0" dirty="0" err="1"/>
+              <a:t>n</a:t>
+            </a:r>
+            <a:r>
+              <a:rPr lang="en-GB" sz="1400" b="0" baseline="-25000" dirty="0" err="1"/>
+              <a:t>idle</a:t>
+            </a:r>
+            <a:r>
+              <a:rPr lang="en-GB" sz="1400" b="0" dirty="0"/>
+              <a:t> are copied to engine speed (</a:t>
+            </a:r>
+            <a:r>
+              <a:rPr lang="en-GB" sz="1400" b="0" dirty="0" err="1"/>
+              <a:t>n</a:t>
+            </a:r>
+            <a:r>
+              <a:rPr lang="en-GB" sz="1400" b="0" baseline="-25000" dirty="0" err="1"/>
+              <a:t>idle</a:t>
+            </a:r>
+            <a:r>
+              <a:rPr lang="en-GB" sz="1400" b="0" dirty="0"/>
+              <a:t> – 100 min</a:t>
+            </a:r>
+            <a:r>
+              <a:rPr lang="en-GB" sz="1400" b="0" baseline="30000" dirty="0"/>
+              <a:t>-1</a:t>
+            </a:r>
+            <a:r>
+              <a:rPr lang="en-GB" sz="1400" b="0" dirty="0"/>
+              <a:t>) in the map</a:t>
+            </a:r>
+            <a:endParaRPr lang="de-AT" sz="1400" b="0" dirty="0"/>
+          </a:p>
+          <a:p>
+            <a:pPr indent="-936000" algn="l"/>
+            <a:r>
+              <a:rPr lang="en-GB" sz="1400" b="0" dirty="0"/>
+              <a:t>3.2	FC values at n</a:t>
+            </a:r>
+            <a:r>
+              <a:rPr lang="en-GB" sz="1400" b="0" baseline="-25000" dirty="0"/>
+              <a:t>95h</a:t>
+            </a:r>
+            <a:r>
+              <a:rPr lang="en-GB" sz="1400" b="0" dirty="0"/>
+              <a:t> are copied to engine speed (n</a:t>
+            </a:r>
+            <a:r>
+              <a:rPr lang="en-GB" sz="1400" b="0" baseline="-25000" dirty="0"/>
+              <a:t>95h</a:t>
+            </a:r>
+            <a:r>
+              <a:rPr lang="en-GB" sz="1400" b="0" dirty="0"/>
+              <a:t> + 500 min</a:t>
+            </a:r>
+            <a:r>
+              <a:rPr lang="en-GB" sz="1400" b="0" baseline="30000" dirty="0"/>
+              <a:t>-1</a:t>
+            </a:r>
+            <a:r>
+              <a:rPr lang="en-GB" sz="1400" b="0" dirty="0"/>
+              <a:t>) in the map</a:t>
+            </a:r>
+            <a:endParaRPr lang="de-AT" sz="1400" b="0" dirty="0"/>
+          </a:p>
+          <a:p>
+            <a:pPr indent="-936000" algn="l"/>
+            <a:r>
+              <a:rPr lang="en-GB" sz="1400" b="0" dirty="0"/>
+              <a:t>3.3	Extrapolation of FC values at all engine speed </a:t>
+            </a:r>
+            <a:r>
+              <a:rPr lang="en-GB" sz="1400" b="0" dirty="0" err="1"/>
+              <a:t>setpoints</a:t>
+            </a:r>
+            <a:r>
+              <a:rPr lang="en-GB" sz="1400" b="0" dirty="0"/>
+              <a:t> to a torque value of (1.1 times </a:t>
+            </a:r>
+            <a:r>
+              <a:rPr lang="en-GB" sz="1400" b="0" dirty="0" err="1" smtClean="0"/>
+              <a:t>T</a:t>
+            </a:r>
+            <a:r>
+              <a:rPr lang="en-GB" sz="1400" b="0" baseline="-25000" dirty="0" err="1" smtClean="0"/>
+              <a:t>max_overall</a:t>
+            </a:r>
+            <a:r>
+              <a:rPr lang="en-GB" sz="1400" b="0" dirty="0" smtClean="0"/>
+              <a:t>)</a:t>
             </a:r>
             <a:br>
-              <a:rPr lang="en-US" sz="1200" b="0" dirty="0" smtClean="0">
-                <a:latin typeface="Helvetica"/>
-                <a:sym typeface="Wingdings" panose="05000000000000000000" pitchFamily="2" charset="2"/>
-              </a:rPr>
+              <a:rPr lang="en-GB" sz="1400" b="0" dirty="0" smtClean="0"/>
             </a:br>
             <a:r>
-              <a:rPr lang="en-US" sz="1200" b="0" dirty="0" smtClean="0">
-                <a:latin typeface="Helvetica"/>
-                <a:sym typeface="Wingdings" panose="05000000000000000000" pitchFamily="2" charset="2"/>
-              </a:rPr>
-              <a:t>	</a:t>
-            </a:r>
-            <a:r>
-              <a:rPr lang="en-US" sz="1200" b="0" dirty="0">
-                <a:latin typeface="Helvetica"/>
-                <a:sym typeface="Wingdings" panose="05000000000000000000" pitchFamily="2" charset="2"/>
-              </a:rPr>
-              <a:t>	 </a:t>
-            </a:r>
-            <a:r>
-              <a:rPr lang="en-US" sz="1200" b="0" dirty="0" smtClean="0">
-                <a:latin typeface="Helvetica"/>
-                <a:sym typeface="Wingdings" panose="05000000000000000000" pitchFamily="2" charset="2"/>
-              </a:rPr>
-              <a:t>technical </a:t>
-            </a:r>
-            <a:r>
-              <a:rPr lang="en-US" sz="1200" b="0" dirty="0">
-                <a:latin typeface="Helvetica"/>
-                <a:sym typeface="Wingdings" panose="05000000000000000000" pitchFamily="2" charset="2"/>
-              </a:rPr>
-              <a:t>annex for measured </a:t>
-            </a:r>
-            <a:r>
-              <a:rPr lang="en-US" sz="1200" b="0" dirty="0" smtClean="0">
-                <a:latin typeface="Helvetica"/>
-                <a:sym typeface="Wingdings" panose="05000000000000000000" pitchFamily="2" charset="2"/>
-              </a:rPr>
-              <a:t>values</a:t>
-            </a:r>
-            <a:endParaRPr lang="en-US" sz="1200" b="0" dirty="0">
-              <a:latin typeface="Helvetica"/>
-              <a:sym typeface="Wingdings" panose="05000000000000000000" pitchFamily="2" charset="2"/>
-            </a:endParaRPr>
+              <a:rPr lang="en-GB" sz="1400" b="0" dirty="0" smtClean="0"/>
+              <a:t>	by </a:t>
+            </a:r>
+            <a:r>
+              <a:rPr lang="en-GB" sz="1400" b="0" dirty="0"/>
+              <a:t>using least squares linear regression based on the 3 measured FC points with the </a:t>
+            </a:r>
+            <a:r>
+              <a:rPr lang="en-GB" sz="1400" b="0" dirty="0" smtClean="0"/>
+              <a:t>highest</a:t>
+            </a:r>
+            <a:br>
+              <a:rPr lang="en-GB" sz="1400" b="0" dirty="0" smtClean="0"/>
+            </a:br>
+            <a:r>
+              <a:rPr lang="en-GB" sz="1400" b="0" dirty="0" smtClean="0"/>
+              <a:t>	torque values </a:t>
+            </a:r>
+            <a:r>
+              <a:rPr lang="en-GB" sz="1400" b="0" dirty="0"/>
+              <a:t>at each engine speed </a:t>
+            </a:r>
+            <a:r>
+              <a:rPr lang="en-GB" sz="1400" b="0" dirty="0" err="1"/>
+              <a:t>setpoint</a:t>
+            </a:r>
+            <a:r>
+              <a:rPr lang="en-GB" sz="1400" b="0" dirty="0"/>
+              <a:t> in the map</a:t>
+            </a:r>
+            <a:endParaRPr lang="de-AT" sz="1400" b="0" dirty="0"/>
+          </a:p>
+          <a:p>
+            <a:pPr indent="-936000" algn="l"/>
+            <a:r>
+              <a:rPr lang="en-GB" sz="1400" b="0" dirty="0"/>
+              <a:t>3.4	Adding of FC = 0 for interpolated motoring torque values at all engine speed </a:t>
+            </a:r>
+            <a:r>
+              <a:rPr lang="en-GB" sz="1400" b="0" dirty="0" err="1"/>
+              <a:t>setpoints</a:t>
+            </a:r>
+            <a:r>
+              <a:rPr lang="en-GB" sz="1400" b="0" dirty="0"/>
+              <a:t> in the map</a:t>
+            </a:r>
+            <a:endParaRPr lang="de-AT" sz="1400" b="0" dirty="0"/>
+          </a:p>
+          <a:p>
+            <a:pPr indent="-936000" algn="l"/>
+            <a:r>
+              <a:rPr lang="en-GB" sz="1400" b="0" dirty="0"/>
+              <a:t>3.5	Adding of FC = 0 for minimum of interpolated motoring torque values from </a:t>
+            </a:r>
+            <a:r>
+              <a:rPr lang="en-GB" sz="1400" b="0" dirty="0" err="1"/>
+              <a:t>subpoint</a:t>
+            </a:r>
+            <a:r>
+              <a:rPr lang="en-GB" sz="1400" b="0" dirty="0"/>
+              <a:t> (3.4) </a:t>
+            </a:r>
+            <a:r>
+              <a:rPr lang="en-GB" sz="1400" b="0" dirty="0" smtClean="0"/>
+              <a:t>minus</a:t>
+            </a:r>
+            <a:br>
+              <a:rPr lang="en-GB" sz="1400" b="0" dirty="0" smtClean="0"/>
+            </a:br>
+            <a:r>
+              <a:rPr lang="en-GB" sz="1400" b="0" dirty="0" smtClean="0"/>
+              <a:t>	100 Nm </a:t>
+            </a:r>
+            <a:r>
+              <a:rPr lang="en-GB" sz="1400" b="0" dirty="0"/>
+              <a:t>at all engine speed </a:t>
+            </a:r>
+            <a:r>
+              <a:rPr lang="en-GB" sz="1400" b="0" dirty="0" err="1"/>
+              <a:t>setpoints</a:t>
+            </a:r>
+            <a:r>
+              <a:rPr lang="en-GB" sz="1400" b="0" dirty="0"/>
+              <a:t> in the map</a:t>
+            </a:r>
+            <a:endParaRPr lang="de-AT" sz="1400" b="0" dirty="0"/>
           </a:p>
         </p:txBody>
       </p:sp>
     </p:spTree>
     <p:extLst>
       <p:ext uri="{BB962C8B-B14F-4D97-AF65-F5344CB8AC3E}">
-        <p14:creationId xmlns:p14="http://schemas.microsoft.com/office/powerpoint/2010/main" val="2972026827"/>
+        <p14:creationId xmlns:p14="http://schemas.microsoft.com/office/powerpoint/2010/main" val="399374513"/>
       </p:ext>
     </p:extLst>
   </p:cSld>
@@ -8642,17 +9759,40 @@
         </p:nvSpPr>
         <p:spPr>
           <a:xfrm>
-            <a:off x="755576" y="548680"/>
-            <a:ext cx="7632848" cy="576064"/>
+            <a:off x="468000" y="153844"/>
+            <a:ext cx="7632848" cy="756000"/>
           </a:xfrm>
         </p:spPr>
         <p:txBody>
-          <a:bodyPr/>
+          <a:bodyPr anchor="t" anchorCtr="0"/>
           <a:lstStyle/>
           <a:p>
             <a:r>
               <a:rPr lang="en-US" dirty="0" smtClean="0"/>
-              <a:t>VECTO Engine – Operations performed (p3/4)</a:t>
+              <a:t>VECTO Engine – </a:t>
+            </a:r>
+            <a:r>
+              <a:rPr lang="en-US" dirty="0" smtClean="0"/>
+              <a:t>E</a:t>
+            </a:r>
+            <a:r>
+              <a:rPr lang="en-US" dirty="0" smtClean="0"/>
+              <a:t>valuation algorithms</a:t>
+            </a:r>
+            <a:br>
+              <a:rPr lang="en-US" dirty="0" smtClean="0"/>
+            </a:br>
+            <a:r>
+              <a:rPr lang="en-US" dirty="0" smtClean="0"/>
+              <a:t>performed </a:t>
+            </a:r>
+            <a:r>
+              <a:rPr lang="en-US" dirty="0" smtClean="0"/>
+              <a:t>(</a:t>
+            </a:r>
+            <a:r>
+              <a:rPr lang="en-US" dirty="0" smtClean="0"/>
+              <a:t>p2/5)</a:t>
             </a:r>
             <a:endParaRPr lang="en-US" dirty="0"/>
           </a:p>
@@ -8667,7 +9807,7 @@
         <p:spPr>
           <a:xfrm>
             <a:off x="179512" y="1268760"/>
-            <a:ext cx="8928992" cy="3508653"/>
+            <a:ext cx="8784000" cy="4401205"/>
           </a:xfrm>
           <a:prstGeom prst="rect">
             <a:avLst/>
@@ -8679,595 +9819,200 @@
           </a:bodyPr>
           <a:lstStyle/>
           <a:p>
-            <a:pPr algn="l">
-              <a:spcBef>
-                <a:spcPts val="1200"/>
-              </a:spcBef>
-              <a:spcAft>
-                <a:spcPts val="0"/>
-              </a:spcAft>
-              <a:tabLst>
-                <a:tab pos="534988" algn="l"/>
-              </a:tabLst>
-            </a:pPr>
-            <a:r>
-              <a:rPr lang="en-US" sz="1200" b="0" dirty="0" smtClean="0">
-                <a:latin typeface="Helvetica"/>
-                <a:sym typeface="Wingdings" panose="05000000000000000000" pitchFamily="2" charset="2"/>
-              </a:rPr>
-              <a:t>5. Calculation </a:t>
-            </a:r>
-            <a:r>
-              <a:rPr lang="en-US" sz="1200" b="0" dirty="0">
-                <a:latin typeface="Helvetica"/>
-                <a:sym typeface="Wingdings" panose="05000000000000000000" pitchFamily="2" charset="2"/>
-              </a:rPr>
-              <a:t>of WHTC correction factors</a:t>
-            </a:r>
-          </a:p>
-          <a:p>
-            <a:pPr algn="l">
-              <a:spcBef>
-                <a:spcPts val="1200"/>
-              </a:spcBef>
-              <a:spcAft>
-                <a:spcPts val="0"/>
-              </a:spcAft>
-              <a:tabLst>
-                <a:tab pos="534988" algn="l"/>
-                <a:tab pos="808038" algn="l"/>
-              </a:tabLst>
-            </a:pPr>
-            <a:r>
-              <a:rPr lang="en-US" sz="1200" b="0" dirty="0" smtClean="0">
-                <a:latin typeface="Helvetica"/>
-                <a:sym typeface="Wingdings" panose="05000000000000000000" pitchFamily="2" charset="2"/>
-              </a:rPr>
-              <a:t>	5.1. Measured </a:t>
-            </a:r>
-            <a:r>
-              <a:rPr lang="en-US" sz="1200" b="0" dirty="0">
-                <a:latin typeface="Helvetica"/>
-                <a:sym typeface="Wingdings" panose="05000000000000000000" pitchFamily="2" charset="2"/>
-              </a:rPr>
-              <a:t>values from input to pre-processing tool and simulated values from point (4) are used in accordance </a:t>
-            </a:r>
-            <a:r>
-              <a:rPr lang="en-US" sz="1200" b="0" dirty="0" smtClean="0">
-                <a:latin typeface="Helvetica"/>
-                <a:sym typeface="Wingdings" panose="05000000000000000000" pitchFamily="2" charset="2"/>
-              </a:rPr>
-              <a:t>with</a:t>
+            <a:pPr algn="l"/>
+            <a:r>
+              <a:rPr lang="en-GB" sz="1400" b="0" dirty="0"/>
+              <a:t>4.	Simulation of FC and cycle work over WHTC and respective subparts for actual engine </a:t>
+            </a:r>
+            <a:r>
+              <a:rPr lang="en-GB" sz="1400" b="0" dirty="0" smtClean="0"/>
+              <a:t>for</a:t>
             </a:r>
             <a:br>
-              <a:rPr lang="en-US" sz="1200" b="0" dirty="0" smtClean="0">
-                <a:latin typeface="Helvetica"/>
-                <a:sym typeface="Wingdings" panose="05000000000000000000" pitchFamily="2" charset="2"/>
-              </a:rPr>
+              <a:rPr lang="en-GB" sz="1400" b="0" dirty="0" smtClean="0"/>
             </a:br>
             <a:r>
-              <a:rPr lang="en-US" sz="1200" b="0" dirty="0" smtClean="0">
-                <a:latin typeface="Helvetica"/>
-                <a:sym typeface="Wingdings" panose="05000000000000000000" pitchFamily="2" charset="2"/>
-              </a:rPr>
-              <a:t>		the </a:t>
-            </a:r>
-            <a:r>
-              <a:rPr lang="en-US" sz="1200" b="0" dirty="0">
-                <a:latin typeface="Helvetica"/>
-                <a:sym typeface="Wingdings" panose="05000000000000000000" pitchFamily="2" charset="2"/>
-              </a:rPr>
-              <a:t>equations in points (5.2) to (5.4)</a:t>
-            </a:r>
-          </a:p>
-          <a:p>
-            <a:pPr algn="l">
-              <a:spcBef>
-                <a:spcPts val="1200"/>
-              </a:spcBef>
-              <a:spcAft>
-                <a:spcPts val="0"/>
-              </a:spcAft>
-              <a:tabLst>
-                <a:tab pos="534988" algn="l"/>
-              </a:tabLst>
-            </a:pPr>
-            <a:r>
-              <a:rPr lang="en-US" sz="1200" b="0" dirty="0" smtClean="0">
-                <a:latin typeface="Helvetica"/>
-                <a:sym typeface="Wingdings" panose="05000000000000000000" pitchFamily="2" charset="2"/>
-              </a:rPr>
-              <a:t>	5.2. </a:t>
-            </a:r>
-            <a:r>
-              <a:rPr lang="en-US" sz="1200" b="0" dirty="0" err="1" smtClean="0">
-                <a:latin typeface="Helvetica"/>
-                <a:sym typeface="Wingdings" panose="05000000000000000000" pitchFamily="2" charset="2"/>
-              </a:rPr>
-              <a:t>CF</a:t>
-            </a:r>
-            <a:r>
-              <a:rPr lang="en-US" sz="1200" b="0" baseline="-25000" dirty="0" err="1" smtClean="0">
-                <a:latin typeface="Helvetica"/>
-                <a:sym typeface="Wingdings" panose="05000000000000000000" pitchFamily="2" charset="2"/>
-              </a:rPr>
-              <a:t>Urban</a:t>
-            </a:r>
-            <a:r>
-              <a:rPr lang="en-US" sz="1200" b="0" dirty="0" smtClean="0">
-                <a:latin typeface="Helvetica"/>
-                <a:sym typeface="Wingdings" panose="05000000000000000000" pitchFamily="2" charset="2"/>
-              </a:rPr>
+              <a:rPr lang="en-GB" sz="1400" b="0" dirty="0" smtClean="0"/>
+              <a:t>	certification</a:t>
+            </a:r>
+            <a:endParaRPr lang="de-AT" sz="1400" b="0" dirty="0"/>
+          </a:p>
+          <a:p>
+            <a:pPr algn="l"/>
+            <a:r>
+              <a:rPr lang="en-GB" sz="1400" b="0" dirty="0"/>
+              <a:t>4.1.	WHTC reference points are </a:t>
+            </a:r>
+            <a:r>
+              <a:rPr lang="en-GB" sz="1400" b="0" dirty="0" err="1"/>
+              <a:t>denormalized</a:t>
+            </a:r>
+            <a:r>
+              <a:rPr lang="en-GB" sz="1400" b="0" dirty="0"/>
+              <a:t> using the full load curve input in originally </a:t>
+            </a:r>
+            <a:r>
+              <a:rPr lang="en-GB" sz="1400" b="0" dirty="0" smtClean="0"/>
+              <a:t>recorded</a:t>
+            </a:r>
+            <a:br>
+              <a:rPr lang="en-GB" sz="1400" b="0" dirty="0" smtClean="0"/>
+            </a:br>
+            <a:r>
+              <a:rPr lang="en-GB" sz="1400" b="0" dirty="0" smtClean="0"/>
+              <a:t>	resolution</a:t>
+            </a:r>
+            <a:endParaRPr lang="de-AT" sz="1400" b="0" dirty="0"/>
+          </a:p>
+          <a:p>
+            <a:pPr algn="l"/>
+            <a:r>
+              <a:rPr lang="en-GB" sz="1400" b="0" dirty="0"/>
+              <a:t>4.2.	FC is calculated for WHTC </a:t>
+            </a:r>
+            <a:r>
+              <a:rPr lang="en-GB" sz="1400" b="0" dirty="0" err="1"/>
+              <a:t>denormalized</a:t>
+            </a:r>
+            <a:r>
+              <a:rPr lang="en-GB" sz="1400" b="0" dirty="0"/>
+              <a:t> reference values for engine speed and torque </a:t>
+            </a:r>
+            <a:r>
+              <a:rPr lang="en-GB" sz="1400" b="0" dirty="0" smtClean="0"/>
+              <a:t>from</a:t>
+            </a:r>
+            <a:br>
+              <a:rPr lang="en-GB" sz="1400" b="0" dirty="0" smtClean="0"/>
+            </a:br>
+            <a:r>
+              <a:rPr lang="en-GB" sz="1400" b="0" dirty="0" smtClean="0"/>
+              <a:t>	</a:t>
+            </a:r>
+            <a:r>
+              <a:rPr lang="en-GB" sz="1400" b="0" dirty="0" err="1" smtClean="0"/>
+              <a:t>subpoint</a:t>
+            </a:r>
+            <a:r>
+              <a:rPr lang="en-GB" sz="1400" b="0" dirty="0" smtClean="0"/>
               <a:t> </a:t>
             </a:r>
             <a:r>
-              <a:rPr lang="en-US" sz="1200" b="0" dirty="0">
-                <a:latin typeface="Helvetica"/>
-                <a:sym typeface="Wingdings" panose="05000000000000000000" pitchFamily="2" charset="2"/>
-              </a:rPr>
-              <a:t>= </a:t>
-            </a:r>
-            <a:r>
-              <a:rPr lang="en-US" sz="1200" b="0" dirty="0" err="1">
-                <a:latin typeface="Helvetica"/>
-                <a:sym typeface="Wingdings" panose="05000000000000000000" pitchFamily="2" charset="2"/>
-              </a:rPr>
-              <a:t>SFC</a:t>
-            </a:r>
-            <a:r>
-              <a:rPr lang="en-US" sz="1200" b="0" baseline="-25000" dirty="0" err="1">
-                <a:latin typeface="Helvetica"/>
-                <a:sym typeface="Wingdings" panose="05000000000000000000" pitchFamily="2" charset="2"/>
-              </a:rPr>
-              <a:t>meas,Urban</a:t>
-            </a:r>
-            <a:r>
-              <a:rPr lang="en-US" sz="1200" b="0" dirty="0">
-                <a:latin typeface="Helvetica"/>
-                <a:sym typeface="Wingdings" panose="05000000000000000000" pitchFamily="2" charset="2"/>
-              </a:rPr>
-              <a:t> / </a:t>
-            </a:r>
-            <a:r>
-              <a:rPr lang="en-US" sz="1200" b="0" dirty="0" err="1">
-                <a:latin typeface="Helvetica"/>
-                <a:sym typeface="Wingdings" panose="05000000000000000000" pitchFamily="2" charset="2"/>
-              </a:rPr>
-              <a:t>SFC</a:t>
-            </a:r>
-            <a:r>
-              <a:rPr lang="en-US" sz="1200" b="0" baseline="-25000" dirty="0" err="1">
-                <a:latin typeface="Helvetica"/>
-                <a:sym typeface="Wingdings" panose="05000000000000000000" pitchFamily="2" charset="2"/>
-              </a:rPr>
-              <a:t>simu,Urban</a:t>
-            </a:r>
-            <a:endParaRPr lang="en-US" sz="1200" b="0" baseline="-25000" dirty="0">
-              <a:latin typeface="Helvetica"/>
-              <a:sym typeface="Wingdings" panose="05000000000000000000" pitchFamily="2" charset="2"/>
-            </a:endParaRPr>
-          </a:p>
-          <a:p>
-            <a:pPr algn="l">
-              <a:spcBef>
-                <a:spcPts val="1200"/>
-              </a:spcBef>
-              <a:spcAft>
-                <a:spcPts val="0"/>
-              </a:spcAft>
-              <a:tabLst>
-                <a:tab pos="534988" algn="l"/>
-              </a:tabLst>
-            </a:pPr>
-            <a:r>
-              <a:rPr lang="en-US" sz="1200" b="0" dirty="0" smtClean="0">
-                <a:latin typeface="Helvetica"/>
-                <a:sym typeface="Wingdings" panose="05000000000000000000" pitchFamily="2" charset="2"/>
-              </a:rPr>
-              <a:t>	5.3. </a:t>
-            </a:r>
-            <a:r>
-              <a:rPr lang="en-US" sz="1200" b="0" dirty="0" err="1" smtClean="0">
-                <a:latin typeface="Helvetica"/>
-                <a:sym typeface="Wingdings" panose="05000000000000000000" pitchFamily="2" charset="2"/>
-              </a:rPr>
-              <a:t>CF</a:t>
-            </a:r>
-            <a:r>
-              <a:rPr lang="en-US" sz="1200" b="0" baseline="-25000" dirty="0" err="1" smtClean="0">
-                <a:latin typeface="Helvetica"/>
-                <a:sym typeface="Wingdings" panose="05000000000000000000" pitchFamily="2" charset="2"/>
-              </a:rPr>
-              <a:t>Rural</a:t>
-            </a:r>
-            <a:r>
-              <a:rPr lang="en-US" sz="1200" b="0" dirty="0" smtClean="0">
-                <a:latin typeface="Helvetica"/>
-                <a:sym typeface="Wingdings" panose="05000000000000000000" pitchFamily="2" charset="2"/>
-              </a:rPr>
-              <a:t> </a:t>
-            </a:r>
-            <a:r>
-              <a:rPr lang="en-US" sz="1200" b="0" dirty="0">
-                <a:latin typeface="Helvetica"/>
-                <a:sym typeface="Wingdings" panose="05000000000000000000" pitchFamily="2" charset="2"/>
-              </a:rPr>
-              <a:t>= </a:t>
-            </a:r>
-            <a:r>
-              <a:rPr lang="en-US" sz="1200" b="0" dirty="0" err="1">
-                <a:latin typeface="Helvetica"/>
-                <a:sym typeface="Wingdings" panose="05000000000000000000" pitchFamily="2" charset="2"/>
-              </a:rPr>
-              <a:t>SFC</a:t>
-            </a:r>
-            <a:r>
-              <a:rPr lang="en-US" sz="1200" b="0" baseline="-25000" dirty="0" err="1">
-                <a:latin typeface="Helvetica"/>
-                <a:sym typeface="Wingdings" panose="05000000000000000000" pitchFamily="2" charset="2"/>
-              </a:rPr>
-              <a:t>meas,Rural</a:t>
-            </a:r>
-            <a:r>
-              <a:rPr lang="en-US" sz="1200" b="0" dirty="0">
-                <a:latin typeface="Helvetica"/>
-                <a:sym typeface="Wingdings" panose="05000000000000000000" pitchFamily="2" charset="2"/>
-              </a:rPr>
-              <a:t> / </a:t>
-            </a:r>
-            <a:r>
-              <a:rPr lang="en-US" sz="1200" b="0" dirty="0" err="1">
-                <a:latin typeface="Helvetica"/>
-                <a:sym typeface="Wingdings" panose="05000000000000000000" pitchFamily="2" charset="2"/>
-              </a:rPr>
-              <a:t>SFC</a:t>
-            </a:r>
-            <a:r>
-              <a:rPr lang="en-US" sz="1200" b="0" baseline="-25000" dirty="0" err="1">
-                <a:latin typeface="Helvetica"/>
-                <a:sym typeface="Wingdings" panose="05000000000000000000" pitchFamily="2" charset="2"/>
-              </a:rPr>
-              <a:t>simu,Rural</a:t>
-            </a:r>
-            <a:endParaRPr lang="en-US" sz="1200" b="0" baseline="-25000" dirty="0">
-              <a:latin typeface="Helvetica"/>
-              <a:sym typeface="Wingdings" panose="05000000000000000000" pitchFamily="2" charset="2"/>
-            </a:endParaRPr>
-          </a:p>
-          <a:p>
-            <a:pPr algn="l">
-              <a:spcBef>
-                <a:spcPts val="1200"/>
-              </a:spcBef>
-              <a:spcAft>
-                <a:spcPts val="0"/>
-              </a:spcAft>
-              <a:tabLst>
-                <a:tab pos="534988" algn="l"/>
-              </a:tabLst>
-            </a:pPr>
-            <a:r>
-              <a:rPr lang="en-US" sz="1200" b="0" dirty="0" smtClean="0">
-                <a:latin typeface="Helvetica"/>
-                <a:sym typeface="Wingdings" panose="05000000000000000000" pitchFamily="2" charset="2"/>
-              </a:rPr>
-              <a:t>	5.4. CF</a:t>
-            </a:r>
-            <a:r>
-              <a:rPr lang="en-US" sz="1200" b="0" baseline="-25000" dirty="0" smtClean="0">
-                <a:latin typeface="Helvetica"/>
-                <a:sym typeface="Wingdings" panose="05000000000000000000" pitchFamily="2" charset="2"/>
-              </a:rPr>
-              <a:t>MW</a:t>
-            </a:r>
-            <a:r>
-              <a:rPr lang="en-US" sz="1200" b="0" dirty="0" smtClean="0">
-                <a:latin typeface="Helvetica"/>
-                <a:sym typeface="Wingdings" panose="05000000000000000000" pitchFamily="2" charset="2"/>
-              </a:rPr>
-              <a:t> </a:t>
-            </a:r>
-            <a:r>
-              <a:rPr lang="en-US" sz="1200" b="0" dirty="0">
-                <a:latin typeface="Helvetica"/>
-                <a:sym typeface="Wingdings" panose="05000000000000000000" pitchFamily="2" charset="2"/>
-              </a:rPr>
-              <a:t>= </a:t>
-            </a:r>
-            <a:r>
-              <a:rPr lang="en-US" sz="1200" b="0" dirty="0" err="1">
-                <a:latin typeface="Helvetica"/>
-                <a:sym typeface="Wingdings" panose="05000000000000000000" pitchFamily="2" charset="2"/>
-              </a:rPr>
-              <a:t>SFC</a:t>
-            </a:r>
-            <a:r>
-              <a:rPr lang="en-US" sz="1200" b="0" baseline="-25000" dirty="0" err="1">
-                <a:latin typeface="Helvetica"/>
-                <a:sym typeface="Wingdings" panose="05000000000000000000" pitchFamily="2" charset="2"/>
-              </a:rPr>
-              <a:t>meas,MW</a:t>
-            </a:r>
-            <a:r>
-              <a:rPr lang="en-US" sz="1200" b="0" baseline="-25000" dirty="0">
-                <a:latin typeface="Helvetica"/>
-                <a:sym typeface="Wingdings" panose="05000000000000000000" pitchFamily="2" charset="2"/>
-              </a:rPr>
-              <a:t> </a:t>
-            </a:r>
-            <a:r>
-              <a:rPr lang="en-US" sz="1200" b="0" dirty="0">
-                <a:latin typeface="Helvetica"/>
-                <a:sym typeface="Wingdings" panose="05000000000000000000" pitchFamily="2" charset="2"/>
-              </a:rPr>
-              <a:t>/ </a:t>
-            </a:r>
-            <a:r>
-              <a:rPr lang="en-US" sz="1200" b="0" dirty="0" err="1">
-                <a:latin typeface="Helvetica"/>
-                <a:sym typeface="Wingdings" panose="05000000000000000000" pitchFamily="2" charset="2"/>
-              </a:rPr>
-              <a:t>SFC</a:t>
-            </a:r>
-            <a:r>
-              <a:rPr lang="en-US" sz="1200" b="0" baseline="-25000" dirty="0" err="1">
-                <a:latin typeface="Helvetica"/>
-                <a:sym typeface="Wingdings" panose="05000000000000000000" pitchFamily="2" charset="2"/>
-              </a:rPr>
-              <a:t>simu,MW</a:t>
-            </a:r>
-            <a:endParaRPr lang="en-US" sz="1200" b="0" baseline="-25000" dirty="0">
-              <a:latin typeface="Helvetica"/>
-              <a:sym typeface="Wingdings" panose="05000000000000000000" pitchFamily="2" charset="2"/>
-            </a:endParaRPr>
-          </a:p>
-          <a:p>
-            <a:pPr algn="l">
-              <a:spcBef>
-                <a:spcPts val="1200"/>
-              </a:spcBef>
-              <a:spcAft>
-                <a:spcPts val="0"/>
-              </a:spcAft>
-              <a:tabLst>
-                <a:tab pos="534988" algn="l"/>
-              </a:tabLst>
-            </a:pPr>
-            <a:r>
-              <a:rPr lang="en-US" sz="1200" b="0" dirty="0" smtClean="0">
-                <a:latin typeface="Helvetica"/>
-                <a:sym typeface="Wingdings" panose="05000000000000000000" pitchFamily="2" charset="2"/>
-              </a:rPr>
-              <a:t>	5.5. In </a:t>
-            </a:r>
-            <a:r>
-              <a:rPr lang="en-US" sz="1200" b="0" dirty="0">
-                <a:latin typeface="Helvetica"/>
-                <a:sym typeface="Wingdings" panose="05000000000000000000" pitchFamily="2" charset="2"/>
-              </a:rPr>
-              <a:t>case that the calculated value for a correction factor is lower than 1, the respective correction factor is set to 1</a:t>
-            </a:r>
-          </a:p>
-          <a:p>
-            <a:pPr algn="l">
-              <a:spcBef>
-                <a:spcPts val="1200"/>
-              </a:spcBef>
-              <a:spcAft>
-                <a:spcPts val="0"/>
-              </a:spcAft>
-              <a:tabLst>
-                <a:tab pos="534988" algn="l"/>
-              </a:tabLst>
-            </a:pPr>
-            <a:r>
-              <a:rPr lang="en-US" sz="1200" b="0" dirty="0" smtClean="0">
-                <a:latin typeface="Helvetica"/>
-                <a:sym typeface="Wingdings" panose="05000000000000000000" pitchFamily="2" charset="2"/>
-              </a:rPr>
-              <a:t>6. Calculation </a:t>
-            </a:r>
-            <a:r>
-              <a:rPr lang="en-US" sz="1200" b="0" dirty="0">
-                <a:latin typeface="Helvetica"/>
-                <a:sym typeface="Wingdings" panose="05000000000000000000" pitchFamily="2" charset="2"/>
-              </a:rPr>
-              <a:t>of cold-hot emission balancing factor</a:t>
-            </a:r>
-          </a:p>
-          <a:p>
-            <a:pPr algn="l">
-              <a:spcBef>
-                <a:spcPts val="1200"/>
-              </a:spcBef>
-              <a:spcAft>
-                <a:spcPts val="0"/>
-              </a:spcAft>
-              <a:tabLst>
-                <a:tab pos="534988" algn="l"/>
-              </a:tabLst>
-            </a:pPr>
-            <a:r>
-              <a:rPr lang="en-US" sz="1200" b="0" dirty="0" smtClean="0">
-                <a:latin typeface="Helvetica"/>
-                <a:sym typeface="Wingdings" panose="05000000000000000000" pitchFamily="2" charset="2"/>
-              </a:rPr>
-              <a:t>	6.1. This </a:t>
-            </a:r>
-            <a:r>
-              <a:rPr lang="en-US" sz="1200" b="0" dirty="0">
-                <a:latin typeface="Helvetica"/>
-                <a:sym typeface="Wingdings" panose="05000000000000000000" pitchFamily="2" charset="2"/>
-              </a:rPr>
-              <a:t>factor is calculated in accordance with the equation in point (6.2)</a:t>
-            </a:r>
-          </a:p>
-          <a:p>
-            <a:pPr algn="l">
-              <a:spcBef>
-                <a:spcPts val="1200"/>
-              </a:spcBef>
-              <a:spcAft>
-                <a:spcPts val="0"/>
-              </a:spcAft>
-              <a:tabLst>
-                <a:tab pos="534988" algn="l"/>
-              </a:tabLst>
-            </a:pPr>
-            <a:r>
-              <a:rPr lang="en-US" sz="1200" b="0" dirty="0" smtClean="0">
-                <a:latin typeface="Helvetica"/>
-                <a:sym typeface="Wingdings" panose="05000000000000000000" pitchFamily="2" charset="2"/>
-              </a:rPr>
-              <a:t>	6.2. </a:t>
-            </a:r>
-            <a:r>
-              <a:rPr lang="en-US" sz="1200" b="0" dirty="0" err="1" smtClean="0">
-                <a:latin typeface="Helvetica"/>
-                <a:sym typeface="Wingdings" panose="05000000000000000000" pitchFamily="2" charset="2"/>
-              </a:rPr>
-              <a:t>BF</a:t>
-            </a:r>
-            <a:r>
-              <a:rPr lang="en-US" sz="1200" b="0" baseline="-25000" dirty="0" err="1" smtClean="0">
-                <a:latin typeface="Helvetica"/>
-                <a:sym typeface="Wingdings" panose="05000000000000000000" pitchFamily="2" charset="2"/>
-              </a:rPr>
-              <a:t>cold</a:t>
-            </a:r>
-            <a:r>
-              <a:rPr lang="en-US" sz="1200" b="0" baseline="-25000" dirty="0" smtClean="0">
-                <a:latin typeface="Helvetica"/>
-                <a:sym typeface="Wingdings" panose="05000000000000000000" pitchFamily="2" charset="2"/>
-              </a:rPr>
-              <a:t>-hot</a:t>
-            </a:r>
-            <a:r>
-              <a:rPr lang="en-US" sz="1200" b="0" dirty="0" smtClean="0">
-                <a:latin typeface="Helvetica"/>
-                <a:sym typeface="Wingdings" panose="05000000000000000000" pitchFamily="2" charset="2"/>
-              </a:rPr>
-              <a:t> </a:t>
-            </a:r>
-            <a:r>
-              <a:rPr lang="en-US" sz="1200" b="0" dirty="0">
-                <a:latin typeface="Helvetica"/>
-                <a:sym typeface="Wingdings" panose="05000000000000000000" pitchFamily="2" charset="2"/>
-              </a:rPr>
-              <a:t>= 1 + 0.1 x (</a:t>
-            </a:r>
-            <a:r>
-              <a:rPr lang="en-US" sz="1200" b="0" dirty="0" err="1">
-                <a:latin typeface="Helvetica"/>
-                <a:sym typeface="Wingdings" panose="05000000000000000000" pitchFamily="2" charset="2"/>
-              </a:rPr>
-              <a:t>SFC</a:t>
-            </a:r>
-            <a:r>
-              <a:rPr lang="en-US" sz="1200" b="0" baseline="-25000" dirty="0" err="1">
-                <a:latin typeface="Helvetica"/>
-                <a:sym typeface="Wingdings" panose="05000000000000000000" pitchFamily="2" charset="2"/>
-              </a:rPr>
-              <a:t>meas,cold</a:t>
-            </a:r>
-            <a:r>
-              <a:rPr lang="en-US" sz="1200" b="0" baseline="-25000" dirty="0">
-                <a:latin typeface="Helvetica"/>
-                <a:sym typeface="Wingdings" panose="05000000000000000000" pitchFamily="2" charset="2"/>
-              </a:rPr>
-              <a:t> </a:t>
-            </a:r>
-            <a:r>
-              <a:rPr lang="en-US" sz="1200" b="0" dirty="0">
-                <a:latin typeface="Helvetica"/>
-                <a:sym typeface="Wingdings" panose="05000000000000000000" pitchFamily="2" charset="2"/>
-              </a:rPr>
-              <a:t>– </a:t>
-            </a:r>
-            <a:r>
-              <a:rPr lang="en-US" sz="1200" b="0" dirty="0" err="1">
-                <a:latin typeface="Helvetica"/>
-                <a:sym typeface="Wingdings" panose="05000000000000000000" pitchFamily="2" charset="2"/>
-              </a:rPr>
-              <a:t>SFC</a:t>
-            </a:r>
-            <a:r>
-              <a:rPr lang="en-US" sz="1200" b="0" baseline="-25000" dirty="0" err="1">
-                <a:latin typeface="Helvetica"/>
-                <a:sym typeface="Wingdings" panose="05000000000000000000" pitchFamily="2" charset="2"/>
-              </a:rPr>
-              <a:t>meas,hot</a:t>
-            </a:r>
-            <a:r>
-              <a:rPr lang="en-US" sz="1200" b="0" dirty="0">
-                <a:latin typeface="Helvetica"/>
-                <a:sym typeface="Wingdings" panose="05000000000000000000" pitchFamily="2" charset="2"/>
-              </a:rPr>
-              <a:t>) / </a:t>
-            </a:r>
-            <a:r>
-              <a:rPr lang="en-US" sz="1200" b="0" dirty="0" err="1">
-                <a:latin typeface="Helvetica"/>
-                <a:sym typeface="Wingdings" panose="05000000000000000000" pitchFamily="2" charset="2"/>
-              </a:rPr>
-              <a:t>SFC</a:t>
-            </a:r>
-            <a:r>
-              <a:rPr lang="en-US" sz="1200" b="0" baseline="-25000" dirty="0" err="1">
-                <a:latin typeface="Helvetica"/>
-                <a:sym typeface="Wingdings" panose="05000000000000000000" pitchFamily="2" charset="2"/>
-              </a:rPr>
-              <a:t>meas,hot</a:t>
-            </a:r>
-            <a:endParaRPr lang="en-US" sz="1200" b="0" baseline="-25000" dirty="0">
-              <a:latin typeface="Helvetica"/>
-              <a:sym typeface="Wingdings" panose="05000000000000000000" pitchFamily="2" charset="2"/>
-            </a:endParaRPr>
-          </a:p>
-          <a:p>
-            <a:pPr algn="l">
-              <a:spcBef>
-                <a:spcPts val="1200"/>
-              </a:spcBef>
-              <a:spcAft>
-                <a:spcPts val="0"/>
-              </a:spcAft>
-              <a:tabLst>
-                <a:tab pos="534988" algn="l"/>
-              </a:tabLst>
-            </a:pPr>
-            <a:r>
-              <a:rPr lang="en-US" sz="1200" b="0" dirty="0" smtClean="0">
-                <a:latin typeface="Helvetica"/>
-                <a:sym typeface="Wingdings" panose="05000000000000000000" pitchFamily="2" charset="2"/>
-              </a:rPr>
-              <a:t>	6.3. In </a:t>
-            </a:r>
-            <a:r>
-              <a:rPr lang="en-US" sz="1200" b="0" dirty="0">
-                <a:latin typeface="Helvetica"/>
-                <a:sym typeface="Wingdings" panose="05000000000000000000" pitchFamily="2" charset="2"/>
-              </a:rPr>
-              <a:t>case that the calculated value for this factor is lower than 1, the factor is set to </a:t>
-            </a:r>
-            <a:r>
-              <a:rPr lang="en-US" sz="1200" b="0" dirty="0" smtClean="0">
-                <a:latin typeface="Helvetica"/>
-                <a:sym typeface="Wingdings" panose="05000000000000000000" pitchFamily="2" charset="2"/>
-              </a:rPr>
-              <a:t>1</a:t>
-            </a:r>
-            <a:endParaRPr lang="en-US" sz="1200" b="0" dirty="0">
-              <a:latin typeface="Helvetica"/>
-              <a:sym typeface="Wingdings" panose="05000000000000000000" pitchFamily="2" charset="2"/>
-            </a:endParaRPr>
+              <a:rPr lang="en-GB" sz="1400" b="0" dirty="0"/>
+              <a:t>4.1</a:t>
+            </a:r>
+            <a:endParaRPr lang="de-AT" sz="1400" b="0" dirty="0"/>
+          </a:p>
+          <a:p>
+            <a:pPr algn="l"/>
+            <a:r>
+              <a:rPr lang="en-GB" sz="1400" b="0" dirty="0"/>
+              <a:t>4.3.	FC is calculated with engine inertia set to 0</a:t>
+            </a:r>
+            <a:endParaRPr lang="de-AT" sz="1400" b="0" dirty="0"/>
+          </a:p>
+          <a:p>
+            <a:pPr algn="l"/>
+            <a:r>
+              <a:rPr lang="en-GB" sz="1400" b="0" dirty="0"/>
+              <a:t>4.4.	FC is calculated with standard PT1-function (as in main vehicle simulation) for engine </a:t>
+            </a:r>
+            <a:r>
+              <a:rPr lang="en-GB" sz="1400" b="0" dirty="0" smtClean="0"/>
+              <a:t>torque</a:t>
+            </a:r>
+            <a:br>
+              <a:rPr lang="en-GB" sz="1400" b="0" dirty="0" smtClean="0"/>
+            </a:br>
+            <a:r>
+              <a:rPr lang="en-GB" sz="1400" b="0" dirty="0" smtClean="0"/>
+              <a:t>	response </a:t>
+            </a:r>
+            <a:r>
+              <a:rPr lang="en-GB" sz="1400" b="0" dirty="0"/>
+              <a:t>active</a:t>
+            </a:r>
+            <a:endParaRPr lang="de-AT" sz="1400" b="0" dirty="0"/>
+          </a:p>
+          <a:p>
+            <a:pPr algn="l"/>
+            <a:r>
+              <a:rPr lang="en-GB" sz="1400" b="0" dirty="0"/>
+              <a:t>4.5.	FC for all motoring points is set to 0</a:t>
+            </a:r>
+            <a:endParaRPr lang="de-AT" sz="1400" b="0" dirty="0"/>
+          </a:p>
+          <a:p>
+            <a:pPr algn="l"/>
+            <a:r>
+              <a:rPr lang="en-GB" sz="1400" b="0" dirty="0"/>
+              <a:t>4.6.	FC for all non-motoring engine operation points is calculated from FC map by </a:t>
+            </a:r>
+            <a:r>
+              <a:rPr lang="en-GB" sz="1400" b="0" dirty="0" smtClean="0"/>
+              <a:t>Delaunay</a:t>
+            </a:r>
+            <a:br>
+              <a:rPr lang="en-GB" sz="1400" b="0" dirty="0" smtClean="0"/>
+            </a:br>
+            <a:r>
+              <a:rPr lang="en-GB" sz="1400" b="0" dirty="0" smtClean="0"/>
+              <a:t>	interpolation </a:t>
+            </a:r>
+            <a:r>
+              <a:rPr lang="en-GB" sz="1400" b="0" dirty="0"/>
+              <a:t>method (as in main vehicle simulation)</a:t>
+            </a:r>
+            <a:endParaRPr lang="de-AT" sz="1400" b="0" dirty="0"/>
+          </a:p>
+          <a:p>
+            <a:pPr algn="l"/>
+            <a:r>
+              <a:rPr lang="en-GB" sz="1400" b="0" dirty="0"/>
+              <a:t>4.7.	Cycle work and FC are calculated according to equations defined in paragraphs 5.1 and 5.2 </a:t>
+            </a:r>
+            <a:r>
+              <a:rPr lang="en-GB" sz="1400" b="0" dirty="0" smtClean="0"/>
+              <a:t>of</a:t>
+            </a:r>
+            <a:br>
+              <a:rPr lang="en-GB" sz="1400" b="0" dirty="0" smtClean="0"/>
+            </a:br>
+            <a:r>
+              <a:rPr lang="en-GB" sz="1400" b="0" dirty="0" smtClean="0"/>
+              <a:t>	this Annex</a:t>
+            </a:r>
+            <a:endParaRPr lang="de-AT" sz="1400" b="0" dirty="0"/>
+          </a:p>
+          <a:p>
+            <a:pPr algn="l"/>
+            <a:r>
+              <a:rPr lang="en-GB" sz="1400" b="0" dirty="0"/>
+              <a:t>4.8.	Simulated specific FC values are calculated analogous to equations defined in paragraphs </a:t>
+            </a:r>
+            <a:r>
+              <a:rPr lang="en-GB" sz="1400" b="0" dirty="0" smtClean="0"/>
+              <a:t>5.3.1</a:t>
+            </a:r>
+            <a:br>
+              <a:rPr lang="en-GB" sz="1400" b="0" dirty="0" smtClean="0"/>
+            </a:br>
+            <a:r>
+              <a:rPr lang="en-GB" sz="1400" b="0" dirty="0" smtClean="0"/>
+              <a:t>	and </a:t>
+            </a:r>
+            <a:r>
+              <a:rPr lang="en-GB" sz="1400" b="0" dirty="0"/>
+              <a:t>5.3.2 of this Annex for measured values</a:t>
+            </a:r>
+            <a:endParaRPr lang="de-AT" sz="1400" b="0" dirty="0"/>
           </a:p>
         </p:txBody>
       </p:sp>
     </p:spTree>
     <p:extLst>
       <p:ext uri="{BB962C8B-B14F-4D97-AF65-F5344CB8AC3E}">
-        <p14:creationId xmlns:p14="http://schemas.microsoft.com/office/powerpoint/2010/main" val="2134050438"/>
+        <p14:creationId xmlns:p14="http://schemas.microsoft.com/office/powerpoint/2010/main" val="3255184177"/>
       </p:ext>
     </p:extLst>
   </p:cSld>
@@ -9313,17 +10058,40 @@
         </p:nvSpPr>
         <p:spPr>
           <a:xfrm>
-            <a:off x="755576" y="548680"/>
-            <a:ext cx="7632848" cy="576064"/>
+            <a:off x="468000" y="153844"/>
+            <a:ext cx="7632848" cy="756000"/>
           </a:xfrm>
         </p:spPr>
         <p:txBody>
-          <a:bodyPr/>
+          <a:bodyPr anchor="t" anchorCtr="0"/>
           <a:lstStyle/>
           <a:p>
             <a:r>
               <a:rPr lang="en-US" dirty="0" smtClean="0"/>
-              <a:t>VECTO Engine – Operations performed (p4/4)</a:t>
+              <a:t>VECTO Engine – </a:t>
+            </a:r>
+            <a:r>
+              <a:rPr lang="en-US" dirty="0" smtClean="0"/>
+              <a:t>E</a:t>
+            </a:r>
+            <a:r>
+              <a:rPr lang="en-US" dirty="0" smtClean="0"/>
+              <a:t>valuation algorithms</a:t>
+            </a:r>
+            <a:br>
+              <a:rPr lang="en-US" dirty="0" smtClean="0"/>
+            </a:br>
+            <a:r>
+              <a:rPr lang="en-US" dirty="0" smtClean="0"/>
+              <a:t>performed </a:t>
+            </a:r>
+            <a:r>
+              <a:rPr lang="en-US" dirty="0" smtClean="0"/>
+              <a:t>(</a:t>
+            </a:r>
+            <a:r>
+              <a:rPr lang="en-US" dirty="0" smtClean="0"/>
+              <a:t>p3/5)</a:t>
             </a:r>
             <a:endParaRPr lang="en-US" dirty="0"/>
           </a:p>
@@ -9338,7 +10106,7 @@
         <p:spPr>
           <a:xfrm>
             <a:off x="179512" y="1268760"/>
-            <a:ext cx="8928992" cy="3200876"/>
+            <a:ext cx="8784000" cy="3647152"/>
           </a:xfrm>
           <a:prstGeom prst="rect">
             <a:avLst/>
@@ -9350,554 +10118,261 @@
           </a:bodyPr>
           <a:lstStyle/>
           <a:p>
-            <a:pPr algn="l">
-              <a:spcBef>
-                <a:spcPts val="1200"/>
-              </a:spcBef>
-              <a:spcAft>
-                <a:spcPts val="0"/>
-              </a:spcAft>
-              <a:tabLst>
-                <a:tab pos="534988" algn="l"/>
-              </a:tabLst>
-            </a:pPr>
-            <a:r>
-              <a:rPr lang="en-US" sz="1200" b="0" dirty="0" smtClean="0">
-                <a:latin typeface="Helvetica"/>
-                <a:sym typeface="Wingdings" panose="05000000000000000000" pitchFamily="2" charset="2"/>
-              </a:rPr>
-              <a:t>7. Correction </a:t>
-            </a:r>
-            <a:r>
-              <a:rPr lang="en-US" sz="1200" b="0" dirty="0">
-                <a:latin typeface="Helvetica"/>
-                <a:sym typeface="Wingdings" panose="05000000000000000000" pitchFamily="2" charset="2"/>
-              </a:rPr>
-              <a:t>of FC values in FC map to standard NCV</a:t>
-            </a:r>
-          </a:p>
-          <a:p>
-            <a:pPr algn="l">
-              <a:spcBef>
-                <a:spcPts val="1200"/>
-              </a:spcBef>
-              <a:spcAft>
-                <a:spcPts val="0"/>
-              </a:spcAft>
-              <a:tabLst>
-                <a:tab pos="534988" algn="l"/>
-              </a:tabLst>
-            </a:pPr>
-            <a:r>
-              <a:rPr lang="en-US" sz="1200" b="0" dirty="0" smtClean="0">
-                <a:latin typeface="Helvetica"/>
-                <a:sym typeface="Wingdings" panose="05000000000000000000" pitchFamily="2" charset="2"/>
-              </a:rPr>
-              <a:t>	7.1. This </a:t>
-            </a:r>
-            <a:r>
-              <a:rPr lang="en-US" sz="1200" b="0" dirty="0">
-                <a:latin typeface="Helvetica"/>
-                <a:sym typeface="Wingdings" panose="05000000000000000000" pitchFamily="2" charset="2"/>
-              </a:rPr>
-              <a:t>correction is performed in accordance with the equation in point (7.2)</a:t>
-            </a:r>
-          </a:p>
-          <a:p>
-            <a:pPr algn="l">
-              <a:spcBef>
-                <a:spcPts val="1200"/>
-              </a:spcBef>
-              <a:spcAft>
-                <a:spcPts val="0"/>
-              </a:spcAft>
-              <a:tabLst>
-                <a:tab pos="534988" algn="l"/>
-              </a:tabLst>
-            </a:pPr>
-            <a:r>
-              <a:rPr lang="en-US" sz="1200" b="0" dirty="0" smtClean="0">
-                <a:latin typeface="Helvetica"/>
-                <a:sym typeface="Wingdings" panose="05000000000000000000" pitchFamily="2" charset="2"/>
-              </a:rPr>
-              <a:t>	7.2. </a:t>
-            </a:r>
-            <a:r>
-              <a:rPr lang="en-US" sz="1200" b="0" dirty="0" err="1" smtClean="0">
-                <a:latin typeface="Helvetica"/>
-                <a:sym typeface="Wingdings" panose="05000000000000000000" pitchFamily="2" charset="2"/>
-              </a:rPr>
-              <a:t>FC</a:t>
-            </a:r>
-            <a:r>
-              <a:rPr lang="en-US" sz="1200" b="0" baseline="-25000" dirty="0" err="1" smtClean="0">
-                <a:latin typeface="Helvetica"/>
-                <a:sym typeface="Wingdings" panose="05000000000000000000" pitchFamily="2" charset="2"/>
-              </a:rPr>
-              <a:t>corrected</a:t>
-            </a:r>
-            <a:r>
-              <a:rPr lang="en-US" sz="1200" b="0" dirty="0" smtClean="0">
-                <a:latin typeface="Helvetica"/>
-                <a:sym typeface="Wingdings" panose="05000000000000000000" pitchFamily="2" charset="2"/>
-              </a:rPr>
-              <a:t> </a:t>
-            </a:r>
-            <a:r>
-              <a:rPr lang="en-US" sz="1200" b="0" dirty="0">
-                <a:latin typeface="Helvetica"/>
-                <a:sym typeface="Wingdings" panose="05000000000000000000" pitchFamily="2" charset="2"/>
-              </a:rPr>
-              <a:t>= </a:t>
-            </a:r>
-            <a:r>
-              <a:rPr lang="en-US" sz="1200" b="0" dirty="0" err="1">
-                <a:latin typeface="Helvetica"/>
-                <a:sym typeface="Wingdings" panose="05000000000000000000" pitchFamily="2" charset="2"/>
-              </a:rPr>
-              <a:t>FC</a:t>
-            </a:r>
-            <a:r>
-              <a:rPr lang="en-US" sz="1200" b="0" baseline="-25000" dirty="0" err="1">
-                <a:latin typeface="Helvetica"/>
-                <a:sym typeface="Wingdings" panose="05000000000000000000" pitchFamily="2" charset="2"/>
-              </a:rPr>
-              <a:t>measured,map</a:t>
-            </a:r>
-            <a:r>
-              <a:rPr lang="en-US" sz="1200" b="0" dirty="0">
-                <a:latin typeface="Helvetica"/>
-                <a:sym typeface="Wingdings" panose="05000000000000000000" pitchFamily="2" charset="2"/>
-              </a:rPr>
-              <a:t> x </a:t>
-            </a:r>
-            <a:r>
-              <a:rPr lang="en-US" sz="1200" b="0" dirty="0" err="1">
-                <a:latin typeface="Helvetica"/>
-                <a:sym typeface="Wingdings" panose="05000000000000000000" pitchFamily="2" charset="2"/>
-              </a:rPr>
-              <a:t>NCV</a:t>
-            </a:r>
-            <a:r>
-              <a:rPr lang="en-US" sz="1200" b="0" baseline="-25000" dirty="0" err="1">
-                <a:latin typeface="Helvetica"/>
-                <a:sym typeface="Wingdings" panose="05000000000000000000" pitchFamily="2" charset="2"/>
-              </a:rPr>
-              <a:t>meas</a:t>
-            </a:r>
-            <a:r>
-              <a:rPr lang="en-US" sz="1200" b="0" dirty="0">
-                <a:latin typeface="Helvetica"/>
-                <a:sym typeface="Wingdings" panose="05000000000000000000" pitchFamily="2" charset="2"/>
-              </a:rPr>
+            <a:pPr algn="l"/>
+            <a:r>
+              <a:rPr lang="en-GB" sz="1400" b="0" dirty="0"/>
+              <a:t>5.	Calculation of WHTC correction factors</a:t>
+            </a:r>
+            <a:endParaRPr lang="de-AT" sz="1400" b="0" dirty="0"/>
+          </a:p>
+          <a:p>
+            <a:pPr algn="l"/>
+            <a:r>
+              <a:rPr lang="en-GB" sz="1400" b="0" dirty="0"/>
+              <a:t>5.1.	Measured values from input to pre-processing tool and simulated values from point (4) are used </a:t>
+            </a:r>
+            <a:r>
+              <a:rPr lang="en-GB" sz="1400" b="0" dirty="0" smtClean="0"/>
+              <a:t>in</a:t>
+            </a:r>
+            <a:br>
+              <a:rPr lang="en-GB" sz="1400" b="0" dirty="0" smtClean="0"/>
+            </a:br>
+            <a:r>
+              <a:rPr lang="en-GB" sz="1400" b="0" dirty="0" smtClean="0"/>
+              <a:t>	accordance </a:t>
+            </a:r>
+            <a:r>
+              <a:rPr lang="en-GB" sz="1400" b="0" dirty="0"/>
+              <a:t>with the equations in points (5.2) to (5.4)</a:t>
+            </a:r>
+            <a:endParaRPr lang="de-AT" sz="1400" b="0" dirty="0"/>
+          </a:p>
+          <a:p>
+            <a:pPr algn="l"/>
+            <a:r>
+              <a:rPr lang="en-GB" sz="1400" b="0" dirty="0"/>
+              <a:t>5.2.	</a:t>
+            </a:r>
+            <a:r>
+              <a:rPr lang="en-GB" sz="1400" b="0" dirty="0" err="1"/>
+              <a:t>CF</a:t>
+            </a:r>
+            <a:r>
+              <a:rPr lang="en-GB" sz="1400" b="0" baseline="-25000" dirty="0" err="1"/>
+              <a:t>Urban</a:t>
+            </a:r>
+            <a:r>
+              <a:rPr lang="en-GB" sz="1400" b="0" dirty="0"/>
+              <a:t> = </a:t>
+            </a:r>
+            <a:r>
+              <a:rPr lang="en-GB" sz="1400" b="0" dirty="0" err="1"/>
+              <a:t>SFCmeas,</a:t>
+            </a:r>
+            <a:r>
+              <a:rPr lang="en-GB" sz="1400" b="0" baseline="-25000" dirty="0" err="1"/>
+              <a:t>Urban</a:t>
+            </a:r>
+            <a:r>
+              <a:rPr lang="en-GB" sz="1400" b="0" dirty="0"/>
               <a:t> / </a:t>
             </a:r>
             <a:r>
-              <a:rPr lang="en-US" sz="1200" b="0" dirty="0" err="1">
-                <a:latin typeface="Helvetica"/>
-                <a:sym typeface="Wingdings" panose="05000000000000000000" pitchFamily="2" charset="2"/>
-              </a:rPr>
-              <a:t>NVC</a:t>
-            </a:r>
-            <a:r>
-              <a:rPr lang="en-US" sz="1200" b="0" baseline="-25000" dirty="0" err="1">
-                <a:latin typeface="Helvetica"/>
-                <a:sym typeface="Wingdings" panose="05000000000000000000" pitchFamily="2" charset="2"/>
-              </a:rPr>
-              <a:t>std</a:t>
-            </a:r>
-            <a:endParaRPr lang="en-US" sz="1200" b="0" baseline="-25000" dirty="0">
-              <a:latin typeface="Helvetica"/>
-              <a:sym typeface="Wingdings" panose="05000000000000000000" pitchFamily="2" charset="2"/>
-            </a:endParaRPr>
-          </a:p>
-          <a:p>
-            <a:pPr algn="l">
-              <a:spcBef>
-                <a:spcPts val="1200"/>
-              </a:spcBef>
-              <a:spcAft>
-                <a:spcPts val="0"/>
-              </a:spcAft>
-              <a:tabLst>
-                <a:tab pos="534988" algn="l"/>
-              </a:tabLst>
-            </a:pPr>
-            <a:r>
-              <a:rPr lang="en-US" sz="1200" b="0" dirty="0" smtClean="0">
-                <a:latin typeface="Helvetica"/>
-                <a:sym typeface="Wingdings" panose="05000000000000000000" pitchFamily="2" charset="2"/>
-              </a:rPr>
-              <a:t>	7.3. </a:t>
-            </a:r>
-            <a:r>
-              <a:rPr lang="en-US" sz="1200" b="0" dirty="0" err="1" smtClean="0">
-                <a:latin typeface="Helvetica"/>
-                <a:sym typeface="Wingdings" panose="05000000000000000000" pitchFamily="2" charset="2"/>
-              </a:rPr>
-              <a:t>FC</a:t>
-            </a:r>
-            <a:r>
-              <a:rPr lang="en-US" sz="1200" b="0" baseline="-25000" dirty="0" err="1" smtClean="0">
-                <a:latin typeface="Helvetica"/>
-                <a:sym typeface="Wingdings" panose="05000000000000000000" pitchFamily="2" charset="2"/>
-              </a:rPr>
-              <a:t>measured,map</a:t>
-            </a:r>
-            <a:r>
-              <a:rPr lang="en-US" sz="1200" b="0" dirty="0" smtClean="0">
-                <a:latin typeface="Helvetica"/>
-                <a:sym typeface="Wingdings" panose="05000000000000000000" pitchFamily="2" charset="2"/>
-              </a:rPr>
-              <a:t> </a:t>
-            </a:r>
-            <a:r>
-              <a:rPr lang="en-US" sz="1200" b="0" dirty="0">
-                <a:latin typeface="Helvetica"/>
-                <a:sym typeface="Wingdings" panose="05000000000000000000" pitchFamily="2" charset="2"/>
-              </a:rPr>
-              <a:t>shall be the FC value in the FC map input data processed in accordance with point (3)</a:t>
-            </a:r>
-          </a:p>
-          <a:p>
-            <a:pPr algn="l">
-              <a:spcBef>
-                <a:spcPts val="1200"/>
-              </a:spcBef>
-              <a:spcAft>
-                <a:spcPts val="0"/>
-              </a:spcAft>
-              <a:tabLst>
-                <a:tab pos="534988" algn="l"/>
-              </a:tabLst>
-            </a:pPr>
-            <a:r>
-              <a:rPr lang="en-US" sz="1200" b="0" dirty="0" smtClean="0">
-                <a:latin typeface="Helvetica"/>
-                <a:sym typeface="Wingdings" panose="05000000000000000000" pitchFamily="2" charset="2"/>
-              </a:rPr>
-              <a:t>	7.4. </a:t>
-            </a:r>
-            <a:r>
-              <a:rPr lang="en-US" sz="1200" b="0" dirty="0" err="1" smtClean="0">
-                <a:latin typeface="Helvetica"/>
-                <a:sym typeface="Wingdings" panose="05000000000000000000" pitchFamily="2" charset="2"/>
-              </a:rPr>
-              <a:t>NCV</a:t>
-            </a:r>
-            <a:r>
-              <a:rPr lang="en-US" sz="1200" b="0" baseline="-25000" dirty="0" err="1" smtClean="0">
-                <a:latin typeface="Helvetica"/>
-                <a:sym typeface="Wingdings" panose="05000000000000000000" pitchFamily="2" charset="2"/>
-              </a:rPr>
-              <a:t>meas</a:t>
-            </a:r>
-            <a:r>
-              <a:rPr lang="en-US" sz="1200" b="0" dirty="0" smtClean="0">
-                <a:latin typeface="Helvetica"/>
-                <a:sym typeface="Wingdings" panose="05000000000000000000" pitchFamily="2" charset="2"/>
-              </a:rPr>
-              <a:t> </a:t>
-            </a:r>
-            <a:r>
-              <a:rPr lang="en-US" sz="1200" b="0" dirty="0">
-                <a:latin typeface="Helvetica"/>
-                <a:sym typeface="Wingdings" panose="05000000000000000000" pitchFamily="2" charset="2"/>
-              </a:rPr>
-              <a:t>and </a:t>
-            </a:r>
-            <a:r>
-              <a:rPr lang="en-US" sz="1200" b="0" dirty="0" err="1">
-                <a:latin typeface="Helvetica"/>
-                <a:sym typeface="Wingdings" panose="05000000000000000000" pitchFamily="2" charset="2"/>
-              </a:rPr>
-              <a:t>NVC</a:t>
-            </a:r>
-            <a:r>
-              <a:rPr lang="en-US" sz="1200" b="0" baseline="-25000" dirty="0" err="1">
-                <a:latin typeface="Helvetica"/>
-                <a:sym typeface="Wingdings" panose="05000000000000000000" pitchFamily="2" charset="2"/>
-              </a:rPr>
-              <a:t>std</a:t>
-            </a:r>
-            <a:r>
-              <a:rPr lang="en-US" sz="1200" b="0" dirty="0">
-                <a:latin typeface="Helvetica"/>
-                <a:sym typeface="Wingdings" panose="05000000000000000000" pitchFamily="2" charset="2"/>
-              </a:rPr>
-              <a:t> shall be defined in accordance with paragraph 5.3.3.1 of </a:t>
-            </a:r>
-            <a:r>
-              <a:rPr lang="en-US" sz="1200" b="0" dirty="0" smtClean="0">
-                <a:latin typeface="Helvetica"/>
-                <a:sym typeface="Wingdings" panose="05000000000000000000" pitchFamily="2" charset="2"/>
-              </a:rPr>
-              <a:t>the technical annex </a:t>
-            </a:r>
-            <a:endParaRPr lang="en-US" sz="1200" b="0" dirty="0">
-              <a:latin typeface="Helvetica"/>
-              <a:sym typeface="Wingdings" panose="05000000000000000000" pitchFamily="2" charset="2"/>
-            </a:endParaRPr>
-          </a:p>
-          <a:p>
-            <a:pPr algn="l">
-              <a:spcBef>
-                <a:spcPts val="1200"/>
-              </a:spcBef>
-              <a:spcAft>
-                <a:spcPts val="0"/>
-              </a:spcAft>
-              <a:tabLst>
-                <a:tab pos="534988" algn="l"/>
-                <a:tab pos="808038" algn="l"/>
-              </a:tabLst>
-            </a:pPr>
-            <a:r>
-              <a:rPr lang="en-US" sz="1200" b="0" dirty="0" smtClean="0">
-                <a:latin typeface="Helvetica"/>
-                <a:sym typeface="Wingdings" panose="05000000000000000000" pitchFamily="2" charset="2"/>
-              </a:rPr>
-              <a:t>	7.5. In </a:t>
-            </a:r>
-            <a:r>
-              <a:rPr lang="en-US" sz="1200" b="0" dirty="0">
-                <a:latin typeface="Helvetica"/>
-                <a:sym typeface="Wingdings" panose="05000000000000000000" pitchFamily="2" charset="2"/>
-              </a:rPr>
-              <a:t>the case that reference fuel of the type B7 (Diesel / CI) in accordance with paragraph 3.2 of </a:t>
-            </a:r>
-            <a:r>
-              <a:rPr lang="en-US" sz="1200" b="0" dirty="0" smtClean="0">
-                <a:latin typeface="Helvetica"/>
-                <a:sym typeface="Wingdings" panose="05000000000000000000" pitchFamily="2" charset="2"/>
-              </a:rPr>
-              <a:t>the technical annex</a:t>
+              <a:rPr lang="en-GB" sz="1400" b="0" dirty="0" err="1"/>
+              <a:t>SFCsimu,</a:t>
+            </a:r>
+            <a:r>
+              <a:rPr lang="en-GB" sz="1400" b="0" baseline="-25000" dirty="0" err="1"/>
+              <a:t>Urban</a:t>
+            </a:r>
+            <a:endParaRPr lang="de-AT" sz="1400" b="0" dirty="0"/>
+          </a:p>
+          <a:p>
+            <a:pPr algn="l"/>
+            <a:r>
+              <a:rPr lang="en-GB" sz="1400" b="0" dirty="0"/>
+              <a:t>5.3.	</a:t>
+            </a:r>
+            <a:r>
+              <a:rPr lang="en-GB" sz="1400" b="0" dirty="0" err="1"/>
+              <a:t>CF</a:t>
+            </a:r>
+            <a:r>
+              <a:rPr lang="en-GB" sz="1400" b="0" baseline="-25000" dirty="0" err="1"/>
+              <a:t>Rural</a:t>
+            </a:r>
+            <a:r>
+              <a:rPr lang="en-GB" sz="1400" b="0" dirty="0"/>
+              <a:t> = </a:t>
+            </a:r>
+            <a:r>
+              <a:rPr lang="en-GB" sz="1400" b="0" dirty="0" err="1"/>
+              <a:t>SFCmeas,</a:t>
+            </a:r>
+            <a:r>
+              <a:rPr lang="en-GB" sz="1400" b="0" baseline="-25000" dirty="0" err="1"/>
+              <a:t>Rural</a:t>
+            </a:r>
+            <a:r>
+              <a:rPr lang="en-GB" sz="1400" b="0" dirty="0"/>
+              <a:t> / </a:t>
+            </a:r>
+            <a:r>
+              <a:rPr lang="en-GB" sz="1400" b="0" dirty="0" err="1"/>
+              <a:t>SFCsimu,</a:t>
+            </a:r>
+            <a:r>
+              <a:rPr lang="en-GB" sz="1400" b="0" baseline="-25000" dirty="0" err="1"/>
+              <a:t>Rural</a:t>
+            </a:r>
+            <a:endParaRPr lang="de-AT" sz="1400" b="0" dirty="0"/>
+          </a:p>
+          <a:p>
+            <a:pPr algn="l"/>
+            <a:r>
+              <a:rPr lang="en-GB" sz="1400" b="0" dirty="0"/>
+              <a:t>5.4.	CF</a:t>
+            </a:r>
+            <a:r>
+              <a:rPr lang="en-GB" sz="1400" b="0" baseline="-25000" dirty="0"/>
+              <a:t>MW</a:t>
+            </a:r>
+            <a:r>
+              <a:rPr lang="en-GB" sz="1400" b="0" dirty="0"/>
+              <a:t> = </a:t>
+            </a:r>
+            <a:r>
+              <a:rPr lang="en-GB" sz="1400" b="0" dirty="0" err="1"/>
+              <a:t>SFCmeas,</a:t>
+            </a:r>
+            <a:r>
+              <a:rPr lang="en-GB" sz="1400" b="0" baseline="-25000" dirty="0" err="1"/>
+              <a:t>MW</a:t>
+            </a:r>
+            <a:r>
+              <a:rPr lang="en-GB" sz="1400" b="0" dirty="0"/>
+              <a:t> / </a:t>
+            </a:r>
+            <a:r>
+              <a:rPr lang="en-GB" sz="1400" b="0" dirty="0" err="1"/>
+              <a:t>SFCsimu,</a:t>
+            </a:r>
+            <a:r>
+              <a:rPr lang="en-GB" sz="1400" b="0" baseline="-25000" dirty="0" err="1"/>
+              <a:t>MW</a:t>
+            </a:r>
+            <a:endParaRPr lang="de-AT" sz="1400" b="0" dirty="0"/>
+          </a:p>
+          <a:p>
+            <a:pPr algn="l"/>
+            <a:r>
+              <a:rPr lang="en-GB" sz="1400" b="0" dirty="0"/>
+              <a:t>5.5.	In case that the calculated value for a correction factor is lower than 1, the respective </a:t>
+            </a:r>
+            <a:r>
+              <a:rPr lang="en-GB" sz="1400" b="0" dirty="0" smtClean="0"/>
+              <a:t>correction</a:t>
             </a:r>
             <a:br>
-              <a:rPr lang="en-US" sz="1200" b="0" dirty="0" smtClean="0">
-                <a:latin typeface="Helvetica"/>
-                <a:sym typeface="Wingdings" panose="05000000000000000000" pitchFamily="2" charset="2"/>
-              </a:rPr>
+              <a:rPr lang="en-GB" sz="1400" b="0" dirty="0" smtClean="0"/>
             </a:br>
             <a:r>
-              <a:rPr lang="en-US" sz="1200" b="0" dirty="0" smtClean="0">
-                <a:latin typeface="Helvetica"/>
-                <a:sym typeface="Wingdings" panose="05000000000000000000" pitchFamily="2" charset="2"/>
-              </a:rPr>
-              <a:t>		 was used during </a:t>
-            </a:r>
-            <a:r>
-              <a:rPr lang="en-US" sz="1200" b="0" dirty="0">
-                <a:latin typeface="Helvetica"/>
-                <a:sym typeface="Wingdings" panose="05000000000000000000" pitchFamily="2" charset="2"/>
-              </a:rPr>
-              <a:t>testing, the correction in accordance with points (7.1) to (7.4) is not performed.</a:t>
-            </a:r>
-          </a:p>
-          <a:p>
-            <a:pPr algn="l">
-              <a:spcBef>
-                <a:spcPts val="1200"/>
-              </a:spcBef>
-              <a:spcAft>
-                <a:spcPts val="0"/>
-              </a:spcAft>
-              <a:tabLst>
-                <a:tab pos="180975" algn="l"/>
-                <a:tab pos="534988" algn="l"/>
-              </a:tabLst>
-            </a:pPr>
-            <a:r>
-              <a:rPr lang="en-US" sz="1200" b="0" dirty="0">
-                <a:latin typeface="Helvetica"/>
-                <a:sym typeface="Wingdings" panose="05000000000000000000" pitchFamily="2" charset="2"/>
-              </a:rPr>
-              <a:t>8</a:t>
-            </a:r>
-            <a:r>
-              <a:rPr lang="en-US" sz="1200" b="0" dirty="0" smtClean="0">
-                <a:latin typeface="Helvetica"/>
-                <a:sym typeface="Wingdings" panose="05000000000000000000" pitchFamily="2" charset="2"/>
-              </a:rPr>
-              <a:t>. Converting </a:t>
-            </a:r>
-            <a:r>
-              <a:rPr lang="en-US" sz="1200" b="0" dirty="0">
-                <a:latin typeface="Helvetica"/>
-                <a:sym typeface="Wingdings" panose="05000000000000000000" pitchFamily="2" charset="2"/>
-              </a:rPr>
-              <a:t>of engine full load and motoring torque values of the actual engine for certification to a logging frequency of </a:t>
-            </a:r>
-            <a:r>
-              <a:rPr lang="en-US" sz="1200" b="0" dirty="0" smtClean="0">
-                <a:latin typeface="Helvetica"/>
-                <a:sym typeface="Wingdings" panose="05000000000000000000" pitchFamily="2" charset="2"/>
-              </a:rPr>
-              <a:t>the</a:t>
-            </a:r>
-            <a:br>
-              <a:rPr lang="en-US" sz="1200" b="0" dirty="0" smtClean="0">
-                <a:latin typeface="Helvetica"/>
-                <a:sym typeface="Wingdings" panose="05000000000000000000" pitchFamily="2" charset="2"/>
-              </a:rPr>
-            </a:br>
-            <a:r>
-              <a:rPr lang="en-US" sz="1200" b="0" dirty="0" smtClean="0">
-                <a:latin typeface="Helvetica"/>
-                <a:sym typeface="Wingdings" panose="05000000000000000000" pitchFamily="2" charset="2"/>
-              </a:rPr>
-              <a:t>	engine </a:t>
-            </a:r>
-            <a:r>
-              <a:rPr lang="en-US" sz="1200" b="0" dirty="0">
-                <a:latin typeface="Helvetica"/>
-                <a:sym typeface="Wingdings" panose="05000000000000000000" pitchFamily="2" charset="2"/>
-              </a:rPr>
-              <a:t>speed of 8 </a:t>
-            </a:r>
-            <a:r>
-              <a:rPr lang="en-US" sz="1200" b="0" dirty="0" smtClean="0">
-                <a:latin typeface="Helvetica"/>
-                <a:sym typeface="Wingdings" panose="05000000000000000000" pitchFamily="2" charset="2"/>
-              </a:rPr>
-              <a:t>min</a:t>
-            </a:r>
-            <a:r>
-              <a:rPr lang="en-US" sz="1200" b="0" baseline="30000" dirty="0" smtClean="0">
-                <a:latin typeface="Helvetica"/>
-                <a:sym typeface="Wingdings" panose="05000000000000000000" pitchFamily="2" charset="2"/>
-              </a:rPr>
-              <a:t>-1</a:t>
-            </a:r>
-            <a:r>
-              <a:rPr lang="en-US" sz="1200" b="0" dirty="0" smtClean="0">
-                <a:latin typeface="Helvetica"/>
-                <a:sym typeface="Wingdings" panose="05000000000000000000" pitchFamily="2" charset="2"/>
-              </a:rPr>
-              <a:t> if the average engine speed </a:t>
-            </a:r>
-            <a:r>
-              <a:rPr lang="en-US" sz="1200" b="0" dirty="0" err="1" smtClean="0">
-                <a:latin typeface="Helvetica"/>
-                <a:sym typeface="Wingdings" panose="05000000000000000000" pitchFamily="2" charset="2"/>
-              </a:rPr>
-              <a:t>stepwidth</a:t>
-            </a:r>
-            <a:r>
-              <a:rPr lang="en-US" sz="1200" b="0" dirty="0" smtClean="0">
-                <a:latin typeface="Helvetica"/>
-                <a:sym typeface="Wingdings" panose="05000000000000000000" pitchFamily="2" charset="2"/>
-              </a:rPr>
-              <a:t> is smaller </a:t>
-            </a:r>
-            <a:r>
-              <a:rPr lang="en-US" sz="1200" b="0" dirty="0">
-                <a:latin typeface="Helvetica"/>
-                <a:sym typeface="Wingdings" panose="05000000000000000000" pitchFamily="2" charset="2"/>
-              </a:rPr>
-              <a:t>than 6 min</a:t>
-            </a:r>
-            <a:r>
-              <a:rPr lang="en-US" sz="1200" b="0" baseline="30000" dirty="0">
-                <a:latin typeface="Helvetica"/>
-                <a:sym typeface="Wingdings" panose="05000000000000000000" pitchFamily="2" charset="2"/>
-              </a:rPr>
-              <a:t>-1</a:t>
-            </a:r>
-            <a:endParaRPr lang="en-US" sz="1200" b="0" dirty="0">
-              <a:latin typeface="Helvetica"/>
-              <a:sym typeface="Wingdings" panose="05000000000000000000" pitchFamily="2" charset="2"/>
-            </a:endParaRPr>
-          </a:p>
-          <a:p>
-            <a:pPr algn="l">
-              <a:spcBef>
-                <a:spcPts val="1200"/>
-              </a:spcBef>
-              <a:spcAft>
-                <a:spcPts val="0"/>
-              </a:spcAft>
-              <a:tabLst>
-                <a:tab pos="534988" algn="l"/>
-                <a:tab pos="808038" algn="l"/>
-              </a:tabLst>
-            </a:pPr>
-            <a:r>
-              <a:rPr lang="en-US" sz="1200" b="0" dirty="0" smtClean="0">
-                <a:latin typeface="Helvetica"/>
-                <a:sym typeface="Wingdings" panose="05000000000000000000" pitchFamily="2" charset="2"/>
-              </a:rPr>
-              <a:t>	9.1. The </a:t>
-            </a:r>
-            <a:r>
-              <a:rPr lang="en-US" sz="1200" b="0" dirty="0">
-                <a:latin typeface="Helvetica"/>
-                <a:sym typeface="Wingdings" panose="05000000000000000000" pitchFamily="2" charset="2"/>
-              </a:rPr>
-              <a:t>conversion is performed by arithmetical averaging over intervals of ±4 min</a:t>
-            </a:r>
-            <a:r>
-              <a:rPr lang="en-US" sz="1200" b="0" baseline="30000" dirty="0">
-                <a:latin typeface="Helvetica"/>
-                <a:sym typeface="Wingdings" panose="05000000000000000000" pitchFamily="2" charset="2"/>
-              </a:rPr>
-              <a:t>-1</a:t>
-            </a:r>
-            <a:r>
-              <a:rPr lang="en-US" sz="1200" b="0" dirty="0">
-                <a:latin typeface="Helvetica"/>
-                <a:sym typeface="Wingdings" panose="05000000000000000000" pitchFamily="2" charset="2"/>
-              </a:rPr>
-              <a:t> of the given </a:t>
-            </a:r>
-            <a:r>
-              <a:rPr lang="en-US" sz="1200" b="0" dirty="0" err="1">
-                <a:latin typeface="Helvetica"/>
-                <a:sym typeface="Wingdings" panose="05000000000000000000" pitchFamily="2" charset="2"/>
-              </a:rPr>
-              <a:t>setpoint</a:t>
-            </a:r>
-            <a:r>
-              <a:rPr lang="en-US" sz="1200" b="0" dirty="0">
-                <a:latin typeface="Helvetica"/>
-                <a:sym typeface="Wingdings" panose="05000000000000000000" pitchFamily="2" charset="2"/>
-              </a:rPr>
-              <a:t> for the </a:t>
-            </a:r>
-            <a:r>
-              <a:rPr lang="en-US" sz="1200" b="0" dirty="0" smtClean="0">
-                <a:latin typeface="Helvetica"/>
-                <a:sym typeface="Wingdings" panose="05000000000000000000" pitchFamily="2" charset="2"/>
-              </a:rPr>
-              <a:t>output</a:t>
-            </a:r>
-            <a:br>
-              <a:rPr lang="en-US" sz="1200" b="0" dirty="0" smtClean="0">
-                <a:latin typeface="Helvetica"/>
-                <a:sym typeface="Wingdings" panose="05000000000000000000" pitchFamily="2" charset="2"/>
-              </a:rPr>
-            </a:br>
-            <a:r>
-              <a:rPr lang="en-US" sz="1200" b="0" dirty="0" smtClean="0">
-                <a:latin typeface="Helvetica"/>
-                <a:sym typeface="Wingdings" panose="05000000000000000000" pitchFamily="2" charset="2"/>
-              </a:rPr>
-              <a:t>		 data </a:t>
-            </a:r>
-            <a:r>
-              <a:rPr lang="en-US" sz="1200" b="0" dirty="0">
-                <a:latin typeface="Helvetica"/>
-                <a:sym typeface="Wingdings" panose="05000000000000000000" pitchFamily="2" charset="2"/>
-              </a:rPr>
-              <a:t>based on the full load curve input in originally recorded resolution</a:t>
-            </a:r>
+              <a:rPr lang="en-GB" sz="1400" b="0" dirty="0" smtClean="0"/>
+              <a:t>	factor </a:t>
+            </a:r>
+            <a:r>
+              <a:rPr lang="en-GB" sz="1400" b="0" dirty="0"/>
+              <a:t>is set to 1</a:t>
+            </a:r>
+            <a:endParaRPr lang="de-AT" sz="1400" b="0" dirty="0"/>
+          </a:p>
+          <a:p>
+            <a:pPr algn="l"/>
+            <a:r>
+              <a:rPr lang="en-GB" sz="1400" b="0" dirty="0"/>
+              <a:t>6.	Calculation of cold-hot emission balancing factor</a:t>
+            </a:r>
+            <a:endParaRPr lang="de-AT" sz="1400" b="0" dirty="0"/>
+          </a:p>
+          <a:p>
+            <a:pPr algn="l"/>
+            <a:r>
+              <a:rPr lang="en-GB" sz="1400" b="0" dirty="0"/>
+              <a:t>6.1.	This factor is calculated in accordance with the equation in point (6.2)</a:t>
+            </a:r>
+            <a:endParaRPr lang="de-AT" sz="1400" b="0" dirty="0"/>
+          </a:p>
+          <a:p>
+            <a:pPr algn="l"/>
+            <a:r>
+              <a:rPr lang="en-GB" sz="1400" b="0" dirty="0"/>
+              <a:t>6.2.	</a:t>
+            </a:r>
+            <a:r>
+              <a:rPr lang="en-GB" sz="1400" b="0" dirty="0" err="1"/>
+              <a:t>BF</a:t>
+            </a:r>
+            <a:r>
+              <a:rPr lang="en-GB" sz="1400" b="0" baseline="-25000" dirty="0" err="1"/>
+              <a:t>cold</a:t>
+            </a:r>
+            <a:r>
+              <a:rPr lang="en-GB" sz="1400" b="0" baseline="-25000" dirty="0"/>
+              <a:t>-hot</a:t>
+            </a:r>
+            <a:r>
+              <a:rPr lang="en-GB" sz="1400" b="0" dirty="0"/>
+              <a:t> = 1 + 0.1 x (</a:t>
+            </a:r>
+            <a:r>
+              <a:rPr lang="en-GB" sz="1400" b="0" dirty="0" err="1"/>
+              <a:t>SFC</a:t>
+            </a:r>
+            <a:r>
+              <a:rPr lang="en-GB" sz="1400" b="0" baseline="-25000" dirty="0" err="1"/>
+              <a:t>meas,cold</a:t>
+            </a:r>
+            <a:r>
+              <a:rPr lang="en-GB" sz="1400" b="0" dirty="0"/>
+              <a:t> – </a:t>
+            </a:r>
+            <a:r>
+              <a:rPr lang="en-GB" sz="1400" b="0" dirty="0" err="1"/>
+              <a:t>SFC</a:t>
+            </a:r>
+            <a:r>
+              <a:rPr lang="en-GB" sz="1400" b="0" baseline="-25000" dirty="0" err="1"/>
+              <a:t>meas,hot</a:t>
+            </a:r>
+            <a:r>
+              <a:rPr lang="en-GB" sz="1400" b="0" dirty="0"/>
+              <a:t>) / </a:t>
+            </a:r>
+            <a:r>
+              <a:rPr lang="en-GB" sz="1400" b="0" dirty="0" err="1"/>
+              <a:t>SFC</a:t>
+            </a:r>
+            <a:r>
+              <a:rPr lang="en-GB" sz="1400" b="0" baseline="-25000" dirty="0" err="1"/>
+              <a:t>meas,hot</a:t>
+            </a:r>
+            <a:endParaRPr lang="de-AT" sz="1400" b="0" dirty="0"/>
+          </a:p>
+          <a:p>
+            <a:pPr algn="l"/>
+            <a:r>
+              <a:rPr lang="en-GB" sz="1400" b="0" dirty="0"/>
+              <a:t>6.3.	In case that the calculated value for this factor is lower than 1, the factor is set to 1</a:t>
+            </a:r>
+            <a:endParaRPr lang="de-AT" sz="1400" b="0" dirty="0"/>
           </a:p>
         </p:txBody>
       </p:sp>
     </p:spTree>
     <p:extLst>
       <p:ext uri="{BB962C8B-B14F-4D97-AF65-F5344CB8AC3E}">
-        <p14:creationId xmlns:p14="http://schemas.microsoft.com/office/powerpoint/2010/main" val="2341099798"/>
+        <p14:creationId xmlns:p14="http://schemas.microsoft.com/office/powerpoint/2010/main" val="4077340661"/>
       </p:ext>
     </p:extLst>
   </p:cSld>
@@ -9941,22 +10416,42 @@
             <p:ph type="title"/>
           </p:nvPr>
         </p:nvSpPr>
-        <p:spPr/>
+        <p:spPr>
+          <a:xfrm>
+            <a:off x="468000" y="153844"/>
+            <a:ext cx="7632848" cy="756000"/>
+          </a:xfrm>
+        </p:spPr>
         <p:txBody>
-          <a:bodyPr/>
+          <a:bodyPr anchor="t" anchorCtr="0"/>
           <a:lstStyle/>
           <a:p>
             <a:r>
-              <a:rPr lang="de-AT" dirty="0" err="1" smtClean="0"/>
-              <a:t>Contact</a:t>
-            </a:r>
-            <a:r>
-              <a:rPr lang="de-AT" dirty="0" smtClean="0"/>
-              <a:t> </a:t>
-            </a:r>
-            <a:r>
-              <a:rPr lang="de-AT" dirty="0" err="1" smtClean="0"/>
-              <a:t>data</a:t>
+              <a:rPr lang="en-US" dirty="0" smtClean="0"/>
+              <a:t>VECTO Engine – </a:t>
+            </a:r>
+            <a:r>
+              <a:rPr lang="en-US" dirty="0" smtClean="0"/>
+              <a:t>E</a:t>
+            </a:r>
+            <a:r>
+              <a:rPr lang="en-US" dirty="0" smtClean="0"/>
+              <a:t>valuation algorithms</a:t>
+            </a:r>
+            <a:br>
+              <a:rPr lang="en-US" dirty="0" smtClean="0"/>
+            </a:br>
+            <a:r>
+              <a:rPr lang="en-US" dirty="0" smtClean="0"/>
+              <a:t>performed </a:t>
+            </a:r>
+            <a:r>
+              <a:rPr lang="en-US" dirty="0" smtClean="0"/>
+              <a:t>(</a:t>
+            </a:r>
+            <a:r>
+              <a:rPr lang="en-US" dirty="0" smtClean="0"/>
+              <a:t>p4/5)</a:t>
             </a:r>
             <a:endParaRPr lang="en-US" dirty="0"/>
           </a:p>
@@ -9964,89 +10459,314 @@
       </p:sp>
       <p:sp>
         <p:nvSpPr>
-          <p:cNvPr id="3" name="Inhaltsplatzhalter 2"/>
-          <p:cNvSpPr>
-            <a:spLocks noGrp="1"/>
-          </p:cNvSpPr>
-          <p:nvPr>
-            <p:ph idx="1"/>
-          </p:nvPr>
+          <p:cNvPr id="3" name="Rechteck 2"/>
+          <p:cNvSpPr/>
+          <p:nvPr/>
         </p:nvSpPr>
-        <p:spPr/>
+        <p:spPr>
+          <a:xfrm>
+            <a:off x="179512" y="1268760"/>
+            <a:ext cx="8784000" cy="4508927"/>
+          </a:xfrm>
+          <a:prstGeom prst="rect">
+            <a:avLst/>
+          </a:prstGeom>
+        </p:spPr>
         <p:txBody>
-          <a:bodyPr/>
+          <a:bodyPr wrap="square">
+            <a:spAutoFit/>
+          </a:bodyPr>
           <a:lstStyle/>
           <a:p>
-            <a:r>
-              <a:rPr lang="en-US" sz="1400" dirty="0"/>
-              <a:t>Please be aware that from now on all questions, user support and bug reports need to be handled via the </a:t>
-            </a:r>
-            <a:r>
-              <a:rPr lang="en-US" sz="1400" dirty="0" err="1"/>
-              <a:t>CITnet</a:t>
-            </a:r>
-            <a:r>
-              <a:rPr lang="en-US" sz="1400" dirty="0"/>
-              <a:t> service of the EU-COM</a:t>
-            </a:r>
-            <a:r>
-              <a:rPr lang="en-US" sz="1400" dirty="0" smtClean="0"/>
+            <a:pPr algn="l"/>
+            <a:r>
+              <a:rPr lang="en-GB" sz="1400" b="0" dirty="0"/>
+              <a:t>7.	Correction of FC values in FC map to standard NCV</a:t>
+            </a:r>
+            <a:endParaRPr lang="de-AT" sz="1400" b="0" dirty="0"/>
+          </a:p>
+          <a:p>
+            <a:pPr algn="l"/>
+            <a:r>
+              <a:rPr lang="en-GB" sz="1400" b="0" dirty="0"/>
+              <a:t>7.1.	This correction is performed in accordance with the equation in point (7.2)</a:t>
+            </a:r>
+            <a:endParaRPr lang="de-AT" sz="1400" b="0" dirty="0"/>
+          </a:p>
+          <a:p>
+            <a:pPr algn="l"/>
+            <a:r>
+              <a:rPr lang="en-GB" sz="1400" b="0" dirty="0"/>
+              <a:t>7.2.	</a:t>
+            </a:r>
+            <a:r>
+              <a:rPr lang="en-GB" sz="1400" b="0" dirty="0" err="1"/>
+              <a:t>FC</a:t>
+            </a:r>
+            <a:r>
+              <a:rPr lang="en-GB" sz="1400" b="0" baseline="-25000" dirty="0" err="1"/>
+              <a:t>corrected</a:t>
+            </a:r>
+            <a:r>
+              <a:rPr lang="en-GB" sz="1400" b="0" dirty="0"/>
+              <a:t> = </a:t>
+            </a:r>
+            <a:r>
+              <a:rPr lang="en-GB" sz="1400" b="0" dirty="0" err="1"/>
+              <a:t>FC</a:t>
+            </a:r>
+            <a:r>
+              <a:rPr lang="en-GB" sz="1400" b="0" baseline="-25000" dirty="0" err="1"/>
+              <a:t>measured,map</a:t>
+            </a:r>
+            <a:r>
+              <a:rPr lang="en-GB" sz="1400" b="0" dirty="0"/>
+              <a:t> x </a:t>
+            </a:r>
+            <a:r>
+              <a:rPr lang="en-GB" sz="1400" b="0" dirty="0" err="1"/>
+              <a:t>NCV</a:t>
+            </a:r>
+            <a:r>
+              <a:rPr lang="en-GB" sz="1400" b="0" baseline="-25000" dirty="0" err="1"/>
+              <a:t>meas</a:t>
+            </a:r>
+            <a:r>
+              <a:rPr lang="en-GB" sz="1400" b="0" dirty="0"/>
+              <a:t> / </a:t>
+            </a:r>
+            <a:r>
+              <a:rPr lang="en-GB" sz="1400" b="0" dirty="0" err="1"/>
+              <a:t>NVC</a:t>
+            </a:r>
+            <a:r>
+              <a:rPr lang="en-GB" sz="1400" b="0" baseline="-25000" dirty="0" err="1"/>
+              <a:t>std</a:t>
+            </a:r>
+            <a:endParaRPr lang="de-AT" sz="1400" b="0" dirty="0"/>
+          </a:p>
+          <a:p>
+            <a:pPr algn="l"/>
+            <a:r>
+              <a:rPr lang="en-GB" sz="1400" b="0" dirty="0"/>
+              <a:t>7.3.	</a:t>
+            </a:r>
+            <a:r>
+              <a:rPr lang="en-GB" sz="1400" b="0" dirty="0" err="1"/>
+              <a:t>FC</a:t>
+            </a:r>
+            <a:r>
+              <a:rPr lang="en-GB" sz="1400" b="0" baseline="-25000" dirty="0" err="1"/>
+              <a:t>measured,map</a:t>
+            </a:r>
+            <a:r>
+              <a:rPr lang="en-GB" sz="1400" b="0" dirty="0"/>
+              <a:t> shall be the FC value in the FC map input data processed in accordance with point (3)</a:t>
+            </a:r>
+            <a:endParaRPr lang="de-AT" sz="1400" b="0" dirty="0"/>
+          </a:p>
+          <a:p>
+            <a:pPr algn="l"/>
+            <a:r>
+              <a:rPr lang="en-GB" sz="1400" b="0" dirty="0"/>
+              <a:t>7.4.	</a:t>
+            </a:r>
+            <a:r>
+              <a:rPr lang="en-GB" sz="1400" b="0" dirty="0" err="1"/>
+              <a:t>NCV</a:t>
+            </a:r>
+            <a:r>
+              <a:rPr lang="en-GB" sz="1400" b="0" baseline="-25000" dirty="0" err="1"/>
+              <a:t>meas</a:t>
+            </a:r>
+            <a:r>
+              <a:rPr lang="en-GB" sz="1400" b="0" dirty="0"/>
+              <a:t> and </a:t>
+            </a:r>
+            <a:r>
+              <a:rPr lang="en-GB" sz="1400" b="0" dirty="0" err="1"/>
+              <a:t>NVC</a:t>
+            </a:r>
+            <a:r>
+              <a:rPr lang="en-GB" sz="1400" b="0" baseline="-25000" dirty="0" err="1"/>
+              <a:t>std</a:t>
+            </a:r>
+            <a:r>
+              <a:rPr lang="en-GB" sz="1400" b="0" dirty="0"/>
+              <a:t> shall be defined in accordance with paragraph 5.3.3.1 of this Annex</a:t>
+            </a:r>
+            <a:endParaRPr lang="de-AT" sz="1400" b="0" dirty="0"/>
+          </a:p>
+          <a:p>
+            <a:pPr algn="l"/>
+            <a:r>
+              <a:rPr lang="en-GB" sz="1400" b="0" dirty="0"/>
+              <a:t>7.5.	In the case that reference fuel of the type B7 (Diesel / CI) in accordance with paragraph 3.2 of </a:t>
+            </a:r>
+            <a:r>
+              <a:rPr lang="en-GB" sz="1400" b="0" dirty="0" smtClean="0"/>
+              <a:t>this</a:t>
+            </a:r>
+            <a:br>
+              <a:rPr lang="en-GB" sz="1400" b="0" dirty="0" smtClean="0"/>
+            </a:br>
+            <a:r>
+              <a:rPr lang="en-GB" sz="1400" b="0" dirty="0" smtClean="0"/>
+              <a:t>	Annex </a:t>
+            </a:r>
+            <a:r>
+              <a:rPr lang="en-GB" sz="1400" b="0" dirty="0"/>
+              <a:t>was used during testing, the correction in accordance with points (7.1) to (7.4) is </a:t>
+            </a:r>
+            <a:r>
+              <a:rPr lang="en-GB" sz="1400" b="0" dirty="0" smtClean="0"/>
+              <a:t>not</a:t>
+            </a:r>
+            <a:br>
+              <a:rPr lang="en-GB" sz="1400" b="0" dirty="0" smtClean="0"/>
+            </a:br>
+            <a:r>
+              <a:rPr lang="en-GB" sz="1400" b="0" dirty="0" smtClean="0"/>
+              <a:t>	performed</a:t>
+            </a:r>
+            <a:r>
+              <a:rPr lang="en-GB" sz="1400" b="0" dirty="0"/>
               <a:t>.</a:t>
             </a:r>
-          </a:p>
-          <a:p>
-            <a:endParaRPr lang="en-US" sz="1400" dirty="0"/>
-          </a:p>
-          <a:p>
-            <a:r>
-              <a:rPr lang="en-US" sz="1400" dirty="0"/>
-              <a:t>Also future updates of the tool will be released only via this platform (</a:t>
-            </a:r>
-            <a:r>
-              <a:rPr lang="en-US" sz="1400" u="sng" dirty="0">
-                <a:hlinkClick r:id="rId2"/>
-              </a:rPr>
-              <a:t>https://webgate.ec.europa.eu/CITnet/confluence/display/VECTO/vecto-engine+releases</a:t>
-            </a:r>
-            <a:r>
-              <a:rPr lang="en-US" sz="1400" dirty="0" smtClean="0"/>
-              <a:t>).</a:t>
-            </a:r>
-          </a:p>
-          <a:p>
-            <a:endParaRPr lang="en-US" sz="1400" dirty="0"/>
-          </a:p>
-          <a:p>
-            <a:r>
-              <a:rPr lang="en-US" sz="1400" dirty="0"/>
-              <a:t>If you do not already have an account for this service please </a:t>
-            </a:r>
-            <a:r>
-              <a:rPr lang="en-US" sz="1400"/>
-              <a:t>contact </a:t>
-            </a:r>
-            <a:r>
-              <a:rPr lang="en-US" sz="1400" u="sng">
-                <a:solidFill>
-                  <a:srgbClr val="00DAB0"/>
-                </a:solidFill>
-              </a:rPr>
-              <a:t>jrc-vecto@ec.europa.eu</a:t>
-            </a:r>
-            <a:r>
-              <a:rPr lang="en-US" sz="1400" smtClean="0"/>
-              <a:t>.</a:t>
-            </a:r>
-            <a:endParaRPr lang="en-US" sz="1400" dirty="0" smtClean="0">
-              <a:latin typeface="Helvetica" pitchFamily="34" charset="0"/>
-            </a:endParaRPr>
+            <a:endParaRPr lang="de-AT" sz="1400" b="0" dirty="0"/>
+          </a:p>
+          <a:p>
+            <a:pPr algn="l"/>
+            <a:r>
+              <a:rPr lang="en-GB" sz="1400" b="0" dirty="0"/>
+              <a:t>8.	Converting of engine full load and motoring torque values of the actual engine for certification to </a:t>
+            </a:r>
+            <a:r>
+              <a:rPr lang="en-GB" sz="1400" b="0" dirty="0" smtClean="0"/>
+              <a:t>a</a:t>
+            </a:r>
+            <a:br>
+              <a:rPr lang="en-GB" sz="1400" b="0" dirty="0" smtClean="0"/>
+            </a:br>
+            <a:r>
+              <a:rPr lang="en-GB" sz="1400" b="0" dirty="0" smtClean="0"/>
+              <a:t>	logging </a:t>
+            </a:r>
+            <a:r>
+              <a:rPr lang="en-GB" sz="1400" b="0" dirty="0"/>
+              <a:t>frequency of the engine speed of 8 min</a:t>
+            </a:r>
+            <a:r>
+              <a:rPr lang="en-GB" sz="1400" b="0" baseline="30000" dirty="0"/>
+              <a:t>-1</a:t>
+            </a:r>
+            <a:endParaRPr lang="de-AT" sz="1400" b="0" dirty="0"/>
+          </a:p>
+          <a:p>
+            <a:pPr algn="l"/>
+            <a:r>
+              <a:rPr lang="en-GB" sz="1400" b="0" dirty="0"/>
+              <a:t>8.1.	If the average logging frequency of the engine speed of the originally recorded full load curve </a:t>
+            </a:r>
+            <a:r>
+              <a:rPr lang="en-GB" sz="1400" b="0" dirty="0" smtClean="0"/>
+              <a:t>is</a:t>
+            </a:r>
+            <a:br>
+              <a:rPr lang="en-GB" sz="1400" b="0" dirty="0" smtClean="0"/>
+            </a:br>
+            <a:r>
+              <a:rPr lang="en-GB" sz="1400" b="0" dirty="0" smtClean="0"/>
+              <a:t>	smaller </a:t>
+            </a:r>
+            <a:r>
+              <a:rPr lang="en-GB" sz="1400" b="0" dirty="0"/>
+              <a:t>than 6, the conversion is performed by arithmetical averaging over intervals of ± 4 min</a:t>
+            </a:r>
+            <a:r>
+              <a:rPr lang="en-GB" sz="1400" b="0" baseline="30000" dirty="0"/>
+              <a:t>-1</a:t>
+            </a:r>
+            <a:r>
+              <a:rPr lang="en-GB" sz="1400" b="0" dirty="0"/>
+              <a:t> </a:t>
+            </a:r>
+            <a:r>
+              <a:rPr lang="en-GB" sz="1400" b="0" dirty="0" smtClean="0"/>
+              <a:t>of</a:t>
+            </a:r>
+            <a:br>
+              <a:rPr lang="en-GB" sz="1400" b="0" dirty="0" smtClean="0"/>
+            </a:br>
+            <a:r>
+              <a:rPr lang="en-GB" sz="1400" b="0" dirty="0" smtClean="0"/>
+              <a:t>	the </a:t>
+            </a:r>
+            <a:r>
+              <a:rPr lang="en-GB" sz="1400" b="0" dirty="0"/>
+              <a:t>given </a:t>
+            </a:r>
+            <a:r>
+              <a:rPr lang="en-GB" sz="1400" b="0" dirty="0" err="1"/>
+              <a:t>setpoint</a:t>
+            </a:r>
+            <a:r>
+              <a:rPr lang="en-GB" sz="1400" b="0" dirty="0"/>
+              <a:t> for the output data based on the full load curve input in originally </a:t>
+            </a:r>
+            <a:r>
+              <a:rPr lang="en-GB" sz="1400" b="0" dirty="0" smtClean="0"/>
+              <a:t>recorded</a:t>
+            </a:r>
+            <a:br>
+              <a:rPr lang="en-GB" sz="1400" b="0" dirty="0" smtClean="0"/>
+            </a:br>
+            <a:r>
+              <a:rPr lang="en-GB" sz="1400" b="0" dirty="0" smtClean="0"/>
+              <a:t>	resolution</a:t>
+            </a:r>
+            <a:r>
+              <a:rPr lang="en-GB" sz="1400" b="0" dirty="0"/>
+              <a:t>. If the average logging frequency of the engine speed of the originally recorded full </a:t>
+            </a:r>
+            <a:r>
+              <a:rPr lang="en-GB" sz="1400" b="0" dirty="0" smtClean="0"/>
+              <a:t>load</a:t>
+            </a:r>
+            <a:br>
+              <a:rPr lang="en-GB" sz="1400" b="0" dirty="0" smtClean="0"/>
+            </a:br>
+            <a:r>
+              <a:rPr lang="en-GB" sz="1400" b="0" dirty="0" smtClean="0"/>
+              <a:t>	curve </a:t>
+            </a:r>
+            <a:r>
+              <a:rPr lang="en-GB" sz="1400" b="0" dirty="0"/>
+              <a:t>is greater than or equal to 6, the conversion is performed by linear interpolation based </a:t>
+            </a:r>
+            <a:r>
+              <a:rPr lang="en-GB" sz="1400" b="0" dirty="0" smtClean="0"/>
+              <a:t>on</a:t>
+            </a:r>
+            <a:br>
+              <a:rPr lang="en-GB" sz="1400" b="0" dirty="0" smtClean="0"/>
+            </a:br>
+            <a:r>
+              <a:rPr lang="en-GB" sz="1400" b="0" dirty="0" smtClean="0"/>
+              <a:t>	the full </a:t>
+            </a:r>
+            <a:r>
+              <a:rPr lang="en-GB" sz="1400" b="0" dirty="0"/>
+              <a:t>load curve input in originally recorded resolution.</a:t>
+            </a:r>
+            <a:endParaRPr lang="de-AT" sz="1400" b="0" dirty="0"/>
           </a:p>
         </p:txBody>
       </p:sp>
     </p:spTree>
     <p:extLst>
       <p:ext uri="{BB962C8B-B14F-4D97-AF65-F5344CB8AC3E}">
-        <p14:creationId xmlns:p14="http://schemas.microsoft.com/office/powerpoint/2010/main" val="624056410"/>
+        <p14:creationId xmlns:p14="http://schemas.microsoft.com/office/powerpoint/2010/main" val="1299610377"/>
       </p:ext>
     </p:extLst>
   </p:cSld>

--- a/Documentation/TUG_VECTO_Engine_Manual.pptx
+++ b/Documentation/TUG_VECTO_Engine_Manual.pptx
@@ -5,24 +5,22 @@
     <p:sldMasterId id="2147483648" r:id="rId1"/>
   </p:sldMasterIdLst>
   <p:notesMasterIdLst>
-    <p:notesMasterId r:id="rId14"/>
+    <p:notesMasterId r:id="rId12"/>
   </p:notesMasterIdLst>
   <p:handoutMasterIdLst>
-    <p:handoutMasterId r:id="rId15"/>
+    <p:handoutMasterId r:id="rId13"/>
   </p:handoutMasterIdLst>
   <p:sldIdLst>
     <p:sldId id="497" r:id="rId2"/>
     <p:sldId id="546" r:id="rId3"/>
-    <p:sldId id="585" r:id="rId4"/>
-    <p:sldId id="578" r:id="rId5"/>
-    <p:sldId id="579" r:id="rId6"/>
-    <p:sldId id="580" r:id="rId7"/>
-    <p:sldId id="586" r:id="rId8"/>
-    <p:sldId id="587" r:id="rId9"/>
-    <p:sldId id="588" r:id="rId10"/>
-    <p:sldId id="589" r:id="rId11"/>
-    <p:sldId id="590" r:id="rId12"/>
-    <p:sldId id="582" r:id="rId13"/>
+    <p:sldId id="591" r:id="rId4"/>
+    <p:sldId id="585" r:id="rId5"/>
+    <p:sldId id="578" r:id="rId6"/>
+    <p:sldId id="579" r:id="rId7"/>
+    <p:sldId id="580" r:id="rId8"/>
+    <p:sldId id="589" r:id="rId9"/>
+    <p:sldId id="590" r:id="rId10"/>
+    <p:sldId id="582" r:id="rId11"/>
   </p:sldIdLst>
   <p:sldSz cx="9144000" cy="6858000" type="screen4x3"/>
   <p:notesSz cx="7104063" cy="10234613"/>
@@ -1229,108 +1227,6 @@
 </p:notes>
 </file>
 
-<file path=ppt/notesSlides/notesSlide10.xml><?xml version="1.0" encoding="utf-8"?>
-<p:notes xmlns:a="http://schemas.openxmlformats.org/drawingml/2006/main" xmlns:r="http://schemas.openxmlformats.org/officeDocument/2006/relationships" xmlns:p="http://schemas.openxmlformats.org/presentationml/2006/main">
-  <p:cSld>
-    <p:spTree>
-      <p:nvGrpSpPr>
-        <p:cNvPr id="1" name=""/>
-        <p:cNvGrpSpPr/>
-        <p:nvPr/>
-      </p:nvGrpSpPr>
-      <p:grpSpPr>
-        <a:xfrm>
-          <a:off x="0" y="0"/>
-          <a:ext cx="0" cy="0"/>
-          <a:chOff x="0" y="0"/>
-          <a:chExt cx="0" cy="0"/>
-        </a:xfrm>
-      </p:grpSpPr>
-      <p:sp>
-        <p:nvSpPr>
-          <p:cNvPr id="2" name="Folienbildplatzhalter 1"/>
-          <p:cNvSpPr>
-            <a:spLocks noGrp="1" noRot="1" noChangeAspect="1"/>
-          </p:cNvSpPr>
-          <p:nvPr>
-            <p:ph type="sldImg"/>
-          </p:nvPr>
-        </p:nvSpPr>
-        <p:spPr/>
-      </p:sp>
-      <p:sp>
-        <p:nvSpPr>
-          <p:cNvPr id="3" name="Notizenplatzhalter 2"/>
-          <p:cNvSpPr>
-            <a:spLocks noGrp="1"/>
-          </p:cNvSpPr>
-          <p:nvPr>
-            <p:ph type="body" idx="1"/>
-          </p:nvPr>
-        </p:nvSpPr>
-        <p:spPr/>
-        <p:txBody>
-          <a:bodyPr/>
-          <a:lstStyle/>
-          <a:p>
-            <a:r>
-              <a:rPr lang="en-US" smtClean="0"/>
-              <a:t>Example for warnings:</a:t>
-            </a:r>
-          </a:p>
-          <a:p>
-            <a:r>
-              <a:rPr lang="en-US" smtClean="0"/>
-              <a:t>Significant drop</a:t>
-            </a:r>
-            <a:r>
-              <a:rPr lang="en-US" baseline="0" smtClean="0"/>
-              <a:t> of torque in fld recording (might be not reasonable at low speeds, might be reasonable at n&gt;hi) </a:t>
-            </a:r>
-            <a:endParaRPr lang="en-US" dirty="0" smtClean="0"/>
-          </a:p>
-          <a:p>
-            <a:endParaRPr lang="en-US" dirty="0" smtClean="0"/>
-          </a:p>
-        </p:txBody>
-      </p:sp>
-      <p:sp>
-        <p:nvSpPr>
-          <p:cNvPr id="4" name="Foliennummernplatzhalter 3"/>
-          <p:cNvSpPr>
-            <a:spLocks noGrp="1"/>
-          </p:cNvSpPr>
-          <p:nvPr>
-            <p:ph type="sldNum" sz="quarter" idx="10"/>
-          </p:nvPr>
-        </p:nvSpPr>
-        <p:spPr/>
-        <p:txBody>
-          <a:bodyPr/>
-          <a:lstStyle/>
-          <a:p>
-            <a:fld id="{220961ED-B8B5-4C64-9727-6F12A830C91B}" type="slidenum">
-              <a:rPr lang="en-GB" altLang="en-US" smtClean="0"/>
-              <a:pPr/>
-              <a:t>11</a:t>
-            </a:fld>
-            <a:endParaRPr lang="en-GB" altLang="en-US"/>
-          </a:p>
-        </p:txBody>
-      </p:sp>
-    </p:spTree>
-    <p:extLst>
-      <p:ext uri="{BB962C8B-B14F-4D97-AF65-F5344CB8AC3E}">
-        <p14:creationId xmlns:p14="http://schemas.microsoft.com/office/powerpoint/2010/main" val="2705255660"/>
-      </p:ext>
-    </p:extLst>
-  </p:cSld>
-  <p:clrMapOvr>
-    <a:masterClrMapping/>
-  </p:clrMapOvr>
-</p:notes>
-</file>
-
 <file path=ppt/notesSlides/notesSlide2.xml><?xml version="1.0" encoding="utf-8"?>
 <p:notes xmlns:a="http://schemas.openxmlformats.org/drawingml/2006/main" xmlns:r="http://schemas.openxmlformats.org/officeDocument/2006/relationships" xmlns:p="http://schemas.openxmlformats.org/presentationml/2006/main">
   <p:cSld>
@@ -1375,10 +1271,7 @@
           <a:bodyPr/>
           <a:lstStyle/>
           <a:p>
-            <a:endParaRPr lang="en-US" dirty="0" smtClean="0"/>
-          </a:p>
-          <a:p>
-            <a:endParaRPr lang="en-US" dirty="0" smtClean="0"/>
+            <a:endParaRPr lang="de-AT" dirty="0"/>
           </a:p>
         </p:txBody>
       </p:sp>
@@ -1397,19 +1290,24 @@
           <a:bodyPr/>
           <a:lstStyle/>
           <a:p>
-            <a:fld id="{220961ED-B8B5-4C64-9727-6F12A830C91B}" type="slidenum">
-              <a:rPr lang="en-GB" altLang="en-US" smtClean="0"/>
-              <a:pPr/>
+            <a:pPr>
+              <a:defRPr/>
+            </a:pPr>
+            <a:fld id="{8335CF79-0E4B-49EE-B3D5-651E591A0B85}" type="slidenum">
+              <a:rPr lang="de-AT" smtClean="0"/>
+              <a:pPr>
+                <a:defRPr/>
+              </a:pPr>
               <a:t>3</a:t>
             </a:fld>
-            <a:endParaRPr lang="en-GB" altLang="en-US"/>
+            <a:endParaRPr lang="de-AT"/>
           </a:p>
         </p:txBody>
       </p:sp>
     </p:spTree>
     <p:extLst>
       <p:ext uri="{BB962C8B-B14F-4D97-AF65-F5344CB8AC3E}">
-        <p14:creationId xmlns:p14="http://schemas.microsoft.com/office/powerpoint/2010/main" val="4196098432"/>
+        <p14:creationId xmlns:p14="http://schemas.microsoft.com/office/powerpoint/2010/main" val="3165558035"/>
       </p:ext>
     </p:extLst>
   </p:cSld>
@@ -1463,7 +1361,10 @@
           <a:bodyPr/>
           <a:lstStyle/>
           <a:p>
-            <a:endParaRPr lang="de-AT"/>
+            <a:endParaRPr lang="en-US" dirty="0" smtClean="0"/>
+          </a:p>
+          <a:p>
+            <a:endParaRPr lang="en-US" dirty="0" smtClean="0"/>
           </a:p>
         </p:txBody>
       </p:sp>
@@ -1482,24 +1383,19 @@
           <a:bodyPr/>
           <a:lstStyle/>
           <a:p>
-            <a:pPr>
-              <a:defRPr/>
-            </a:pPr>
-            <a:fld id="{8335CF79-0E4B-49EE-B3D5-651E591A0B85}" type="slidenum">
-              <a:rPr lang="de-AT" smtClean="0"/>
-              <a:pPr>
-                <a:defRPr/>
-              </a:pPr>
+            <a:fld id="{220961ED-B8B5-4C64-9727-6F12A830C91B}" type="slidenum">
+              <a:rPr lang="en-GB" altLang="en-US" smtClean="0"/>
+              <a:pPr/>
               <a:t>4</a:t>
             </a:fld>
-            <a:endParaRPr lang="de-AT"/>
+            <a:endParaRPr lang="en-GB" altLang="en-US"/>
           </a:p>
         </p:txBody>
       </p:sp>
     </p:spTree>
     <p:extLst>
       <p:ext uri="{BB962C8B-B14F-4D97-AF65-F5344CB8AC3E}">
-        <p14:creationId xmlns:p14="http://schemas.microsoft.com/office/powerpoint/2010/main" val="2688864577"/>
+        <p14:creationId xmlns:p14="http://schemas.microsoft.com/office/powerpoint/2010/main" val="4196098432"/>
       </p:ext>
     </p:extLst>
   </p:cSld>
@@ -1769,7 +1665,7 @@
     </p:spTree>
     <p:extLst>
       <p:ext uri="{BB962C8B-B14F-4D97-AF65-F5344CB8AC3E}">
-        <p14:creationId xmlns:p14="http://schemas.microsoft.com/office/powerpoint/2010/main" val="3092310421"/>
+        <p14:creationId xmlns:p14="http://schemas.microsoft.com/office/powerpoint/2010/main" val="2688864577"/>
       </p:ext>
     </p:extLst>
   </p:cSld>
@@ -1859,7 +1755,7 @@
     </p:spTree>
     <p:extLst>
       <p:ext uri="{BB962C8B-B14F-4D97-AF65-F5344CB8AC3E}">
-        <p14:creationId xmlns:p14="http://schemas.microsoft.com/office/powerpoint/2010/main" val="442249886"/>
+        <p14:creationId xmlns:p14="http://schemas.microsoft.com/office/powerpoint/2010/main" val="2569165950"/>
       </p:ext>
     </p:extLst>
   </p:cSld>
@@ -1913,7 +1809,24 @@
           <a:bodyPr/>
           <a:lstStyle/>
           <a:p>
-            <a:endParaRPr lang="de-AT"/>
+            <a:r>
+              <a:rPr lang="en-US" smtClean="0"/>
+              <a:t>Example for warnings:</a:t>
+            </a:r>
+          </a:p>
+          <a:p>
+            <a:r>
+              <a:rPr lang="en-US" smtClean="0"/>
+              <a:t>Significant drop</a:t>
+            </a:r>
+            <a:r>
+              <a:rPr lang="en-US" baseline="0" smtClean="0"/>
+              <a:t> of torque in fld recording (might be not reasonable at low speeds, might be reasonable at n&gt;hi) </a:t>
+            </a:r>
+            <a:endParaRPr lang="en-US" dirty="0" smtClean="0"/>
+          </a:p>
+          <a:p>
+            <a:endParaRPr lang="en-US" dirty="0" smtClean="0"/>
           </a:p>
         </p:txBody>
       </p:sp>
@@ -1932,114 +1845,19 @@
           <a:bodyPr/>
           <a:lstStyle/>
           <a:p>
-            <a:pPr>
-              <a:defRPr/>
-            </a:pPr>
-            <a:fld id="{8335CF79-0E4B-49EE-B3D5-651E591A0B85}" type="slidenum">
-              <a:rPr lang="de-AT" smtClean="0"/>
-              <a:pPr>
-                <a:defRPr/>
-              </a:pPr>
+            <a:fld id="{220961ED-B8B5-4C64-9727-6F12A830C91B}" type="slidenum">
+              <a:rPr lang="en-GB" altLang="en-US" smtClean="0"/>
+              <a:pPr/>
               <a:t>9</a:t>
             </a:fld>
-            <a:endParaRPr lang="de-AT"/>
+            <a:endParaRPr lang="en-GB" altLang="en-US"/>
           </a:p>
         </p:txBody>
       </p:sp>
     </p:spTree>
     <p:extLst>
       <p:ext uri="{BB962C8B-B14F-4D97-AF65-F5344CB8AC3E}">
-        <p14:creationId xmlns:p14="http://schemas.microsoft.com/office/powerpoint/2010/main" val="3664620962"/>
-      </p:ext>
-    </p:extLst>
-  </p:cSld>
-  <p:clrMapOvr>
-    <a:masterClrMapping/>
-  </p:clrMapOvr>
-</p:notes>
-</file>
-
-<file path=ppt/notesSlides/notesSlide9.xml><?xml version="1.0" encoding="utf-8"?>
-<p:notes xmlns:a="http://schemas.openxmlformats.org/drawingml/2006/main" xmlns:r="http://schemas.openxmlformats.org/officeDocument/2006/relationships" xmlns:p="http://schemas.openxmlformats.org/presentationml/2006/main">
-  <p:cSld>
-    <p:spTree>
-      <p:nvGrpSpPr>
-        <p:cNvPr id="1" name=""/>
-        <p:cNvGrpSpPr/>
-        <p:nvPr/>
-      </p:nvGrpSpPr>
-      <p:grpSpPr>
-        <a:xfrm>
-          <a:off x="0" y="0"/>
-          <a:ext cx="0" cy="0"/>
-          <a:chOff x="0" y="0"/>
-          <a:chExt cx="0" cy="0"/>
-        </a:xfrm>
-      </p:grpSpPr>
-      <p:sp>
-        <p:nvSpPr>
-          <p:cNvPr id="2" name="Folienbildplatzhalter 1"/>
-          <p:cNvSpPr>
-            <a:spLocks noGrp="1" noRot="1" noChangeAspect="1"/>
-          </p:cNvSpPr>
-          <p:nvPr>
-            <p:ph type="sldImg"/>
-          </p:nvPr>
-        </p:nvSpPr>
-        <p:spPr/>
-      </p:sp>
-      <p:sp>
-        <p:nvSpPr>
-          <p:cNvPr id="3" name="Notizenplatzhalter 2"/>
-          <p:cNvSpPr>
-            <a:spLocks noGrp="1"/>
-          </p:cNvSpPr>
-          <p:nvPr>
-            <p:ph type="body" idx="1"/>
-          </p:nvPr>
-        </p:nvSpPr>
-        <p:spPr/>
-        <p:txBody>
-          <a:bodyPr/>
-          <a:lstStyle/>
-          <a:p>
-            <a:endParaRPr lang="de-AT"/>
-          </a:p>
-        </p:txBody>
-      </p:sp>
-      <p:sp>
-        <p:nvSpPr>
-          <p:cNvPr id="4" name="Foliennummernplatzhalter 3"/>
-          <p:cNvSpPr>
-            <a:spLocks noGrp="1"/>
-          </p:cNvSpPr>
-          <p:nvPr>
-            <p:ph type="sldNum" sz="quarter" idx="10"/>
-          </p:nvPr>
-        </p:nvSpPr>
-        <p:spPr/>
-        <p:txBody>
-          <a:bodyPr/>
-          <a:lstStyle/>
-          <a:p>
-            <a:pPr>
-              <a:defRPr/>
-            </a:pPr>
-            <a:fld id="{8335CF79-0E4B-49EE-B3D5-651E591A0B85}" type="slidenum">
-              <a:rPr lang="de-AT" smtClean="0"/>
-              <a:pPr>
-                <a:defRPr/>
-              </a:pPr>
-              <a:t>10</a:t>
-            </a:fld>
-            <a:endParaRPr lang="de-AT"/>
-          </a:p>
-        </p:txBody>
-      </p:sp>
-    </p:spTree>
-    <p:extLst>
-      <p:ext uri="{BB962C8B-B14F-4D97-AF65-F5344CB8AC3E}">
-        <p14:creationId xmlns:p14="http://schemas.microsoft.com/office/powerpoint/2010/main" val="2569165950"/>
+        <p14:creationId xmlns:p14="http://schemas.microsoft.com/office/powerpoint/2010/main" val="2705255660"/>
       </p:ext>
     </p:extLst>
   </p:cSld>
@@ -4963,8 +4781,12 @@
           <a:p>
             <a:pPr algn="ctr"/>
             <a:r>
+              <a:rPr lang="en-US" sz="2800" dirty="0"/>
+              <a:t>VECTO Engine pre-processing tool</a:t>
+            </a:r>
+            <a:r>
               <a:rPr lang="en-US" sz="2800" dirty="0" smtClean="0"/>
-              <a:t>VECTO Engine</a:t>
+              <a:t/>
             </a:r>
             <a:br>
               <a:rPr lang="en-US" sz="2800" dirty="0" smtClean="0"/>
@@ -5017,17 +4839,8 @@
               <a:rPr lang="en-US" sz="2400" dirty="0" smtClean="0">
                 <a:sym typeface="Wingdings" panose="05000000000000000000" pitchFamily="2" charset="2"/>
               </a:rPr>
-              <a:t>App Version 1.4</a:t>
-            </a:r>
-            <a:r>
-              <a:rPr lang="en-US" sz="2400" dirty="0" smtClean="0">
-                <a:sym typeface="Wingdings" panose="05000000000000000000" pitchFamily="2" charset="2"/>
-              </a:rPr>
-              <a:t>.*</a:t>
-            </a:r>
-            <a:endParaRPr lang="en-US" sz="2400" dirty="0" smtClean="0">
-              <a:sym typeface="Wingdings" panose="05000000000000000000" pitchFamily="2" charset="2"/>
-            </a:endParaRPr>
+              <a:t>App Version 1.5.*</a:t>
+            </a:r>
           </a:p>
           <a:p>
             <a:pPr>
@@ -5042,7 +4855,7 @@
               <a:rPr lang="en-US" sz="1800" dirty="0" smtClean="0">
                 <a:sym typeface="Wingdings" panose="05000000000000000000" pitchFamily="2" charset="2"/>
               </a:rPr>
-              <a:t>20.12.2018</a:t>
+              <a:t>17.12.2019</a:t>
             </a:r>
           </a:p>
         </p:txBody>
@@ -5158,627 +4971,6 @@
             <p:ph type="title"/>
           </p:nvPr>
         </p:nvSpPr>
-        <p:spPr>
-          <a:xfrm>
-            <a:off x="468000" y="153844"/>
-            <a:ext cx="7632848" cy="756000"/>
-          </a:xfrm>
-        </p:spPr>
-        <p:txBody>
-          <a:bodyPr anchor="t" anchorCtr="0"/>
-          <a:lstStyle/>
-          <a:p>
-            <a:r>
-              <a:rPr lang="en-US" dirty="0" smtClean="0"/>
-              <a:t>VECTO Engine – </a:t>
-            </a:r>
-            <a:r>
-              <a:rPr lang="en-US" dirty="0" smtClean="0"/>
-              <a:t>E</a:t>
-            </a:r>
-            <a:r>
-              <a:rPr lang="en-US" dirty="0" smtClean="0"/>
-              <a:t>valuation algorithms</a:t>
-            </a:r>
-            <a:br>
-              <a:rPr lang="en-US" dirty="0" smtClean="0"/>
-            </a:br>
-            <a:r>
-              <a:rPr lang="en-US" dirty="0" smtClean="0"/>
-              <a:t>performed </a:t>
-            </a:r>
-            <a:r>
-              <a:rPr lang="en-US" dirty="0" smtClean="0"/>
-              <a:t>(</a:t>
-            </a:r>
-            <a:r>
-              <a:rPr lang="en-US" dirty="0" smtClean="0"/>
-              <a:t>p5/5)</a:t>
-            </a:r>
-            <a:endParaRPr lang="en-US" dirty="0"/>
-          </a:p>
-        </p:txBody>
-      </p:sp>
-      <p:sp>
-        <p:nvSpPr>
-          <p:cNvPr id="3" name="Rechteck 2"/>
-          <p:cNvSpPr/>
-          <p:nvPr/>
-        </p:nvSpPr>
-        <p:spPr>
-          <a:xfrm>
-            <a:off x="360000" y="1268760"/>
-            <a:ext cx="8388000" cy="338554"/>
-          </a:xfrm>
-          <a:prstGeom prst="rect">
-            <a:avLst/>
-          </a:prstGeom>
-        </p:spPr>
-        <p:txBody>
-          <a:bodyPr wrap="square">
-            <a:spAutoFit/>
-          </a:bodyPr>
-          <a:lstStyle/>
-          <a:p>
-            <a:pPr algn="l"/>
-            <a:r>
-              <a:rPr lang="en-US" b="0" dirty="0">
-                <a:latin typeface="Helvetica" panose="020B0604020202020204" pitchFamily="34" charset="0"/>
-                <a:cs typeface="Helvetica" panose="020B0604020202020204" pitchFamily="34" charset="0"/>
-              </a:rPr>
-              <a:t>Example of data processing through VECTO Engine for FC map</a:t>
-            </a:r>
-            <a:endParaRPr lang="de-AT" b="0" dirty="0">
-              <a:latin typeface="Helvetica" panose="020B0604020202020204" pitchFamily="34" charset="0"/>
-              <a:cs typeface="Helvetica" panose="020B0604020202020204" pitchFamily="34" charset="0"/>
-            </a:endParaRPr>
-          </a:p>
-        </p:txBody>
-      </p:sp>
-      <p:pic>
-        <p:nvPicPr>
-          <p:cNvPr id="4" name="Grafik 3"/>
-          <p:cNvPicPr>
-            <a:picLocks noChangeAspect="1"/>
-          </p:cNvPicPr>
-          <p:nvPr/>
-        </p:nvPicPr>
-        <p:blipFill>
-          <a:blip r:embed="rId3"/>
-          <a:stretch>
-            <a:fillRect/>
-          </a:stretch>
-        </p:blipFill>
-        <p:spPr>
-          <a:xfrm>
-            <a:off x="468000" y="1751330"/>
-            <a:ext cx="8554438" cy="3981926"/>
-          </a:xfrm>
-          <a:prstGeom prst="rect">
-            <a:avLst/>
-          </a:prstGeom>
-        </p:spPr>
-      </p:pic>
-    </p:spTree>
-    <p:extLst>
-      <p:ext uri="{BB962C8B-B14F-4D97-AF65-F5344CB8AC3E}">
-        <p14:creationId xmlns:p14="http://schemas.microsoft.com/office/powerpoint/2010/main" val="759407332"/>
-      </p:ext>
-    </p:extLst>
-  </p:cSld>
-  <p:clrMapOvr>
-    <a:masterClrMapping/>
-  </p:clrMapOvr>
-  <p:timing>
-    <p:tnLst>
-      <p:par>
-        <p:cTn id="1" dur="indefinite" restart="never" nodeType="tmRoot"/>
-      </p:par>
-    </p:tnLst>
-  </p:timing>
-</p:sld>
-</file>
-
-<file path=ppt/slides/slide11.xml><?xml version="1.0" encoding="utf-8"?>
-<p:sld xmlns:a="http://schemas.openxmlformats.org/drawingml/2006/main" xmlns:r="http://schemas.openxmlformats.org/officeDocument/2006/relationships" xmlns:p="http://schemas.openxmlformats.org/presentationml/2006/main">
-  <p:cSld>
-    <p:spTree>
-      <p:nvGrpSpPr>
-        <p:cNvPr id="1" name=""/>
-        <p:cNvGrpSpPr/>
-        <p:nvPr/>
-      </p:nvGrpSpPr>
-      <p:grpSpPr>
-        <a:xfrm>
-          <a:off x="0" y="0"/>
-          <a:ext cx="0" cy="0"/>
-          <a:chOff x="0" y="0"/>
-          <a:chExt cx="0" cy="0"/>
-        </a:xfrm>
-      </p:grpSpPr>
-      <p:sp>
-        <p:nvSpPr>
-          <p:cNvPr id="2" name="Titel 1"/>
-          <p:cNvSpPr>
-            <a:spLocks noGrp="1"/>
-          </p:cNvSpPr>
-          <p:nvPr>
-            <p:ph type="title"/>
-          </p:nvPr>
-        </p:nvSpPr>
-        <p:spPr>
-          <a:xfrm>
-            <a:off x="468000" y="97200"/>
-            <a:ext cx="7886700" cy="576000"/>
-          </a:xfrm>
-        </p:spPr>
-        <p:txBody>
-          <a:bodyPr anchor="ctr" anchorCtr="0">
-            <a:normAutofit/>
-          </a:bodyPr>
-          <a:lstStyle/>
-          <a:p>
-            <a:r>
-              <a:rPr lang="en-US" dirty="0"/>
-              <a:t>VECTO </a:t>
-            </a:r>
-            <a:r>
-              <a:rPr lang="en-US" dirty="0" smtClean="0"/>
-              <a:t>Engine </a:t>
-            </a:r>
-            <a:r>
-              <a:rPr lang="en-US" dirty="0"/>
-              <a:t>– Further important </a:t>
-            </a:r>
-            <a:r>
-              <a:rPr lang="en-US" dirty="0" smtClean="0"/>
-              <a:t>remarks</a:t>
-            </a:r>
-            <a:endParaRPr lang="en-US" dirty="0"/>
-          </a:p>
-        </p:txBody>
-      </p:sp>
-      <p:sp>
-        <p:nvSpPr>
-          <p:cNvPr id="3" name="Textfeld 2"/>
-          <p:cNvSpPr txBox="1"/>
-          <p:nvPr/>
-        </p:nvSpPr>
-        <p:spPr>
-          <a:xfrm>
-            <a:off x="467544" y="1267200"/>
-            <a:ext cx="8280920" cy="3754874"/>
-          </a:xfrm>
-          <a:prstGeom prst="rect">
-            <a:avLst/>
-          </a:prstGeom>
-          <a:noFill/>
-        </p:spPr>
-        <p:txBody>
-          <a:bodyPr wrap="square" rtlCol="0">
-            <a:spAutoFit/>
-          </a:bodyPr>
-          <a:lstStyle/>
-          <a:p>
-            <a:pPr marL="342900" indent="-342900" algn="l">
-              <a:lnSpc>
-                <a:spcPct val="115000"/>
-              </a:lnSpc>
-              <a:spcBef>
-                <a:spcPts val="600"/>
-              </a:spcBef>
-              <a:buFont typeface="Wingdings" panose="05000000000000000000" pitchFamily="2" charset="2"/>
-              <a:buChar char="§"/>
-            </a:pPr>
-            <a:r>
-              <a:rPr lang="en-US" b="0" dirty="0" smtClean="0">
-                <a:latin typeface="Helvetica" panose="020B0604020202020204" pitchFamily="34" charset="0"/>
-                <a:ea typeface="Times" panose="02020603060405020304" pitchFamily="18" charset="0"/>
-                <a:cs typeface="Helvetica" panose="020B0604020202020204" pitchFamily="34" charset="0"/>
-              </a:rPr>
-              <a:t>Messages </a:t>
-            </a:r>
-            <a:r>
-              <a:rPr lang="en-US" b="0" dirty="0">
-                <a:latin typeface="Helvetica" panose="020B0604020202020204" pitchFamily="34" charset="0"/>
-                <a:ea typeface="Times" panose="02020603060405020304" pitchFamily="18" charset="0"/>
-                <a:cs typeface="Helvetica" panose="020B0604020202020204" pitchFamily="34" charset="0"/>
-              </a:rPr>
-              <a:t>displayed</a:t>
-            </a:r>
-            <a:endParaRPr lang="en-US" b="0" dirty="0">
-              <a:latin typeface="Helvetica" panose="020B0604020202020204" pitchFamily="34" charset="0"/>
-              <a:ea typeface="Times" panose="02020603060405020304" pitchFamily="18" charset="0"/>
-              <a:cs typeface="Helvetica" panose="020B0604020202020204" pitchFamily="34" charset="0"/>
-            </a:endParaRPr>
-          </a:p>
-          <a:p>
-            <a:pPr marL="800100" lvl="1" indent="-342900" algn="l">
-              <a:lnSpc>
-                <a:spcPct val="115000"/>
-              </a:lnSpc>
-              <a:spcBef>
-                <a:spcPts val="600"/>
-              </a:spcBef>
-              <a:buFont typeface="Wingdings" panose="05000000000000000000" pitchFamily="2" charset="2"/>
-              <a:buChar char="§"/>
-            </a:pPr>
-            <a:r>
-              <a:rPr lang="en-US" sz="1400" b="0" dirty="0">
-                <a:latin typeface="Helvetica" panose="020B0604020202020204" pitchFamily="34" charset="0"/>
-                <a:ea typeface="Times" panose="02020603060405020304" pitchFamily="18" charset="0"/>
-                <a:cs typeface="Helvetica" panose="020B0604020202020204" pitchFamily="34" charset="0"/>
-              </a:rPr>
-              <a:t>Clear </a:t>
-            </a:r>
-            <a:r>
-              <a:rPr lang="en-US" sz="1400" b="0" dirty="0">
-                <a:latin typeface="Helvetica" panose="020B0604020202020204" pitchFamily="34" charset="0"/>
-                <a:ea typeface="Times" panose="02020603060405020304" pitchFamily="18" charset="0"/>
-                <a:cs typeface="Helvetica" panose="020B0604020202020204" pitchFamily="34" charset="0"/>
-              </a:rPr>
-              <a:t>explanations for all relevant </a:t>
-            </a:r>
-            <a:r>
-              <a:rPr lang="en-US" sz="1400" b="0" dirty="0">
-                <a:latin typeface="Helvetica" panose="020B0604020202020204" pitchFamily="34" charset="0"/>
-                <a:ea typeface="Times" panose="02020603060405020304" pitchFamily="18" charset="0"/>
-                <a:cs typeface="Helvetica" panose="020B0604020202020204" pitchFamily="34" charset="0"/>
-              </a:rPr>
-              <a:t>errors (ref. to regulation or indication of </a:t>
-            </a:r>
-            <a:r>
-              <a:rPr lang="en-US" sz="1400" b="0" dirty="0" err="1">
-                <a:latin typeface="Helvetica" panose="020B0604020202020204" pitchFamily="34" charset="0"/>
-                <a:ea typeface="Times" panose="02020603060405020304" pitchFamily="18" charset="0"/>
-                <a:cs typeface="Helvetica" panose="020B0604020202020204" pitchFamily="34" charset="0"/>
-              </a:rPr>
-              <a:t>datapoint</a:t>
-            </a:r>
-            <a:r>
-              <a:rPr lang="en-US" sz="1400" b="0" dirty="0">
-                <a:latin typeface="Helvetica" panose="020B0604020202020204" pitchFamily="34" charset="0"/>
-                <a:ea typeface="Times" panose="02020603060405020304" pitchFamily="18" charset="0"/>
-                <a:cs typeface="Helvetica" panose="020B0604020202020204" pitchFamily="34" charset="0"/>
-              </a:rPr>
-              <a:t>)</a:t>
-            </a:r>
-            <a:endParaRPr lang="en-US" sz="1400" b="0" dirty="0">
-              <a:latin typeface="Helvetica" panose="020B0604020202020204" pitchFamily="34" charset="0"/>
-              <a:ea typeface="Times" panose="02020603060405020304" pitchFamily="18" charset="0"/>
-              <a:cs typeface="Helvetica" panose="020B0604020202020204" pitchFamily="34" charset="0"/>
-            </a:endParaRPr>
-          </a:p>
-          <a:p>
-            <a:pPr marL="800100" lvl="1" indent="-342900" algn="l">
-              <a:lnSpc>
-                <a:spcPct val="115000"/>
-              </a:lnSpc>
-              <a:spcBef>
-                <a:spcPts val="600"/>
-              </a:spcBef>
-              <a:buFont typeface="Wingdings" panose="05000000000000000000" pitchFamily="2" charset="2"/>
-              <a:buChar char="§"/>
-            </a:pPr>
-            <a:r>
-              <a:rPr lang="en-US" sz="1400" b="0" dirty="0">
-                <a:latin typeface="Helvetica" panose="020B0604020202020204" pitchFamily="34" charset="0"/>
-                <a:ea typeface="Times" panose="02020603060405020304" pitchFamily="18" charset="0"/>
-                <a:cs typeface="Helvetica" panose="020B0604020202020204" pitchFamily="34" charset="0"/>
-              </a:rPr>
-              <a:t>Warnings </a:t>
-            </a:r>
-            <a:r>
-              <a:rPr lang="en-US" sz="1400" b="0" dirty="0">
-                <a:latin typeface="Helvetica" panose="020B0604020202020204" pitchFamily="34" charset="0"/>
-                <a:ea typeface="Times" panose="02020603060405020304" pitchFamily="18" charset="0"/>
-                <a:cs typeface="Helvetica" panose="020B0604020202020204" pitchFamily="34" charset="0"/>
-              </a:rPr>
-              <a:t>vs. </a:t>
-            </a:r>
-            <a:r>
-              <a:rPr lang="en-US" sz="1400" b="0" dirty="0">
-                <a:latin typeface="Helvetica" panose="020B0604020202020204" pitchFamily="34" charset="0"/>
-                <a:ea typeface="Times" panose="02020603060405020304" pitchFamily="18" charset="0"/>
-                <a:cs typeface="Helvetica" panose="020B0604020202020204" pitchFamily="34" charset="0"/>
-              </a:rPr>
-              <a:t>Errors:</a:t>
-            </a:r>
-          </a:p>
-          <a:p>
-            <a:pPr marL="1257300" lvl="2" indent="-342900" algn="l">
-              <a:lnSpc>
-                <a:spcPct val="115000"/>
-              </a:lnSpc>
-              <a:spcBef>
-                <a:spcPts val="600"/>
-              </a:spcBef>
-              <a:buFont typeface="Wingdings" panose="05000000000000000000" pitchFamily="2" charset="2"/>
-              <a:buChar char="§"/>
-            </a:pPr>
-            <a:r>
-              <a:rPr lang="en-US" sz="1400" b="0" dirty="0">
-                <a:latin typeface="Helvetica" panose="020B0604020202020204" pitchFamily="34" charset="0"/>
-                <a:ea typeface="Times" panose="02020603060405020304" pitchFamily="18" charset="0"/>
-                <a:cs typeface="Helvetica" panose="020B0604020202020204" pitchFamily="34" charset="0"/>
-              </a:rPr>
-              <a:t>A valid XML results file is only created if </a:t>
-            </a:r>
-            <a:r>
-              <a:rPr lang="en-US" sz="1400" b="0" dirty="0">
-                <a:latin typeface="Helvetica" panose="020B0604020202020204" pitchFamily="34" charset="0"/>
-                <a:ea typeface="Times" panose="02020603060405020304" pitchFamily="18" charset="0"/>
-                <a:cs typeface="Helvetica" panose="020B0604020202020204" pitchFamily="34" charset="0"/>
-              </a:rPr>
-              <a:t>no </a:t>
-            </a:r>
-            <a:r>
-              <a:rPr lang="en-US" sz="1400" b="0" dirty="0">
-                <a:latin typeface="Helvetica" panose="020B0604020202020204" pitchFamily="34" charset="0"/>
-                <a:ea typeface="Times" panose="02020603060405020304" pitchFamily="18" charset="0"/>
-                <a:cs typeface="Helvetica" panose="020B0604020202020204" pitchFamily="34" charset="0"/>
-              </a:rPr>
-              <a:t>errors occur (non-conformity with requirements in regulation)</a:t>
-            </a:r>
-            <a:endParaRPr lang="en-US" sz="1400" b="0" dirty="0">
-              <a:latin typeface="Helvetica" panose="020B0604020202020204" pitchFamily="34" charset="0"/>
-              <a:ea typeface="Times" panose="02020603060405020304" pitchFamily="18" charset="0"/>
-              <a:cs typeface="Helvetica" panose="020B0604020202020204" pitchFamily="34" charset="0"/>
-            </a:endParaRPr>
-          </a:p>
-          <a:p>
-            <a:pPr marL="1257300" lvl="2" indent="-342900" algn="l">
-              <a:lnSpc>
-                <a:spcPct val="115000"/>
-              </a:lnSpc>
-              <a:spcBef>
-                <a:spcPts val="600"/>
-              </a:spcBef>
-              <a:buFont typeface="Wingdings" panose="05000000000000000000" pitchFamily="2" charset="2"/>
-              <a:buChar char="§"/>
-            </a:pPr>
-            <a:r>
-              <a:rPr lang="en-US" sz="1400" b="0" dirty="0">
-                <a:latin typeface="Helvetica" panose="020B0604020202020204" pitchFamily="34" charset="0"/>
-                <a:ea typeface="Times" panose="02020603060405020304" pitchFamily="18" charset="0"/>
-                <a:cs typeface="Helvetica" panose="020B0604020202020204" pitchFamily="34" charset="0"/>
-              </a:rPr>
-              <a:t>Warnings give a hint that something might be wrong with the input data</a:t>
-            </a:r>
-            <a:br>
-              <a:rPr lang="en-US" sz="1400" b="0" dirty="0">
-                <a:latin typeface="Helvetica" panose="020B0604020202020204" pitchFamily="34" charset="0"/>
-                <a:ea typeface="Times" panose="02020603060405020304" pitchFamily="18" charset="0"/>
-                <a:cs typeface="Helvetica" panose="020B0604020202020204" pitchFamily="34" charset="0"/>
-              </a:rPr>
-            </a:br>
-            <a:r>
-              <a:rPr lang="en-US" sz="1400" b="0" dirty="0">
-                <a:latin typeface="Helvetica" panose="020B0604020202020204" pitchFamily="34" charset="0"/>
-                <a:ea typeface="Times" panose="02020603060405020304" pitchFamily="18" charset="0"/>
-                <a:cs typeface="Helvetica" panose="020B0604020202020204" pitchFamily="34" charset="0"/>
-                <a:sym typeface="Wingdings" panose="05000000000000000000" pitchFamily="2" charset="2"/>
-              </a:rPr>
-              <a:t> </a:t>
-            </a:r>
-            <a:r>
-              <a:rPr lang="en-US" sz="1400" b="0" dirty="0">
-                <a:latin typeface="Helvetica" panose="020B0604020202020204" pitchFamily="34" charset="0"/>
-                <a:ea typeface="Times" panose="02020603060405020304" pitchFamily="18" charset="0"/>
-                <a:cs typeface="Helvetica" panose="020B0604020202020204" pitchFamily="34" charset="0"/>
-              </a:rPr>
-              <a:t>XML result file is valid despite warnings</a:t>
-            </a:r>
-            <a:br>
-              <a:rPr lang="en-US" sz="1400" b="0" dirty="0">
-                <a:latin typeface="Helvetica" panose="020B0604020202020204" pitchFamily="34" charset="0"/>
-                <a:ea typeface="Times" panose="02020603060405020304" pitchFamily="18" charset="0"/>
-                <a:cs typeface="Helvetica" panose="020B0604020202020204" pitchFamily="34" charset="0"/>
-              </a:rPr>
-            </a:br>
-            <a:r>
-              <a:rPr lang="en-US" sz="1400" b="0" dirty="0">
-                <a:latin typeface="Helvetica" panose="020B0604020202020204" pitchFamily="34" charset="0"/>
-                <a:ea typeface="Times" panose="02020603060405020304" pitchFamily="18" charset="0"/>
-                <a:cs typeface="Helvetica" panose="020B0604020202020204" pitchFamily="34" charset="0"/>
-                <a:sym typeface="Wingdings" panose="05000000000000000000" pitchFamily="2" charset="2"/>
-              </a:rPr>
-              <a:t> </a:t>
-            </a:r>
-            <a:r>
-              <a:rPr lang="en-US" sz="1400" b="0" u="sng" dirty="0">
-                <a:latin typeface="Helvetica" panose="020B0604020202020204" pitchFamily="34" charset="0"/>
-                <a:ea typeface="Times" panose="02020603060405020304" pitchFamily="18" charset="0"/>
-                <a:cs typeface="Helvetica" panose="020B0604020202020204" pitchFamily="34" charset="0"/>
-                <a:sym typeface="Wingdings" panose="05000000000000000000" pitchFamily="2" charset="2"/>
-              </a:rPr>
-              <a:t>BUT:</a:t>
-            </a:r>
-            <a:r>
-              <a:rPr lang="en-US" sz="1400" b="0" dirty="0">
-                <a:latin typeface="Helvetica" panose="020B0604020202020204" pitchFamily="34" charset="0"/>
-                <a:ea typeface="Times" panose="02020603060405020304" pitchFamily="18" charset="0"/>
-                <a:cs typeface="Helvetica" panose="020B0604020202020204" pitchFamily="34" charset="0"/>
-              </a:rPr>
-              <a:t> warnings should be investigated together with TAA / technical service</a:t>
-            </a:r>
-          </a:p>
-          <a:p>
-            <a:pPr marL="342900" indent="-342900" algn="l">
-              <a:lnSpc>
-                <a:spcPct val="115000"/>
-              </a:lnSpc>
-              <a:spcBef>
-                <a:spcPts val="600"/>
-              </a:spcBef>
-              <a:buFont typeface="Wingdings" panose="05000000000000000000" pitchFamily="2" charset="2"/>
-              <a:buChar char="§"/>
-            </a:pPr>
-            <a:endParaRPr lang="en-US" b="0" dirty="0" smtClean="0">
-              <a:latin typeface="Helvetica" panose="020B0604020202020204" pitchFamily="34" charset="0"/>
-              <a:ea typeface="Times" panose="02020603060405020304" pitchFamily="18" charset="0"/>
-              <a:cs typeface="Helvetica" panose="020B0604020202020204" pitchFamily="34" charset="0"/>
-            </a:endParaRPr>
-          </a:p>
-          <a:p>
-            <a:pPr marL="342900" indent="-342900" algn="l">
-              <a:lnSpc>
-                <a:spcPct val="115000"/>
-              </a:lnSpc>
-              <a:spcBef>
-                <a:spcPts val="600"/>
-              </a:spcBef>
-              <a:buFont typeface="Wingdings" panose="05000000000000000000" pitchFamily="2" charset="2"/>
-              <a:buChar char="§"/>
-            </a:pPr>
-            <a:r>
-              <a:rPr lang="en-US" b="0" dirty="0" smtClean="0">
-                <a:latin typeface="Helvetica" panose="020B0604020202020204" pitchFamily="34" charset="0"/>
-                <a:ea typeface="Times" panose="02020603060405020304" pitchFamily="18" charset="0"/>
-                <a:cs typeface="Helvetica" panose="020B0604020202020204" pitchFamily="34" charset="0"/>
-              </a:rPr>
-              <a:t>Only </a:t>
-            </a:r>
-            <a:r>
-              <a:rPr lang="en-US" b="0" dirty="0">
-                <a:latin typeface="Helvetica" panose="020B0604020202020204" pitchFamily="34" charset="0"/>
-                <a:ea typeface="Times" panose="02020603060405020304" pitchFamily="18" charset="0"/>
-                <a:cs typeface="Helvetica" panose="020B0604020202020204" pitchFamily="34" charset="0"/>
-              </a:rPr>
-              <a:t>one </a:t>
-            </a:r>
-            <a:r>
-              <a:rPr lang="en-US" b="0" dirty="0">
-                <a:latin typeface="Helvetica" panose="020B0604020202020204" pitchFamily="34" charset="0"/>
-                <a:ea typeface="Times" panose="02020603060405020304" pitchFamily="18" charset="0"/>
-                <a:cs typeface="Helvetica" panose="020B0604020202020204" pitchFamily="34" charset="0"/>
-              </a:rPr>
-              <a:t>single XML </a:t>
-            </a:r>
-            <a:r>
-              <a:rPr lang="en-US" b="0" dirty="0">
-                <a:latin typeface="Helvetica" panose="020B0604020202020204" pitchFamily="34" charset="0"/>
-                <a:ea typeface="Times" panose="02020603060405020304" pitchFamily="18" charset="0"/>
-                <a:cs typeface="Helvetica" panose="020B0604020202020204" pitchFamily="34" charset="0"/>
-              </a:rPr>
-              <a:t>file is created as output</a:t>
-            </a:r>
-          </a:p>
-          <a:p>
-            <a:pPr marL="800100" lvl="1" indent="-342900" algn="l">
-              <a:spcBef>
-                <a:spcPts val="600"/>
-              </a:spcBef>
-              <a:buFont typeface="Wingdings" panose="05000000000000000000" pitchFamily="2" charset="2"/>
-              <a:buChar char="§"/>
-            </a:pPr>
-            <a:r>
-              <a:rPr lang="en-US" sz="1400" b="0" dirty="0">
-                <a:latin typeface="Helvetica" panose="020B0604020202020204" pitchFamily="34" charset="0"/>
-                <a:ea typeface="Times" panose="02020603060405020304" pitchFamily="18" charset="0"/>
-                <a:cs typeface="Helvetica" panose="020B0604020202020204" pitchFamily="34" charset="0"/>
-              </a:rPr>
-              <a:t>File </a:t>
-            </a:r>
-            <a:r>
-              <a:rPr lang="en-US" sz="1400" b="0" dirty="0">
-                <a:latin typeface="Helvetica" panose="020B0604020202020204" pitchFamily="34" charset="0"/>
-                <a:ea typeface="Times" panose="02020603060405020304" pitchFamily="18" charset="0"/>
-                <a:cs typeface="Helvetica" panose="020B0604020202020204" pitchFamily="34" charset="0"/>
-              </a:rPr>
-              <a:t>already </a:t>
-            </a:r>
-            <a:r>
-              <a:rPr lang="en-US" sz="1400" b="0" dirty="0">
-                <a:latin typeface="Helvetica" panose="020B0604020202020204" pitchFamily="34" charset="0"/>
-                <a:ea typeface="Times" panose="02020603060405020304" pitchFamily="18" charset="0"/>
-                <a:cs typeface="Helvetica" panose="020B0604020202020204" pitchFamily="34" charset="0"/>
-              </a:rPr>
-              <a:t>hashed</a:t>
-            </a:r>
-          </a:p>
-          <a:p>
-            <a:pPr marL="800100" lvl="1" indent="-342900" algn="l">
-              <a:lnSpc>
-                <a:spcPct val="115000"/>
-              </a:lnSpc>
-              <a:spcBef>
-                <a:spcPts val="600"/>
-              </a:spcBef>
-              <a:buFont typeface="Wingdings" panose="05000000000000000000" pitchFamily="2" charset="2"/>
-              <a:buChar char="§"/>
-            </a:pPr>
-            <a:r>
-              <a:rPr lang="en-US" sz="1400" b="0" dirty="0">
-                <a:latin typeface="Helvetica" panose="020B0604020202020204" pitchFamily="34" charset="0"/>
-                <a:ea typeface="Times" panose="02020603060405020304" pitchFamily="18" charset="0"/>
-                <a:cs typeface="Helvetica" panose="020B0604020202020204" pitchFamily="34" charset="0"/>
-              </a:rPr>
-              <a:t>Ready </a:t>
-            </a:r>
-            <a:r>
-              <a:rPr lang="en-US" sz="1400" b="0" dirty="0">
-                <a:latin typeface="Helvetica" panose="020B0604020202020204" pitchFamily="34" charset="0"/>
-                <a:ea typeface="Times" panose="02020603060405020304" pitchFamily="18" charset="0"/>
-                <a:cs typeface="Helvetica" panose="020B0604020202020204" pitchFamily="34" charset="0"/>
-              </a:rPr>
-              <a:t>for use in VECTO vehicle simulation for declaration</a:t>
-            </a:r>
-            <a:endParaRPr lang="en-US" sz="1400" b="0" dirty="0">
-              <a:latin typeface="Helvetica" panose="020B0604020202020204" pitchFamily="34" charset="0"/>
-              <a:ea typeface="Times" panose="02020603060405020304" pitchFamily="18" charset="0"/>
-              <a:cs typeface="Helvetica" panose="020B0604020202020204" pitchFamily="34" charset="0"/>
-            </a:endParaRPr>
-          </a:p>
-        </p:txBody>
-      </p:sp>
-    </p:spTree>
-    <p:extLst>
-      <p:ext uri="{BB962C8B-B14F-4D97-AF65-F5344CB8AC3E}">
-        <p14:creationId xmlns:p14="http://schemas.microsoft.com/office/powerpoint/2010/main" val="3655365783"/>
-      </p:ext>
-    </p:extLst>
-  </p:cSld>
-  <p:clrMapOvr>
-    <a:masterClrMapping/>
-  </p:clrMapOvr>
-  <p:timing>
-    <p:tnLst>
-      <p:par>
-        <p:cTn id="1" dur="indefinite" restart="never" nodeType="tmRoot"/>
-      </p:par>
-    </p:tnLst>
-  </p:timing>
-</p:sld>
-</file>
-
-<file path=ppt/slides/slide12.xml><?xml version="1.0" encoding="utf-8"?>
-<p:sld xmlns:a="http://schemas.openxmlformats.org/drawingml/2006/main" xmlns:r="http://schemas.openxmlformats.org/officeDocument/2006/relationships" xmlns:p="http://schemas.openxmlformats.org/presentationml/2006/main">
-  <p:cSld>
-    <p:spTree>
-      <p:nvGrpSpPr>
-        <p:cNvPr id="1" name=""/>
-        <p:cNvGrpSpPr/>
-        <p:nvPr/>
-      </p:nvGrpSpPr>
-      <p:grpSpPr>
-        <a:xfrm>
-          <a:off x="0" y="0"/>
-          <a:ext cx="0" cy="0"/>
-          <a:chOff x="0" y="0"/>
-          <a:chExt cx="0" cy="0"/>
-        </a:xfrm>
-      </p:grpSpPr>
-      <p:sp>
-        <p:nvSpPr>
-          <p:cNvPr id="2" name="Titel 1"/>
-          <p:cNvSpPr>
-            <a:spLocks noGrp="1"/>
-          </p:cNvSpPr>
-          <p:nvPr>
-            <p:ph type="title"/>
-          </p:nvPr>
-        </p:nvSpPr>
         <p:spPr/>
         <p:txBody>
           <a:bodyPr/>
@@ -5901,13 +5093,6 @@
               </a:rPr>
               <a:t>webgate.ec.europa.eu/CITnet/jira/projects/VECTO/issues</a:t>
             </a:r>
-            <a:endParaRPr lang="en-US" sz="1600" u="sng" dirty="0" smtClean="0">
-              <a:solidFill>
-                <a:srgbClr val="00B0F0"/>
-              </a:solidFill>
-              <a:latin typeface="Helvetica" panose="020B0604020202020204" pitchFamily="34" charset="0"/>
-              <a:cs typeface="Helvetica" panose="020B0604020202020204" pitchFamily="34" charset="0"/>
-            </a:endParaRPr>
           </a:p>
           <a:p>
             <a:pPr>
@@ -6091,474 +5276,6 @@
           <a:chExt cx="0" cy="0"/>
         </a:xfrm>
       </p:grpSpPr>
-      <p:pic>
-        <p:nvPicPr>
-          <p:cNvPr id="6" name="Grafik 5"/>
-          <p:cNvPicPr>
-            <a:picLocks noChangeAspect="1"/>
-          </p:cNvPicPr>
-          <p:nvPr/>
-        </p:nvPicPr>
-        <p:blipFill>
-          <a:blip r:embed="rId3"/>
-          <a:stretch>
-            <a:fillRect/>
-          </a:stretch>
-        </p:blipFill>
-        <p:spPr>
-          <a:xfrm>
-            <a:off x="179514" y="950535"/>
-            <a:ext cx="5488881" cy="5303294"/>
-          </a:xfrm>
-          <a:prstGeom prst="rect">
-            <a:avLst/>
-          </a:prstGeom>
-        </p:spPr>
-      </p:pic>
-      <p:sp>
-        <p:nvSpPr>
-          <p:cNvPr id="15" name="Legende mit Linie 1 (Markierungsleiste) 14"/>
-          <p:cNvSpPr/>
-          <p:nvPr/>
-        </p:nvSpPr>
-        <p:spPr bwMode="auto">
-          <a:xfrm>
-            <a:off x="6660232" y="4564017"/>
-            <a:ext cx="2376000" cy="683264"/>
-          </a:xfrm>
-          <a:prstGeom prst="accentCallout1">
-            <a:avLst>
-              <a:gd name="adj1" fmla="val 56216"/>
-              <a:gd name="adj2" fmla="val -2353"/>
-              <a:gd name="adj3" fmla="val -13902"/>
-              <a:gd name="adj4" fmla="val -152263"/>
-            </a:avLst>
-          </a:prstGeom>
-          <a:noFill/>
-          <a:ln w="19050" cap="flat" cmpd="sng" algn="ctr">
-            <a:solidFill>
-              <a:srgbClr val="FF33CC"/>
-            </a:solidFill>
-            <a:prstDash val="solid"/>
-            <a:round/>
-            <a:headEnd type="none" w="med" len="med"/>
-            <a:tailEnd type="oval" w="med" len="med"/>
-          </a:ln>
-          <a:effectLst/>
-          <a:extLst/>
-        </p:spPr>
-        <p:txBody>
-          <a:bodyPr vert="horz" wrap="square" lIns="324000" tIns="45720" rIns="91440" bIns="45720" numCol="1" rtlCol="0" anchor="ctr" anchorCtr="0" compatLnSpc="1">
-            <a:prstTxWarp prst="textNoShape">
-              <a:avLst/>
-            </a:prstTxWarp>
-            <a:spAutoFit/>
-          </a:bodyPr>
-          <a:lstStyle/>
-          <a:p>
-            <a:pPr marL="0" marR="0" indent="0" algn="l" defTabSz="914400" rtl="0" eaLnBrk="1" fontAlgn="base" latinLnBrk="0" hangingPunct="1">
-              <a:lnSpc>
-                <a:spcPct val="100000"/>
-              </a:lnSpc>
-              <a:spcBef>
-                <a:spcPct val="30000"/>
-              </a:spcBef>
-              <a:spcAft>
-                <a:spcPct val="0"/>
-              </a:spcAft>
-              <a:buClrTx/>
-              <a:buSzTx/>
-              <a:buFontTx/>
-              <a:buNone/>
-              <a:tabLst/>
-            </a:pPr>
-            <a:r>
-              <a:rPr lang="de-AT" sz="1000" b="0" dirty="0" smtClean="0">
-                <a:latin typeface="Arial" pitchFamily="34" charset="0"/>
-              </a:rPr>
-              <a:t>Press </a:t>
-            </a:r>
-            <a:r>
-              <a:rPr lang="de-AT" sz="1000" b="0" dirty="0" smtClean="0">
-                <a:latin typeface="Arial" pitchFamily="34" charset="0"/>
-              </a:rPr>
-              <a:t>„Start“ </a:t>
-            </a:r>
-            <a:r>
-              <a:rPr lang="de-AT" sz="1000" b="0" dirty="0" err="1" smtClean="0">
-                <a:latin typeface="Arial" pitchFamily="34" charset="0"/>
-              </a:rPr>
-              <a:t>button</a:t>
-            </a:r>
-            <a:r>
-              <a:rPr lang="de-AT" sz="1000" b="0" dirty="0" smtClean="0">
-                <a:latin typeface="Arial" pitchFamily="34" charset="0"/>
-              </a:rPr>
-              <a:t> </a:t>
-            </a:r>
-            <a:r>
-              <a:rPr lang="de-AT" sz="1000" b="0" dirty="0" err="1" smtClean="0">
-                <a:latin typeface="Arial" pitchFamily="34" charset="0"/>
-              </a:rPr>
-              <a:t>for</a:t>
-            </a:r>
-            <a:r>
-              <a:rPr lang="de-AT" sz="1000" b="0" dirty="0" smtClean="0">
-                <a:latin typeface="Arial" pitchFamily="34" charset="0"/>
-              </a:rPr>
-              <a:t> </a:t>
-            </a:r>
-            <a:r>
-              <a:rPr lang="de-AT" sz="1000" b="0" dirty="0" err="1" smtClean="0">
-                <a:latin typeface="Arial" pitchFamily="34" charset="0"/>
-              </a:rPr>
-              <a:t>full</a:t>
-            </a:r>
-            <a:r>
-              <a:rPr lang="de-AT" sz="1000" b="0" dirty="0" smtClean="0">
-                <a:latin typeface="Arial" pitchFamily="34" charset="0"/>
-              </a:rPr>
-              <a:t> </a:t>
-            </a:r>
-            <a:r>
-              <a:rPr lang="de-AT" sz="1000" b="0" dirty="0" err="1" smtClean="0">
-                <a:latin typeface="Arial" pitchFamily="34" charset="0"/>
-              </a:rPr>
-              <a:t>evaluation</a:t>
-            </a:r>
-            <a:endParaRPr lang="de-AT" sz="1000" b="0" dirty="0" smtClean="0">
-              <a:latin typeface="Arial" pitchFamily="34" charset="0"/>
-            </a:endParaRPr>
-          </a:p>
-          <a:p>
-            <a:pPr marL="0" marR="0" indent="0" algn="l" defTabSz="914400" rtl="0" eaLnBrk="1" fontAlgn="base" latinLnBrk="0" hangingPunct="1">
-              <a:lnSpc>
-                <a:spcPct val="100000"/>
-              </a:lnSpc>
-              <a:spcBef>
-                <a:spcPct val="30000"/>
-              </a:spcBef>
-              <a:spcAft>
-                <a:spcPct val="0"/>
-              </a:spcAft>
-              <a:buClrTx/>
-              <a:buSzTx/>
-              <a:buFontTx/>
-              <a:buNone/>
-              <a:tabLst/>
-            </a:pPr>
-            <a:r>
-              <a:rPr kumimoji="0" lang="de-AT" sz="800" b="0" i="1" u="none" strike="noStrike" cap="none" normalizeH="0" baseline="0" dirty="0" smtClean="0">
-                <a:ln>
-                  <a:noFill/>
-                </a:ln>
-                <a:solidFill>
-                  <a:schemeClr val="tx1"/>
-                </a:solidFill>
-                <a:effectLst/>
-                <a:latin typeface="Arial" pitchFamily="34" charset="0"/>
-              </a:rPr>
-              <a:t>(OR press </a:t>
-            </a:r>
-            <a:r>
-              <a:rPr kumimoji="0" lang="de-AT" sz="800" b="0" i="1" u="none" strike="noStrike" cap="none" normalizeH="0" baseline="0" dirty="0" err="1" smtClean="0">
-                <a:ln>
-                  <a:noFill/>
-                </a:ln>
-                <a:solidFill>
-                  <a:schemeClr val="tx1"/>
-                </a:solidFill>
-                <a:effectLst/>
-                <a:latin typeface="Arial" pitchFamily="34" charset="0"/>
-              </a:rPr>
-              <a:t>other</a:t>
-            </a:r>
-            <a:r>
-              <a:rPr kumimoji="0" lang="de-AT" sz="800" b="0" i="1" u="none" strike="noStrike" cap="none" normalizeH="0" baseline="0" dirty="0" smtClean="0">
-                <a:ln>
-                  <a:noFill/>
-                </a:ln>
-                <a:solidFill>
-                  <a:schemeClr val="tx1"/>
-                </a:solidFill>
-                <a:effectLst/>
-                <a:latin typeface="Arial" pitchFamily="34" charset="0"/>
-              </a:rPr>
-              <a:t> </a:t>
-            </a:r>
-            <a:r>
-              <a:rPr kumimoji="0" lang="de-AT" sz="800" b="0" i="1" u="none" strike="noStrike" cap="none" normalizeH="0" baseline="0" dirty="0" err="1" smtClean="0">
-                <a:ln>
-                  <a:noFill/>
-                </a:ln>
-                <a:solidFill>
-                  <a:schemeClr val="tx1"/>
-                </a:solidFill>
-                <a:effectLst/>
-                <a:latin typeface="Arial" pitchFamily="34" charset="0"/>
-              </a:rPr>
-              <a:t>button</a:t>
-            </a:r>
-            <a:r>
-              <a:rPr kumimoji="0" lang="de-AT" sz="800" b="0" i="1" u="none" strike="noStrike" cap="none" normalizeH="0" dirty="0" smtClean="0">
-                <a:ln>
-                  <a:noFill/>
-                </a:ln>
-                <a:solidFill>
-                  <a:schemeClr val="tx1"/>
-                </a:solidFill>
-                <a:effectLst/>
-                <a:latin typeface="Arial" pitchFamily="34" charset="0"/>
-              </a:rPr>
-              <a:t> </a:t>
-            </a:r>
-            <a:r>
-              <a:rPr kumimoji="0" lang="de-AT" sz="800" b="0" i="1" u="none" strike="noStrike" cap="none" normalizeH="0" dirty="0" err="1" smtClean="0">
-                <a:ln>
-                  <a:noFill/>
-                </a:ln>
-                <a:solidFill>
-                  <a:schemeClr val="tx1"/>
-                </a:solidFill>
-                <a:effectLst/>
-                <a:latin typeface="Arial" pitchFamily="34" charset="0"/>
-              </a:rPr>
-              <a:t>to</a:t>
-            </a:r>
-            <a:r>
-              <a:rPr kumimoji="0" lang="de-AT" sz="800" b="0" i="1" u="none" strike="noStrike" cap="none" normalizeH="0" dirty="0" smtClean="0">
-                <a:ln>
-                  <a:noFill/>
-                </a:ln>
-                <a:solidFill>
-                  <a:schemeClr val="tx1"/>
-                </a:solidFill>
-                <a:effectLst/>
-                <a:latin typeface="Arial" pitchFamily="34" charset="0"/>
-              </a:rPr>
-              <a:t> </a:t>
-            </a:r>
-            <a:r>
-              <a:rPr kumimoji="0" lang="de-AT" sz="800" b="0" i="1" u="none" strike="noStrike" cap="none" normalizeH="0" dirty="0" err="1" smtClean="0">
-                <a:ln>
-                  <a:noFill/>
-                </a:ln>
-                <a:solidFill>
-                  <a:schemeClr val="tx1"/>
-                </a:solidFill>
-                <a:effectLst/>
-                <a:latin typeface="Arial" pitchFamily="34" charset="0"/>
-              </a:rPr>
-              <a:t>precalculate</a:t>
-            </a:r>
-            <a:r>
-              <a:rPr kumimoji="0" lang="de-AT" sz="800" b="0" i="1" u="none" strike="noStrike" cap="none" normalizeH="0" dirty="0" smtClean="0">
-                <a:ln>
-                  <a:noFill/>
-                </a:ln>
-                <a:solidFill>
-                  <a:schemeClr val="tx1"/>
-                </a:solidFill>
-                <a:effectLst/>
-                <a:latin typeface="Arial" pitchFamily="34" charset="0"/>
-              </a:rPr>
-              <a:t> </a:t>
-            </a:r>
-            <a:r>
-              <a:rPr kumimoji="0" lang="de-AT" sz="800" b="0" i="1" u="none" strike="noStrike" cap="none" normalizeH="0" dirty="0" err="1" smtClean="0">
-                <a:ln>
-                  <a:noFill/>
-                </a:ln>
-                <a:solidFill>
-                  <a:schemeClr val="tx1"/>
-                </a:solidFill>
-                <a:effectLst/>
-                <a:latin typeface="Arial" pitchFamily="34" charset="0"/>
-              </a:rPr>
-              <a:t>grid</a:t>
-            </a:r>
-            <a:r>
-              <a:rPr kumimoji="0" lang="de-AT" sz="800" b="0" i="1" u="none" strike="noStrike" cap="none" normalizeH="0" dirty="0" smtClean="0">
-                <a:ln>
-                  <a:noFill/>
-                </a:ln>
-                <a:solidFill>
-                  <a:schemeClr val="tx1"/>
-                </a:solidFill>
-                <a:effectLst/>
-                <a:latin typeface="Arial" pitchFamily="34" charset="0"/>
-              </a:rPr>
-              <a:t> </a:t>
-            </a:r>
-            <a:r>
-              <a:rPr kumimoji="0" lang="de-AT" sz="800" b="0" i="1" u="none" strike="noStrike" cap="none" normalizeH="0" dirty="0" err="1" smtClean="0">
-                <a:ln>
-                  <a:noFill/>
-                </a:ln>
-                <a:solidFill>
-                  <a:schemeClr val="tx1"/>
-                </a:solidFill>
-                <a:effectLst/>
-                <a:latin typeface="Arial" pitchFamily="34" charset="0"/>
-              </a:rPr>
-              <a:t>for</a:t>
-            </a:r>
-            <a:r>
-              <a:rPr kumimoji="0" lang="de-AT" sz="800" b="0" i="1" u="none" strike="noStrike" cap="none" normalizeH="0" dirty="0" smtClean="0">
-                <a:ln>
-                  <a:noFill/>
-                </a:ln>
-                <a:solidFill>
-                  <a:schemeClr val="tx1"/>
-                </a:solidFill>
-                <a:effectLst/>
-                <a:latin typeface="Arial" pitchFamily="34" charset="0"/>
-              </a:rPr>
-              <a:t> </a:t>
-            </a:r>
-            <a:r>
-              <a:rPr kumimoji="0" lang="de-AT" sz="800" b="0" i="1" u="none" strike="noStrike" cap="none" normalizeH="0" dirty="0" err="1" smtClean="0">
-                <a:ln>
-                  <a:noFill/>
-                </a:ln>
-                <a:solidFill>
-                  <a:schemeClr val="tx1"/>
-                </a:solidFill>
-                <a:effectLst/>
-                <a:latin typeface="Arial" pitchFamily="34" charset="0"/>
-              </a:rPr>
-              <a:t>fuel</a:t>
-            </a:r>
-            <a:r>
-              <a:rPr kumimoji="0" lang="de-AT" sz="800" b="0" i="1" u="none" strike="noStrike" cap="none" normalizeH="0" dirty="0" smtClean="0">
-                <a:ln>
-                  <a:noFill/>
-                </a:ln>
-                <a:solidFill>
-                  <a:schemeClr val="tx1"/>
-                </a:solidFill>
-                <a:effectLst/>
-                <a:latin typeface="Arial" pitchFamily="34" charset="0"/>
-              </a:rPr>
-              <a:t> </a:t>
-            </a:r>
-            <a:r>
-              <a:rPr kumimoji="0" lang="de-AT" sz="800" b="0" i="1" u="none" strike="noStrike" cap="none" normalizeH="0" dirty="0" err="1" smtClean="0">
-                <a:ln>
-                  <a:noFill/>
-                </a:ln>
-                <a:solidFill>
-                  <a:schemeClr val="tx1"/>
-                </a:solidFill>
-                <a:effectLst/>
-                <a:latin typeface="Arial" pitchFamily="34" charset="0"/>
-              </a:rPr>
-              <a:t>map</a:t>
-            </a:r>
-            <a:r>
-              <a:rPr kumimoji="0" lang="de-AT" sz="800" b="0" i="1" u="none" strike="noStrike" cap="none" normalizeH="0" dirty="0" smtClean="0">
-                <a:ln>
-                  <a:noFill/>
-                </a:ln>
-                <a:solidFill>
-                  <a:schemeClr val="tx1"/>
-                </a:solidFill>
-                <a:effectLst/>
-                <a:latin typeface="Arial" pitchFamily="34" charset="0"/>
-              </a:rPr>
-              <a:t> </a:t>
-            </a:r>
-            <a:r>
-              <a:rPr kumimoji="0" lang="de-AT" sz="800" b="0" i="1" u="none" strike="noStrike" cap="none" normalizeH="0" dirty="0" err="1" smtClean="0">
-                <a:ln>
-                  <a:noFill/>
-                </a:ln>
-                <a:solidFill>
-                  <a:schemeClr val="tx1"/>
-                </a:solidFill>
-                <a:effectLst/>
-                <a:latin typeface="Arial" pitchFamily="34" charset="0"/>
-              </a:rPr>
-              <a:t>from</a:t>
-            </a:r>
-            <a:r>
-              <a:rPr kumimoji="0" lang="de-AT" sz="800" b="0" i="1" u="none" strike="noStrike" cap="none" normalizeH="0" dirty="0" smtClean="0">
-                <a:ln>
-                  <a:noFill/>
-                </a:ln>
-                <a:solidFill>
-                  <a:schemeClr val="tx1"/>
-                </a:solidFill>
-                <a:effectLst/>
-                <a:latin typeface="Arial" pitchFamily="34" charset="0"/>
-              </a:rPr>
-              <a:t> CO2-parent </a:t>
-            </a:r>
-            <a:r>
-              <a:rPr kumimoji="0" lang="de-AT" sz="800" b="0" i="1" u="none" strike="noStrike" cap="none" normalizeH="0" dirty="0" err="1" smtClean="0">
-                <a:ln>
-                  <a:noFill/>
-                </a:ln>
-                <a:solidFill>
-                  <a:schemeClr val="tx1"/>
-                </a:solidFill>
-                <a:effectLst/>
-                <a:latin typeface="Arial" pitchFamily="34" charset="0"/>
-              </a:rPr>
-              <a:t>full-load</a:t>
-            </a:r>
-            <a:r>
-              <a:rPr kumimoji="0" lang="de-AT" sz="800" b="0" i="1" u="none" strike="noStrike" cap="none" normalizeH="0" dirty="0" smtClean="0">
-                <a:ln>
-                  <a:noFill/>
-                </a:ln>
-                <a:solidFill>
-                  <a:schemeClr val="tx1"/>
-                </a:solidFill>
-                <a:effectLst/>
-                <a:latin typeface="Arial" pitchFamily="34" charset="0"/>
-              </a:rPr>
-              <a:t> </a:t>
-            </a:r>
-            <a:r>
-              <a:rPr kumimoji="0" lang="de-AT" sz="800" b="0" i="1" u="none" strike="noStrike" cap="none" normalizeH="0" dirty="0" err="1" smtClean="0">
-                <a:ln>
-                  <a:noFill/>
-                </a:ln>
-                <a:solidFill>
-                  <a:schemeClr val="tx1"/>
-                </a:solidFill>
-                <a:effectLst/>
-                <a:latin typeface="Arial" pitchFamily="34" charset="0"/>
-              </a:rPr>
-              <a:t>curve</a:t>
-            </a:r>
-            <a:r>
-              <a:rPr kumimoji="0" lang="de-AT" sz="800" b="0" i="1" u="none" strike="noStrike" cap="none" normalizeH="0" dirty="0" smtClean="0">
-                <a:ln>
-                  <a:noFill/>
-                </a:ln>
-                <a:solidFill>
-                  <a:schemeClr val="tx1"/>
-                </a:solidFill>
-                <a:effectLst/>
-                <a:latin typeface="Arial" pitchFamily="34" charset="0"/>
-              </a:rPr>
-              <a:t>)</a:t>
-            </a:r>
-            <a:endParaRPr kumimoji="0" lang="en-US" sz="800" b="0" i="1" u="none" strike="noStrike" cap="none" normalizeH="0" baseline="0" dirty="0" smtClean="0">
-              <a:ln>
-                <a:noFill/>
-              </a:ln>
-              <a:solidFill>
-                <a:schemeClr val="tx1"/>
-              </a:solidFill>
-              <a:effectLst/>
-              <a:latin typeface="Arial" pitchFamily="34" charset="0"/>
-            </a:endParaRPr>
-          </a:p>
-        </p:txBody>
-      </p:sp>
       <p:sp>
         <p:nvSpPr>
           <p:cNvPr id="2" name="Titel 1"/>
@@ -6580,23 +5297,107 @@
           <a:lstStyle/>
           <a:p>
             <a:r>
-              <a:rPr lang="en-US" dirty="0" smtClean="0"/>
-              <a:t>VECTO Engine – GUI</a:t>
-            </a:r>
-            <a:endParaRPr lang="en-US" dirty="0"/>
+              <a:rPr lang="en-US" dirty="0"/>
+              <a:t>VECTO Engine – GUI overview</a:t>
+            </a:r>
           </a:p>
         </p:txBody>
       </p:sp>
+      <p:grpSp>
+        <p:nvGrpSpPr>
+          <p:cNvPr id="27" name="Gruppieren 26"/>
+          <p:cNvGrpSpPr/>
+          <p:nvPr/>
+        </p:nvGrpSpPr>
+        <p:grpSpPr>
+          <a:xfrm>
+            <a:off x="179626" y="1051826"/>
+            <a:ext cx="5492123" cy="5306426"/>
+            <a:chOff x="179626" y="1051826"/>
+            <a:chExt cx="5492123" cy="5306426"/>
+          </a:xfrm>
+        </p:grpSpPr>
+        <p:pic>
+          <p:nvPicPr>
+            <p:cNvPr id="29" name="Grafik 28"/>
+            <p:cNvPicPr>
+              <a:picLocks noChangeAspect="1"/>
+            </p:cNvPicPr>
+            <p:nvPr/>
+          </p:nvPicPr>
+          <p:blipFill>
+            <a:blip r:embed="rId3"/>
+            <a:stretch>
+              <a:fillRect/>
+            </a:stretch>
+          </p:blipFill>
+          <p:spPr>
+            <a:xfrm>
+              <a:off x="179626" y="1051826"/>
+              <a:ext cx="5492123" cy="5306426"/>
+            </a:xfrm>
+            <a:prstGeom prst="rect">
+              <a:avLst/>
+            </a:prstGeom>
+          </p:spPr>
+        </p:pic>
+        <p:pic>
+          <p:nvPicPr>
+            <p:cNvPr id="30" name="Grafik 29"/>
+            <p:cNvPicPr>
+              <a:picLocks noChangeAspect="1"/>
+            </p:cNvPicPr>
+            <p:nvPr/>
+          </p:nvPicPr>
+          <p:blipFill rotWithShape="1">
+            <a:blip r:embed="rId4"/>
+            <a:srcRect l="74732" t="81437"/>
+            <a:stretch/>
+          </p:blipFill>
+          <p:spPr>
+            <a:xfrm>
+              <a:off x="4283995" y="5373216"/>
+              <a:ext cx="1387754" cy="985010"/>
+            </a:xfrm>
+            <a:prstGeom prst="rect">
+              <a:avLst/>
+            </a:prstGeom>
+          </p:spPr>
+        </p:pic>
+        <p:pic>
+          <p:nvPicPr>
+            <p:cNvPr id="31" name="Grafik 30"/>
+            <p:cNvPicPr>
+              <a:picLocks noChangeAspect="1"/>
+            </p:cNvPicPr>
+            <p:nvPr/>
+          </p:nvPicPr>
+          <p:blipFill rotWithShape="1">
+            <a:blip r:embed="rId4"/>
+            <a:srcRect l="74732" b="67415"/>
+            <a:stretch/>
+          </p:blipFill>
+          <p:spPr>
+            <a:xfrm>
+              <a:off x="4283968" y="1051826"/>
+              <a:ext cx="1387754" cy="1729102"/>
+            </a:xfrm>
+            <a:prstGeom prst="rect">
+              <a:avLst/>
+            </a:prstGeom>
+          </p:spPr>
+        </p:pic>
+      </p:grpSp>
       <p:sp>
         <p:nvSpPr>
-          <p:cNvPr id="4" name="Rechteck 3"/>
+          <p:cNvPr id="32" name="Rechteck 31"/>
           <p:cNvSpPr/>
           <p:nvPr/>
         </p:nvSpPr>
         <p:spPr bwMode="auto">
           <a:xfrm>
-            <a:off x="255788" y="1182450"/>
-            <a:ext cx="5316466" cy="1584000"/>
+            <a:off x="255788" y="1365332"/>
+            <a:ext cx="5316466" cy="180000"/>
           </a:xfrm>
           <a:prstGeom prst="rect">
             <a:avLst/>
@@ -6610,7 +5411,7 @@
             <a:solidFill>
               <a:srgbClr val="FF0000"/>
             </a:solidFill>
-            <a:prstDash val="sysDash"/>
+            <a:prstDash val="solid"/>
             <a:round/>
             <a:headEnd type="none" w="med" len="med"/>
             <a:tailEnd type="triangle" w="med" len="med"/>
@@ -6658,419 +5459,28 @@
       </p:sp>
       <p:sp>
         <p:nvSpPr>
-          <p:cNvPr id="8" name="Legende mit Linie 1 (Markierungsleiste) 7"/>
+          <p:cNvPr id="33" name="Rechteck 32"/>
           <p:cNvSpPr/>
           <p:nvPr/>
         </p:nvSpPr>
         <p:spPr bwMode="auto">
           <a:xfrm>
-            <a:off x="6660232" y="1861556"/>
-            <a:ext cx="2376000" cy="707886"/>
-          </a:xfrm>
-          <a:prstGeom prst="accentCallout1">
-            <a:avLst>
-              <a:gd name="adj1" fmla="val 56216"/>
-              <a:gd name="adj2" fmla="val -2353"/>
-              <a:gd name="adj3" fmla="val 191410"/>
-              <a:gd name="adj4" fmla="val -43128"/>
-            </a:avLst>
-          </a:prstGeom>
-          <a:noFill/>
-          <a:ln w="19050" cap="flat" cmpd="sng" algn="ctr">
-            <a:solidFill>
-              <a:srgbClr val="7030A0"/>
-            </a:solidFill>
-            <a:prstDash val="solid"/>
-            <a:round/>
-            <a:headEnd type="none" w="med" len="med"/>
-            <a:tailEnd type="none" w="med" len="med"/>
-          </a:ln>
-          <a:effectLst/>
-          <a:extLst/>
-        </p:spPr>
-        <p:txBody>
-          <a:bodyPr vert="horz" wrap="square" lIns="324000" tIns="45720" rIns="91440" bIns="45720" numCol="1" rtlCol="0" anchor="ctr" anchorCtr="0" compatLnSpc="1">
-            <a:prstTxWarp prst="textNoShape">
-              <a:avLst/>
-            </a:prstTxWarp>
-            <a:spAutoFit/>
-          </a:bodyPr>
-          <a:lstStyle/>
-          <a:p>
-            <a:pPr marL="0" marR="0" indent="0" algn="l" defTabSz="914400" rtl="0" eaLnBrk="1" fontAlgn="base" latinLnBrk="0" hangingPunct="1">
-              <a:lnSpc>
-                <a:spcPct val="100000"/>
-              </a:lnSpc>
-              <a:spcBef>
-                <a:spcPct val="30000"/>
-              </a:spcBef>
-              <a:spcAft>
-                <a:spcPct val="0"/>
-              </a:spcAft>
-              <a:buClrTx/>
-              <a:buSzTx/>
-              <a:buFontTx/>
-              <a:buNone/>
-              <a:tabLst/>
-            </a:pPr>
-            <a:r>
-              <a:rPr lang="de-AT" sz="1000" b="0" dirty="0" smtClean="0">
-                <a:latin typeface="Arial" pitchFamily="34" charset="0"/>
-              </a:rPr>
-              <a:t>Load </a:t>
-            </a:r>
-            <a:r>
-              <a:rPr lang="de-AT" sz="1000" b="0" dirty="0" smtClean="0">
-                <a:latin typeface="Arial" pitchFamily="34" charset="0"/>
-              </a:rPr>
-              <a:t>all </a:t>
-            </a:r>
-            <a:r>
-              <a:rPr lang="de-AT" sz="1000" b="0" dirty="0" err="1" smtClean="0">
-                <a:latin typeface="Arial" pitchFamily="34" charset="0"/>
-              </a:rPr>
-              <a:t>required</a:t>
-            </a:r>
-            <a:r>
-              <a:rPr lang="de-AT" sz="1000" b="0" dirty="0" smtClean="0">
-                <a:latin typeface="Arial" pitchFamily="34" charset="0"/>
-              </a:rPr>
-              <a:t> </a:t>
-            </a:r>
-            <a:r>
-              <a:rPr lang="de-AT" sz="1000" b="0" dirty="0" err="1" smtClean="0">
-                <a:latin typeface="Arial" pitchFamily="34" charset="0"/>
-              </a:rPr>
-              <a:t>input</a:t>
-            </a:r>
-            <a:r>
-              <a:rPr lang="de-AT" sz="1000" b="0" dirty="0" smtClean="0">
-                <a:latin typeface="Arial" pitchFamily="34" charset="0"/>
-              </a:rPr>
-              <a:t> </a:t>
-            </a:r>
-            <a:r>
-              <a:rPr lang="de-AT" sz="1000" b="0" dirty="0" err="1" smtClean="0">
-                <a:latin typeface="Arial" pitchFamily="34" charset="0"/>
-              </a:rPr>
-              <a:t>files</a:t>
-            </a:r>
-            <a:r>
-              <a:rPr lang="de-AT" sz="1000" b="0" dirty="0" smtClean="0">
-                <a:latin typeface="Arial" pitchFamily="34" charset="0"/>
-              </a:rPr>
-              <a:t> via separate open </a:t>
-            </a:r>
-            <a:r>
-              <a:rPr lang="de-AT" sz="1000" b="0" dirty="0" err="1" smtClean="0">
-                <a:latin typeface="Arial" pitchFamily="34" charset="0"/>
-              </a:rPr>
-              <a:t>file</a:t>
-            </a:r>
-            <a:r>
-              <a:rPr lang="de-AT" sz="1000" b="0" dirty="0" smtClean="0">
-                <a:latin typeface="Arial" pitchFamily="34" charset="0"/>
-              </a:rPr>
-              <a:t> </a:t>
-            </a:r>
-            <a:r>
-              <a:rPr lang="de-AT" sz="1000" b="0" dirty="0" err="1" smtClean="0">
-                <a:latin typeface="Arial" pitchFamily="34" charset="0"/>
-              </a:rPr>
-              <a:t>buttons</a:t>
-            </a:r>
-            <a:r>
-              <a:rPr lang="de-AT" sz="1000" b="0" dirty="0">
-                <a:latin typeface="Arial" pitchFamily="34" charset="0"/>
-              </a:rPr>
-              <a:t/>
-            </a:r>
-            <a:br>
-              <a:rPr lang="de-AT" sz="1000" b="0" dirty="0">
-                <a:latin typeface="Arial" pitchFamily="34" charset="0"/>
-              </a:rPr>
-            </a:br>
-            <a:r>
-              <a:rPr lang="de-AT" sz="1000" b="0" dirty="0" smtClean="0">
-                <a:latin typeface="Arial" pitchFamily="34" charset="0"/>
-              </a:rPr>
-              <a:t>(</a:t>
-            </a:r>
-            <a:r>
-              <a:rPr lang="de-AT" sz="1000" b="0" dirty="0" err="1" smtClean="0">
-                <a:latin typeface="Arial" pitchFamily="34" charset="0"/>
-              </a:rPr>
-              <a:t>for</a:t>
-            </a:r>
-            <a:r>
-              <a:rPr lang="de-AT" sz="1000" b="0" dirty="0" smtClean="0">
-                <a:latin typeface="Arial" pitchFamily="34" charset="0"/>
-              </a:rPr>
-              <a:t> </a:t>
-            </a:r>
-            <a:r>
-              <a:rPr lang="de-AT" sz="1000" b="0" dirty="0" err="1" smtClean="0">
-                <a:latin typeface="Arial" pitchFamily="34" charset="0"/>
-              </a:rPr>
-              <a:t>file</a:t>
-            </a:r>
-            <a:r>
-              <a:rPr lang="de-AT" sz="1000" b="0" dirty="0" smtClean="0">
-                <a:latin typeface="Arial" pitchFamily="34" charset="0"/>
-              </a:rPr>
-              <a:t> </a:t>
-            </a:r>
-            <a:r>
-              <a:rPr lang="de-AT" sz="1000" b="0" dirty="0" err="1" smtClean="0">
-                <a:latin typeface="Arial" pitchFamily="34" charset="0"/>
-              </a:rPr>
-              <a:t>format</a:t>
-            </a:r>
-            <a:r>
-              <a:rPr lang="de-AT" sz="1000" b="0" dirty="0" smtClean="0">
-                <a:latin typeface="Arial" pitchFamily="34" charset="0"/>
-              </a:rPr>
-              <a:t> </a:t>
-            </a:r>
-            <a:r>
-              <a:rPr lang="de-AT" sz="1000" b="0" dirty="0" err="1" smtClean="0">
-                <a:latin typeface="Arial" pitchFamily="34" charset="0"/>
-              </a:rPr>
-              <a:t>please</a:t>
-            </a:r>
-            <a:r>
-              <a:rPr lang="de-AT" sz="1000" b="0" dirty="0" smtClean="0">
-                <a:latin typeface="Arial" pitchFamily="34" charset="0"/>
-              </a:rPr>
-              <a:t> </a:t>
-            </a:r>
-            <a:r>
-              <a:rPr lang="de-AT" sz="1000" b="0" dirty="0" err="1" smtClean="0">
-                <a:latin typeface="Arial" pitchFamily="34" charset="0"/>
-              </a:rPr>
-              <a:t>see</a:t>
-            </a:r>
-            <a:r>
-              <a:rPr lang="de-AT" sz="1000" b="0" dirty="0" smtClean="0">
-                <a:latin typeface="Arial" pitchFamily="34" charset="0"/>
-              </a:rPr>
-              <a:t> </a:t>
-            </a:r>
-            <a:r>
-              <a:rPr lang="de-AT" sz="1000" b="0" dirty="0" err="1" smtClean="0">
-                <a:latin typeface="Arial" pitchFamily="34" charset="0"/>
-              </a:rPr>
-              <a:t>demo</a:t>
-            </a:r>
-            <a:r>
-              <a:rPr lang="de-AT" sz="1000" b="0" dirty="0" smtClean="0">
-                <a:latin typeface="Arial" pitchFamily="34" charset="0"/>
-              </a:rPr>
-              <a:t> </a:t>
-            </a:r>
-            <a:r>
-              <a:rPr lang="de-AT" sz="1000" b="0" dirty="0" err="1" smtClean="0">
-                <a:latin typeface="Arial" pitchFamily="34" charset="0"/>
-              </a:rPr>
-              <a:t>files</a:t>
-            </a:r>
-            <a:r>
-              <a:rPr lang="de-AT" sz="1000" b="0" dirty="0" smtClean="0">
-                <a:latin typeface="Arial" pitchFamily="34" charset="0"/>
-              </a:rPr>
-              <a:t>)</a:t>
-            </a:r>
-            <a:endParaRPr kumimoji="0" lang="en-US" sz="1000" b="0" i="0" u="none" strike="noStrike" cap="none" normalizeH="0" baseline="0" dirty="0" smtClean="0">
-              <a:ln>
-                <a:noFill/>
-              </a:ln>
-              <a:solidFill>
-                <a:schemeClr val="tx1"/>
-              </a:solidFill>
-              <a:effectLst/>
-              <a:latin typeface="Arial" pitchFamily="34" charset="0"/>
-            </a:endParaRPr>
-          </a:p>
-        </p:txBody>
-      </p:sp>
-      <p:sp>
-        <p:nvSpPr>
-          <p:cNvPr id="14" name="Legende mit Linie 1 (Markierungsleiste) 13"/>
-          <p:cNvSpPr/>
-          <p:nvPr/>
-        </p:nvSpPr>
-        <p:spPr bwMode="auto">
-          <a:xfrm>
-            <a:off x="6660232" y="3695506"/>
-            <a:ext cx="2376000" cy="648000"/>
-          </a:xfrm>
-          <a:prstGeom prst="accentCallout1">
-            <a:avLst>
-              <a:gd name="adj1" fmla="val 56216"/>
-              <a:gd name="adj2" fmla="val -2353"/>
-              <a:gd name="adj3" fmla="val 172152"/>
-              <a:gd name="adj4" fmla="val -43145"/>
-            </a:avLst>
-          </a:prstGeom>
-          <a:noFill/>
-          <a:ln w="19050" cap="flat" cmpd="sng" algn="ctr">
-            <a:solidFill>
-              <a:srgbClr val="FFC000"/>
-            </a:solidFill>
-            <a:prstDash val="solid"/>
-            <a:round/>
-            <a:headEnd type="none" w="med" len="med"/>
-            <a:tailEnd type="none" w="med" len="med"/>
-          </a:ln>
-          <a:effectLst/>
-          <a:extLst/>
-        </p:spPr>
-        <p:txBody>
-          <a:bodyPr vert="horz" wrap="square" lIns="324000" tIns="45720" rIns="91440" bIns="45720" numCol="1" rtlCol="0" anchor="ctr" anchorCtr="0" compatLnSpc="1">
-            <a:prstTxWarp prst="textNoShape">
-              <a:avLst/>
-            </a:prstTxWarp>
-            <a:spAutoFit/>
-          </a:bodyPr>
-          <a:lstStyle/>
-          <a:p>
-            <a:pPr marL="0" marR="0" indent="0" algn="l" defTabSz="914400" rtl="0" eaLnBrk="1" fontAlgn="base" latinLnBrk="0" hangingPunct="1">
-              <a:lnSpc>
-                <a:spcPct val="100000"/>
-              </a:lnSpc>
-              <a:spcBef>
-                <a:spcPct val="30000"/>
-              </a:spcBef>
-              <a:spcAft>
-                <a:spcPct val="0"/>
-              </a:spcAft>
-              <a:buClrTx/>
-              <a:buSzTx/>
-              <a:buFontTx/>
-              <a:buNone/>
-              <a:tabLst/>
-            </a:pPr>
-            <a:r>
-              <a:rPr lang="de-AT" sz="1000" b="0" dirty="0" err="1" smtClean="0">
-                <a:latin typeface="Arial" pitchFamily="34" charset="0"/>
-              </a:rPr>
-              <a:t>Define</a:t>
-            </a:r>
-            <a:r>
-              <a:rPr lang="de-AT" sz="1000" b="0" dirty="0" smtClean="0">
-                <a:latin typeface="Arial" pitchFamily="34" charset="0"/>
-              </a:rPr>
-              <a:t> </a:t>
-            </a:r>
-            <a:r>
-              <a:rPr lang="de-AT" sz="1000" b="0" dirty="0" err="1" smtClean="0">
-                <a:latin typeface="Arial" pitchFamily="34" charset="0"/>
-              </a:rPr>
-              <a:t>directory</a:t>
-            </a:r>
-            <a:r>
-              <a:rPr lang="de-AT" sz="1000" b="0" dirty="0" smtClean="0">
-                <a:latin typeface="Arial" pitchFamily="34" charset="0"/>
-              </a:rPr>
-              <a:t> </a:t>
-            </a:r>
-            <a:r>
-              <a:rPr lang="de-AT" sz="1000" b="0" dirty="0" err="1" smtClean="0">
-                <a:latin typeface="Arial" pitchFamily="34" charset="0"/>
-              </a:rPr>
-              <a:t>where</a:t>
-            </a:r>
-            <a:r>
-              <a:rPr lang="de-AT" sz="1000" b="0" dirty="0" smtClean="0">
-                <a:latin typeface="Arial" pitchFamily="34" charset="0"/>
-              </a:rPr>
-              <a:t> </a:t>
-            </a:r>
-            <a:r>
-              <a:rPr lang="de-AT" sz="1000" b="0" dirty="0" err="1" smtClean="0">
-                <a:latin typeface="Arial" pitchFamily="34" charset="0"/>
-              </a:rPr>
-              <a:t>output</a:t>
-            </a:r>
-            <a:r>
-              <a:rPr lang="de-AT" sz="1000" b="0" dirty="0" smtClean="0">
-                <a:latin typeface="Arial" pitchFamily="34" charset="0"/>
-              </a:rPr>
-              <a:t> </a:t>
-            </a:r>
-            <a:r>
-              <a:rPr lang="de-AT" sz="1000" b="0" dirty="0" err="1" smtClean="0">
-                <a:latin typeface="Arial" pitchFamily="34" charset="0"/>
-              </a:rPr>
-              <a:t>files</a:t>
-            </a:r>
-            <a:r>
-              <a:rPr lang="de-AT" sz="1000" b="0" dirty="0" smtClean="0">
-                <a:latin typeface="Arial" pitchFamily="34" charset="0"/>
-              </a:rPr>
-              <a:t> </a:t>
-            </a:r>
-            <a:r>
-              <a:rPr lang="de-AT" sz="1000" b="0" dirty="0" err="1" smtClean="0">
-                <a:latin typeface="Arial" pitchFamily="34" charset="0"/>
-              </a:rPr>
-              <a:t>are</a:t>
-            </a:r>
-            <a:r>
-              <a:rPr lang="de-AT" sz="1000" b="0" dirty="0" smtClean="0">
-                <a:latin typeface="Arial" pitchFamily="34" charset="0"/>
-              </a:rPr>
-              <a:t> </a:t>
-            </a:r>
-            <a:r>
-              <a:rPr lang="de-AT" sz="1000" b="0" dirty="0" err="1" smtClean="0">
-                <a:latin typeface="Arial" pitchFamily="34" charset="0"/>
-              </a:rPr>
-              <a:t>stored</a:t>
-            </a:r>
-            <a:r>
-              <a:rPr lang="de-AT" sz="1000" b="0" dirty="0" smtClean="0">
-                <a:latin typeface="Arial" pitchFamily="34" charset="0"/>
-              </a:rPr>
-              <a:t> </a:t>
-            </a:r>
-            <a:endParaRPr kumimoji="0" lang="en-US" sz="1000" b="0" i="0" u="none" strike="noStrike" cap="none" normalizeH="0" baseline="0" dirty="0" smtClean="0">
-              <a:ln>
-                <a:noFill/>
-              </a:ln>
-              <a:solidFill>
-                <a:schemeClr val="tx1"/>
-              </a:solidFill>
-              <a:effectLst/>
-              <a:latin typeface="Arial" pitchFamily="34" charset="0"/>
-            </a:endParaRPr>
-          </a:p>
-        </p:txBody>
-      </p:sp>
-      <p:sp>
-        <p:nvSpPr>
-          <p:cNvPr id="17" name="Rechteck 16"/>
-          <p:cNvSpPr/>
-          <p:nvPr/>
-        </p:nvSpPr>
-        <p:spPr bwMode="auto">
-          <a:xfrm>
-            <a:off x="255788" y="4982088"/>
-            <a:ext cx="5316466" cy="1008000"/>
+            <a:off x="255788" y="5389954"/>
+            <a:ext cx="5316466" cy="864000"/>
           </a:xfrm>
           <a:prstGeom prst="rect">
             <a:avLst/>
           </a:prstGeom>
           <a:solidFill>
-            <a:srgbClr val="00B050">
+            <a:srgbClr val="7030A0">
               <a:alpha val="15000"/>
             </a:srgbClr>
           </a:solidFill>
           <a:ln w="25400" cap="flat" cmpd="sng" algn="ctr">
             <a:solidFill>
-              <a:srgbClr val="00B050"/>
+              <a:srgbClr val="7030A0"/>
             </a:solidFill>
-            <a:prstDash val="sysDash"/>
+            <a:prstDash val="solid"/>
             <a:round/>
             <a:headEnd type="none" w="med" len="med"/>
             <a:tailEnd type="triangle" w="med" len="med"/>
@@ -7118,275 +5528,28 @@
       </p:sp>
       <p:sp>
         <p:nvSpPr>
-          <p:cNvPr id="18" name="Legende mit Linie 1 (Markierungsleiste) 17"/>
+          <p:cNvPr id="34" name="Rechteck 33"/>
           <p:cNvSpPr/>
           <p:nvPr/>
         </p:nvSpPr>
         <p:spPr bwMode="auto">
           <a:xfrm>
-            <a:off x="6660232" y="5542429"/>
-            <a:ext cx="2376000" cy="646331"/>
-          </a:xfrm>
-          <a:prstGeom prst="accentCallout1">
-            <a:avLst>
-              <a:gd name="adj1" fmla="val 56216"/>
-              <a:gd name="adj2" fmla="val -2353"/>
-              <a:gd name="adj3" fmla="val -794"/>
-              <a:gd name="adj4" fmla="val -43620"/>
-            </a:avLst>
-          </a:prstGeom>
-          <a:noFill/>
-          <a:ln w="19050" cap="flat" cmpd="sng" algn="ctr">
-            <a:solidFill>
-              <a:srgbClr val="00B050"/>
-            </a:solidFill>
-            <a:prstDash val="solid"/>
-            <a:round/>
-            <a:headEnd type="none" w="med" len="med"/>
-            <a:tailEnd type="none" w="med" len="med"/>
-          </a:ln>
-          <a:effectLst/>
-          <a:extLst/>
-        </p:spPr>
-        <p:txBody>
-          <a:bodyPr vert="horz" wrap="square" lIns="108000" tIns="45720" rIns="91440" bIns="45720" numCol="1" rtlCol="0" anchor="ctr" anchorCtr="0" compatLnSpc="1">
-            <a:prstTxWarp prst="textNoShape">
-              <a:avLst/>
-            </a:prstTxWarp>
-            <a:spAutoFit/>
-          </a:bodyPr>
-          <a:lstStyle/>
-          <a:p>
-            <a:pPr marL="0" marR="0" indent="0" algn="l" defTabSz="914400" rtl="0" eaLnBrk="1" fontAlgn="base" latinLnBrk="0" hangingPunct="1">
-              <a:lnSpc>
-                <a:spcPct val="100000"/>
-              </a:lnSpc>
-              <a:spcBef>
-                <a:spcPct val="30000"/>
-              </a:spcBef>
-              <a:spcAft>
-                <a:spcPct val="0"/>
-              </a:spcAft>
-              <a:buClrTx/>
-              <a:buSzTx/>
-              <a:buFontTx/>
-              <a:buNone/>
-              <a:tabLst/>
-            </a:pPr>
-            <a:r>
-              <a:rPr lang="de-AT" sz="1000" b="0" dirty="0" smtClean="0">
-                <a:solidFill>
-                  <a:srgbClr val="00B050"/>
-                </a:solidFill>
-                <a:latin typeface="Arial" pitchFamily="34" charset="0"/>
-              </a:rPr>
-              <a:t>„Message“ </a:t>
-            </a:r>
-            <a:r>
-              <a:rPr lang="de-AT" sz="1000" b="0" dirty="0" err="1" smtClean="0">
-                <a:solidFill>
-                  <a:srgbClr val="00B050"/>
-                </a:solidFill>
-                <a:latin typeface="Arial" pitchFamily="34" charset="0"/>
-              </a:rPr>
-              <a:t>window</a:t>
-            </a:r>
-            <a:r>
-              <a:rPr lang="de-AT" sz="1000" b="0" dirty="0" smtClean="0">
-                <a:solidFill>
-                  <a:srgbClr val="00B050"/>
-                </a:solidFill>
-                <a:latin typeface="Arial" pitchFamily="34" charset="0"/>
-              </a:rPr>
-              <a:t> will </a:t>
-            </a:r>
-            <a:r>
-              <a:rPr lang="de-AT" sz="1000" b="0" dirty="0" err="1" smtClean="0">
-                <a:solidFill>
-                  <a:srgbClr val="00B050"/>
-                </a:solidFill>
-                <a:latin typeface="Arial" pitchFamily="34" charset="0"/>
-              </a:rPr>
-              <a:t>display</a:t>
-            </a:r>
-            <a:endParaRPr lang="de-AT" sz="1000" b="0" dirty="0">
-              <a:solidFill>
-                <a:srgbClr val="00B050"/>
-              </a:solidFill>
-              <a:latin typeface="Arial" pitchFamily="34" charset="0"/>
-            </a:endParaRPr>
-          </a:p>
-          <a:p>
-            <a:pPr marL="0" marR="0" indent="0" algn="l" defTabSz="914400" rtl="0" eaLnBrk="1" fontAlgn="base" latinLnBrk="0" hangingPunct="1">
-              <a:lnSpc>
-                <a:spcPct val="100000"/>
-              </a:lnSpc>
-              <a:spcBef>
-                <a:spcPct val="30000"/>
-              </a:spcBef>
-              <a:spcAft>
-                <a:spcPct val="0"/>
-              </a:spcAft>
-              <a:buClrTx/>
-              <a:buSzTx/>
-              <a:buFontTx/>
-              <a:buNone/>
-              <a:tabLst/>
-            </a:pPr>
-            <a:r>
-              <a:rPr lang="de-AT" sz="1000" b="0" dirty="0" err="1" smtClean="0">
-                <a:solidFill>
-                  <a:srgbClr val="00B050"/>
-                </a:solidFill>
-                <a:latin typeface="Arial" pitchFamily="34" charset="0"/>
-              </a:rPr>
-              <a:t>errors</a:t>
-            </a:r>
-            <a:r>
-              <a:rPr lang="de-AT" sz="1000" b="0" dirty="0" smtClean="0">
-                <a:solidFill>
-                  <a:srgbClr val="00B050"/>
-                </a:solidFill>
-                <a:latin typeface="Arial" pitchFamily="34" charset="0"/>
-              </a:rPr>
-              <a:t> (</a:t>
-            </a:r>
-            <a:r>
-              <a:rPr lang="de-AT" sz="1000" b="0" dirty="0" err="1" smtClean="0">
-                <a:solidFill>
-                  <a:srgbClr val="00B050"/>
-                </a:solidFill>
-                <a:latin typeface="Arial" pitchFamily="34" charset="0"/>
-              </a:rPr>
-              <a:t>red</a:t>
-            </a:r>
-            <a:r>
-              <a:rPr lang="de-AT" sz="1000" b="0" dirty="0" smtClean="0">
-                <a:solidFill>
-                  <a:srgbClr val="00B050"/>
-                </a:solidFill>
-                <a:latin typeface="Arial" pitchFamily="34" charset="0"/>
-              </a:rPr>
-              <a:t>), </a:t>
-            </a:r>
-            <a:r>
-              <a:rPr lang="de-AT" sz="1000" b="0" dirty="0" err="1" smtClean="0">
-                <a:solidFill>
-                  <a:srgbClr val="00B050"/>
-                </a:solidFill>
-                <a:latin typeface="Arial" pitchFamily="34" charset="0"/>
-              </a:rPr>
-              <a:t>warnings</a:t>
-            </a:r>
-            <a:r>
-              <a:rPr lang="de-AT" sz="1000" b="0" dirty="0" smtClean="0">
-                <a:solidFill>
-                  <a:srgbClr val="00B050"/>
-                </a:solidFill>
-                <a:latin typeface="Arial" pitchFamily="34" charset="0"/>
-              </a:rPr>
-              <a:t> (orange),</a:t>
-            </a:r>
-          </a:p>
-          <a:p>
-            <a:pPr marL="0" marR="0" indent="0" algn="l" defTabSz="914400" rtl="0" eaLnBrk="1" fontAlgn="base" latinLnBrk="0" hangingPunct="1">
-              <a:lnSpc>
-                <a:spcPct val="100000"/>
-              </a:lnSpc>
-              <a:spcBef>
-                <a:spcPct val="30000"/>
-              </a:spcBef>
-              <a:spcAft>
-                <a:spcPct val="0"/>
-              </a:spcAft>
-              <a:buClrTx/>
-              <a:buSzTx/>
-              <a:buFontTx/>
-              <a:buNone/>
-              <a:tabLst/>
-            </a:pPr>
-            <a:r>
-              <a:rPr lang="de-AT" sz="1000" b="0" dirty="0" err="1" smtClean="0">
-                <a:solidFill>
-                  <a:srgbClr val="00B050"/>
-                </a:solidFill>
-                <a:latin typeface="Arial" pitchFamily="34" charset="0"/>
-              </a:rPr>
-              <a:t>informations</a:t>
-            </a:r>
-            <a:r>
-              <a:rPr lang="de-AT" sz="1000" b="0" dirty="0" smtClean="0">
-                <a:solidFill>
-                  <a:srgbClr val="00B050"/>
-                </a:solidFill>
-                <a:latin typeface="Arial" pitchFamily="34" charset="0"/>
-              </a:rPr>
-              <a:t> </a:t>
-            </a:r>
-            <a:r>
-              <a:rPr lang="de-AT" sz="1000" b="0" dirty="0" err="1" smtClean="0">
-                <a:solidFill>
-                  <a:srgbClr val="00B050"/>
-                </a:solidFill>
-                <a:latin typeface="Arial" pitchFamily="34" charset="0"/>
-              </a:rPr>
-              <a:t>and</a:t>
-            </a:r>
-            <a:r>
-              <a:rPr lang="de-AT" sz="1000" b="0" dirty="0" smtClean="0">
-                <a:solidFill>
-                  <a:srgbClr val="00B050"/>
-                </a:solidFill>
-                <a:latin typeface="Arial" pitchFamily="34" charset="0"/>
-              </a:rPr>
-              <a:t> </a:t>
-            </a:r>
-            <a:r>
-              <a:rPr lang="de-AT" sz="1000" b="0" dirty="0" err="1" smtClean="0">
-                <a:solidFill>
-                  <a:srgbClr val="00B050"/>
-                </a:solidFill>
-                <a:latin typeface="Arial" pitchFamily="34" charset="0"/>
-              </a:rPr>
-              <a:t>results</a:t>
-            </a:r>
-            <a:endParaRPr kumimoji="0" lang="en-US" sz="1000" b="0" i="0" u="none" strike="noStrike" cap="none" normalizeH="0" baseline="0" dirty="0" smtClean="0">
-              <a:ln>
-                <a:noFill/>
-              </a:ln>
-              <a:solidFill>
-                <a:srgbClr val="00B050"/>
-              </a:solidFill>
-              <a:effectLst/>
-              <a:latin typeface="Arial" pitchFamily="34" charset="0"/>
-            </a:endParaRPr>
-          </a:p>
-        </p:txBody>
-      </p:sp>
-      <p:sp>
-        <p:nvSpPr>
-          <p:cNvPr id="16" name="Rechteck 15"/>
-          <p:cNvSpPr/>
-          <p:nvPr/>
-        </p:nvSpPr>
-        <p:spPr bwMode="auto">
-          <a:xfrm>
-            <a:off x="5220072" y="2925366"/>
-            <a:ext cx="352182" cy="612000"/>
+            <a:off x="255788" y="1620487"/>
+            <a:ext cx="5316466" cy="756000"/>
           </a:xfrm>
           <a:prstGeom prst="rect">
             <a:avLst/>
           </a:prstGeom>
           <a:solidFill>
-            <a:srgbClr val="7030A0">
+            <a:srgbClr val="FFC000">
               <a:alpha val="15000"/>
             </a:srgbClr>
           </a:solidFill>
           <a:ln w="25400" cap="flat" cmpd="sng" algn="ctr">
             <a:solidFill>
-              <a:srgbClr val="7030A0"/>
+              <a:srgbClr val="FFC000"/>
             </a:solidFill>
-            <a:prstDash val="sysDash"/>
+            <a:prstDash val="solid"/>
             <a:round/>
             <a:headEnd type="none" w="med" len="med"/>
             <a:tailEnd type="triangle" w="med" len="med"/>
@@ -7434,28 +5597,28 @@
       </p:sp>
       <p:sp>
         <p:nvSpPr>
-          <p:cNvPr id="19" name="Rechteck 18"/>
+          <p:cNvPr id="35" name="Rechteck 34"/>
           <p:cNvSpPr/>
           <p:nvPr/>
         </p:nvSpPr>
         <p:spPr bwMode="auto">
           <a:xfrm>
-            <a:off x="255788" y="3589612"/>
-            <a:ext cx="5316466" cy="648000"/>
+            <a:off x="255788" y="4830404"/>
+            <a:ext cx="5316466" cy="252000"/>
           </a:xfrm>
           <a:prstGeom prst="rect">
             <a:avLst/>
           </a:prstGeom>
           <a:solidFill>
-            <a:srgbClr val="00B0F0">
+            <a:srgbClr val="FF0000">
               <a:alpha val="15000"/>
             </a:srgbClr>
           </a:solidFill>
           <a:ln w="25400" cap="flat" cmpd="sng" algn="ctr">
             <a:solidFill>
-              <a:srgbClr val="00B0F0"/>
+              <a:srgbClr val="FF0000"/>
             </a:solidFill>
-            <a:prstDash val="sysDash"/>
+            <a:prstDash val="solid"/>
             <a:round/>
             <a:headEnd type="none" w="med" len="med"/>
             <a:tailEnd type="triangle" w="med" len="med"/>
@@ -7503,44 +5666,75 @@
       </p:sp>
       <p:sp>
         <p:nvSpPr>
-          <p:cNvPr id="20" name="Legende mit Linie 1 (Markierungsleiste) 19"/>
+          <p:cNvPr id="36" name="Legende mit Linie 1 (Markierungsleiste) 20"/>
           <p:cNvSpPr/>
           <p:nvPr/>
         </p:nvSpPr>
         <p:spPr bwMode="auto">
           <a:xfrm>
-            <a:off x="6660232" y="2835861"/>
-            <a:ext cx="2376000" cy="648000"/>
+            <a:off x="6660232" y="1014714"/>
+            <a:ext cx="2483768" cy="701731"/>
           </a:xfrm>
           <a:prstGeom prst="accentCallout1">
             <a:avLst>
               <a:gd name="adj1" fmla="val 56216"/>
               <a:gd name="adj2" fmla="val -2353"/>
-              <a:gd name="adj3" fmla="val 165437"/>
-              <a:gd name="adj4" fmla="val -43029"/>
+              <a:gd name="adj3" fmla="val 64670"/>
+              <a:gd name="adj4" fmla="val -43174"/>
             </a:avLst>
           </a:prstGeom>
           <a:noFill/>
           <a:ln w="19050" cap="flat" cmpd="sng" algn="ctr">
             <a:solidFill>
-              <a:srgbClr val="00B0F0"/>
+              <a:schemeClr val="tx1"/>
             </a:solidFill>
             <a:prstDash val="solid"/>
             <a:round/>
             <a:headEnd type="none" w="med" len="med"/>
-            <a:tailEnd type="none" w="med" len="med"/>
+            <a:tailEnd type="triangle" w="med" len="med"/>
           </a:ln>
           <a:effectLst/>
           <a:extLst/>
         </p:spPr>
         <p:txBody>
-          <a:bodyPr vert="horz" wrap="square" lIns="324000" tIns="45720" rIns="91440" bIns="45720" numCol="1" rtlCol="0" anchor="ctr" anchorCtr="0" compatLnSpc="1">
+          <a:bodyPr vert="horz" wrap="square" lIns="91440" tIns="45720" rIns="91440" bIns="45720" numCol="1" rtlCol="0" anchor="ctr" anchorCtr="0" compatLnSpc="1">
             <a:prstTxWarp prst="textNoShape">
               <a:avLst/>
             </a:prstTxWarp>
             <a:spAutoFit/>
           </a:bodyPr>
           <a:lstStyle/>
+          <a:p>
+            <a:pPr marL="0" marR="0" indent="0" algn="ctr" defTabSz="914400" rtl="0" eaLnBrk="1" fontAlgn="base" latinLnBrk="0" hangingPunct="1">
+              <a:lnSpc>
+                <a:spcPct val="100000"/>
+              </a:lnSpc>
+              <a:spcBef>
+                <a:spcPct val="30000"/>
+              </a:spcBef>
+              <a:spcAft>
+                <a:spcPct val="0"/>
+              </a:spcAft>
+              <a:buClrTx/>
+              <a:buSzTx/>
+              <a:buFontTx/>
+              <a:buNone/>
+              <a:tabLst/>
+            </a:pPr>
+            <a:r>
+              <a:rPr kumimoji="0" lang="de-AT" sz="1100" i="0" u="sng" strike="noStrike" cap="none" normalizeH="0" baseline="0" dirty="0" smtClean="0">
+                <a:ln>
+                  <a:noFill/>
+                </a:ln>
+                <a:solidFill>
+                  <a:schemeClr val="tx1"/>
+                </a:solidFill>
+                <a:effectLst/>
+                <a:latin typeface="Arial" pitchFamily="34" charset="0"/>
+              </a:rPr>
+              <a:t>Job-file block</a:t>
+            </a:r>
+          </a:p>
           <a:p>
             <a:pPr marL="0" marR="0" indent="0" algn="l" defTabSz="914400" rtl="0" eaLnBrk="1" fontAlgn="base" latinLnBrk="0" hangingPunct="1">
               <a:lnSpc>
@@ -7559,130 +5753,81 @@
               <a:tabLst/>
             </a:pPr>
             <a:r>
-              <a:rPr lang="de-AT" sz="1000" b="0" dirty="0" smtClean="0">
-                <a:latin typeface="Arial" pitchFamily="34" charset="0"/>
-              </a:rPr>
-              <a:t>Input </a:t>
-            </a:r>
-            <a:r>
-              <a:rPr lang="de-AT" sz="1000" b="0" dirty="0" err="1" smtClean="0">
-                <a:latin typeface="Arial" pitchFamily="34" charset="0"/>
-              </a:rPr>
-              <a:t>measured</a:t>
-            </a:r>
-            <a:r>
-              <a:rPr lang="de-AT" sz="1000" b="0" dirty="0" smtClean="0">
+              <a:rPr lang="de-AT" sz="1100" b="0" dirty="0" smtClean="0">
+                <a:latin typeface="Arial" pitchFamily="34" charset="0"/>
+              </a:rPr>
+              <a:t>Displays </a:t>
+            </a:r>
+            <a:r>
+              <a:rPr lang="de-AT" sz="1100" b="0" dirty="0" err="1" smtClean="0">
+                <a:latin typeface="Arial" pitchFamily="34" charset="0"/>
+              </a:rPr>
+              <a:t>path</a:t>
+            </a:r>
+            <a:r>
+              <a:rPr lang="de-AT" sz="1100" b="0" dirty="0" smtClean="0">
                 <a:latin typeface="Arial" pitchFamily="34" charset="0"/>
               </a:rPr>
               <a:t> </a:t>
             </a:r>
             <a:r>
-              <a:rPr lang="de-AT" sz="1000" b="0" dirty="0" err="1" smtClean="0">
-                <a:latin typeface="Arial" pitchFamily="34" charset="0"/>
-              </a:rPr>
-              <a:t>specific</a:t>
-            </a:r>
-            <a:r>
-              <a:rPr lang="de-AT" sz="1000" b="0" dirty="0" smtClean="0">
-                <a:latin typeface="Arial" pitchFamily="34" charset="0"/>
-              </a:rPr>
-              <a:t> FC </a:t>
-            </a:r>
-            <a:r>
-              <a:rPr lang="de-AT" sz="1000" b="0" dirty="0" err="1" smtClean="0">
-                <a:latin typeface="Arial" pitchFamily="34" charset="0"/>
-              </a:rPr>
-              <a:t>values</a:t>
-            </a:r>
-            <a:r>
-              <a:rPr lang="de-AT" sz="1000" b="0" dirty="0" smtClean="0">
+              <a:rPr lang="de-AT" sz="1100" b="0" dirty="0" err="1" smtClean="0">
+                <a:latin typeface="Arial" pitchFamily="34" charset="0"/>
+              </a:rPr>
+              <a:t>and</a:t>
+            </a:r>
+            <a:r>
+              <a:rPr lang="de-AT" sz="1100" b="0" dirty="0" smtClean="0">
                 <a:latin typeface="Arial" pitchFamily="34" charset="0"/>
               </a:rPr>
               <a:t> </a:t>
             </a:r>
             <a:r>
-              <a:rPr lang="de-AT" sz="1000" b="0" dirty="0" err="1" smtClean="0">
-                <a:latin typeface="Arial" pitchFamily="34" charset="0"/>
-              </a:rPr>
-              <a:t>and</a:t>
-            </a:r>
-            <a:r>
-              <a:rPr lang="de-AT" sz="1000" b="0" dirty="0" smtClean="0">
+              <a:rPr lang="de-AT" sz="1100" b="0" dirty="0" err="1" smtClean="0">
+                <a:latin typeface="Arial" pitchFamily="34" charset="0"/>
+              </a:rPr>
+              <a:t>filename</a:t>
+            </a:r>
+            <a:r>
+              <a:rPr lang="de-AT" sz="1100" b="0" dirty="0" smtClean="0">
                 <a:latin typeface="Arial" pitchFamily="34" charset="0"/>
               </a:rPr>
               <a:t> </a:t>
             </a:r>
             <a:r>
-              <a:rPr lang="de-AT" sz="1000" b="0" dirty="0" err="1" smtClean="0">
-                <a:latin typeface="Arial" pitchFamily="34" charset="0"/>
-              </a:rPr>
-              <a:t>correction</a:t>
-            </a:r>
-            <a:r>
-              <a:rPr lang="de-AT" sz="1000" b="0" dirty="0" smtClean="0">
+              <a:rPr lang="de-AT" sz="1100" b="0" dirty="0" err="1" smtClean="0">
+                <a:latin typeface="Arial" pitchFamily="34" charset="0"/>
+              </a:rPr>
+              <a:t>of</a:t>
+            </a:r>
+            <a:r>
+              <a:rPr lang="de-AT" sz="1100" b="0" dirty="0" smtClean="0">
                 <a:latin typeface="Arial" pitchFamily="34" charset="0"/>
               </a:rPr>
               <a:t> </a:t>
             </a:r>
             <a:r>
-              <a:rPr lang="de-AT" sz="1000" b="0" dirty="0" err="1" smtClean="0">
-                <a:latin typeface="Arial" pitchFamily="34" charset="0"/>
-              </a:rPr>
-              <a:t>factor</a:t>
-            </a:r>
-            <a:endParaRPr kumimoji="0" lang="en-US" sz="1000" b="0" i="0" u="none" strike="noStrike" cap="none" normalizeH="0" baseline="0" dirty="0" smtClean="0">
-              <a:ln>
-                <a:noFill/>
-              </a:ln>
-              <a:solidFill>
-                <a:schemeClr val="tx1"/>
-              </a:solidFill>
-              <a:effectLst/>
+              <a:rPr lang="de-AT" sz="1100" b="0" dirty="0" err="1" smtClean="0">
+                <a:latin typeface="Arial" pitchFamily="34" charset="0"/>
+              </a:rPr>
+              <a:t>job</a:t>
+            </a:r>
+            <a:r>
+              <a:rPr lang="de-AT" sz="1100" b="0" dirty="0" smtClean="0">
+                <a:latin typeface="Arial" pitchFamily="34" charset="0"/>
+              </a:rPr>
+              <a:t> </a:t>
+            </a:r>
+            <a:r>
+              <a:rPr lang="de-AT" sz="1100" b="0" dirty="0" err="1" smtClean="0">
+                <a:latin typeface="Arial" pitchFamily="34" charset="0"/>
+              </a:rPr>
+              <a:t>file</a:t>
+            </a:r>
+            <a:endParaRPr lang="de-AT" sz="1100" b="0" dirty="0" smtClean="0">
               <a:latin typeface="Arial" pitchFamily="34" charset="0"/>
             </a:endParaRPr>
           </a:p>
-        </p:txBody>
-      </p:sp>
-      <p:sp>
-        <p:nvSpPr>
-          <p:cNvPr id="21" name="Legende mit Linie 1 (Markierungsleiste) 20"/>
-          <p:cNvSpPr/>
-          <p:nvPr/>
-        </p:nvSpPr>
-        <p:spPr bwMode="auto">
-          <a:xfrm>
-            <a:off x="6660232" y="953295"/>
-            <a:ext cx="2376000" cy="646331"/>
-          </a:xfrm>
-          <a:prstGeom prst="accentCallout1">
-            <a:avLst>
-              <a:gd name="adj1" fmla="val 56216"/>
-              <a:gd name="adj2" fmla="val -2353"/>
-              <a:gd name="adj3" fmla="val 157255"/>
-              <a:gd name="adj4" fmla="val -43117"/>
-            </a:avLst>
-          </a:prstGeom>
-          <a:noFill/>
-          <a:ln w="19050" cap="flat" cmpd="sng" algn="ctr">
-            <a:solidFill>
-              <a:srgbClr val="FF0000"/>
-            </a:solidFill>
-            <a:prstDash val="solid"/>
-            <a:round/>
-            <a:headEnd type="none" w="med" len="med"/>
-            <a:tailEnd type="none" w="med" len="med"/>
-          </a:ln>
-          <a:effectLst/>
-          <a:extLst/>
-        </p:spPr>
-        <p:txBody>
-          <a:bodyPr vert="horz" wrap="square" lIns="324000" tIns="45720" rIns="91440" bIns="45720" numCol="1" rtlCol="0" anchor="ctr" anchorCtr="0" compatLnSpc="1">
-            <a:prstTxWarp prst="textNoShape">
-              <a:avLst/>
-            </a:prstTxWarp>
-            <a:spAutoFit/>
-          </a:bodyPr>
-          <a:lstStyle/>
           <a:p>
             <a:pPr marL="0" marR="0" indent="0" algn="l" defTabSz="914400" rtl="0" eaLnBrk="1" fontAlgn="base" latinLnBrk="0" hangingPunct="1">
               <a:lnSpc>
@@ -7701,38 +5846,192 @@
               <a:tabLst/>
             </a:pPr>
             <a:r>
-              <a:rPr lang="de-AT" sz="1000" b="0" dirty="0" smtClean="0">
-                <a:latin typeface="Arial" pitchFamily="34" charset="0"/>
-              </a:rPr>
-              <a:t>Input </a:t>
-            </a:r>
-            <a:r>
-              <a:rPr lang="de-AT" sz="1000" b="0" dirty="0" smtClean="0">
-                <a:latin typeface="Arial" pitchFamily="34" charset="0"/>
-              </a:rPr>
-              <a:t>all </a:t>
-            </a:r>
-            <a:r>
-              <a:rPr lang="de-AT" sz="1000" b="0" dirty="0" err="1" smtClean="0">
-                <a:latin typeface="Arial" pitchFamily="34" charset="0"/>
-              </a:rPr>
-              <a:t>component</a:t>
-            </a:r>
-            <a:r>
-              <a:rPr lang="de-AT" sz="1000" b="0" dirty="0" smtClean="0">
+              <a:rPr kumimoji="0" lang="de-AT" sz="1100" b="0" i="0" u="none" strike="noStrike" cap="none" normalizeH="0" baseline="0" dirty="0" smtClean="0">
+                <a:ln>
+                  <a:noFill/>
+                </a:ln>
+                <a:solidFill>
+                  <a:schemeClr val="tx1"/>
+                </a:solidFill>
+                <a:effectLst/>
+                <a:latin typeface="Arial" pitchFamily="34" charset="0"/>
+              </a:rPr>
+              <a:t>Open</a:t>
+            </a:r>
+            <a:r>
+              <a:rPr kumimoji="0" lang="de-AT" sz="1100" b="0" i="0" u="none" strike="noStrike" cap="none" normalizeH="0" dirty="0" smtClean="0">
+                <a:ln>
+                  <a:noFill/>
+                </a:ln>
+                <a:solidFill>
+                  <a:schemeClr val="tx1"/>
+                </a:solidFill>
+                <a:effectLst/>
                 <a:latin typeface="Arial" pitchFamily="34" charset="0"/>
               </a:rPr>
               <a:t> </a:t>
             </a:r>
             <a:r>
-              <a:rPr lang="de-AT" sz="1000" b="0" dirty="0" err="1" smtClean="0">
-                <a:latin typeface="Arial" pitchFamily="34" charset="0"/>
-              </a:rPr>
-              <a:t>data</a:t>
-            </a:r>
-            <a:endParaRPr lang="de-AT" sz="1000" b="0" dirty="0" smtClean="0">
+              <a:rPr kumimoji="0" lang="de-AT" sz="1100" b="0" i="0" u="none" strike="noStrike" cap="none" normalizeH="0" dirty="0" err="1" smtClean="0">
+                <a:ln>
+                  <a:noFill/>
+                </a:ln>
+                <a:solidFill>
+                  <a:schemeClr val="tx1"/>
+                </a:solidFill>
+                <a:effectLst/>
+                <a:latin typeface="Arial" pitchFamily="34" charset="0"/>
+              </a:rPr>
+              <a:t>and</a:t>
+            </a:r>
+            <a:r>
+              <a:rPr kumimoji="0" lang="de-AT" sz="1100" b="0" i="0" u="none" strike="noStrike" cap="none" normalizeH="0" dirty="0" smtClean="0">
+                <a:ln>
+                  <a:noFill/>
+                </a:ln>
+                <a:solidFill>
+                  <a:schemeClr val="tx1"/>
+                </a:solidFill>
+                <a:effectLst/>
+                <a:latin typeface="Arial" pitchFamily="34" charset="0"/>
+              </a:rPr>
+              <a:t> save </a:t>
+            </a:r>
+            <a:r>
+              <a:rPr kumimoji="0" lang="de-AT" sz="1100" b="0" i="0" u="none" strike="noStrike" cap="none" normalizeH="0" dirty="0" err="1" smtClean="0">
+                <a:ln>
+                  <a:noFill/>
+                </a:ln>
+                <a:solidFill>
+                  <a:schemeClr val="tx1"/>
+                </a:solidFill>
+                <a:effectLst/>
+                <a:latin typeface="Arial" pitchFamily="34" charset="0"/>
+              </a:rPr>
+              <a:t>job</a:t>
+            </a:r>
+            <a:r>
+              <a:rPr kumimoji="0" lang="de-AT" sz="1100" b="0" i="0" u="none" strike="noStrike" cap="none" normalizeH="0" dirty="0" smtClean="0">
+                <a:ln>
+                  <a:noFill/>
+                </a:ln>
+                <a:solidFill>
+                  <a:schemeClr val="tx1"/>
+                </a:solidFill>
+                <a:effectLst/>
+                <a:latin typeface="Arial" pitchFamily="34" charset="0"/>
+              </a:rPr>
+              <a:t> </a:t>
+            </a:r>
+            <a:r>
+              <a:rPr kumimoji="0" lang="de-AT" sz="1100" b="0" i="0" u="none" strike="noStrike" cap="none" normalizeH="0" dirty="0" err="1" smtClean="0">
+                <a:ln>
+                  <a:noFill/>
+                </a:ln>
+                <a:solidFill>
+                  <a:schemeClr val="tx1"/>
+                </a:solidFill>
+                <a:effectLst/>
+                <a:latin typeface="Arial" pitchFamily="34" charset="0"/>
+              </a:rPr>
+              <a:t>file</a:t>
+            </a:r>
+            <a:endParaRPr kumimoji="0" lang="en-US" sz="1100" b="0" i="0" u="none" strike="noStrike" cap="none" normalizeH="0" baseline="0" dirty="0" smtClean="0">
+              <a:ln>
+                <a:noFill/>
+              </a:ln>
+              <a:solidFill>
+                <a:schemeClr val="tx1"/>
+              </a:solidFill>
+              <a:effectLst/>
               <a:latin typeface="Arial" pitchFamily="34" charset="0"/>
             </a:endParaRPr>
+          </a:p>
+        </p:txBody>
+      </p:sp>
+      <p:sp>
+        <p:nvSpPr>
+          <p:cNvPr id="37" name="Legende mit Linie 1 (Markierungsleiste) 20"/>
+          <p:cNvSpPr/>
+          <p:nvPr/>
+        </p:nvSpPr>
+        <p:spPr bwMode="auto">
+          <a:xfrm>
+            <a:off x="6660232" y="1818816"/>
+            <a:ext cx="2483768" cy="701731"/>
+          </a:xfrm>
+          <a:prstGeom prst="accentCallout1">
+            <a:avLst>
+              <a:gd name="adj1" fmla="val 56216"/>
+              <a:gd name="adj2" fmla="val -2353"/>
+              <a:gd name="adj3" fmla="val 26763"/>
+              <a:gd name="adj4" fmla="val -42840"/>
+            </a:avLst>
+          </a:prstGeom>
+          <a:noFill/>
+          <a:ln w="19050" cap="flat" cmpd="sng" algn="ctr">
+            <a:solidFill>
+              <a:schemeClr val="tx1"/>
+            </a:solidFill>
+            <a:prstDash val="solid"/>
+            <a:round/>
+            <a:headEnd type="none" w="med" len="med"/>
+            <a:tailEnd type="triangle" w="med" len="med"/>
+          </a:ln>
+          <a:effectLst/>
+          <a:extLst/>
+        </p:spPr>
+        <p:txBody>
+          <a:bodyPr vert="horz" wrap="square" lIns="91440" tIns="45720" rIns="91440" bIns="45720" numCol="1" rtlCol="0" anchor="ctr" anchorCtr="0" compatLnSpc="1">
+            <a:prstTxWarp prst="textNoShape">
+              <a:avLst/>
+            </a:prstTxWarp>
+            <a:spAutoFit/>
+          </a:bodyPr>
+          <a:lstStyle/>
+          <a:p>
+            <a:pPr marL="0" marR="0" indent="0" algn="ctr" defTabSz="914400" rtl="0" eaLnBrk="1" fontAlgn="base" latinLnBrk="0" hangingPunct="1">
+              <a:lnSpc>
+                <a:spcPct val="100000"/>
+              </a:lnSpc>
+              <a:spcBef>
+                <a:spcPct val="30000"/>
+              </a:spcBef>
+              <a:spcAft>
+                <a:spcPct val="0"/>
+              </a:spcAft>
+              <a:buClrTx/>
+              <a:buSzTx/>
+              <a:buFontTx/>
+              <a:buNone/>
+              <a:tabLst/>
+            </a:pPr>
+            <a:r>
+              <a:rPr kumimoji="0" lang="de-AT" sz="1100" i="0" u="sng" strike="noStrike" cap="none" normalizeH="0" baseline="0" dirty="0" err="1" smtClean="0">
+                <a:ln>
+                  <a:noFill/>
+                </a:ln>
+                <a:solidFill>
+                  <a:schemeClr val="tx1"/>
+                </a:solidFill>
+                <a:effectLst/>
+                <a:latin typeface="Arial" pitchFamily="34" charset="0"/>
+              </a:rPr>
+              <a:t>Component</a:t>
+            </a:r>
+            <a:r>
+              <a:rPr kumimoji="0" lang="de-AT" sz="1100" i="0" u="sng" strike="noStrike" cap="none" normalizeH="0" baseline="0" dirty="0" smtClean="0">
+                <a:ln>
+                  <a:noFill/>
+                </a:ln>
+                <a:solidFill>
+                  <a:schemeClr val="tx1"/>
+                </a:solidFill>
+                <a:effectLst/>
+                <a:latin typeface="Arial" pitchFamily="34" charset="0"/>
+              </a:rPr>
+              <a:t> block</a:t>
+            </a:r>
           </a:p>
           <a:p>
             <a:pPr marL="0" marR="0" indent="0" algn="l" defTabSz="914400" rtl="0" eaLnBrk="1" fontAlgn="base" latinLnBrk="0" hangingPunct="1">
@@ -7751,14 +6050,43 @@
               <a:buNone/>
               <a:tabLst/>
             </a:pPr>
-            <a:endParaRPr kumimoji="0" lang="de-AT" sz="1000" b="0" i="0" u="none" strike="noStrike" cap="none" normalizeH="0" baseline="0" dirty="0">
-              <a:ln>
-                <a:noFill/>
-              </a:ln>
-              <a:solidFill>
-                <a:schemeClr val="tx1"/>
-              </a:solidFill>
-              <a:effectLst/>
+            <a:r>
+              <a:rPr lang="de-AT" sz="1100" b="0" dirty="0" smtClean="0">
+                <a:latin typeface="Arial" pitchFamily="34" charset="0"/>
+              </a:rPr>
+              <a:t>Fields </a:t>
+            </a:r>
+            <a:r>
+              <a:rPr lang="de-AT" sz="1100" b="0" dirty="0" err="1" smtClean="0">
+                <a:latin typeface="Arial" pitchFamily="34" charset="0"/>
+              </a:rPr>
+              <a:t>for</a:t>
+            </a:r>
+            <a:r>
+              <a:rPr lang="de-AT" sz="1100" b="0" dirty="0" smtClean="0">
+                <a:latin typeface="Arial" pitchFamily="34" charset="0"/>
+              </a:rPr>
+              <a:t> </a:t>
+            </a:r>
+            <a:r>
+              <a:rPr lang="de-AT" sz="1100" b="0" dirty="0" err="1" smtClean="0">
+                <a:latin typeface="Arial" pitchFamily="34" charset="0"/>
+              </a:rPr>
+              <a:t>component</a:t>
+            </a:r>
+            <a:r>
+              <a:rPr lang="de-AT" sz="1100" b="0" dirty="0" smtClean="0">
+                <a:latin typeface="Arial" pitchFamily="34" charset="0"/>
+              </a:rPr>
+              <a:t> </a:t>
+            </a:r>
+            <a:r>
+              <a:rPr lang="de-AT" sz="1100" b="0" dirty="0" err="1" smtClean="0">
+                <a:latin typeface="Arial" pitchFamily="34" charset="0"/>
+              </a:rPr>
+              <a:t>information</a:t>
+            </a:r>
+            <a:endParaRPr lang="de-AT" sz="1100" b="0" dirty="0" smtClean="0">
               <a:latin typeface="Arial" pitchFamily="34" charset="0"/>
             </a:endParaRPr>
           </a:p>
@@ -7779,7 +6107,85 @@
               <a:buNone/>
               <a:tabLst/>
             </a:pPr>
-            <a:endParaRPr kumimoji="0" lang="en-US" sz="1000" b="0" i="0" u="none" strike="noStrike" cap="none" normalizeH="0" baseline="0" dirty="0" smtClean="0">
+            <a:r>
+              <a:rPr kumimoji="0" lang="de-AT" sz="1100" b="0" i="0" u="none" strike="noStrike" cap="none" normalizeH="0" baseline="0" dirty="0" smtClean="0">
+                <a:ln>
+                  <a:noFill/>
+                </a:ln>
+                <a:solidFill>
+                  <a:schemeClr val="tx1"/>
+                </a:solidFill>
+                <a:effectLst/>
+                <a:latin typeface="Arial" pitchFamily="34" charset="0"/>
+              </a:rPr>
+              <a:t>Checkboxes </a:t>
+            </a:r>
+            <a:r>
+              <a:rPr kumimoji="0" lang="de-AT" sz="1100" b="0" i="0" u="none" strike="noStrike" cap="none" normalizeH="0" baseline="0" dirty="0" err="1" smtClean="0">
+                <a:ln>
+                  <a:noFill/>
+                </a:ln>
+                <a:solidFill>
+                  <a:schemeClr val="tx1"/>
+                </a:solidFill>
+                <a:effectLst/>
+                <a:latin typeface="Arial" pitchFamily="34" charset="0"/>
+              </a:rPr>
+              <a:t>for</a:t>
+            </a:r>
+            <a:r>
+              <a:rPr kumimoji="0" lang="de-AT" sz="1100" b="0" i="0" u="none" strike="noStrike" cap="none" normalizeH="0" baseline="0" dirty="0" smtClean="0">
+                <a:ln>
+                  <a:noFill/>
+                </a:ln>
+                <a:solidFill>
+                  <a:schemeClr val="tx1"/>
+                </a:solidFill>
+                <a:effectLst/>
+                <a:latin typeface="Arial" pitchFamily="34" charset="0"/>
+              </a:rPr>
+              <a:t> </a:t>
+            </a:r>
+            <a:r>
+              <a:rPr kumimoji="0" lang="de-AT" sz="1100" b="0" i="0" u="none" strike="noStrike" cap="none" normalizeH="0" baseline="0" dirty="0" err="1" smtClean="0">
+                <a:ln>
+                  <a:noFill/>
+                </a:ln>
+                <a:solidFill>
+                  <a:schemeClr val="tx1"/>
+                </a:solidFill>
+                <a:effectLst/>
+                <a:latin typeface="Arial" pitchFamily="34" charset="0"/>
+              </a:rPr>
+              <a:t>technologic</a:t>
+            </a:r>
+            <a:r>
+              <a:rPr kumimoji="0" lang="de-AT" sz="1100" b="0" i="0" u="none" strike="noStrike" cap="none" normalizeH="0" dirty="0" smtClean="0">
+                <a:ln>
+                  <a:noFill/>
+                </a:ln>
+                <a:solidFill>
+                  <a:schemeClr val="tx1"/>
+                </a:solidFill>
+                <a:effectLst/>
+                <a:latin typeface="Arial" pitchFamily="34" charset="0"/>
+              </a:rPr>
+              <a:t> </a:t>
+            </a:r>
+            <a:r>
+              <a:rPr kumimoji="0" lang="de-AT" sz="1100" b="0" i="0" u="none" strike="noStrike" cap="none" normalizeH="0" dirty="0" err="1" smtClean="0">
+                <a:ln>
+                  <a:noFill/>
+                </a:ln>
+                <a:solidFill>
+                  <a:schemeClr val="tx1"/>
+                </a:solidFill>
+                <a:effectLst/>
+                <a:latin typeface="Arial" pitchFamily="34" charset="0"/>
+              </a:rPr>
+              <a:t>features</a:t>
+            </a:r>
+            <a:endParaRPr kumimoji="0" lang="en-US" sz="1100" b="0" i="0" u="none" strike="noStrike" cap="none" normalizeH="0" baseline="0" dirty="0" smtClean="0">
               <a:ln>
                 <a:noFill/>
               </a:ln>
@@ -7794,28 +6200,28 @@
       </p:sp>
       <p:sp>
         <p:nvSpPr>
-          <p:cNvPr id="22" name="Rechteck 21"/>
+          <p:cNvPr id="38" name="Rechteck 37"/>
           <p:cNvSpPr/>
           <p:nvPr/>
         </p:nvSpPr>
         <p:spPr bwMode="auto">
           <a:xfrm>
-            <a:off x="5227488" y="4680580"/>
-            <a:ext cx="352182" cy="252000"/>
+            <a:off x="255788" y="2467440"/>
+            <a:ext cx="5316466" cy="2304000"/>
           </a:xfrm>
           <a:prstGeom prst="rect">
             <a:avLst/>
           </a:prstGeom>
           <a:solidFill>
-            <a:srgbClr val="FFC000">
+            <a:srgbClr val="33CCFF">
               <a:alpha val="15000"/>
             </a:srgbClr>
           </a:solidFill>
           <a:ln w="25400" cap="flat" cmpd="sng" algn="ctr">
             <a:solidFill>
-              <a:srgbClr val="FFC000"/>
+              <a:srgbClr val="33CCFF"/>
             </a:solidFill>
-            <a:prstDash val="sysDash"/>
+            <a:prstDash val="solid"/>
             <a:round/>
             <a:headEnd type="none" w="med" len="med"/>
             <a:tailEnd type="triangle" w="med" len="med"/>
@@ -7863,277 +6269,101 @@
       </p:sp>
       <p:sp>
         <p:nvSpPr>
-          <p:cNvPr id="7" name="Textfeld 6"/>
-          <p:cNvSpPr txBox="1"/>
-          <p:nvPr/>
-        </p:nvSpPr>
-        <p:spPr>
-          <a:xfrm>
-            <a:off x="6543685" y="803085"/>
-            <a:ext cx="430887" cy="936104"/>
-          </a:xfrm>
-          <a:prstGeom prst="rect">
-            <a:avLst/>
-          </a:prstGeom>
-          <a:noFill/>
-        </p:spPr>
-        <p:txBody>
-          <a:bodyPr vert="vert270" wrap="square" rtlCol="0">
-            <a:spAutoFit/>
-          </a:bodyPr>
-          <a:lstStyle/>
-          <a:p>
-            <a:r>
-              <a:rPr lang="de-AT" dirty="0" err="1" smtClean="0">
-                <a:solidFill>
-                  <a:srgbClr val="FF0000"/>
-                </a:solidFill>
-              </a:rPr>
-              <a:t>Step</a:t>
-            </a:r>
-            <a:r>
-              <a:rPr lang="de-AT" dirty="0" smtClean="0">
-                <a:solidFill>
-                  <a:srgbClr val="FF0000"/>
-                </a:solidFill>
-              </a:rPr>
-              <a:t> 1</a:t>
-            </a:r>
-            <a:endParaRPr lang="de-AT" dirty="0">
-              <a:solidFill>
-                <a:srgbClr val="FF0000"/>
-              </a:solidFill>
-            </a:endParaRPr>
-          </a:p>
-        </p:txBody>
-      </p:sp>
-      <p:sp>
-        <p:nvSpPr>
-          <p:cNvPr id="23" name="Textfeld 22"/>
-          <p:cNvSpPr txBox="1"/>
-          <p:nvPr/>
-        </p:nvSpPr>
-        <p:spPr>
-          <a:xfrm>
-            <a:off x="6543686" y="1747447"/>
-            <a:ext cx="430887" cy="936104"/>
-          </a:xfrm>
-          <a:prstGeom prst="rect">
-            <a:avLst/>
-          </a:prstGeom>
-          <a:noFill/>
-        </p:spPr>
-        <p:txBody>
-          <a:bodyPr vert="vert270" wrap="square" rtlCol="0">
-            <a:spAutoFit/>
-          </a:bodyPr>
-          <a:lstStyle/>
-          <a:p>
-            <a:r>
-              <a:rPr lang="de-AT" dirty="0" err="1" smtClean="0">
-                <a:solidFill>
-                  <a:srgbClr val="7030A0"/>
-                </a:solidFill>
-              </a:rPr>
-              <a:t>Step</a:t>
-            </a:r>
-            <a:r>
-              <a:rPr lang="de-AT" dirty="0" smtClean="0">
-                <a:solidFill>
-                  <a:srgbClr val="7030A0"/>
-                </a:solidFill>
-              </a:rPr>
-              <a:t> 2</a:t>
-            </a:r>
-            <a:endParaRPr lang="de-AT" dirty="0">
-              <a:solidFill>
-                <a:srgbClr val="7030A0"/>
-              </a:solidFill>
-            </a:endParaRPr>
-          </a:p>
-        </p:txBody>
-      </p:sp>
-      <p:sp>
-        <p:nvSpPr>
-          <p:cNvPr id="24" name="Textfeld 23"/>
-          <p:cNvSpPr txBox="1"/>
-          <p:nvPr/>
-        </p:nvSpPr>
-        <p:spPr>
-          <a:xfrm>
-            <a:off x="6548113" y="2691809"/>
-            <a:ext cx="430887" cy="936104"/>
-          </a:xfrm>
-          <a:prstGeom prst="rect">
-            <a:avLst/>
-          </a:prstGeom>
-          <a:noFill/>
-        </p:spPr>
-        <p:txBody>
-          <a:bodyPr vert="vert270" wrap="square" rtlCol="0">
-            <a:spAutoFit/>
-          </a:bodyPr>
-          <a:lstStyle/>
-          <a:p>
-            <a:r>
-              <a:rPr lang="de-AT" dirty="0" err="1" smtClean="0">
-                <a:solidFill>
-                  <a:srgbClr val="00B0F0"/>
-                </a:solidFill>
-              </a:rPr>
-              <a:t>Step</a:t>
-            </a:r>
-            <a:r>
-              <a:rPr lang="de-AT" dirty="0" smtClean="0">
-                <a:solidFill>
-                  <a:srgbClr val="00B0F0"/>
-                </a:solidFill>
-              </a:rPr>
-              <a:t> 3</a:t>
-            </a:r>
-            <a:endParaRPr lang="de-AT" dirty="0">
-              <a:solidFill>
-                <a:srgbClr val="00B0F0"/>
-              </a:solidFill>
-            </a:endParaRPr>
-          </a:p>
-        </p:txBody>
-      </p:sp>
-      <p:sp>
-        <p:nvSpPr>
-          <p:cNvPr id="25" name="Textfeld 24"/>
-          <p:cNvSpPr txBox="1"/>
-          <p:nvPr/>
-        </p:nvSpPr>
-        <p:spPr>
-          <a:xfrm>
-            <a:off x="6549920" y="3555905"/>
-            <a:ext cx="430887" cy="936104"/>
-          </a:xfrm>
-          <a:prstGeom prst="rect">
-            <a:avLst/>
-          </a:prstGeom>
-          <a:noFill/>
-        </p:spPr>
-        <p:txBody>
-          <a:bodyPr vert="vert270" wrap="square" rtlCol="0">
-            <a:spAutoFit/>
-          </a:bodyPr>
-          <a:lstStyle/>
-          <a:p>
-            <a:r>
-              <a:rPr lang="de-AT" dirty="0" err="1" smtClean="0">
-                <a:solidFill>
-                  <a:srgbClr val="FFC000"/>
-                </a:solidFill>
-              </a:rPr>
-              <a:t>Step</a:t>
-            </a:r>
-            <a:r>
-              <a:rPr lang="de-AT" dirty="0" smtClean="0">
-                <a:solidFill>
-                  <a:srgbClr val="FFC000"/>
-                </a:solidFill>
-              </a:rPr>
-              <a:t> 4</a:t>
-            </a:r>
-            <a:endParaRPr lang="de-AT" dirty="0">
-              <a:solidFill>
-                <a:srgbClr val="FFC000"/>
-              </a:solidFill>
-            </a:endParaRPr>
-          </a:p>
-        </p:txBody>
-      </p:sp>
-      <p:sp>
-        <p:nvSpPr>
-          <p:cNvPr id="26" name="Textfeld 25"/>
-          <p:cNvSpPr txBox="1"/>
-          <p:nvPr/>
-        </p:nvSpPr>
-        <p:spPr>
-          <a:xfrm>
-            <a:off x="6543684" y="4437597"/>
-            <a:ext cx="430887" cy="936104"/>
-          </a:xfrm>
-          <a:prstGeom prst="rect">
-            <a:avLst/>
-          </a:prstGeom>
-          <a:noFill/>
-          <a:ln>
-            <a:noFill/>
-          </a:ln>
-        </p:spPr>
-        <p:txBody>
-          <a:bodyPr vert="vert270" wrap="square" rtlCol="0">
-            <a:spAutoFit/>
-          </a:bodyPr>
-          <a:lstStyle/>
-          <a:p>
-            <a:r>
-              <a:rPr lang="de-AT" dirty="0" err="1" smtClean="0">
-                <a:solidFill>
-                  <a:srgbClr val="FF33CC"/>
-                </a:solidFill>
-              </a:rPr>
-              <a:t>Step</a:t>
-            </a:r>
-            <a:r>
-              <a:rPr lang="de-AT" dirty="0" smtClean="0">
-                <a:solidFill>
-                  <a:srgbClr val="FF33CC"/>
-                </a:solidFill>
-              </a:rPr>
-              <a:t> 5</a:t>
-            </a:r>
-            <a:endParaRPr lang="de-AT" dirty="0">
-              <a:solidFill>
-                <a:srgbClr val="FF33CC"/>
-              </a:solidFill>
-            </a:endParaRPr>
-          </a:p>
-        </p:txBody>
-      </p:sp>
-      <p:sp>
-        <p:nvSpPr>
-          <p:cNvPr id="28" name="Legende mit Linie 1 (Markierungsleiste) 17"/>
+          <p:cNvPr id="39" name="Legende mit Linie 1 (Markierungsleiste) 20"/>
           <p:cNvSpPr/>
           <p:nvPr/>
         </p:nvSpPr>
         <p:spPr bwMode="auto">
           <a:xfrm>
-            <a:off x="2196000" y="6069840"/>
-            <a:ext cx="2376000" cy="246221"/>
+            <a:off x="6660232" y="2622918"/>
+            <a:ext cx="2483768" cy="1531188"/>
           </a:xfrm>
           <a:prstGeom prst="accentCallout1">
             <a:avLst>
               <a:gd name="adj1" fmla="val 56216"/>
               <a:gd name="adj2" fmla="val -2353"/>
-              <a:gd name="adj3" fmla="val 24558"/>
-              <a:gd name="adj4" fmla="val -34765"/>
+              <a:gd name="adj3" fmla="val 49120"/>
+              <a:gd name="adj4" fmla="val -42171"/>
             </a:avLst>
           </a:prstGeom>
           <a:noFill/>
           <a:ln w="19050" cap="flat" cmpd="sng" algn="ctr">
             <a:solidFill>
-              <a:schemeClr val="accent2"/>
+              <a:schemeClr val="tx1"/>
             </a:solidFill>
             <a:prstDash val="solid"/>
             <a:round/>
             <a:headEnd type="none" w="med" len="med"/>
-            <a:tailEnd type="oval" w="med" len="med"/>
+            <a:tailEnd type="triangle" w="med" len="med"/>
           </a:ln>
           <a:effectLst/>
           <a:extLst/>
         </p:spPr>
         <p:txBody>
-          <a:bodyPr vert="horz" wrap="square" lIns="108000" tIns="45720" rIns="91440" bIns="45720" numCol="1" rtlCol="0" anchor="ctr" anchorCtr="0" compatLnSpc="1">
+          <a:bodyPr vert="horz" wrap="square" lIns="91440" tIns="45720" rIns="91440" bIns="45720" numCol="1" rtlCol="0" anchor="ctr" anchorCtr="0" compatLnSpc="1">
             <a:prstTxWarp prst="textNoShape">
               <a:avLst/>
             </a:prstTxWarp>
             <a:spAutoFit/>
           </a:bodyPr>
           <a:lstStyle/>
+          <a:p>
+            <a:pPr marL="0" marR="0" indent="0" algn="ctr" defTabSz="914400" rtl="0" eaLnBrk="1" fontAlgn="base" latinLnBrk="0" hangingPunct="1">
+              <a:lnSpc>
+                <a:spcPct val="100000"/>
+              </a:lnSpc>
+              <a:spcBef>
+                <a:spcPct val="30000"/>
+              </a:spcBef>
+              <a:spcAft>
+                <a:spcPct val="0"/>
+              </a:spcAft>
+              <a:buClrTx/>
+              <a:buSzTx/>
+              <a:buFontTx/>
+              <a:buNone/>
+              <a:tabLst/>
+            </a:pPr>
+            <a:r>
+              <a:rPr kumimoji="0" lang="de-AT" sz="1100" i="0" u="sng" strike="noStrike" cap="none" normalizeH="0" baseline="0" dirty="0" smtClean="0">
+                <a:ln>
+                  <a:noFill/>
+                </a:ln>
+                <a:solidFill>
+                  <a:schemeClr val="tx1"/>
+                </a:solidFill>
+                <a:effectLst/>
+                <a:latin typeface="Arial" pitchFamily="34" charset="0"/>
+              </a:rPr>
+              <a:t>Test </a:t>
+            </a:r>
+            <a:r>
+              <a:rPr kumimoji="0" lang="de-AT" sz="1100" i="0" u="sng" strike="noStrike" cap="none" normalizeH="0" baseline="0" dirty="0" err="1" smtClean="0">
+                <a:ln>
+                  <a:noFill/>
+                </a:ln>
+                <a:solidFill>
+                  <a:schemeClr val="tx1"/>
+                </a:solidFill>
+                <a:effectLst/>
+                <a:latin typeface="Arial" pitchFamily="34" charset="0"/>
+              </a:rPr>
+              <a:t>data</a:t>
+            </a:r>
+            <a:r>
+              <a:rPr kumimoji="0" lang="de-AT" sz="1100" i="0" u="sng" strike="noStrike" cap="none" normalizeH="0" baseline="0" dirty="0" smtClean="0">
+                <a:ln>
+                  <a:noFill/>
+                </a:ln>
+                <a:solidFill>
+                  <a:schemeClr val="tx1"/>
+                </a:solidFill>
+                <a:effectLst/>
+                <a:latin typeface="Arial" pitchFamily="34" charset="0"/>
+              </a:rPr>
+              <a:t> block</a:t>
+            </a:r>
+          </a:p>
           <a:p>
             <a:pPr marL="0" marR="0" indent="0" algn="l" defTabSz="914400" rtl="0" eaLnBrk="1" fontAlgn="base" latinLnBrk="0" hangingPunct="1">
               <a:lnSpc>
@@ -8152,65 +6382,1107 @@
               <a:tabLst/>
             </a:pPr>
             <a:r>
-              <a:rPr lang="de-AT" sz="1000" b="0" dirty="0" smtClean="0">
-                <a:solidFill>
-                  <a:schemeClr val="accent2"/>
-                </a:solidFill>
-                <a:latin typeface="Arial" pitchFamily="34" charset="0"/>
-              </a:rPr>
-              <a:t>Export </a:t>
-            </a:r>
-            <a:r>
-              <a:rPr lang="de-AT" sz="1000" b="0" dirty="0" err="1" smtClean="0">
-                <a:solidFill>
-                  <a:schemeClr val="accent2"/>
-                </a:solidFill>
-                <a:latin typeface="Arial" pitchFamily="34" charset="0"/>
-              </a:rPr>
-              <a:t>messages</a:t>
-            </a:r>
-            <a:r>
-              <a:rPr lang="de-AT" sz="1000" b="0" dirty="0" smtClean="0">
-                <a:solidFill>
-                  <a:schemeClr val="accent2"/>
-                </a:solidFill>
+              <a:rPr lang="de-AT" sz="1100" b="0" dirty="0" smtClean="0">
+                <a:latin typeface="Arial" pitchFamily="34" charset="0"/>
+              </a:rPr>
+              <a:t>Fields </a:t>
+            </a:r>
+            <a:r>
+              <a:rPr lang="de-AT" sz="1100" b="0" dirty="0" err="1" smtClean="0">
+                <a:latin typeface="Arial" pitchFamily="34" charset="0"/>
+              </a:rPr>
+              <a:t>for</a:t>
+            </a:r>
+            <a:r>
+              <a:rPr lang="de-AT" sz="1100" b="0" dirty="0" smtClean="0">
                 <a:latin typeface="Arial" pitchFamily="34" charset="0"/>
               </a:rPr>
               <a:t> </a:t>
             </a:r>
             <a:r>
-              <a:rPr lang="de-AT" sz="1000" b="0" dirty="0" err="1" smtClean="0">
-                <a:solidFill>
-                  <a:schemeClr val="accent2"/>
-                </a:solidFill>
-                <a:latin typeface="Arial" pitchFamily="34" charset="0"/>
-              </a:rPr>
-              <a:t>to</a:t>
-            </a:r>
-            <a:r>
-              <a:rPr lang="de-AT" sz="1000" b="0" dirty="0" smtClean="0">
-                <a:solidFill>
-                  <a:schemeClr val="accent2"/>
-                </a:solidFill>
+              <a:rPr lang="de-AT" sz="1100" b="0" dirty="0" err="1" smtClean="0">
+                <a:latin typeface="Arial" pitchFamily="34" charset="0"/>
+              </a:rPr>
+              <a:t>component</a:t>
+            </a:r>
+            <a:r>
+              <a:rPr lang="de-AT" sz="1100" b="0" dirty="0" smtClean="0">
                 <a:latin typeface="Arial" pitchFamily="34" charset="0"/>
               </a:rPr>
               <a:t> </a:t>
             </a:r>
             <a:r>
-              <a:rPr lang="de-AT" sz="1000" b="0" dirty="0" err="1" smtClean="0">
-                <a:solidFill>
-                  <a:schemeClr val="accent2"/>
-                </a:solidFill>
-                <a:latin typeface="Arial" pitchFamily="34" charset="0"/>
-              </a:rPr>
-              <a:t>clipboard</a:t>
-            </a:r>
-            <a:endParaRPr kumimoji="0" lang="en-US" sz="1000" b="0" i="0" u="none" strike="noStrike" cap="none" normalizeH="0" baseline="0" dirty="0" smtClean="0">
+              <a:rPr lang="de-AT" sz="1100" b="0" dirty="0" err="1" smtClean="0">
+                <a:latin typeface="Arial" pitchFamily="34" charset="0"/>
+              </a:rPr>
+              <a:t>data</a:t>
+            </a:r>
+            <a:endParaRPr lang="de-AT" sz="1100" b="0" dirty="0" smtClean="0">
+              <a:latin typeface="Arial" pitchFamily="34" charset="0"/>
+            </a:endParaRPr>
+          </a:p>
+          <a:p>
+            <a:pPr algn="l">
+              <a:spcBef>
+                <a:spcPct val="30000"/>
+              </a:spcBef>
+            </a:pPr>
+            <a:r>
+              <a:rPr lang="de-AT" sz="1100" b="0" dirty="0" smtClean="0">
+                <a:latin typeface="Arial" pitchFamily="34" charset="0"/>
+              </a:rPr>
+              <a:t>Path </a:t>
+            </a:r>
+            <a:r>
+              <a:rPr lang="de-AT" sz="1100" b="0" dirty="0" err="1">
+                <a:latin typeface="Arial" pitchFamily="34" charset="0"/>
+              </a:rPr>
+              <a:t>and</a:t>
+            </a:r>
+            <a:r>
+              <a:rPr lang="de-AT" sz="1100" b="0" dirty="0">
+                <a:latin typeface="Arial" pitchFamily="34" charset="0"/>
+              </a:rPr>
+              <a:t> </a:t>
+            </a:r>
+            <a:r>
+              <a:rPr lang="de-AT" sz="1100" b="0" dirty="0" err="1">
+                <a:latin typeface="Arial" pitchFamily="34" charset="0"/>
+              </a:rPr>
+              <a:t>filename</a:t>
+            </a:r>
+            <a:r>
+              <a:rPr lang="de-AT" sz="1100" b="0" dirty="0">
+                <a:latin typeface="Arial" pitchFamily="34" charset="0"/>
+              </a:rPr>
+              <a:t> </a:t>
+            </a:r>
+            <a:r>
+              <a:rPr lang="de-AT" sz="1100" b="0" dirty="0" err="1">
+                <a:latin typeface="Arial" pitchFamily="34" charset="0"/>
+              </a:rPr>
+              <a:t>of</a:t>
+            </a:r>
+            <a:r>
+              <a:rPr lang="de-AT" sz="1100" b="0" dirty="0">
+                <a:latin typeface="Arial" pitchFamily="34" charset="0"/>
+              </a:rPr>
+              <a:t> </a:t>
+            </a:r>
+            <a:r>
+              <a:rPr lang="de-AT" sz="1100" b="0" dirty="0" err="1" smtClean="0">
+                <a:latin typeface="Arial" pitchFamily="34" charset="0"/>
+              </a:rPr>
+              <a:t>test</a:t>
+            </a:r>
+            <a:r>
+              <a:rPr lang="de-AT" sz="1100" b="0" dirty="0" smtClean="0">
+                <a:latin typeface="Arial" pitchFamily="34" charset="0"/>
+              </a:rPr>
+              <a:t> </a:t>
+            </a:r>
+            <a:r>
+              <a:rPr lang="de-AT" sz="1100" b="0" dirty="0" err="1" smtClean="0">
+                <a:latin typeface="Arial" pitchFamily="34" charset="0"/>
+              </a:rPr>
+              <a:t>data</a:t>
+            </a:r>
+            <a:r>
+              <a:rPr lang="de-AT" sz="1100" b="0" dirty="0" smtClean="0">
+                <a:latin typeface="Arial" pitchFamily="34" charset="0"/>
+              </a:rPr>
+              <a:t> </a:t>
+            </a:r>
+            <a:r>
+              <a:rPr lang="de-AT" sz="1100" b="0" dirty="0" err="1" smtClean="0">
+                <a:latin typeface="Arial" pitchFamily="34" charset="0"/>
+              </a:rPr>
+              <a:t>files</a:t>
+            </a:r>
+            <a:endParaRPr lang="de-AT" sz="1100" b="0" dirty="0" smtClean="0">
+              <a:latin typeface="Arial" pitchFamily="34" charset="0"/>
+            </a:endParaRPr>
+          </a:p>
+          <a:p>
+            <a:pPr marL="0" marR="0" indent="0" algn="l" defTabSz="914400" rtl="0" eaLnBrk="1" fontAlgn="base" latinLnBrk="0" hangingPunct="1">
+              <a:lnSpc>
+                <a:spcPct val="100000"/>
+              </a:lnSpc>
+              <a:spcBef>
+                <a:spcPct val="30000"/>
+              </a:spcBef>
+              <a:spcAft>
+                <a:spcPct val="0"/>
+              </a:spcAft>
+              <a:buClrTx/>
+              <a:buSzTx/>
+              <a:buFontTx/>
+              <a:buNone/>
+              <a:tabLst/>
+            </a:pPr>
+            <a:r>
+              <a:rPr kumimoji="0" lang="de-AT" sz="1100" b="0" i="0" u="none" strike="noStrike" cap="none" normalizeH="0" baseline="0" dirty="0" smtClean="0">
+                <a:ln>
+                  <a:noFill/>
+                </a:ln>
+                <a:solidFill>
+                  <a:schemeClr val="tx1"/>
+                </a:solidFill>
+                <a:effectLst/>
+                <a:latin typeface="Arial" pitchFamily="34" charset="0"/>
+              </a:rPr>
+              <a:t>Test </a:t>
+            </a:r>
+            <a:r>
+              <a:rPr kumimoji="0" lang="de-AT" sz="1100" b="0" i="0" u="none" strike="noStrike" cap="none" normalizeH="0" baseline="0" dirty="0" err="1" smtClean="0">
+                <a:ln>
+                  <a:noFill/>
+                </a:ln>
+                <a:solidFill>
+                  <a:schemeClr val="tx1"/>
+                </a:solidFill>
+                <a:effectLst/>
+                <a:latin typeface="Arial" pitchFamily="34" charset="0"/>
+              </a:rPr>
+              <a:t>fuel</a:t>
+            </a:r>
+            <a:r>
+              <a:rPr kumimoji="0" lang="de-AT" sz="1100" b="0" i="0" u="none" strike="noStrike" cap="none" normalizeH="0" baseline="0" dirty="0" smtClean="0">
+                <a:ln>
+                  <a:noFill/>
+                </a:ln>
+                <a:solidFill>
+                  <a:schemeClr val="tx1"/>
+                </a:solidFill>
+                <a:effectLst/>
+                <a:latin typeface="Arial" pitchFamily="34" charset="0"/>
+              </a:rPr>
+              <a:t> </a:t>
+            </a:r>
+            <a:r>
+              <a:rPr kumimoji="0" lang="de-AT" sz="1100" b="0" i="0" u="none" strike="noStrike" cap="none" normalizeH="0" baseline="0" dirty="0" err="1" smtClean="0">
+                <a:ln>
+                  <a:noFill/>
+                </a:ln>
+                <a:solidFill>
+                  <a:schemeClr val="tx1"/>
+                </a:solidFill>
+                <a:effectLst/>
+                <a:latin typeface="Arial" pitchFamily="34" charset="0"/>
+              </a:rPr>
+              <a:t>data</a:t>
+            </a:r>
+            <a:endParaRPr kumimoji="0" lang="de-AT" sz="1100" b="0" i="0" u="none" strike="noStrike" cap="none" normalizeH="0" baseline="0" dirty="0" smtClean="0">
               <a:ln>
                 <a:noFill/>
               </a:ln>
               <a:solidFill>
-                <a:schemeClr val="accent2"/>
+                <a:schemeClr val="tx1"/>
+              </a:solidFill>
+              <a:effectLst/>
+              <a:latin typeface="Arial" pitchFamily="34" charset="0"/>
+            </a:endParaRPr>
+          </a:p>
+          <a:p>
+            <a:pPr marL="0" marR="0" indent="0" algn="l" defTabSz="914400" rtl="0" eaLnBrk="1" fontAlgn="base" latinLnBrk="0" hangingPunct="1">
+              <a:lnSpc>
+                <a:spcPct val="100000"/>
+              </a:lnSpc>
+              <a:spcBef>
+                <a:spcPct val="30000"/>
+              </a:spcBef>
+              <a:spcAft>
+                <a:spcPct val="0"/>
+              </a:spcAft>
+              <a:buClrTx/>
+              <a:buSzTx/>
+              <a:buFontTx/>
+              <a:buNone/>
+              <a:tabLst/>
+            </a:pPr>
+            <a:r>
+              <a:rPr lang="de-AT" sz="1100" b="0" dirty="0" err="1" smtClean="0">
+                <a:latin typeface="Arial" pitchFamily="34" charset="0"/>
+              </a:rPr>
+              <a:t>Specific</a:t>
+            </a:r>
+            <a:r>
+              <a:rPr lang="de-AT" sz="1100" b="0" dirty="0" smtClean="0">
+                <a:latin typeface="Arial" pitchFamily="34" charset="0"/>
+              </a:rPr>
+              <a:t> </a:t>
+            </a:r>
+            <a:r>
+              <a:rPr lang="de-AT" sz="1100" b="0" dirty="0" err="1" smtClean="0">
+                <a:latin typeface="Arial" pitchFamily="34" charset="0"/>
+              </a:rPr>
+              <a:t>fuel</a:t>
+            </a:r>
+            <a:r>
+              <a:rPr lang="de-AT" sz="1100" b="0" dirty="0" smtClean="0">
+                <a:latin typeface="Arial" pitchFamily="34" charset="0"/>
+              </a:rPr>
+              <a:t> </a:t>
+            </a:r>
+            <a:r>
+              <a:rPr lang="de-AT" sz="1100" b="0" dirty="0" err="1" smtClean="0">
+                <a:latin typeface="Arial" pitchFamily="34" charset="0"/>
+              </a:rPr>
+              <a:t>consumption</a:t>
+            </a:r>
+            <a:r>
+              <a:rPr lang="de-AT" sz="1100" b="0" dirty="0" smtClean="0">
+                <a:latin typeface="Arial" pitchFamily="34" charset="0"/>
+              </a:rPr>
+              <a:t> </a:t>
+            </a:r>
+            <a:r>
+              <a:rPr lang="de-AT" sz="1100" b="0" dirty="0" err="1" smtClean="0">
+                <a:latin typeface="Arial" pitchFamily="34" charset="0"/>
+              </a:rPr>
+              <a:t>figures</a:t>
+            </a:r>
+            <a:endParaRPr lang="en-US" sz="1100" b="0" dirty="0">
+              <a:latin typeface="Arial" pitchFamily="34" charset="0"/>
+            </a:endParaRPr>
+          </a:p>
+          <a:p>
+            <a:pPr algn="l">
+              <a:spcBef>
+                <a:spcPct val="30000"/>
+              </a:spcBef>
+            </a:pPr>
+            <a:r>
+              <a:rPr lang="de-AT" sz="1100" b="0" dirty="0" err="1">
+                <a:latin typeface="Arial" pitchFamily="34" charset="0"/>
+              </a:rPr>
+              <a:t>Specific</a:t>
+            </a:r>
+            <a:r>
+              <a:rPr lang="de-AT" sz="1100" b="0" dirty="0">
+                <a:latin typeface="Arial" pitchFamily="34" charset="0"/>
+              </a:rPr>
+              <a:t> </a:t>
+            </a:r>
+            <a:r>
+              <a:rPr lang="de-AT" sz="1100" b="0" dirty="0" smtClean="0">
+                <a:latin typeface="Arial" pitchFamily="34" charset="0"/>
+              </a:rPr>
+              <a:t>WHR </a:t>
+            </a:r>
+            <a:r>
+              <a:rPr lang="de-AT" sz="1100" b="0" dirty="0" err="1" smtClean="0">
+                <a:latin typeface="Arial" pitchFamily="34" charset="0"/>
+              </a:rPr>
+              <a:t>work</a:t>
+            </a:r>
+            <a:r>
+              <a:rPr lang="de-AT" sz="1100" b="0" dirty="0" smtClean="0">
+                <a:latin typeface="Arial" pitchFamily="34" charset="0"/>
+              </a:rPr>
+              <a:t> </a:t>
+            </a:r>
+            <a:r>
+              <a:rPr lang="de-AT" sz="1100" b="0" dirty="0" err="1" smtClean="0">
+                <a:latin typeface="Arial" pitchFamily="34" charset="0"/>
+              </a:rPr>
+              <a:t>figures</a:t>
+            </a:r>
+            <a:r>
+              <a:rPr lang="de-AT" sz="1100" b="0" dirty="0" smtClean="0">
+                <a:latin typeface="Arial" pitchFamily="34" charset="0"/>
+              </a:rPr>
+              <a:t> (</a:t>
+            </a:r>
+            <a:r>
+              <a:rPr lang="de-AT" sz="1100" b="0" dirty="0" err="1" smtClean="0">
+                <a:latin typeface="Arial" pitchFamily="34" charset="0"/>
+              </a:rPr>
+              <a:t>for</a:t>
+            </a:r>
+            <a:r>
+              <a:rPr lang="de-AT" sz="1100" b="0" dirty="0" smtClean="0">
+                <a:latin typeface="Arial" pitchFamily="34" charset="0"/>
+              </a:rPr>
+              <a:t> </a:t>
+            </a:r>
+            <a:r>
+              <a:rPr lang="de-AT" sz="1100" b="0" dirty="0" err="1" smtClean="0">
+                <a:latin typeface="Arial" pitchFamily="34" charset="0"/>
+              </a:rPr>
+              <a:t>engines</a:t>
+            </a:r>
+            <a:r>
+              <a:rPr lang="de-AT" sz="1100" b="0" dirty="0" smtClean="0">
+                <a:latin typeface="Arial" pitchFamily="34" charset="0"/>
+              </a:rPr>
+              <a:t> </a:t>
+            </a:r>
+            <a:r>
+              <a:rPr lang="de-AT" sz="1100" b="0" dirty="0" err="1" smtClean="0">
+                <a:latin typeface="Arial" pitchFamily="34" charset="0"/>
+              </a:rPr>
+              <a:t>with</a:t>
+            </a:r>
+            <a:r>
+              <a:rPr lang="de-AT" sz="1100" b="0" dirty="0" smtClean="0">
+                <a:latin typeface="Arial" pitchFamily="34" charset="0"/>
+              </a:rPr>
+              <a:t> WHR </a:t>
+            </a:r>
+            <a:r>
+              <a:rPr lang="de-AT" sz="1100" b="0" dirty="0" err="1" smtClean="0">
+                <a:latin typeface="Arial" pitchFamily="34" charset="0"/>
+              </a:rPr>
+              <a:t>systems</a:t>
+            </a:r>
+            <a:r>
+              <a:rPr lang="de-AT" sz="1100" b="0" dirty="0" smtClean="0">
+                <a:latin typeface="Arial" pitchFamily="34" charset="0"/>
+              </a:rPr>
+              <a:t>)</a:t>
+            </a:r>
+            <a:endParaRPr lang="de-AT" sz="1100" b="0" dirty="0">
+              <a:latin typeface="Arial" pitchFamily="34" charset="0"/>
+            </a:endParaRPr>
+          </a:p>
+        </p:txBody>
+      </p:sp>
+      <p:sp>
+        <p:nvSpPr>
+          <p:cNvPr id="40" name="Legende mit Linie 1 (Markierungsleiste) 20"/>
+          <p:cNvSpPr/>
+          <p:nvPr/>
+        </p:nvSpPr>
+        <p:spPr bwMode="auto">
+          <a:xfrm>
+            <a:off x="6660232" y="4256477"/>
+            <a:ext cx="2483768" cy="481670"/>
+          </a:xfrm>
+          <a:prstGeom prst="accentCallout1">
+            <a:avLst>
+              <a:gd name="adj1" fmla="val 56216"/>
+              <a:gd name="adj2" fmla="val -2353"/>
+              <a:gd name="adj3" fmla="val 150960"/>
+              <a:gd name="adj4" fmla="val -42504"/>
+            </a:avLst>
+          </a:prstGeom>
+          <a:noFill/>
+          <a:ln w="19050" cap="flat" cmpd="sng" algn="ctr">
+            <a:solidFill>
+              <a:schemeClr val="tx1"/>
+            </a:solidFill>
+            <a:prstDash val="solid"/>
+            <a:round/>
+            <a:headEnd type="none" w="med" len="med"/>
+            <a:tailEnd type="triangle" w="med" len="med"/>
+          </a:ln>
+          <a:effectLst/>
+          <a:extLst/>
+        </p:spPr>
+        <p:txBody>
+          <a:bodyPr vert="horz" wrap="square" lIns="91440" tIns="45720" rIns="91440" bIns="45720" numCol="1" rtlCol="0" anchor="ctr" anchorCtr="0" compatLnSpc="1">
+            <a:prstTxWarp prst="textNoShape">
+              <a:avLst/>
+            </a:prstTxWarp>
+            <a:spAutoFit/>
+          </a:bodyPr>
+          <a:lstStyle/>
+          <a:p>
+            <a:pPr marL="0" marR="0" indent="0" algn="ctr" defTabSz="914400" rtl="0" eaLnBrk="1" fontAlgn="base" latinLnBrk="0" hangingPunct="1">
+              <a:lnSpc>
+                <a:spcPct val="100000"/>
+              </a:lnSpc>
+              <a:spcBef>
+                <a:spcPct val="30000"/>
+              </a:spcBef>
+              <a:spcAft>
+                <a:spcPct val="0"/>
+              </a:spcAft>
+              <a:buClrTx/>
+              <a:buSzTx/>
+              <a:buFontTx/>
+              <a:buNone/>
+              <a:tabLst/>
+            </a:pPr>
+            <a:r>
+              <a:rPr kumimoji="0" lang="de-AT" sz="1100" i="0" u="sng" strike="noStrike" cap="none" normalizeH="0" baseline="0" dirty="0" smtClean="0">
+                <a:ln>
+                  <a:noFill/>
+                </a:ln>
+                <a:solidFill>
+                  <a:schemeClr val="tx1"/>
+                </a:solidFill>
+                <a:effectLst/>
+                <a:latin typeface="Arial" pitchFamily="34" charset="0"/>
+              </a:rPr>
+              <a:t>Control </a:t>
+            </a:r>
+            <a:r>
+              <a:rPr kumimoji="0" lang="de-AT" sz="1100" i="0" u="sng" strike="noStrike" cap="none" normalizeH="0" baseline="0" dirty="0" err="1" smtClean="0">
+                <a:ln>
+                  <a:noFill/>
+                </a:ln>
+                <a:solidFill>
+                  <a:schemeClr val="tx1"/>
+                </a:solidFill>
+                <a:effectLst/>
+                <a:latin typeface="Arial" pitchFamily="34" charset="0"/>
+              </a:rPr>
+              <a:t>button</a:t>
+            </a:r>
+            <a:r>
+              <a:rPr kumimoji="0" lang="de-AT" sz="1100" i="0" u="sng" strike="noStrike" cap="none" normalizeH="0" baseline="0" dirty="0" smtClean="0">
+                <a:ln>
+                  <a:noFill/>
+                </a:ln>
+                <a:solidFill>
+                  <a:schemeClr val="tx1"/>
+                </a:solidFill>
+                <a:effectLst/>
+                <a:latin typeface="Arial" pitchFamily="34" charset="0"/>
+              </a:rPr>
+              <a:t> block</a:t>
+            </a:r>
+          </a:p>
+          <a:p>
+            <a:pPr marL="0" marR="0" indent="0" algn="l" defTabSz="914400" rtl="0" eaLnBrk="1" fontAlgn="base" latinLnBrk="0" hangingPunct="1">
+              <a:lnSpc>
+                <a:spcPct val="100000"/>
+              </a:lnSpc>
+              <a:spcBef>
+                <a:spcPct val="30000"/>
+              </a:spcBef>
+              <a:spcAft>
+                <a:spcPct val="0"/>
+              </a:spcAft>
+              <a:buClrTx/>
+              <a:buSzTx/>
+              <a:buFontTx/>
+              <a:buNone/>
+              <a:tabLst/>
+            </a:pPr>
+            <a:r>
+              <a:rPr lang="de-AT" sz="1100" b="0" dirty="0" smtClean="0">
+                <a:latin typeface="Arial" pitchFamily="34" charset="0"/>
+              </a:rPr>
+              <a:t>Start </a:t>
+            </a:r>
+            <a:r>
+              <a:rPr lang="de-AT" sz="1100" b="0" dirty="0" err="1" smtClean="0">
+                <a:latin typeface="Arial" pitchFamily="34" charset="0"/>
+              </a:rPr>
+              <a:t>data</a:t>
+            </a:r>
+            <a:r>
+              <a:rPr lang="de-AT" sz="1100" b="0" dirty="0" smtClean="0">
+                <a:latin typeface="Arial" pitchFamily="34" charset="0"/>
+              </a:rPr>
+              <a:t> </a:t>
+            </a:r>
+            <a:r>
+              <a:rPr lang="de-AT" sz="1100" b="0" dirty="0" err="1" smtClean="0">
+                <a:latin typeface="Arial" pitchFamily="34" charset="0"/>
+              </a:rPr>
+              <a:t>evaluation</a:t>
+            </a:r>
+            <a:r>
+              <a:rPr lang="de-AT" sz="1100" b="0" dirty="0" smtClean="0">
+                <a:latin typeface="Arial" pitchFamily="34" charset="0"/>
+              </a:rPr>
+              <a:t> </a:t>
+            </a:r>
+            <a:r>
+              <a:rPr lang="de-AT" sz="1100" b="0" dirty="0" err="1" smtClean="0">
+                <a:latin typeface="Arial" pitchFamily="34" charset="0"/>
+              </a:rPr>
+              <a:t>routines</a:t>
+            </a:r>
+            <a:endParaRPr kumimoji="0" lang="en-US" sz="1100" b="0" i="0" u="none" strike="noStrike" cap="none" normalizeH="0" baseline="0" dirty="0" smtClean="0">
+              <a:ln>
+                <a:noFill/>
+              </a:ln>
+              <a:solidFill>
+                <a:schemeClr val="tx1"/>
+              </a:solidFill>
+              <a:effectLst/>
+              <a:latin typeface="Arial" pitchFamily="34" charset="0"/>
+            </a:endParaRPr>
+          </a:p>
+        </p:txBody>
+      </p:sp>
+      <p:sp>
+        <p:nvSpPr>
+          <p:cNvPr id="41" name="Rechteck 40"/>
+          <p:cNvSpPr/>
+          <p:nvPr/>
+        </p:nvSpPr>
+        <p:spPr bwMode="auto">
+          <a:xfrm>
+            <a:off x="250282" y="5157764"/>
+            <a:ext cx="5316466" cy="180000"/>
+          </a:xfrm>
+          <a:prstGeom prst="rect">
+            <a:avLst/>
+          </a:prstGeom>
+          <a:solidFill>
+            <a:srgbClr val="FFC000">
+              <a:alpha val="15000"/>
+            </a:srgbClr>
+          </a:solidFill>
+          <a:ln w="25400" cap="flat" cmpd="sng" algn="ctr">
+            <a:solidFill>
+              <a:srgbClr val="FFC000"/>
+            </a:solidFill>
+            <a:prstDash val="solid"/>
+            <a:round/>
+            <a:headEnd type="none" w="med" len="med"/>
+            <a:tailEnd type="triangle" w="med" len="med"/>
+          </a:ln>
+          <a:effectLst/>
+          <a:extLst/>
+        </p:spPr>
+        <p:txBody>
+          <a:bodyPr vert="horz" wrap="square" lIns="91440" tIns="45720" rIns="91440" bIns="45720" numCol="1" rtlCol="0" anchor="ctr" anchorCtr="0" compatLnSpc="1">
+            <a:prstTxWarp prst="textNoShape">
+              <a:avLst/>
+            </a:prstTxWarp>
+            <a:spAutoFit/>
+          </a:bodyPr>
+          <a:lstStyle/>
+          <a:p>
+            <a:pPr marL="0" marR="0" indent="0" algn="ctr" defTabSz="914400" rtl="0" eaLnBrk="1" fontAlgn="base" latinLnBrk="0" hangingPunct="1">
+              <a:lnSpc>
+                <a:spcPct val="100000"/>
+              </a:lnSpc>
+              <a:spcBef>
+                <a:spcPct val="30000"/>
+              </a:spcBef>
+              <a:spcAft>
+                <a:spcPct val="0"/>
+              </a:spcAft>
+              <a:buClrTx/>
+              <a:buSzTx/>
+              <a:buFontTx/>
+              <a:buNone/>
+              <a:tabLst/>
+            </a:pPr>
+            <a:endParaRPr kumimoji="0" lang="en-US" sz="2000" b="1" i="0" u="none" strike="noStrike" cap="none" normalizeH="0" baseline="0" smtClean="0">
+              <a:ln>
+                <a:noFill/>
+              </a:ln>
+              <a:solidFill>
+                <a:schemeClr val="tx1"/>
+              </a:solidFill>
+              <a:effectLst/>
+              <a:latin typeface="Arial" pitchFamily="34" charset="0"/>
+            </a:endParaRPr>
+          </a:p>
+        </p:txBody>
+      </p:sp>
+      <p:sp>
+        <p:nvSpPr>
+          <p:cNvPr id="42" name="Legende mit Linie 1 (Markierungsleiste) 20"/>
+          <p:cNvSpPr/>
+          <p:nvPr/>
+        </p:nvSpPr>
+        <p:spPr bwMode="auto">
+          <a:xfrm>
+            <a:off x="6660232" y="4840518"/>
+            <a:ext cx="2483768" cy="701731"/>
+          </a:xfrm>
+          <a:prstGeom prst="accentCallout1">
+            <a:avLst>
+              <a:gd name="adj1" fmla="val 56216"/>
+              <a:gd name="adj2" fmla="val -2353"/>
+              <a:gd name="adj3" fmla="val 58747"/>
+              <a:gd name="adj4" fmla="val -42505"/>
+            </a:avLst>
+          </a:prstGeom>
+          <a:noFill/>
+          <a:ln w="19050" cap="flat" cmpd="sng" algn="ctr">
+            <a:solidFill>
+              <a:schemeClr val="tx1"/>
+            </a:solidFill>
+            <a:prstDash val="solid"/>
+            <a:round/>
+            <a:headEnd type="none" w="med" len="med"/>
+            <a:tailEnd type="triangle" w="med" len="med"/>
+          </a:ln>
+          <a:effectLst/>
+          <a:extLst/>
+        </p:spPr>
+        <p:txBody>
+          <a:bodyPr vert="horz" wrap="square" lIns="91440" tIns="45720" rIns="91440" bIns="45720" numCol="1" rtlCol="0" anchor="ctr" anchorCtr="0" compatLnSpc="1">
+            <a:prstTxWarp prst="textNoShape">
+              <a:avLst/>
+            </a:prstTxWarp>
+            <a:spAutoFit/>
+          </a:bodyPr>
+          <a:lstStyle/>
+          <a:p>
+            <a:pPr marL="0" marR="0" indent="0" algn="ctr" defTabSz="914400" rtl="0" eaLnBrk="1" fontAlgn="base" latinLnBrk="0" hangingPunct="1">
+              <a:lnSpc>
+                <a:spcPct val="100000"/>
+              </a:lnSpc>
+              <a:spcBef>
+                <a:spcPct val="30000"/>
+              </a:spcBef>
+              <a:spcAft>
+                <a:spcPct val="0"/>
+              </a:spcAft>
+              <a:buClrTx/>
+              <a:buSzTx/>
+              <a:buFontTx/>
+              <a:buNone/>
+              <a:tabLst/>
+            </a:pPr>
+            <a:r>
+              <a:rPr kumimoji="0" lang="de-AT" sz="1100" i="0" u="sng" strike="noStrike" cap="none" normalizeH="0" baseline="0" dirty="0" smtClean="0">
+                <a:ln>
+                  <a:noFill/>
+                </a:ln>
+                <a:solidFill>
+                  <a:schemeClr val="tx1"/>
+                </a:solidFill>
+                <a:effectLst/>
+                <a:latin typeface="Arial" pitchFamily="34" charset="0"/>
+              </a:rPr>
+              <a:t>Output block</a:t>
+            </a:r>
+          </a:p>
+          <a:p>
+            <a:pPr marL="0" marR="0" indent="0" algn="l" defTabSz="914400" rtl="0" eaLnBrk="1" fontAlgn="base" latinLnBrk="0" hangingPunct="1">
+              <a:lnSpc>
+                <a:spcPct val="100000"/>
+              </a:lnSpc>
+              <a:spcBef>
+                <a:spcPct val="30000"/>
+              </a:spcBef>
+              <a:spcAft>
+                <a:spcPct val="0"/>
+              </a:spcAft>
+              <a:buClrTx/>
+              <a:buSzTx/>
+              <a:buFontTx/>
+              <a:buNone/>
+              <a:tabLst/>
+            </a:pPr>
+            <a:r>
+              <a:rPr lang="de-AT" sz="1100" b="0" dirty="0" smtClean="0">
+                <a:latin typeface="Arial" pitchFamily="34" charset="0"/>
+              </a:rPr>
+              <a:t>Displays </a:t>
+            </a:r>
+            <a:r>
+              <a:rPr lang="de-AT" sz="1100" b="0" dirty="0" err="1" smtClean="0">
+                <a:latin typeface="Arial" pitchFamily="34" charset="0"/>
+              </a:rPr>
+              <a:t>path</a:t>
+            </a:r>
+            <a:r>
+              <a:rPr lang="de-AT" sz="1100" b="0" dirty="0" smtClean="0">
+                <a:latin typeface="Arial" pitchFamily="34" charset="0"/>
+              </a:rPr>
+              <a:t> </a:t>
+            </a:r>
+            <a:r>
+              <a:rPr lang="de-AT" sz="1100" b="0" dirty="0" err="1" smtClean="0">
+                <a:latin typeface="Arial" pitchFamily="34" charset="0"/>
+              </a:rPr>
+              <a:t>of</a:t>
+            </a:r>
+            <a:r>
+              <a:rPr lang="de-AT" sz="1100" b="0" dirty="0" smtClean="0">
+                <a:latin typeface="Arial" pitchFamily="34" charset="0"/>
+              </a:rPr>
+              <a:t> </a:t>
+            </a:r>
+            <a:r>
+              <a:rPr lang="de-AT" sz="1100" b="0" dirty="0" err="1" smtClean="0">
+                <a:latin typeface="Arial" pitchFamily="34" charset="0"/>
+              </a:rPr>
+              <a:t>output</a:t>
+            </a:r>
+            <a:r>
+              <a:rPr lang="de-AT" sz="1100" b="0" dirty="0" smtClean="0">
+                <a:latin typeface="Arial" pitchFamily="34" charset="0"/>
+              </a:rPr>
+              <a:t> </a:t>
+            </a:r>
+            <a:r>
+              <a:rPr lang="de-AT" sz="1100" b="0" dirty="0" err="1" smtClean="0">
+                <a:latin typeface="Arial" pitchFamily="34" charset="0"/>
+              </a:rPr>
+              <a:t>directory</a:t>
+            </a:r>
+            <a:endParaRPr lang="de-AT" sz="1100" b="0" dirty="0" smtClean="0">
+              <a:latin typeface="Arial" pitchFamily="34" charset="0"/>
+            </a:endParaRPr>
+          </a:p>
+          <a:p>
+            <a:pPr marL="0" marR="0" indent="0" algn="l" defTabSz="914400" rtl="0" eaLnBrk="1" fontAlgn="base" latinLnBrk="0" hangingPunct="1">
+              <a:lnSpc>
+                <a:spcPct val="100000"/>
+              </a:lnSpc>
+              <a:spcBef>
+                <a:spcPct val="30000"/>
+              </a:spcBef>
+              <a:spcAft>
+                <a:spcPct val="0"/>
+              </a:spcAft>
+              <a:buClrTx/>
+              <a:buSzTx/>
+              <a:buFontTx/>
+              <a:buNone/>
+              <a:tabLst/>
+            </a:pPr>
+            <a:r>
+              <a:rPr kumimoji="0" lang="de-AT" sz="1100" b="0" i="0" u="none" strike="noStrike" cap="none" normalizeH="0" baseline="0" dirty="0" smtClean="0">
+                <a:ln>
+                  <a:noFill/>
+                </a:ln>
+                <a:solidFill>
+                  <a:schemeClr val="tx1"/>
+                </a:solidFill>
+                <a:effectLst/>
+                <a:latin typeface="Arial" pitchFamily="34" charset="0"/>
+              </a:rPr>
+              <a:t>Browse </a:t>
+            </a:r>
+            <a:r>
+              <a:rPr kumimoji="0" lang="de-AT" sz="1100" b="0" i="0" u="none" strike="noStrike" cap="none" normalizeH="0" baseline="0" dirty="0" err="1" smtClean="0">
+                <a:ln>
+                  <a:noFill/>
+                </a:ln>
+                <a:solidFill>
+                  <a:schemeClr val="tx1"/>
+                </a:solidFill>
+                <a:effectLst/>
+                <a:latin typeface="Arial" pitchFamily="34" charset="0"/>
+              </a:rPr>
+              <a:t>for</a:t>
+            </a:r>
+            <a:r>
+              <a:rPr kumimoji="0" lang="de-AT" sz="1100" b="0" i="0" u="none" strike="noStrike" cap="none" normalizeH="0" baseline="0" dirty="0" smtClean="0">
+                <a:ln>
+                  <a:noFill/>
+                </a:ln>
+                <a:solidFill>
+                  <a:schemeClr val="tx1"/>
+                </a:solidFill>
+                <a:effectLst/>
+                <a:latin typeface="Arial" pitchFamily="34" charset="0"/>
+              </a:rPr>
+              <a:t> </a:t>
+            </a:r>
+            <a:r>
+              <a:rPr kumimoji="0" lang="de-AT" sz="1100" b="0" i="0" u="none" strike="noStrike" cap="none" normalizeH="0" baseline="0" dirty="0" err="1" smtClean="0">
+                <a:ln>
+                  <a:noFill/>
+                </a:ln>
+                <a:solidFill>
+                  <a:schemeClr val="tx1"/>
+                </a:solidFill>
+                <a:effectLst/>
+                <a:latin typeface="Arial" pitchFamily="34" charset="0"/>
+              </a:rPr>
+              <a:t>output</a:t>
+            </a:r>
+            <a:r>
+              <a:rPr kumimoji="0" lang="de-AT" sz="1100" b="0" i="0" u="none" strike="noStrike" cap="none" normalizeH="0" baseline="0" dirty="0" smtClean="0">
+                <a:ln>
+                  <a:noFill/>
+                </a:ln>
+                <a:solidFill>
+                  <a:schemeClr val="tx1"/>
+                </a:solidFill>
+                <a:effectLst/>
+                <a:latin typeface="Arial" pitchFamily="34" charset="0"/>
+              </a:rPr>
+              <a:t> </a:t>
+            </a:r>
+            <a:r>
+              <a:rPr kumimoji="0" lang="de-AT" sz="1100" b="0" i="0" u="none" strike="noStrike" cap="none" normalizeH="0" baseline="0" dirty="0" err="1" smtClean="0">
+                <a:ln>
+                  <a:noFill/>
+                </a:ln>
+                <a:solidFill>
+                  <a:schemeClr val="tx1"/>
+                </a:solidFill>
+                <a:effectLst/>
+                <a:latin typeface="Arial" pitchFamily="34" charset="0"/>
+              </a:rPr>
+              <a:t>folder</a:t>
+            </a:r>
+            <a:endParaRPr kumimoji="0" lang="en-US" sz="1100" b="0" i="0" u="none" strike="noStrike" cap="none" normalizeH="0" baseline="0" dirty="0" smtClean="0">
+              <a:ln>
+                <a:noFill/>
+              </a:ln>
+              <a:solidFill>
+                <a:schemeClr val="tx1"/>
+              </a:solidFill>
+              <a:effectLst/>
+              <a:latin typeface="Arial" pitchFamily="34" charset="0"/>
+            </a:endParaRPr>
+          </a:p>
+        </p:txBody>
+      </p:sp>
+      <p:sp>
+        <p:nvSpPr>
+          <p:cNvPr id="43" name="Legende mit Linie 1 (Markierungsleiste) 20"/>
+          <p:cNvSpPr/>
+          <p:nvPr/>
+        </p:nvSpPr>
+        <p:spPr bwMode="auto">
+          <a:xfrm>
+            <a:off x="6660232" y="5644622"/>
+            <a:ext cx="2483768" cy="701731"/>
+          </a:xfrm>
+          <a:prstGeom prst="accentCallout1">
+            <a:avLst>
+              <a:gd name="adj1" fmla="val 56216"/>
+              <a:gd name="adj2" fmla="val -2353"/>
+              <a:gd name="adj3" fmla="val 31501"/>
+              <a:gd name="adj4" fmla="val -42839"/>
+            </a:avLst>
+          </a:prstGeom>
+          <a:noFill/>
+          <a:ln w="19050" cap="flat" cmpd="sng" algn="ctr">
+            <a:solidFill>
+              <a:schemeClr val="tx1"/>
+            </a:solidFill>
+            <a:prstDash val="solid"/>
+            <a:round/>
+            <a:headEnd type="none" w="med" len="med"/>
+            <a:tailEnd type="triangle" w="med" len="med"/>
+          </a:ln>
+          <a:effectLst/>
+          <a:extLst/>
+        </p:spPr>
+        <p:txBody>
+          <a:bodyPr vert="horz" wrap="square" lIns="91440" tIns="45720" rIns="91440" bIns="45720" numCol="1" rtlCol="0" anchor="ctr" anchorCtr="0" compatLnSpc="1">
+            <a:prstTxWarp prst="textNoShape">
+              <a:avLst/>
+            </a:prstTxWarp>
+            <a:spAutoFit/>
+          </a:bodyPr>
+          <a:lstStyle/>
+          <a:p>
+            <a:pPr marL="0" marR="0" indent="0" algn="ctr" defTabSz="914400" rtl="0" eaLnBrk="1" fontAlgn="base" latinLnBrk="0" hangingPunct="1">
+              <a:lnSpc>
+                <a:spcPct val="100000"/>
+              </a:lnSpc>
+              <a:spcBef>
+                <a:spcPct val="30000"/>
+              </a:spcBef>
+              <a:spcAft>
+                <a:spcPct val="0"/>
+              </a:spcAft>
+              <a:buClrTx/>
+              <a:buSzTx/>
+              <a:buFontTx/>
+              <a:buNone/>
+              <a:tabLst/>
+            </a:pPr>
+            <a:r>
+              <a:rPr kumimoji="0" lang="de-AT" sz="1100" i="0" u="sng" strike="noStrike" cap="none" normalizeH="0" baseline="0" dirty="0" smtClean="0">
+                <a:ln>
+                  <a:noFill/>
+                </a:ln>
+                <a:solidFill>
+                  <a:schemeClr val="tx1"/>
+                </a:solidFill>
+                <a:effectLst/>
+                <a:latin typeface="Arial" pitchFamily="34" charset="0"/>
+              </a:rPr>
+              <a:t>Message </a:t>
+            </a:r>
+            <a:r>
+              <a:rPr kumimoji="0" lang="de-AT" sz="1100" i="0" u="sng" strike="noStrike" cap="none" normalizeH="0" baseline="0" dirty="0" err="1" smtClean="0">
+                <a:ln>
+                  <a:noFill/>
+                </a:ln>
+                <a:solidFill>
+                  <a:schemeClr val="tx1"/>
+                </a:solidFill>
+                <a:effectLst/>
+                <a:latin typeface="Arial" pitchFamily="34" charset="0"/>
+              </a:rPr>
+              <a:t>window</a:t>
+            </a:r>
+            <a:r>
+              <a:rPr kumimoji="0" lang="de-AT" sz="1100" i="0" u="sng" strike="noStrike" cap="none" normalizeH="0" baseline="0" dirty="0" smtClean="0">
+                <a:ln>
+                  <a:noFill/>
+                </a:ln>
+                <a:solidFill>
+                  <a:schemeClr val="tx1"/>
+                </a:solidFill>
+                <a:effectLst/>
+                <a:latin typeface="Arial" pitchFamily="34" charset="0"/>
+              </a:rPr>
+              <a:t> block</a:t>
+            </a:r>
+          </a:p>
+          <a:p>
+            <a:pPr marL="0" marR="0" indent="0" algn="l" defTabSz="914400" rtl="0" eaLnBrk="1" fontAlgn="base" latinLnBrk="0" hangingPunct="1">
+              <a:lnSpc>
+                <a:spcPct val="100000"/>
+              </a:lnSpc>
+              <a:spcBef>
+                <a:spcPct val="30000"/>
+              </a:spcBef>
+              <a:spcAft>
+                <a:spcPct val="0"/>
+              </a:spcAft>
+              <a:buClrTx/>
+              <a:buSzTx/>
+              <a:buFontTx/>
+              <a:buNone/>
+              <a:tabLst/>
+            </a:pPr>
+            <a:r>
+              <a:rPr lang="de-AT" sz="1100" b="0" dirty="0" smtClean="0">
+                <a:latin typeface="Arial" pitchFamily="34" charset="0"/>
+              </a:rPr>
+              <a:t>Displays </a:t>
+            </a:r>
+            <a:r>
+              <a:rPr lang="de-AT" sz="1100" b="0" dirty="0" err="1" smtClean="0">
+                <a:latin typeface="Arial" pitchFamily="34" charset="0"/>
+              </a:rPr>
+              <a:t>messages</a:t>
+            </a:r>
+            <a:r>
+              <a:rPr lang="de-AT" sz="1100" b="0" dirty="0" smtClean="0">
+                <a:latin typeface="Arial" pitchFamily="34" charset="0"/>
+              </a:rPr>
+              <a:t> </a:t>
+            </a:r>
+            <a:r>
+              <a:rPr lang="de-AT" sz="1100" b="0" dirty="0" err="1" smtClean="0">
+                <a:latin typeface="Arial" pitchFamily="34" charset="0"/>
+              </a:rPr>
+              <a:t>during</a:t>
+            </a:r>
+            <a:r>
+              <a:rPr lang="de-AT" sz="1100" b="0" dirty="0" smtClean="0">
+                <a:latin typeface="Arial" pitchFamily="34" charset="0"/>
+              </a:rPr>
+              <a:t> </a:t>
+            </a:r>
+            <a:r>
+              <a:rPr lang="de-AT" sz="1100" b="0" dirty="0" err="1" smtClean="0">
+                <a:latin typeface="Arial" pitchFamily="34" charset="0"/>
+              </a:rPr>
+              <a:t>execution</a:t>
+            </a:r>
+            <a:endParaRPr lang="de-AT" sz="1100" b="0" dirty="0" smtClean="0">
+              <a:latin typeface="Arial" pitchFamily="34" charset="0"/>
+            </a:endParaRPr>
+          </a:p>
+          <a:p>
+            <a:pPr marL="0" marR="0" indent="0" algn="l" defTabSz="914400" rtl="0" eaLnBrk="1" fontAlgn="base" latinLnBrk="0" hangingPunct="1">
+              <a:lnSpc>
+                <a:spcPct val="100000"/>
+              </a:lnSpc>
+              <a:spcBef>
+                <a:spcPct val="30000"/>
+              </a:spcBef>
+              <a:spcAft>
+                <a:spcPct val="0"/>
+              </a:spcAft>
+              <a:buClrTx/>
+              <a:buSzTx/>
+              <a:buFontTx/>
+              <a:buNone/>
+              <a:tabLst/>
+            </a:pPr>
+            <a:r>
+              <a:rPr kumimoji="0" lang="de-AT" sz="1100" b="0" i="0" u="none" strike="noStrike" cap="none" normalizeH="0" baseline="0" dirty="0" smtClean="0">
+                <a:ln>
+                  <a:noFill/>
+                </a:ln>
+                <a:solidFill>
+                  <a:schemeClr val="tx1"/>
+                </a:solidFill>
+                <a:effectLst/>
+                <a:latin typeface="Arial" pitchFamily="34" charset="0"/>
+              </a:rPr>
+              <a:t>Export </a:t>
+            </a:r>
+            <a:r>
+              <a:rPr kumimoji="0" lang="de-AT" sz="1100" b="0" i="0" u="none" strike="noStrike" cap="none" normalizeH="0" baseline="0" dirty="0" err="1" smtClean="0">
+                <a:ln>
+                  <a:noFill/>
+                </a:ln>
+                <a:solidFill>
+                  <a:schemeClr val="tx1"/>
+                </a:solidFill>
+                <a:effectLst/>
+                <a:latin typeface="Arial" pitchFamily="34" charset="0"/>
+              </a:rPr>
+              <a:t>messages</a:t>
+            </a:r>
+            <a:r>
+              <a:rPr kumimoji="0" lang="de-AT" sz="1100" b="0" i="0" u="none" strike="noStrike" cap="none" normalizeH="0" baseline="0" dirty="0" smtClean="0">
+                <a:ln>
+                  <a:noFill/>
+                </a:ln>
+                <a:solidFill>
+                  <a:schemeClr val="tx1"/>
+                </a:solidFill>
+                <a:effectLst/>
+                <a:latin typeface="Arial" pitchFamily="34" charset="0"/>
+              </a:rPr>
+              <a:t> </a:t>
+            </a:r>
+            <a:r>
+              <a:rPr kumimoji="0" lang="de-AT" sz="1100" b="0" i="0" u="none" strike="noStrike" cap="none" normalizeH="0" baseline="0" dirty="0" err="1" smtClean="0">
+                <a:ln>
+                  <a:noFill/>
+                </a:ln>
+                <a:solidFill>
+                  <a:schemeClr val="tx1"/>
+                </a:solidFill>
+                <a:effectLst/>
+                <a:latin typeface="Arial" pitchFamily="34" charset="0"/>
+              </a:rPr>
+              <a:t>to</a:t>
+            </a:r>
+            <a:r>
+              <a:rPr kumimoji="0" lang="de-AT" sz="1100" b="0" i="0" u="none" strike="noStrike" cap="none" normalizeH="0" baseline="0" dirty="0" smtClean="0">
+                <a:ln>
+                  <a:noFill/>
+                </a:ln>
+                <a:solidFill>
+                  <a:schemeClr val="tx1"/>
+                </a:solidFill>
+                <a:effectLst/>
+                <a:latin typeface="Arial" pitchFamily="34" charset="0"/>
+              </a:rPr>
+              <a:t> </a:t>
+            </a:r>
+            <a:r>
+              <a:rPr kumimoji="0" lang="de-AT" sz="1100" b="0" i="0" u="none" strike="noStrike" cap="none" normalizeH="0" baseline="0" dirty="0" err="1" smtClean="0">
+                <a:ln>
+                  <a:noFill/>
+                </a:ln>
+                <a:solidFill>
+                  <a:schemeClr val="tx1"/>
+                </a:solidFill>
+                <a:effectLst/>
+                <a:latin typeface="Arial" pitchFamily="34" charset="0"/>
+              </a:rPr>
+              <a:t>clipboard</a:t>
+            </a:r>
+            <a:endParaRPr kumimoji="0" lang="en-US" sz="1100" b="0" i="0" u="none" strike="noStrike" cap="none" normalizeH="0" baseline="0" dirty="0" smtClean="0">
+              <a:ln>
+                <a:noFill/>
+              </a:ln>
+              <a:solidFill>
+                <a:schemeClr val="tx1"/>
               </a:solidFill>
               <a:effectLst/>
               <a:latin typeface="Arial" pitchFamily="34" charset="0"/>
@@ -8268,402 +7540,2221 @@
         <p:spPr>
           <a:xfrm>
             <a:off x="468000" y="97200"/>
-            <a:ext cx="7886700" cy="576000"/>
+            <a:ext cx="7632848" cy="576064"/>
           </a:xfrm>
         </p:spPr>
         <p:txBody>
-          <a:bodyPr>
-            <a:normAutofit/>
+          <a:bodyPr/>
+          <a:lstStyle/>
+          <a:p>
+            <a:r>
+              <a:rPr lang="it-IT" dirty="0"/>
+              <a:t>VECTO Engine – </a:t>
+            </a:r>
+            <a:r>
+              <a:rPr lang="it-IT" dirty="0" err="1" smtClean="0"/>
+              <a:t>Operation</a:t>
+            </a:r>
+            <a:r>
+              <a:rPr lang="it-IT" dirty="0" smtClean="0"/>
+              <a:t> </a:t>
+            </a:r>
+            <a:r>
+              <a:rPr lang="it-IT" dirty="0"/>
+              <a:t>via GUI</a:t>
+            </a:r>
+            <a:endParaRPr lang="en-US" dirty="0"/>
+          </a:p>
+        </p:txBody>
+      </p:sp>
+      <p:grpSp>
+        <p:nvGrpSpPr>
+          <p:cNvPr id="19" name="Gruppieren 18"/>
+          <p:cNvGrpSpPr/>
+          <p:nvPr/>
+        </p:nvGrpSpPr>
+        <p:grpSpPr>
+          <a:xfrm>
+            <a:off x="179626" y="1051826"/>
+            <a:ext cx="5492123" cy="5306426"/>
+            <a:chOff x="179626" y="1051826"/>
+            <a:chExt cx="5492123" cy="5306426"/>
+          </a:xfrm>
+        </p:grpSpPr>
+        <p:pic>
+          <p:nvPicPr>
+            <p:cNvPr id="20" name="Grafik 19"/>
+            <p:cNvPicPr>
+              <a:picLocks noChangeAspect="1"/>
+            </p:cNvPicPr>
+            <p:nvPr/>
+          </p:nvPicPr>
+          <p:blipFill>
+            <a:blip r:embed="rId3"/>
+            <a:stretch>
+              <a:fillRect/>
+            </a:stretch>
+          </p:blipFill>
+          <p:spPr>
+            <a:xfrm>
+              <a:off x="179626" y="1051826"/>
+              <a:ext cx="5492123" cy="5306426"/>
+            </a:xfrm>
+            <a:prstGeom prst="rect">
+              <a:avLst/>
+            </a:prstGeom>
+          </p:spPr>
+        </p:pic>
+        <p:pic>
+          <p:nvPicPr>
+            <p:cNvPr id="21" name="Grafik 20"/>
+            <p:cNvPicPr>
+              <a:picLocks noChangeAspect="1"/>
+            </p:cNvPicPr>
+            <p:nvPr/>
+          </p:nvPicPr>
+          <p:blipFill rotWithShape="1">
+            <a:blip r:embed="rId4"/>
+            <a:srcRect l="74732" t="81437"/>
+            <a:stretch/>
+          </p:blipFill>
+          <p:spPr>
+            <a:xfrm>
+              <a:off x="4283995" y="5373216"/>
+              <a:ext cx="1387754" cy="985010"/>
+            </a:xfrm>
+            <a:prstGeom prst="rect">
+              <a:avLst/>
+            </a:prstGeom>
+          </p:spPr>
+        </p:pic>
+        <p:pic>
+          <p:nvPicPr>
+            <p:cNvPr id="22" name="Grafik 21"/>
+            <p:cNvPicPr>
+              <a:picLocks noChangeAspect="1"/>
+            </p:cNvPicPr>
+            <p:nvPr/>
+          </p:nvPicPr>
+          <p:blipFill rotWithShape="1">
+            <a:blip r:embed="rId4"/>
+            <a:srcRect l="74732" b="67415"/>
+            <a:stretch/>
+          </p:blipFill>
+          <p:spPr>
+            <a:xfrm>
+              <a:off x="4283968" y="1051826"/>
+              <a:ext cx="1387754" cy="1729102"/>
+            </a:xfrm>
+            <a:prstGeom prst="rect">
+              <a:avLst/>
+            </a:prstGeom>
+          </p:spPr>
+        </p:pic>
+      </p:grpSp>
+      <p:sp>
+        <p:nvSpPr>
+          <p:cNvPr id="23" name="Rechteck 22"/>
+          <p:cNvSpPr/>
+          <p:nvPr/>
+        </p:nvSpPr>
+        <p:spPr bwMode="auto">
+          <a:xfrm>
+            <a:off x="255788" y="1581731"/>
+            <a:ext cx="5316466" cy="1296000"/>
+          </a:xfrm>
+          <a:prstGeom prst="rect">
+            <a:avLst/>
+          </a:prstGeom>
+          <a:solidFill>
+            <a:srgbClr val="FF0000">
+              <a:alpha val="15000"/>
+            </a:srgbClr>
+          </a:solidFill>
+          <a:ln w="25400" cap="flat" cmpd="sng" algn="ctr">
+            <a:solidFill>
+              <a:srgbClr val="FF0000"/>
+            </a:solidFill>
+            <a:prstDash val="solid"/>
+            <a:round/>
+            <a:headEnd type="none" w="med" len="med"/>
+            <a:tailEnd type="triangle" w="med" len="med"/>
+          </a:ln>
+          <a:effectLst/>
+          <a:extLst/>
+        </p:spPr>
+        <p:txBody>
+          <a:bodyPr vert="horz" wrap="square" lIns="91440" tIns="45720" rIns="91440" bIns="45720" numCol="1" rtlCol="0" anchor="ctr" anchorCtr="0" compatLnSpc="1">
+            <a:prstTxWarp prst="textNoShape">
+              <a:avLst/>
+            </a:prstTxWarp>
+            <a:spAutoFit/>
           </a:bodyPr>
           <a:lstStyle/>
           <a:p>
-            <a:r>
-              <a:rPr lang="en-US" dirty="0" smtClean="0"/>
-              <a:t>VECTO Engine – Basic features</a:t>
-            </a:r>
-            <a:endParaRPr lang="en-US" dirty="0"/>
+            <a:pPr marL="0" marR="0" indent="0" algn="ctr" defTabSz="914400" rtl="0" eaLnBrk="1" fontAlgn="base" latinLnBrk="0" hangingPunct="1">
+              <a:lnSpc>
+                <a:spcPct val="100000"/>
+              </a:lnSpc>
+              <a:spcBef>
+                <a:spcPct val="30000"/>
+              </a:spcBef>
+              <a:spcAft>
+                <a:spcPct val="0"/>
+              </a:spcAft>
+              <a:buClrTx/>
+              <a:buSzTx/>
+              <a:buFontTx/>
+              <a:buNone/>
+              <a:tabLst/>
+            </a:pPr>
+            <a:endParaRPr kumimoji="0" lang="en-US" sz="2000" b="1" i="0" u="none" strike="noStrike" cap="none" normalizeH="0" baseline="0" smtClean="0">
+              <a:ln>
+                <a:noFill/>
+              </a:ln>
+              <a:solidFill>
+                <a:schemeClr val="tx1"/>
+              </a:solidFill>
+              <a:effectLst/>
+              <a:latin typeface="Arial" pitchFamily="34" charset="0"/>
+            </a:endParaRPr>
           </a:p>
         </p:txBody>
       </p:sp>
       <p:sp>
         <p:nvSpPr>
-          <p:cNvPr id="7" name="Inhaltsplatzhalter 2"/>
-          <p:cNvSpPr>
-            <a:spLocks noGrp="1"/>
-          </p:cNvSpPr>
-          <p:nvPr>
-            <p:ph idx="1"/>
-          </p:nvPr>
+          <p:cNvPr id="24" name="Legende mit Linie 1 (Markierungsleiste) 7"/>
+          <p:cNvSpPr/>
+          <p:nvPr/>
         </p:nvSpPr>
-        <p:spPr>
+        <p:spPr bwMode="auto">
           <a:xfrm>
-            <a:off x="360000" y="1267200"/>
-            <a:ext cx="8100000" cy="3263504"/>
+            <a:off x="6660232" y="1697228"/>
+            <a:ext cx="2483768" cy="820225"/>
           </a:xfrm>
+          <a:prstGeom prst="accentCallout1">
+            <a:avLst>
+              <a:gd name="adj1" fmla="val 56216"/>
+              <a:gd name="adj2" fmla="val -2353"/>
+              <a:gd name="adj3" fmla="val 191065"/>
+              <a:gd name="adj4" fmla="val -42498"/>
+            </a:avLst>
+          </a:prstGeom>
+          <a:noFill/>
+          <a:ln w="19050" cap="flat" cmpd="sng" algn="ctr">
+            <a:solidFill>
+              <a:schemeClr val="tx1"/>
+            </a:solidFill>
+            <a:prstDash val="solid"/>
+            <a:round/>
+            <a:headEnd type="none" w="med" len="med"/>
+            <a:tailEnd type="triangle" w="med" len="med"/>
+          </a:ln>
+          <a:effectLst/>
+          <a:extLst/>
         </p:spPr>
         <p:txBody>
-          <a:bodyPr>
-            <a:noAutofit/>
+          <a:bodyPr vert="horz" wrap="square" lIns="91440" tIns="45720" rIns="91440" bIns="45720" numCol="1" rtlCol="0" anchor="ctr" anchorCtr="0" compatLnSpc="1">
+            <a:prstTxWarp prst="textNoShape">
+              <a:avLst/>
+            </a:prstTxWarp>
+            <a:spAutoFit/>
           </a:bodyPr>
           <a:lstStyle/>
           <a:p>
-            <a:pPr>
+            <a:pPr marL="0" marR="0" indent="0" algn="ctr" defTabSz="914400" rtl="0" eaLnBrk="1" fontAlgn="base" latinLnBrk="0" hangingPunct="1">
+              <a:lnSpc>
+                <a:spcPct val="100000"/>
+              </a:lnSpc>
               <a:spcBef>
-                <a:spcPts val="0"/>
+                <a:spcPct val="30000"/>
               </a:spcBef>
               <a:spcAft>
-                <a:spcPts val="600"/>
+                <a:spcPct val="0"/>
               </a:spcAft>
+              <a:buClrTx/>
+              <a:buSzTx/>
+              <a:buFontTx/>
+              <a:buNone/>
+              <a:tabLst/>
+            </a:pPr>
+            <a:r>
+              <a:rPr kumimoji="0" lang="de-AT" sz="1100" i="0" u="sng" strike="noStrike" cap="none" normalizeH="0" baseline="0" dirty="0" err="1" smtClean="0">
+                <a:ln>
+                  <a:noFill/>
+                </a:ln>
+                <a:solidFill>
+                  <a:schemeClr val="tx1"/>
+                </a:solidFill>
+                <a:effectLst/>
+                <a:latin typeface="Arial" pitchFamily="34" charset="0"/>
+              </a:rPr>
+              <a:t>Step</a:t>
+            </a:r>
+            <a:r>
+              <a:rPr kumimoji="0" lang="de-AT" sz="1100" i="0" u="sng" strike="noStrike" cap="none" normalizeH="0" baseline="0" dirty="0" smtClean="0">
+                <a:ln>
+                  <a:noFill/>
+                </a:ln>
+                <a:solidFill>
+                  <a:schemeClr val="tx1"/>
+                </a:solidFill>
+                <a:effectLst/>
+                <a:latin typeface="Arial" pitchFamily="34" charset="0"/>
+              </a:rPr>
+              <a:t> 2</a:t>
+            </a:r>
+          </a:p>
+          <a:p>
+            <a:pPr marL="0" marR="0" indent="0" algn="l" defTabSz="914400" rtl="0" eaLnBrk="1" fontAlgn="base" latinLnBrk="0" hangingPunct="1">
+              <a:lnSpc>
+                <a:spcPct val="100000"/>
+              </a:lnSpc>
+              <a:spcBef>
+                <a:spcPct val="30000"/>
+              </a:spcBef>
+              <a:spcAft>
+                <a:spcPct val="0"/>
+              </a:spcAft>
+              <a:buClrTx/>
+              <a:buSzTx/>
+              <a:buFontTx/>
+              <a:buNone/>
+              <a:tabLst/>
+            </a:pPr>
+            <a:r>
+              <a:rPr lang="de-AT" sz="1100" b="0" dirty="0" smtClean="0">
+                <a:latin typeface="Arial" pitchFamily="34" charset="0"/>
+              </a:rPr>
+              <a:t>Load all </a:t>
+            </a:r>
+            <a:r>
+              <a:rPr lang="de-AT" sz="1100" b="0" dirty="0" err="1" smtClean="0">
+                <a:latin typeface="Arial" pitchFamily="34" charset="0"/>
+              </a:rPr>
+              <a:t>required</a:t>
+            </a:r>
+            <a:r>
+              <a:rPr lang="de-AT" sz="1100" b="0" dirty="0" smtClean="0">
+                <a:latin typeface="Arial" pitchFamily="34" charset="0"/>
+              </a:rPr>
+              <a:t> </a:t>
+            </a:r>
+            <a:r>
+              <a:rPr lang="de-AT" sz="1100" b="0" dirty="0" err="1" smtClean="0">
+                <a:latin typeface="Arial" pitchFamily="34" charset="0"/>
+              </a:rPr>
+              <a:t>input</a:t>
+            </a:r>
+            <a:r>
+              <a:rPr lang="de-AT" sz="1100" b="0" dirty="0" smtClean="0">
+                <a:latin typeface="Arial" pitchFamily="34" charset="0"/>
+              </a:rPr>
+              <a:t> </a:t>
+            </a:r>
+            <a:r>
+              <a:rPr lang="de-AT" sz="1100" b="0" dirty="0" err="1" smtClean="0">
+                <a:latin typeface="Arial" pitchFamily="34" charset="0"/>
+              </a:rPr>
+              <a:t>files</a:t>
+            </a:r>
+            <a:r>
+              <a:rPr lang="de-AT" sz="1100" b="0" dirty="0" smtClean="0">
+                <a:latin typeface="Arial" pitchFamily="34" charset="0"/>
+              </a:rPr>
+              <a:t> via separate open </a:t>
+            </a:r>
+            <a:r>
+              <a:rPr lang="de-AT" sz="1100" b="0" dirty="0" err="1" smtClean="0">
+                <a:latin typeface="Arial" pitchFamily="34" charset="0"/>
+              </a:rPr>
+              <a:t>file</a:t>
+            </a:r>
+            <a:r>
+              <a:rPr lang="de-AT" sz="1100" b="0" dirty="0" smtClean="0">
+                <a:latin typeface="Arial" pitchFamily="34" charset="0"/>
+              </a:rPr>
+              <a:t> </a:t>
+            </a:r>
+            <a:r>
+              <a:rPr lang="de-AT" sz="1100" b="0" dirty="0" err="1" smtClean="0">
+                <a:latin typeface="Arial" pitchFamily="34" charset="0"/>
+              </a:rPr>
+              <a:t>buttons</a:t>
+            </a:r>
+            <a:r>
+              <a:rPr lang="de-AT" sz="1100" b="0" dirty="0">
+                <a:latin typeface="Arial" pitchFamily="34" charset="0"/>
+              </a:rPr>
+              <a:t/>
+            </a:r>
+            <a:br>
+              <a:rPr lang="de-AT" sz="1100" b="0" dirty="0">
+                <a:latin typeface="Arial" pitchFamily="34" charset="0"/>
+              </a:rPr>
+            </a:br>
+            <a:r>
+              <a:rPr lang="de-AT" sz="1100" b="0" dirty="0" smtClean="0">
+                <a:latin typeface="Arial" pitchFamily="34" charset="0"/>
+              </a:rPr>
+              <a:t>(</a:t>
+            </a:r>
+            <a:r>
+              <a:rPr lang="de-AT" sz="1100" b="0" dirty="0" err="1" smtClean="0">
+                <a:latin typeface="Arial" pitchFamily="34" charset="0"/>
+              </a:rPr>
+              <a:t>for</a:t>
+            </a:r>
+            <a:r>
+              <a:rPr lang="de-AT" sz="1100" b="0" dirty="0" smtClean="0">
+                <a:latin typeface="Arial" pitchFamily="34" charset="0"/>
+              </a:rPr>
+              <a:t> </a:t>
+            </a:r>
+            <a:r>
+              <a:rPr lang="de-AT" sz="1100" b="0" dirty="0" err="1" smtClean="0">
+                <a:latin typeface="Arial" pitchFamily="34" charset="0"/>
+              </a:rPr>
+              <a:t>file</a:t>
+            </a:r>
+            <a:r>
+              <a:rPr lang="de-AT" sz="1100" b="0" dirty="0" smtClean="0">
+                <a:latin typeface="Arial" pitchFamily="34" charset="0"/>
+              </a:rPr>
+              <a:t> </a:t>
+            </a:r>
+            <a:r>
+              <a:rPr lang="de-AT" sz="1100" b="0" dirty="0" err="1" smtClean="0">
+                <a:latin typeface="Arial" pitchFamily="34" charset="0"/>
+              </a:rPr>
+              <a:t>format</a:t>
+            </a:r>
+            <a:r>
+              <a:rPr lang="de-AT" sz="1100" b="0" dirty="0" smtClean="0">
+                <a:latin typeface="Arial" pitchFamily="34" charset="0"/>
+              </a:rPr>
+              <a:t> </a:t>
+            </a:r>
+            <a:r>
+              <a:rPr lang="de-AT" sz="1100" b="0" dirty="0" err="1" smtClean="0">
+                <a:latin typeface="Arial" pitchFamily="34" charset="0"/>
+              </a:rPr>
+              <a:t>please</a:t>
+            </a:r>
+            <a:r>
+              <a:rPr lang="de-AT" sz="1100" b="0" dirty="0" smtClean="0">
+                <a:latin typeface="Arial" pitchFamily="34" charset="0"/>
+              </a:rPr>
+              <a:t> </a:t>
+            </a:r>
+            <a:r>
+              <a:rPr lang="de-AT" sz="1100" b="0" dirty="0" err="1" smtClean="0">
+                <a:latin typeface="Arial" pitchFamily="34" charset="0"/>
+              </a:rPr>
+              <a:t>see</a:t>
+            </a:r>
+            <a:r>
+              <a:rPr lang="de-AT" sz="1100" b="0" dirty="0" smtClean="0">
+                <a:latin typeface="Arial" pitchFamily="34" charset="0"/>
+              </a:rPr>
+              <a:t> </a:t>
+            </a:r>
+            <a:r>
+              <a:rPr lang="de-AT" sz="1100" b="0" dirty="0" err="1" smtClean="0">
+                <a:latin typeface="Arial" pitchFamily="34" charset="0"/>
+              </a:rPr>
+              <a:t>demo</a:t>
+            </a:r>
+            <a:r>
+              <a:rPr lang="de-AT" sz="1100" b="0" dirty="0" smtClean="0">
+                <a:latin typeface="Arial" pitchFamily="34" charset="0"/>
+              </a:rPr>
+              <a:t> </a:t>
+            </a:r>
+            <a:r>
+              <a:rPr lang="de-AT" sz="1100" b="0" dirty="0" err="1" smtClean="0">
+                <a:latin typeface="Arial" pitchFamily="34" charset="0"/>
+              </a:rPr>
+              <a:t>files</a:t>
+            </a:r>
+            <a:r>
+              <a:rPr lang="de-AT" sz="1100" b="0" dirty="0" smtClean="0">
+                <a:latin typeface="Arial" pitchFamily="34" charset="0"/>
+              </a:rPr>
+              <a:t>)</a:t>
+            </a:r>
+            <a:endParaRPr kumimoji="0" lang="en-US" sz="1100" b="0" i="0" u="none" strike="noStrike" cap="none" normalizeH="0" baseline="0" dirty="0" smtClean="0">
+              <a:ln>
+                <a:noFill/>
+              </a:ln>
+              <a:solidFill>
+                <a:schemeClr val="tx1"/>
+              </a:solidFill>
+              <a:effectLst/>
+              <a:latin typeface="Arial" pitchFamily="34" charset="0"/>
+            </a:endParaRPr>
+          </a:p>
+        </p:txBody>
+      </p:sp>
+      <p:sp>
+        <p:nvSpPr>
+          <p:cNvPr id="25" name="Legende mit Linie 1 (Markierungsleiste) 13"/>
+          <p:cNvSpPr/>
+          <p:nvPr/>
+        </p:nvSpPr>
+        <p:spPr bwMode="auto">
+          <a:xfrm>
+            <a:off x="6660232" y="4802734"/>
+            <a:ext cx="2483768" cy="650947"/>
+          </a:xfrm>
+          <a:prstGeom prst="accentCallout1">
+            <a:avLst>
+              <a:gd name="adj1" fmla="val 56216"/>
+              <a:gd name="adj2" fmla="val -2353"/>
+              <a:gd name="adj3" fmla="val 71210"/>
+              <a:gd name="adj4" fmla="val -41993"/>
+            </a:avLst>
+          </a:prstGeom>
+          <a:noFill/>
+          <a:ln w="19050" cap="flat" cmpd="sng" algn="ctr">
+            <a:solidFill>
+              <a:schemeClr val="tx1"/>
+            </a:solidFill>
+            <a:prstDash val="solid"/>
+            <a:round/>
+            <a:headEnd type="none" w="med" len="med"/>
+            <a:tailEnd type="triangle" w="med" len="med"/>
+          </a:ln>
+          <a:effectLst/>
+          <a:extLst/>
+        </p:spPr>
+        <p:txBody>
+          <a:bodyPr vert="horz" wrap="square" lIns="91440" tIns="45720" rIns="91440" bIns="45720" numCol="1" rtlCol="0" anchor="ctr" anchorCtr="0" compatLnSpc="1">
+            <a:prstTxWarp prst="textNoShape">
+              <a:avLst/>
+            </a:prstTxWarp>
+            <a:spAutoFit/>
+          </a:bodyPr>
+          <a:lstStyle/>
+          <a:p>
+            <a:pPr marL="0" marR="0" indent="0" algn="ctr" defTabSz="914400" rtl="0" eaLnBrk="1" fontAlgn="base" latinLnBrk="0" hangingPunct="1">
+              <a:lnSpc>
+                <a:spcPct val="100000"/>
+              </a:lnSpc>
+              <a:spcBef>
+                <a:spcPct val="30000"/>
+              </a:spcBef>
+              <a:spcAft>
+                <a:spcPct val="0"/>
+              </a:spcAft>
+              <a:buClrTx/>
+              <a:buSzTx/>
+              <a:buFontTx/>
+              <a:buNone/>
+              <a:tabLst/>
+            </a:pPr>
+            <a:r>
+              <a:rPr kumimoji="0" lang="de-AT" sz="1100" i="0" u="sng" strike="noStrike" cap="none" normalizeH="0" baseline="0" dirty="0" err="1" smtClean="0">
+                <a:ln>
+                  <a:noFill/>
+                </a:ln>
+                <a:solidFill>
+                  <a:schemeClr val="tx1"/>
+                </a:solidFill>
+                <a:effectLst/>
+                <a:latin typeface="Arial" pitchFamily="34" charset="0"/>
+              </a:rPr>
+              <a:t>Step</a:t>
+            </a:r>
+            <a:r>
+              <a:rPr kumimoji="0" lang="de-AT" sz="1100" i="0" u="sng" strike="noStrike" cap="none" normalizeH="0" baseline="0" dirty="0" smtClean="0">
+                <a:ln>
+                  <a:noFill/>
+                </a:ln>
+                <a:solidFill>
+                  <a:schemeClr val="tx1"/>
+                </a:solidFill>
+                <a:effectLst/>
+                <a:latin typeface="Arial" pitchFamily="34" charset="0"/>
+              </a:rPr>
+              <a:t> 4</a:t>
+            </a:r>
+          </a:p>
+          <a:p>
+            <a:pPr marL="0" marR="0" indent="0" algn="l" defTabSz="914400" rtl="0" eaLnBrk="1" fontAlgn="base" latinLnBrk="0" hangingPunct="1">
+              <a:lnSpc>
+                <a:spcPct val="100000"/>
+              </a:lnSpc>
+              <a:spcBef>
+                <a:spcPct val="30000"/>
+              </a:spcBef>
+              <a:spcAft>
+                <a:spcPct val="0"/>
+              </a:spcAft>
+              <a:buClrTx/>
+              <a:buSzTx/>
+              <a:buFontTx/>
+              <a:buNone/>
+              <a:tabLst/>
+            </a:pPr>
+            <a:r>
+              <a:rPr lang="de-AT" sz="1100" b="0" dirty="0" err="1" smtClean="0">
+                <a:latin typeface="Arial" pitchFamily="34" charset="0"/>
+              </a:rPr>
+              <a:t>Define</a:t>
+            </a:r>
+            <a:r>
+              <a:rPr lang="de-AT" sz="1100" b="0" dirty="0" smtClean="0">
+                <a:latin typeface="Arial" pitchFamily="34" charset="0"/>
+              </a:rPr>
+              <a:t> </a:t>
+            </a:r>
+            <a:r>
+              <a:rPr lang="de-AT" sz="1100" b="0" dirty="0" err="1" smtClean="0">
+                <a:latin typeface="Arial" pitchFamily="34" charset="0"/>
+              </a:rPr>
+              <a:t>directory</a:t>
+            </a:r>
+            <a:r>
+              <a:rPr lang="de-AT" sz="1100" b="0" dirty="0" smtClean="0">
+                <a:latin typeface="Arial" pitchFamily="34" charset="0"/>
+              </a:rPr>
+              <a:t> </a:t>
+            </a:r>
+            <a:r>
+              <a:rPr lang="de-AT" sz="1100" b="0" dirty="0" err="1" smtClean="0">
+                <a:latin typeface="Arial" pitchFamily="34" charset="0"/>
+              </a:rPr>
+              <a:t>where</a:t>
+            </a:r>
+            <a:r>
+              <a:rPr lang="de-AT" sz="1100" b="0" dirty="0" smtClean="0">
+                <a:latin typeface="Arial" pitchFamily="34" charset="0"/>
+              </a:rPr>
+              <a:t> </a:t>
+            </a:r>
+            <a:r>
+              <a:rPr lang="de-AT" sz="1100" b="0" dirty="0" err="1" smtClean="0">
+                <a:latin typeface="Arial" pitchFamily="34" charset="0"/>
+              </a:rPr>
+              <a:t>output</a:t>
+            </a:r>
+            <a:r>
+              <a:rPr lang="de-AT" sz="1100" b="0" dirty="0" smtClean="0">
+                <a:latin typeface="Arial" pitchFamily="34" charset="0"/>
+              </a:rPr>
+              <a:t> </a:t>
+            </a:r>
+            <a:r>
+              <a:rPr lang="de-AT" sz="1100" b="0" dirty="0" err="1" smtClean="0">
+                <a:latin typeface="Arial" pitchFamily="34" charset="0"/>
+              </a:rPr>
+              <a:t>files</a:t>
+            </a:r>
+            <a:r>
+              <a:rPr lang="de-AT" sz="1100" b="0" dirty="0" smtClean="0">
+                <a:latin typeface="Arial" pitchFamily="34" charset="0"/>
+              </a:rPr>
+              <a:t> </a:t>
+            </a:r>
+            <a:r>
+              <a:rPr lang="de-AT" sz="1100" b="0" dirty="0" err="1" smtClean="0">
+                <a:latin typeface="Arial" pitchFamily="34" charset="0"/>
+              </a:rPr>
+              <a:t>are</a:t>
+            </a:r>
+            <a:r>
+              <a:rPr lang="de-AT" sz="1100" b="0" dirty="0" smtClean="0">
+                <a:latin typeface="Arial" pitchFamily="34" charset="0"/>
+              </a:rPr>
+              <a:t> </a:t>
+            </a:r>
+            <a:r>
+              <a:rPr lang="de-AT" sz="1100" b="0" dirty="0" err="1" smtClean="0">
+                <a:latin typeface="Arial" pitchFamily="34" charset="0"/>
+              </a:rPr>
+              <a:t>stored</a:t>
+            </a:r>
+            <a:r>
+              <a:rPr lang="de-AT" sz="1100" b="0" dirty="0" smtClean="0">
+                <a:latin typeface="Arial" pitchFamily="34" charset="0"/>
+              </a:rPr>
+              <a:t> </a:t>
+            </a:r>
+            <a:endParaRPr kumimoji="0" lang="en-US" sz="1100" b="0" i="0" u="none" strike="noStrike" cap="none" normalizeH="0" baseline="0" dirty="0" smtClean="0">
+              <a:ln>
+                <a:noFill/>
+              </a:ln>
+              <a:solidFill>
+                <a:schemeClr val="tx1"/>
+              </a:solidFill>
+              <a:effectLst/>
+              <a:latin typeface="Arial" pitchFamily="34" charset="0"/>
+            </a:endParaRPr>
+          </a:p>
+        </p:txBody>
+      </p:sp>
+      <p:sp>
+        <p:nvSpPr>
+          <p:cNvPr id="26" name="Legende mit Linie 1 (Markierungsleiste) 14"/>
+          <p:cNvSpPr/>
+          <p:nvPr/>
+        </p:nvSpPr>
+        <p:spPr bwMode="auto">
+          <a:xfrm>
+            <a:off x="6660232" y="5526798"/>
+            <a:ext cx="2483768" cy="800219"/>
+          </a:xfrm>
+          <a:prstGeom prst="accentCallout1">
+            <a:avLst>
+              <a:gd name="adj1" fmla="val 56216"/>
+              <a:gd name="adj2" fmla="val -2353"/>
+              <a:gd name="adj3" fmla="val -73790"/>
+              <a:gd name="adj4" fmla="val -151852"/>
+            </a:avLst>
+          </a:prstGeom>
+          <a:noFill/>
+          <a:ln w="19050" cap="flat" cmpd="sng" algn="ctr">
+            <a:solidFill>
+              <a:schemeClr val="tx1"/>
+            </a:solidFill>
+            <a:prstDash val="solid"/>
+            <a:round/>
+            <a:headEnd type="none" w="med" len="med"/>
+            <a:tailEnd type="triangle" w="med" len="med"/>
+          </a:ln>
+          <a:effectLst/>
+          <a:extLst/>
+        </p:spPr>
+        <p:txBody>
+          <a:bodyPr vert="horz" wrap="square" lIns="91440" tIns="45720" rIns="91440" bIns="45720" numCol="1" rtlCol="0" anchor="ctr" anchorCtr="0" compatLnSpc="1">
+            <a:prstTxWarp prst="textNoShape">
+              <a:avLst/>
+            </a:prstTxWarp>
+            <a:spAutoFit/>
+          </a:bodyPr>
+          <a:lstStyle/>
+          <a:p>
+            <a:pPr marL="0" marR="0" indent="0" algn="ctr" defTabSz="914400" rtl="0" eaLnBrk="1" fontAlgn="base" latinLnBrk="0" hangingPunct="1">
+              <a:lnSpc>
+                <a:spcPct val="100000"/>
+              </a:lnSpc>
+              <a:spcBef>
+                <a:spcPct val="30000"/>
+              </a:spcBef>
+              <a:spcAft>
+                <a:spcPct val="0"/>
+              </a:spcAft>
+              <a:buClrTx/>
+              <a:buSzTx/>
+              <a:buFontTx/>
+              <a:buNone/>
+              <a:tabLst/>
+            </a:pPr>
+            <a:r>
+              <a:rPr kumimoji="0" lang="de-AT" sz="1100" i="0" u="sng" strike="noStrike" cap="none" normalizeH="0" baseline="0" dirty="0" err="1" smtClean="0">
+                <a:ln>
+                  <a:noFill/>
+                </a:ln>
+                <a:solidFill>
+                  <a:schemeClr val="tx1"/>
+                </a:solidFill>
+                <a:effectLst/>
+                <a:latin typeface="Arial" pitchFamily="34" charset="0"/>
+              </a:rPr>
+              <a:t>Step</a:t>
+            </a:r>
+            <a:r>
+              <a:rPr kumimoji="0" lang="de-AT" sz="1100" i="0" u="sng" strike="noStrike" cap="none" normalizeH="0" baseline="0" dirty="0" smtClean="0">
+                <a:ln>
+                  <a:noFill/>
+                </a:ln>
+                <a:solidFill>
+                  <a:schemeClr val="tx1"/>
+                </a:solidFill>
+                <a:effectLst/>
+                <a:latin typeface="Arial" pitchFamily="34" charset="0"/>
+              </a:rPr>
+              <a:t> 5</a:t>
+            </a:r>
+          </a:p>
+          <a:p>
+            <a:pPr marL="0" marR="0" indent="0" algn="l" defTabSz="914400" rtl="0" eaLnBrk="1" fontAlgn="base" latinLnBrk="0" hangingPunct="1">
+              <a:lnSpc>
+                <a:spcPct val="100000"/>
+              </a:lnSpc>
+              <a:spcBef>
+                <a:spcPct val="30000"/>
+              </a:spcBef>
+              <a:spcAft>
+                <a:spcPct val="0"/>
+              </a:spcAft>
+              <a:buClrTx/>
+              <a:buSzTx/>
+              <a:buFontTx/>
+              <a:buNone/>
+              <a:tabLst/>
+            </a:pPr>
+            <a:r>
+              <a:rPr lang="de-AT" sz="1100" b="0" dirty="0" smtClean="0">
+                <a:latin typeface="Arial" pitchFamily="34" charset="0"/>
+              </a:rPr>
+              <a:t>Press „Start“ </a:t>
+            </a:r>
+            <a:r>
+              <a:rPr lang="de-AT" sz="1100" b="0" dirty="0" err="1" smtClean="0">
+                <a:latin typeface="Arial" pitchFamily="34" charset="0"/>
+              </a:rPr>
+              <a:t>button</a:t>
+            </a:r>
+            <a:r>
+              <a:rPr lang="de-AT" sz="1100" b="0" dirty="0" smtClean="0">
+                <a:latin typeface="Arial" pitchFamily="34" charset="0"/>
+              </a:rPr>
+              <a:t> </a:t>
+            </a:r>
+            <a:r>
+              <a:rPr lang="de-AT" sz="1100" b="0" dirty="0" err="1" smtClean="0">
+                <a:latin typeface="Arial" pitchFamily="34" charset="0"/>
+              </a:rPr>
+              <a:t>for</a:t>
+            </a:r>
+            <a:r>
+              <a:rPr lang="de-AT" sz="1100" b="0" dirty="0" smtClean="0">
+                <a:latin typeface="Arial" pitchFamily="34" charset="0"/>
+              </a:rPr>
+              <a:t> </a:t>
+            </a:r>
+            <a:r>
+              <a:rPr lang="de-AT" sz="1100" b="0" dirty="0" err="1" smtClean="0">
+                <a:latin typeface="Arial" pitchFamily="34" charset="0"/>
+              </a:rPr>
+              <a:t>full</a:t>
+            </a:r>
+            <a:r>
+              <a:rPr lang="de-AT" sz="1100" b="0" dirty="0" smtClean="0">
+                <a:latin typeface="Arial" pitchFamily="34" charset="0"/>
+              </a:rPr>
+              <a:t> </a:t>
+            </a:r>
+            <a:r>
+              <a:rPr lang="de-AT" sz="1100" b="0" dirty="0" err="1" smtClean="0">
+                <a:latin typeface="Arial" pitchFamily="34" charset="0"/>
+              </a:rPr>
+              <a:t>evaluation</a:t>
+            </a:r>
+            <a:endParaRPr lang="de-AT" sz="1100" b="0" dirty="0" smtClean="0">
+              <a:latin typeface="Arial" pitchFamily="34" charset="0"/>
+            </a:endParaRPr>
+          </a:p>
+          <a:p>
+            <a:pPr marL="0" marR="0" indent="0" algn="l" defTabSz="914400" rtl="0" eaLnBrk="1" fontAlgn="base" latinLnBrk="0" hangingPunct="1">
+              <a:lnSpc>
+                <a:spcPct val="100000"/>
+              </a:lnSpc>
+              <a:spcBef>
+                <a:spcPct val="30000"/>
+              </a:spcBef>
+              <a:spcAft>
+                <a:spcPct val="0"/>
+              </a:spcAft>
+              <a:buClrTx/>
+              <a:buSzTx/>
+              <a:buFontTx/>
+              <a:buNone/>
+              <a:tabLst/>
+            </a:pPr>
+            <a:r>
+              <a:rPr kumimoji="0" lang="de-AT" sz="900" b="0" i="1" u="none" strike="noStrike" cap="none" normalizeH="0" baseline="0" dirty="0" smtClean="0">
+                <a:ln>
+                  <a:noFill/>
+                </a:ln>
+                <a:solidFill>
+                  <a:schemeClr val="tx1"/>
+                </a:solidFill>
+                <a:effectLst/>
+                <a:latin typeface="Arial" pitchFamily="34" charset="0"/>
+              </a:rPr>
+              <a:t>(OR press </a:t>
+            </a:r>
+            <a:r>
+              <a:rPr kumimoji="0" lang="de-AT" sz="900" b="0" i="1" u="none" strike="noStrike" cap="none" normalizeH="0" baseline="0" dirty="0" err="1" smtClean="0">
+                <a:ln>
+                  <a:noFill/>
+                </a:ln>
+                <a:solidFill>
+                  <a:schemeClr val="tx1"/>
+                </a:solidFill>
+                <a:effectLst/>
+                <a:latin typeface="Arial" pitchFamily="34" charset="0"/>
+              </a:rPr>
+              <a:t>other</a:t>
+            </a:r>
+            <a:r>
+              <a:rPr kumimoji="0" lang="de-AT" sz="900" b="0" i="1" u="none" strike="noStrike" cap="none" normalizeH="0" baseline="0" dirty="0" smtClean="0">
+                <a:ln>
+                  <a:noFill/>
+                </a:ln>
+                <a:solidFill>
+                  <a:schemeClr val="tx1"/>
+                </a:solidFill>
+                <a:effectLst/>
+                <a:latin typeface="Arial" pitchFamily="34" charset="0"/>
+              </a:rPr>
+              <a:t> </a:t>
+            </a:r>
+            <a:r>
+              <a:rPr kumimoji="0" lang="de-AT" sz="900" b="0" i="1" u="none" strike="noStrike" cap="none" normalizeH="0" baseline="0" dirty="0" err="1" smtClean="0">
+                <a:ln>
+                  <a:noFill/>
+                </a:ln>
+                <a:solidFill>
+                  <a:schemeClr val="tx1"/>
+                </a:solidFill>
+                <a:effectLst/>
+                <a:latin typeface="Arial" pitchFamily="34" charset="0"/>
+              </a:rPr>
+              <a:t>button</a:t>
+            </a:r>
+            <a:r>
+              <a:rPr kumimoji="0" lang="de-AT" sz="900" b="0" i="1" u="none" strike="noStrike" cap="none" normalizeH="0" dirty="0" smtClean="0">
+                <a:ln>
+                  <a:noFill/>
+                </a:ln>
+                <a:solidFill>
+                  <a:schemeClr val="tx1"/>
+                </a:solidFill>
+                <a:effectLst/>
+                <a:latin typeface="Arial" pitchFamily="34" charset="0"/>
+              </a:rPr>
+              <a:t> </a:t>
+            </a:r>
+            <a:r>
+              <a:rPr kumimoji="0" lang="de-AT" sz="900" b="0" i="1" u="none" strike="noStrike" cap="none" normalizeH="0" dirty="0" err="1" smtClean="0">
+                <a:ln>
+                  <a:noFill/>
+                </a:ln>
+                <a:solidFill>
+                  <a:schemeClr val="tx1"/>
+                </a:solidFill>
+                <a:effectLst/>
+                <a:latin typeface="Arial" pitchFamily="34" charset="0"/>
+              </a:rPr>
+              <a:t>to</a:t>
+            </a:r>
+            <a:r>
+              <a:rPr kumimoji="0" lang="de-AT" sz="900" b="0" i="1" u="none" strike="noStrike" cap="none" normalizeH="0" dirty="0" smtClean="0">
+                <a:ln>
+                  <a:noFill/>
+                </a:ln>
+                <a:solidFill>
+                  <a:schemeClr val="tx1"/>
+                </a:solidFill>
+                <a:effectLst/>
+                <a:latin typeface="Arial" pitchFamily="34" charset="0"/>
+              </a:rPr>
+              <a:t> </a:t>
+            </a:r>
+            <a:r>
+              <a:rPr kumimoji="0" lang="de-AT" sz="900" b="0" i="1" u="none" strike="noStrike" cap="none" normalizeH="0" dirty="0" err="1" smtClean="0">
+                <a:ln>
+                  <a:noFill/>
+                </a:ln>
+                <a:solidFill>
+                  <a:schemeClr val="tx1"/>
+                </a:solidFill>
+                <a:effectLst/>
+                <a:latin typeface="Arial" pitchFamily="34" charset="0"/>
+              </a:rPr>
+              <a:t>precalculate</a:t>
+            </a:r>
+            <a:r>
+              <a:rPr kumimoji="0" lang="de-AT" sz="900" b="0" i="1" u="none" strike="noStrike" cap="none" normalizeH="0" dirty="0" smtClean="0">
+                <a:ln>
+                  <a:noFill/>
+                </a:ln>
+                <a:solidFill>
+                  <a:schemeClr val="tx1"/>
+                </a:solidFill>
+                <a:effectLst/>
+                <a:latin typeface="Arial" pitchFamily="34" charset="0"/>
+              </a:rPr>
+              <a:t> </a:t>
+            </a:r>
+            <a:r>
+              <a:rPr kumimoji="0" lang="de-AT" sz="900" b="0" i="1" u="none" strike="noStrike" cap="none" normalizeH="0" dirty="0" err="1" smtClean="0">
+                <a:ln>
+                  <a:noFill/>
+                </a:ln>
+                <a:solidFill>
+                  <a:schemeClr val="tx1"/>
+                </a:solidFill>
+                <a:effectLst/>
+                <a:latin typeface="Arial" pitchFamily="34" charset="0"/>
+              </a:rPr>
+              <a:t>grid</a:t>
+            </a:r>
+            <a:r>
+              <a:rPr kumimoji="0" lang="de-AT" sz="900" b="0" i="1" u="none" strike="noStrike" cap="none" normalizeH="0" dirty="0" smtClean="0">
+                <a:ln>
+                  <a:noFill/>
+                </a:ln>
+                <a:solidFill>
+                  <a:schemeClr val="tx1"/>
+                </a:solidFill>
+                <a:effectLst/>
+                <a:latin typeface="Arial" pitchFamily="34" charset="0"/>
+              </a:rPr>
+              <a:t> </a:t>
+            </a:r>
+            <a:r>
+              <a:rPr kumimoji="0" lang="de-AT" sz="900" b="0" i="1" u="none" strike="noStrike" cap="none" normalizeH="0" dirty="0" err="1" smtClean="0">
+                <a:ln>
+                  <a:noFill/>
+                </a:ln>
+                <a:solidFill>
+                  <a:schemeClr val="tx1"/>
+                </a:solidFill>
+                <a:effectLst/>
+                <a:latin typeface="Arial" pitchFamily="34" charset="0"/>
+              </a:rPr>
+              <a:t>for</a:t>
+            </a:r>
+            <a:r>
+              <a:rPr kumimoji="0" lang="de-AT" sz="900" b="0" i="1" u="none" strike="noStrike" cap="none" normalizeH="0" dirty="0" smtClean="0">
+                <a:ln>
+                  <a:noFill/>
+                </a:ln>
+                <a:solidFill>
+                  <a:schemeClr val="tx1"/>
+                </a:solidFill>
+                <a:effectLst/>
+                <a:latin typeface="Arial" pitchFamily="34" charset="0"/>
+              </a:rPr>
+              <a:t> </a:t>
+            </a:r>
+            <a:r>
+              <a:rPr kumimoji="0" lang="de-AT" sz="900" b="0" i="1" u="none" strike="noStrike" cap="none" normalizeH="0" dirty="0" err="1" smtClean="0">
+                <a:ln>
+                  <a:noFill/>
+                </a:ln>
+                <a:solidFill>
+                  <a:schemeClr val="tx1"/>
+                </a:solidFill>
+                <a:effectLst/>
+                <a:latin typeface="Arial" pitchFamily="34" charset="0"/>
+              </a:rPr>
+              <a:t>fuel</a:t>
+            </a:r>
+            <a:r>
+              <a:rPr kumimoji="0" lang="de-AT" sz="900" b="0" i="1" u="none" strike="noStrike" cap="none" normalizeH="0" dirty="0" smtClean="0">
+                <a:ln>
+                  <a:noFill/>
+                </a:ln>
+                <a:solidFill>
+                  <a:schemeClr val="tx1"/>
+                </a:solidFill>
+                <a:effectLst/>
+                <a:latin typeface="Arial" pitchFamily="34" charset="0"/>
+              </a:rPr>
+              <a:t> </a:t>
+            </a:r>
+            <a:r>
+              <a:rPr kumimoji="0" lang="de-AT" sz="900" b="0" i="1" u="none" strike="noStrike" cap="none" normalizeH="0" dirty="0" err="1" smtClean="0">
+                <a:ln>
+                  <a:noFill/>
+                </a:ln>
+                <a:solidFill>
+                  <a:schemeClr val="tx1"/>
+                </a:solidFill>
+                <a:effectLst/>
+                <a:latin typeface="Arial" pitchFamily="34" charset="0"/>
+              </a:rPr>
+              <a:t>map</a:t>
+            </a:r>
+            <a:r>
+              <a:rPr kumimoji="0" lang="de-AT" sz="900" b="0" i="1" u="none" strike="noStrike" cap="none" normalizeH="0" dirty="0" smtClean="0">
+                <a:ln>
+                  <a:noFill/>
+                </a:ln>
+                <a:solidFill>
+                  <a:schemeClr val="tx1"/>
+                </a:solidFill>
+                <a:effectLst/>
+                <a:latin typeface="Arial" pitchFamily="34" charset="0"/>
+              </a:rPr>
+              <a:t> </a:t>
+            </a:r>
+            <a:r>
+              <a:rPr kumimoji="0" lang="de-AT" sz="900" b="0" i="1" u="none" strike="noStrike" cap="none" normalizeH="0" dirty="0" err="1" smtClean="0">
+                <a:ln>
+                  <a:noFill/>
+                </a:ln>
+                <a:solidFill>
+                  <a:schemeClr val="tx1"/>
+                </a:solidFill>
+                <a:effectLst/>
+                <a:latin typeface="Arial" pitchFamily="34" charset="0"/>
+              </a:rPr>
+              <a:t>from</a:t>
+            </a:r>
+            <a:r>
+              <a:rPr kumimoji="0" lang="de-AT" sz="900" b="0" i="1" u="none" strike="noStrike" cap="none" normalizeH="0" dirty="0" smtClean="0">
+                <a:ln>
+                  <a:noFill/>
+                </a:ln>
+                <a:solidFill>
+                  <a:schemeClr val="tx1"/>
+                </a:solidFill>
+                <a:effectLst/>
+                <a:latin typeface="Arial" pitchFamily="34" charset="0"/>
+              </a:rPr>
+              <a:t> CO2-parent </a:t>
+            </a:r>
+            <a:r>
+              <a:rPr kumimoji="0" lang="de-AT" sz="900" b="0" i="1" u="none" strike="noStrike" cap="none" normalizeH="0" dirty="0" err="1" smtClean="0">
+                <a:ln>
+                  <a:noFill/>
+                </a:ln>
+                <a:solidFill>
+                  <a:schemeClr val="tx1"/>
+                </a:solidFill>
+                <a:effectLst/>
+                <a:latin typeface="Arial" pitchFamily="34" charset="0"/>
+              </a:rPr>
+              <a:t>full-load</a:t>
+            </a:r>
+            <a:r>
+              <a:rPr kumimoji="0" lang="de-AT" sz="900" b="0" i="1" u="none" strike="noStrike" cap="none" normalizeH="0" dirty="0" smtClean="0">
+                <a:ln>
+                  <a:noFill/>
+                </a:ln>
+                <a:solidFill>
+                  <a:schemeClr val="tx1"/>
+                </a:solidFill>
+                <a:effectLst/>
+                <a:latin typeface="Arial" pitchFamily="34" charset="0"/>
+              </a:rPr>
+              <a:t> </a:t>
+            </a:r>
+            <a:r>
+              <a:rPr kumimoji="0" lang="de-AT" sz="900" b="0" i="1" u="none" strike="noStrike" cap="none" normalizeH="0" dirty="0" err="1" smtClean="0">
+                <a:ln>
+                  <a:noFill/>
+                </a:ln>
+                <a:solidFill>
+                  <a:schemeClr val="tx1"/>
+                </a:solidFill>
+                <a:effectLst/>
+                <a:latin typeface="Arial" pitchFamily="34" charset="0"/>
+              </a:rPr>
+              <a:t>curve</a:t>
+            </a:r>
+            <a:r>
+              <a:rPr kumimoji="0" lang="de-AT" sz="900" b="0" i="1" u="none" strike="noStrike" cap="none" normalizeH="0" dirty="0" smtClean="0">
+                <a:ln>
+                  <a:noFill/>
+                </a:ln>
+                <a:solidFill>
+                  <a:schemeClr val="tx1"/>
+                </a:solidFill>
+                <a:effectLst/>
+                <a:latin typeface="Arial" pitchFamily="34" charset="0"/>
+              </a:rPr>
+              <a:t>)</a:t>
+            </a:r>
+            <a:endParaRPr kumimoji="0" lang="en-US" sz="900" b="0" i="1" u="none" strike="noStrike" cap="none" normalizeH="0" baseline="0" dirty="0" smtClean="0">
+              <a:ln>
+                <a:noFill/>
+              </a:ln>
+              <a:solidFill>
+                <a:schemeClr val="tx1"/>
+              </a:solidFill>
+              <a:effectLst/>
+              <a:latin typeface="Arial" pitchFamily="34" charset="0"/>
+            </a:endParaRPr>
+          </a:p>
+        </p:txBody>
+      </p:sp>
+      <p:sp>
+        <p:nvSpPr>
+          <p:cNvPr id="28" name="Rechteck 27"/>
+          <p:cNvSpPr/>
+          <p:nvPr/>
+        </p:nvSpPr>
+        <p:spPr bwMode="auto">
+          <a:xfrm>
+            <a:off x="255788" y="5157320"/>
+            <a:ext cx="5316466" cy="180000"/>
+          </a:xfrm>
+          <a:prstGeom prst="rect">
+            <a:avLst/>
+          </a:prstGeom>
+          <a:solidFill>
+            <a:srgbClr val="7030A0">
+              <a:alpha val="15000"/>
+            </a:srgbClr>
+          </a:solidFill>
+          <a:ln w="25400" cap="flat" cmpd="sng" algn="ctr">
+            <a:solidFill>
+              <a:srgbClr val="7030A0"/>
+            </a:solidFill>
+            <a:prstDash val="solid"/>
+            <a:round/>
+            <a:headEnd type="none" w="med" len="med"/>
+            <a:tailEnd type="triangle" w="med" len="med"/>
+          </a:ln>
+          <a:effectLst/>
+          <a:extLst/>
+        </p:spPr>
+        <p:txBody>
+          <a:bodyPr vert="horz" wrap="square" lIns="91440" tIns="45720" rIns="91440" bIns="45720" numCol="1" rtlCol="0" anchor="ctr" anchorCtr="0" compatLnSpc="1">
+            <a:prstTxWarp prst="textNoShape">
+              <a:avLst/>
+            </a:prstTxWarp>
+            <a:spAutoFit/>
+          </a:bodyPr>
+          <a:lstStyle/>
+          <a:p>
+            <a:pPr marL="0" marR="0" indent="0" algn="ctr" defTabSz="914400" rtl="0" eaLnBrk="1" fontAlgn="base" latinLnBrk="0" hangingPunct="1">
+              <a:lnSpc>
+                <a:spcPct val="100000"/>
+              </a:lnSpc>
+              <a:spcBef>
+                <a:spcPct val="30000"/>
+              </a:spcBef>
+              <a:spcAft>
+                <a:spcPct val="0"/>
+              </a:spcAft>
+              <a:buClrTx/>
+              <a:buSzTx/>
+              <a:buFontTx/>
+              <a:buNone/>
+              <a:tabLst/>
+            </a:pPr>
+            <a:endParaRPr kumimoji="0" lang="en-US" sz="2000" b="1" i="0" u="none" strike="noStrike" cap="none" normalizeH="0" baseline="0" smtClean="0">
+              <a:ln>
+                <a:noFill/>
+              </a:ln>
+              <a:solidFill>
+                <a:schemeClr val="tx1"/>
+              </a:solidFill>
+              <a:effectLst/>
+              <a:latin typeface="Arial" pitchFamily="34" charset="0"/>
+            </a:endParaRPr>
+          </a:p>
+        </p:txBody>
+      </p:sp>
+      <p:sp>
+        <p:nvSpPr>
+          <p:cNvPr id="44" name="Rechteck 43"/>
+          <p:cNvSpPr/>
+          <p:nvPr/>
+        </p:nvSpPr>
+        <p:spPr bwMode="auto">
+          <a:xfrm>
+            <a:off x="255788" y="2924944"/>
+            <a:ext cx="5316466" cy="648000"/>
+          </a:xfrm>
+          <a:prstGeom prst="rect">
+            <a:avLst/>
+          </a:prstGeom>
+          <a:solidFill>
+            <a:srgbClr val="FF0000">
+              <a:alpha val="15000"/>
+            </a:srgbClr>
+          </a:solidFill>
+          <a:ln w="25400" cap="flat" cmpd="sng" algn="ctr">
+            <a:solidFill>
+              <a:srgbClr val="FF0000"/>
+            </a:solidFill>
+            <a:prstDash val="solid"/>
+            <a:round/>
+            <a:headEnd type="none" w="med" len="med"/>
+            <a:tailEnd type="triangle" w="med" len="med"/>
+          </a:ln>
+          <a:effectLst/>
+          <a:extLst/>
+        </p:spPr>
+        <p:txBody>
+          <a:bodyPr vert="horz" wrap="square" lIns="91440" tIns="45720" rIns="91440" bIns="45720" numCol="1" rtlCol="0" anchor="ctr" anchorCtr="0" compatLnSpc="1">
+            <a:prstTxWarp prst="textNoShape">
+              <a:avLst/>
+            </a:prstTxWarp>
+            <a:spAutoFit/>
+          </a:bodyPr>
+          <a:lstStyle/>
+          <a:p>
+            <a:pPr marL="0" marR="0" indent="0" algn="ctr" defTabSz="914400" rtl="0" eaLnBrk="1" fontAlgn="base" latinLnBrk="0" hangingPunct="1">
+              <a:lnSpc>
+                <a:spcPct val="100000"/>
+              </a:lnSpc>
+              <a:spcBef>
+                <a:spcPct val="30000"/>
+              </a:spcBef>
+              <a:spcAft>
+                <a:spcPct val="0"/>
+              </a:spcAft>
+              <a:buClrTx/>
+              <a:buSzTx/>
+              <a:buFontTx/>
+              <a:buNone/>
+              <a:tabLst/>
+            </a:pPr>
+            <a:endParaRPr kumimoji="0" lang="en-US" sz="2000" b="1" i="0" u="none" strike="noStrike" cap="none" normalizeH="0" baseline="0" smtClean="0">
+              <a:ln>
+                <a:noFill/>
+              </a:ln>
+              <a:solidFill>
+                <a:schemeClr val="tx1"/>
+              </a:solidFill>
+              <a:effectLst/>
+              <a:latin typeface="Arial" pitchFamily="34" charset="0"/>
+            </a:endParaRPr>
+          </a:p>
+        </p:txBody>
+      </p:sp>
+      <p:sp>
+        <p:nvSpPr>
+          <p:cNvPr id="45" name="Rechteck 44"/>
+          <p:cNvSpPr/>
+          <p:nvPr/>
+        </p:nvSpPr>
+        <p:spPr bwMode="auto">
+          <a:xfrm>
+            <a:off x="255788" y="3717032"/>
+            <a:ext cx="5316466" cy="1080000"/>
+          </a:xfrm>
+          <a:prstGeom prst="rect">
+            <a:avLst/>
+          </a:prstGeom>
+          <a:solidFill>
+            <a:srgbClr val="FF0000">
+              <a:alpha val="15000"/>
+            </a:srgbClr>
+          </a:solidFill>
+          <a:ln w="25400" cap="flat" cmpd="sng" algn="ctr">
+            <a:solidFill>
+              <a:srgbClr val="FF0000"/>
+            </a:solidFill>
+            <a:prstDash val="solid"/>
+            <a:round/>
+            <a:headEnd type="none" w="med" len="med"/>
+            <a:tailEnd type="triangle" w="med" len="med"/>
+          </a:ln>
+          <a:effectLst/>
+          <a:extLst/>
+        </p:spPr>
+        <p:txBody>
+          <a:bodyPr vert="horz" wrap="square" lIns="91440" tIns="45720" rIns="91440" bIns="45720" numCol="1" rtlCol="0" anchor="ctr" anchorCtr="0" compatLnSpc="1">
+            <a:prstTxWarp prst="textNoShape">
+              <a:avLst/>
+            </a:prstTxWarp>
+            <a:spAutoFit/>
+          </a:bodyPr>
+          <a:lstStyle/>
+          <a:p>
+            <a:pPr marL="0" marR="0" indent="0" algn="ctr" defTabSz="914400" rtl="0" eaLnBrk="1" fontAlgn="base" latinLnBrk="0" hangingPunct="1">
+              <a:lnSpc>
+                <a:spcPct val="100000"/>
+              </a:lnSpc>
+              <a:spcBef>
+                <a:spcPct val="30000"/>
+              </a:spcBef>
+              <a:spcAft>
+                <a:spcPct val="0"/>
+              </a:spcAft>
+              <a:buClrTx/>
+              <a:buSzTx/>
+              <a:buFontTx/>
+              <a:buNone/>
+              <a:tabLst/>
+            </a:pPr>
+            <a:endParaRPr kumimoji="0" lang="en-US" sz="2000" b="1" i="0" u="none" strike="noStrike" cap="none" normalizeH="0" baseline="0" smtClean="0">
+              <a:ln>
+                <a:noFill/>
+              </a:ln>
+              <a:solidFill>
+                <a:schemeClr val="tx1"/>
+              </a:solidFill>
+              <a:effectLst/>
+              <a:latin typeface="Arial" pitchFamily="34" charset="0"/>
+            </a:endParaRPr>
+          </a:p>
+        </p:txBody>
+      </p:sp>
+      <p:sp>
+        <p:nvSpPr>
+          <p:cNvPr id="46" name="Legende mit Linie 1 (Markierungsleiste) 19"/>
+          <p:cNvSpPr/>
+          <p:nvPr/>
+        </p:nvSpPr>
+        <p:spPr bwMode="auto">
+          <a:xfrm>
+            <a:off x="6660232" y="2608267"/>
+            <a:ext cx="2483768" cy="2103653"/>
+          </a:xfrm>
+          <a:prstGeom prst="accentCallout1">
+            <a:avLst>
+              <a:gd name="adj1" fmla="val 56216"/>
+              <a:gd name="adj2" fmla="val -2353"/>
+              <a:gd name="adj3" fmla="val 75066"/>
+              <a:gd name="adj4" fmla="val -42214"/>
+            </a:avLst>
+          </a:prstGeom>
+          <a:noFill/>
+          <a:ln w="19050" cap="flat" cmpd="sng" algn="ctr">
+            <a:solidFill>
+              <a:schemeClr val="tx1"/>
+            </a:solidFill>
+            <a:prstDash val="solid"/>
+            <a:round/>
+            <a:headEnd type="none" w="med" len="med"/>
+            <a:tailEnd type="triangle" w="med" len="med"/>
+          </a:ln>
+          <a:effectLst/>
+          <a:extLst/>
+        </p:spPr>
+        <p:txBody>
+          <a:bodyPr vert="horz" wrap="square" lIns="91440" tIns="45720" rIns="91440" bIns="45720" numCol="1" rtlCol="0" anchor="ctr" anchorCtr="0" compatLnSpc="1">
+            <a:prstTxWarp prst="textNoShape">
+              <a:avLst/>
+            </a:prstTxWarp>
+            <a:spAutoFit/>
+          </a:bodyPr>
+          <a:lstStyle/>
+          <a:p>
+            <a:pPr marL="0" marR="0" indent="0" algn="ctr" defTabSz="914400" rtl="0" eaLnBrk="1" fontAlgn="base" latinLnBrk="0" hangingPunct="1">
+              <a:lnSpc>
+                <a:spcPct val="100000"/>
+              </a:lnSpc>
+              <a:spcBef>
+                <a:spcPct val="30000"/>
+              </a:spcBef>
+              <a:spcAft>
+                <a:spcPct val="0"/>
+              </a:spcAft>
+              <a:buClrTx/>
+              <a:buSzTx/>
+              <a:buFontTx/>
+              <a:buNone/>
+              <a:tabLst/>
+            </a:pPr>
+            <a:r>
+              <a:rPr kumimoji="0" lang="de-AT" sz="1100" i="0" u="sng" strike="noStrike" cap="none" normalizeH="0" baseline="0" dirty="0" err="1" smtClean="0">
+                <a:ln>
+                  <a:noFill/>
+                </a:ln>
+                <a:solidFill>
+                  <a:schemeClr val="tx1"/>
+                </a:solidFill>
+                <a:effectLst/>
+                <a:latin typeface="Arial" pitchFamily="34" charset="0"/>
+              </a:rPr>
+              <a:t>Step</a:t>
+            </a:r>
+            <a:r>
+              <a:rPr kumimoji="0" lang="de-AT" sz="1100" i="0" u="sng" strike="noStrike" cap="none" normalizeH="0" baseline="0" dirty="0" smtClean="0">
+                <a:ln>
+                  <a:noFill/>
+                </a:ln>
+                <a:solidFill>
+                  <a:schemeClr val="tx1"/>
+                </a:solidFill>
+                <a:effectLst/>
+                <a:latin typeface="Arial" pitchFamily="34" charset="0"/>
+              </a:rPr>
+              <a:t> 3</a:t>
+            </a:r>
+          </a:p>
+          <a:p>
+            <a:pPr marL="0" marR="0" indent="0" algn="l" defTabSz="914400" rtl="0" eaLnBrk="1" fontAlgn="base" latinLnBrk="0" hangingPunct="1">
+              <a:lnSpc>
+                <a:spcPct val="100000"/>
+              </a:lnSpc>
+              <a:spcBef>
+                <a:spcPct val="30000"/>
+              </a:spcBef>
+              <a:spcAft>
+                <a:spcPct val="0"/>
+              </a:spcAft>
+              <a:buClrTx/>
+              <a:buSzTx/>
+              <a:buFontTx/>
+              <a:buNone/>
+              <a:tabLst/>
+            </a:pPr>
+            <a:r>
+              <a:rPr lang="de-AT" sz="1100" b="0" dirty="0" smtClean="0">
+                <a:latin typeface="Arial" pitchFamily="34" charset="0"/>
+              </a:rPr>
+              <a:t>Input </a:t>
+            </a:r>
+            <a:r>
+              <a:rPr lang="de-AT" sz="1100" b="0" dirty="0" err="1" smtClean="0">
+                <a:latin typeface="Arial" pitchFamily="34" charset="0"/>
+              </a:rPr>
+              <a:t>measured</a:t>
+            </a:r>
+            <a:r>
+              <a:rPr lang="de-AT" sz="1100" b="0" dirty="0" smtClean="0">
+                <a:latin typeface="Arial" pitchFamily="34" charset="0"/>
+              </a:rPr>
+              <a:t> </a:t>
+            </a:r>
+            <a:r>
+              <a:rPr lang="de-AT" sz="1100" b="0" dirty="0" err="1" smtClean="0">
+                <a:latin typeface="Arial" pitchFamily="34" charset="0"/>
+              </a:rPr>
+              <a:t>specific</a:t>
+            </a:r>
+            <a:r>
+              <a:rPr lang="de-AT" sz="1100" b="0" dirty="0" smtClean="0">
+                <a:latin typeface="Arial" pitchFamily="34" charset="0"/>
+              </a:rPr>
+              <a:t> FC </a:t>
+            </a:r>
+            <a:r>
+              <a:rPr lang="de-AT" sz="1100" b="0" dirty="0" err="1" smtClean="0">
+                <a:latin typeface="Arial" pitchFamily="34" charset="0"/>
+              </a:rPr>
+              <a:t>values</a:t>
+            </a:r>
+            <a:r>
+              <a:rPr lang="de-AT" sz="1100" b="0" dirty="0" smtClean="0">
+                <a:latin typeface="Arial" pitchFamily="34" charset="0"/>
+              </a:rPr>
+              <a:t> </a:t>
+            </a:r>
+            <a:r>
+              <a:rPr lang="de-AT" sz="1100" b="0" dirty="0" err="1" smtClean="0">
+                <a:latin typeface="Arial" pitchFamily="34" charset="0"/>
+              </a:rPr>
+              <a:t>and</a:t>
+            </a:r>
+            <a:r>
+              <a:rPr lang="de-AT" sz="1100" b="0" dirty="0" smtClean="0">
+                <a:latin typeface="Arial" pitchFamily="34" charset="0"/>
+              </a:rPr>
+              <a:t> </a:t>
+            </a:r>
+            <a:r>
+              <a:rPr lang="de-AT" sz="1100" b="0" dirty="0" err="1" smtClean="0">
+                <a:latin typeface="Arial" pitchFamily="34" charset="0"/>
+              </a:rPr>
+              <a:t>correction</a:t>
+            </a:r>
+            <a:r>
+              <a:rPr lang="de-AT" sz="1100" b="0" dirty="0" smtClean="0">
+                <a:latin typeface="Arial" pitchFamily="34" charset="0"/>
+              </a:rPr>
+              <a:t> </a:t>
+            </a:r>
+            <a:r>
+              <a:rPr lang="de-AT" sz="1100" b="0" dirty="0" err="1" smtClean="0">
+                <a:latin typeface="Arial" pitchFamily="34" charset="0"/>
+              </a:rPr>
+              <a:t>factor</a:t>
+            </a:r>
+            <a:endParaRPr lang="de-AT" sz="1100" b="0" dirty="0" smtClean="0">
+              <a:latin typeface="Arial" pitchFamily="34" charset="0"/>
+            </a:endParaRPr>
+          </a:p>
+          <a:p>
+            <a:pPr marL="0" marR="0" indent="0" algn="l" defTabSz="914400" rtl="0" eaLnBrk="1" fontAlgn="base" latinLnBrk="0" hangingPunct="1">
+              <a:lnSpc>
+                <a:spcPct val="100000"/>
+              </a:lnSpc>
+              <a:spcBef>
+                <a:spcPct val="30000"/>
+              </a:spcBef>
+              <a:spcAft>
+                <a:spcPct val="0"/>
+              </a:spcAft>
+              <a:buClrTx/>
+              <a:buSzTx/>
+              <a:buFontTx/>
+              <a:buNone/>
+              <a:tabLst>
+                <a:tab pos="182563" algn="l"/>
+              </a:tabLst>
+            </a:pPr>
+            <a:r>
+              <a:rPr lang="de-AT" sz="900" b="0" dirty="0" smtClean="0">
+                <a:latin typeface="Arial" pitchFamily="34" charset="0"/>
+                <a:sym typeface="Wingdings" panose="05000000000000000000" pitchFamily="2" charset="2"/>
+              </a:rPr>
+              <a:t>	separate </a:t>
+            </a:r>
+            <a:r>
+              <a:rPr lang="de-AT" sz="900" b="0" dirty="0" err="1" smtClean="0">
+                <a:latin typeface="Arial" pitchFamily="34" charset="0"/>
+                <a:sym typeface="Wingdings" panose="05000000000000000000" pitchFamily="2" charset="2"/>
+              </a:rPr>
+              <a:t>tabs</a:t>
+            </a:r>
+            <a:r>
+              <a:rPr lang="de-AT" sz="900" b="0" dirty="0" smtClean="0">
+                <a:latin typeface="Arial" pitchFamily="34" charset="0"/>
+                <a:sym typeface="Wingdings" panose="05000000000000000000" pitchFamily="2" charset="2"/>
+              </a:rPr>
+              <a:t> </a:t>
+            </a:r>
+            <a:r>
+              <a:rPr lang="de-AT" sz="900" b="0" dirty="0" err="1" smtClean="0">
+                <a:latin typeface="Arial" pitchFamily="34" charset="0"/>
+                <a:sym typeface="Wingdings" panose="05000000000000000000" pitchFamily="2" charset="2"/>
+              </a:rPr>
+              <a:t>appear</a:t>
+            </a:r>
+            <a:r>
+              <a:rPr lang="de-AT" sz="900" b="0" dirty="0" smtClean="0">
+                <a:latin typeface="Arial" pitchFamily="34" charset="0"/>
+                <a:sym typeface="Wingdings" panose="05000000000000000000" pitchFamily="2" charset="2"/>
+              </a:rPr>
+              <a:t> </a:t>
+            </a:r>
+            <a:r>
+              <a:rPr lang="de-AT" sz="900" b="0" dirty="0" err="1" smtClean="0">
+                <a:latin typeface="Arial" pitchFamily="34" charset="0"/>
+                <a:sym typeface="Wingdings" panose="05000000000000000000" pitchFamily="2" charset="2"/>
+              </a:rPr>
+              <a:t>depending</a:t>
+            </a:r>
+            <a:r>
+              <a:rPr lang="de-AT" sz="900" b="0" dirty="0">
+                <a:latin typeface="Arial" pitchFamily="34" charset="0"/>
+                <a:sym typeface="Wingdings" panose="05000000000000000000" pitchFamily="2" charset="2"/>
+              </a:rPr>
+              <a:t> </a:t>
+            </a:r>
+            <a:r>
+              <a:rPr lang="de-AT" sz="900" b="0" dirty="0" smtClean="0">
+                <a:latin typeface="Arial" pitchFamily="34" charset="0"/>
+                <a:sym typeface="Wingdings" panose="05000000000000000000" pitchFamily="2" charset="2"/>
+              </a:rPr>
+              <a:t>on</a:t>
+            </a:r>
+            <a:br>
+              <a:rPr lang="de-AT" sz="900" b="0" dirty="0" smtClean="0">
+                <a:latin typeface="Arial" pitchFamily="34" charset="0"/>
+                <a:sym typeface="Wingdings" panose="05000000000000000000" pitchFamily="2" charset="2"/>
+              </a:rPr>
+            </a:br>
+            <a:r>
+              <a:rPr lang="de-AT" sz="900" b="0" dirty="0" smtClean="0">
+                <a:latin typeface="Arial" pitchFamily="34" charset="0"/>
+                <a:sym typeface="Wingdings" panose="05000000000000000000" pitchFamily="2" charset="2"/>
+              </a:rPr>
+              <a:t>	</a:t>
+            </a:r>
+            <a:r>
+              <a:rPr lang="de-AT" sz="900" b="0" dirty="0" err="1" smtClean="0">
+                <a:latin typeface="Arial" pitchFamily="34" charset="0"/>
+                <a:sym typeface="Wingdings" panose="05000000000000000000" pitchFamily="2" charset="2"/>
+              </a:rPr>
+              <a:t>setting</a:t>
+            </a:r>
+            <a:r>
+              <a:rPr lang="de-AT" sz="900" b="0" dirty="0" smtClean="0">
+                <a:latin typeface="Arial" pitchFamily="34" charset="0"/>
+                <a:sym typeface="Wingdings" panose="05000000000000000000" pitchFamily="2" charset="2"/>
+              </a:rPr>
+              <a:t> </a:t>
+            </a:r>
+            <a:r>
+              <a:rPr lang="de-AT" sz="900" b="0" dirty="0" err="1" smtClean="0">
+                <a:latin typeface="Arial" pitchFamily="34" charset="0"/>
+                <a:sym typeface="Wingdings" panose="05000000000000000000" pitchFamily="2" charset="2"/>
+              </a:rPr>
+              <a:t>of</a:t>
+            </a:r>
+            <a:r>
+              <a:rPr lang="de-AT" sz="900" b="0" dirty="0" smtClean="0">
+                <a:latin typeface="Arial" pitchFamily="34" charset="0"/>
+                <a:sym typeface="Wingdings" panose="05000000000000000000" pitchFamily="2" charset="2"/>
+              </a:rPr>
+              <a:t> </a:t>
+            </a:r>
+            <a:r>
+              <a:rPr lang="de-AT" sz="900" b="0" dirty="0" err="1" smtClean="0">
+                <a:latin typeface="Arial" pitchFamily="34" charset="0"/>
+                <a:sym typeface="Wingdings" panose="05000000000000000000" pitchFamily="2" charset="2"/>
+              </a:rPr>
+              <a:t>technology</a:t>
+            </a:r>
+            <a:r>
+              <a:rPr lang="de-AT" sz="900" b="0" dirty="0" smtClean="0">
+                <a:latin typeface="Arial" pitchFamily="34" charset="0"/>
+                <a:sym typeface="Wingdings" panose="05000000000000000000" pitchFamily="2" charset="2"/>
+              </a:rPr>
+              <a:t> </a:t>
+            </a:r>
+            <a:r>
+              <a:rPr lang="de-AT" sz="900" b="0" dirty="0" err="1" smtClean="0">
+                <a:latin typeface="Arial" pitchFamily="34" charset="0"/>
+                <a:sym typeface="Wingdings" panose="05000000000000000000" pitchFamily="2" charset="2"/>
+              </a:rPr>
+              <a:t>checkboxes</a:t>
+            </a:r>
+            <a:r>
+              <a:rPr lang="de-AT" sz="900" b="0" dirty="0" smtClean="0">
+                <a:latin typeface="Arial" pitchFamily="34" charset="0"/>
+                <a:sym typeface="Wingdings" panose="05000000000000000000" pitchFamily="2" charset="2"/>
+              </a:rPr>
+              <a:t> </a:t>
+            </a:r>
+            <a:r>
+              <a:rPr lang="de-AT" sz="900" b="0" dirty="0" err="1" smtClean="0">
+                <a:latin typeface="Arial" pitchFamily="34" charset="0"/>
+                <a:sym typeface="Wingdings" panose="05000000000000000000" pitchFamily="2" charset="2"/>
+              </a:rPr>
+              <a:t>under</a:t>
+            </a:r>
+            <a:r>
+              <a:rPr lang="de-AT" sz="900" b="0" dirty="0">
+                <a:latin typeface="Arial" pitchFamily="34" charset="0"/>
+                <a:sym typeface="Wingdings" panose="05000000000000000000" pitchFamily="2" charset="2"/>
+              </a:rPr>
+              <a:t/>
+            </a:r>
+            <a:br>
+              <a:rPr lang="de-AT" sz="900" b="0" dirty="0">
+                <a:latin typeface="Arial" pitchFamily="34" charset="0"/>
+                <a:sym typeface="Wingdings" panose="05000000000000000000" pitchFamily="2" charset="2"/>
+              </a:rPr>
+            </a:br>
+            <a:r>
+              <a:rPr lang="de-AT" sz="900" b="0" dirty="0" smtClean="0">
+                <a:latin typeface="Arial" pitchFamily="34" charset="0"/>
+                <a:sym typeface="Wingdings" panose="05000000000000000000" pitchFamily="2" charset="2"/>
+              </a:rPr>
+              <a:t>	„</a:t>
+            </a:r>
+            <a:r>
+              <a:rPr lang="de-AT" sz="900" b="0" dirty="0" err="1" smtClean="0">
+                <a:latin typeface="Arial" pitchFamily="34" charset="0"/>
+                <a:sym typeface="Wingdings" panose="05000000000000000000" pitchFamily="2" charset="2"/>
+              </a:rPr>
+              <a:t>engine</a:t>
+            </a:r>
+            <a:r>
+              <a:rPr lang="de-AT" sz="900" b="0" dirty="0" smtClean="0">
+                <a:latin typeface="Arial" pitchFamily="34" charset="0"/>
+                <a:sym typeface="Wingdings" panose="05000000000000000000" pitchFamily="2" charset="2"/>
+              </a:rPr>
+              <a:t> </a:t>
+            </a:r>
+            <a:r>
+              <a:rPr lang="de-AT" sz="900" b="0" dirty="0" err="1" smtClean="0">
+                <a:latin typeface="Arial" pitchFamily="34" charset="0"/>
+                <a:sym typeface="Wingdings" panose="05000000000000000000" pitchFamily="2" charset="2"/>
+              </a:rPr>
+              <a:t>component</a:t>
+            </a:r>
+            <a:r>
+              <a:rPr lang="de-AT" sz="900" b="0" dirty="0" smtClean="0">
+                <a:latin typeface="Arial" pitchFamily="34" charset="0"/>
+                <a:sym typeface="Wingdings" panose="05000000000000000000" pitchFamily="2" charset="2"/>
+              </a:rPr>
+              <a:t> </a:t>
+            </a:r>
+            <a:r>
+              <a:rPr lang="de-AT" sz="900" b="0" dirty="0" err="1" smtClean="0">
+                <a:latin typeface="Arial" pitchFamily="34" charset="0"/>
+                <a:sym typeface="Wingdings" panose="05000000000000000000" pitchFamily="2" charset="2"/>
+              </a:rPr>
+              <a:t>data</a:t>
+            </a:r>
+            <a:r>
+              <a:rPr lang="de-AT" sz="900" b="0" dirty="0" smtClean="0">
+                <a:latin typeface="Arial" pitchFamily="34" charset="0"/>
+                <a:sym typeface="Wingdings" panose="05000000000000000000" pitchFamily="2" charset="2"/>
+              </a:rPr>
+              <a:t>“</a:t>
+            </a:r>
+            <a:endParaRPr lang="de-AT" sz="900" b="0" dirty="0" smtClean="0">
+              <a:latin typeface="Arial" pitchFamily="34" charset="0"/>
+            </a:endParaRPr>
+          </a:p>
+          <a:p>
+            <a:pPr marL="0" marR="0" indent="0" algn="l" defTabSz="914400" rtl="0" eaLnBrk="1" fontAlgn="base" latinLnBrk="0" hangingPunct="1">
+              <a:lnSpc>
+                <a:spcPct val="100000"/>
+              </a:lnSpc>
+              <a:spcBef>
+                <a:spcPct val="30000"/>
+              </a:spcBef>
+              <a:spcAft>
+                <a:spcPct val="0"/>
+              </a:spcAft>
+              <a:buClrTx/>
+              <a:buSzTx/>
+              <a:buFontTx/>
+              <a:buNone/>
+              <a:tabLst/>
+            </a:pPr>
+            <a:r>
+              <a:rPr kumimoji="0" lang="de-AT" sz="1100" b="0" i="1" u="sng" strike="noStrike" cap="none" normalizeH="0" baseline="0" dirty="0" smtClean="0">
+                <a:ln>
+                  <a:noFill/>
+                </a:ln>
+                <a:solidFill>
+                  <a:schemeClr val="tx1"/>
+                </a:solidFill>
+                <a:effectLst/>
+                <a:latin typeface="Arial" pitchFamily="34" charset="0"/>
+              </a:rPr>
+              <a:t>OPTIONAL INPUTS:</a:t>
+            </a:r>
+          </a:p>
+          <a:p>
+            <a:pPr marL="171450" marR="0" indent="-171450" algn="l" defTabSz="914400" rtl="0" eaLnBrk="1" fontAlgn="base" latinLnBrk="0" hangingPunct="1">
+              <a:lnSpc>
+                <a:spcPct val="100000"/>
+              </a:lnSpc>
+              <a:spcBef>
+                <a:spcPct val="30000"/>
+              </a:spcBef>
+              <a:spcAft>
+                <a:spcPct val="0"/>
+              </a:spcAft>
+              <a:buClrTx/>
+              <a:buSzTx/>
+              <a:buFont typeface="Wingdings" panose="05000000000000000000" pitchFamily="2" charset="2"/>
+              <a:buChar char="§"/>
+              <a:tabLst/>
+            </a:pPr>
+            <a:r>
+              <a:rPr lang="de-AT" sz="900" b="0" i="1" dirty="0" err="1" smtClean="0">
+                <a:latin typeface="Arial" pitchFamily="34" charset="0"/>
+              </a:rPr>
+              <a:t>Measured</a:t>
+            </a:r>
+            <a:r>
+              <a:rPr lang="de-AT" sz="900" b="0" i="1" dirty="0" smtClean="0">
+                <a:latin typeface="Arial" pitchFamily="34" charset="0"/>
+              </a:rPr>
+              <a:t> </a:t>
+            </a:r>
+            <a:r>
+              <a:rPr lang="de-AT" sz="900" b="0" i="1" dirty="0" err="1" smtClean="0">
+                <a:latin typeface="Arial" pitchFamily="34" charset="0"/>
+              </a:rPr>
+              <a:t>specific</a:t>
+            </a:r>
+            <a:r>
+              <a:rPr lang="de-AT" sz="900" b="0" i="1" dirty="0" smtClean="0">
+                <a:latin typeface="Arial" pitchFamily="34" charset="0"/>
+              </a:rPr>
+              <a:t> WHR </a:t>
+            </a:r>
+            <a:r>
+              <a:rPr lang="de-AT" sz="900" b="0" i="1" dirty="0" err="1" smtClean="0">
+                <a:latin typeface="Arial" pitchFamily="34" charset="0"/>
+              </a:rPr>
+              <a:t>work</a:t>
+            </a:r>
+            <a:r>
+              <a:rPr lang="de-AT" sz="900" b="0" i="1" dirty="0">
+                <a:latin typeface="Arial" pitchFamily="34" charset="0"/>
+              </a:rPr>
+              <a:t/>
+            </a:r>
+            <a:br>
+              <a:rPr lang="de-AT" sz="900" b="0" i="1" dirty="0">
+                <a:latin typeface="Arial" pitchFamily="34" charset="0"/>
+              </a:rPr>
+            </a:br>
+            <a:r>
+              <a:rPr lang="de-AT" sz="900" b="0" i="1" dirty="0">
+                <a:latin typeface="Arial" pitchFamily="34" charset="0"/>
+              </a:rPr>
+              <a:t>(</a:t>
+            </a:r>
+            <a:r>
+              <a:rPr lang="de-AT" sz="900" b="0" i="1" dirty="0" err="1">
+                <a:latin typeface="Arial" pitchFamily="34" charset="0"/>
+              </a:rPr>
+              <a:t>for</a:t>
+            </a:r>
+            <a:r>
+              <a:rPr lang="de-AT" sz="900" b="0" i="1" dirty="0">
+                <a:latin typeface="Arial" pitchFamily="34" charset="0"/>
+              </a:rPr>
+              <a:t> </a:t>
+            </a:r>
+            <a:r>
+              <a:rPr lang="de-AT" sz="900" b="0" i="1" dirty="0" err="1">
+                <a:latin typeface="Arial" pitchFamily="34" charset="0"/>
+              </a:rPr>
+              <a:t>engines</a:t>
+            </a:r>
+            <a:r>
+              <a:rPr lang="de-AT" sz="900" b="0" i="1" dirty="0">
+                <a:latin typeface="Arial" pitchFamily="34" charset="0"/>
+              </a:rPr>
+              <a:t> </a:t>
+            </a:r>
+            <a:r>
+              <a:rPr lang="de-AT" sz="900" b="0" i="1" dirty="0" err="1">
+                <a:latin typeface="Arial" pitchFamily="34" charset="0"/>
+              </a:rPr>
+              <a:t>with</a:t>
+            </a:r>
+            <a:r>
+              <a:rPr lang="de-AT" sz="900" b="0" i="1" dirty="0">
+                <a:latin typeface="Arial" pitchFamily="34" charset="0"/>
+              </a:rPr>
+              <a:t> WHR </a:t>
+            </a:r>
+            <a:r>
+              <a:rPr lang="de-AT" sz="900" b="0" i="1" dirty="0" err="1">
+                <a:latin typeface="Arial" pitchFamily="34" charset="0"/>
+              </a:rPr>
+              <a:t>systems</a:t>
+            </a:r>
+            <a:r>
+              <a:rPr lang="de-AT" sz="900" b="0" i="1" dirty="0" smtClean="0">
+                <a:latin typeface="Arial" pitchFamily="34" charset="0"/>
+              </a:rPr>
+              <a:t>)</a:t>
+            </a:r>
+          </a:p>
+          <a:p>
+            <a:pPr marL="171450" indent="-171450" algn="l">
+              <a:spcBef>
+                <a:spcPct val="30000"/>
+              </a:spcBef>
               <a:buFont typeface="Wingdings" panose="05000000000000000000" pitchFamily="2" charset="2"/>
               <a:buChar char="§"/>
             </a:pPr>
             <a:r>
-              <a:rPr lang="en-US" sz="1600" dirty="0">
-                <a:latin typeface="Helvetica" panose="020B0604020202020204" pitchFamily="34" charset="0"/>
-                <a:cs typeface="Helvetica" panose="020B0604020202020204" pitchFamily="34" charset="0"/>
-              </a:rPr>
-              <a:t>Written in </a:t>
-            </a:r>
-            <a:r>
-              <a:rPr lang="en-US" sz="1600" dirty="0" smtClean="0">
-                <a:latin typeface="Helvetica" panose="020B0604020202020204" pitchFamily="34" charset="0"/>
-                <a:cs typeface="Helvetica" panose="020B0604020202020204" pitchFamily="34" charset="0"/>
-              </a:rPr>
-              <a:t>VB.net</a:t>
+              <a:rPr lang="de-AT" sz="900" b="0" dirty="0" err="1" smtClean="0">
+                <a:latin typeface="Arial" pitchFamily="34" charset="0"/>
+              </a:rPr>
+              <a:t>Measured</a:t>
+            </a:r>
+            <a:r>
+              <a:rPr lang="de-AT" sz="900" b="0" dirty="0" smtClean="0">
+                <a:latin typeface="Arial" pitchFamily="34" charset="0"/>
+              </a:rPr>
+              <a:t> </a:t>
+            </a:r>
+            <a:r>
+              <a:rPr lang="de-AT" sz="900" b="0" dirty="0" err="1">
+                <a:latin typeface="Arial" pitchFamily="34" charset="0"/>
+              </a:rPr>
+              <a:t>specific</a:t>
+            </a:r>
+            <a:r>
+              <a:rPr lang="de-AT" sz="900" b="0" dirty="0">
+                <a:latin typeface="Arial" pitchFamily="34" charset="0"/>
+              </a:rPr>
+              <a:t> FC </a:t>
+            </a:r>
+            <a:r>
+              <a:rPr lang="de-AT" sz="900" b="0" dirty="0" err="1">
+                <a:latin typeface="Arial" pitchFamily="34" charset="0"/>
+              </a:rPr>
+              <a:t>values</a:t>
+            </a:r>
+            <a:r>
+              <a:rPr lang="de-AT" sz="900" b="0" dirty="0">
+                <a:latin typeface="Arial" pitchFamily="34" charset="0"/>
+              </a:rPr>
+              <a:t> </a:t>
+            </a:r>
+            <a:r>
+              <a:rPr lang="de-AT" sz="900" b="0" dirty="0" err="1">
+                <a:latin typeface="Arial" pitchFamily="34" charset="0"/>
+              </a:rPr>
+              <a:t>and</a:t>
+            </a:r>
+            <a:r>
+              <a:rPr lang="de-AT" sz="900" b="0" dirty="0">
+                <a:latin typeface="Arial" pitchFamily="34" charset="0"/>
+              </a:rPr>
+              <a:t> </a:t>
+            </a:r>
+            <a:r>
+              <a:rPr lang="de-AT" sz="900" b="0" dirty="0" err="1">
+                <a:latin typeface="Arial" pitchFamily="34" charset="0"/>
+              </a:rPr>
+              <a:t>correction</a:t>
+            </a:r>
+            <a:r>
+              <a:rPr lang="de-AT" sz="900" b="0" dirty="0">
+                <a:latin typeface="Arial" pitchFamily="34" charset="0"/>
+              </a:rPr>
+              <a:t> </a:t>
+            </a:r>
+            <a:r>
+              <a:rPr lang="de-AT" sz="900" b="0" dirty="0" err="1" smtClean="0">
+                <a:latin typeface="Arial" pitchFamily="34" charset="0"/>
+              </a:rPr>
+              <a:t>factor</a:t>
+            </a:r>
+            <a:r>
+              <a:rPr lang="de-AT" sz="900" b="0" dirty="0" smtClean="0">
+                <a:latin typeface="Arial" pitchFamily="34" charset="0"/>
+              </a:rPr>
+              <a:t> </a:t>
+            </a:r>
+            <a:r>
+              <a:rPr lang="de-AT" sz="900" b="0" dirty="0" err="1" smtClean="0">
+                <a:latin typeface="Arial" pitchFamily="34" charset="0"/>
+              </a:rPr>
+              <a:t>for</a:t>
+            </a:r>
+            <a:r>
+              <a:rPr lang="de-AT" sz="900" b="0" dirty="0" smtClean="0">
+                <a:latin typeface="Arial" pitchFamily="34" charset="0"/>
+              </a:rPr>
+              <a:t> </a:t>
+            </a:r>
+            <a:r>
+              <a:rPr lang="de-AT" sz="900" b="0" dirty="0" err="1" smtClean="0">
+                <a:latin typeface="Arial" pitchFamily="34" charset="0"/>
+              </a:rPr>
+              <a:t>secondary</a:t>
+            </a:r>
+            <a:r>
+              <a:rPr lang="de-AT" sz="900" b="0" dirty="0" smtClean="0">
+                <a:latin typeface="Arial" pitchFamily="34" charset="0"/>
+              </a:rPr>
+              <a:t> </a:t>
+            </a:r>
+            <a:r>
+              <a:rPr lang="de-AT" sz="900" b="0" dirty="0" err="1" smtClean="0">
+                <a:latin typeface="Arial" pitchFamily="34" charset="0"/>
+              </a:rPr>
+              <a:t>fuel</a:t>
+            </a:r>
+            <a:r>
+              <a:rPr lang="de-AT" sz="900" b="0" dirty="0" smtClean="0">
+                <a:latin typeface="Arial" pitchFamily="34" charset="0"/>
+              </a:rPr>
+              <a:t/>
             </a:r>
             <a:br>
-              <a:rPr lang="en-US" sz="1600" dirty="0" smtClean="0">
-                <a:latin typeface="Helvetica" panose="020B0604020202020204" pitchFamily="34" charset="0"/>
-                <a:cs typeface="Helvetica" panose="020B0604020202020204" pitchFamily="34" charset="0"/>
+              <a:rPr lang="de-AT" sz="900" b="0" dirty="0" smtClean="0">
+                <a:latin typeface="Arial" pitchFamily="34" charset="0"/>
               </a:rPr>
             </a:br>
-            <a:endParaRPr lang="en-US" sz="1600" dirty="0">
-              <a:latin typeface="Helvetica" panose="020B0604020202020204" pitchFamily="34" charset="0"/>
-              <a:cs typeface="Helvetica" panose="020B0604020202020204" pitchFamily="34" charset="0"/>
+            <a:r>
+              <a:rPr lang="de-AT" sz="900" b="0" dirty="0" smtClean="0">
+                <a:latin typeface="Arial" pitchFamily="34" charset="0"/>
+              </a:rPr>
+              <a:t>(</a:t>
+            </a:r>
+            <a:r>
+              <a:rPr lang="de-AT" sz="900" b="0" dirty="0" err="1" smtClean="0">
+                <a:latin typeface="Arial" pitchFamily="34" charset="0"/>
+              </a:rPr>
+              <a:t>for</a:t>
+            </a:r>
+            <a:r>
+              <a:rPr lang="de-AT" sz="900" b="0" dirty="0" smtClean="0">
+                <a:latin typeface="Arial" pitchFamily="34" charset="0"/>
+              </a:rPr>
+              <a:t> dual-</a:t>
+            </a:r>
+            <a:r>
+              <a:rPr lang="de-AT" sz="900" b="0" dirty="0" err="1" smtClean="0">
+                <a:latin typeface="Arial" pitchFamily="34" charset="0"/>
+              </a:rPr>
+              <a:t>fuel</a:t>
+            </a:r>
+            <a:r>
+              <a:rPr lang="de-AT" sz="900" b="0" dirty="0" smtClean="0">
+                <a:latin typeface="Arial" pitchFamily="34" charset="0"/>
+              </a:rPr>
+              <a:t> </a:t>
+            </a:r>
+            <a:r>
+              <a:rPr lang="de-AT" sz="900" b="0" dirty="0" err="1" smtClean="0">
+                <a:latin typeface="Arial" pitchFamily="34" charset="0"/>
+              </a:rPr>
+              <a:t>engines</a:t>
+            </a:r>
+            <a:r>
+              <a:rPr lang="de-AT" sz="900" b="0" dirty="0" smtClean="0">
+                <a:latin typeface="Arial" pitchFamily="34" charset="0"/>
+              </a:rPr>
+              <a:t>)</a:t>
+            </a:r>
+            <a:endParaRPr kumimoji="0" lang="en-US" sz="900" b="0" i="1" u="none" strike="noStrike" cap="none" normalizeH="0" baseline="0" dirty="0" smtClean="0">
+              <a:ln>
+                <a:noFill/>
+              </a:ln>
+              <a:solidFill>
+                <a:schemeClr val="tx1"/>
+              </a:solidFill>
+              <a:effectLst/>
+              <a:latin typeface="Arial" pitchFamily="34" charset="0"/>
             </a:endParaRPr>
           </a:p>
-          <a:p>
-            <a:pPr>
+        </p:txBody>
+      </p:sp>
+      <p:sp>
+        <p:nvSpPr>
+          <p:cNvPr id="47" name="Legende mit Linie 1 (Markierungsleiste) 20"/>
+          <p:cNvSpPr/>
+          <p:nvPr/>
+        </p:nvSpPr>
+        <p:spPr bwMode="auto">
+          <a:xfrm>
+            <a:off x="6660232" y="1124744"/>
+            <a:ext cx="2483768" cy="481670"/>
+          </a:xfrm>
+          <a:prstGeom prst="accentCallout1">
+            <a:avLst>
+              <a:gd name="adj1" fmla="val 56216"/>
+              <a:gd name="adj2" fmla="val -2353"/>
+              <a:gd name="adj3" fmla="val 176684"/>
+              <a:gd name="adj4" fmla="val -42839"/>
+            </a:avLst>
+          </a:prstGeom>
+          <a:noFill/>
+          <a:ln w="19050" cap="flat" cmpd="sng" algn="ctr">
+            <a:solidFill>
+              <a:schemeClr val="tx1"/>
+            </a:solidFill>
+            <a:prstDash val="solid"/>
+            <a:round/>
+            <a:headEnd type="none" w="med" len="med"/>
+            <a:tailEnd type="triangle" w="med" len="med"/>
+          </a:ln>
+          <a:effectLst/>
+          <a:extLst/>
+        </p:spPr>
+        <p:txBody>
+          <a:bodyPr vert="horz" wrap="square" lIns="91440" tIns="45720" rIns="91440" bIns="45720" numCol="1" rtlCol="0" anchor="ctr" anchorCtr="0" compatLnSpc="1">
+            <a:prstTxWarp prst="textNoShape">
+              <a:avLst/>
+            </a:prstTxWarp>
+            <a:spAutoFit/>
+          </a:bodyPr>
+          <a:lstStyle/>
+          <a:p>
+            <a:pPr marL="0" marR="0" indent="0" algn="ctr" defTabSz="914400" rtl="0" eaLnBrk="1" fontAlgn="base" latinLnBrk="0" hangingPunct="1">
+              <a:lnSpc>
+                <a:spcPct val="100000"/>
+              </a:lnSpc>
               <a:spcBef>
-                <a:spcPts val="0"/>
+                <a:spcPct val="30000"/>
               </a:spcBef>
               <a:spcAft>
-                <a:spcPts val="600"/>
+                <a:spcPct val="0"/>
               </a:spcAft>
-              <a:buFont typeface="Wingdings" panose="05000000000000000000" pitchFamily="2" charset="2"/>
-              <a:buChar char="§"/>
+              <a:buClrTx/>
+              <a:buSzTx/>
+              <a:buFontTx/>
+              <a:buNone/>
+              <a:tabLst/>
             </a:pPr>
             <a:r>
-              <a:rPr lang="en-US" sz="1600" dirty="0">
-                <a:latin typeface="Helvetica" panose="020B0604020202020204" pitchFamily="34" charset="0"/>
-                <a:cs typeface="Helvetica" panose="020B0604020202020204" pitchFamily="34" charset="0"/>
-              </a:rPr>
-              <a:t>Portable application (i.e. </a:t>
-            </a:r>
-            <a:r>
-              <a:rPr lang="en-US" sz="1600" dirty="0">
-                <a:latin typeface="Helvetica" panose="020B0604020202020204" pitchFamily="34" charset="0"/>
-                <a:cs typeface="Helvetica" panose="020B0604020202020204" pitchFamily="34" charset="0"/>
-              </a:rPr>
-              <a:t>no installation required</a:t>
-            </a:r>
-            <a:r>
-              <a:rPr lang="en-US" sz="1600" dirty="0" smtClean="0">
-                <a:latin typeface="Helvetica" panose="020B0604020202020204" pitchFamily="34" charset="0"/>
-                <a:cs typeface="Helvetica" panose="020B0604020202020204" pitchFamily="34" charset="0"/>
-              </a:rPr>
-              <a:t>)</a:t>
-            </a:r>
-            <a:br>
-              <a:rPr lang="en-US" sz="1600" dirty="0" smtClean="0">
-                <a:latin typeface="Helvetica" panose="020B0604020202020204" pitchFamily="34" charset="0"/>
-                <a:cs typeface="Helvetica" panose="020B0604020202020204" pitchFamily="34" charset="0"/>
-              </a:rPr>
-            </a:br>
-            <a:endParaRPr lang="en-US" sz="1600" dirty="0">
-              <a:latin typeface="Helvetica" panose="020B0604020202020204" pitchFamily="34" charset="0"/>
-              <a:cs typeface="Helvetica" panose="020B0604020202020204" pitchFamily="34" charset="0"/>
+              <a:rPr kumimoji="0" lang="de-AT" sz="1100" i="0" u="sng" strike="noStrike" cap="none" normalizeH="0" baseline="0" dirty="0" err="1" smtClean="0">
+                <a:ln>
+                  <a:noFill/>
+                </a:ln>
+                <a:solidFill>
+                  <a:schemeClr val="tx1"/>
+                </a:solidFill>
+                <a:effectLst/>
+                <a:latin typeface="Arial" pitchFamily="34" charset="0"/>
+              </a:rPr>
+              <a:t>Step</a:t>
+            </a:r>
+            <a:r>
+              <a:rPr kumimoji="0" lang="de-AT" sz="1100" i="0" u="sng" strike="noStrike" cap="none" normalizeH="0" baseline="0" dirty="0" smtClean="0">
+                <a:ln>
+                  <a:noFill/>
+                </a:ln>
+                <a:solidFill>
+                  <a:schemeClr val="tx1"/>
+                </a:solidFill>
+                <a:effectLst/>
+                <a:latin typeface="Arial" pitchFamily="34" charset="0"/>
+              </a:rPr>
+              <a:t> </a:t>
+            </a:r>
+            <a:r>
+              <a:rPr lang="de-AT" sz="1100" u="sng" dirty="0">
+                <a:latin typeface="Arial" pitchFamily="34" charset="0"/>
+              </a:rPr>
+              <a:t>1</a:t>
+            </a:r>
+            <a:endParaRPr kumimoji="0" lang="de-AT" sz="1100" i="0" u="sng" strike="noStrike" cap="none" normalizeH="0" baseline="0" dirty="0" smtClean="0">
+              <a:ln>
+                <a:noFill/>
+              </a:ln>
+              <a:solidFill>
+                <a:schemeClr val="tx1"/>
+              </a:solidFill>
+              <a:effectLst/>
+              <a:latin typeface="Arial" pitchFamily="34" charset="0"/>
             </a:endParaRPr>
           </a:p>
           <a:p>
-            <a:pPr>
+            <a:pPr marL="0" marR="0" indent="0" algn="l" defTabSz="914400" rtl="0" eaLnBrk="1" fontAlgn="base" latinLnBrk="0" hangingPunct="1">
+              <a:lnSpc>
+                <a:spcPct val="100000"/>
+              </a:lnSpc>
               <a:spcBef>
-                <a:spcPts val="0"/>
+                <a:spcPct val="30000"/>
               </a:spcBef>
               <a:spcAft>
-                <a:spcPts val="600"/>
+                <a:spcPct val="0"/>
               </a:spcAft>
-              <a:buFont typeface="Wingdings" panose="05000000000000000000" pitchFamily="2" charset="2"/>
-              <a:buChar char="§"/>
+              <a:buClrTx/>
+              <a:buSzTx/>
+              <a:buFontTx/>
+              <a:buNone/>
+              <a:tabLst/>
             </a:pPr>
             <a:r>
-              <a:rPr lang="en-US" sz="1600" dirty="0">
-                <a:latin typeface="Helvetica" panose="020B0604020202020204" pitchFamily="34" charset="0"/>
-                <a:cs typeface="Helvetica" panose="020B0604020202020204" pitchFamily="34" charset="0"/>
-              </a:rPr>
-              <a:t>File format conventions </a:t>
-            </a:r>
-            <a:r>
-              <a:rPr lang="en-US" sz="1600" i="1" dirty="0">
-                <a:solidFill>
-                  <a:srgbClr val="C00000"/>
-                </a:solidFill>
-                <a:latin typeface="Helvetica" panose="020B0604020202020204" pitchFamily="34" charset="0"/>
-                <a:cs typeface="Helvetica" panose="020B0604020202020204" pitchFamily="34" charset="0"/>
-              </a:rPr>
-              <a:t>[§6 </a:t>
-            </a:r>
-            <a:r>
-              <a:rPr lang="en-US" sz="1600" i="1" dirty="0" smtClean="0">
-                <a:solidFill>
-                  <a:srgbClr val="C00000"/>
-                </a:solidFill>
-                <a:latin typeface="Helvetica" panose="020B0604020202020204" pitchFamily="34" charset="0"/>
-                <a:cs typeface="Helvetica" panose="020B0604020202020204" pitchFamily="34" charset="0"/>
-              </a:rPr>
-              <a:t>of Annex V </a:t>
-            </a:r>
-            <a:r>
-              <a:rPr lang="en-US" sz="1600" i="1" dirty="0">
-                <a:solidFill>
-                  <a:srgbClr val="C00000"/>
-                </a:solidFill>
-                <a:latin typeface="Helvetica" panose="020B0604020202020204" pitchFamily="34" charset="0"/>
-                <a:cs typeface="Helvetica" panose="020B0604020202020204" pitchFamily="34" charset="0"/>
-              </a:rPr>
-              <a:t>of Regulation (EU) 2017/2400]</a:t>
-            </a:r>
-            <a:endParaRPr lang="en-US" sz="1600" dirty="0">
-              <a:latin typeface="Helvetica" panose="020B0604020202020204" pitchFamily="34" charset="0"/>
-              <a:cs typeface="Helvetica" panose="020B0604020202020204" pitchFamily="34" charset="0"/>
+              <a:rPr lang="de-AT" sz="1100" b="0" dirty="0" smtClean="0">
+                <a:latin typeface="Arial" pitchFamily="34" charset="0"/>
+              </a:rPr>
+              <a:t>Input all </a:t>
+            </a:r>
+            <a:r>
+              <a:rPr lang="de-AT" sz="1100" b="0" dirty="0" err="1" smtClean="0">
+                <a:latin typeface="Arial" pitchFamily="34" charset="0"/>
+              </a:rPr>
+              <a:t>component</a:t>
+            </a:r>
+            <a:r>
+              <a:rPr lang="de-AT" sz="1100" b="0" dirty="0" smtClean="0">
+                <a:latin typeface="Arial" pitchFamily="34" charset="0"/>
+              </a:rPr>
+              <a:t> </a:t>
+            </a:r>
+            <a:r>
+              <a:rPr lang="de-AT" sz="1100" b="0" dirty="0" err="1" smtClean="0">
+                <a:latin typeface="Arial" pitchFamily="34" charset="0"/>
+              </a:rPr>
+              <a:t>data</a:t>
+            </a:r>
+            <a:endParaRPr kumimoji="0" lang="en-US" sz="1100" b="0" i="0" u="none" strike="noStrike" cap="none" normalizeH="0" baseline="0" dirty="0" smtClean="0">
+              <a:ln>
+                <a:noFill/>
+              </a:ln>
+              <a:solidFill>
+                <a:schemeClr val="tx1"/>
+              </a:solidFill>
+              <a:effectLst/>
+              <a:latin typeface="Arial" pitchFamily="34" charset="0"/>
             </a:endParaRPr>
-          </a:p>
-          <a:p>
-            <a:pPr lvl="1">
-              <a:spcBef>
-                <a:spcPts val="0"/>
-              </a:spcBef>
-              <a:spcAft>
-                <a:spcPts val="600"/>
-              </a:spcAft>
-              <a:buFont typeface="Wingdings" panose="05000000000000000000" pitchFamily="2" charset="2"/>
-              <a:buChar char="§"/>
-            </a:pPr>
-            <a:r>
-              <a:rPr lang="en-US" sz="1400" dirty="0">
-                <a:latin typeface="Helvetica" panose="020B0604020202020204" pitchFamily="34" charset="0"/>
-                <a:cs typeface="Helvetica" panose="020B0604020202020204" pitchFamily="34" charset="0"/>
-              </a:rPr>
-              <a:t>CSV (Comma Separated Values) file type</a:t>
-            </a:r>
-          </a:p>
-          <a:p>
-            <a:pPr lvl="2">
-              <a:spcBef>
-                <a:spcPts val="0"/>
-              </a:spcBef>
-              <a:spcAft>
-                <a:spcPts val="600"/>
-              </a:spcAft>
-              <a:buFont typeface="Wingdings" panose="05000000000000000000" pitchFamily="2" charset="2"/>
-              <a:buChar char="§"/>
-            </a:pPr>
-            <a:r>
-              <a:rPr lang="en-US" dirty="0">
-                <a:latin typeface="Helvetica" panose="020B0604020202020204" pitchFamily="34" charset="0"/>
-                <a:cs typeface="Helvetica" panose="020B0604020202020204" pitchFamily="34" charset="0"/>
-              </a:rPr>
-              <a:t>List separator </a:t>
-            </a:r>
-            <a:r>
-              <a:rPr lang="en-US" dirty="0">
-                <a:latin typeface="Helvetica" panose="020B0604020202020204" pitchFamily="34" charset="0"/>
-                <a:cs typeface="Helvetica" panose="020B0604020202020204" pitchFamily="34" charset="0"/>
-              </a:rPr>
-              <a:t>is </a:t>
-            </a:r>
-            <a:r>
-              <a:rPr lang="fr-FR" dirty="0">
-                <a:latin typeface="Helvetica" panose="020B0604020202020204" pitchFamily="34" charset="0"/>
-                <a:cs typeface="Helvetica" panose="020B0604020202020204" pitchFamily="34" charset="0"/>
-              </a:rPr>
-              <a:t>Comma “,”</a:t>
-            </a:r>
-            <a:endParaRPr lang="en-US" dirty="0">
-              <a:latin typeface="Helvetica" panose="020B0604020202020204" pitchFamily="34" charset="0"/>
-              <a:cs typeface="Helvetica" panose="020B0604020202020204" pitchFamily="34" charset="0"/>
-            </a:endParaRPr>
-          </a:p>
-          <a:p>
-            <a:pPr lvl="2">
-              <a:spcBef>
-                <a:spcPts val="0"/>
-              </a:spcBef>
-              <a:spcAft>
-                <a:spcPts val="600"/>
-              </a:spcAft>
-              <a:buFont typeface="Wingdings" panose="05000000000000000000" pitchFamily="2" charset="2"/>
-              <a:buChar char="§"/>
-            </a:pPr>
-            <a:r>
-              <a:rPr lang="en-US" dirty="0">
-                <a:latin typeface="Helvetica" panose="020B0604020202020204" pitchFamily="34" charset="0"/>
-                <a:cs typeface="Helvetica" panose="020B0604020202020204" pitchFamily="34" charset="0"/>
-              </a:rPr>
-              <a:t>Decimal separator is </a:t>
-            </a:r>
-            <a:r>
-              <a:rPr lang="fr-FR" dirty="0">
-                <a:latin typeface="Helvetica" panose="020B0604020202020204" pitchFamily="34" charset="0"/>
-                <a:cs typeface="Helvetica" panose="020B0604020202020204" pitchFamily="34" charset="0"/>
-              </a:rPr>
-              <a:t>Dot </a:t>
-            </a:r>
-            <a:r>
-              <a:rPr lang="fr-FR" dirty="0" smtClean="0">
-                <a:latin typeface="Helvetica" panose="020B0604020202020204" pitchFamily="34" charset="0"/>
-                <a:cs typeface="Helvetica" panose="020B0604020202020204" pitchFamily="34" charset="0"/>
-              </a:rPr>
-              <a:t>“.”</a:t>
-            </a:r>
-            <a:br>
-              <a:rPr lang="fr-FR" dirty="0" smtClean="0">
-                <a:latin typeface="Helvetica" panose="020B0604020202020204" pitchFamily="34" charset="0"/>
-                <a:cs typeface="Helvetica" panose="020B0604020202020204" pitchFamily="34" charset="0"/>
-              </a:rPr>
-            </a:br>
-            <a:endParaRPr lang="fr-FR" dirty="0">
-              <a:latin typeface="Helvetica" panose="020B0604020202020204" pitchFamily="34" charset="0"/>
-              <a:cs typeface="Helvetica" panose="020B0604020202020204" pitchFamily="34" charset="0"/>
-            </a:endParaRPr>
-          </a:p>
-          <a:p>
-            <a:pPr>
-              <a:spcBef>
-                <a:spcPts val="0"/>
-              </a:spcBef>
-              <a:spcAft>
-                <a:spcPts val="600"/>
-              </a:spcAft>
-              <a:buFont typeface="Wingdings" panose="05000000000000000000" pitchFamily="2" charset="2"/>
-              <a:buChar char="§"/>
-            </a:pPr>
-            <a:r>
-              <a:rPr lang="en-US" sz="1600" dirty="0">
-                <a:latin typeface="Helvetica" panose="020B0604020202020204" pitchFamily="34" charset="0"/>
-                <a:cs typeface="Helvetica" panose="020B0604020202020204" pitchFamily="34" charset="0"/>
-              </a:rPr>
-              <a:t>According to Regulation (EU) 2017/2400 the use of VECTO </a:t>
-            </a:r>
-            <a:r>
-              <a:rPr lang="en-US" sz="1600" dirty="0">
-                <a:latin typeface="Helvetica" panose="020B0604020202020204" pitchFamily="34" charset="0"/>
-                <a:cs typeface="Helvetica" panose="020B0604020202020204" pitchFamily="34" charset="0"/>
-              </a:rPr>
-              <a:t>Engine </a:t>
-            </a:r>
-            <a:r>
-              <a:rPr lang="en-US" sz="1600" dirty="0">
-                <a:latin typeface="Helvetica" panose="020B0604020202020204" pitchFamily="34" charset="0"/>
-                <a:cs typeface="Helvetica" panose="020B0604020202020204" pitchFamily="34" charset="0"/>
-              </a:rPr>
-              <a:t>is </a:t>
-            </a:r>
-            <a:r>
-              <a:rPr lang="en-US" sz="1600" dirty="0" smtClean="0">
-                <a:latin typeface="Helvetica" panose="020B0604020202020204" pitchFamily="34" charset="0"/>
-                <a:cs typeface="Helvetica" panose="020B0604020202020204" pitchFamily="34" charset="0"/>
-              </a:rPr>
-              <a:t>mandatory</a:t>
-            </a:r>
-            <a:br>
-              <a:rPr lang="en-US" sz="1600" dirty="0" smtClean="0">
-                <a:latin typeface="Helvetica" panose="020B0604020202020204" pitchFamily="34" charset="0"/>
-                <a:cs typeface="Helvetica" panose="020B0604020202020204" pitchFamily="34" charset="0"/>
-              </a:rPr>
-            </a:br>
-            <a:endParaRPr lang="en-US" sz="1600" dirty="0">
-              <a:latin typeface="Helvetica" panose="020B0604020202020204" pitchFamily="34" charset="0"/>
-              <a:cs typeface="Helvetica" panose="020B0604020202020204" pitchFamily="34" charset="0"/>
-            </a:endParaRPr>
-          </a:p>
-          <a:p>
-            <a:pPr>
-              <a:spcBef>
-                <a:spcPts val="0"/>
-              </a:spcBef>
-              <a:spcAft>
-                <a:spcPts val="600"/>
-              </a:spcAft>
-              <a:buFont typeface="Wingdings" panose="05000000000000000000" pitchFamily="2" charset="2"/>
-              <a:buChar char="§"/>
-            </a:pPr>
-            <a:r>
-              <a:rPr lang="en-US" sz="1600" dirty="0">
-                <a:latin typeface="Helvetica" panose="020B0604020202020204" pitchFamily="34" charset="0"/>
-                <a:cs typeface="Helvetica" panose="020B0604020202020204" pitchFamily="34" charset="0"/>
-              </a:rPr>
-              <a:t>Output is one single XML file</a:t>
-            </a:r>
-          </a:p>
-          <a:p>
-            <a:pPr lvl="1">
-              <a:spcBef>
-                <a:spcPts val="0"/>
-              </a:spcBef>
-              <a:spcAft>
-                <a:spcPts val="600"/>
-              </a:spcAft>
-              <a:buFont typeface="Wingdings" panose="05000000000000000000" pitchFamily="2" charset="2"/>
-              <a:buChar char="§"/>
-            </a:pPr>
-            <a:r>
-              <a:rPr lang="en-US" sz="1400" dirty="0">
-                <a:latin typeface="Helvetica" panose="020B0604020202020204" pitchFamily="34" charset="0"/>
-                <a:cs typeface="Helvetica" panose="020B0604020202020204" pitchFamily="34" charset="0"/>
-              </a:rPr>
-              <a:t>File </a:t>
-            </a:r>
-            <a:r>
-              <a:rPr lang="en-US" sz="1400" dirty="0">
-                <a:latin typeface="Helvetica" panose="020B0604020202020204" pitchFamily="34" charset="0"/>
-                <a:cs typeface="Helvetica" panose="020B0604020202020204" pitchFamily="34" charset="0"/>
-              </a:rPr>
-              <a:t>already </a:t>
-            </a:r>
-            <a:r>
-              <a:rPr lang="en-US" sz="1400" dirty="0">
-                <a:latin typeface="Helvetica" panose="020B0604020202020204" pitchFamily="34" charset="0"/>
-                <a:cs typeface="Helvetica" panose="020B0604020202020204" pitchFamily="34" charset="0"/>
-              </a:rPr>
-              <a:t>hashed</a:t>
-            </a:r>
-          </a:p>
-          <a:p>
-            <a:pPr lvl="1">
-              <a:spcBef>
-                <a:spcPts val="0"/>
-              </a:spcBef>
-              <a:spcAft>
-                <a:spcPts val="600"/>
-              </a:spcAft>
-              <a:buFont typeface="Wingdings" panose="05000000000000000000" pitchFamily="2" charset="2"/>
-              <a:buChar char="§"/>
-            </a:pPr>
-            <a:r>
-              <a:rPr lang="en-US" sz="1400" dirty="0">
-                <a:latin typeface="Helvetica" panose="020B0604020202020204" pitchFamily="34" charset="0"/>
-                <a:cs typeface="Helvetica" panose="020B0604020202020204" pitchFamily="34" charset="0"/>
-              </a:rPr>
-              <a:t>Ready for use in VECTO vehicle simulation for declaration</a:t>
-            </a:r>
           </a:p>
         </p:txBody>
       </p:sp>
     </p:spTree>
     <p:extLst>
       <p:ext uri="{BB962C8B-B14F-4D97-AF65-F5344CB8AC3E}">
-        <p14:creationId xmlns:p14="http://schemas.microsoft.com/office/powerpoint/2010/main" val="1622044522"/>
+        <p14:creationId xmlns:p14="http://schemas.microsoft.com/office/powerpoint/2010/main" val="147263878"/>
       </p:ext>
     </p:extLst>
   </p:cSld>
@@ -8710,16 +9801,18 @@
         <p:spPr>
           <a:xfrm>
             <a:off x="468000" y="97200"/>
-            <a:ext cx="7632848" cy="576064"/>
+            <a:ext cx="7886700" cy="576000"/>
           </a:xfrm>
         </p:spPr>
         <p:txBody>
-          <a:bodyPr/>
+          <a:bodyPr>
+            <a:normAutofit/>
+          </a:bodyPr>
           <a:lstStyle/>
           <a:p>
             <a:r>
               <a:rPr lang="en-US" dirty="0" smtClean="0"/>
-              <a:t>VECTO Engine – Input files</a:t>
+              <a:t>VECTO Engine – Basic features</a:t>
             </a:r>
             <a:endParaRPr lang="en-US" dirty="0"/>
           </a:p>
@@ -8727,328 +9820,341 @@
       </p:sp>
       <p:sp>
         <p:nvSpPr>
-          <p:cNvPr id="3" name="Rechteck 2"/>
-          <p:cNvSpPr/>
-          <p:nvPr/>
+          <p:cNvPr id="7" name="Inhaltsplatzhalter 2"/>
+          <p:cNvSpPr>
+            <a:spLocks noGrp="1"/>
+          </p:cNvSpPr>
+          <p:nvPr>
+            <p:ph idx="1"/>
+          </p:nvPr>
         </p:nvSpPr>
         <p:spPr>
           <a:xfrm>
-            <a:off x="360000" y="1268760"/>
-            <a:ext cx="8388464" cy="4370427"/>
+            <a:off x="360000" y="1267200"/>
+            <a:ext cx="8100000" cy="3263504"/>
           </a:xfrm>
-          <a:prstGeom prst="rect">
-            <a:avLst/>
-          </a:prstGeom>
         </p:spPr>
         <p:txBody>
-          <a:bodyPr wrap="square">
-            <a:spAutoFit/>
+          <a:bodyPr>
+            <a:noAutofit/>
           </a:bodyPr>
           <a:lstStyle/>
           <a:p>
-            <a:pPr marL="285750" indent="-285750" algn="l">
+            <a:pPr>
               <a:spcBef>
-                <a:spcPts val="600"/>
+                <a:spcPts val="0"/>
               </a:spcBef>
               <a:spcAft>
-                <a:spcPts val="0"/>
+                <a:spcPts val="600"/>
               </a:spcAft>
               <a:buFont typeface="Wingdings" panose="05000000000000000000" pitchFamily="2" charset="2"/>
               <a:buChar char="§"/>
             </a:pPr>
             <a:r>
-              <a:rPr lang="en-US" b="0" dirty="0" smtClean="0">
-                <a:latin typeface="Helvetica"/>
-              </a:rPr>
-              <a:t>VECTO Engine needs 4 separate input files (determined according to the current version of the technical annex):</a:t>
-            </a:r>
-          </a:p>
-          <a:p>
-            <a:pPr marL="742950" lvl="1" indent="-285750" algn="l">
+              <a:rPr lang="en-US" sz="1600" dirty="0">
+                <a:latin typeface="Helvetica" panose="020B0604020202020204" pitchFamily="34" charset="0"/>
+                <a:cs typeface="Helvetica" panose="020B0604020202020204" pitchFamily="34" charset="0"/>
+              </a:rPr>
+              <a:t>Written in </a:t>
+            </a:r>
+            <a:r>
+              <a:rPr lang="en-US" sz="1600" dirty="0" smtClean="0">
+                <a:latin typeface="Helvetica" panose="020B0604020202020204" pitchFamily="34" charset="0"/>
+                <a:cs typeface="Helvetica" panose="020B0604020202020204" pitchFamily="34" charset="0"/>
+              </a:rPr>
+              <a:t>VB.net</a:t>
+            </a:r>
+            <a:br>
+              <a:rPr lang="en-US" sz="1600" dirty="0" smtClean="0">
+                <a:latin typeface="Helvetica" panose="020B0604020202020204" pitchFamily="34" charset="0"/>
+                <a:cs typeface="Helvetica" panose="020B0604020202020204" pitchFamily="34" charset="0"/>
+              </a:rPr>
+            </a:br>
+            <a:endParaRPr lang="en-US" sz="1600" dirty="0">
+              <a:latin typeface="Helvetica" panose="020B0604020202020204" pitchFamily="34" charset="0"/>
+              <a:cs typeface="Helvetica" panose="020B0604020202020204" pitchFamily="34" charset="0"/>
+            </a:endParaRPr>
+          </a:p>
+          <a:p>
+            <a:pPr>
               <a:spcBef>
-                <a:spcPts val="600"/>
+                <a:spcPts val="0"/>
               </a:spcBef>
               <a:spcAft>
-                <a:spcPts val="0"/>
+                <a:spcPts val="600"/>
               </a:spcAft>
               <a:buFont typeface="Wingdings" panose="05000000000000000000" pitchFamily="2" charset="2"/>
               <a:buChar char="§"/>
             </a:pPr>
             <a:r>
-              <a:rPr lang="en-US" sz="1400" b="0" dirty="0" smtClean="0">
-                <a:latin typeface="Helvetica"/>
-              </a:rPr>
-              <a:t>Fuel consumption map of CO2-parent engine</a:t>
-            </a:r>
-          </a:p>
-          <a:p>
-            <a:pPr marL="742950" lvl="1" indent="-285750" algn="l">
+              <a:rPr lang="en-US" sz="1600" dirty="0">
+                <a:latin typeface="Helvetica" panose="020B0604020202020204" pitchFamily="34" charset="0"/>
+                <a:cs typeface="Helvetica" panose="020B0604020202020204" pitchFamily="34" charset="0"/>
+              </a:rPr>
+              <a:t>Portable application (i.e. no installation required</a:t>
+            </a:r>
+            <a:r>
+              <a:rPr lang="en-US" sz="1600" dirty="0" smtClean="0">
+                <a:latin typeface="Helvetica" panose="020B0604020202020204" pitchFamily="34" charset="0"/>
+                <a:cs typeface="Helvetica" panose="020B0604020202020204" pitchFamily="34" charset="0"/>
+              </a:rPr>
+              <a:t>)</a:t>
+            </a:r>
+            <a:br>
+              <a:rPr lang="en-US" sz="1600" dirty="0" smtClean="0">
+                <a:latin typeface="Helvetica" panose="020B0604020202020204" pitchFamily="34" charset="0"/>
+                <a:cs typeface="Helvetica" panose="020B0604020202020204" pitchFamily="34" charset="0"/>
+              </a:rPr>
+            </a:br>
+            <a:endParaRPr lang="en-US" sz="1600" dirty="0">
+              <a:latin typeface="Helvetica" panose="020B0604020202020204" pitchFamily="34" charset="0"/>
+              <a:cs typeface="Helvetica" panose="020B0604020202020204" pitchFamily="34" charset="0"/>
+            </a:endParaRPr>
+          </a:p>
+          <a:p>
+            <a:pPr>
               <a:spcBef>
-                <a:spcPts val="600"/>
+                <a:spcPts val="0"/>
               </a:spcBef>
               <a:spcAft>
-                <a:spcPts val="0"/>
+                <a:spcPts val="600"/>
               </a:spcAft>
               <a:buFont typeface="Wingdings" panose="05000000000000000000" pitchFamily="2" charset="2"/>
               <a:buChar char="§"/>
             </a:pPr>
             <a:r>
-              <a:rPr lang="en-US" sz="1400" b="0" dirty="0" smtClean="0">
-                <a:latin typeface="Helvetica"/>
-              </a:rPr>
-              <a:t>Full-load curve of </a:t>
-            </a:r>
-            <a:r>
-              <a:rPr lang="en-US" sz="1400" b="0" dirty="0">
-                <a:latin typeface="Helvetica"/>
-              </a:rPr>
-              <a:t>CO2-parent engine</a:t>
-            </a:r>
-            <a:endParaRPr lang="en-US" sz="1400" b="0" dirty="0" smtClean="0">
-              <a:latin typeface="Helvetica"/>
+              <a:rPr lang="en-US" sz="1600" dirty="0">
+                <a:latin typeface="Helvetica" panose="020B0604020202020204" pitchFamily="34" charset="0"/>
+                <a:cs typeface="Helvetica" panose="020B0604020202020204" pitchFamily="34" charset="0"/>
+              </a:rPr>
+              <a:t>File format conventions </a:t>
+            </a:r>
+            <a:r>
+              <a:rPr lang="en-US" sz="1600" i="1" dirty="0">
+                <a:solidFill>
+                  <a:srgbClr val="C00000"/>
+                </a:solidFill>
+                <a:latin typeface="Helvetica" panose="020B0604020202020204" pitchFamily="34" charset="0"/>
+                <a:cs typeface="Helvetica" panose="020B0604020202020204" pitchFamily="34" charset="0"/>
+              </a:rPr>
+              <a:t>[§6 </a:t>
+            </a:r>
+            <a:r>
+              <a:rPr lang="en-US" sz="1600" i="1" dirty="0" smtClean="0">
+                <a:solidFill>
+                  <a:srgbClr val="C00000"/>
+                </a:solidFill>
+                <a:latin typeface="Helvetica" panose="020B0604020202020204" pitchFamily="34" charset="0"/>
+                <a:cs typeface="Helvetica" panose="020B0604020202020204" pitchFamily="34" charset="0"/>
+              </a:rPr>
+              <a:t>of Annex V </a:t>
+            </a:r>
+            <a:r>
+              <a:rPr lang="en-US" sz="1600" i="1" dirty="0">
+                <a:solidFill>
+                  <a:srgbClr val="C00000"/>
+                </a:solidFill>
+                <a:latin typeface="Helvetica" panose="020B0604020202020204" pitchFamily="34" charset="0"/>
+                <a:cs typeface="Helvetica" panose="020B0604020202020204" pitchFamily="34" charset="0"/>
+              </a:rPr>
+              <a:t>of Regulation (EU) 2017/2400]</a:t>
+            </a:r>
+            <a:endParaRPr lang="en-US" sz="1600" dirty="0">
+              <a:latin typeface="Helvetica" panose="020B0604020202020204" pitchFamily="34" charset="0"/>
+              <a:cs typeface="Helvetica" panose="020B0604020202020204" pitchFamily="34" charset="0"/>
             </a:endParaRPr>
           </a:p>
           <a:p>
-            <a:pPr marL="742950" lvl="1" indent="-285750" algn="l">
+            <a:pPr lvl="1">
               <a:spcBef>
-                <a:spcPts val="600"/>
+                <a:spcPts val="0"/>
               </a:spcBef>
               <a:spcAft>
-                <a:spcPts val="0"/>
+                <a:spcPts val="600"/>
               </a:spcAft>
               <a:buFont typeface="Wingdings" panose="05000000000000000000" pitchFamily="2" charset="2"/>
               <a:buChar char="§"/>
             </a:pPr>
             <a:r>
-              <a:rPr lang="en-US" sz="1400" b="0" dirty="0">
-                <a:latin typeface="Helvetica"/>
-              </a:rPr>
-              <a:t>Full-load curve of </a:t>
-            </a:r>
-            <a:r>
-              <a:rPr lang="en-US" sz="1400" b="0" dirty="0" smtClean="0">
-                <a:latin typeface="Helvetica"/>
-              </a:rPr>
-              <a:t>engine to be certified</a:t>
-            </a:r>
-          </a:p>
-          <a:p>
-            <a:pPr marL="742950" lvl="1" indent="-285750" algn="l">
+              <a:rPr lang="en-US" sz="1400" dirty="0">
+                <a:latin typeface="Helvetica" panose="020B0604020202020204" pitchFamily="34" charset="0"/>
+                <a:cs typeface="Helvetica" panose="020B0604020202020204" pitchFamily="34" charset="0"/>
+              </a:rPr>
+              <a:t>CSV (Comma Separated Values) file type</a:t>
+            </a:r>
+          </a:p>
+          <a:p>
+            <a:pPr lvl="2">
               <a:spcBef>
-                <a:spcPts val="600"/>
+                <a:spcPts val="0"/>
               </a:spcBef>
               <a:spcAft>
-                <a:spcPts val="0"/>
+                <a:spcPts val="600"/>
               </a:spcAft>
               <a:buFont typeface="Wingdings" panose="05000000000000000000" pitchFamily="2" charset="2"/>
               <a:buChar char="§"/>
             </a:pPr>
             <a:r>
-              <a:rPr lang="en-US" sz="1400" b="0" dirty="0" smtClean="0">
-                <a:latin typeface="Helvetica"/>
-              </a:rPr>
-              <a:t>Motoring </a:t>
-            </a:r>
-            <a:r>
-              <a:rPr lang="en-US" sz="1400" b="0" dirty="0">
-                <a:latin typeface="Helvetica"/>
-              </a:rPr>
-              <a:t>curve of CO2-parent engine</a:t>
-            </a:r>
-          </a:p>
-          <a:p>
-            <a:pPr algn="l">
+              <a:rPr lang="en-US" dirty="0">
+                <a:latin typeface="Helvetica" panose="020B0604020202020204" pitchFamily="34" charset="0"/>
+                <a:cs typeface="Helvetica" panose="020B0604020202020204" pitchFamily="34" charset="0"/>
+              </a:rPr>
+              <a:t>List separator is </a:t>
+            </a:r>
+            <a:r>
+              <a:rPr lang="fr-FR" dirty="0">
+                <a:latin typeface="Helvetica" panose="020B0604020202020204" pitchFamily="34" charset="0"/>
+                <a:cs typeface="Helvetica" panose="020B0604020202020204" pitchFamily="34" charset="0"/>
+              </a:rPr>
+              <a:t>Comma “,”</a:t>
+            </a:r>
+            <a:endParaRPr lang="en-US" dirty="0">
+              <a:latin typeface="Helvetica" panose="020B0604020202020204" pitchFamily="34" charset="0"/>
+              <a:cs typeface="Helvetica" panose="020B0604020202020204" pitchFamily="34" charset="0"/>
+            </a:endParaRPr>
+          </a:p>
+          <a:p>
+            <a:pPr lvl="2">
               <a:spcBef>
-                <a:spcPts val="600"/>
+                <a:spcPts val="0"/>
               </a:spcBef>
               <a:spcAft>
-                <a:spcPts val="0"/>
-              </a:spcAft>
-            </a:pPr>
-            <a:endParaRPr lang="en-US" sz="1400" b="0" dirty="0" smtClean="0">
-              <a:latin typeface="Helvetica"/>
-            </a:endParaRPr>
-          </a:p>
-          <a:p>
-            <a:pPr marL="285750" indent="-285750" algn="l">
-              <a:spcBef>
                 <a:spcPts val="600"/>
-              </a:spcBef>
-              <a:spcAft>
-                <a:spcPts val="0"/>
               </a:spcAft>
               <a:buFont typeface="Wingdings" panose="05000000000000000000" pitchFamily="2" charset="2"/>
               <a:buChar char="§"/>
             </a:pPr>
             <a:r>
-              <a:rPr lang="en-US" sz="1400" b="0" dirty="0" smtClean="0">
-                <a:latin typeface="Helvetica"/>
-              </a:rPr>
-              <a:t>Input file formats</a:t>
-            </a:r>
-          </a:p>
-          <a:p>
-            <a:pPr marL="742950" lvl="1" indent="-285750" algn="l">
+              <a:rPr lang="en-US" dirty="0">
+                <a:latin typeface="Helvetica" panose="020B0604020202020204" pitchFamily="34" charset="0"/>
+                <a:cs typeface="Helvetica" panose="020B0604020202020204" pitchFamily="34" charset="0"/>
+              </a:rPr>
+              <a:t>Decimal separator is </a:t>
+            </a:r>
+            <a:r>
+              <a:rPr lang="fr-FR" dirty="0">
+                <a:latin typeface="Helvetica" panose="020B0604020202020204" pitchFamily="34" charset="0"/>
+                <a:cs typeface="Helvetica" panose="020B0604020202020204" pitchFamily="34" charset="0"/>
+              </a:rPr>
+              <a:t>Dot </a:t>
+            </a:r>
+            <a:r>
+              <a:rPr lang="fr-FR" dirty="0" smtClean="0">
+                <a:latin typeface="Helvetica" panose="020B0604020202020204" pitchFamily="34" charset="0"/>
+                <a:cs typeface="Helvetica" panose="020B0604020202020204" pitchFamily="34" charset="0"/>
+              </a:rPr>
+              <a:t>“.”</a:t>
+            </a:r>
+            <a:br>
+              <a:rPr lang="fr-FR" dirty="0" smtClean="0">
+                <a:latin typeface="Helvetica" panose="020B0604020202020204" pitchFamily="34" charset="0"/>
+                <a:cs typeface="Helvetica" panose="020B0604020202020204" pitchFamily="34" charset="0"/>
+              </a:rPr>
+            </a:br>
+            <a:endParaRPr lang="fr-FR" dirty="0">
+              <a:latin typeface="Helvetica" panose="020B0604020202020204" pitchFamily="34" charset="0"/>
+              <a:cs typeface="Helvetica" panose="020B0604020202020204" pitchFamily="34" charset="0"/>
+            </a:endParaRPr>
+          </a:p>
+          <a:p>
+            <a:pPr>
               <a:spcBef>
-                <a:spcPts val="600"/>
+                <a:spcPts val="0"/>
               </a:spcBef>
               <a:spcAft>
-                <a:spcPts val="0"/>
+                <a:spcPts val="600"/>
               </a:spcAft>
               <a:buFont typeface="Wingdings" panose="05000000000000000000" pitchFamily="2" charset="2"/>
               <a:buChar char="§"/>
             </a:pPr>
             <a:r>
-              <a:rPr lang="en-US" sz="1400" b="0" dirty="0" smtClean="0">
-                <a:latin typeface="Helvetica"/>
-                <a:sym typeface="Wingdings" panose="05000000000000000000" pitchFamily="2" charset="2"/>
-              </a:rPr>
-              <a:t>For file formats please refer to the technical annex or supplied demo files</a:t>
-            </a:r>
-            <a:r>
-              <a:rPr lang="en-US" sz="1400" b="0" dirty="0" smtClean="0">
-                <a:latin typeface="Helvetica"/>
-                <a:sym typeface="Wingdings" panose="05000000000000000000" pitchFamily="2" charset="2"/>
-              </a:rPr>
-              <a:t>!</a:t>
-            </a:r>
-            <a:br>
-              <a:rPr lang="en-US" sz="1400" b="0" dirty="0" smtClean="0">
-                <a:latin typeface="Helvetica"/>
-                <a:sym typeface="Wingdings" panose="05000000000000000000" pitchFamily="2" charset="2"/>
-              </a:rPr>
-            </a:br>
-            <a:r>
-              <a:rPr lang="en-US" sz="1400" i="1" dirty="0">
-                <a:solidFill>
-                  <a:srgbClr val="C00000"/>
-                </a:solidFill>
+              <a:rPr lang="en-US" sz="1600" dirty="0">
                 <a:latin typeface="Helvetica" panose="020B0604020202020204" pitchFamily="34" charset="0"/>
                 <a:cs typeface="Helvetica" panose="020B0604020202020204" pitchFamily="34" charset="0"/>
               </a:rPr>
-              <a:t>[§6 of Annex V of Regulation (EU) 2017/2400]</a:t>
-            </a:r>
-            <a:endParaRPr lang="en-US" sz="1400" b="0" dirty="0" smtClean="0">
+              <a:t>According to Regulation (EU) 2017/2400 the use of VECTO Engine is </a:t>
+            </a:r>
+            <a:r>
+              <a:rPr lang="en-US" sz="1600" dirty="0" smtClean="0">
+                <a:latin typeface="Helvetica" panose="020B0604020202020204" pitchFamily="34" charset="0"/>
+                <a:cs typeface="Helvetica" panose="020B0604020202020204" pitchFamily="34" charset="0"/>
+              </a:rPr>
+              <a:t>mandatory</a:t>
+            </a:r>
+            <a:br>
+              <a:rPr lang="en-US" sz="1600" dirty="0" smtClean="0">
+                <a:latin typeface="Helvetica" panose="020B0604020202020204" pitchFamily="34" charset="0"/>
+                <a:cs typeface="Helvetica" panose="020B0604020202020204" pitchFamily="34" charset="0"/>
+              </a:rPr>
+            </a:br>
+            <a:endParaRPr lang="en-US" sz="1600" dirty="0">
               <a:latin typeface="Helvetica" panose="020B0604020202020204" pitchFamily="34" charset="0"/>
               <a:cs typeface="Helvetica" panose="020B0604020202020204" pitchFamily="34" charset="0"/>
-              <a:sym typeface="Wingdings" panose="05000000000000000000" pitchFamily="2" charset="2"/>
             </a:endParaRPr>
           </a:p>
           <a:p>
-            <a:pPr marL="285750" indent="-285750" algn="l">
+            <a:pPr>
               <a:spcBef>
-                <a:spcPts val="600"/>
+                <a:spcPts val="0"/>
               </a:spcBef>
               <a:spcAft>
-                <a:spcPts val="0"/>
+                <a:spcPts val="600"/>
               </a:spcAft>
               <a:buFont typeface="Wingdings" panose="05000000000000000000" pitchFamily="2" charset="2"/>
               <a:buChar char="§"/>
             </a:pPr>
-            <a:endParaRPr lang="en-US" sz="1400" b="0" dirty="0" smtClean="0">
-              <a:latin typeface="Helvetica"/>
-              <a:sym typeface="Wingdings" panose="05000000000000000000" pitchFamily="2" charset="2"/>
-            </a:endParaRPr>
-          </a:p>
-          <a:p>
-            <a:pPr marL="285750" indent="-285750" algn="l">
+            <a:r>
+              <a:rPr lang="en-US" sz="1600" dirty="0">
+                <a:latin typeface="Helvetica" panose="020B0604020202020204" pitchFamily="34" charset="0"/>
+                <a:cs typeface="Helvetica" panose="020B0604020202020204" pitchFamily="34" charset="0"/>
+              </a:rPr>
+              <a:t>Output is one single XML file</a:t>
+            </a:r>
+          </a:p>
+          <a:p>
+            <a:pPr lvl="1">
               <a:spcBef>
-                <a:spcPts val="600"/>
+                <a:spcPts val="0"/>
               </a:spcBef>
               <a:spcAft>
-                <a:spcPts val="0"/>
+                <a:spcPts val="600"/>
               </a:spcAft>
               <a:buFont typeface="Wingdings" panose="05000000000000000000" pitchFamily="2" charset="2"/>
               <a:buChar char="§"/>
             </a:pPr>
             <a:r>
-              <a:rPr lang="en-US" sz="1400" b="0" dirty="0" smtClean="0">
-                <a:latin typeface="Helvetica"/>
-                <a:sym typeface="Wingdings" panose="05000000000000000000" pitchFamily="2" charset="2"/>
-              </a:rPr>
-              <a:t>Demo data supplied</a:t>
-            </a:r>
-          </a:p>
-          <a:p>
-            <a:pPr marL="742950" lvl="1" indent="-285750" algn="l">
+              <a:rPr lang="en-US" sz="1400" dirty="0">
+                <a:latin typeface="Helvetica" panose="020B0604020202020204" pitchFamily="34" charset="0"/>
+                <a:cs typeface="Helvetica" panose="020B0604020202020204" pitchFamily="34" charset="0"/>
+              </a:rPr>
+              <a:t>File already hashed</a:t>
+            </a:r>
+          </a:p>
+          <a:p>
+            <a:pPr lvl="1">
               <a:spcBef>
-                <a:spcPts val="600"/>
+                <a:spcPts val="0"/>
               </a:spcBef>
               <a:spcAft>
-                <a:spcPts val="0"/>
+                <a:spcPts val="600"/>
               </a:spcAft>
               <a:buFont typeface="Wingdings" panose="05000000000000000000" pitchFamily="2" charset="2"/>
               <a:buChar char="§"/>
             </a:pPr>
             <a:r>
-              <a:rPr lang="en-US" sz="1400" b="0" dirty="0" smtClean="0">
-                <a:latin typeface="Helvetica"/>
-                <a:sym typeface="Wingdings" panose="05000000000000000000" pitchFamily="2" charset="2"/>
-              </a:rPr>
-              <a:t>Two different full-load curves for two power ratings of one engine </a:t>
-            </a:r>
-            <a:r>
-              <a:rPr lang="en-US" sz="1400" b="0" dirty="0" smtClean="0">
-                <a:latin typeface="Helvetica"/>
-              </a:rPr>
-              <a:t>CO2-family</a:t>
-            </a:r>
-            <a:r>
-              <a:rPr lang="en-US" sz="1400" b="0" dirty="0" smtClean="0">
-                <a:latin typeface="Helvetica"/>
-                <a:sym typeface="Wingdings" panose="05000000000000000000" pitchFamily="2" charset="2"/>
-              </a:rPr>
-              <a:t> supplied</a:t>
-            </a:r>
-          </a:p>
-          <a:p>
-            <a:pPr marL="1200150" lvl="2" indent="-285750" algn="l">
-              <a:spcBef>
-                <a:spcPts val="600"/>
-              </a:spcBef>
-              <a:spcAft>
-                <a:spcPts val="0"/>
-              </a:spcAft>
-              <a:buFont typeface="Wingdings" panose="05000000000000000000" pitchFamily="2" charset="2"/>
-              <a:buChar char="§"/>
-            </a:pPr>
-            <a:r>
-              <a:rPr lang="en-US" sz="1400" b="0" dirty="0" smtClean="0">
-                <a:latin typeface="Helvetica"/>
-                <a:sym typeface="Wingdings" panose="05000000000000000000" pitchFamily="2" charset="2"/>
-              </a:rPr>
-              <a:t>Child: full-load of lower power rating</a:t>
-            </a:r>
-          </a:p>
-          <a:p>
-            <a:pPr marL="1200150" lvl="2" indent="-285750" algn="l">
-              <a:spcBef>
-                <a:spcPts val="600"/>
-              </a:spcBef>
-              <a:spcAft>
-                <a:spcPts val="0"/>
-              </a:spcAft>
-              <a:buFont typeface="Wingdings" panose="05000000000000000000" pitchFamily="2" charset="2"/>
-              <a:buChar char="§"/>
-            </a:pPr>
-            <a:r>
-              <a:rPr lang="en-US" sz="1400" b="0" dirty="0" smtClean="0">
-                <a:latin typeface="Helvetica"/>
-                <a:sym typeface="Wingdings" panose="05000000000000000000" pitchFamily="2" charset="2"/>
-              </a:rPr>
-              <a:t>Parent: full-load of highest power rating</a:t>
-            </a:r>
-            <a:endParaRPr lang="en-US" sz="1400" b="0" dirty="0">
-              <a:latin typeface="Helvetica"/>
-              <a:sym typeface="Wingdings" panose="05000000000000000000" pitchFamily="2" charset="2"/>
-            </a:endParaRPr>
+              <a:rPr lang="en-US" sz="1400" dirty="0">
+                <a:latin typeface="Helvetica" panose="020B0604020202020204" pitchFamily="34" charset="0"/>
+                <a:cs typeface="Helvetica" panose="020B0604020202020204" pitchFamily="34" charset="0"/>
+              </a:rPr>
+              <a:t>Ready for use in VECTO vehicle simulation for declaration</a:t>
+            </a:r>
           </a:p>
         </p:txBody>
       </p:sp>
     </p:spTree>
     <p:extLst>
       <p:ext uri="{BB962C8B-B14F-4D97-AF65-F5344CB8AC3E}">
-        <p14:creationId xmlns:p14="http://schemas.microsoft.com/office/powerpoint/2010/main" val="828712302"/>
+        <p14:creationId xmlns:p14="http://schemas.microsoft.com/office/powerpoint/2010/main" val="1622044522"/>
       </p:ext>
     </p:extLst>
   </p:cSld>
@@ -9104,7 +10210,7 @@
           <a:p>
             <a:r>
               <a:rPr lang="en-US" dirty="0" smtClean="0"/>
-              <a:t>VECTO Engine – Output files</a:t>
+              <a:t>VECTO Engine – Input files</a:t>
             </a:r>
             <a:endParaRPr lang="en-US" dirty="0"/>
           </a:p>
@@ -9119,7 +10225,7 @@
         <p:spPr>
           <a:xfrm>
             <a:off x="360000" y="1268760"/>
-            <a:ext cx="8388000" cy="2323713"/>
+            <a:ext cx="8388464" cy="5324535"/>
           </a:xfrm>
           <a:prstGeom prst="rect">
             <a:avLst/>
@@ -9142,25 +10248,22 @@
               <a:buChar char="§"/>
             </a:pPr>
             <a:r>
-              <a:rPr lang="en-US" b="0" dirty="0" smtClean="0">
+              <a:rPr lang="en-US" sz="1400" b="0" dirty="0" smtClean="0">
                 <a:latin typeface="Helvetica"/>
               </a:rPr>
-              <a:t>VECTO Engine produces one XML output file</a:t>
-            </a:r>
-            <a:r>
-              <a:rPr lang="en-US" b="0" dirty="0" smtClean="0">
+              <a:t>VECTO Engine needs 4 separate input files</a:t>
+            </a:r>
+            <a:br>
+              <a:rPr lang="en-US" sz="1400" b="0" dirty="0" smtClean="0">
                 <a:latin typeface="Helvetica"/>
               </a:rPr>
-              <a:t>:</a:t>
-            </a:r>
-            <a:br>
-              <a:rPr lang="en-US" b="0" dirty="0" smtClean="0">
+            </a:br>
+            <a:r>
+              <a:rPr lang="en-US" sz="1400" b="0" dirty="0" smtClean="0">
                 <a:latin typeface="Helvetica"/>
               </a:rPr>
-            </a:br>
-            <a:endParaRPr lang="en-US" b="0" dirty="0" smtClean="0">
-              <a:latin typeface="Helvetica"/>
-            </a:endParaRPr>
+              <a:t>(determined according to the current version of the technical annex):</a:t>
+            </a:r>
           </a:p>
           <a:p>
             <a:pPr marL="742950" lvl="1" indent="-285750" algn="l">
@@ -9174,107 +10277,11 @@
               <a:buChar char="§"/>
             </a:pPr>
             <a:r>
-              <a:rPr lang="en-US" sz="1400" b="0" dirty="0" smtClean="0">
+              <a:rPr lang="en-US" sz="1200" b="0" dirty="0" smtClean="0">
                 <a:latin typeface="Helvetica"/>
               </a:rPr>
-              <a:t>File </a:t>
-            </a:r>
-            <a:r>
-              <a:rPr lang="en-US" sz="1400" b="0" dirty="0">
-                <a:latin typeface="Helvetica"/>
-              </a:rPr>
-              <a:t>name is </a:t>
-            </a:r>
-            <a:r>
-              <a:rPr lang="en-US" sz="1400" b="0" dirty="0" smtClean="0">
-                <a:latin typeface="Helvetica"/>
-              </a:rPr>
-              <a:t>created based on GUI input data </a:t>
-            </a:r>
-            <a:r>
-              <a:rPr lang="en-US" sz="1400" b="0" dirty="0" smtClean="0">
-                <a:latin typeface="Helvetica"/>
-              </a:rPr>
-              <a:t>according </a:t>
-            </a:r>
-            <a:r>
-              <a:rPr lang="en-US" sz="1400" b="0" dirty="0" smtClean="0">
-                <a:latin typeface="Helvetica"/>
-              </a:rPr>
-              <a:t>to the following scheme</a:t>
-            </a:r>
-            <a:r>
-              <a:rPr lang="en-US" sz="1400" b="0" dirty="0" smtClean="0">
-                <a:latin typeface="Helvetica"/>
-              </a:rPr>
-              <a:t>:</a:t>
-            </a:r>
-            <a:br>
-              <a:rPr lang="en-US" sz="1400" b="0" dirty="0" smtClean="0">
-                <a:latin typeface="Helvetica"/>
-              </a:rPr>
-            </a:br>
-            <a:r>
-              <a:rPr lang="en-US" sz="1400" b="0" dirty="0">
-                <a:latin typeface="Helvetica"/>
-              </a:rPr>
-              <a:t/>
-            </a:r>
-            <a:br>
-              <a:rPr lang="en-US" sz="1400" b="0" dirty="0">
-                <a:latin typeface="Helvetica"/>
-              </a:rPr>
-            </a:br>
-            <a:r>
-              <a:rPr lang="en-US" sz="1400" b="0" dirty="0" smtClean="0">
-                <a:latin typeface="Helvetica"/>
-              </a:rPr>
-              <a:t>“</a:t>
-            </a:r>
-            <a:r>
-              <a:rPr lang="en-US" sz="1400" b="0" dirty="0" smtClean="0">
-                <a:latin typeface="Helvetica"/>
-              </a:rPr>
-              <a:t>Manufacturer” </a:t>
-            </a:r>
-            <a:r>
-              <a:rPr lang="en-US" sz="1400" b="0" dirty="0" smtClean="0">
-                <a:latin typeface="Helvetica"/>
-              </a:rPr>
-              <a:t>&amp; </a:t>
-            </a:r>
-            <a:r>
-              <a:rPr lang="en-US" sz="1400" b="0" dirty="0">
-                <a:latin typeface="Helvetica"/>
-              </a:rPr>
-              <a:t>"_" </a:t>
-            </a:r>
-            <a:r>
-              <a:rPr lang="en-US" sz="1400" b="0" dirty="0" smtClean="0">
-                <a:latin typeface="Helvetica"/>
-              </a:rPr>
-              <a:t>&amp; “Model” &amp; </a:t>
-            </a:r>
-            <a:r>
-              <a:rPr lang="en-US" sz="1400" b="0" dirty="0">
-                <a:latin typeface="Helvetica"/>
-              </a:rPr>
-              <a:t>".</a:t>
-            </a:r>
-            <a:r>
-              <a:rPr lang="en-US" sz="1400" b="0" dirty="0" smtClean="0">
-                <a:latin typeface="Helvetica"/>
-              </a:rPr>
-              <a:t>xml“</a:t>
-            </a:r>
-            <a:br>
-              <a:rPr lang="en-US" sz="1400" b="0" dirty="0" smtClean="0">
-                <a:latin typeface="Helvetica"/>
-              </a:rPr>
-            </a:br>
-            <a:endParaRPr lang="en-US" sz="1400" b="0" dirty="0" smtClean="0">
-              <a:latin typeface="Helvetica"/>
-            </a:endParaRPr>
+              <a:t>Fuel consumption map of CO2-parent engine</a:t>
+            </a:r>
           </a:p>
           <a:p>
             <a:pPr marL="742950" lvl="1" indent="-285750" algn="l">
@@ -9288,23 +10295,18 @@
               <a:buChar char="§"/>
             </a:pPr>
             <a:r>
-              <a:rPr lang="en-US" sz="1400" b="0" dirty="0">
+              <a:rPr lang="en-US" sz="1200" b="0" dirty="0" smtClean="0">
                 <a:latin typeface="Helvetica"/>
               </a:rPr>
-              <a:t>File already </a:t>
-            </a:r>
-            <a:r>
-              <a:rPr lang="en-US" sz="1400" b="0" dirty="0" smtClean="0">
+              <a:t>Full-load curve of </a:t>
+            </a:r>
+            <a:r>
+              <a:rPr lang="en-US" sz="1200" b="0" dirty="0">
                 <a:latin typeface="Helvetica"/>
               </a:rPr>
-              <a:t>hashed</a:t>
-            </a:r>
-            <a:br>
-              <a:rPr lang="en-US" sz="1400" b="0" dirty="0" smtClean="0">
-                <a:latin typeface="Helvetica"/>
-              </a:rPr>
-            </a:br>
-            <a:endParaRPr lang="en-US" sz="1400" b="0" dirty="0">
+              <a:t>CO2-parent engine</a:t>
+            </a:r>
+            <a:endParaRPr lang="en-US" sz="1200" b="0" dirty="0" smtClean="0">
               <a:latin typeface="Helvetica"/>
             </a:endParaRPr>
           </a:p>
@@ -9320,19 +10322,352 @@
               <a:buChar char="§"/>
             </a:pPr>
             <a:r>
-              <a:rPr lang="en-US" sz="1400" b="0" dirty="0">
+              <a:rPr lang="en-US" sz="1200" b="0" dirty="0">
                 <a:latin typeface="Helvetica"/>
               </a:rPr>
-              <a:t>Ready for use in VECTO vehicle simulation for </a:t>
-            </a:r>
+              <a:t>Full-load curve of </a:t>
+            </a:r>
+            <a:r>
+              <a:rPr lang="en-US" sz="1200" b="0" dirty="0" smtClean="0">
+                <a:latin typeface="Helvetica"/>
+              </a:rPr>
+              <a:t>engine to be certified</a:t>
+            </a:r>
+          </a:p>
+          <a:p>
+            <a:pPr marL="742950" lvl="1" indent="-285750" algn="l">
+              <a:spcBef>
+                <a:spcPts val="600"/>
+              </a:spcBef>
+              <a:spcAft>
+                <a:spcPts val="0"/>
+              </a:spcAft>
+              <a:buFont typeface="Wingdings" panose="05000000000000000000" pitchFamily="2" charset="2"/>
+              <a:buChar char="§"/>
+            </a:pPr>
+            <a:r>
+              <a:rPr lang="en-US" sz="1200" b="0" dirty="0" smtClean="0">
+                <a:latin typeface="Helvetica"/>
+              </a:rPr>
+              <a:t>Motoring </a:t>
+            </a:r>
+            <a:r>
+              <a:rPr lang="en-US" sz="1200" b="0" dirty="0">
+                <a:latin typeface="Helvetica"/>
+              </a:rPr>
+              <a:t>curve of CO2-parent engine</a:t>
+            </a:r>
+          </a:p>
+          <a:p>
+            <a:pPr algn="l">
+              <a:spcBef>
+                <a:spcPts val="600"/>
+              </a:spcBef>
+              <a:spcAft>
+                <a:spcPts val="0"/>
+              </a:spcAft>
+            </a:pPr>
+            <a:endParaRPr lang="en-US" sz="1400" b="0" dirty="0" smtClean="0">
+              <a:latin typeface="Helvetica"/>
+            </a:endParaRPr>
+          </a:p>
+          <a:p>
+            <a:pPr marL="285750" indent="-285750" algn="l">
+              <a:spcBef>
+                <a:spcPts val="600"/>
+              </a:spcBef>
+              <a:spcAft>
+                <a:spcPts val="0"/>
+              </a:spcAft>
+              <a:buFont typeface="Wingdings" panose="05000000000000000000" pitchFamily="2" charset="2"/>
+              <a:buChar char="§"/>
+            </a:pPr>
             <a:r>
               <a:rPr lang="en-US" sz="1400" b="0" dirty="0" smtClean="0">
                 <a:latin typeface="Helvetica"/>
               </a:rPr>
-              <a:t>declaration</a:t>
-            </a:r>
+              <a:t>Input file formats</a:t>
+            </a:r>
+          </a:p>
+          <a:p>
+            <a:pPr marL="742950" lvl="1" indent="-285750" algn="l">
+              <a:spcBef>
+                <a:spcPts val="600"/>
+              </a:spcBef>
+              <a:spcAft>
+                <a:spcPts val="0"/>
+              </a:spcAft>
+              <a:buFont typeface="Wingdings" panose="05000000000000000000" pitchFamily="2" charset="2"/>
+              <a:buChar char="§"/>
+            </a:pPr>
+            <a:r>
+              <a:rPr lang="en-US" sz="1200" b="0" dirty="0" smtClean="0">
+                <a:latin typeface="Helvetica"/>
+                <a:sym typeface="Wingdings" panose="05000000000000000000" pitchFamily="2" charset="2"/>
+              </a:rPr>
+              <a:t>For file formats please refer to the technical annex or supplied demo files!</a:t>
+            </a:r>
+            <a:br>
+              <a:rPr lang="en-US" sz="1200" b="0" dirty="0" smtClean="0">
+                <a:latin typeface="Helvetica"/>
+                <a:sym typeface="Wingdings" panose="05000000000000000000" pitchFamily="2" charset="2"/>
+              </a:rPr>
+            </a:br>
+            <a:r>
+              <a:rPr lang="en-US" sz="1200" i="1" dirty="0">
+                <a:solidFill>
+                  <a:srgbClr val="C00000"/>
+                </a:solidFill>
+                <a:latin typeface="Helvetica" panose="020B0604020202020204" pitchFamily="34" charset="0"/>
+                <a:cs typeface="Helvetica" panose="020B0604020202020204" pitchFamily="34" charset="0"/>
+              </a:rPr>
+              <a:t>[§6 of Annex V of Regulation (EU) 2017/2400]</a:t>
+            </a:r>
+            <a:endParaRPr lang="en-US" sz="1200" b="0" dirty="0" smtClean="0">
+              <a:latin typeface="Helvetica" panose="020B0604020202020204" pitchFamily="34" charset="0"/>
+              <a:cs typeface="Helvetica" panose="020B0604020202020204" pitchFamily="34" charset="0"/>
+              <a:sym typeface="Wingdings" panose="05000000000000000000" pitchFamily="2" charset="2"/>
+            </a:endParaRPr>
+          </a:p>
+          <a:p>
+            <a:pPr marL="285750" indent="-285750" algn="l">
+              <a:spcBef>
+                <a:spcPts val="600"/>
+              </a:spcBef>
+              <a:spcAft>
+                <a:spcPts val="0"/>
+              </a:spcAft>
+              <a:buFont typeface="Wingdings" panose="05000000000000000000" pitchFamily="2" charset="2"/>
+              <a:buChar char="§"/>
+            </a:pPr>
             <a:endParaRPr lang="en-US" sz="1400" b="0" dirty="0" smtClean="0">
               <a:latin typeface="Helvetica"/>
+              <a:sym typeface="Wingdings" panose="05000000000000000000" pitchFamily="2" charset="2"/>
+            </a:endParaRPr>
+          </a:p>
+          <a:p>
+            <a:pPr marL="285750" indent="-285750" algn="l">
+              <a:spcBef>
+                <a:spcPts val="600"/>
+              </a:spcBef>
+              <a:spcAft>
+                <a:spcPts val="0"/>
+              </a:spcAft>
+              <a:buFont typeface="Wingdings" panose="05000000000000000000" pitchFamily="2" charset="2"/>
+              <a:buChar char="§"/>
+            </a:pPr>
+            <a:r>
+              <a:rPr lang="en-US" sz="1400" b="0" dirty="0" smtClean="0">
+                <a:latin typeface="Helvetica"/>
+                <a:sym typeface="Wingdings" panose="05000000000000000000" pitchFamily="2" charset="2"/>
+              </a:rPr>
+              <a:t>Demo data supplied</a:t>
+            </a:r>
+          </a:p>
+          <a:p>
+            <a:pPr marL="742950" lvl="1" indent="-285750" algn="l">
+              <a:spcBef>
+                <a:spcPts val="600"/>
+              </a:spcBef>
+              <a:spcAft>
+                <a:spcPts val="0"/>
+              </a:spcAft>
+              <a:buFont typeface="Wingdings" panose="05000000000000000000" pitchFamily="2" charset="2"/>
+              <a:buChar char="§"/>
+            </a:pPr>
+            <a:r>
+              <a:rPr lang="en-US" sz="1200" b="0" dirty="0" smtClean="0">
+                <a:latin typeface="Helvetica"/>
+                <a:sym typeface="Wingdings" panose="05000000000000000000" pitchFamily="2" charset="2"/>
+              </a:rPr>
+              <a:t>Two different full-load curves for two power ratings of one engine </a:t>
+            </a:r>
+            <a:r>
+              <a:rPr lang="en-US" sz="1200" b="0" dirty="0" smtClean="0">
+                <a:latin typeface="Helvetica"/>
+              </a:rPr>
+              <a:t>CO2-family</a:t>
+            </a:r>
+            <a:r>
+              <a:rPr lang="en-US" sz="1200" b="0" dirty="0" smtClean="0">
+                <a:latin typeface="Helvetica"/>
+                <a:sym typeface="Wingdings" panose="05000000000000000000" pitchFamily="2" charset="2"/>
+              </a:rPr>
+              <a:t> supplied</a:t>
+            </a:r>
+          </a:p>
+          <a:p>
+            <a:pPr marL="1200150" lvl="2" indent="-285750" algn="l">
+              <a:spcBef>
+                <a:spcPts val="600"/>
+              </a:spcBef>
+              <a:spcAft>
+                <a:spcPts val="0"/>
+              </a:spcAft>
+              <a:buFont typeface="Wingdings" panose="05000000000000000000" pitchFamily="2" charset="2"/>
+              <a:buChar char="§"/>
+            </a:pPr>
+            <a:r>
+              <a:rPr lang="en-US" sz="1000" b="0" dirty="0" smtClean="0">
+                <a:latin typeface="Helvetica"/>
+                <a:sym typeface="Wingdings" panose="05000000000000000000" pitchFamily="2" charset="2"/>
+              </a:rPr>
+              <a:t>Child: full-load of lower power rating</a:t>
+            </a:r>
+          </a:p>
+          <a:p>
+            <a:pPr marL="1200150" lvl="2" indent="-285750" algn="l">
+              <a:spcBef>
+                <a:spcPts val="600"/>
+              </a:spcBef>
+              <a:spcAft>
+                <a:spcPts val="0"/>
+              </a:spcAft>
+              <a:buFont typeface="Wingdings" panose="05000000000000000000" pitchFamily="2" charset="2"/>
+              <a:buChar char="§"/>
+            </a:pPr>
+            <a:r>
+              <a:rPr lang="en-US" sz="1000" b="0" dirty="0" smtClean="0">
+                <a:latin typeface="Helvetica"/>
+                <a:sym typeface="Wingdings" panose="05000000000000000000" pitchFamily="2" charset="2"/>
+              </a:rPr>
+              <a:t>Parent: full-load of highest power rating</a:t>
+            </a:r>
+          </a:p>
+          <a:p>
+            <a:pPr marL="742950" lvl="1" indent="-285750" algn="l">
+              <a:spcBef>
+                <a:spcPts val="600"/>
+              </a:spcBef>
+              <a:spcAft>
+                <a:spcPts val="0"/>
+              </a:spcAft>
+              <a:buFont typeface="Wingdings" panose="05000000000000000000" pitchFamily="2" charset="2"/>
+              <a:buChar char="§"/>
+            </a:pPr>
+            <a:r>
+              <a:rPr lang="en-US" sz="1200" b="0" dirty="0">
+                <a:latin typeface="Helvetica"/>
+                <a:sym typeface="Wingdings" panose="05000000000000000000" pitchFamily="2" charset="2"/>
+              </a:rPr>
+              <a:t>Four different fuel consumption map files </a:t>
+            </a:r>
+            <a:r>
+              <a:rPr lang="en-US" sz="1200" b="0" dirty="0" smtClean="0">
+                <a:latin typeface="Helvetica"/>
+                <a:sym typeface="Wingdings" panose="05000000000000000000" pitchFamily="2" charset="2"/>
+              </a:rPr>
+              <a:t>plus respective job files (*.</a:t>
+            </a:r>
+            <a:r>
+              <a:rPr lang="en-US" sz="1200" b="0" dirty="0" err="1" smtClean="0">
+                <a:latin typeface="Helvetica"/>
+                <a:sym typeface="Wingdings" panose="05000000000000000000" pitchFamily="2" charset="2"/>
+              </a:rPr>
+              <a:t>vep</a:t>
+            </a:r>
+            <a:r>
+              <a:rPr lang="en-US" sz="1200" b="0" dirty="0" smtClean="0">
+                <a:latin typeface="Helvetica"/>
+                <a:sym typeface="Wingdings" panose="05000000000000000000" pitchFamily="2" charset="2"/>
+              </a:rPr>
+              <a:t>) supplied</a:t>
+            </a:r>
+            <a:endParaRPr lang="en-US" sz="1200" b="0" dirty="0">
+              <a:latin typeface="Helvetica"/>
+              <a:sym typeface="Wingdings" panose="05000000000000000000" pitchFamily="2" charset="2"/>
+            </a:endParaRPr>
+          </a:p>
+          <a:p>
+            <a:pPr marL="1200150" lvl="2" indent="-285750" algn="l">
+              <a:spcBef>
+                <a:spcPts val="600"/>
+              </a:spcBef>
+              <a:spcAft>
+                <a:spcPts val="0"/>
+              </a:spcAft>
+              <a:buFont typeface="Wingdings" panose="05000000000000000000" pitchFamily="2" charset="2"/>
+              <a:buChar char="§"/>
+            </a:pPr>
+            <a:r>
+              <a:rPr lang="en-US" sz="1000" b="0" dirty="0">
+                <a:latin typeface="Helvetica"/>
+                <a:sym typeface="Wingdings" panose="05000000000000000000" pitchFamily="2" charset="2"/>
+              </a:rPr>
+              <a:t>Standard single fuel engine</a:t>
+            </a:r>
+          </a:p>
+          <a:p>
+            <a:pPr marL="1200150" lvl="2" indent="-285750" algn="l">
+              <a:spcBef>
+                <a:spcPts val="600"/>
+              </a:spcBef>
+              <a:spcAft>
+                <a:spcPts val="0"/>
+              </a:spcAft>
+              <a:buFont typeface="Wingdings" panose="05000000000000000000" pitchFamily="2" charset="2"/>
+              <a:buChar char="§"/>
+            </a:pPr>
+            <a:r>
+              <a:rPr lang="en-US" sz="1000" b="0" dirty="0">
+                <a:latin typeface="Helvetica"/>
+                <a:sym typeface="Wingdings" panose="05000000000000000000" pitchFamily="2" charset="2"/>
+              </a:rPr>
+              <a:t>Dual-fuel engine w/o WHR system</a:t>
+            </a:r>
+          </a:p>
+          <a:p>
+            <a:pPr marL="1200150" lvl="2" indent="-285750" algn="l">
+              <a:spcBef>
+                <a:spcPts val="600"/>
+              </a:spcBef>
+              <a:spcAft>
+                <a:spcPts val="0"/>
+              </a:spcAft>
+              <a:buFont typeface="Wingdings" panose="05000000000000000000" pitchFamily="2" charset="2"/>
+              <a:buChar char="§"/>
+            </a:pPr>
+            <a:r>
+              <a:rPr lang="en-US" sz="1000" b="0" dirty="0">
+                <a:latin typeface="Helvetica"/>
+                <a:sym typeface="Wingdings" panose="05000000000000000000" pitchFamily="2" charset="2"/>
+              </a:rPr>
+              <a:t>Dual-fuel engine w/ WHR system w/ mechanical output to vehicle’s drivetrain</a:t>
+            </a:r>
+          </a:p>
+          <a:p>
+            <a:pPr marL="1200150" lvl="2" indent="-285750" algn="l">
+              <a:spcBef>
+                <a:spcPts val="600"/>
+              </a:spcBef>
+              <a:spcAft>
+                <a:spcPts val="0"/>
+              </a:spcAft>
+              <a:buFont typeface="Wingdings" panose="05000000000000000000" pitchFamily="2" charset="2"/>
+              <a:buChar char="§"/>
+            </a:pPr>
+            <a:r>
+              <a:rPr lang="en-US" sz="1000" b="0" dirty="0">
+                <a:latin typeface="Helvetica"/>
+                <a:sym typeface="Wingdings" panose="05000000000000000000" pitchFamily="2" charset="2"/>
+              </a:rPr>
+              <a:t>Dual-fuel engine w/ WHR system w/ electrical output</a:t>
+            </a:r>
+          </a:p>
+          <a:p>
+            <a:pPr marL="742950" lvl="1" indent="-285750" algn="l">
+              <a:spcBef>
+                <a:spcPts val="600"/>
+              </a:spcBef>
+              <a:spcAft>
+                <a:spcPts val="0"/>
+              </a:spcAft>
+              <a:buFont typeface="Wingdings" panose="05000000000000000000" pitchFamily="2" charset="2"/>
+              <a:buChar char="§"/>
+            </a:pPr>
+            <a:endParaRPr lang="en-US" sz="1000" b="0" dirty="0">
+              <a:latin typeface="Helvetica"/>
+              <a:sym typeface="Wingdings" panose="05000000000000000000" pitchFamily="2" charset="2"/>
             </a:endParaRPr>
           </a:p>
         </p:txBody>
@@ -9340,7 +10675,7 @@
     </p:spTree>
     <p:extLst>
       <p:ext uri="{BB962C8B-B14F-4D97-AF65-F5344CB8AC3E}">
-        <p14:creationId xmlns:p14="http://schemas.microsoft.com/office/powerpoint/2010/main" val="1838928384"/>
+        <p14:creationId xmlns:p14="http://schemas.microsoft.com/office/powerpoint/2010/main" val="828712302"/>
       </p:ext>
     </p:extLst>
   </p:cSld>
@@ -9386,40 +10721,17 @@
         </p:nvSpPr>
         <p:spPr>
           <a:xfrm>
-            <a:off x="468000" y="153844"/>
-            <a:ext cx="7632848" cy="756000"/>
+            <a:off x="468000" y="97200"/>
+            <a:ext cx="7632848" cy="576064"/>
           </a:xfrm>
         </p:spPr>
         <p:txBody>
-          <a:bodyPr anchor="t" anchorCtr="0"/>
+          <a:bodyPr/>
           <a:lstStyle/>
           <a:p>
             <a:r>
               <a:rPr lang="en-US" dirty="0" smtClean="0"/>
-              <a:t>VECTO Engine – </a:t>
-            </a:r>
-            <a:r>
-              <a:rPr lang="en-US" dirty="0" smtClean="0"/>
-              <a:t>E</a:t>
-            </a:r>
-            <a:r>
-              <a:rPr lang="en-US" dirty="0" smtClean="0"/>
-              <a:t>valuation algorithms</a:t>
-            </a:r>
-            <a:br>
-              <a:rPr lang="en-US" dirty="0" smtClean="0"/>
-            </a:br>
-            <a:r>
-              <a:rPr lang="en-US" dirty="0" smtClean="0"/>
-              <a:t>performed </a:t>
-            </a:r>
-            <a:r>
-              <a:rPr lang="en-US" dirty="0" smtClean="0"/>
-              <a:t>(</a:t>
-            </a:r>
-            <a:r>
-              <a:rPr lang="en-US" dirty="0" smtClean="0"/>
-              <a:t>p1/5)</a:t>
+              <a:t>VECTO Engine – Output files</a:t>
             </a:r>
             <a:endParaRPr lang="en-US" dirty="0"/>
           </a:p>
@@ -9433,8 +10745,8 @@
         </p:nvSpPr>
         <p:spPr>
           <a:xfrm>
-            <a:off x="179512" y="1268760"/>
-            <a:ext cx="8784000" cy="4293483"/>
+            <a:off x="360000" y="1268760"/>
+            <a:ext cx="8388000" cy="2323713"/>
           </a:xfrm>
           <a:prstGeom prst="rect">
             <a:avLst/>
@@ -9446,274 +10758,177 @@
           </a:bodyPr>
           <a:lstStyle/>
           <a:p>
-            <a:pPr indent="-936000" algn="l"/>
-            <a:r>
-              <a:rPr lang="en-GB" sz="1400" b="0" dirty="0"/>
-              <a:t>1.	Reading of input files and automatic check of input data</a:t>
-            </a:r>
-            <a:endParaRPr lang="de-AT" sz="1400" b="0" dirty="0"/>
-          </a:p>
-          <a:p>
-            <a:pPr indent="-936000" algn="l"/>
-            <a:r>
-              <a:rPr lang="en-GB" sz="1400" b="0" dirty="0"/>
-              <a:t>1.1	Check of requirements for input data according to the definitions in paragraph 6.1 of this Annex</a:t>
-            </a:r>
-            <a:endParaRPr lang="de-AT" sz="1400" b="0" dirty="0"/>
-          </a:p>
-          <a:p>
-            <a:pPr indent="-936000" algn="l"/>
-            <a:r>
-              <a:rPr lang="en-GB" sz="1400" b="0" dirty="0"/>
-              <a:t>1.2	Check of requirements for recorded FCMC data according to the definitions in paragraph </a:t>
-            </a:r>
-            <a:r>
-              <a:rPr lang="en-GB" sz="1400" b="0" dirty="0" smtClean="0"/>
-              <a:t>4.3.5.2</a:t>
+            <a:pPr marL="285750" indent="-285750" algn="l">
+              <a:spcBef>
+                <a:spcPts val="600"/>
+              </a:spcBef>
+              <a:spcAft>
+                <a:spcPts val="0"/>
+              </a:spcAft>
+              <a:buFont typeface="Wingdings" panose="05000000000000000000" pitchFamily="2" charset="2"/>
+              <a:buChar char="§"/>
+            </a:pPr>
+            <a:r>
+              <a:rPr lang="en-US" b="0" dirty="0" smtClean="0">
+                <a:latin typeface="Helvetica"/>
+              </a:rPr>
+              <a:t>VECTO Engine produces one XML output file:</a:t>
             </a:r>
             <a:br>
-              <a:rPr lang="en-GB" sz="1400" b="0" dirty="0" smtClean="0"/>
+              <a:rPr lang="en-US" b="0" dirty="0" smtClean="0">
+                <a:latin typeface="Helvetica"/>
+              </a:rPr>
             </a:br>
-            <a:r>
-              <a:rPr lang="en-GB" sz="1400" b="0" dirty="0" smtClean="0"/>
-              <a:t>	and </a:t>
-            </a:r>
-            <a:r>
-              <a:rPr lang="en-GB" sz="1400" b="0" dirty="0" err="1"/>
-              <a:t>subpoint</a:t>
-            </a:r>
-            <a:r>
-              <a:rPr lang="en-GB" sz="1400" b="0" dirty="0"/>
-              <a:t> (1) of paragraph 4.3.5.5 of this Annex</a:t>
-            </a:r>
-            <a:endParaRPr lang="de-AT" sz="1400" b="0" dirty="0"/>
-          </a:p>
-          <a:p>
-            <a:pPr indent="-936000" algn="l"/>
-            <a:r>
-              <a:rPr lang="en-GB" sz="1400" b="0" dirty="0"/>
-              <a:t>2.	Calculation of characteristic engine speeds from full load curves of parent engine and </a:t>
-            </a:r>
-            <a:r>
-              <a:rPr lang="en-GB" sz="1400" b="0" dirty="0" smtClean="0"/>
-              <a:t>actual</a:t>
+            <a:endParaRPr lang="en-US" b="0" dirty="0" smtClean="0">
+              <a:latin typeface="Helvetica"/>
+            </a:endParaRPr>
+          </a:p>
+          <a:p>
+            <a:pPr marL="742950" lvl="1" indent="-285750" algn="l">
+              <a:spcBef>
+                <a:spcPts val="600"/>
+              </a:spcBef>
+              <a:spcAft>
+                <a:spcPts val="0"/>
+              </a:spcAft>
+              <a:buFont typeface="Wingdings" panose="05000000000000000000" pitchFamily="2" charset="2"/>
+              <a:buChar char="§"/>
+            </a:pPr>
+            <a:r>
+              <a:rPr lang="en-US" sz="1400" b="0" dirty="0" smtClean="0">
+                <a:latin typeface="Helvetica"/>
+              </a:rPr>
+              <a:t>File </a:t>
+            </a:r>
+            <a:r>
+              <a:rPr lang="en-US" sz="1400" b="0" dirty="0">
+                <a:latin typeface="Helvetica"/>
+              </a:rPr>
+              <a:t>name is </a:t>
+            </a:r>
+            <a:r>
+              <a:rPr lang="en-US" sz="1400" b="0" dirty="0" smtClean="0">
+                <a:latin typeface="Helvetica"/>
+              </a:rPr>
+              <a:t>created based on GUI input data according to the following scheme:</a:t>
             </a:r>
             <a:br>
-              <a:rPr lang="en-GB" sz="1400" b="0" dirty="0" smtClean="0"/>
+              <a:rPr lang="en-US" sz="1400" b="0" dirty="0" smtClean="0">
+                <a:latin typeface="Helvetica"/>
+              </a:rPr>
             </a:br>
             <a:r>
-              <a:rPr lang="en-GB" sz="1400" b="0" dirty="0" smtClean="0"/>
-              <a:t>	engine for </a:t>
-            </a:r>
-            <a:r>
-              <a:rPr lang="en-GB" sz="1400" b="0" dirty="0"/>
-              <a:t>certification according to the definitions in paragraph 4.3.5.2.1 of this Annex</a:t>
-            </a:r>
-            <a:endParaRPr lang="de-AT" sz="1400" b="0" dirty="0"/>
-          </a:p>
-          <a:p>
-            <a:pPr indent="-936000" algn="l"/>
-            <a:r>
-              <a:rPr lang="en-GB" sz="1400" b="0" dirty="0"/>
-              <a:t>3.	Processing of fuel consumption (FC) map</a:t>
-            </a:r>
-            <a:endParaRPr lang="de-AT" sz="1400" b="0" dirty="0"/>
-          </a:p>
-          <a:p>
-            <a:pPr indent="-936000" algn="l"/>
-            <a:r>
-              <a:rPr lang="en-GB" sz="1400" b="0" dirty="0"/>
-              <a:t>3.1	FC values at </a:t>
-            </a:r>
-            <a:r>
-              <a:rPr lang="en-GB" sz="1400" b="0" dirty="0" err="1"/>
-              <a:t>n</a:t>
-            </a:r>
-            <a:r>
-              <a:rPr lang="en-GB" sz="1400" b="0" baseline="-25000" dirty="0" err="1"/>
-              <a:t>idle</a:t>
-            </a:r>
-            <a:r>
-              <a:rPr lang="en-GB" sz="1400" b="0" dirty="0"/>
-              <a:t> are copied to engine speed (</a:t>
-            </a:r>
-            <a:r>
-              <a:rPr lang="en-GB" sz="1400" b="0" dirty="0" err="1"/>
-              <a:t>n</a:t>
-            </a:r>
-            <a:r>
-              <a:rPr lang="en-GB" sz="1400" b="0" baseline="-25000" dirty="0" err="1"/>
-              <a:t>idle</a:t>
-            </a:r>
-            <a:r>
-              <a:rPr lang="en-GB" sz="1400" b="0" dirty="0"/>
-              <a:t> – 100 min</a:t>
-            </a:r>
-            <a:r>
-              <a:rPr lang="en-GB" sz="1400" b="0" baseline="30000" dirty="0"/>
-              <a:t>-1</a:t>
-            </a:r>
-            <a:r>
-              <a:rPr lang="en-GB" sz="1400" b="0" dirty="0"/>
-              <a:t>) in the map</a:t>
-            </a:r>
-            <a:endParaRPr lang="de-AT" sz="1400" b="0" dirty="0"/>
-          </a:p>
-          <a:p>
-            <a:pPr indent="-936000" algn="l"/>
-            <a:r>
-              <a:rPr lang="en-GB" sz="1400" b="0" dirty="0"/>
-              <a:t>3.2	FC values at n</a:t>
-            </a:r>
-            <a:r>
-              <a:rPr lang="en-GB" sz="1400" b="0" baseline="-25000" dirty="0"/>
-              <a:t>95h</a:t>
-            </a:r>
-            <a:r>
-              <a:rPr lang="en-GB" sz="1400" b="0" dirty="0"/>
-              <a:t> are copied to engine speed (n</a:t>
-            </a:r>
-            <a:r>
-              <a:rPr lang="en-GB" sz="1400" b="0" baseline="-25000" dirty="0"/>
-              <a:t>95h</a:t>
-            </a:r>
-            <a:r>
-              <a:rPr lang="en-GB" sz="1400" b="0" dirty="0"/>
-              <a:t> + 500 min</a:t>
-            </a:r>
-            <a:r>
-              <a:rPr lang="en-GB" sz="1400" b="0" baseline="30000" dirty="0"/>
-              <a:t>-1</a:t>
-            </a:r>
-            <a:r>
-              <a:rPr lang="en-GB" sz="1400" b="0" dirty="0"/>
-              <a:t>) in the map</a:t>
-            </a:r>
-            <a:endParaRPr lang="de-AT" sz="1400" b="0" dirty="0"/>
-          </a:p>
-          <a:p>
-            <a:pPr indent="-936000" algn="l"/>
-            <a:r>
-              <a:rPr lang="en-GB" sz="1400" b="0" dirty="0"/>
-              <a:t>3.3	Extrapolation of FC values at all engine speed </a:t>
-            </a:r>
-            <a:r>
-              <a:rPr lang="en-GB" sz="1400" b="0" dirty="0" err="1"/>
-              <a:t>setpoints</a:t>
-            </a:r>
-            <a:r>
-              <a:rPr lang="en-GB" sz="1400" b="0" dirty="0"/>
-              <a:t> to a torque value of (1.1 times </a:t>
-            </a:r>
-            <a:r>
-              <a:rPr lang="en-GB" sz="1400" b="0" dirty="0" err="1" smtClean="0"/>
-              <a:t>T</a:t>
-            </a:r>
-            <a:r>
-              <a:rPr lang="en-GB" sz="1400" b="0" baseline="-25000" dirty="0" err="1" smtClean="0"/>
-              <a:t>max_overall</a:t>
-            </a:r>
-            <a:r>
-              <a:rPr lang="en-GB" sz="1400" b="0" dirty="0" smtClean="0"/>
-              <a:t>)</a:t>
+              <a:rPr lang="en-US" sz="1400" b="0" dirty="0">
+                <a:latin typeface="Helvetica"/>
+              </a:rPr>
+              <a:t/>
             </a:r>
             <a:br>
-              <a:rPr lang="en-GB" sz="1400" b="0" dirty="0" smtClean="0"/>
+              <a:rPr lang="en-US" sz="1400" b="0" dirty="0">
+                <a:latin typeface="Helvetica"/>
+              </a:rPr>
             </a:br>
             <a:r>
-              <a:rPr lang="en-GB" sz="1400" b="0" dirty="0" smtClean="0"/>
-              <a:t>	by </a:t>
-            </a:r>
-            <a:r>
-              <a:rPr lang="en-GB" sz="1400" b="0" dirty="0"/>
-              <a:t>using least squares linear regression based on the 3 measured FC points with the </a:t>
-            </a:r>
-            <a:r>
-              <a:rPr lang="en-GB" sz="1400" b="0" dirty="0" smtClean="0"/>
-              <a:t>highest</a:t>
+              <a:rPr lang="en-US" sz="1400" b="0" dirty="0" smtClean="0">
+                <a:latin typeface="Helvetica"/>
+              </a:rPr>
+              <a:t>“Manufacturer” &amp; </a:t>
+            </a:r>
+            <a:r>
+              <a:rPr lang="en-US" sz="1400" b="0" dirty="0">
+                <a:latin typeface="Helvetica"/>
+              </a:rPr>
+              <a:t>"_" </a:t>
+            </a:r>
+            <a:r>
+              <a:rPr lang="en-US" sz="1400" b="0" dirty="0" smtClean="0">
+                <a:latin typeface="Helvetica"/>
+              </a:rPr>
+              <a:t>&amp; “Model” &amp; </a:t>
+            </a:r>
+            <a:r>
+              <a:rPr lang="en-US" sz="1400" b="0" dirty="0">
+                <a:latin typeface="Helvetica"/>
+              </a:rPr>
+              <a:t>".</a:t>
+            </a:r>
+            <a:r>
+              <a:rPr lang="en-US" sz="1400" b="0" dirty="0" smtClean="0">
+                <a:latin typeface="Helvetica"/>
+              </a:rPr>
+              <a:t>xml“</a:t>
             </a:r>
             <a:br>
-              <a:rPr lang="en-GB" sz="1400" b="0" dirty="0" smtClean="0"/>
+              <a:rPr lang="en-US" sz="1400" b="0" dirty="0" smtClean="0">
+                <a:latin typeface="Helvetica"/>
+              </a:rPr>
             </a:br>
-            <a:r>
-              <a:rPr lang="en-GB" sz="1400" b="0" dirty="0" smtClean="0"/>
-              <a:t>	torque values </a:t>
-            </a:r>
-            <a:r>
-              <a:rPr lang="en-GB" sz="1400" b="0" dirty="0"/>
-              <a:t>at each engine speed </a:t>
-            </a:r>
-            <a:r>
-              <a:rPr lang="en-GB" sz="1400" b="0" dirty="0" err="1"/>
-              <a:t>setpoint</a:t>
-            </a:r>
-            <a:r>
-              <a:rPr lang="en-GB" sz="1400" b="0" dirty="0"/>
-              <a:t> in the map</a:t>
-            </a:r>
-            <a:endParaRPr lang="de-AT" sz="1400" b="0" dirty="0"/>
-          </a:p>
-          <a:p>
-            <a:pPr indent="-936000" algn="l"/>
-            <a:r>
-              <a:rPr lang="en-GB" sz="1400" b="0" dirty="0"/>
-              <a:t>3.4	Adding of FC = 0 for interpolated motoring torque values at all engine speed </a:t>
-            </a:r>
-            <a:r>
-              <a:rPr lang="en-GB" sz="1400" b="0" dirty="0" err="1"/>
-              <a:t>setpoints</a:t>
-            </a:r>
-            <a:r>
-              <a:rPr lang="en-GB" sz="1400" b="0" dirty="0"/>
-              <a:t> in the map</a:t>
-            </a:r>
-            <a:endParaRPr lang="de-AT" sz="1400" b="0" dirty="0"/>
-          </a:p>
-          <a:p>
-            <a:pPr indent="-936000" algn="l"/>
-            <a:r>
-              <a:rPr lang="en-GB" sz="1400" b="0" dirty="0"/>
-              <a:t>3.5	Adding of FC = 0 for minimum of interpolated motoring torque values from </a:t>
-            </a:r>
-            <a:r>
-              <a:rPr lang="en-GB" sz="1400" b="0" dirty="0" err="1"/>
-              <a:t>subpoint</a:t>
-            </a:r>
-            <a:r>
-              <a:rPr lang="en-GB" sz="1400" b="0" dirty="0"/>
-              <a:t> (3.4) </a:t>
-            </a:r>
-            <a:r>
-              <a:rPr lang="en-GB" sz="1400" b="0" dirty="0" smtClean="0"/>
-              <a:t>minus</a:t>
+            <a:endParaRPr lang="en-US" sz="1400" b="0" dirty="0" smtClean="0">
+              <a:latin typeface="Helvetica"/>
+            </a:endParaRPr>
+          </a:p>
+          <a:p>
+            <a:pPr marL="742950" lvl="1" indent="-285750" algn="l">
+              <a:spcBef>
+                <a:spcPts val="600"/>
+              </a:spcBef>
+              <a:spcAft>
+                <a:spcPts val="0"/>
+              </a:spcAft>
+              <a:buFont typeface="Wingdings" panose="05000000000000000000" pitchFamily="2" charset="2"/>
+              <a:buChar char="§"/>
+            </a:pPr>
+            <a:r>
+              <a:rPr lang="en-US" sz="1400" b="0" dirty="0">
+                <a:latin typeface="Helvetica"/>
+              </a:rPr>
+              <a:t>File already </a:t>
+            </a:r>
+            <a:r>
+              <a:rPr lang="en-US" sz="1400" b="0" dirty="0" smtClean="0">
+                <a:latin typeface="Helvetica"/>
+              </a:rPr>
+              <a:t>hashed</a:t>
             </a:r>
             <a:br>
-              <a:rPr lang="en-GB" sz="1400" b="0" dirty="0" smtClean="0"/>
+              <a:rPr lang="en-US" sz="1400" b="0" dirty="0" smtClean="0">
+                <a:latin typeface="Helvetica"/>
+              </a:rPr>
             </a:br>
-            <a:r>
-              <a:rPr lang="en-GB" sz="1400" b="0" dirty="0" smtClean="0"/>
-              <a:t>	100 Nm </a:t>
-            </a:r>
-            <a:r>
-              <a:rPr lang="en-GB" sz="1400" b="0" dirty="0"/>
-              <a:t>at all engine speed </a:t>
-            </a:r>
-            <a:r>
-              <a:rPr lang="en-GB" sz="1400" b="0" dirty="0" err="1"/>
-              <a:t>setpoints</a:t>
-            </a:r>
-            <a:r>
-              <a:rPr lang="en-GB" sz="1400" b="0" dirty="0"/>
-              <a:t> in the map</a:t>
-            </a:r>
-            <a:endParaRPr lang="de-AT" sz="1400" b="0" dirty="0"/>
+            <a:endParaRPr lang="en-US" sz="1400" b="0" dirty="0">
+              <a:latin typeface="Helvetica"/>
+            </a:endParaRPr>
+          </a:p>
+          <a:p>
+            <a:pPr marL="742950" lvl="1" indent="-285750" algn="l">
+              <a:spcBef>
+                <a:spcPts val="600"/>
+              </a:spcBef>
+              <a:spcAft>
+                <a:spcPts val="0"/>
+              </a:spcAft>
+              <a:buFont typeface="Wingdings" panose="05000000000000000000" pitchFamily="2" charset="2"/>
+              <a:buChar char="§"/>
+            </a:pPr>
+            <a:r>
+              <a:rPr lang="en-US" sz="1400" b="0" dirty="0">
+                <a:latin typeface="Helvetica"/>
+              </a:rPr>
+              <a:t>Ready for use in VECTO vehicle simulation for </a:t>
+            </a:r>
+            <a:r>
+              <a:rPr lang="en-US" sz="1400" b="0" dirty="0" smtClean="0">
+                <a:latin typeface="Helvetica"/>
+              </a:rPr>
+              <a:t>declaration</a:t>
+            </a:r>
           </a:p>
         </p:txBody>
       </p:sp>
     </p:spTree>
     <p:extLst>
       <p:ext uri="{BB962C8B-B14F-4D97-AF65-F5344CB8AC3E}">
-        <p14:creationId xmlns:p14="http://schemas.microsoft.com/office/powerpoint/2010/main" val="399374513"/>
+        <p14:creationId xmlns:p14="http://schemas.microsoft.com/office/powerpoint/2010/main" val="1838928384"/>
       </p:ext>
     </p:extLst>
   </p:cSld>
@@ -9769,30 +10984,14 @@
           <a:p>
             <a:r>
               <a:rPr lang="en-US" dirty="0" smtClean="0"/>
-              <a:t>VECTO Engine – </a:t>
-            </a:r>
-            <a:r>
-              <a:rPr lang="en-US" dirty="0" smtClean="0"/>
-              <a:t>E</a:t>
-            </a:r>
-            <a:r>
-              <a:rPr lang="en-US" dirty="0" smtClean="0"/>
-              <a:t>valuation algorithms</a:t>
+              <a:t>VECTO Engine – Evaluation algorithms</a:t>
             </a:r>
             <a:br>
               <a:rPr lang="en-US" dirty="0" smtClean="0"/>
             </a:br>
             <a:r>
               <a:rPr lang="en-US" dirty="0" smtClean="0"/>
-              <a:t>performed </a:t>
-            </a:r>
-            <a:r>
-              <a:rPr lang="en-US" dirty="0" smtClean="0"/>
-              <a:t>(</a:t>
-            </a:r>
-            <a:r>
-              <a:rPr lang="en-US" dirty="0" smtClean="0"/>
-              <a:t>p2/5)</a:t>
+              <a:t>performed (p1/2)</a:t>
             </a:r>
             <a:endParaRPr lang="en-US" dirty="0"/>
           </a:p>
@@ -9807,7 +11006,7 @@
         <p:spPr>
           <a:xfrm>
             <a:off x="179512" y="1268760"/>
-            <a:ext cx="8784000" cy="4401205"/>
+            <a:ext cx="8784000" cy="630942"/>
           </a:xfrm>
           <a:prstGeom prst="rect">
             <a:avLst/>
@@ -9819,200 +11018,33 @@
           </a:bodyPr>
           <a:lstStyle/>
           <a:p>
-            <a:pPr algn="l"/>
-            <a:r>
-              <a:rPr lang="en-GB" sz="1400" b="0" dirty="0"/>
-              <a:t>4.	Simulation of FC and cycle work over WHTC and respective subparts for actual engine </a:t>
-            </a:r>
-            <a:r>
-              <a:rPr lang="en-GB" sz="1400" b="0" dirty="0" smtClean="0"/>
-              <a:t>for</a:t>
-            </a:r>
-            <a:br>
-              <a:rPr lang="en-GB" sz="1400" b="0" dirty="0" smtClean="0"/>
-            </a:br>
-            <a:r>
-              <a:rPr lang="en-GB" sz="1400" b="0" dirty="0" smtClean="0"/>
-              <a:t>	certification</a:t>
-            </a:r>
-            <a:endParaRPr lang="de-AT" sz="1400" b="0" dirty="0"/>
-          </a:p>
-          <a:p>
-            <a:pPr algn="l"/>
-            <a:r>
-              <a:rPr lang="en-GB" sz="1400" b="0" dirty="0"/>
-              <a:t>4.1.	WHTC reference points are </a:t>
-            </a:r>
-            <a:r>
-              <a:rPr lang="en-GB" sz="1400" b="0" dirty="0" err="1"/>
-              <a:t>denormalized</a:t>
-            </a:r>
-            <a:r>
-              <a:rPr lang="en-GB" sz="1400" b="0" dirty="0"/>
-              <a:t> using the full load curve input in originally </a:t>
-            </a:r>
-            <a:r>
-              <a:rPr lang="en-GB" sz="1400" b="0" dirty="0" smtClean="0"/>
-              <a:t>recorded</a:t>
-            </a:r>
-            <a:br>
-              <a:rPr lang="en-GB" sz="1400" b="0" dirty="0" smtClean="0"/>
-            </a:br>
-            <a:r>
-              <a:rPr lang="en-GB" sz="1400" b="0" dirty="0" smtClean="0"/>
-              <a:t>	resolution</a:t>
-            </a:r>
-            <a:endParaRPr lang="de-AT" sz="1400" b="0" dirty="0"/>
-          </a:p>
-          <a:p>
-            <a:pPr algn="l"/>
-            <a:r>
-              <a:rPr lang="en-GB" sz="1400" b="0" dirty="0"/>
-              <a:t>4.2.	FC is calculated for WHTC </a:t>
-            </a:r>
-            <a:r>
-              <a:rPr lang="en-GB" sz="1400" b="0" dirty="0" err="1"/>
-              <a:t>denormalized</a:t>
-            </a:r>
-            <a:r>
-              <a:rPr lang="en-GB" sz="1400" b="0" dirty="0"/>
-              <a:t> reference values for engine speed and torque </a:t>
-            </a:r>
-            <a:r>
-              <a:rPr lang="en-GB" sz="1400" b="0" dirty="0" smtClean="0"/>
-              <a:t>from</a:t>
-            </a:r>
-            <a:br>
-              <a:rPr lang="en-GB" sz="1400" b="0" dirty="0" smtClean="0"/>
-            </a:br>
-            <a:r>
-              <a:rPr lang="en-GB" sz="1400" b="0" dirty="0" smtClean="0"/>
-              <a:t>	</a:t>
-            </a:r>
-            <a:r>
-              <a:rPr lang="en-GB" sz="1400" b="0" dirty="0" err="1" smtClean="0"/>
-              <a:t>subpoint</a:t>
-            </a:r>
-            <a:r>
-              <a:rPr lang="en-GB" sz="1400" b="0" dirty="0" smtClean="0"/>
-              <a:t> </a:t>
-            </a:r>
-            <a:r>
-              <a:rPr lang="en-GB" sz="1400" b="0" dirty="0"/>
-              <a:t>4.1</a:t>
-            </a:r>
-            <a:endParaRPr lang="de-AT" sz="1400" b="0" dirty="0"/>
-          </a:p>
-          <a:p>
-            <a:pPr algn="l"/>
-            <a:r>
-              <a:rPr lang="en-GB" sz="1400" b="0" dirty="0"/>
-              <a:t>4.3.	FC is calculated with engine inertia set to 0</a:t>
-            </a:r>
-            <a:endParaRPr lang="de-AT" sz="1400" b="0" dirty="0"/>
-          </a:p>
-          <a:p>
-            <a:pPr algn="l"/>
-            <a:r>
-              <a:rPr lang="en-GB" sz="1400" b="0" dirty="0"/>
-              <a:t>4.4.	FC is calculated with standard PT1-function (as in main vehicle simulation) for engine </a:t>
-            </a:r>
-            <a:r>
-              <a:rPr lang="en-GB" sz="1400" b="0" dirty="0" smtClean="0"/>
-              <a:t>torque</a:t>
-            </a:r>
-            <a:br>
-              <a:rPr lang="en-GB" sz="1400" b="0" dirty="0" smtClean="0"/>
-            </a:br>
-            <a:r>
-              <a:rPr lang="en-GB" sz="1400" b="0" dirty="0" smtClean="0"/>
-              <a:t>	response </a:t>
-            </a:r>
-            <a:r>
-              <a:rPr lang="en-GB" sz="1400" b="0" dirty="0"/>
-              <a:t>active</a:t>
-            </a:r>
-            <a:endParaRPr lang="de-AT" sz="1400" b="0" dirty="0"/>
-          </a:p>
-          <a:p>
-            <a:pPr algn="l"/>
-            <a:r>
-              <a:rPr lang="en-GB" sz="1400" b="0" dirty="0"/>
-              <a:t>4.5.	FC for all motoring points is set to 0</a:t>
-            </a:r>
-            <a:endParaRPr lang="de-AT" sz="1400" b="0" dirty="0"/>
-          </a:p>
-          <a:p>
-            <a:pPr algn="l"/>
-            <a:r>
-              <a:rPr lang="en-GB" sz="1400" b="0" dirty="0"/>
-              <a:t>4.6.	FC for all non-motoring engine operation points is calculated from FC map by </a:t>
-            </a:r>
-            <a:r>
-              <a:rPr lang="en-GB" sz="1400" b="0" dirty="0" smtClean="0"/>
-              <a:t>Delaunay</a:t>
-            </a:r>
-            <a:br>
-              <a:rPr lang="en-GB" sz="1400" b="0" dirty="0" smtClean="0"/>
-            </a:br>
-            <a:r>
-              <a:rPr lang="en-GB" sz="1400" b="0" dirty="0" smtClean="0"/>
-              <a:t>	interpolation </a:t>
-            </a:r>
-            <a:r>
-              <a:rPr lang="en-GB" sz="1400" b="0" dirty="0"/>
-              <a:t>method (as in main vehicle simulation)</a:t>
-            </a:r>
-            <a:endParaRPr lang="de-AT" sz="1400" b="0" dirty="0"/>
-          </a:p>
-          <a:p>
-            <a:pPr algn="l"/>
-            <a:r>
-              <a:rPr lang="en-GB" sz="1400" b="0" dirty="0"/>
-              <a:t>4.7.	Cycle work and FC are calculated according to equations defined in paragraphs 5.1 and 5.2 </a:t>
-            </a:r>
-            <a:r>
-              <a:rPr lang="en-GB" sz="1400" b="0" dirty="0" smtClean="0"/>
-              <a:t>of</a:t>
-            </a:r>
-            <a:br>
-              <a:rPr lang="en-GB" sz="1400" b="0" dirty="0" smtClean="0"/>
-            </a:br>
-            <a:r>
-              <a:rPr lang="en-GB" sz="1400" b="0" dirty="0" smtClean="0"/>
-              <a:t>	this Annex</a:t>
-            </a:r>
-            <a:endParaRPr lang="de-AT" sz="1400" b="0" dirty="0"/>
-          </a:p>
-          <a:p>
-            <a:pPr algn="l"/>
-            <a:r>
-              <a:rPr lang="en-GB" sz="1400" b="0" dirty="0"/>
-              <a:t>4.8.	Simulated specific FC values are calculated analogous to equations defined in paragraphs </a:t>
-            </a:r>
-            <a:r>
-              <a:rPr lang="en-GB" sz="1400" b="0" dirty="0" smtClean="0"/>
-              <a:t>5.3.1</a:t>
-            </a:r>
-            <a:br>
-              <a:rPr lang="en-GB" sz="1400" b="0" dirty="0" smtClean="0"/>
-            </a:br>
-            <a:r>
-              <a:rPr lang="en-GB" sz="1400" b="0" dirty="0" smtClean="0"/>
-              <a:t>	and </a:t>
-            </a:r>
-            <a:r>
-              <a:rPr lang="en-GB" sz="1400" b="0" dirty="0"/>
-              <a:t>5.3.2 of this Annex for measured values</a:t>
-            </a:r>
-            <a:endParaRPr lang="de-AT" sz="1400" b="0" dirty="0"/>
+            <a:pPr indent="-936000" algn="l"/>
+            <a:r>
+              <a:rPr lang="en-US" sz="1400" b="0" dirty="0"/>
+              <a:t>For a detailed description of all operations performed during data evaluation please refer </a:t>
+            </a:r>
+            <a:r>
+              <a:rPr lang="en-US" sz="1400" b="0" dirty="0" smtClean="0"/>
+              <a:t>to</a:t>
+            </a:r>
+          </a:p>
+          <a:p>
+            <a:pPr indent="-936000" algn="l"/>
+            <a:r>
+              <a:rPr lang="en-US" sz="1400" b="0" dirty="0" smtClean="0"/>
+              <a:t>Appendix </a:t>
+            </a:r>
+            <a:r>
+              <a:rPr lang="en-US" sz="1400" b="0" dirty="0"/>
+              <a:t>8 to Annex V of COMMISSION REGULATION (EU) 2017/2400</a:t>
+            </a:r>
           </a:p>
         </p:txBody>
       </p:sp>
     </p:spTree>
     <p:extLst>
       <p:ext uri="{BB962C8B-B14F-4D97-AF65-F5344CB8AC3E}">
-        <p14:creationId xmlns:p14="http://schemas.microsoft.com/office/powerpoint/2010/main" val="3255184177"/>
+        <p14:creationId xmlns:p14="http://schemas.microsoft.com/office/powerpoint/2010/main" val="399374513"/>
       </p:ext>
     </p:extLst>
   </p:cSld>
@@ -10068,30 +11100,14 @@
           <a:p>
             <a:r>
               <a:rPr lang="en-US" dirty="0" smtClean="0"/>
-              <a:t>VECTO Engine – </a:t>
-            </a:r>
-            <a:r>
-              <a:rPr lang="en-US" dirty="0" smtClean="0"/>
-              <a:t>E</a:t>
-            </a:r>
-            <a:r>
-              <a:rPr lang="en-US" dirty="0" smtClean="0"/>
-              <a:t>valuation algorithms</a:t>
+              <a:t>VECTO Engine – Evaluation algorithms</a:t>
             </a:r>
             <a:br>
               <a:rPr lang="en-US" dirty="0" smtClean="0"/>
             </a:br>
             <a:r>
               <a:rPr lang="en-US" dirty="0" smtClean="0"/>
-              <a:t>performed </a:t>
-            </a:r>
-            <a:r>
-              <a:rPr lang="en-US" dirty="0" smtClean="0"/>
-              <a:t>(</a:t>
-            </a:r>
-            <a:r>
-              <a:rPr lang="en-US" dirty="0" smtClean="0"/>
-              <a:t>p3/5)</a:t>
+              <a:t>performed (p2/2)</a:t>
             </a:r>
             <a:endParaRPr lang="en-US" dirty="0"/>
           </a:p>
@@ -10105,8 +11121,8 @@
         </p:nvSpPr>
         <p:spPr>
           <a:xfrm>
-            <a:off x="179512" y="1268760"/>
-            <a:ext cx="8784000" cy="3647152"/>
+            <a:off x="360000" y="1268760"/>
+            <a:ext cx="8388000" cy="338554"/>
           </a:xfrm>
           <a:prstGeom prst="rect">
             <a:avLst/>
@@ -10120,259 +11136,47 @@
           <a:p>
             <a:pPr algn="l"/>
             <a:r>
-              <a:rPr lang="en-GB" sz="1400" b="0" dirty="0"/>
-              <a:t>5.	Calculation of WHTC correction factors</a:t>
-            </a:r>
-            <a:endParaRPr lang="de-AT" sz="1400" b="0" dirty="0"/>
-          </a:p>
-          <a:p>
-            <a:pPr algn="l"/>
-            <a:r>
-              <a:rPr lang="en-GB" sz="1400" b="0" dirty="0"/>
-              <a:t>5.1.	Measured values from input to pre-processing tool and simulated values from point (4) are used </a:t>
-            </a:r>
-            <a:r>
-              <a:rPr lang="en-GB" sz="1400" b="0" dirty="0" smtClean="0"/>
-              <a:t>in</a:t>
-            </a:r>
-            <a:br>
-              <a:rPr lang="en-GB" sz="1400" b="0" dirty="0" smtClean="0"/>
-            </a:br>
-            <a:r>
-              <a:rPr lang="en-GB" sz="1400" b="0" dirty="0" smtClean="0"/>
-              <a:t>	accordance </a:t>
-            </a:r>
-            <a:r>
-              <a:rPr lang="en-GB" sz="1400" b="0" dirty="0"/>
-              <a:t>with the equations in points (5.2) to (5.4)</a:t>
-            </a:r>
-            <a:endParaRPr lang="de-AT" sz="1400" b="0" dirty="0"/>
-          </a:p>
-          <a:p>
-            <a:pPr algn="l"/>
-            <a:r>
-              <a:rPr lang="en-GB" sz="1400" b="0" dirty="0"/>
-              <a:t>5.2.	</a:t>
-            </a:r>
-            <a:r>
-              <a:rPr lang="en-GB" sz="1400" b="0" dirty="0" err="1"/>
-              <a:t>CF</a:t>
-            </a:r>
-            <a:r>
-              <a:rPr lang="en-GB" sz="1400" b="0" baseline="-25000" dirty="0" err="1"/>
-              <a:t>Urban</a:t>
-            </a:r>
-            <a:r>
-              <a:rPr lang="en-GB" sz="1400" b="0" dirty="0"/>
-              <a:t> = </a:t>
-            </a:r>
-            <a:r>
-              <a:rPr lang="en-GB" sz="1400" b="0" dirty="0" err="1"/>
-              <a:t>SFCmeas,</a:t>
-            </a:r>
-            <a:r>
-              <a:rPr lang="en-GB" sz="1400" b="0" baseline="-25000" dirty="0" err="1"/>
-              <a:t>Urban</a:t>
-            </a:r>
-            <a:r>
-              <a:rPr lang="en-GB" sz="1400" b="0" dirty="0"/>
-              <a:t> / </a:t>
-            </a:r>
-            <a:r>
-              <a:rPr lang="en-GB" sz="1400" b="0" dirty="0" err="1"/>
-              <a:t>SFCsimu,</a:t>
-            </a:r>
-            <a:r>
-              <a:rPr lang="en-GB" sz="1400" b="0" baseline="-25000" dirty="0" err="1"/>
-              <a:t>Urban</a:t>
-            </a:r>
-            <a:endParaRPr lang="de-AT" sz="1400" b="0" dirty="0"/>
-          </a:p>
-          <a:p>
-            <a:pPr algn="l"/>
-            <a:r>
-              <a:rPr lang="en-GB" sz="1400" b="0" dirty="0"/>
-              <a:t>5.3.	</a:t>
-            </a:r>
-            <a:r>
-              <a:rPr lang="en-GB" sz="1400" b="0" dirty="0" err="1"/>
-              <a:t>CF</a:t>
-            </a:r>
-            <a:r>
-              <a:rPr lang="en-GB" sz="1400" b="0" baseline="-25000" dirty="0" err="1"/>
-              <a:t>Rural</a:t>
-            </a:r>
-            <a:r>
-              <a:rPr lang="en-GB" sz="1400" b="0" dirty="0"/>
-              <a:t> = </a:t>
-            </a:r>
-            <a:r>
-              <a:rPr lang="en-GB" sz="1400" b="0" dirty="0" err="1"/>
-              <a:t>SFCmeas,</a:t>
-            </a:r>
-            <a:r>
-              <a:rPr lang="en-GB" sz="1400" b="0" baseline="-25000" dirty="0" err="1"/>
-              <a:t>Rural</a:t>
-            </a:r>
-            <a:r>
-              <a:rPr lang="en-GB" sz="1400" b="0" dirty="0"/>
-              <a:t> / </a:t>
-            </a:r>
-            <a:r>
-              <a:rPr lang="en-GB" sz="1400" b="0" dirty="0" err="1"/>
-              <a:t>SFCsimu,</a:t>
-            </a:r>
-            <a:r>
-              <a:rPr lang="en-GB" sz="1400" b="0" baseline="-25000" dirty="0" err="1"/>
-              <a:t>Rural</a:t>
-            </a:r>
-            <a:endParaRPr lang="de-AT" sz="1400" b="0" dirty="0"/>
-          </a:p>
-          <a:p>
-            <a:pPr algn="l"/>
-            <a:r>
-              <a:rPr lang="en-GB" sz="1400" b="0" dirty="0"/>
-              <a:t>5.4.	CF</a:t>
-            </a:r>
-            <a:r>
-              <a:rPr lang="en-GB" sz="1400" b="0" baseline="-25000" dirty="0"/>
-              <a:t>MW</a:t>
-            </a:r>
-            <a:r>
-              <a:rPr lang="en-GB" sz="1400" b="0" dirty="0"/>
-              <a:t> = </a:t>
-            </a:r>
-            <a:r>
-              <a:rPr lang="en-GB" sz="1400" b="0" dirty="0" err="1"/>
-              <a:t>SFCmeas,</a:t>
-            </a:r>
-            <a:r>
-              <a:rPr lang="en-GB" sz="1400" b="0" baseline="-25000" dirty="0" err="1"/>
-              <a:t>MW</a:t>
-            </a:r>
-            <a:r>
-              <a:rPr lang="en-GB" sz="1400" b="0" dirty="0"/>
-              <a:t> / </a:t>
-            </a:r>
-            <a:r>
-              <a:rPr lang="en-GB" sz="1400" b="0" dirty="0" err="1"/>
-              <a:t>SFCsimu,</a:t>
-            </a:r>
-            <a:r>
-              <a:rPr lang="en-GB" sz="1400" b="0" baseline="-25000" dirty="0" err="1"/>
-              <a:t>MW</a:t>
-            </a:r>
-            <a:endParaRPr lang="de-AT" sz="1400" b="0" dirty="0"/>
-          </a:p>
-          <a:p>
-            <a:pPr algn="l"/>
-            <a:r>
-              <a:rPr lang="en-GB" sz="1400" b="0" dirty="0"/>
-              <a:t>5.5.	In case that the calculated value for a correction factor is lower than 1, the respective </a:t>
-            </a:r>
-            <a:r>
-              <a:rPr lang="en-GB" sz="1400" b="0" dirty="0" smtClean="0"/>
-              <a:t>correction</a:t>
-            </a:r>
-            <a:br>
-              <a:rPr lang="en-GB" sz="1400" b="0" dirty="0" smtClean="0"/>
-            </a:br>
-            <a:r>
-              <a:rPr lang="en-GB" sz="1400" b="0" dirty="0" smtClean="0"/>
-              <a:t>	factor </a:t>
-            </a:r>
-            <a:r>
-              <a:rPr lang="en-GB" sz="1400" b="0" dirty="0"/>
-              <a:t>is set to 1</a:t>
-            </a:r>
-            <a:endParaRPr lang="de-AT" sz="1400" b="0" dirty="0"/>
-          </a:p>
-          <a:p>
-            <a:pPr algn="l"/>
-            <a:r>
-              <a:rPr lang="en-GB" sz="1400" b="0" dirty="0"/>
-              <a:t>6.	Calculation of cold-hot emission balancing factor</a:t>
-            </a:r>
-            <a:endParaRPr lang="de-AT" sz="1400" b="0" dirty="0"/>
-          </a:p>
-          <a:p>
-            <a:pPr algn="l"/>
-            <a:r>
-              <a:rPr lang="en-GB" sz="1400" b="0" dirty="0"/>
-              <a:t>6.1.	This factor is calculated in accordance with the equation in point (6.2)</a:t>
-            </a:r>
-            <a:endParaRPr lang="de-AT" sz="1400" b="0" dirty="0"/>
-          </a:p>
-          <a:p>
-            <a:pPr algn="l"/>
-            <a:r>
-              <a:rPr lang="en-GB" sz="1400" b="0" dirty="0"/>
-              <a:t>6.2.	</a:t>
-            </a:r>
-            <a:r>
-              <a:rPr lang="en-GB" sz="1400" b="0" dirty="0" err="1"/>
-              <a:t>BF</a:t>
-            </a:r>
-            <a:r>
-              <a:rPr lang="en-GB" sz="1400" b="0" baseline="-25000" dirty="0" err="1"/>
-              <a:t>cold</a:t>
-            </a:r>
-            <a:r>
-              <a:rPr lang="en-GB" sz="1400" b="0" baseline="-25000" dirty="0"/>
-              <a:t>-hot</a:t>
-            </a:r>
-            <a:r>
-              <a:rPr lang="en-GB" sz="1400" b="0" dirty="0"/>
-              <a:t> = 1 + 0.1 x (</a:t>
-            </a:r>
-            <a:r>
-              <a:rPr lang="en-GB" sz="1400" b="0" dirty="0" err="1"/>
-              <a:t>SFC</a:t>
-            </a:r>
-            <a:r>
-              <a:rPr lang="en-GB" sz="1400" b="0" baseline="-25000" dirty="0" err="1"/>
-              <a:t>meas,cold</a:t>
-            </a:r>
-            <a:r>
-              <a:rPr lang="en-GB" sz="1400" b="0" dirty="0"/>
-              <a:t> – </a:t>
-            </a:r>
-            <a:r>
-              <a:rPr lang="en-GB" sz="1400" b="0" dirty="0" err="1"/>
-              <a:t>SFC</a:t>
-            </a:r>
-            <a:r>
-              <a:rPr lang="en-GB" sz="1400" b="0" baseline="-25000" dirty="0" err="1"/>
-              <a:t>meas,hot</a:t>
-            </a:r>
-            <a:r>
-              <a:rPr lang="en-GB" sz="1400" b="0" dirty="0"/>
-              <a:t>) / </a:t>
-            </a:r>
-            <a:r>
-              <a:rPr lang="en-GB" sz="1400" b="0" dirty="0" err="1"/>
-              <a:t>SFC</a:t>
-            </a:r>
-            <a:r>
-              <a:rPr lang="en-GB" sz="1400" b="0" baseline="-25000" dirty="0" err="1"/>
-              <a:t>meas,hot</a:t>
-            </a:r>
-            <a:endParaRPr lang="de-AT" sz="1400" b="0" dirty="0"/>
-          </a:p>
-          <a:p>
-            <a:pPr algn="l"/>
-            <a:r>
-              <a:rPr lang="en-GB" sz="1400" b="0" dirty="0"/>
-              <a:t>6.3.	In case that the calculated value for this factor is lower than 1, the factor is set to 1</a:t>
-            </a:r>
-            <a:endParaRPr lang="de-AT" sz="1400" b="0" dirty="0"/>
+              <a:rPr lang="en-US" b="0" dirty="0">
+                <a:latin typeface="Helvetica" panose="020B0604020202020204" pitchFamily="34" charset="0"/>
+                <a:cs typeface="Helvetica" panose="020B0604020202020204" pitchFamily="34" charset="0"/>
+              </a:rPr>
+              <a:t>Example of data processing through VECTO Engine for FC map</a:t>
+            </a:r>
+            <a:endParaRPr lang="de-AT" b="0" dirty="0">
+              <a:latin typeface="Helvetica" panose="020B0604020202020204" pitchFamily="34" charset="0"/>
+              <a:cs typeface="Helvetica" panose="020B0604020202020204" pitchFamily="34" charset="0"/>
+            </a:endParaRPr>
           </a:p>
         </p:txBody>
       </p:sp>
+      <p:pic>
+        <p:nvPicPr>
+          <p:cNvPr id="4" name="Grafik 3"/>
+          <p:cNvPicPr>
+            <a:picLocks noChangeAspect="1"/>
+          </p:cNvPicPr>
+          <p:nvPr/>
+        </p:nvPicPr>
+        <p:blipFill>
+          <a:blip r:embed="rId3"/>
+          <a:stretch>
+            <a:fillRect/>
+          </a:stretch>
+        </p:blipFill>
+        <p:spPr>
+          <a:xfrm>
+            <a:off x="468000" y="1751330"/>
+            <a:ext cx="8554438" cy="3981926"/>
+          </a:xfrm>
+          <a:prstGeom prst="rect">
+            <a:avLst/>
+          </a:prstGeom>
+        </p:spPr>
+      </p:pic>
     </p:spTree>
     <p:extLst>
       <p:ext uri="{BB962C8B-B14F-4D97-AF65-F5344CB8AC3E}">
-        <p14:creationId xmlns:p14="http://schemas.microsoft.com/office/powerpoint/2010/main" val="4077340661"/>
+        <p14:creationId xmlns:p14="http://schemas.microsoft.com/office/powerpoint/2010/main" val="759407332"/>
       </p:ext>
     </p:extLst>
   </p:cSld>
@@ -10418,40 +11222,31 @@
         </p:nvSpPr>
         <p:spPr>
           <a:xfrm>
-            <a:off x="468000" y="153844"/>
-            <a:ext cx="7632848" cy="756000"/>
+            <a:off x="468000" y="97200"/>
+            <a:ext cx="7886700" cy="576000"/>
           </a:xfrm>
         </p:spPr>
         <p:txBody>
-          <a:bodyPr anchor="t" anchorCtr="0"/>
+          <a:bodyPr anchor="ctr" anchorCtr="0">
+            <a:normAutofit/>
+          </a:bodyPr>
           <a:lstStyle/>
           <a:p>
             <a:r>
+              <a:rPr lang="en-US" dirty="0"/>
+              <a:t>VECTO </a:t>
+            </a:r>
+            <a:r>
               <a:rPr lang="en-US" dirty="0" smtClean="0"/>
-              <a:t>VECTO Engine – </a:t>
+              <a:t>Engine </a:t>
+            </a:r>
+            <a:r>
+              <a:rPr lang="en-US" dirty="0"/>
+              <a:t>– Further important </a:t>
             </a:r>
             <a:r>
               <a:rPr lang="en-US" dirty="0" smtClean="0"/>
-              <a:t>E</a:t>
-            </a:r>
-            <a:r>
-              <a:rPr lang="en-US" dirty="0" smtClean="0"/>
-              <a:t>valuation algorithms</a:t>
-            </a:r>
-            <a:br>
-              <a:rPr lang="en-US" dirty="0" smtClean="0"/>
-            </a:br>
-            <a:r>
-              <a:rPr lang="en-US" dirty="0" smtClean="0"/>
-              <a:t>performed </a:t>
-            </a:r>
-            <a:r>
-              <a:rPr lang="en-US" dirty="0" smtClean="0"/>
-              <a:t>(</a:t>
-            </a:r>
-            <a:r>
-              <a:rPr lang="en-US" dirty="0" smtClean="0"/>
-              <a:t>p4/5)</a:t>
+              <a:t>remarks</a:t>
             </a:r>
             <a:endParaRPr lang="en-US" dirty="0"/>
           </a:p>
@@ -10459,314 +11254,294 @@
       </p:sp>
       <p:sp>
         <p:nvSpPr>
-          <p:cNvPr id="3" name="Rechteck 2"/>
-          <p:cNvSpPr/>
+          <p:cNvPr id="3" name="Textfeld 2"/>
+          <p:cNvSpPr txBox="1"/>
           <p:nvPr/>
         </p:nvSpPr>
         <p:spPr>
           <a:xfrm>
-            <a:off x="179512" y="1268760"/>
-            <a:ext cx="8784000" cy="4508927"/>
+            <a:off x="467544" y="1267200"/>
+            <a:ext cx="8280920" cy="3754874"/>
           </a:xfrm>
           <a:prstGeom prst="rect">
             <a:avLst/>
           </a:prstGeom>
+          <a:noFill/>
         </p:spPr>
         <p:txBody>
-          <a:bodyPr wrap="square">
+          <a:bodyPr wrap="square" rtlCol="0">
             <a:spAutoFit/>
           </a:bodyPr>
           <a:lstStyle/>
           <a:p>
-            <a:pPr algn="l"/>
-            <a:r>
-              <a:rPr lang="en-GB" sz="1400" b="0" dirty="0"/>
-              <a:t>7.	Correction of FC values in FC map to standard NCV</a:t>
-            </a:r>
-            <a:endParaRPr lang="de-AT" sz="1400" b="0" dirty="0"/>
-          </a:p>
-          <a:p>
-            <a:pPr algn="l"/>
-            <a:r>
-              <a:rPr lang="en-GB" sz="1400" b="0" dirty="0"/>
-              <a:t>7.1.	This correction is performed in accordance with the equation in point (7.2)</a:t>
-            </a:r>
-            <a:endParaRPr lang="de-AT" sz="1400" b="0" dirty="0"/>
-          </a:p>
-          <a:p>
-            <a:pPr algn="l"/>
-            <a:r>
-              <a:rPr lang="en-GB" sz="1400" b="0" dirty="0"/>
-              <a:t>7.2.	</a:t>
-            </a:r>
-            <a:r>
-              <a:rPr lang="en-GB" sz="1400" b="0" dirty="0" err="1"/>
-              <a:t>FC</a:t>
-            </a:r>
-            <a:r>
-              <a:rPr lang="en-GB" sz="1400" b="0" baseline="-25000" dirty="0" err="1"/>
-              <a:t>corrected</a:t>
-            </a:r>
-            <a:r>
-              <a:rPr lang="en-GB" sz="1400" b="0" dirty="0"/>
-              <a:t> = </a:t>
-            </a:r>
-            <a:r>
-              <a:rPr lang="en-GB" sz="1400" b="0" dirty="0" err="1"/>
-              <a:t>FC</a:t>
-            </a:r>
-            <a:r>
-              <a:rPr lang="en-GB" sz="1400" b="0" baseline="-25000" dirty="0" err="1"/>
-              <a:t>measured,map</a:t>
-            </a:r>
-            <a:r>
-              <a:rPr lang="en-GB" sz="1400" b="0" dirty="0"/>
-              <a:t> x </a:t>
-            </a:r>
-            <a:r>
-              <a:rPr lang="en-GB" sz="1400" b="0" dirty="0" err="1"/>
-              <a:t>NCV</a:t>
-            </a:r>
-            <a:r>
-              <a:rPr lang="en-GB" sz="1400" b="0" baseline="-25000" dirty="0" err="1"/>
-              <a:t>meas</a:t>
-            </a:r>
-            <a:r>
-              <a:rPr lang="en-GB" sz="1400" b="0" dirty="0"/>
-              <a:t> / </a:t>
-            </a:r>
-            <a:r>
-              <a:rPr lang="en-GB" sz="1400" b="0" dirty="0" err="1"/>
-              <a:t>NVC</a:t>
-            </a:r>
-            <a:r>
-              <a:rPr lang="en-GB" sz="1400" b="0" baseline="-25000" dirty="0" err="1"/>
-              <a:t>std</a:t>
-            </a:r>
-            <a:endParaRPr lang="de-AT" sz="1400" b="0" dirty="0"/>
-          </a:p>
-          <a:p>
-            <a:pPr algn="l"/>
-            <a:r>
-              <a:rPr lang="en-GB" sz="1400" b="0" dirty="0"/>
-              <a:t>7.3.	</a:t>
-            </a:r>
-            <a:r>
-              <a:rPr lang="en-GB" sz="1400" b="0" dirty="0" err="1"/>
-              <a:t>FC</a:t>
-            </a:r>
-            <a:r>
-              <a:rPr lang="en-GB" sz="1400" b="0" baseline="-25000" dirty="0" err="1"/>
-              <a:t>measured,map</a:t>
-            </a:r>
-            <a:r>
-              <a:rPr lang="en-GB" sz="1400" b="0" dirty="0"/>
-              <a:t> shall be the FC value in the FC map input data processed in accordance with point (3)</a:t>
-            </a:r>
-            <a:endParaRPr lang="de-AT" sz="1400" b="0" dirty="0"/>
-          </a:p>
-          <a:p>
-            <a:pPr algn="l"/>
-            <a:r>
-              <a:rPr lang="en-GB" sz="1400" b="0" dirty="0"/>
-              <a:t>7.4.	</a:t>
-            </a:r>
-            <a:r>
-              <a:rPr lang="en-GB" sz="1400" b="0" dirty="0" err="1"/>
-              <a:t>NCV</a:t>
-            </a:r>
-            <a:r>
-              <a:rPr lang="en-GB" sz="1400" b="0" baseline="-25000" dirty="0" err="1"/>
-              <a:t>meas</a:t>
-            </a:r>
-            <a:r>
-              <a:rPr lang="en-GB" sz="1400" b="0" dirty="0"/>
-              <a:t> and </a:t>
-            </a:r>
-            <a:r>
-              <a:rPr lang="en-GB" sz="1400" b="0" dirty="0" err="1"/>
-              <a:t>NVC</a:t>
-            </a:r>
-            <a:r>
-              <a:rPr lang="en-GB" sz="1400" b="0" baseline="-25000" dirty="0" err="1"/>
-              <a:t>std</a:t>
-            </a:r>
-            <a:r>
-              <a:rPr lang="en-GB" sz="1400" b="0" dirty="0"/>
-              <a:t> shall be defined in accordance with paragraph 5.3.3.1 of this Annex</a:t>
-            </a:r>
-            <a:endParaRPr lang="de-AT" sz="1400" b="0" dirty="0"/>
-          </a:p>
-          <a:p>
-            <a:pPr algn="l"/>
-            <a:r>
-              <a:rPr lang="en-GB" sz="1400" b="0" dirty="0"/>
-              <a:t>7.5.	In the case that reference fuel of the type B7 (Diesel / CI) in accordance with paragraph 3.2 of </a:t>
-            </a:r>
-            <a:r>
-              <a:rPr lang="en-GB" sz="1400" b="0" dirty="0" smtClean="0"/>
-              <a:t>this</a:t>
+            <a:pPr marL="342900" indent="-342900" algn="l">
+              <a:lnSpc>
+                <a:spcPct val="115000"/>
+              </a:lnSpc>
+              <a:spcBef>
+                <a:spcPts val="600"/>
+              </a:spcBef>
+              <a:buFont typeface="Wingdings" panose="05000000000000000000" pitchFamily="2" charset="2"/>
+              <a:buChar char="§"/>
+            </a:pPr>
+            <a:r>
+              <a:rPr lang="en-US" b="0" dirty="0" smtClean="0">
+                <a:latin typeface="Helvetica" panose="020B0604020202020204" pitchFamily="34" charset="0"/>
+                <a:ea typeface="Times" panose="02020603060405020304" pitchFamily="18" charset="0"/>
+                <a:cs typeface="Helvetica" panose="020B0604020202020204" pitchFamily="34" charset="0"/>
+              </a:rPr>
+              <a:t>Messages </a:t>
+            </a:r>
+            <a:r>
+              <a:rPr lang="en-US" b="0" dirty="0">
+                <a:latin typeface="Helvetica" panose="020B0604020202020204" pitchFamily="34" charset="0"/>
+                <a:ea typeface="Times" panose="02020603060405020304" pitchFamily="18" charset="0"/>
+                <a:cs typeface="Helvetica" panose="020B0604020202020204" pitchFamily="34" charset="0"/>
+              </a:rPr>
+              <a:t>displayed</a:t>
+            </a:r>
+          </a:p>
+          <a:p>
+            <a:pPr marL="800100" lvl="1" indent="-342900" algn="l">
+              <a:lnSpc>
+                <a:spcPct val="115000"/>
+              </a:lnSpc>
+              <a:spcBef>
+                <a:spcPts val="600"/>
+              </a:spcBef>
+              <a:buFont typeface="Wingdings" panose="05000000000000000000" pitchFamily="2" charset="2"/>
+              <a:buChar char="§"/>
+            </a:pPr>
+            <a:r>
+              <a:rPr lang="en-US" sz="1400" b="0" dirty="0">
+                <a:latin typeface="Helvetica" panose="020B0604020202020204" pitchFamily="34" charset="0"/>
+                <a:ea typeface="Times" panose="02020603060405020304" pitchFamily="18" charset="0"/>
+                <a:cs typeface="Helvetica" panose="020B0604020202020204" pitchFamily="34" charset="0"/>
+              </a:rPr>
+              <a:t>Clear explanations for all relevant errors (ref. to regulation or indication of </a:t>
+            </a:r>
+            <a:r>
+              <a:rPr lang="en-US" sz="1400" b="0" dirty="0" err="1">
+                <a:latin typeface="Helvetica" panose="020B0604020202020204" pitchFamily="34" charset="0"/>
+                <a:ea typeface="Times" panose="02020603060405020304" pitchFamily="18" charset="0"/>
+                <a:cs typeface="Helvetica" panose="020B0604020202020204" pitchFamily="34" charset="0"/>
+              </a:rPr>
+              <a:t>datapoint</a:t>
+            </a:r>
+            <a:r>
+              <a:rPr lang="en-US" sz="1400" b="0" dirty="0">
+                <a:latin typeface="Helvetica" panose="020B0604020202020204" pitchFamily="34" charset="0"/>
+                <a:ea typeface="Times" panose="02020603060405020304" pitchFamily="18" charset="0"/>
+                <a:cs typeface="Helvetica" panose="020B0604020202020204" pitchFamily="34" charset="0"/>
+              </a:rPr>
+              <a:t>)</a:t>
+            </a:r>
+          </a:p>
+          <a:p>
+            <a:pPr marL="800100" lvl="1" indent="-342900" algn="l">
+              <a:lnSpc>
+                <a:spcPct val="115000"/>
+              </a:lnSpc>
+              <a:spcBef>
+                <a:spcPts val="600"/>
+              </a:spcBef>
+              <a:buFont typeface="Wingdings" panose="05000000000000000000" pitchFamily="2" charset="2"/>
+              <a:buChar char="§"/>
+            </a:pPr>
+            <a:r>
+              <a:rPr lang="en-US" sz="1400" b="0" dirty="0">
+                <a:latin typeface="Helvetica" panose="020B0604020202020204" pitchFamily="34" charset="0"/>
+                <a:ea typeface="Times" panose="02020603060405020304" pitchFamily="18" charset="0"/>
+                <a:cs typeface="Helvetica" panose="020B0604020202020204" pitchFamily="34" charset="0"/>
+              </a:rPr>
+              <a:t>Warnings vs. Errors:</a:t>
+            </a:r>
+          </a:p>
+          <a:p>
+            <a:pPr marL="1257300" lvl="2" indent="-342900" algn="l">
+              <a:lnSpc>
+                <a:spcPct val="115000"/>
+              </a:lnSpc>
+              <a:spcBef>
+                <a:spcPts val="600"/>
+              </a:spcBef>
+              <a:buFont typeface="Wingdings" panose="05000000000000000000" pitchFamily="2" charset="2"/>
+              <a:buChar char="§"/>
+            </a:pPr>
+            <a:r>
+              <a:rPr lang="en-US" sz="1400" b="0" dirty="0">
+                <a:latin typeface="Helvetica" panose="020B0604020202020204" pitchFamily="34" charset="0"/>
+                <a:ea typeface="Times" panose="02020603060405020304" pitchFamily="18" charset="0"/>
+                <a:cs typeface="Helvetica" panose="020B0604020202020204" pitchFamily="34" charset="0"/>
+              </a:rPr>
+              <a:t>A valid XML results file is only created if no errors occur (non-conformity with requirements in regulation)</a:t>
+            </a:r>
+          </a:p>
+          <a:p>
+            <a:pPr marL="1257300" lvl="2" indent="-342900" algn="l">
+              <a:lnSpc>
+                <a:spcPct val="115000"/>
+              </a:lnSpc>
+              <a:spcBef>
+                <a:spcPts val="600"/>
+              </a:spcBef>
+              <a:buFont typeface="Wingdings" panose="05000000000000000000" pitchFamily="2" charset="2"/>
+              <a:buChar char="§"/>
+            </a:pPr>
+            <a:r>
+              <a:rPr lang="en-US" sz="1400" b="0" dirty="0">
+                <a:latin typeface="Helvetica" panose="020B0604020202020204" pitchFamily="34" charset="0"/>
+                <a:ea typeface="Times" panose="02020603060405020304" pitchFamily="18" charset="0"/>
+                <a:cs typeface="Helvetica" panose="020B0604020202020204" pitchFamily="34" charset="0"/>
+              </a:rPr>
+              <a:t>Warnings give a hint that something might be wrong with the input data</a:t>
             </a:r>
             <a:br>
-              <a:rPr lang="en-GB" sz="1400" b="0" dirty="0" smtClean="0"/>
+              <a:rPr lang="en-US" sz="1400" b="0" dirty="0">
+                <a:latin typeface="Helvetica" panose="020B0604020202020204" pitchFamily="34" charset="0"/>
+                <a:ea typeface="Times" panose="02020603060405020304" pitchFamily="18" charset="0"/>
+                <a:cs typeface="Helvetica" panose="020B0604020202020204" pitchFamily="34" charset="0"/>
+              </a:rPr>
             </a:br>
             <a:r>
-              <a:rPr lang="en-GB" sz="1400" b="0" dirty="0" smtClean="0"/>
-              <a:t>	Annex </a:t>
-            </a:r>
-            <a:r>
-              <a:rPr lang="en-GB" sz="1400" b="0" dirty="0"/>
-              <a:t>was used during testing, the correction in accordance with points (7.1) to (7.4) is </a:t>
-            </a:r>
-            <a:r>
-              <a:rPr lang="en-GB" sz="1400" b="0" dirty="0" smtClean="0"/>
-              <a:t>not</a:t>
+              <a:rPr lang="en-US" sz="1400" b="0" dirty="0">
+                <a:latin typeface="Helvetica" panose="020B0604020202020204" pitchFamily="34" charset="0"/>
+                <a:ea typeface="Times" panose="02020603060405020304" pitchFamily="18" charset="0"/>
+                <a:cs typeface="Helvetica" panose="020B0604020202020204" pitchFamily="34" charset="0"/>
+                <a:sym typeface="Wingdings" panose="05000000000000000000" pitchFamily="2" charset="2"/>
+              </a:rPr>
+              <a:t> </a:t>
+            </a:r>
+            <a:r>
+              <a:rPr lang="en-US" sz="1400" b="0" dirty="0">
+                <a:latin typeface="Helvetica" panose="020B0604020202020204" pitchFamily="34" charset="0"/>
+                <a:ea typeface="Times" panose="02020603060405020304" pitchFamily="18" charset="0"/>
+                <a:cs typeface="Helvetica" panose="020B0604020202020204" pitchFamily="34" charset="0"/>
+              </a:rPr>
+              <a:t>XML result file is valid despite warnings</a:t>
             </a:r>
             <a:br>
-              <a:rPr lang="en-GB" sz="1400" b="0" dirty="0" smtClean="0"/>
+              <a:rPr lang="en-US" sz="1400" b="0" dirty="0">
+                <a:latin typeface="Helvetica" panose="020B0604020202020204" pitchFamily="34" charset="0"/>
+                <a:ea typeface="Times" panose="02020603060405020304" pitchFamily="18" charset="0"/>
+                <a:cs typeface="Helvetica" panose="020B0604020202020204" pitchFamily="34" charset="0"/>
+              </a:rPr>
             </a:br>
             <a:r>
-              <a:rPr lang="en-GB" sz="1400" b="0" dirty="0" smtClean="0"/>
-              <a:t>	performed</a:t>
-            </a:r>
-            <a:r>
-              <a:rPr lang="en-GB" sz="1400" b="0" dirty="0"/>
-              <a:t>.</a:t>
-            </a:r>
-            <a:endParaRPr lang="de-AT" sz="1400" b="0" dirty="0"/>
-          </a:p>
-          <a:p>
-            <a:pPr algn="l"/>
-            <a:r>
-              <a:rPr lang="en-GB" sz="1400" b="0" dirty="0"/>
-              <a:t>8.	Converting of engine full load and motoring torque values of the actual engine for certification to </a:t>
-            </a:r>
-            <a:r>
-              <a:rPr lang="en-GB" sz="1400" b="0" dirty="0" smtClean="0"/>
-              <a:t>a</a:t>
-            </a:r>
-            <a:br>
-              <a:rPr lang="en-GB" sz="1400" b="0" dirty="0" smtClean="0"/>
-            </a:br>
-            <a:r>
-              <a:rPr lang="en-GB" sz="1400" b="0" dirty="0" smtClean="0"/>
-              <a:t>	logging </a:t>
-            </a:r>
-            <a:r>
-              <a:rPr lang="en-GB" sz="1400" b="0" dirty="0"/>
-              <a:t>frequency of the engine speed of 8 min</a:t>
-            </a:r>
-            <a:r>
-              <a:rPr lang="en-GB" sz="1400" b="0" baseline="30000" dirty="0"/>
-              <a:t>-1</a:t>
-            </a:r>
-            <a:endParaRPr lang="de-AT" sz="1400" b="0" dirty="0"/>
-          </a:p>
-          <a:p>
-            <a:pPr algn="l"/>
-            <a:r>
-              <a:rPr lang="en-GB" sz="1400" b="0" dirty="0"/>
-              <a:t>8.1.	If the average logging frequency of the engine speed of the originally recorded full load curve </a:t>
-            </a:r>
-            <a:r>
-              <a:rPr lang="en-GB" sz="1400" b="0" dirty="0" smtClean="0"/>
-              <a:t>is</a:t>
-            </a:r>
-            <a:br>
-              <a:rPr lang="en-GB" sz="1400" b="0" dirty="0" smtClean="0"/>
-            </a:br>
-            <a:r>
-              <a:rPr lang="en-GB" sz="1400" b="0" dirty="0" smtClean="0"/>
-              <a:t>	smaller </a:t>
-            </a:r>
-            <a:r>
-              <a:rPr lang="en-GB" sz="1400" b="0" dirty="0"/>
-              <a:t>than 6, the conversion is performed by arithmetical averaging over intervals of ± 4 min</a:t>
-            </a:r>
-            <a:r>
-              <a:rPr lang="en-GB" sz="1400" b="0" baseline="30000" dirty="0"/>
-              <a:t>-1</a:t>
-            </a:r>
-            <a:r>
-              <a:rPr lang="en-GB" sz="1400" b="0" dirty="0"/>
-              <a:t> </a:t>
-            </a:r>
-            <a:r>
-              <a:rPr lang="en-GB" sz="1400" b="0" dirty="0" smtClean="0"/>
-              <a:t>of</a:t>
-            </a:r>
-            <a:br>
-              <a:rPr lang="en-GB" sz="1400" b="0" dirty="0" smtClean="0"/>
-            </a:br>
-            <a:r>
-              <a:rPr lang="en-GB" sz="1400" b="0" dirty="0" smtClean="0"/>
-              <a:t>	the </a:t>
-            </a:r>
-            <a:r>
-              <a:rPr lang="en-GB" sz="1400" b="0" dirty="0"/>
-              <a:t>given </a:t>
-            </a:r>
-            <a:r>
-              <a:rPr lang="en-GB" sz="1400" b="0" dirty="0" err="1"/>
-              <a:t>setpoint</a:t>
-            </a:r>
-            <a:r>
-              <a:rPr lang="en-GB" sz="1400" b="0" dirty="0"/>
-              <a:t> for the output data based on the full load curve input in originally </a:t>
-            </a:r>
-            <a:r>
-              <a:rPr lang="en-GB" sz="1400" b="0" dirty="0" smtClean="0"/>
-              <a:t>recorded</a:t>
-            </a:r>
-            <a:br>
-              <a:rPr lang="en-GB" sz="1400" b="0" dirty="0" smtClean="0"/>
-            </a:br>
-            <a:r>
-              <a:rPr lang="en-GB" sz="1400" b="0" dirty="0" smtClean="0"/>
-              <a:t>	resolution</a:t>
-            </a:r>
-            <a:r>
-              <a:rPr lang="en-GB" sz="1400" b="0" dirty="0"/>
-              <a:t>. If the average logging frequency of the engine speed of the originally recorded full </a:t>
-            </a:r>
-            <a:r>
-              <a:rPr lang="en-GB" sz="1400" b="0" dirty="0" smtClean="0"/>
-              <a:t>load</a:t>
-            </a:r>
-            <a:br>
-              <a:rPr lang="en-GB" sz="1400" b="0" dirty="0" smtClean="0"/>
-            </a:br>
-            <a:r>
-              <a:rPr lang="en-GB" sz="1400" b="0" dirty="0" smtClean="0"/>
-              <a:t>	curve </a:t>
-            </a:r>
-            <a:r>
-              <a:rPr lang="en-GB" sz="1400" b="0" dirty="0"/>
-              <a:t>is greater than or equal to 6, the conversion is performed by linear interpolation based </a:t>
-            </a:r>
-            <a:r>
-              <a:rPr lang="en-GB" sz="1400" b="0" dirty="0" smtClean="0"/>
-              <a:t>on</a:t>
-            </a:r>
-            <a:br>
-              <a:rPr lang="en-GB" sz="1400" b="0" dirty="0" smtClean="0"/>
-            </a:br>
-            <a:r>
-              <a:rPr lang="en-GB" sz="1400" b="0" dirty="0" smtClean="0"/>
-              <a:t>	the full </a:t>
-            </a:r>
-            <a:r>
-              <a:rPr lang="en-GB" sz="1400" b="0" dirty="0"/>
-              <a:t>load curve input in originally recorded resolution.</a:t>
-            </a:r>
-            <a:endParaRPr lang="de-AT" sz="1400" b="0" dirty="0"/>
+              <a:rPr lang="en-US" sz="1400" b="0" dirty="0">
+                <a:latin typeface="Helvetica" panose="020B0604020202020204" pitchFamily="34" charset="0"/>
+                <a:ea typeface="Times" panose="02020603060405020304" pitchFamily="18" charset="0"/>
+                <a:cs typeface="Helvetica" panose="020B0604020202020204" pitchFamily="34" charset="0"/>
+                <a:sym typeface="Wingdings" panose="05000000000000000000" pitchFamily="2" charset="2"/>
+              </a:rPr>
+              <a:t> </a:t>
+            </a:r>
+            <a:r>
+              <a:rPr lang="en-US" sz="1400" b="0" u="sng" dirty="0">
+                <a:latin typeface="Helvetica" panose="020B0604020202020204" pitchFamily="34" charset="0"/>
+                <a:ea typeface="Times" panose="02020603060405020304" pitchFamily="18" charset="0"/>
+                <a:cs typeface="Helvetica" panose="020B0604020202020204" pitchFamily="34" charset="0"/>
+                <a:sym typeface="Wingdings" panose="05000000000000000000" pitchFamily="2" charset="2"/>
+              </a:rPr>
+              <a:t>BUT:</a:t>
+            </a:r>
+            <a:r>
+              <a:rPr lang="en-US" sz="1400" b="0" dirty="0">
+                <a:latin typeface="Helvetica" panose="020B0604020202020204" pitchFamily="34" charset="0"/>
+                <a:ea typeface="Times" panose="02020603060405020304" pitchFamily="18" charset="0"/>
+                <a:cs typeface="Helvetica" panose="020B0604020202020204" pitchFamily="34" charset="0"/>
+              </a:rPr>
+              <a:t> warnings should be investigated together with TAA / technical service</a:t>
+            </a:r>
+          </a:p>
+          <a:p>
+            <a:pPr marL="342900" indent="-342900" algn="l">
+              <a:lnSpc>
+                <a:spcPct val="115000"/>
+              </a:lnSpc>
+              <a:spcBef>
+                <a:spcPts val="600"/>
+              </a:spcBef>
+              <a:buFont typeface="Wingdings" panose="05000000000000000000" pitchFamily="2" charset="2"/>
+              <a:buChar char="§"/>
+            </a:pPr>
+            <a:endParaRPr lang="en-US" b="0" dirty="0" smtClean="0">
+              <a:latin typeface="Helvetica" panose="020B0604020202020204" pitchFamily="34" charset="0"/>
+              <a:ea typeface="Times" panose="02020603060405020304" pitchFamily="18" charset="0"/>
+              <a:cs typeface="Helvetica" panose="020B0604020202020204" pitchFamily="34" charset="0"/>
+            </a:endParaRPr>
+          </a:p>
+          <a:p>
+            <a:pPr marL="342900" indent="-342900" algn="l">
+              <a:lnSpc>
+                <a:spcPct val="115000"/>
+              </a:lnSpc>
+              <a:spcBef>
+                <a:spcPts val="600"/>
+              </a:spcBef>
+              <a:buFont typeface="Wingdings" panose="05000000000000000000" pitchFamily="2" charset="2"/>
+              <a:buChar char="§"/>
+            </a:pPr>
+            <a:r>
+              <a:rPr lang="en-US" b="0" dirty="0" smtClean="0">
+                <a:latin typeface="Helvetica" panose="020B0604020202020204" pitchFamily="34" charset="0"/>
+                <a:ea typeface="Times" panose="02020603060405020304" pitchFamily="18" charset="0"/>
+                <a:cs typeface="Helvetica" panose="020B0604020202020204" pitchFamily="34" charset="0"/>
+              </a:rPr>
+              <a:t>Only </a:t>
+            </a:r>
+            <a:r>
+              <a:rPr lang="en-US" b="0" dirty="0">
+                <a:latin typeface="Helvetica" panose="020B0604020202020204" pitchFamily="34" charset="0"/>
+                <a:ea typeface="Times" panose="02020603060405020304" pitchFamily="18" charset="0"/>
+                <a:cs typeface="Helvetica" panose="020B0604020202020204" pitchFamily="34" charset="0"/>
+              </a:rPr>
+              <a:t>one single XML file is created as output</a:t>
+            </a:r>
+          </a:p>
+          <a:p>
+            <a:pPr marL="800100" lvl="1" indent="-342900" algn="l">
+              <a:spcBef>
+                <a:spcPts val="600"/>
+              </a:spcBef>
+              <a:buFont typeface="Wingdings" panose="05000000000000000000" pitchFamily="2" charset="2"/>
+              <a:buChar char="§"/>
+            </a:pPr>
+            <a:r>
+              <a:rPr lang="en-US" sz="1400" b="0" dirty="0">
+                <a:latin typeface="Helvetica" panose="020B0604020202020204" pitchFamily="34" charset="0"/>
+                <a:ea typeface="Times" panose="02020603060405020304" pitchFamily="18" charset="0"/>
+                <a:cs typeface="Helvetica" panose="020B0604020202020204" pitchFamily="34" charset="0"/>
+              </a:rPr>
+              <a:t>File already hashed</a:t>
+            </a:r>
+          </a:p>
+          <a:p>
+            <a:pPr marL="800100" lvl="1" indent="-342900" algn="l">
+              <a:lnSpc>
+                <a:spcPct val="115000"/>
+              </a:lnSpc>
+              <a:spcBef>
+                <a:spcPts val="600"/>
+              </a:spcBef>
+              <a:buFont typeface="Wingdings" panose="05000000000000000000" pitchFamily="2" charset="2"/>
+              <a:buChar char="§"/>
+            </a:pPr>
+            <a:r>
+              <a:rPr lang="en-US" sz="1400" b="0" dirty="0">
+                <a:latin typeface="Helvetica" panose="020B0604020202020204" pitchFamily="34" charset="0"/>
+                <a:ea typeface="Times" panose="02020603060405020304" pitchFamily="18" charset="0"/>
+                <a:cs typeface="Helvetica" panose="020B0604020202020204" pitchFamily="34" charset="0"/>
+              </a:rPr>
+              <a:t>Ready for use in VECTO vehicle simulation for declaration</a:t>
+            </a:r>
           </a:p>
         </p:txBody>
       </p:sp>
     </p:spTree>
     <p:extLst>
       <p:ext uri="{BB962C8B-B14F-4D97-AF65-F5344CB8AC3E}">
-        <p14:creationId xmlns:p14="http://schemas.microsoft.com/office/powerpoint/2010/main" val="1299610377"/>
+        <p14:creationId xmlns:p14="http://schemas.microsoft.com/office/powerpoint/2010/main" val="3655365783"/>
       </p:ext>
     </p:extLst>
   </p:cSld>

--- a/Documentation/TUG_VECTO_Engine_Manual.pptx
+++ b/Documentation/TUG_VECTO_Engine_Manual.pptx
@@ -4855,8 +4855,11 @@
               <a:rPr lang="en-US" sz="1800" dirty="0" smtClean="0">
                 <a:sym typeface="Wingdings" panose="05000000000000000000" pitchFamily="2" charset="2"/>
               </a:rPr>
-              <a:t>17.12.2019</a:t>
-            </a:r>
+              <a:t>01.06.2022</a:t>
+            </a:r>
+            <a:endParaRPr lang="en-US" sz="1800" dirty="0" smtClean="0">
+              <a:sym typeface="Wingdings" panose="05000000000000000000" pitchFamily="2" charset="2"/>
+            </a:endParaRPr>
           </a:p>
         </p:txBody>
       </p:sp>
@@ -5081,7 +5084,7 @@
                 <a:latin typeface="Helvetica" panose="020B0604020202020204" pitchFamily="34" charset="0"/>
                 <a:cs typeface="Helvetica" panose="020B0604020202020204" pitchFamily="34" charset="0"/>
               </a:rPr>
-              <a:t>https://</a:t>
+              <a:t>https</a:t>
             </a:r>
             <a:r>
               <a:rPr lang="en-US" sz="1600" u="sng" dirty="0" smtClean="0">
@@ -5091,8 +5094,15 @@
                 <a:latin typeface="Helvetica" panose="020B0604020202020204" pitchFamily="34" charset="0"/>
                 <a:cs typeface="Helvetica" panose="020B0604020202020204" pitchFamily="34" charset="0"/>
               </a:rPr>
-              <a:t>webgate.ec.europa.eu/CITnet/jira/projects/VECTO/issues</a:t>
-            </a:r>
+              <a:t>://citnet.tech.ec.europa.eu/CITnet/jira/projects/VECTO/issues</a:t>
+            </a:r>
+            <a:endParaRPr lang="en-US" sz="1600" u="sng" dirty="0" smtClean="0">
+              <a:solidFill>
+                <a:srgbClr val="00B0F0"/>
+              </a:solidFill>
+              <a:latin typeface="Helvetica" panose="020B0604020202020204" pitchFamily="34" charset="0"/>
+              <a:cs typeface="Helvetica" panose="020B0604020202020204" pitchFamily="34" charset="0"/>
+            </a:endParaRPr>
           </a:p>
           <a:p>
             <a:pPr>
@@ -5140,24 +5150,14 @@
               <a:t>https</a:t>
             </a:r>
             <a:r>
-              <a:rPr lang="en-US" sz="1400" u="sng" dirty="0">
+              <a:rPr lang="en-US" sz="1400" u="sng" dirty="0" smtClean="0">
                 <a:solidFill>
                   <a:srgbClr val="00B0F0"/>
                 </a:solidFill>
                 <a:latin typeface="Helvetica" panose="020B0604020202020204" pitchFamily="34" charset="0"/>
                 <a:cs typeface="Helvetica" panose="020B0604020202020204" pitchFamily="34" charset="0"/>
               </a:rPr>
-              <a:t>://</a:t>
-            </a:r>
-            <a:r>
-              <a:rPr lang="en-US" sz="1400" u="sng" dirty="0" smtClean="0">
-                <a:solidFill>
-                  <a:srgbClr val="00B0F0"/>
-                </a:solidFill>
-                <a:latin typeface="Helvetica" panose="020B0604020202020204" pitchFamily="34" charset="0"/>
-                <a:cs typeface="Helvetica" panose="020B0604020202020204" pitchFamily="34" charset="0"/>
-              </a:rPr>
-              <a:t>webgate.ec.europa.eu/CITnet/confluence/display/VECTO/VECTO+Engine+Releases</a:t>
+              <a:t>://citnet.tech.ec.europa.eu/CITnet/confluence/display/VECTO/VECTO+Engine+Releases</a:t>
             </a:r>
             <a:endParaRPr lang="en-US" sz="1400" dirty="0" smtClean="0">
               <a:solidFill>
